--- a/documents/기능 명세서 및 다이어그램 그래픽.pptx
+++ b/documents/기능 명세서 및 다이어그램 그래픽.pptx
@@ -2,26 +2,27 @@
 <file path=ppt/presentation.xml><?xml version="1.0" encoding="utf-8"?>
 <p:presentation xmlns:a="http://schemas.openxmlformats.org/drawingml/2006/main" xmlns:r="http://schemas.openxmlformats.org/officeDocument/2006/relationships" xmlns:p="http://schemas.openxmlformats.org/presentationml/2006/main" embedTrueTypeFonts="1" autoCompressPictures="0">
   <p:sldMasterIdLst>
-    <p:sldMasterId id="2147483660" r:id="rId1"/>
+    <p:sldMasterId id="2147483672" r:id="rId1"/>
   </p:sldMasterIdLst>
   <p:sldIdLst>
     <p:sldId id="256" r:id="rId2"/>
     <p:sldId id="257" r:id="rId3"/>
+    <p:sldId id="258" r:id="rId4"/>
   </p:sldIdLst>
-  <p:sldSz cx="9144000" cy="6858000" type="screen4x3"/>
+  <p:sldSz cx="6858000" cy="9906000" type="A4"/>
   <p:notesSz cx="6858000" cy="9144000"/>
   <p:embeddedFontLst>
     <p:embeddedFont>
-      <p:font typeface="Pretendard" panose="02000503000000020004" pitchFamily="2" charset="-127"/>
-      <p:regular r:id="rId4"/>
-      <p:bold r:id="rId5"/>
+      <p:font typeface="Cascadia Code" panose="020B0609020000020004" pitchFamily="34" charset="0"/>
+      <p:regular r:id="rId5"/>
+      <p:bold r:id="rId6"/>
+      <p:italic r:id="rId7"/>
+      <p:boldItalic r:id="rId8"/>
     </p:embeddedFont>
     <p:embeddedFont>
-      <p:font typeface="Cascadia Code" panose="020B0609020000020004" pitchFamily="34" charset="0"/>
-      <p:regular r:id="rId6"/>
-      <p:bold r:id="rId7"/>
-      <p:italic r:id="rId8"/>
-      <p:boldItalic r:id="rId9"/>
+      <p:font typeface="Pretendard" panose="02000503000000020004" pitchFamily="2" charset="-127"/>
+      <p:regular r:id="rId9"/>
+      <p:bold r:id="rId10"/>
     </p:embeddedFont>
   </p:embeddedFontLst>
   <p:defaultTextStyle>
@@ -156,15 +157,15 @@
         </p:nvSpPr>
         <p:spPr>
           <a:xfrm>
-            <a:off x="685800" y="1122363"/>
-            <a:ext cx="7772400" cy="2387600"/>
+            <a:off x="514350" y="1621191"/>
+            <a:ext cx="5829300" cy="3448756"/>
           </a:xfrm>
         </p:spPr>
         <p:txBody>
           <a:bodyPr anchor="b"/>
           <a:lstStyle>
             <a:lvl1pPr algn="ctr">
-              <a:defRPr sz="6000"/>
+              <a:defRPr sz="4500"/>
             </a:lvl1pPr>
           </a:lstStyle>
           <a:p>
@@ -188,8 +189,8 @@
         </p:nvSpPr>
         <p:spPr>
           <a:xfrm>
-            <a:off x="1143000" y="3602038"/>
-            <a:ext cx="6858000" cy="1655762"/>
+            <a:off x="857250" y="5202944"/>
+            <a:ext cx="5143500" cy="2391656"/>
           </a:xfrm>
         </p:spPr>
         <p:txBody>
@@ -197,39 +198,39 @@
           <a:lstStyle>
             <a:lvl1pPr marL="0" indent="0" algn="ctr">
               <a:buNone/>
-              <a:defRPr sz="2400"/>
+              <a:defRPr sz="1800"/>
             </a:lvl1pPr>
-            <a:lvl2pPr marL="457200" indent="0" algn="ctr">
+            <a:lvl2pPr marL="342900" indent="0" algn="ctr">
               <a:buNone/>
-              <a:defRPr sz="2000"/>
+              <a:defRPr sz="1500"/>
             </a:lvl2pPr>
-            <a:lvl3pPr marL="914400" indent="0" algn="ctr">
+            <a:lvl3pPr marL="685800" indent="0" algn="ctr">
               <a:buNone/>
-              <a:defRPr sz="1800"/>
+              <a:defRPr sz="1350"/>
             </a:lvl3pPr>
-            <a:lvl4pPr marL="1371600" indent="0" algn="ctr">
+            <a:lvl4pPr marL="1028700" indent="0" algn="ctr">
               <a:buNone/>
-              <a:defRPr sz="1600"/>
+              <a:defRPr sz="1200"/>
             </a:lvl4pPr>
-            <a:lvl5pPr marL="1828800" indent="0" algn="ctr">
+            <a:lvl5pPr marL="1371600" indent="0" algn="ctr">
               <a:buNone/>
-              <a:defRPr sz="1600"/>
+              <a:defRPr sz="1200"/>
             </a:lvl5pPr>
-            <a:lvl6pPr marL="2286000" indent="0" algn="ctr">
+            <a:lvl6pPr marL="1714500" indent="0" algn="ctr">
               <a:buNone/>
-              <a:defRPr sz="1600"/>
+              <a:defRPr sz="1200"/>
             </a:lvl6pPr>
-            <a:lvl7pPr marL="2743200" indent="0" algn="ctr">
+            <a:lvl7pPr marL="2057400" indent="0" algn="ctr">
               <a:buNone/>
-              <a:defRPr sz="1600"/>
+              <a:defRPr sz="1200"/>
             </a:lvl7pPr>
-            <a:lvl8pPr marL="3200400" indent="0" algn="ctr">
+            <a:lvl8pPr marL="2400300" indent="0" algn="ctr">
               <a:buNone/>
-              <a:defRPr sz="1600"/>
+              <a:defRPr sz="1200"/>
             </a:lvl8pPr>
-            <a:lvl9pPr marL="3657600" indent="0" algn="ctr">
+            <a:lvl9pPr marL="2743200" indent="0" algn="ctr">
               <a:buNone/>
-              <a:defRPr sz="1600"/>
+              <a:defRPr sz="1200"/>
             </a:lvl9pPr>
           </a:lstStyle>
           <a:p>
@@ -258,7 +259,7 @@
           <a:p>
             <a:fld id="{FBCF496E-1423-0F43-9D3A-7484EF9BE24D}" type="datetimeFigureOut">
               <a:rPr lang="en-KR" smtClean="0"/>
-              <a:t>10/22/25</a:t>
+              <a:t>10/23/25</a:t>
             </a:fld>
             <a:endParaRPr lang="en-KR"/>
           </a:p>
@@ -309,7 +310,7 @@
     </p:spTree>
     <p:extLst>
       <p:ext uri="{BB962C8B-B14F-4D97-AF65-F5344CB8AC3E}">
-        <p14:creationId xmlns:p14="http://schemas.microsoft.com/office/powerpoint/2010/main" val="1886009180"/>
+        <p14:creationId xmlns:p14="http://schemas.microsoft.com/office/powerpoint/2010/main" val="2521055582"/>
       </p:ext>
     </p:extLst>
   </p:cSld>
@@ -428,7 +429,7 @@
           <a:p>
             <a:fld id="{FBCF496E-1423-0F43-9D3A-7484EF9BE24D}" type="datetimeFigureOut">
               <a:rPr lang="en-KR" smtClean="0"/>
-              <a:t>10/22/25</a:t>
+              <a:t>10/23/25</a:t>
             </a:fld>
             <a:endParaRPr lang="en-KR"/>
           </a:p>
@@ -479,7 +480,7 @@
     </p:spTree>
     <p:extLst>
       <p:ext uri="{BB962C8B-B14F-4D97-AF65-F5344CB8AC3E}">
-        <p14:creationId xmlns:p14="http://schemas.microsoft.com/office/powerpoint/2010/main" val="4285034546"/>
+        <p14:creationId xmlns:p14="http://schemas.microsoft.com/office/powerpoint/2010/main" val="1982000774"/>
       </p:ext>
     </p:extLst>
   </p:cSld>
@@ -518,8 +519,8 @@
         </p:nvSpPr>
         <p:spPr>
           <a:xfrm>
-            <a:off x="6543675" y="365125"/>
-            <a:ext cx="1971675" cy="5811838"/>
+            <a:off x="4907757" y="527403"/>
+            <a:ext cx="1478756" cy="8394877"/>
           </a:xfrm>
         </p:spPr>
         <p:txBody>
@@ -546,8 +547,8 @@
         </p:nvSpPr>
         <p:spPr>
           <a:xfrm>
-            <a:off x="628650" y="365125"/>
-            <a:ext cx="5800725" cy="5811838"/>
+            <a:off x="471488" y="527403"/>
+            <a:ext cx="4350544" cy="8394877"/>
           </a:xfrm>
         </p:spPr>
         <p:txBody>
@@ -608,7 +609,7 @@
           <a:p>
             <a:fld id="{FBCF496E-1423-0F43-9D3A-7484EF9BE24D}" type="datetimeFigureOut">
               <a:rPr lang="en-KR" smtClean="0"/>
-              <a:t>10/22/25</a:t>
+              <a:t>10/23/25</a:t>
             </a:fld>
             <a:endParaRPr lang="en-KR"/>
           </a:p>
@@ -659,7 +660,7 @@
     </p:spTree>
     <p:extLst>
       <p:ext uri="{BB962C8B-B14F-4D97-AF65-F5344CB8AC3E}">
-        <p14:creationId xmlns:p14="http://schemas.microsoft.com/office/powerpoint/2010/main" val="2476374780"/>
+        <p14:creationId xmlns:p14="http://schemas.microsoft.com/office/powerpoint/2010/main" val="1427070215"/>
       </p:ext>
     </p:extLst>
   </p:cSld>
@@ -778,7 +779,7 @@
           <a:p>
             <a:fld id="{FBCF496E-1423-0F43-9D3A-7484EF9BE24D}" type="datetimeFigureOut">
               <a:rPr lang="en-KR" smtClean="0"/>
-              <a:t>10/22/25</a:t>
+              <a:t>10/23/25</a:t>
             </a:fld>
             <a:endParaRPr lang="en-KR"/>
           </a:p>
@@ -829,7 +830,7 @@
     </p:spTree>
     <p:extLst>
       <p:ext uri="{BB962C8B-B14F-4D97-AF65-F5344CB8AC3E}">
-        <p14:creationId xmlns:p14="http://schemas.microsoft.com/office/powerpoint/2010/main" val="1658162223"/>
+        <p14:creationId xmlns:p14="http://schemas.microsoft.com/office/powerpoint/2010/main" val="3579173705"/>
       </p:ext>
     </p:extLst>
   </p:cSld>
@@ -868,15 +869,15 @@
         </p:nvSpPr>
         <p:spPr>
           <a:xfrm>
-            <a:off x="623888" y="1709739"/>
-            <a:ext cx="7886700" cy="2852737"/>
+            <a:off x="467916" y="2469624"/>
+            <a:ext cx="5915025" cy="4120620"/>
           </a:xfrm>
         </p:spPr>
         <p:txBody>
           <a:bodyPr anchor="b"/>
           <a:lstStyle>
             <a:lvl1pPr>
-              <a:defRPr sz="6000"/>
+              <a:defRPr sz="4500"/>
             </a:lvl1pPr>
           </a:lstStyle>
           <a:p>
@@ -900,8 +901,8 @@
         </p:nvSpPr>
         <p:spPr>
           <a:xfrm>
-            <a:off x="623888" y="4589464"/>
-            <a:ext cx="7886700" cy="1500187"/>
+            <a:off x="467916" y="6629226"/>
+            <a:ext cx="5915025" cy="2166937"/>
           </a:xfrm>
         </p:spPr>
         <p:txBody>
@@ -909,7 +910,7 @@
           <a:lstStyle>
             <a:lvl1pPr marL="0" indent="0">
               <a:buNone/>
-              <a:defRPr sz="2400">
+              <a:defRPr sz="1800">
                 <a:solidFill>
                   <a:schemeClr val="tx1">
                     <a:tint val="82000"/>
@@ -917,9 +918,9 @@
                 </a:solidFill>
               </a:defRPr>
             </a:lvl1pPr>
-            <a:lvl2pPr marL="457200" indent="0">
+            <a:lvl2pPr marL="342900" indent="0">
               <a:buNone/>
-              <a:defRPr sz="2000">
+              <a:defRPr sz="1500">
                 <a:solidFill>
                   <a:schemeClr val="tx1">
                     <a:tint val="82000"/>
@@ -927,9 +928,9 @@
                 </a:solidFill>
               </a:defRPr>
             </a:lvl2pPr>
-            <a:lvl3pPr marL="914400" indent="0">
+            <a:lvl3pPr marL="685800" indent="0">
               <a:buNone/>
-              <a:defRPr sz="1800">
+              <a:defRPr sz="1350">
                 <a:solidFill>
                   <a:schemeClr val="tx1">
                     <a:tint val="82000"/>
@@ -937,9 +938,9 @@
                 </a:solidFill>
               </a:defRPr>
             </a:lvl3pPr>
-            <a:lvl4pPr marL="1371600" indent="0">
+            <a:lvl4pPr marL="1028700" indent="0">
               <a:buNone/>
-              <a:defRPr sz="1600">
+              <a:defRPr sz="1200">
                 <a:solidFill>
                   <a:schemeClr val="tx1">
                     <a:tint val="82000"/>
@@ -947,9 +948,9 @@
                 </a:solidFill>
               </a:defRPr>
             </a:lvl4pPr>
-            <a:lvl5pPr marL="1828800" indent="0">
+            <a:lvl5pPr marL="1371600" indent="0">
               <a:buNone/>
-              <a:defRPr sz="1600">
+              <a:defRPr sz="1200">
                 <a:solidFill>
                   <a:schemeClr val="tx1">
                     <a:tint val="82000"/>
@@ -957,9 +958,9 @@
                 </a:solidFill>
               </a:defRPr>
             </a:lvl5pPr>
-            <a:lvl6pPr marL="2286000" indent="0">
+            <a:lvl6pPr marL="1714500" indent="0">
               <a:buNone/>
-              <a:defRPr sz="1600">
+              <a:defRPr sz="1200">
                 <a:solidFill>
                   <a:schemeClr val="tx1">
                     <a:tint val="82000"/>
@@ -967,9 +968,9 @@
                 </a:solidFill>
               </a:defRPr>
             </a:lvl6pPr>
-            <a:lvl7pPr marL="2743200" indent="0">
+            <a:lvl7pPr marL="2057400" indent="0">
               <a:buNone/>
-              <a:defRPr sz="1600">
+              <a:defRPr sz="1200">
                 <a:solidFill>
                   <a:schemeClr val="tx1">
                     <a:tint val="82000"/>
@@ -977,9 +978,9 @@
                 </a:solidFill>
               </a:defRPr>
             </a:lvl7pPr>
-            <a:lvl8pPr marL="3200400" indent="0">
+            <a:lvl8pPr marL="2400300" indent="0">
               <a:buNone/>
-              <a:defRPr sz="1600">
+              <a:defRPr sz="1200">
                 <a:solidFill>
                   <a:schemeClr val="tx1">
                     <a:tint val="82000"/>
@@ -987,9 +988,9 @@
                 </a:solidFill>
               </a:defRPr>
             </a:lvl8pPr>
-            <a:lvl9pPr marL="3657600" indent="0">
+            <a:lvl9pPr marL="2743200" indent="0">
               <a:buNone/>
-              <a:defRPr sz="1600">
+              <a:defRPr sz="1200">
                 <a:solidFill>
                   <a:schemeClr val="tx1">
                     <a:tint val="82000"/>
@@ -1024,7 +1025,7 @@
           <a:p>
             <a:fld id="{FBCF496E-1423-0F43-9D3A-7484EF9BE24D}" type="datetimeFigureOut">
               <a:rPr lang="en-KR" smtClean="0"/>
-              <a:t>10/22/25</a:t>
+              <a:t>10/23/25</a:t>
             </a:fld>
             <a:endParaRPr lang="en-KR"/>
           </a:p>
@@ -1075,7 +1076,7 @@
     </p:spTree>
     <p:extLst>
       <p:ext uri="{BB962C8B-B14F-4D97-AF65-F5344CB8AC3E}">
-        <p14:creationId xmlns:p14="http://schemas.microsoft.com/office/powerpoint/2010/main" val="2247083233"/>
+        <p14:creationId xmlns:p14="http://schemas.microsoft.com/office/powerpoint/2010/main" val="3104920734"/>
       </p:ext>
     </p:extLst>
   </p:cSld>
@@ -1137,8 +1138,8 @@
         </p:nvSpPr>
         <p:spPr>
           <a:xfrm>
-            <a:off x="628650" y="1825625"/>
-            <a:ext cx="3886200" cy="4351338"/>
+            <a:off x="471488" y="2637014"/>
+            <a:ext cx="2914650" cy="6285266"/>
           </a:xfrm>
         </p:spPr>
         <p:txBody>
@@ -1194,8 +1195,8 @@
         </p:nvSpPr>
         <p:spPr>
           <a:xfrm>
-            <a:off x="4629150" y="1825625"/>
-            <a:ext cx="3886200" cy="4351338"/>
+            <a:off x="3471863" y="2637014"/>
+            <a:ext cx="2914650" cy="6285266"/>
           </a:xfrm>
         </p:spPr>
         <p:txBody>
@@ -1256,7 +1257,7 @@
           <a:p>
             <a:fld id="{FBCF496E-1423-0F43-9D3A-7484EF9BE24D}" type="datetimeFigureOut">
               <a:rPr lang="en-KR" smtClean="0"/>
-              <a:t>10/22/25</a:t>
+              <a:t>10/23/25</a:t>
             </a:fld>
             <a:endParaRPr lang="en-KR"/>
           </a:p>
@@ -1307,7 +1308,7 @@
     </p:spTree>
     <p:extLst>
       <p:ext uri="{BB962C8B-B14F-4D97-AF65-F5344CB8AC3E}">
-        <p14:creationId xmlns:p14="http://schemas.microsoft.com/office/powerpoint/2010/main" val="2555564791"/>
+        <p14:creationId xmlns:p14="http://schemas.microsoft.com/office/powerpoint/2010/main" val="2418772051"/>
       </p:ext>
     </p:extLst>
   </p:cSld>
@@ -1346,8 +1347,8 @@
         </p:nvSpPr>
         <p:spPr>
           <a:xfrm>
-            <a:off x="629841" y="365126"/>
-            <a:ext cx="7886700" cy="1325563"/>
+            <a:off x="472381" y="527405"/>
+            <a:ext cx="5915025" cy="1914702"/>
           </a:xfrm>
         </p:spPr>
         <p:txBody>
@@ -1374,8 +1375,8 @@
         </p:nvSpPr>
         <p:spPr>
           <a:xfrm>
-            <a:off x="629842" y="1681163"/>
-            <a:ext cx="3868340" cy="823912"/>
+            <a:off x="472381" y="2428347"/>
+            <a:ext cx="2901255" cy="1190095"/>
           </a:xfrm>
         </p:spPr>
         <p:txBody>
@@ -1383,39 +1384,39 @@
           <a:lstStyle>
             <a:lvl1pPr marL="0" indent="0">
               <a:buNone/>
-              <a:defRPr sz="2400" b="1"/>
+              <a:defRPr sz="1800" b="1"/>
             </a:lvl1pPr>
-            <a:lvl2pPr marL="457200" indent="0">
+            <a:lvl2pPr marL="342900" indent="0">
               <a:buNone/>
-              <a:defRPr sz="2000" b="1"/>
+              <a:defRPr sz="1500" b="1"/>
             </a:lvl2pPr>
-            <a:lvl3pPr marL="914400" indent="0">
+            <a:lvl3pPr marL="685800" indent="0">
               <a:buNone/>
-              <a:defRPr sz="1800" b="1"/>
+              <a:defRPr sz="1350" b="1"/>
             </a:lvl3pPr>
-            <a:lvl4pPr marL="1371600" indent="0">
+            <a:lvl4pPr marL="1028700" indent="0">
               <a:buNone/>
-              <a:defRPr sz="1600" b="1"/>
+              <a:defRPr sz="1200" b="1"/>
             </a:lvl4pPr>
-            <a:lvl5pPr marL="1828800" indent="0">
+            <a:lvl5pPr marL="1371600" indent="0">
               <a:buNone/>
-              <a:defRPr sz="1600" b="1"/>
+              <a:defRPr sz="1200" b="1"/>
             </a:lvl5pPr>
-            <a:lvl6pPr marL="2286000" indent="0">
+            <a:lvl6pPr marL="1714500" indent="0">
               <a:buNone/>
-              <a:defRPr sz="1600" b="1"/>
+              <a:defRPr sz="1200" b="1"/>
             </a:lvl6pPr>
-            <a:lvl7pPr marL="2743200" indent="0">
+            <a:lvl7pPr marL="2057400" indent="0">
               <a:buNone/>
-              <a:defRPr sz="1600" b="1"/>
+              <a:defRPr sz="1200" b="1"/>
             </a:lvl7pPr>
-            <a:lvl8pPr marL="3200400" indent="0">
+            <a:lvl8pPr marL="2400300" indent="0">
               <a:buNone/>
-              <a:defRPr sz="1600" b="1"/>
+              <a:defRPr sz="1200" b="1"/>
             </a:lvl8pPr>
-            <a:lvl9pPr marL="3657600" indent="0">
+            <a:lvl9pPr marL="2743200" indent="0">
               <a:buNone/>
-              <a:defRPr sz="1600" b="1"/>
+              <a:defRPr sz="1200" b="1"/>
             </a:lvl9pPr>
           </a:lstStyle>
           <a:p>
@@ -1439,8 +1440,8 @@
         </p:nvSpPr>
         <p:spPr>
           <a:xfrm>
-            <a:off x="629842" y="2505075"/>
-            <a:ext cx="3868340" cy="3684588"/>
+            <a:off x="472381" y="3618442"/>
+            <a:ext cx="2901255" cy="5322183"/>
           </a:xfrm>
         </p:spPr>
         <p:txBody>
@@ -1496,8 +1497,8 @@
         </p:nvSpPr>
         <p:spPr>
           <a:xfrm>
-            <a:off x="4629150" y="1681163"/>
-            <a:ext cx="3887391" cy="823912"/>
+            <a:off x="3471863" y="2428347"/>
+            <a:ext cx="2915543" cy="1190095"/>
           </a:xfrm>
         </p:spPr>
         <p:txBody>
@@ -1505,39 +1506,39 @@
           <a:lstStyle>
             <a:lvl1pPr marL="0" indent="0">
               <a:buNone/>
-              <a:defRPr sz="2400" b="1"/>
+              <a:defRPr sz="1800" b="1"/>
             </a:lvl1pPr>
-            <a:lvl2pPr marL="457200" indent="0">
+            <a:lvl2pPr marL="342900" indent="0">
               <a:buNone/>
-              <a:defRPr sz="2000" b="1"/>
+              <a:defRPr sz="1500" b="1"/>
             </a:lvl2pPr>
-            <a:lvl3pPr marL="914400" indent="0">
+            <a:lvl3pPr marL="685800" indent="0">
               <a:buNone/>
-              <a:defRPr sz="1800" b="1"/>
+              <a:defRPr sz="1350" b="1"/>
             </a:lvl3pPr>
-            <a:lvl4pPr marL="1371600" indent="0">
+            <a:lvl4pPr marL="1028700" indent="0">
               <a:buNone/>
-              <a:defRPr sz="1600" b="1"/>
+              <a:defRPr sz="1200" b="1"/>
             </a:lvl4pPr>
-            <a:lvl5pPr marL="1828800" indent="0">
+            <a:lvl5pPr marL="1371600" indent="0">
               <a:buNone/>
-              <a:defRPr sz="1600" b="1"/>
+              <a:defRPr sz="1200" b="1"/>
             </a:lvl5pPr>
-            <a:lvl6pPr marL="2286000" indent="0">
+            <a:lvl6pPr marL="1714500" indent="0">
               <a:buNone/>
-              <a:defRPr sz="1600" b="1"/>
+              <a:defRPr sz="1200" b="1"/>
             </a:lvl6pPr>
-            <a:lvl7pPr marL="2743200" indent="0">
+            <a:lvl7pPr marL="2057400" indent="0">
               <a:buNone/>
-              <a:defRPr sz="1600" b="1"/>
+              <a:defRPr sz="1200" b="1"/>
             </a:lvl7pPr>
-            <a:lvl8pPr marL="3200400" indent="0">
+            <a:lvl8pPr marL="2400300" indent="0">
               <a:buNone/>
-              <a:defRPr sz="1600" b="1"/>
+              <a:defRPr sz="1200" b="1"/>
             </a:lvl8pPr>
-            <a:lvl9pPr marL="3657600" indent="0">
+            <a:lvl9pPr marL="2743200" indent="0">
               <a:buNone/>
-              <a:defRPr sz="1600" b="1"/>
+              <a:defRPr sz="1200" b="1"/>
             </a:lvl9pPr>
           </a:lstStyle>
           <a:p>
@@ -1561,8 +1562,8 @@
         </p:nvSpPr>
         <p:spPr>
           <a:xfrm>
-            <a:off x="4629150" y="2505075"/>
-            <a:ext cx="3887391" cy="3684588"/>
+            <a:off x="3471863" y="3618442"/>
+            <a:ext cx="2915543" cy="5322183"/>
           </a:xfrm>
         </p:spPr>
         <p:txBody>
@@ -1623,7 +1624,7 @@
           <a:p>
             <a:fld id="{FBCF496E-1423-0F43-9D3A-7484EF9BE24D}" type="datetimeFigureOut">
               <a:rPr lang="en-KR" smtClean="0"/>
-              <a:t>10/22/25</a:t>
+              <a:t>10/23/25</a:t>
             </a:fld>
             <a:endParaRPr lang="en-KR"/>
           </a:p>
@@ -1674,7 +1675,7 @@
     </p:spTree>
     <p:extLst>
       <p:ext uri="{BB962C8B-B14F-4D97-AF65-F5344CB8AC3E}">
-        <p14:creationId xmlns:p14="http://schemas.microsoft.com/office/powerpoint/2010/main" val="4270842554"/>
+        <p14:creationId xmlns:p14="http://schemas.microsoft.com/office/powerpoint/2010/main" val="3601554098"/>
       </p:ext>
     </p:extLst>
   </p:cSld>
@@ -1741,7 +1742,7 @@
           <a:p>
             <a:fld id="{FBCF496E-1423-0F43-9D3A-7484EF9BE24D}" type="datetimeFigureOut">
               <a:rPr lang="en-KR" smtClean="0"/>
-              <a:t>10/22/25</a:t>
+              <a:t>10/23/25</a:t>
             </a:fld>
             <a:endParaRPr lang="en-KR"/>
           </a:p>
@@ -1792,7 +1793,7 @@
     </p:spTree>
     <p:extLst>
       <p:ext uri="{BB962C8B-B14F-4D97-AF65-F5344CB8AC3E}">
-        <p14:creationId xmlns:p14="http://schemas.microsoft.com/office/powerpoint/2010/main" val="3776692254"/>
+        <p14:creationId xmlns:p14="http://schemas.microsoft.com/office/powerpoint/2010/main" val="3110382250"/>
       </p:ext>
     </p:extLst>
   </p:cSld>
@@ -1836,7 +1837,7 @@
           <a:p>
             <a:fld id="{FBCF496E-1423-0F43-9D3A-7484EF9BE24D}" type="datetimeFigureOut">
               <a:rPr lang="en-KR" smtClean="0"/>
-              <a:t>10/22/25</a:t>
+              <a:t>10/23/25</a:t>
             </a:fld>
             <a:endParaRPr lang="en-KR"/>
           </a:p>
@@ -1887,7 +1888,7 @@
     </p:spTree>
     <p:extLst>
       <p:ext uri="{BB962C8B-B14F-4D97-AF65-F5344CB8AC3E}">
-        <p14:creationId xmlns:p14="http://schemas.microsoft.com/office/powerpoint/2010/main" val="638562412"/>
+        <p14:creationId xmlns:p14="http://schemas.microsoft.com/office/powerpoint/2010/main" val="254062130"/>
       </p:ext>
     </p:extLst>
   </p:cSld>
@@ -1926,15 +1927,15 @@
         </p:nvSpPr>
         <p:spPr>
           <a:xfrm>
-            <a:off x="629841" y="457200"/>
-            <a:ext cx="2949178" cy="1600200"/>
+            <a:off x="472381" y="660400"/>
+            <a:ext cx="2211884" cy="2311400"/>
           </a:xfrm>
         </p:spPr>
         <p:txBody>
           <a:bodyPr anchor="b"/>
           <a:lstStyle>
             <a:lvl1pPr>
-              <a:defRPr sz="3200"/>
+              <a:defRPr sz="2400"/>
             </a:lvl1pPr>
           </a:lstStyle>
           <a:p>
@@ -1958,39 +1959,39 @@
         </p:nvSpPr>
         <p:spPr>
           <a:xfrm>
-            <a:off x="3887391" y="987426"/>
-            <a:ext cx="4629150" cy="4873625"/>
+            <a:off x="2915543" y="1426282"/>
+            <a:ext cx="3471863" cy="7039681"/>
           </a:xfrm>
         </p:spPr>
         <p:txBody>
           <a:bodyPr/>
           <a:lstStyle>
             <a:lvl1pPr>
-              <a:defRPr sz="3200"/>
+              <a:defRPr sz="2400"/>
             </a:lvl1pPr>
             <a:lvl2pPr>
-              <a:defRPr sz="2800"/>
+              <a:defRPr sz="2100"/>
             </a:lvl2pPr>
             <a:lvl3pPr>
-              <a:defRPr sz="2400"/>
+              <a:defRPr sz="1800"/>
             </a:lvl3pPr>
             <a:lvl4pPr>
-              <a:defRPr sz="2000"/>
+              <a:defRPr sz="1500"/>
             </a:lvl4pPr>
             <a:lvl5pPr>
-              <a:defRPr sz="2000"/>
+              <a:defRPr sz="1500"/>
             </a:lvl5pPr>
             <a:lvl6pPr>
-              <a:defRPr sz="2000"/>
+              <a:defRPr sz="1500"/>
             </a:lvl6pPr>
             <a:lvl7pPr>
-              <a:defRPr sz="2000"/>
+              <a:defRPr sz="1500"/>
             </a:lvl7pPr>
             <a:lvl8pPr>
-              <a:defRPr sz="2000"/>
+              <a:defRPr sz="1500"/>
             </a:lvl8pPr>
             <a:lvl9pPr>
-              <a:defRPr sz="2000"/>
+              <a:defRPr sz="1500"/>
             </a:lvl9pPr>
           </a:lstStyle>
           <a:p>
@@ -2043,8 +2044,8 @@
         </p:nvSpPr>
         <p:spPr>
           <a:xfrm>
-            <a:off x="629841" y="2057400"/>
-            <a:ext cx="2949178" cy="3811588"/>
+            <a:off x="472381" y="2971800"/>
+            <a:ext cx="2211884" cy="5505627"/>
           </a:xfrm>
         </p:spPr>
         <p:txBody>
@@ -2052,39 +2053,39 @@
           <a:lstStyle>
             <a:lvl1pPr marL="0" indent="0">
               <a:buNone/>
-              <a:defRPr sz="1600"/>
+              <a:defRPr sz="1200"/>
             </a:lvl1pPr>
-            <a:lvl2pPr marL="457200" indent="0">
+            <a:lvl2pPr marL="342900" indent="0">
               <a:buNone/>
-              <a:defRPr sz="1400"/>
+              <a:defRPr sz="1050"/>
             </a:lvl2pPr>
-            <a:lvl3pPr marL="914400" indent="0">
+            <a:lvl3pPr marL="685800" indent="0">
               <a:buNone/>
-              <a:defRPr sz="1200"/>
+              <a:defRPr sz="900"/>
             </a:lvl3pPr>
-            <a:lvl4pPr marL="1371600" indent="0">
+            <a:lvl4pPr marL="1028700" indent="0">
               <a:buNone/>
-              <a:defRPr sz="1000"/>
+              <a:defRPr sz="750"/>
             </a:lvl4pPr>
-            <a:lvl5pPr marL="1828800" indent="0">
+            <a:lvl5pPr marL="1371600" indent="0">
               <a:buNone/>
-              <a:defRPr sz="1000"/>
+              <a:defRPr sz="750"/>
             </a:lvl5pPr>
-            <a:lvl6pPr marL="2286000" indent="0">
+            <a:lvl6pPr marL="1714500" indent="0">
               <a:buNone/>
-              <a:defRPr sz="1000"/>
+              <a:defRPr sz="750"/>
             </a:lvl6pPr>
-            <a:lvl7pPr marL="2743200" indent="0">
+            <a:lvl7pPr marL="2057400" indent="0">
               <a:buNone/>
-              <a:defRPr sz="1000"/>
+              <a:defRPr sz="750"/>
             </a:lvl7pPr>
-            <a:lvl8pPr marL="3200400" indent="0">
+            <a:lvl8pPr marL="2400300" indent="0">
               <a:buNone/>
-              <a:defRPr sz="1000"/>
+              <a:defRPr sz="750"/>
             </a:lvl8pPr>
-            <a:lvl9pPr marL="3657600" indent="0">
+            <a:lvl9pPr marL="2743200" indent="0">
               <a:buNone/>
-              <a:defRPr sz="1000"/>
+              <a:defRPr sz="750"/>
             </a:lvl9pPr>
           </a:lstStyle>
           <a:p>
@@ -2113,7 +2114,7 @@
           <a:p>
             <a:fld id="{FBCF496E-1423-0F43-9D3A-7484EF9BE24D}" type="datetimeFigureOut">
               <a:rPr lang="en-KR" smtClean="0"/>
-              <a:t>10/22/25</a:t>
+              <a:t>10/23/25</a:t>
             </a:fld>
             <a:endParaRPr lang="en-KR"/>
           </a:p>
@@ -2164,7 +2165,7 @@
     </p:spTree>
     <p:extLst>
       <p:ext uri="{BB962C8B-B14F-4D97-AF65-F5344CB8AC3E}">
-        <p14:creationId xmlns:p14="http://schemas.microsoft.com/office/powerpoint/2010/main" val="1278590621"/>
+        <p14:creationId xmlns:p14="http://schemas.microsoft.com/office/powerpoint/2010/main" val="1175309055"/>
       </p:ext>
     </p:extLst>
   </p:cSld>
@@ -2203,15 +2204,15 @@
         </p:nvSpPr>
         <p:spPr>
           <a:xfrm>
-            <a:off x="629841" y="457200"/>
-            <a:ext cx="2949178" cy="1600200"/>
+            <a:off x="472381" y="660400"/>
+            <a:ext cx="2211884" cy="2311400"/>
           </a:xfrm>
         </p:spPr>
         <p:txBody>
           <a:bodyPr anchor="b"/>
           <a:lstStyle>
             <a:lvl1pPr>
-              <a:defRPr sz="3200"/>
+              <a:defRPr sz="2400"/>
             </a:lvl1pPr>
           </a:lstStyle>
           <a:p>
@@ -2235,8 +2236,8 @@
         </p:nvSpPr>
         <p:spPr>
           <a:xfrm>
-            <a:off x="3887391" y="987426"/>
-            <a:ext cx="4629150" cy="4873625"/>
+            <a:off x="2915543" y="1426282"/>
+            <a:ext cx="3471863" cy="7039681"/>
           </a:xfrm>
         </p:spPr>
         <p:txBody>
@@ -2244,39 +2245,39 @@
           <a:lstStyle>
             <a:lvl1pPr marL="0" indent="0">
               <a:buNone/>
-              <a:defRPr sz="3200"/>
+              <a:defRPr sz="2400"/>
             </a:lvl1pPr>
-            <a:lvl2pPr marL="457200" indent="0">
+            <a:lvl2pPr marL="342900" indent="0">
               <a:buNone/>
-              <a:defRPr sz="2800"/>
+              <a:defRPr sz="2100"/>
             </a:lvl2pPr>
-            <a:lvl3pPr marL="914400" indent="0">
+            <a:lvl3pPr marL="685800" indent="0">
               <a:buNone/>
-              <a:defRPr sz="2400"/>
+              <a:defRPr sz="1800"/>
             </a:lvl3pPr>
-            <a:lvl4pPr marL="1371600" indent="0">
+            <a:lvl4pPr marL="1028700" indent="0">
               <a:buNone/>
-              <a:defRPr sz="2000"/>
+              <a:defRPr sz="1500"/>
             </a:lvl4pPr>
-            <a:lvl5pPr marL="1828800" indent="0">
+            <a:lvl5pPr marL="1371600" indent="0">
               <a:buNone/>
-              <a:defRPr sz="2000"/>
+              <a:defRPr sz="1500"/>
             </a:lvl5pPr>
-            <a:lvl6pPr marL="2286000" indent="0">
+            <a:lvl6pPr marL="1714500" indent="0">
               <a:buNone/>
-              <a:defRPr sz="2000"/>
+              <a:defRPr sz="1500"/>
             </a:lvl6pPr>
-            <a:lvl7pPr marL="2743200" indent="0">
+            <a:lvl7pPr marL="2057400" indent="0">
               <a:buNone/>
-              <a:defRPr sz="2000"/>
+              <a:defRPr sz="1500"/>
             </a:lvl7pPr>
-            <a:lvl8pPr marL="3200400" indent="0">
+            <a:lvl8pPr marL="2400300" indent="0">
               <a:buNone/>
-              <a:defRPr sz="2000"/>
+              <a:defRPr sz="1500"/>
             </a:lvl8pPr>
-            <a:lvl9pPr marL="3657600" indent="0">
+            <a:lvl9pPr marL="2743200" indent="0">
               <a:buNone/>
-              <a:defRPr sz="2000"/>
+              <a:defRPr sz="1500"/>
             </a:lvl9pPr>
           </a:lstStyle>
           <a:p>
@@ -2300,8 +2301,8 @@
         </p:nvSpPr>
         <p:spPr>
           <a:xfrm>
-            <a:off x="629841" y="2057400"/>
-            <a:ext cx="2949178" cy="3811588"/>
+            <a:off x="472381" y="2971800"/>
+            <a:ext cx="2211884" cy="5505627"/>
           </a:xfrm>
         </p:spPr>
         <p:txBody>
@@ -2309,39 +2310,39 @@
           <a:lstStyle>
             <a:lvl1pPr marL="0" indent="0">
               <a:buNone/>
-              <a:defRPr sz="1600"/>
+              <a:defRPr sz="1200"/>
             </a:lvl1pPr>
-            <a:lvl2pPr marL="457200" indent="0">
+            <a:lvl2pPr marL="342900" indent="0">
               <a:buNone/>
-              <a:defRPr sz="1400"/>
+              <a:defRPr sz="1050"/>
             </a:lvl2pPr>
-            <a:lvl3pPr marL="914400" indent="0">
+            <a:lvl3pPr marL="685800" indent="0">
               <a:buNone/>
-              <a:defRPr sz="1200"/>
+              <a:defRPr sz="900"/>
             </a:lvl3pPr>
-            <a:lvl4pPr marL="1371600" indent="0">
+            <a:lvl4pPr marL="1028700" indent="0">
               <a:buNone/>
-              <a:defRPr sz="1000"/>
+              <a:defRPr sz="750"/>
             </a:lvl4pPr>
-            <a:lvl5pPr marL="1828800" indent="0">
+            <a:lvl5pPr marL="1371600" indent="0">
               <a:buNone/>
-              <a:defRPr sz="1000"/>
+              <a:defRPr sz="750"/>
             </a:lvl5pPr>
-            <a:lvl6pPr marL="2286000" indent="0">
+            <a:lvl6pPr marL="1714500" indent="0">
               <a:buNone/>
-              <a:defRPr sz="1000"/>
+              <a:defRPr sz="750"/>
             </a:lvl6pPr>
-            <a:lvl7pPr marL="2743200" indent="0">
+            <a:lvl7pPr marL="2057400" indent="0">
               <a:buNone/>
-              <a:defRPr sz="1000"/>
+              <a:defRPr sz="750"/>
             </a:lvl7pPr>
-            <a:lvl8pPr marL="3200400" indent="0">
+            <a:lvl8pPr marL="2400300" indent="0">
               <a:buNone/>
-              <a:defRPr sz="1000"/>
+              <a:defRPr sz="750"/>
             </a:lvl8pPr>
-            <a:lvl9pPr marL="3657600" indent="0">
+            <a:lvl9pPr marL="2743200" indent="0">
               <a:buNone/>
-              <a:defRPr sz="1000"/>
+              <a:defRPr sz="750"/>
             </a:lvl9pPr>
           </a:lstStyle>
           <a:p>
@@ -2370,7 +2371,7 @@
           <a:p>
             <a:fld id="{FBCF496E-1423-0F43-9D3A-7484EF9BE24D}" type="datetimeFigureOut">
               <a:rPr lang="en-KR" smtClean="0"/>
-              <a:t>10/22/25</a:t>
+              <a:t>10/23/25</a:t>
             </a:fld>
             <a:endParaRPr lang="en-KR"/>
           </a:p>
@@ -2421,7 +2422,7 @@
     </p:spTree>
     <p:extLst>
       <p:ext uri="{BB962C8B-B14F-4D97-AF65-F5344CB8AC3E}">
-        <p14:creationId xmlns:p14="http://schemas.microsoft.com/office/powerpoint/2010/main" val="3273522051"/>
+        <p14:creationId xmlns:p14="http://schemas.microsoft.com/office/powerpoint/2010/main" val="2560862167"/>
       </p:ext>
     </p:extLst>
   </p:cSld>
@@ -2465,8 +2466,8 @@
         </p:nvSpPr>
         <p:spPr>
           <a:xfrm>
-            <a:off x="628650" y="365126"/>
-            <a:ext cx="7886700" cy="1325563"/>
+            <a:off x="471488" y="527405"/>
+            <a:ext cx="5915025" cy="1914702"/>
           </a:xfrm>
           <a:prstGeom prst="rect">
             <a:avLst/>
@@ -2498,8 +2499,8 @@
         </p:nvSpPr>
         <p:spPr>
           <a:xfrm>
-            <a:off x="628650" y="1825625"/>
-            <a:ext cx="7886700" cy="4351338"/>
+            <a:off x="471488" y="2637014"/>
+            <a:ext cx="5915025" cy="6285266"/>
           </a:xfrm>
           <a:prstGeom prst="rect">
             <a:avLst/>
@@ -2560,8 +2561,8 @@
         </p:nvSpPr>
         <p:spPr>
           <a:xfrm>
-            <a:off x="628650" y="6356351"/>
-            <a:ext cx="2057400" cy="365125"/>
+            <a:off x="471487" y="9181397"/>
+            <a:ext cx="1543050" cy="527403"/>
           </a:xfrm>
           <a:prstGeom prst="rect">
             <a:avLst/>
@@ -2571,7 +2572,7 @@
           <a:bodyPr vert="horz" lIns="91440" tIns="45720" rIns="91440" bIns="45720" rtlCol="0" anchor="ctr"/>
           <a:lstStyle>
             <a:lvl1pPr algn="l">
-              <a:defRPr sz="1200">
+              <a:defRPr sz="900">
                 <a:solidFill>
                   <a:schemeClr val="tx1">
                     <a:tint val="82000"/>
@@ -2583,7 +2584,7 @@
           <a:p>
             <a:fld id="{FBCF496E-1423-0F43-9D3A-7484EF9BE24D}" type="datetimeFigureOut">
               <a:rPr lang="en-KR" smtClean="0"/>
-              <a:t>10/22/25</a:t>
+              <a:t>10/23/25</a:t>
             </a:fld>
             <a:endParaRPr lang="en-KR"/>
           </a:p>
@@ -2601,8 +2602,8 @@
         </p:nvSpPr>
         <p:spPr>
           <a:xfrm>
-            <a:off x="3028950" y="6356351"/>
-            <a:ext cx="3086100" cy="365125"/>
+            <a:off x="2271713" y="9181397"/>
+            <a:ext cx="2314575" cy="527403"/>
           </a:xfrm>
           <a:prstGeom prst="rect">
             <a:avLst/>
@@ -2612,7 +2613,7 @@
           <a:bodyPr vert="horz" lIns="91440" tIns="45720" rIns="91440" bIns="45720" rtlCol="0" anchor="ctr"/>
           <a:lstStyle>
             <a:lvl1pPr algn="ctr">
-              <a:defRPr sz="1200">
+              <a:defRPr sz="900">
                 <a:solidFill>
                   <a:schemeClr val="tx1">
                     <a:tint val="82000"/>
@@ -2638,8 +2639,8 @@
         </p:nvSpPr>
         <p:spPr>
           <a:xfrm>
-            <a:off x="6457950" y="6356351"/>
-            <a:ext cx="2057400" cy="365125"/>
+            <a:off x="4843463" y="9181397"/>
+            <a:ext cx="1543050" cy="527403"/>
           </a:xfrm>
           <a:prstGeom prst="rect">
             <a:avLst/>
@@ -2649,7 +2650,7 @@
           <a:bodyPr vert="horz" lIns="91440" tIns="45720" rIns="91440" bIns="45720" rtlCol="0" anchor="ctr"/>
           <a:lstStyle>
             <a:lvl1pPr algn="r">
-              <a:defRPr sz="1200">
+              <a:defRPr sz="900">
                 <a:solidFill>
                   <a:schemeClr val="tx1">
                     <a:tint val="82000"/>
@@ -2670,27 +2671,27 @@
     </p:spTree>
     <p:extLst>
       <p:ext uri="{BB962C8B-B14F-4D97-AF65-F5344CB8AC3E}">
-        <p14:creationId xmlns:p14="http://schemas.microsoft.com/office/powerpoint/2010/main" val="2106563447"/>
+        <p14:creationId xmlns:p14="http://schemas.microsoft.com/office/powerpoint/2010/main" val="44879521"/>
       </p:ext>
     </p:extLst>
   </p:cSld>
   <p:clrMap bg1="lt1" tx1="dk1" bg2="lt2" tx2="dk2" accent1="accent1" accent2="accent2" accent3="accent3" accent4="accent4" accent5="accent5" accent6="accent6" hlink="hlink" folHlink="folHlink"/>
   <p:sldLayoutIdLst>
-    <p:sldLayoutId id="2147483661" r:id="rId1"/>
-    <p:sldLayoutId id="2147483662" r:id="rId2"/>
-    <p:sldLayoutId id="2147483663" r:id="rId3"/>
-    <p:sldLayoutId id="2147483664" r:id="rId4"/>
-    <p:sldLayoutId id="2147483665" r:id="rId5"/>
-    <p:sldLayoutId id="2147483666" r:id="rId6"/>
-    <p:sldLayoutId id="2147483667" r:id="rId7"/>
-    <p:sldLayoutId id="2147483668" r:id="rId8"/>
-    <p:sldLayoutId id="2147483669" r:id="rId9"/>
-    <p:sldLayoutId id="2147483670" r:id="rId10"/>
-    <p:sldLayoutId id="2147483671" r:id="rId11"/>
+    <p:sldLayoutId id="2147483673" r:id="rId1"/>
+    <p:sldLayoutId id="2147483674" r:id="rId2"/>
+    <p:sldLayoutId id="2147483675" r:id="rId3"/>
+    <p:sldLayoutId id="2147483676" r:id="rId4"/>
+    <p:sldLayoutId id="2147483677" r:id="rId5"/>
+    <p:sldLayoutId id="2147483678" r:id="rId6"/>
+    <p:sldLayoutId id="2147483679" r:id="rId7"/>
+    <p:sldLayoutId id="2147483680" r:id="rId8"/>
+    <p:sldLayoutId id="2147483681" r:id="rId9"/>
+    <p:sldLayoutId id="2147483682" r:id="rId10"/>
+    <p:sldLayoutId id="2147483683" r:id="rId11"/>
   </p:sldLayoutIdLst>
   <p:txStyles>
     <p:titleStyle>
-      <a:lvl1pPr algn="l" defTabSz="914400" rtl="0" eaLnBrk="1" latinLnBrk="0" hangingPunct="1">
+      <a:lvl1pPr algn="l" defTabSz="685800" rtl="0" eaLnBrk="1" latinLnBrk="0" hangingPunct="1">
         <a:lnSpc>
           <a:spcPct val="90000"/>
         </a:lnSpc>
@@ -2698,7 +2699,7 @@
           <a:spcPct val="0"/>
         </a:spcBef>
         <a:buNone/>
-        <a:defRPr sz="4400" kern="1200">
+        <a:defRPr sz="3300" kern="1200">
           <a:solidFill>
             <a:schemeClr val="tx1"/>
           </a:solidFill>
@@ -2709,16 +2710,16 @@
       </a:lvl1pPr>
     </p:titleStyle>
     <p:bodyStyle>
-      <a:lvl1pPr marL="228600" indent="-228600" algn="l" defTabSz="914400" rtl="0" eaLnBrk="1" latinLnBrk="0" hangingPunct="1">
+      <a:lvl1pPr marL="171450" indent="-171450" algn="l" defTabSz="685800" rtl="0" eaLnBrk="1" latinLnBrk="0" hangingPunct="1">
         <a:lnSpc>
           <a:spcPct val="90000"/>
         </a:lnSpc>
         <a:spcBef>
-          <a:spcPts val="1000"/>
+          <a:spcPts val="750"/>
         </a:spcBef>
         <a:buFont typeface="Arial" panose="020B0604020202020204" pitchFamily="34" charset="0"/>
         <a:buChar char="•"/>
-        <a:defRPr sz="2800" kern="1200">
+        <a:defRPr sz="2100" kern="1200">
           <a:solidFill>
             <a:schemeClr val="tx1"/>
           </a:solidFill>
@@ -2727,48 +2728,12 @@
           <a:cs typeface="+mn-cs"/>
         </a:defRPr>
       </a:lvl1pPr>
-      <a:lvl2pPr marL="685800" indent="-228600" algn="l" defTabSz="914400" rtl="0" eaLnBrk="1" latinLnBrk="0" hangingPunct="1">
+      <a:lvl2pPr marL="514350" indent="-171450" algn="l" defTabSz="685800" rtl="0" eaLnBrk="1" latinLnBrk="0" hangingPunct="1">
         <a:lnSpc>
           <a:spcPct val="90000"/>
         </a:lnSpc>
         <a:spcBef>
-          <a:spcPts val="500"/>
-        </a:spcBef>
-        <a:buFont typeface="Arial" panose="020B0604020202020204" pitchFamily="34" charset="0"/>
-        <a:buChar char="•"/>
-        <a:defRPr sz="2400" kern="1200">
-          <a:solidFill>
-            <a:schemeClr val="tx1"/>
-          </a:solidFill>
-          <a:latin typeface="+mn-lt"/>
-          <a:ea typeface="+mn-ea"/>
-          <a:cs typeface="+mn-cs"/>
-        </a:defRPr>
-      </a:lvl2pPr>
-      <a:lvl3pPr marL="1143000" indent="-228600" algn="l" defTabSz="914400" rtl="0" eaLnBrk="1" latinLnBrk="0" hangingPunct="1">
-        <a:lnSpc>
-          <a:spcPct val="90000"/>
-        </a:lnSpc>
-        <a:spcBef>
-          <a:spcPts val="500"/>
-        </a:spcBef>
-        <a:buFont typeface="Arial" panose="020B0604020202020204" pitchFamily="34" charset="0"/>
-        <a:buChar char="•"/>
-        <a:defRPr sz="2000" kern="1200">
-          <a:solidFill>
-            <a:schemeClr val="tx1"/>
-          </a:solidFill>
-          <a:latin typeface="+mn-lt"/>
-          <a:ea typeface="+mn-ea"/>
-          <a:cs typeface="+mn-cs"/>
-        </a:defRPr>
-      </a:lvl3pPr>
-      <a:lvl4pPr marL="1600200" indent="-228600" algn="l" defTabSz="914400" rtl="0" eaLnBrk="1" latinLnBrk="0" hangingPunct="1">
-        <a:lnSpc>
-          <a:spcPct val="90000"/>
-        </a:lnSpc>
-        <a:spcBef>
-          <a:spcPts val="500"/>
+          <a:spcPts val="375"/>
         </a:spcBef>
         <a:buFont typeface="Arial" panose="020B0604020202020204" pitchFamily="34" charset="0"/>
         <a:buChar char="•"/>
@@ -2780,17 +2745,53 @@
           <a:ea typeface="+mn-ea"/>
           <a:cs typeface="+mn-cs"/>
         </a:defRPr>
-      </a:lvl4pPr>
-      <a:lvl5pPr marL="2057400" indent="-228600" algn="l" defTabSz="914400" rtl="0" eaLnBrk="1" latinLnBrk="0" hangingPunct="1">
+      </a:lvl2pPr>
+      <a:lvl3pPr marL="857250" indent="-171450" algn="l" defTabSz="685800" rtl="0" eaLnBrk="1" latinLnBrk="0" hangingPunct="1">
         <a:lnSpc>
           <a:spcPct val="90000"/>
         </a:lnSpc>
         <a:spcBef>
-          <a:spcPts val="500"/>
+          <a:spcPts val="375"/>
         </a:spcBef>
         <a:buFont typeface="Arial" panose="020B0604020202020204" pitchFamily="34" charset="0"/>
         <a:buChar char="•"/>
-        <a:defRPr sz="1800" kern="1200">
+        <a:defRPr sz="1500" kern="1200">
+          <a:solidFill>
+            <a:schemeClr val="tx1"/>
+          </a:solidFill>
+          <a:latin typeface="+mn-lt"/>
+          <a:ea typeface="+mn-ea"/>
+          <a:cs typeface="+mn-cs"/>
+        </a:defRPr>
+      </a:lvl3pPr>
+      <a:lvl4pPr marL="1200150" indent="-171450" algn="l" defTabSz="685800" rtl="0" eaLnBrk="1" latinLnBrk="0" hangingPunct="1">
+        <a:lnSpc>
+          <a:spcPct val="90000"/>
+        </a:lnSpc>
+        <a:spcBef>
+          <a:spcPts val="375"/>
+        </a:spcBef>
+        <a:buFont typeface="Arial" panose="020B0604020202020204" pitchFamily="34" charset="0"/>
+        <a:buChar char="•"/>
+        <a:defRPr sz="1350" kern="1200">
+          <a:solidFill>
+            <a:schemeClr val="tx1"/>
+          </a:solidFill>
+          <a:latin typeface="+mn-lt"/>
+          <a:ea typeface="+mn-ea"/>
+          <a:cs typeface="+mn-cs"/>
+        </a:defRPr>
+      </a:lvl4pPr>
+      <a:lvl5pPr marL="1543050" indent="-171450" algn="l" defTabSz="685800" rtl="0" eaLnBrk="1" latinLnBrk="0" hangingPunct="1">
+        <a:lnSpc>
+          <a:spcPct val="90000"/>
+        </a:lnSpc>
+        <a:spcBef>
+          <a:spcPts val="375"/>
+        </a:spcBef>
+        <a:buFont typeface="Arial" panose="020B0604020202020204" pitchFamily="34" charset="0"/>
+        <a:buChar char="•"/>
+        <a:defRPr sz="1350" kern="1200">
           <a:solidFill>
             <a:schemeClr val="tx1"/>
           </a:solidFill>
@@ -2799,16 +2800,16 @@
           <a:cs typeface="+mn-cs"/>
         </a:defRPr>
       </a:lvl5pPr>
-      <a:lvl6pPr marL="2514600" indent="-228600" algn="l" defTabSz="914400" rtl="0" eaLnBrk="1" latinLnBrk="0" hangingPunct="1">
+      <a:lvl6pPr marL="1885950" indent="-171450" algn="l" defTabSz="685800" rtl="0" eaLnBrk="1" latinLnBrk="0" hangingPunct="1">
         <a:lnSpc>
           <a:spcPct val="90000"/>
         </a:lnSpc>
         <a:spcBef>
-          <a:spcPts val="500"/>
+          <a:spcPts val="375"/>
         </a:spcBef>
         <a:buFont typeface="Arial" panose="020B0604020202020204" pitchFamily="34" charset="0"/>
         <a:buChar char="•"/>
-        <a:defRPr sz="1800" kern="1200">
+        <a:defRPr sz="1350" kern="1200">
           <a:solidFill>
             <a:schemeClr val="tx1"/>
           </a:solidFill>
@@ -2817,16 +2818,16 @@
           <a:cs typeface="+mn-cs"/>
         </a:defRPr>
       </a:lvl6pPr>
-      <a:lvl7pPr marL="2971800" indent="-228600" algn="l" defTabSz="914400" rtl="0" eaLnBrk="1" latinLnBrk="0" hangingPunct="1">
+      <a:lvl7pPr marL="2228850" indent="-171450" algn="l" defTabSz="685800" rtl="0" eaLnBrk="1" latinLnBrk="0" hangingPunct="1">
         <a:lnSpc>
           <a:spcPct val="90000"/>
         </a:lnSpc>
         <a:spcBef>
-          <a:spcPts val="500"/>
+          <a:spcPts val="375"/>
         </a:spcBef>
         <a:buFont typeface="Arial" panose="020B0604020202020204" pitchFamily="34" charset="0"/>
         <a:buChar char="•"/>
-        <a:defRPr sz="1800" kern="1200">
+        <a:defRPr sz="1350" kern="1200">
           <a:solidFill>
             <a:schemeClr val="tx1"/>
           </a:solidFill>
@@ -2835,16 +2836,16 @@
           <a:cs typeface="+mn-cs"/>
         </a:defRPr>
       </a:lvl7pPr>
-      <a:lvl8pPr marL="3429000" indent="-228600" algn="l" defTabSz="914400" rtl="0" eaLnBrk="1" latinLnBrk="0" hangingPunct="1">
+      <a:lvl8pPr marL="2571750" indent="-171450" algn="l" defTabSz="685800" rtl="0" eaLnBrk="1" latinLnBrk="0" hangingPunct="1">
         <a:lnSpc>
           <a:spcPct val="90000"/>
         </a:lnSpc>
         <a:spcBef>
-          <a:spcPts val="500"/>
+          <a:spcPts val="375"/>
         </a:spcBef>
         <a:buFont typeface="Arial" panose="020B0604020202020204" pitchFamily="34" charset="0"/>
         <a:buChar char="•"/>
-        <a:defRPr sz="1800" kern="1200">
+        <a:defRPr sz="1350" kern="1200">
           <a:solidFill>
             <a:schemeClr val="tx1"/>
           </a:solidFill>
@@ -2853,16 +2854,16 @@
           <a:cs typeface="+mn-cs"/>
         </a:defRPr>
       </a:lvl8pPr>
-      <a:lvl9pPr marL="3886200" indent="-228600" algn="l" defTabSz="914400" rtl="0" eaLnBrk="1" latinLnBrk="0" hangingPunct="1">
+      <a:lvl9pPr marL="2914650" indent="-171450" algn="l" defTabSz="685800" rtl="0" eaLnBrk="1" latinLnBrk="0" hangingPunct="1">
         <a:lnSpc>
           <a:spcPct val="90000"/>
         </a:lnSpc>
         <a:spcBef>
-          <a:spcPts val="500"/>
+          <a:spcPts val="375"/>
         </a:spcBef>
         <a:buFont typeface="Arial" panose="020B0604020202020204" pitchFamily="34" charset="0"/>
         <a:buChar char="•"/>
-        <a:defRPr sz="1800" kern="1200">
+        <a:defRPr sz="1350" kern="1200">
           <a:solidFill>
             <a:schemeClr val="tx1"/>
           </a:solidFill>
@@ -2876,8 +2877,8 @@
       <a:defPPr>
         <a:defRPr lang="en-US"/>
       </a:defPPr>
-      <a:lvl1pPr marL="0" algn="l" defTabSz="914400" rtl="0" eaLnBrk="1" latinLnBrk="0" hangingPunct="1">
-        <a:defRPr sz="1800" kern="1200">
+      <a:lvl1pPr marL="0" algn="l" defTabSz="685800" rtl="0" eaLnBrk="1" latinLnBrk="0" hangingPunct="1">
+        <a:defRPr sz="1350" kern="1200">
           <a:solidFill>
             <a:schemeClr val="tx1"/>
           </a:solidFill>
@@ -2886,8 +2887,8 @@
           <a:cs typeface="+mn-cs"/>
         </a:defRPr>
       </a:lvl1pPr>
-      <a:lvl2pPr marL="457200" algn="l" defTabSz="914400" rtl="0" eaLnBrk="1" latinLnBrk="0" hangingPunct="1">
-        <a:defRPr sz="1800" kern="1200">
+      <a:lvl2pPr marL="342900" algn="l" defTabSz="685800" rtl="0" eaLnBrk="1" latinLnBrk="0" hangingPunct="1">
+        <a:defRPr sz="1350" kern="1200">
           <a:solidFill>
             <a:schemeClr val="tx1"/>
           </a:solidFill>
@@ -2896,8 +2897,8 @@
           <a:cs typeface="+mn-cs"/>
         </a:defRPr>
       </a:lvl2pPr>
-      <a:lvl3pPr marL="914400" algn="l" defTabSz="914400" rtl="0" eaLnBrk="1" latinLnBrk="0" hangingPunct="1">
-        <a:defRPr sz="1800" kern="1200">
+      <a:lvl3pPr marL="685800" algn="l" defTabSz="685800" rtl="0" eaLnBrk="1" latinLnBrk="0" hangingPunct="1">
+        <a:defRPr sz="1350" kern="1200">
           <a:solidFill>
             <a:schemeClr val="tx1"/>
           </a:solidFill>
@@ -2906,8 +2907,8 @@
           <a:cs typeface="+mn-cs"/>
         </a:defRPr>
       </a:lvl3pPr>
-      <a:lvl4pPr marL="1371600" algn="l" defTabSz="914400" rtl="0" eaLnBrk="1" latinLnBrk="0" hangingPunct="1">
-        <a:defRPr sz="1800" kern="1200">
+      <a:lvl4pPr marL="1028700" algn="l" defTabSz="685800" rtl="0" eaLnBrk="1" latinLnBrk="0" hangingPunct="1">
+        <a:defRPr sz="1350" kern="1200">
           <a:solidFill>
             <a:schemeClr val="tx1"/>
           </a:solidFill>
@@ -2916,8 +2917,8 @@
           <a:cs typeface="+mn-cs"/>
         </a:defRPr>
       </a:lvl4pPr>
-      <a:lvl5pPr marL="1828800" algn="l" defTabSz="914400" rtl="0" eaLnBrk="1" latinLnBrk="0" hangingPunct="1">
-        <a:defRPr sz="1800" kern="1200">
+      <a:lvl5pPr marL="1371600" algn="l" defTabSz="685800" rtl="0" eaLnBrk="1" latinLnBrk="0" hangingPunct="1">
+        <a:defRPr sz="1350" kern="1200">
           <a:solidFill>
             <a:schemeClr val="tx1"/>
           </a:solidFill>
@@ -2926,8 +2927,8 @@
           <a:cs typeface="+mn-cs"/>
         </a:defRPr>
       </a:lvl5pPr>
-      <a:lvl6pPr marL="2286000" algn="l" defTabSz="914400" rtl="0" eaLnBrk="1" latinLnBrk="0" hangingPunct="1">
-        <a:defRPr sz="1800" kern="1200">
+      <a:lvl6pPr marL="1714500" algn="l" defTabSz="685800" rtl="0" eaLnBrk="1" latinLnBrk="0" hangingPunct="1">
+        <a:defRPr sz="1350" kern="1200">
           <a:solidFill>
             <a:schemeClr val="tx1"/>
           </a:solidFill>
@@ -2936,8 +2937,8 @@
           <a:cs typeface="+mn-cs"/>
         </a:defRPr>
       </a:lvl6pPr>
-      <a:lvl7pPr marL="2743200" algn="l" defTabSz="914400" rtl="0" eaLnBrk="1" latinLnBrk="0" hangingPunct="1">
-        <a:defRPr sz="1800" kern="1200">
+      <a:lvl7pPr marL="2057400" algn="l" defTabSz="685800" rtl="0" eaLnBrk="1" latinLnBrk="0" hangingPunct="1">
+        <a:defRPr sz="1350" kern="1200">
           <a:solidFill>
             <a:schemeClr val="tx1"/>
           </a:solidFill>
@@ -2946,8 +2947,8 @@
           <a:cs typeface="+mn-cs"/>
         </a:defRPr>
       </a:lvl7pPr>
-      <a:lvl8pPr marL="3200400" algn="l" defTabSz="914400" rtl="0" eaLnBrk="1" latinLnBrk="0" hangingPunct="1">
-        <a:defRPr sz="1800" kern="1200">
+      <a:lvl8pPr marL="2400300" algn="l" defTabSz="685800" rtl="0" eaLnBrk="1" latinLnBrk="0" hangingPunct="1">
+        <a:defRPr sz="1350" kern="1200">
           <a:solidFill>
             <a:schemeClr val="tx1"/>
           </a:solidFill>
@@ -2956,8 +2957,8 @@
           <a:cs typeface="+mn-cs"/>
         </a:defRPr>
       </a:lvl8pPr>
-      <a:lvl9pPr marL="3657600" algn="l" defTabSz="914400" rtl="0" eaLnBrk="1" latinLnBrk="0" hangingPunct="1">
-        <a:defRPr sz="1800" kern="1200">
+      <a:lvl9pPr marL="2743200" algn="l" defTabSz="685800" rtl="0" eaLnBrk="1" latinLnBrk="0" hangingPunct="1">
+        <a:defRPr sz="1350" kern="1200">
           <a:solidFill>
             <a:schemeClr val="tx1"/>
           </a:solidFill>
@@ -2998,14 +2999,14 @@
             </a:extLst>
           </p:cNvPr>
           <p:cNvSpPr>
-            <a:spLocks noGrp="1" noRot="1" noMove="1" noResize="1" noEditPoints="1" noAdjustHandles="1" noChangeArrowheads="1" noChangeShapeType="1"/>
+            <a:spLocks/>
           </p:cNvSpPr>
           <p:nvPr/>
         </p:nvSpPr>
         <p:spPr>
           <a:xfrm>
             <a:off x="0" y="0"/>
-            <a:ext cx="4572000" cy="540000"/>
+            <a:ext cx="3429000" cy="405000"/>
           </a:xfrm>
           <a:prstGeom prst="rect">
             <a:avLst/>
@@ -3036,11 +3037,11 @@
           </a:fontRef>
         </p:style>
         <p:txBody>
-          <a:bodyPr lIns="180000" tIns="46800" rIns="90000" bIns="90000" numCol="1" rtlCol="0" anchor="b"/>
+          <a:bodyPr lIns="135000" tIns="35100" rIns="67500" bIns="67500" numCol="1" rtlCol="0" anchor="b"/>
           <a:lstStyle/>
           <a:p>
             <a:r>
-              <a:rPr lang="en-US" altLang="ko-KR" sz="1200" b="1" dirty="0">
+              <a:rPr lang="en-US" altLang="ko-KR" sz="900" b="1" dirty="0">
                 <a:solidFill>
                   <a:schemeClr val="bg1">
                     <a:lumMod val="65000"/>
@@ -3053,7 +3054,7 @@
               <a:t>./main/</a:t>
             </a:r>
             <a:r>
-              <a:rPr lang="en-US" altLang="ko-KR" sz="1200" b="1" dirty="0" err="1">
+              <a:rPr lang="en-US" altLang="ko-KR" sz="900" b="1" dirty="0" err="1">
                 <a:solidFill>
                   <a:schemeClr val="tx1">
                     <a:lumMod val="85000"/>
@@ -3067,7 +3068,7 @@
               <a:t>models.py</a:t>
             </a:r>
             <a:r>
-              <a:rPr lang="ko-KR" altLang="en-US" sz="1200" b="1" dirty="0">
+              <a:rPr lang="ko-KR" altLang="en-US" sz="900" b="1" dirty="0">
                 <a:solidFill>
                   <a:schemeClr val="tx1">
                     <a:lumMod val="85000"/>
@@ -3081,7 +3082,7 @@
               <a:t> </a:t>
             </a:r>
             <a:r>
-              <a:rPr lang="en-US" altLang="ko-KR" sz="1200" b="1" dirty="0">
+              <a:rPr lang="en-US" altLang="ko-KR" sz="900" b="1" dirty="0">
                 <a:solidFill>
                   <a:schemeClr val="tx1">
                     <a:lumMod val="85000"/>
@@ -3095,7 +3096,7 @@
               <a:t>&gt;</a:t>
             </a:r>
             <a:r>
-              <a:rPr lang="ko-KR" altLang="en-US" sz="1200" b="1" dirty="0">
+              <a:rPr lang="ko-KR" altLang="en-US" sz="900" b="1" dirty="0">
                 <a:solidFill>
                   <a:schemeClr val="tx1">
                     <a:lumMod val="85000"/>
@@ -3109,7 +3110,7 @@
               <a:t> </a:t>
             </a:r>
             <a:r>
-              <a:rPr lang="en-US" altLang="ko-KR" sz="1200" b="1" dirty="0" err="1">
+              <a:rPr lang="en-US" altLang="ko-KR" sz="900" b="1" dirty="0" err="1">
                 <a:solidFill>
                   <a:schemeClr val="tx1">
                     <a:lumMod val="85000"/>
@@ -3122,7 +3123,7 @@
               </a:rPr>
               <a:t>HangJeongDong</a:t>
             </a:r>
-            <a:endParaRPr lang="en-US" altLang="ko-KR" sz="1200" b="1" dirty="0">
+            <a:endParaRPr lang="en-US" altLang="ko-KR" sz="900" b="1" dirty="0">
               <a:solidFill>
                 <a:schemeClr val="tx1">
                   <a:lumMod val="85000"/>
@@ -3152,8 +3153,8 @@
         </p:nvSpPr>
         <p:spPr>
           <a:xfrm>
-            <a:off x="4572000" y="0"/>
-            <a:ext cx="4572000" cy="540000"/>
+            <a:off x="3429000" y="0"/>
+            <a:ext cx="3429000" cy="405000"/>
           </a:xfrm>
           <a:prstGeom prst="rect">
             <a:avLst/>
@@ -3184,12 +3185,12 @@
           </a:fontRef>
         </p:style>
         <p:txBody>
-          <a:bodyPr lIns="90000" tIns="46800" rIns="180000" bIns="90000" numCol="1" rtlCol="0" anchor="b"/>
+          <a:bodyPr lIns="67500" tIns="35100" rIns="135000" bIns="67500" numCol="1" rtlCol="0" anchor="b"/>
           <a:lstStyle/>
           <a:p>
             <a:pPr algn="r"/>
             <a:r>
-              <a:rPr lang="en-US" altLang="ko-KR" sz="1200" b="1" dirty="0" err="1">
+              <a:rPr lang="en-US" altLang="ko-KR" sz="900" b="1" dirty="0" err="1">
                 <a:solidFill>
                   <a:schemeClr val="bg1">
                     <a:lumMod val="65000"/>
@@ -3202,7 +3203,7 @@
               <a:t>seoulbusmap</a:t>
             </a:r>
             <a:r>
-              <a:rPr lang="ko-KR" altLang="en-US" sz="1200" b="1" dirty="0">
+              <a:rPr lang="ko-KR" altLang="en-US" sz="900" b="1" dirty="0">
                 <a:solidFill>
                   <a:schemeClr val="bg1">
                     <a:lumMod val="65000"/>
@@ -3215,7 +3216,7 @@
               <a:t> 프로젝트에 사용될 데이터 구조</a:t>
             </a:r>
             <a:r>
-              <a:rPr lang="en-US" altLang="ko-KR" sz="1200" b="1" dirty="0">
+              <a:rPr lang="en-US" altLang="ko-KR" sz="900" b="1" dirty="0">
                 <a:solidFill>
                   <a:schemeClr val="bg1">
                     <a:lumMod val="65000"/>
@@ -3228,7 +3229,7 @@
               <a:t>(=</a:t>
             </a:r>
             <a:r>
-              <a:rPr lang="ko-KR" altLang="en-US" sz="1200" b="1" dirty="0">
+              <a:rPr lang="ko-KR" altLang="en-US" sz="900" b="1" dirty="0">
                 <a:solidFill>
                   <a:schemeClr val="bg1">
                     <a:lumMod val="65000"/>
@@ -3241,7 +3242,7 @@
               <a:t>모델</a:t>
             </a:r>
             <a:r>
-              <a:rPr lang="en-US" altLang="ko-KR" sz="1200" b="1" dirty="0">
+              <a:rPr lang="en-US" altLang="ko-KR" sz="900" b="1" dirty="0">
                 <a:solidFill>
                   <a:schemeClr val="bg1">
                     <a:lumMod val="65000"/>
@@ -3254,7 +3255,7 @@
               <a:t>)</a:t>
             </a:r>
             <a:r>
-              <a:rPr lang="ko-KR" altLang="en-US" sz="1200" b="1" dirty="0">
+              <a:rPr lang="ko-KR" altLang="en-US" sz="900" b="1" dirty="0">
                 <a:solidFill>
                   <a:schemeClr val="bg1">
                     <a:lumMod val="65000"/>
@@ -3266,7 +3267,7 @@
               </a:rPr>
               <a:t>을 정의</a:t>
             </a:r>
-            <a:endParaRPr lang="en-US" altLang="ko-KR" sz="1200" b="1" dirty="0">
+            <a:endParaRPr lang="en-US" altLang="ko-KR" sz="900" b="1" dirty="0">
               <a:solidFill>
                 <a:schemeClr val="tx1">
                   <a:lumMod val="85000"/>
@@ -3294,8 +3295,8 @@
         </p:nvSpPr>
         <p:spPr>
           <a:xfrm>
-            <a:off x="2880764" y="1086998"/>
-            <a:ext cx="5992462" cy="919995"/>
+            <a:off x="2160573" y="815251"/>
+            <a:ext cx="4494347" cy="713144"/>
           </a:xfrm>
           <a:prstGeom prst="rect">
             <a:avLst/>
@@ -3314,7 +3315,7 @@
               </a:lnSpc>
             </a:pPr>
             <a:r>
-              <a:rPr lang="ko-KR" altLang="en-US" sz="1100" dirty="0">
+              <a:rPr lang="ko-KR" altLang="en-US" sz="825" dirty="0">
                 <a:solidFill>
                   <a:schemeClr val="tx1">
                     <a:lumMod val="85000"/>
@@ -3328,7 +3329,7 @@
               <a:t>   </a:t>
             </a:r>
             <a:r>
-              <a:rPr lang="ko-KR" altLang="en-US" sz="1100" dirty="0">
+              <a:rPr lang="ko-KR" altLang="en-US" sz="825" dirty="0">
                 <a:solidFill>
                   <a:schemeClr val="tx1">
                     <a:lumMod val="85000"/>
@@ -3345,7 +3346,7 @@
               <a:t>행정동별 인구 수에 대비한 데이터 분석 결과를 도출하기 위해 받아오는 데이터입니다</a:t>
             </a:r>
             <a:r>
-              <a:rPr lang="en-US" altLang="ko-KR" sz="1100" dirty="0">
+              <a:rPr lang="en-US" altLang="ko-KR" sz="825" dirty="0">
                 <a:solidFill>
                   <a:schemeClr val="tx1">
                     <a:lumMod val="85000"/>
@@ -3362,7 +3363,7 @@
               <a:t>.</a:t>
             </a:r>
             <a:r>
-              <a:rPr lang="ko-KR" altLang="en-US" sz="1100" dirty="0">
+              <a:rPr lang="ko-KR" altLang="en-US" sz="825" dirty="0">
                 <a:solidFill>
                   <a:schemeClr val="tx1">
                     <a:lumMod val="85000"/>
@@ -3376,7 +3377,7 @@
               <a:t> 자주 큰 폭으로 바뀌는 데이터는 아니지만</a:t>
             </a:r>
             <a:r>
-              <a:rPr lang="en-US" altLang="ko-KR" sz="1100" dirty="0">
+              <a:rPr lang="en-US" altLang="ko-KR" sz="825" dirty="0">
                 <a:solidFill>
                   <a:schemeClr val="tx1">
                     <a:lumMod val="85000"/>
@@ -3390,7 +3391,7 @@
               <a:t>,</a:t>
             </a:r>
             <a:r>
-              <a:rPr lang="ko-KR" altLang="en-US" sz="1100" dirty="0">
+              <a:rPr lang="ko-KR" altLang="en-US" sz="825" dirty="0">
                 <a:solidFill>
                   <a:schemeClr val="tx1">
                     <a:lumMod val="85000"/>
@@ -3404,7 +3405,7 @@
               <a:t> 어느 정도 시기에 따른 정확도는 필요한 데이터라고 판단하였습니다</a:t>
             </a:r>
             <a:r>
-              <a:rPr lang="en-US" altLang="ko-KR" sz="1100" dirty="0">
+              <a:rPr lang="en-US" altLang="ko-KR" sz="825" dirty="0">
                 <a:solidFill>
                   <a:schemeClr val="tx1">
                     <a:lumMod val="85000"/>
@@ -3418,7 +3419,7 @@
               <a:t>.</a:t>
             </a:r>
             <a:r>
-              <a:rPr lang="ko-KR" altLang="en-US" sz="1100" dirty="0">
+              <a:rPr lang="ko-KR" altLang="en-US" sz="825" dirty="0">
                 <a:solidFill>
                   <a:schemeClr val="tx1">
                     <a:lumMod val="85000"/>
@@ -3432,7 +3433,7 @@
               <a:t> 장기적 관점에서 이뤄지는 교통 정책에 대응할 수 있도록 비교적 넓은 간격</a:t>
             </a:r>
             <a:r>
-              <a:rPr lang="en-US" altLang="ko-KR" sz="1100" dirty="0">
+              <a:rPr lang="en-US" altLang="ko-KR" sz="825" dirty="0">
                 <a:solidFill>
                   <a:schemeClr val="tx1">
                     <a:lumMod val="85000"/>
@@ -3446,7 +3447,7 @@
               <a:t>(</a:t>
             </a:r>
             <a:r>
-              <a:rPr lang="ko-KR" altLang="en-US" sz="1100" dirty="0">
+              <a:rPr lang="ko-KR" altLang="en-US" sz="825" dirty="0">
                 <a:solidFill>
                   <a:schemeClr val="tx1">
                     <a:lumMod val="85000"/>
@@ -3460,7 +3461,7 @@
               <a:t>한 달 등</a:t>
             </a:r>
             <a:r>
-              <a:rPr lang="en-US" altLang="ko-KR" sz="1100" dirty="0">
+              <a:rPr lang="en-US" altLang="ko-KR" sz="825" dirty="0">
                 <a:solidFill>
                   <a:schemeClr val="tx1">
                     <a:lumMod val="85000"/>
@@ -3474,7 +3475,7 @@
               <a:t>)</a:t>
             </a:r>
             <a:r>
-              <a:rPr lang="ko-KR" altLang="en-US" sz="1100" dirty="0" err="1">
+              <a:rPr lang="ko-KR" altLang="en-US" sz="825" dirty="0" err="1">
                 <a:solidFill>
                   <a:schemeClr val="tx1">
                     <a:lumMod val="85000"/>
@@ -3488,7 +3489,7 @@
               <a:t>으로라도</a:t>
             </a:r>
             <a:r>
-              <a:rPr lang="ko-KR" altLang="en-US" sz="1100" dirty="0">
+              <a:rPr lang="ko-KR" altLang="en-US" sz="825" dirty="0">
                 <a:solidFill>
                   <a:schemeClr val="tx1">
                     <a:lumMod val="85000"/>
@@ -3502,7 +3503,7 @@
               <a:t> 데이터를 새로 받아 최신화 할 소요가 있습니다</a:t>
             </a:r>
             <a:r>
-              <a:rPr lang="en-US" altLang="ko-KR" sz="1100" dirty="0">
+              <a:rPr lang="en-US" altLang="ko-KR" sz="825" dirty="0">
                 <a:solidFill>
                   <a:schemeClr val="tx1">
                     <a:lumMod val="85000"/>
@@ -3532,8 +3533,8 @@
         </p:nvSpPr>
         <p:spPr>
           <a:xfrm>
-            <a:off x="270770" y="810001"/>
-            <a:ext cx="2339998" cy="5779058"/>
+            <a:off x="203077" y="607501"/>
+            <a:ext cx="1754999" cy="3407420"/>
           </a:xfrm>
           <a:prstGeom prst="rect">
             <a:avLst/>
@@ -3568,7 +3569,7 @@
           <a:lstStyle/>
           <a:p>
             <a:pPr algn="ctr"/>
-            <a:endParaRPr lang="en-KR"/>
+            <a:endParaRPr lang="en-KR" sz="1350"/>
           </a:p>
         </p:txBody>
       </p:sp>
@@ -3586,8 +3587,8 @@
         </p:nvSpPr>
         <p:spPr>
           <a:xfrm>
-            <a:off x="270769" y="810000"/>
-            <a:ext cx="2339999" cy="946754"/>
+            <a:off x="203079" y="607500"/>
+            <a:ext cx="1754999" cy="710066"/>
           </a:xfrm>
           <a:prstGeom prst="rect">
             <a:avLst/>
@@ -3630,7 +3631,7 @@
           <a:lstStyle/>
           <a:p>
             <a:pPr algn="ctr"/>
-            <a:endParaRPr lang="en-KR" dirty="0"/>
+            <a:endParaRPr lang="en-KR" sz="1350" dirty="0"/>
           </a:p>
         </p:txBody>
       </p:sp>
@@ -3648,8 +3649,8 @@
         </p:nvSpPr>
         <p:spPr>
           <a:xfrm>
-            <a:off x="270768" y="809998"/>
-            <a:ext cx="2339996" cy="412590"/>
+            <a:off x="203076" y="607499"/>
+            <a:ext cx="1754997" cy="298719"/>
           </a:xfrm>
           <a:prstGeom prst="rect">
             <a:avLst/>
@@ -3657,13 +3658,13 @@
           <a:noFill/>
         </p:spPr>
         <p:txBody>
-          <a:bodyPr wrap="square" lIns="180000" tIns="180000" rIns="90000" bIns="46800" rtlCol="0">
+          <a:bodyPr wrap="square" lIns="135000" tIns="135000" rIns="67500" bIns="35100" rtlCol="0">
             <a:spAutoFit/>
           </a:bodyPr>
           <a:lstStyle/>
           <a:p>
             <a:r>
-              <a:rPr lang="en-US" sz="1100" b="1" dirty="0" err="1">
+              <a:rPr lang="en-US" sz="825" b="1" dirty="0" err="1">
                 <a:solidFill>
                   <a:schemeClr val="tx1">
                     <a:lumMod val="85000"/>
@@ -3676,7 +3677,7 @@
               </a:rPr>
               <a:t>HangJeongDong</a:t>
             </a:r>
-            <a:endParaRPr lang="en-KR" sz="1100" b="1" dirty="0">
+            <a:endParaRPr lang="en-KR" sz="825" b="1" dirty="0">
               <a:solidFill>
                 <a:schemeClr val="tx1">
                   <a:lumMod val="85000"/>
@@ -3704,8 +3705,8 @@
         </p:nvSpPr>
         <p:spPr>
           <a:xfrm>
-            <a:off x="270767" y="1222588"/>
-            <a:ext cx="2339997" cy="430887"/>
+            <a:off x="203077" y="916943"/>
+            <a:ext cx="1754998" cy="346249"/>
           </a:xfrm>
           <a:prstGeom prst="rect">
             <a:avLst/>
@@ -3713,13 +3714,13 @@
           <a:noFill/>
         </p:spPr>
         <p:txBody>
-          <a:bodyPr wrap="square" lIns="180000" rIns="90000" rtlCol="0">
+          <a:bodyPr wrap="square" lIns="135000" rIns="67500" rtlCol="0">
             <a:spAutoFit/>
           </a:bodyPr>
           <a:lstStyle/>
           <a:p>
             <a:r>
-              <a:rPr lang="ko-KR" altLang="en-US" sz="1100" dirty="0">
+              <a:rPr lang="ko-KR" altLang="en-US" sz="825" dirty="0">
                 <a:solidFill>
                   <a:schemeClr val="bg1">
                     <a:lumMod val="65000"/>
@@ -3731,7 +3732,7 @@
               </a:rPr>
               <a:t>서울시 행정동명과</a:t>
             </a:r>
-            <a:endParaRPr lang="en-US" altLang="ko-KR" sz="1100" dirty="0">
+            <a:endParaRPr lang="en-US" altLang="ko-KR" sz="825" dirty="0">
               <a:solidFill>
                 <a:schemeClr val="bg1">
                   <a:lumMod val="65000"/>
@@ -3744,7 +3745,7 @@
           </a:p>
           <a:p>
             <a:r>
-              <a:rPr lang="ko-KR" altLang="en-US" sz="1100" dirty="0">
+              <a:rPr lang="ko-KR" altLang="en-US" sz="825" dirty="0">
                 <a:solidFill>
                   <a:schemeClr val="bg1">
                     <a:lumMod val="65000"/>
@@ -3756,7 +3757,7 @@
               </a:rPr>
               <a:t>거주 인구 수를 저장하는 모델</a:t>
             </a:r>
-            <a:endParaRPr lang="en-KR" sz="1100" dirty="0">
+            <a:endParaRPr lang="en-KR" sz="825" dirty="0">
               <a:solidFill>
                 <a:schemeClr val="bg1">
                   <a:lumMod val="65000"/>
@@ -3783,8 +3784,8 @@
         </p:nvSpPr>
         <p:spPr>
           <a:xfrm>
-            <a:off x="270768" y="810000"/>
-            <a:ext cx="2340000" cy="5779058"/>
+            <a:off x="203076" y="607500"/>
+            <a:ext cx="1755000" cy="3407417"/>
           </a:xfrm>
           <a:prstGeom prst="rect">
             <a:avLst/>
@@ -3819,7 +3820,7 @@
           <a:lstStyle/>
           <a:p>
             <a:pPr algn="ctr"/>
-            <a:endParaRPr lang="en-KR" dirty="0"/>
+            <a:endParaRPr lang="en-KR" sz="1350" dirty="0"/>
           </a:p>
         </p:txBody>
       </p:sp>
@@ -3837,8 +3838,8 @@
         </p:nvSpPr>
         <p:spPr>
           <a:xfrm>
-            <a:off x="2880764" y="809998"/>
-            <a:ext cx="1409360" cy="261610"/>
+            <a:off x="2160574" y="607499"/>
+            <a:ext cx="1103187" cy="219291"/>
           </a:xfrm>
           <a:prstGeom prst="rect">
             <a:avLst/>
@@ -3852,7 +3853,7 @@
           <a:lstStyle/>
           <a:p>
             <a:r>
-              <a:rPr lang="ko-KR" altLang="en-US" sz="1100" b="1" dirty="0">
+              <a:rPr lang="ko-KR" altLang="en-US" sz="825" b="1" dirty="0">
                 <a:solidFill>
                   <a:schemeClr val="tx1">
                     <a:lumMod val="85000"/>
@@ -3865,7 +3866,7 @@
               </a:rPr>
               <a:t>수집 목적 및 사용 방안</a:t>
             </a:r>
-            <a:endParaRPr lang="en-US" altLang="ko-KR" sz="1100" b="1" dirty="0">
+            <a:endParaRPr lang="en-US" altLang="ko-KR" sz="825" b="1" dirty="0">
               <a:solidFill>
                 <a:schemeClr val="tx1">
                   <a:lumMod val="85000"/>
@@ -3893,8 +3894,8 @@
         </p:nvSpPr>
         <p:spPr>
           <a:xfrm>
-            <a:off x="2880764" y="3329151"/>
-            <a:ext cx="5992462" cy="708399"/>
+            <a:off x="2160573" y="2496865"/>
+            <a:ext cx="4494347" cy="554447"/>
           </a:xfrm>
           <a:prstGeom prst="rect">
             <a:avLst/>
@@ -3913,7 +3914,7 @@
               </a:lnSpc>
             </a:pPr>
             <a:r>
-              <a:rPr lang="ko-KR" altLang="en-US" sz="1100" dirty="0">
+              <a:rPr lang="ko-KR" altLang="en-US" sz="825" dirty="0">
                 <a:solidFill>
                   <a:schemeClr val="tx1">
                     <a:lumMod val="85000"/>
@@ -3927,7 +3928,7 @@
               <a:t>   서울 </a:t>
             </a:r>
             <a:r>
-              <a:rPr lang="ko-KR" altLang="en-US" sz="1100" dirty="0" err="1">
+              <a:rPr lang="ko-KR" altLang="en-US" sz="825" dirty="0" err="1">
                 <a:solidFill>
                   <a:schemeClr val="tx1">
                     <a:lumMod val="85000"/>
@@ -3941,7 +3942,7 @@
               <a:t>열린데이터광장에서</a:t>
             </a:r>
             <a:r>
-              <a:rPr lang="ko-KR" altLang="en-US" sz="1100" dirty="0">
+              <a:rPr lang="ko-KR" altLang="en-US" sz="825" dirty="0">
                 <a:solidFill>
                   <a:schemeClr val="tx1">
                     <a:lumMod val="85000"/>
@@ -3955,7 +3956,7 @@
               <a:t> 제공하는 </a:t>
             </a:r>
             <a:r>
-              <a:rPr lang="en-US" altLang="ko-KR" sz="1100" dirty="0">
+              <a:rPr lang="en-US" altLang="ko-KR" sz="825" dirty="0">
                 <a:solidFill>
                   <a:schemeClr val="tx1">
                     <a:lumMod val="85000"/>
@@ -3972,7 +3973,7 @@
               <a:t>’</a:t>
             </a:r>
             <a:r>
-              <a:rPr lang="ko-KR" altLang="en-US" sz="1100" dirty="0">
+              <a:rPr lang="ko-KR" altLang="en-US" sz="825" dirty="0">
                 <a:solidFill>
                   <a:schemeClr val="tx1">
                     <a:lumMod val="85000"/>
@@ -3989,7 +3990,7 @@
               <a:t>서울시 상권분석서비스</a:t>
             </a:r>
             <a:r>
-              <a:rPr lang="en-US" altLang="ko-KR" sz="1100" dirty="0">
+              <a:rPr lang="en-US" altLang="ko-KR" sz="825" dirty="0">
                 <a:solidFill>
                   <a:schemeClr val="tx1">
                     <a:lumMod val="85000"/>
@@ -4006,7 +4007,7 @@
               <a:t>(</a:t>
             </a:r>
             <a:r>
-              <a:rPr lang="ko-KR" altLang="en-US" sz="1100" dirty="0">
+              <a:rPr lang="ko-KR" altLang="en-US" sz="825" dirty="0">
                 <a:solidFill>
                   <a:schemeClr val="tx1">
                     <a:lumMod val="85000"/>
@@ -4023,7 +4024,7 @@
               <a:t>영역</a:t>
             </a:r>
             <a:r>
-              <a:rPr lang="en-US" altLang="ko-KR" sz="1100" dirty="0">
+              <a:rPr lang="en-US" altLang="ko-KR" sz="825" dirty="0">
                 <a:solidFill>
                   <a:schemeClr val="tx1">
                     <a:lumMod val="85000"/>
@@ -4040,7 +4041,7 @@
               <a:t>-</a:t>
             </a:r>
             <a:r>
-              <a:rPr lang="ko-KR" altLang="en-US" sz="1100" dirty="0">
+              <a:rPr lang="ko-KR" altLang="en-US" sz="825" dirty="0">
                 <a:solidFill>
                   <a:schemeClr val="tx1">
                     <a:lumMod val="85000"/>
@@ -4057,7 +4058,7 @@
               <a:t>행정동</a:t>
             </a:r>
             <a:r>
-              <a:rPr lang="en-US" altLang="ko-KR" sz="1100" dirty="0">
+              <a:rPr lang="en-US" altLang="ko-KR" sz="825" dirty="0">
                 <a:solidFill>
                   <a:schemeClr val="tx1">
                     <a:lumMod val="85000"/>
@@ -4074,7 +4075,7 @@
               <a:t>)’</a:t>
             </a:r>
             <a:r>
-              <a:rPr lang="ko-KR" altLang="en-US" sz="1100" dirty="0">
+              <a:rPr lang="ko-KR" altLang="en-US" sz="825" dirty="0">
                 <a:solidFill>
                   <a:schemeClr val="tx1">
                     <a:lumMod val="85000"/>
@@ -4088,7 +4089,7 @@
               <a:t> </a:t>
             </a:r>
             <a:r>
-              <a:rPr lang="en-US" altLang="ko-KR" sz="1100" dirty="0">
+              <a:rPr lang="en-US" altLang="ko-KR" sz="825" dirty="0">
                 <a:solidFill>
                   <a:schemeClr val="tx1">
                     <a:lumMod val="85000"/>
@@ -4102,7 +4103,7 @@
               <a:t>API</a:t>
             </a:r>
             <a:r>
-              <a:rPr lang="ko-KR" altLang="en-US" sz="1100" dirty="0">
+              <a:rPr lang="ko-KR" altLang="en-US" sz="825" dirty="0">
                 <a:solidFill>
                   <a:schemeClr val="tx1">
                     <a:lumMod val="85000"/>
@@ -4116,7 +4117,7 @@
               <a:t>에서 행정동 식별 </a:t>
             </a:r>
             <a:r>
-              <a:rPr lang="en-US" altLang="ko-KR" sz="1100" dirty="0">
+              <a:rPr lang="en-US" altLang="ko-KR" sz="825" dirty="0">
                 <a:solidFill>
                   <a:schemeClr val="tx1">
                     <a:lumMod val="85000"/>
@@ -4130,7 +4131,7 @@
               <a:t>ID</a:t>
             </a:r>
             <a:r>
-              <a:rPr lang="ko-KR" altLang="en-US" sz="1100" dirty="0">
+              <a:rPr lang="ko-KR" altLang="en-US" sz="825" dirty="0">
                 <a:solidFill>
                   <a:schemeClr val="tx1">
                     <a:lumMod val="85000"/>
@@ -4144,7 +4145,7 @@
               <a:t>와 그에 대응하는 한글 행정동명을 받아오고</a:t>
             </a:r>
             <a:r>
-              <a:rPr lang="en-US" altLang="ko-KR" sz="1100" dirty="0">
+              <a:rPr lang="en-US" altLang="ko-KR" sz="825" dirty="0">
                 <a:solidFill>
                   <a:schemeClr val="tx1">
                     <a:lumMod val="85000"/>
@@ -4158,7 +4159,7 @@
               <a:t>,</a:t>
             </a:r>
             <a:r>
-              <a:rPr lang="ko-KR" altLang="en-US" sz="1100" dirty="0">
+              <a:rPr lang="ko-KR" altLang="en-US" sz="825" dirty="0">
                 <a:solidFill>
                   <a:schemeClr val="tx1">
                     <a:lumMod val="85000"/>
@@ -4172,7 +4173,7 @@
               <a:t> 같은 출처에서 제공하는 </a:t>
             </a:r>
             <a:r>
-              <a:rPr lang="en-US" altLang="ko-KR" sz="1100" dirty="0">
+              <a:rPr lang="en-US" altLang="ko-KR" sz="825" dirty="0">
                 <a:solidFill>
                   <a:schemeClr val="tx1">
                     <a:lumMod val="85000"/>
@@ -4189,7 +4190,7 @@
               <a:t>’</a:t>
             </a:r>
             <a:r>
-              <a:rPr lang="ko-KR" altLang="en-US" sz="1100" dirty="0">
+              <a:rPr lang="ko-KR" altLang="en-US" sz="825" dirty="0">
                 <a:solidFill>
                   <a:schemeClr val="tx1">
                     <a:lumMod val="85000"/>
@@ -4206,7 +4207,7 @@
               <a:t>행정동 단위 서울 생활인구</a:t>
             </a:r>
             <a:r>
-              <a:rPr lang="en-US" altLang="ko-KR" sz="1100" dirty="0">
+              <a:rPr lang="en-US" altLang="ko-KR" sz="825" dirty="0">
                 <a:solidFill>
                   <a:schemeClr val="tx1">
                     <a:lumMod val="85000"/>
@@ -4223,7 +4224,7 @@
               <a:t>(</a:t>
             </a:r>
             <a:r>
-              <a:rPr lang="ko-KR" altLang="en-US" sz="1100" dirty="0">
+              <a:rPr lang="ko-KR" altLang="en-US" sz="825" dirty="0">
                 <a:solidFill>
                   <a:schemeClr val="tx1">
                     <a:lumMod val="85000"/>
@@ -4240,7 +4241,7 @@
               <a:t>내국인</a:t>
             </a:r>
             <a:r>
-              <a:rPr lang="en-US" altLang="ko-KR" sz="1100" dirty="0">
+              <a:rPr lang="en-US" altLang="ko-KR" sz="825" dirty="0">
                 <a:solidFill>
                   <a:schemeClr val="tx1">
                     <a:lumMod val="85000"/>
@@ -4257,7 +4258,7 @@
               <a:t>)’</a:t>
             </a:r>
             <a:r>
-              <a:rPr lang="en-US" altLang="ko-KR" sz="1100" dirty="0">
+              <a:rPr lang="en-US" altLang="ko-KR" sz="825" dirty="0">
                 <a:solidFill>
                   <a:schemeClr val="tx1">
                     <a:lumMod val="85000"/>
@@ -4271,7 +4272,7 @@
               <a:t> API</a:t>
             </a:r>
             <a:r>
-              <a:rPr lang="ko-KR" altLang="en-US" sz="1100" dirty="0">
+              <a:rPr lang="ko-KR" altLang="en-US" sz="825" dirty="0">
                 <a:solidFill>
                   <a:schemeClr val="tx1">
                     <a:lumMod val="85000"/>
@@ -4285,7 +4286,7 @@
               <a:t>에서 행정동 식별 </a:t>
             </a:r>
             <a:r>
-              <a:rPr lang="en-US" altLang="ko-KR" sz="1100" dirty="0">
+              <a:rPr lang="en-US" altLang="ko-KR" sz="825" dirty="0">
                 <a:solidFill>
                   <a:schemeClr val="tx1">
                     <a:lumMod val="85000"/>
@@ -4299,7 +4300,7 @@
               <a:t>ID</a:t>
             </a:r>
             <a:r>
-              <a:rPr lang="ko-KR" altLang="en-US" sz="1100" dirty="0">
+              <a:rPr lang="ko-KR" altLang="en-US" sz="825" dirty="0">
                 <a:solidFill>
                   <a:schemeClr val="tx1">
                     <a:lumMod val="85000"/>
@@ -4313,7 +4314,7 @@
               <a:t>별 </a:t>
             </a:r>
             <a:r>
-              <a:rPr lang="ko-KR" altLang="en-US" sz="1100" dirty="0" err="1">
+              <a:rPr lang="ko-KR" altLang="en-US" sz="825" dirty="0" err="1">
                 <a:solidFill>
                   <a:schemeClr val="tx1">
                     <a:lumMod val="85000"/>
@@ -4327,7 +4328,7 @@
               <a:t>생활인구수를</a:t>
             </a:r>
             <a:r>
-              <a:rPr lang="ko-KR" altLang="en-US" sz="1100" dirty="0">
+              <a:rPr lang="ko-KR" altLang="en-US" sz="825" dirty="0">
                 <a:solidFill>
                   <a:schemeClr val="tx1">
                     <a:lumMod val="85000"/>
@@ -4341,7 +4342,7 @@
               <a:t> 받아옵니다</a:t>
             </a:r>
             <a:r>
-              <a:rPr lang="en-US" altLang="ko-KR" sz="1100" dirty="0">
+              <a:rPr lang="en-US" altLang="ko-KR" sz="825" dirty="0">
                 <a:solidFill>
                   <a:schemeClr val="tx1">
                     <a:lumMod val="85000"/>
@@ -4371,8 +4372,8 @@
         </p:nvSpPr>
         <p:spPr>
           <a:xfrm>
-            <a:off x="2880764" y="3067541"/>
-            <a:ext cx="1377300" cy="261610"/>
+            <a:off x="2160573" y="2300656"/>
+            <a:ext cx="1079142" cy="219291"/>
           </a:xfrm>
           <a:prstGeom prst="rect">
             <a:avLst/>
@@ -4386,7 +4387,7 @@
           <a:lstStyle/>
           <a:p>
             <a:r>
-              <a:rPr lang="ko-KR" altLang="en-US" sz="1100" b="1" dirty="0">
+              <a:rPr lang="ko-KR" altLang="en-US" sz="825" b="1" dirty="0">
                 <a:solidFill>
                   <a:schemeClr val="tx1">
                     <a:lumMod val="85000"/>
@@ -4399,7 +4400,7 @@
               </a:rPr>
               <a:t>정보 출처와 저장 절차</a:t>
             </a:r>
-            <a:endParaRPr lang="en-US" altLang="ko-KR" sz="1100" b="1" dirty="0">
+            <a:endParaRPr lang="en-US" altLang="ko-KR" sz="825" b="1" dirty="0">
               <a:solidFill>
                 <a:schemeClr val="tx1">
                   <a:lumMod val="85000"/>
@@ -4427,8 +4428,8 @@
         </p:nvGrpSpPr>
         <p:grpSpPr>
           <a:xfrm>
-            <a:off x="408167" y="1844503"/>
-            <a:ext cx="2055302" cy="1018906"/>
+            <a:off x="306125" y="1383377"/>
+            <a:ext cx="1541477" cy="764180"/>
             <a:chOff x="408167" y="1844503"/>
             <a:chExt cx="2055302" cy="1018906"/>
           </a:xfrm>
@@ -4485,7 +4486,7 @@
             <a:lstStyle/>
             <a:p>
               <a:pPr algn="ctr"/>
-              <a:endParaRPr lang="en-KR" dirty="0"/>
+              <a:endParaRPr lang="en-KR" sz="1350" dirty="0"/>
             </a:p>
           </p:txBody>
         </p:sp>
@@ -4512,13 +4513,13 @@
             <a:noFill/>
           </p:spPr>
           <p:txBody>
-            <a:bodyPr wrap="square" lIns="90000" tIns="90000" rIns="90000" bIns="46800" rtlCol="0">
+            <a:bodyPr wrap="square" lIns="67500" tIns="67500" rIns="67500" bIns="35100" rtlCol="0">
               <a:spAutoFit/>
             </a:bodyPr>
             <a:lstStyle/>
             <a:p>
               <a:r>
-                <a:rPr lang="en-US" sz="1100" b="1" dirty="0" err="1">
+                <a:rPr lang="en-US" sz="825" b="1" dirty="0" err="1">
                   <a:solidFill>
                     <a:schemeClr val="tx1">
                       <a:lumMod val="85000"/>
@@ -4531,7 +4532,7 @@
                 </a:rPr>
                 <a:t>district_id</a:t>
               </a:r>
-              <a:endParaRPr lang="en-US" sz="1100" b="1" dirty="0">
+              <a:endParaRPr lang="en-US" sz="825" b="1" dirty="0">
                 <a:solidFill>
                   <a:schemeClr val="tx1">
                     <a:lumMod val="85000"/>
@@ -4545,7 +4546,7 @@
             </a:p>
             <a:p>
               <a:r>
-                <a:rPr lang="en-KR" sz="1100" b="1" dirty="0">
+                <a:rPr lang="en-KR" sz="825" b="1" dirty="0">
                   <a:solidFill>
                     <a:srgbClr val="44B29C"/>
                   </a:solidFill>
@@ -4573,7 +4574,7 @@
           <p:spPr>
             <a:xfrm>
               <a:off x="408167" y="2357032"/>
-              <a:ext cx="2055301" cy="475600"/>
+              <a:ext cx="2055301" cy="490988"/>
             </a:xfrm>
             <a:prstGeom prst="rect">
               <a:avLst/>
@@ -4581,13 +4582,13 @@
             <a:noFill/>
           </p:spPr>
           <p:txBody>
-            <a:bodyPr wrap="square" lIns="90000" rIns="90000" bIns="90000" rtlCol="0">
+            <a:bodyPr wrap="square" lIns="67500" rIns="67500" bIns="67500" rtlCol="0">
               <a:spAutoFit/>
             </a:bodyPr>
             <a:lstStyle/>
             <a:p>
               <a:r>
-                <a:rPr lang="ko-KR" altLang="en-US" sz="1100" dirty="0">
+                <a:rPr lang="ko-KR" altLang="en-US" sz="825" dirty="0">
                   <a:solidFill>
                     <a:schemeClr val="bg1">
                       <a:lumMod val="65000"/>
@@ -4600,7 +4601,7 @@
                 <a:t>하나의 행정동 </a:t>
               </a:r>
               <a:r>
-                <a:rPr lang="en-US" altLang="ko-KR" sz="1100" dirty="0">
+                <a:rPr lang="en-US" altLang="ko-KR" sz="825" dirty="0">
                   <a:solidFill>
                     <a:schemeClr val="bg1">
                       <a:lumMod val="65000"/>
@@ -4615,7 +4616,7 @@
             </a:p>
             <a:p>
               <a:r>
-                <a:rPr lang="en-US" altLang="ko-KR" sz="1100" dirty="0">
+                <a:rPr lang="en-US" altLang="ko-KR" sz="825" dirty="0">
                   <a:solidFill>
                     <a:schemeClr val="bg1">
                       <a:lumMod val="65000"/>
@@ -4628,7 +4629,7 @@
                 <a:t>(</a:t>
               </a:r>
               <a:r>
-                <a:rPr lang="ko-KR" altLang="en-US" sz="1100" dirty="0">
+                <a:rPr lang="ko-KR" altLang="en-US" sz="825" dirty="0">
                   <a:solidFill>
                     <a:schemeClr val="bg1">
                       <a:lumMod val="65000"/>
@@ -4641,7 +4642,7 @@
                 <a:t>최대 길이 </a:t>
               </a:r>
               <a:r>
-                <a:rPr lang="en-US" altLang="ko-KR" sz="1100" dirty="0">
+                <a:rPr lang="en-US" altLang="ko-KR" sz="825" dirty="0">
                   <a:solidFill>
                     <a:schemeClr val="bg1">
                       <a:lumMod val="65000"/>
@@ -4654,7 +4655,7 @@
                 <a:t>10</a:t>
               </a:r>
               <a:r>
-                <a:rPr lang="ko-KR" altLang="en-US" sz="1100" dirty="0">
+                <a:rPr lang="ko-KR" altLang="en-US" sz="825" dirty="0">
                   <a:solidFill>
                     <a:schemeClr val="bg1">
                       <a:lumMod val="65000"/>
@@ -4667,7 +4668,7 @@
                 <a:t>자</a:t>
               </a:r>
               <a:r>
-                <a:rPr lang="en-US" altLang="ko-KR" sz="1100" dirty="0">
+                <a:rPr lang="en-US" altLang="ko-KR" sz="825" dirty="0">
                   <a:solidFill>
                     <a:schemeClr val="bg1">
                       <a:lumMod val="65000"/>
@@ -4680,7 +4681,7 @@
                 <a:t>,</a:t>
               </a:r>
               <a:r>
-                <a:rPr lang="ko-KR" altLang="en-US" sz="1100" dirty="0">
+                <a:rPr lang="ko-KR" altLang="en-US" sz="825" dirty="0">
                   <a:solidFill>
                     <a:schemeClr val="bg1">
                       <a:lumMod val="65000"/>
@@ -4693,7 +4694,7 @@
                 <a:t> 중복 불가</a:t>
               </a:r>
               <a:r>
-                <a:rPr lang="en-US" altLang="ko-KR" sz="1100" dirty="0">
+                <a:rPr lang="en-US" altLang="ko-KR" sz="825" dirty="0">
                   <a:solidFill>
                     <a:schemeClr val="bg1">
                       <a:lumMod val="65000"/>
@@ -4705,7 +4706,7 @@
                 </a:rPr>
                 <a:t>)</a:t>
               </a:r>
-              <a:endParaRPr lang="en-KR" sz="1100" dirty="0">
+              <a:endParaRPr lang="en-KR" sz="825" dirty="0">
                 <a:solidFill>
                   <a:schemeClr val="bg1">
                     <a:lumMod val="65000"/>
@@ -4741,14 +4742,14 @@
             <a:noFill/>
           </p:spPr>
           <p:txBody>
-            <a:bodyPr wrap="square" lIns="90000" tIns="90000" rIns="90000" bIns="46800" rtlCol="0">
+            <a:bodyPr wrap="square" lIns="67500" tIns="67500" rIns="67500" bIns="35100" rtlCol="0">
               <a:spAutoFit/>
             </a:bodyPr>
             <a:lstStyle/>
             <a:p>
               <a:pPr algn="r"/>
               <a:r>
-                <a:rPr lang="en-US" altLang="ko-KR" sz="1100" b="1" dirty="0">
+                <a:rPr lang="en-US" altLang="ko-KR" sz="825" b="1" dirty="0">
                   <a:solidFill>
                     <a:schemeClr val="bg1">
                       <a:lumMod val="65000"/>
@@ -4760,7 +4761,7 @@
                 </a:rPr>
                 <a:t>“11590605”</a:t>
               </a:r>
-              <a:endParaRPr lang="en-KR" sz="1100" b="1" dirty="0">
+              <a:endParaRPr lang="en-KR" sz="825" b="1" dirty="0">
                 <a:solidFill>
                   <a:schemeClr val="bg1">
                     <a:lumMod val="65000"/>
@@ -4788,8 +4789,8 @@
         </p:nvGrpSpPr>
         <p:grpSpPr>
           <a:xfrm>
-            <a:off x="408168" y="4168068"/>
-            <a:ext cx="2055301" cy="1016657"/>
+            <a:off x="306128" y="3126053"/>
+            <a:ext cx="1541476" cy="762493"/>
             <a:chOff x="408168" y="3007410"/>
             <a:chExt cx="2055301" cy="1016657"/>
           </a:xfrm>
@@ -4846,7 +4847,7 @@
             <a:lstStyle/>
             <a:p>
               <a:pPr algn="ctr"/>
-              <a:endParaRPr lang="en-KR" dirty="0"/>
+              <a:endParaRPr lang="en-KR" sz="1350" dirty="0"/>
             </a:p>
           </p:txBody>
         </p:sp>
@@ -4865,7 +4866,7 @@
           <p:spPr>
             <a:xfrm>
               <a:off x="408168" y="3010222"/>
-              <a:ext cx="1318394" cy="476690"/>
+              <a:ext cx="1318394" cy="476691"/>
             </a:xfrm>
             <a:prstGeom prst="rect">
               <a:avLst/>
@@ -4873,13 +4874,13 @@
             <a:noFill/>
           </p:spPr>
           <p:txBody>
-            <a:bodyPr wrap="square" lIns="90000" tIns="90000" rIns="90000" bIns="46800" rtlCol="0">
+            <a:bodyPr wrap="square" lIns="67500" tIns="67500" rIns="67500" bIns="35100" rtlCol="0">
               <a:spAutoFit/>
             </a:bodyPr>
             <a:lstStyle/>
             <a:p>
               <a:r>
-                <a:rPr lang="en-US" sz="1100" b="1" dirty="0">
+                <a:rPr lang="en-US" sz="825" b="1" dirty="0">
                   <a:solidFill>
                     <a:schemeClr val="tx1">
                       <a:lumMod val="85000"/>
@@ -4895,7 +4896,7 @@
             </a:p>
             <a:p>
               <a:r>
-                <a:rPr lang="en-KR" sz="1100" b="1" dirty="0">
+                <a:rPr lang="en-KR" sz="825" b="1" dirty="0">
                   <a:solidFill>
                     <a:srgbClr val="44B29C"/>
                   </a:solidFill>
@@ -4923,7 +4924,7 @@
           <p:spPr>
             <a:xfrm>
               <a:off x="411468" y="3517690"/>
-              <a:ext cx="2052000" cy="475600"/>
+              <a:ext cx="2052000" cy="490988"/>
             </a:xfrm>
             <a:prstGeom prst="rect">
               <a:avLst/>
@@ -4931,13 +4932,13 @@
             <a:noFill/>
           </p:spPr>
           <p:txBody>
-            <a:bodyPr wrap="square" lIns="90000" rIns="90000" bIns="90000" rtlCol="0">
+            <a:bodyPr wrap="square" lIns="67500" rIns="67500" bIns="67500" rtlCol="0">
               <a:spAutoFit/>
             </a:bodyPr>
             <a:lstStyle/>
             <a:p>
               <a:r>
-                <a:rPr lang="ko-KR" altLang="en-US" sz="1100" dirty="0">
+                <a:rPr lang="ko-KR" altLang="en-US" sz="825" dirty="0">
                   <a:solidFill>
                     <a:schemeClr val="bg1">
                       <a:lumMod val="65000"/>
@@ -4950,7 +4951,7 @@
                 <a:t>하나의 행정동 총 생활 인구 수</a:t>
               </a:r>
               <a:r>
-                <a:rPr lang="en-US" altLang="ko-KR" sz="1100" dirty="0">
+                <a:rPr lang="en-US" altLang="ko-KR" sz="825" dirty="0">
                   <a:solidFill>
                     <a:schemeClr val="bg1">
                       <a:lumMod val="65000"/>
@@ -4965,7 +4966,7 @@
             </a:p>
             <a:p>
               <a:r>
-                <a:rPr lang="en-US" altLang="ko-KR" sz="1100" dirty="0">
+                <a:rPr lang="en-US" altLang="ko-KR" sz="825" dirty="0">
                   <a:solidFill>
                     <a:schemeClr val="bg1">
                       <a:lumMod val="65000"/>
@@ -4978,7 +4979,7 @@
                 <a:t>(</a:t>
               </a:r>
               <a:r>
-                <a:rPr lang="ko-KR" altLang="en-US" sz="1100" dirty="0">
+                <a:rPr lang="ko-KR" altLang="en-US" sz="825" dirty="0">
                   <a:solidFill>
                     <a:schemeClr val="bg1">
                       <a:lumMod val="65000"/>
@@ -4991,7 +4992,7 @@
                 <a:t>빈 값 가능</a:t>
               </a:r>
               <a:r>
-                <a:rPr lang="en-US" altLang="ko-KR" sz="1100" dirty="0">
+                <a:rPr lang="en-US" altLang="ko-KR" sz="825" dirty="0">
                   <a:solidFill>
                     <a:schemeClr val="bg1">
                       <a:lumMod val="65000"/>
@@ -5003,7 +5004,7 @@
                 </a:rPr>
                 <a:t>)</a:t>
               </a:r>
-              <a:endParaRPr lang="en-KR" sz="1100" dirty="0">
+              <a:endParaRPr lang="en-KR" sz="825" dirty="0">
                 <a:solidFill>
                   <a:schemeClr val="bg1">
                     <a:lumMod val="65000"/>
@@ -5030,7 +5031,7 @@
           </p:nvSpPr>
           <p:spPr>
             <a:xfrm>
-              <a:off x="1594655" y="3013988"/>
+              <a:off x="1594654" y="3013989"/>
               <a:ext cx="868813" cy="307413"/>
             </a:xfrm>
             <a:prstGeom prst="rect">
@@ -5039,14 +5040,14 @@
             <a:noFill/>
           </p:spPr>
           <p:txBody>
-            <a:bodyPr wrap="square" lIns="90000" tIns="90000" rIns="90000" bIns="46800" rtlCol="0">
+            <a:bodyPr wrap="square" lIns="67500" tIns="67500" rIns="67500" bIns="35100" rtlCol="0">
               <a:spAutoFit/>
             </a:bodyPr>
             <a:lstStyle/>
             <a:p>
               <a:pPr algn="r"/>
               <a:r>
-                <a:rPr lang="en-US" altLang="ko-KR" sz="1100" b="1" dirty="0">
+                <a:rPr lang="en-US" altLang="ko-KR" sz="825" b="1" dirty="0">
                   <a:solidFill>
                     <a:schemeClr val="bg1">
                       <a:lumMod val="65000"/>
@@ -5058,7 +5059,7 @@
                 </a:rPr>
                 <a:t>33201</a:t>
               </a:r>
-              <a:endParaRPr lang="en-KR" sz="1100" b="1" dirty="0">
+              <a:endParaRPr lang="en-KR" sz="825" b="1" dirty="0">
                 <a:solidFill>
                   <a:schemeClr val="bg1">
                     <a:lumMod val="65000"/>
@@ -5086,8 +5087,8 @@
         </p:nvGrpSpPr>
         <p:grpSpPr>
           <a:xfrm>
-            <a:off x="408166" y="3005161"/>
-            <a:ext cx="2055302" cy="1018906"/>
+            <a:off x="306124" y="2253871"/>
+            <a:ext cx="1541477" cy="764180"/>
             <a:chOff x="408167" y="1844503"/>
             <a:chExt cx="2055302" cy="1018906"/>
           </a:xfrm>
@@ -5144,7 +5145,7 @@
             <a:lstStyle/>
             <a:p>
               <a:pPr algn="ctr"/>
-              <a:endParaRPr lang="en-KR" dirty="0"/>
+              <a:endParaRPr lang="en-KR" sz="1350" dirty="0"/>
             </a:p>
           </p:txBody>
         </p:sp>
@@ -5171,13 +5172,13 @@
             <a:noFill/>
           </p:spPr>
           <p:txBody>
-            <a:bodyPr wrap="square" lIns="90000" tIns="90000" rIns="90000" bIns="46800" rtlCol="0">
+            <a:bodyPr wrap="square" lIns="67500" tIns="67500" rIns="67500" bIns="35100" rtlCol="0">
               <a:spAutoFit/>
             </a:bodyPr>
             <a:lstStyle/>
             <a:p>
               <a:r>
-                <a:rPr lang="en-US" sz="1100" b="1" dirty="0">
+                <a:rPr lang="en-US" sz="825" b="1" dirty="0">
                   <a:solidFill>
                     <a:schemeClr val="tx1">
                       <a:lumMod val="85000"/>
@@ -5193,7 +5194,7 @@
             </a:p>
             <a:p>
               <a:r>
-                <a:rPr lang="en-KR" sz="1100" b="1" dirty="0">
+                <a:rPr lang="en-KR" sz="825" b="1" dirty="0">
                   <a:solidFill>
                     <a:srgbClr val="44B29C"/>
                   </a:solidFill>
@@ -5221,7 +5222,7 @@
           <p:spPr>
             <a:xfrm>
               <a:off x="408167" y="2357032"/>
-              <a:ext cx="2055301" cy="475600"/>
+              <a:ext cx="2055301" cy="490988"/>
             </a:xfrm>
             <a:prstGeom prst="rect">
               <a:avLst/>
@@ -5229,13 +5230,13 @@
             <a:noFill/>
           </p:spPr>
           <p:txBody>
-            <a:bodyPr wrap="square" lIns="90000" rIns="90000" bIns="90000" rtlCol="0">
+            <a:bodyPr wrap="square" lIns="67500" rIns="67500" bIns="67500" rtlCol="0">
               <a:spAutoFit/>
             </a:bodyPr>
             <a:lstStyle/>
             <a:p>
               <a:r>
-                <a:rPr lang="ko-KR" altLang="en-US" sz="1100" dirty="0">
+                <a:rPr lang="ko-KR" altLang="en-US" sz="825" dirty="0">
                   <a:solidFill>
                     <a:schemeClr val="bg1">
                       <a:lumMod val="65000"/>
@@ -5248,7 +5249,7 @@
                 <a:t>하나의 행정동 이름</a:t>
               </a:r>
               <a:r>
-                <a:rPr lang="en-US" altLang="ko-KR" sz="1100" dirty="0">
+                <a:rPr lang="en-US" altLang="ko-KR" sz="825" dirty="0">
                   <a:solidFill>
                     <a:schemeClr val="bg1">
                       <a:lumMod val="65000"/>
@@ -5263,7 +5264,7 @@
             </a:p>
             <a:p>
               <a:r>
-                <a:rPr lang="en-US" altLang="ko-KR" sz="1100" dirty="0">
+                <a:rPr lang="en-US" altLang="ko-KR" sz="825" dirty="0">
                   <a:solidFill>
                     <a:schemeClr val="bg1">
                       <a:lumMod val="65000"/>
@@ -5276,7 +5277,7 @@
                 <a:t>(</a:t>
               </a:r>
               <a:r>
-                <a:rPr lang="ko-KR" altLang="en-US" sz="1100" dirty="0">
+                <a:rPr lang="ko-KR" altLang="en-US" sz="825" dirty="0">
                   <a:solidFill>
                     <a:schemeClr val="bg1">
                       <a:lumMod val="65000"/>
@@ -5289,7 +5290,7 @@
                 <a:t>최대 길이 </a:t>
               </a:r>
               <a:r>
-                <a:rPr lang="en-US" altLang="ko-KR" sz="1100" dirty="0">
+                <a:rPr lang="en-US" altLang="ko-KR" sz="825" dirty="0">
                   <a:solidFill>
                     <a:schemeClr val="bg1">
                       <a:lumMod val="65000"/>
@@ -5302,7 +5303,7 @@
                 <a:t>100</a:t>
               </a:r>
               <a:r>
-                <a:rPr lang="ko-KR" altLang="en-US" sz="1100" dirty="0">
+                <a:rPr lang="ko-KR" altLang="en-US" sz="825" dirty="0">
                   <a:solidFill>
                     <a:schemeClr val="bg1">
                       <a:lumMod val="65000"/>
@@ -5315,7 +5316,7 @@
                 <a:t>자</a:t>
               </a:r>
               <a:r>
-                <a:rPr lang="en-US" altLang="ko-KR" sz="1100" dirty="0">
+                <a:rPr lang="en-US" altLang="ko-KR" sz="825" dirty="0">
                   <a:solidFill>
                     <a:schemeClr val="bg1">
                       <a:lumMod val="65000"/>
@@ -5328,7 +5329,7 @@
                 <a:t>,</a:t>
               </a:r>
               <a:r>
-                <a:rPr lang="ko-KR" altLang="en-US" sz="1100" dirty="0">
+                <a:rPr lang="ko-KR" altLang="en-US" sz="825" dirty="0">
                   <a:solidFill>
                     <a:schemeClr val="bg1">
                       <a:lumMod val="65000"/>
@@ -5341,7 +5342,7 @@
                 <a:t> 중복 불가</a:t>
               </a:r>
               <a:r>
-                <a:rPr lang="en-US" altLang="ko-KR" sz="1100" dirty="0">
+                <a:rPr lang="en-US" altLang="ko-KR" sz="825" dirty="0">
                   <a:solidFill>
                     <a:schemeClr val="bg1">
                       <a:lumMod val="65000"/>
@@ -5353,7 +5354,7 @@
                 </a:rPr>
                 <a:t>)</a:t>
               </a:r>
-              <a:endParaRPr lang="en-KR" sz="1100" dirty="0">
+              <a:endParaRPr lang="en-KR" sz="825" dirty="0">
                 <a:solidFill>
                   <a:schemeClr val="bg1">
                     <a:lumMod val="65000"/>
@@ -5389,14 +5390,14 @@
             <a:noFill/>
           </p:spPr>
           <p:txBody>
-            <a:bodyPr wrap="square" lIns="90000" tIns="90000" rIns="90000" bIns="46800" rtlCol="0">
+            <a:bodyPr wrap="square" lIns="67500" tIns="67500" rIns="67500" bIns="35100" rtlCol="0">
               <a:spAutoFit/>
             </a:bodyPr>
             <a:lstStyle/>
             <a:p>
               <a:pPr algn="r"/>
               <a:r>
-                <a:rPr lang="en-US" altLang="ko-KR" sz="1100" b="1" dirty="0">
+                <a:rPr lang="en-US" altLang="ko-KR" sz="825" b="1" dirty="0">
                   <a:solidFill>
                     <a:schemeClr val="bg1">
                       <a:lumMod val="65000"/>
@@ -5409,7 +5410,7 @@
                 <a:t>“</a:t>
               </a:r>
               <a:r>
-                <a:rPr lang="ko-KR" altLang="en-US" sz="1100" b="1" dirty="0">
+                <a:rPr lang="ko-KR" altLang="en-US" sz="825" b="1" dirty="0">
                   <a:solidFill>
                     <a:schemeClr val="bg1">
                       <a:lumMod val="65000"/>
@@ -5422,7 +5423,7 @@
                 <a:t>흑석동</a:t>
               </a:r>
               <a:r>
-                <a:rPr lang="en-US" altLang="ko-KR" sz="1100" b="1" dirty="0">
+                <a:rPr lang="en-US" altLang="ko-KR" sz="825" b="1" dirty="0">
                   <a:solidFill>
                     <a:schemeClr val="bg1">
                       <a:lumMod val="65000"/>
@@ -5434,7 +5435,7 @@
                 </a:rPr>
                 <a:t>”</a:t>
               </a:r>
-              <a:endParaRPr lang="en-KR" sz="1100" b="1" dirty="0">
+              <a:endParaRPr lang="en-KR" sz="825" b="1" dirty="0">
                 <a:solidFill>
                   <a:schemeClr val="bg1">
                     <a:lumMod val="65000"/>
@@ -5462,8 +5463,8 @@
         </p:nvSpPr>
         <p:spPr>
           <a:xfrm>
-            <a:off x="2880764" y="4037550"/>
-            <a:ext cx="5992462" cy="2612767"/>
+            <a:off x="2160573" y="3028165"/>
+            <a:ext cx="4494347" cy="1982722"/>
           </a:xfrm>
           <a:prstGeom prst="rect">
             <a:avLst/>
@@ -5482,7 +5483,7 @@
               </a:lnSpc>
             </a:pPr>
             <a:r>
-              <a:rPr lang="ko-KR" altLang="en-US" sz="1100" dirty="0">
+              <a:rPr lang="ko-KR" altLang="en-US" sz="825" dirty="0">
                 <a:solidFill>
                   <a:schemeClr val="tx1">
                     <a:lumMod val="85000"/>
@@ -5496,7 +5497,7 @@
               <a:t>   </a:t>
             </a:r>
             <a:r>
-              <a:rPr lang="en-US" altLang="ko-KR" sz="1100" dirty="0">
+              <a:rPr lang="en-US" altLang="ko-KR" sz="825" dirty="0">
                 <a:solidFill>
                   <a:schemeClr val="tx1">
                     <a:lumMod val="85000"/>
@@ -5513,7 +5514,7 @@
               <a:t>‘</a:t>
             </a:r>
             <a:r>
-              <a:rPr lang="en-US" altLang="ko-KR" sz="1100" dirty="0" err="1">
+              <a:rPr lang="en-US" altLang="ko-KR" sz="825" dirty="0" err="1">
                 <a:solidFill>
                   <a:schemeClr val="tx1">
                     <a:lumMod val="85000"/>
@@ -5530,7 +5531,7 @@
               <a:t>fetch_hangjeongdong_data.py</a:t>
             </a:r>
             <a:r>
-              <a:rPr lang="en-US" altLang="ko-KR" sz="1100" dirty="0">
+              <a:rPr lang="en-US" altLang="ko-KR" sz="825" dirty="0">
                 <a:solidFill>
                   <a:schemeClr val="tx1">
                     <a:lumMod val="85000"/>
@@ -5547,7 +5548,7 @@
               <a:t>’</a:t>
             </a:r>
             <a:r>
-              <a:rPr lang="ko-KR" altLang="en-US" sz="1100" dirty="0">
+              <a:rPr lang="ko-KR" altLang="en-US" sz="825" dirty="0">
                 <a:solidFill>
                   <a:schemeClr val="tx1">
                     <a:lumMod val="85000"/>
@@ -5561,7 +5562,7 @@
               <a:t>에서</a:t>
             </a:r>
             <a:r>
-              <a:rPr lang="en-US" altLang="ko-KR" sz="1100" dirty="0">
+              <a:rPr lang="en-US" altLang="ko-KR" sz="825" dirty="0">
                 <a:solidFill>
                   <a:schemeClr val="tx1">
                     <a:lumMod val="85000"/>
@@ -5575,7 +5576,7 @@
               <a:t> API</a:t>
             </a:r>
             <a:r>
-              <a:rPr lang="ko-KR" altLang="en-US" sz="1100" dirty="0">
+              <a:rPr lang="ko-KR" altLang="en-US" sz="825" dirty="0">
                 <a:solidFill>
                   <a:schemeClr val="tx1">
                     <a:lumMod val="85000"/>
@@ -5589,7 +5590,7 @@
               <a:t> 요청과 </a:t>
             </a:r>
             <a:r>
-              <a:rPr lang="en-US" altLang="ko-KR" sz="1100" dirty="0">
+              <a:rPr lang="en-US" altLang="ko-KR" sz="825" dirty="0">
                 <a:solidFill>
                   <a:schemeClr val="tx1">
                     <a:lumMod val="85000"/>
@@ -5603,7 +5604,7 @@
               <a:t>DB</a:t>
             </a:r>
             <a:r>
-              <a:rPr lang="ko-KR" altLang="en-US" sz="1100" dirty="0">
+              <a:rPr lang="ko-KR" altLang="en-US" sz="825" dirty="0">
                 <a:solidFill>
                   <a:schemeClr val="tx1">
                     <a:lumMod val="85000"/>
@@ -5617,7 +5618,7 @@
               <a:t> 저장을 관리합니다</a:t>
             </a:r>
             <a:r>
-              <a:rPr lang="en-US" altLang="ko-KR" sz="1100" dirty="0">
+              <a:rPr lang="en-US" altLang="ko-KR" sz="825" dirty="0">
                 <a:solidFill>
                   <a:schemeClr val="tx1">
                     <a:lumMod val="85000"/>
@@ -5631,7 +5632,7 @@
               <a:t>.</a:t>
             </a:r>
             <a:r>
-              <a:rPr lang="ko-KR" altLang="en-US" sz="1100" dirty="0">
+              <a:rPr lang="ko-KR" altLang="en-US" sz="825" dirty="0">
                 <a:solidFill>
                   <a:schemeClr val="tx1">
                     <a:lumMod val="85000"/>
@@ -5645,7 +5646,7 @@
               <a:t> </a:t>
             </a:r>
             <a:r>
-              <a:rPr lang="en-US" altLang="ko-KR" sz="1100" dirty="0">
+              <a:rPr lang="en-US" altLang="ko-KR" sz="825" dirty="0">
                 <a:solidFill>
                   <a:schemeClr val="tx1">
                     <a:lumMod val="85000"/>
@@ -5662,7 +5663,7 @@
               <a:t>‘</a:t>
             </a:r>
             <a:r>
-              <a:rPr lang="ko-KR" altLang="en-US" sz="1100" dirty="0">
+              <a:rPr lang="ko-KR" altLang="en-US" sz="825" dirty="0">
                 <a:solidFill>
                   <a:schemeClr val="tx1">
                     <a:lumMod val="85000"/>
@@ -5679,7 +5680,7 @@
               <a:t>행정동 단위 서울 생활인구 </a:t>
             </a:r>
             <a:r>
-              <a:rPr lang="en-US" altLang="ko-KR" sz="1100" dirty="0">
+              <a:rPr lang="en-US" altLang="ko-KR" sz="825" dirty="0">
                 <a:solidFill>
                   <a:schemeClr val="tx1">
                     <a:lumMod val="85000"/>
@@ -5696,7 +5697,7 @@
               <a:t>(</a:t>
             </a:r>
             <a:r>
-              <a:rPr lang="ko-KR" altLang="en-US" sz="1100" dirty="0">
+              <a:rPr lang="ko-KR" altLang="en-US" sz="825" dirty="0">
                 <a:solidFill>
                   <a:schemeClr val="tx1">
                     <a:lumMod val="85000"/>
@@ -5713,7 +5714,7 @@
               <a:t>내국인</a:t>
             </a:r>
             <a:r>
-              <a:rPr lang="en-US" altLang="ko-KR" sz="1100" dirty="0">
+              <a:rPr lang="en-US" altLang="ko-KR" sz="825" dirty="0">
                 <a:solidFill>
                   <a:schemeClr val="tx1">
                     <a:lumMod val="85000"/>
@@ -5730,7 +5731,7 @@
               <a:t>)’</a:t>
             </a:r>
             <a:r>
-              <a:rPr lang="ko-KR" altLang="en-US" sz="1100" dirty="0">
+              <a:rPr lang="ko-KR" altLang="en-US" sz="825" dirty="0">
                 <a:solidFill>
                   <a:schemeClr val="tx1">
                     <a:lumMod val="85000"/>
@@ -5747,7 +5748,7 @@
               <a:t>에서는 식별 </a:t>
             </a:r>
             <a:r>
-              <a:rPr lang="en-US" altLang="ko-KR" sz="1100" dirty="0">
+              <a:rPr lang="en-US" altLang="ko-KR" sz="825" dirty="0">
                 <a:solidFill>
                   <a:schemeClr val="tx1">
                     <a:lumMod val="85000"/>
@@ -5764,7 +5765,7 @@
               <a:t>ID</a:t>
             </a:r>
             <a:r>
-              <a:rPr lang="ko-KR" altLang="en-US" sz="1100" dirty="0">
+              <a:rPr lang="ko-KR" altLang="en-US" sz="825" dirty="0">
                 <a:solidFill>
                   <a:schemeClr val="tx1">
                     <a:lumMod val="85000"/>
@@ -5781,7 +5782,7 @@
               <a:t>와 </a:t>
             </a:r>
             <a:r>
-              <a:rPr lang="ko-KR" altLang="en-US" sz="1100" dirty="0" err="1">
+              <a:rPr lang="ko-KR" altLang="en-US" sz="825" dirty="0" err="1">
                 <a:solidFill>
                   <a:schemeClr val="tx1">
                     <a:lumMod val="85000"/>
@@ -5798,7 +5799,7 @@
               <a:t>생활인구수</a:t>
             </a:r>
             <a:r>
-              <a:rPr lang="ko-KR" altLang="en-US" sz="1100" dirty="0">
+              <a:rPr lang="ko-KR" altLang="en-US" sz="825" dirty="0">
                 <a:solidFill>
                   <a:schemeClr val="tx1">
                     <a:lumMod val="85000"/>
@@ -5815,7 +5816,7 @@
               <a:t> 관련 데이터만 제공하기 때문에</a:t>
             </a:r>
             <a:r>
-              <a:rPr lang="en-US" altLang="ko-KR" sz="1100" dirty="0">
+              <a:rPr lang="en-US" altLang="ko-KR" sz="825" dirty="0">
                 <a:solidFill>
                   <a:schemeClr val="tx1">
                     <a:lumMod val="85000"/>
@@ -5829,7 +5830,7 @@
               <a:t>,</a:t>
             </a:r>
             <a:r>
-              <a:rPr lang="ko-KR" altLang="en-US" sz="1100" dirty="0">
+              <a:rPr lang="ko-KR" altLang="en-US" sz="825" dirty="0">
                 <a:solidFill>
                   <a:schemeClr val="tx1">
                     <a:lumMod val="85000"/>
@@ -5843,7 +5844,7 @@
               <a:t> 부득이 두 가지의 </a:t>
             </a:r>
             <a:r>
-              <a:rPr lang="en-US" altLang="ko-KR" sz="1100" dirty="0">
+              <a:rPr lang="en-US" altLang="ko-KR" sz="825" dirty="0">
                 <a:solidFill>
                   <a:schemeClr val="tx1">
                     <a:lumMod val="85000"/>
@@ -5857,7 +5858,7 @@
               <a:t>API </a:t>
             </a:r>
             <a:r>
-              <a:rPr lang="ko-KR" altLang="en-US" sz="1100" dirty="0">
+              <a:rPr lang="ko-KR" altLang="en-US" sz="825" dirty="0">
                 <a:solidFill>
                   <a:schemeClr val="tx1">
                     <a:lumMod val="85000"/>
@@ -5871,7 +5872,7 @@
               <a:t>요청 결과를 조합하여 사용하는 형태로 </a:t>
             </a:r>
             <a:r>
-              <a:rPr lang="en-US" altLang="ko-KR" sz="1100" dirty="0">
+              <a:rPr lang="en-US" altLang="ko-KR" sz="825" dirty="0">
                 <a:solidFill>
                   <a:schemeClr val="tx1">
                     <a:lumMod val="85000"/>
@@ -5885,7 +5886,7 @@
               <a:t>DB</a:t>
             </a:r>
             <a:r>
-              <a:rPr lang="ko-KR" altLang="en-US" sz="1100" dirty="0" err="1">
+              <a:rPr lang="ko-KR" altLang="en-US" sz="825" dirty="0" err="1">
                 <a:solidFill>
                   <a:schemeClr val="tx1">
                     <a:lumMod val="85000"/>
@@ -5899,7 +5900,7 @@
               <a:t>에</a:t>
             </a:r>
             <a:r>
-              <a:rPr lang="ko-KR" altLang="en-US" sz="1100" dirty="0">
+              <a:rPr lang="ko-KR" altLang="en-US" sz="825" dirty="0">
                 <a:solidFill>
                   <a:schemeClr val="tx1">
                     <a:lumMod val="85000"/>
@@ -5913,7 +5914,7 @@
               <a:t> 저장하는 구조를 취하게 되었습니다</a:t>
             </a:r>
             <a:r>
-              <a:rPr lang="en-US" altLang="ko-KR" sz="1100" dirty="0">
+              <a:rPr lang="en-US" altLang="ko-KR" sz="825" dirty="0">
                 <a:solidFill>
                   <a:schemeClr val="tx1">
                     <a:lumMod val="85000"/>
@@ -5927,7 +5928,7 @@
               <a:t>.</a:t>
             </a:r>
             <a:r>
-              <a:rPr lang="ko-KR" altLang="en-US" sz="1100" dirty="0">
+              <a:rPr lang="ko-KR" altLang="en-US" sz="825" dirty="0">
                 <a:solidFill>
                   <a:schemeClr val="tx1">
                     <a:lumMod val="85000"/>
@@ -5941,7 +5942,7 @@
               <a:t> 우선 </a:t>
             </a:r>
             <a:r>
-              <a:rPr lang="en-US" altLang="ko-KR" sz="1100" dirty="0">
+              <a:rPr lang="en-US" altLang="ko-KR" sz="825" dirty="0">
                 <a:solidFill>
                   <a:schemeClr val="tx1">
                     <a:lumMod val="85000"/>
@@ -5955,7 +5956,7 @@
               <a:t>‘</a:t>
             </a:r>
             <a:r>
-              <a:rPr lang="ko-KR" altLang="en-US" sz="1100" dirty="0">
+              <a:rPr lang="ko-KR" altLang="en-US" sz="825" dirty="0">
                 <a:solidFill>
                   <a:schemeClr val="tx1">
                     <a:lumMod val="85000"/>
@@ -5969,7 +5970,7 @@
               <a:t>서울시 상권분석서비스</a:t>
             </a:r>
             <a:r>
-              <a:rPr lang="en-US" altLang="ko-KR" sz="1100" dirty="0">
+              <a:rPr lang="en-US" altLang="ko-KR" sz="825" dirty="0">
                 <a:solidFill>
                   <a:schemeClr val="tx1">
                     <a:lumMod val="85000"/>
@@ -5983,7 +5984,7 @@
               <a:t>(</a:t>
             </a:r>
             <a:r>
-              <a:rPr lang="ko-KR" altLang="en-US" sz="1100" dirty="0">
+              <a:rPr lang="ko-KR" altLang="en-US" sz="825" dirty="0">
                 <a:solidFill>
                   <a:schemeClr val="tx1">
                     <a:lumMod val="85000"/>
@@ -5997,7 +5998,7 @@
               <a:t>영역</a:t>
             </a:r>
             <a:r>
-              <a:rPr lang="en-US" altLang="ko-KR" sz="1100" dirty="0">
+              <a:rPr lang="en-US" altLang="ko-KR" sz="825" dirty="0">
                 <a:solidFill>
                   <a:schemeClr val="tx1">
                     <a:lumMod val="85000"/>
@@ -6011,7 +6012,7 @@
               <a:t>-</a:t>
             </a:r>
             <a:r>
-              <a:rPr lang="ko-KR" altLang="en-US" sz="1100" dirty="0">
+              <a:rPr lang="ko-KR" altLang="en-US" sz="825" dirty="0">
                 <a:solidFill>
                   <a:schemeClr val="tx1">
                     <a:lumMod val="85000"/>
@@ -6025,7 +6026,7 @@
               <a:t>행정동</a:t>
             </a:r>
             <a:r>
-              <a:rPr lang="en-US" altLang="ko-KR" sz="1100" dirty="0">
+              <a:rPr lang="en-US" altLang="ko-KR" sz="825" dirty="0">
                 <a:solidFill>
                   <a:schemeClr val="tx1">
                     <a:lumMod val="85000"/>
@@ -6039,7 +6040,7 @@
               <a:t>)’</a:t>
             </a:r>
             <a:r>
-              <a:rPr lang="ko-KR" altLang="en-US" sz="1100" dirty="0">
+              <a:rPr lang="ko-KR" altLang="en-US" sz="825" dirty="0">
                 <a:solidFill>
                   <a:schemeClr val="tx1">
                     <a:lumMod val="85000"/>
@@ -6053,7 +6054,7 @@
               <a:t>에서 현재 존재하는 행정동의 식별 </a:t>
             </a:r>
             <a:r>
-              <a:rPr lang="en-US" altLang="ko-KR" sz="1100" dirty="0">
+              <a:rPr lang="en-US" altLang="ko-KR" sz="825" dirty="0">
                 <a:solidFill>
                   <a:schemeClr val="tx1">
                     <a:lumMod val="85000"/>
@@ -6067,7 +6068,7 @@
               <a:t>ID</a:t>
             </a:r>
             <a:r>
-              <a:rPr lang="ko-KR" altLang="en-US" sz="1100" dirty="0">
+              <a:rPr lang="ko-KR" altLang="en-US" sz="825" dirty="0">
                 <a:solidFill>
                   <a:schemeClr val="tx1">
                     <a:lumMod val="85000"/>
@@ -6081,7 +6082,7 @@
               <a:t>와 그에 대응하는 한글명을 받아옵니다</a:t>
             </a:r>
             <a:r>
-              <a:rPr lang="en-US" altLang="ko-KR" sz="1100" dirty="0">
+              <a:rPr lang="en-US" altLang="ko-KR" sz="825" dirty="0">
                 <a:solidFill>
                   <a:schemeClr val="tx1">
                     <a:lumMod val="85000"/>
@@ -6095,7 +6096,7 @@
               <a:t>.</a:t>
             </a:r>
             <a:r>
-              <a:rPr lang="ko-KR" altLang="en-US" sz="1100" dirty="0">
+              <a:rPr lang="ko-KR" altLang="en-US" sz="825" dirty="0">
                 <a:solidFill>
                   <a:schemeClr val="tx1">
                     <a:lumMod val="85000"/>
@@ -6109,7 +6110,7 @@
               <a:t> 그런 다음</a:t>
             </a:r>
             <a:r>
-              <a:rPr lang="en-US" altLang="ko-KR" sz="1100" dirty="0">
+              <a:rPr lang="en-US" altLang="ko-KR" sz="825" dirty="0">
                 <a:solidFill>
                   <a:schemeClr val="tx1">
                     <a:lumMod val="85000"/>
@@ -6123,7 +6124,7 @@
               <a:t>,</a:t>
             </a:r>
             <a:r>
-              <a:rPr lang="ko-KR" altLang="en-US" sz="1100" dirty="0">
+              <a:rPr lang="ko-KR" altLang="en-US" sz="825" dirty="0">
                 <a:solidFill>
                   <a:schemeClr val="tx1">
                     <a:lumMod val="85000"/>
@@ -6137,7 +6138,7 @@
               <a:t> </a:t>
             </a:r>
             <a:r>
-              <a:rPr lang="en-US" altLang="ko-KR" sz="1100" dirty="0">
+              <a:rPr lang="en-US" altLang="ko-KR" sz="825" dirty="0">
                 <a:solidFill>
                   <a:schemeClr val="tx1">
                     <a:lumMod val="85000"/>
@@ -6151,7 +6152,7 @@
               <a:t>‘</a:t>
             </a:r>
             <a:r>
-              <a:rPr lang="ko-KR" altLang="en-US" sz="1100" dirty="0">
+              <a:rPr lang="ko-KR" altLang="en-US" sz="825" dirty="0">
                 <a:solidFill>
                   <a:schemeClr val="tx1">
                     <a:lumMod val="85000"/>
@@ -6165,7 +6166,7 @@
               <a:t>행정동 단위 서울 생활인구</a:t>
             </a:r>
             <a:r>
-              <a:rPr lang="en-US" altLang="ko-KR" sz="1100" dirty="0">
+              <a:rPr lang="en-US" altLang="ko-KR" sz="825" dirty="0">
                 <a:solidFill>
                   <a:schemeClr val="tx1">
                     <a:lumMod val="85000"/>
@@ -6179,7 +6180,7 @@
               <a:t>(</a:t>
             </a:r>
             <a:r>
-              <a:rPr lang="ko-KR" altLang="en-US" sz="1100" dirty="0">
+              <a:rPr lang="ko-KR" altLang="en-US" sz="825" dirty="0">
                 <a:solidFill>
                   <a:schemeClr val="tx1">
                     <a:lumMod val="85000"/>
@@ -6193,7 +6194,7 @@
               <a:t>내국인</a:t>
             </a:r>
             <a:r>
-              <a:rPr lang="en-US" altLang="ko-KR" sz="1100" dirty="0">
+              <a:rPr lang="en-US" altLang="ko-KR" sz="825" dirty="0">
                 <a:solidFill>
                   <a:schemeClr val="tx1">
                     <a:lumMod val="85000"/>
@@ -6207,7 +6208,7 @@
               <a:t>)’</a:t>
             </a:r>
             <a:r>
-              <a:rPr lang="ko-KR" altLang="en-US" sz="1100" dirty="0">
+              <a:rPr lang="ko-KR" altLang="en-US" sz="825" dirty="0">
                 <a:solidFill>
                   <a:schemeClr val="tx1">
                     <a:lumMod val="85000"/>
@@ -6221,7 +6222,7 @@
               <a:t> 에서 행정동의 식별 </a:t>
             </a:r>
             <a:r>
-              <a:rPr lang="en-US" altLang="ko-KR" sz="1100" dirty="0">
+              <a:rPr lang="en-US" altLang="ko-KR" sz="825" dirty="0">
                 <a:solidFill>
                   <a:schemeClr val="tx1">
                     <a:lumMod val="85000"/>
@@ -6235,7 +6236,7 @@
               <a:t>ID</a:t>
             </a:r>
             <a:r>
-              <a:rPr lang="ko-KR" altLang="en-US" sz="1100" dirty="0">
+              <a:rPr lang="ko-KR" altLang="en-US" sz="825" dirty="0">
                 <a:solidFill>
                   <a:schemeClr val="tx1">
                     <a:lumMod val="85000"/>
@@ -6249,7 +6250,7 @@
               <a:t>별 평균 인구수를 받아옵니다</a:t>
             </a:r>
             <a:r>
-              <a:rPr lang="en-US" altLang="ko-KR" sz="1100" dirty="0">
+              <a:rPr lang="en-US" altLang="ko-KR" sz="825" dirty="0">
                 <a:solidFill>
                   <a:schemeClr val="tx1">
                     <a:lumMod val="85000"/>
@@ -6263,7 +6264,7 @@
               <a:t>.</a:t>
             </a:r>
             <a:r>
-              <a:rPr lang="ko-KR" altLang="en-US" sz="1100" dirty="0">
+              <a:rPr lang="ko-KR" altLang="en-US" sz="825" dirty="0">
                 <a:solidFill>
                   <a:schemeClr val="tx1">
                     <a:lumMod val="85000"/>
@@ -6277,7 +6278,7 @@
               <a:t> </a:t>
             </a:r>
             <a:r>
-              <a:rPr lang="ko-KR" altLang="en-US" sz="1100" dirty="0">
+              <a:rPr lang="ko-KR" altLang="en-US" sz="825" dirty="0">
                 <a:solidFill>
                   <a:schemeClr val="tx1">
                     <a:lumMod val="85000"/>
@@ -6294,7 +6295,7 @@
               <a:t>해당 데이터는 매일 최신화가 </a:t>
             </a:r>
             <a:r>
-              <a:rPr lang="ko-KR" altLang="en-US" sz="1100" dirty="0" err="1">
+              <a:rPr lang="ko-KR" altLang="en-US" sz="825" dirty="0" err="1">
                 <a:solidFill>
                   <a:schemeClr val="tx1">
                     <a:lumMod val="85000"/>
@@ -6311,7 +6312,7 @@
               <a:t>명세되어</a:t>
             </a:r>
             <a:r>
-              <a:rPr lang="ko-KR" altLang="en-US" sz="1100" dirty="0">
+              <a:rPr lang="ko-KR" altLang="en-US" sz="825" dirty="0">
                 <a:solidFill>
                   <a:schemeClr val="tx1">
                     <a:lumMod val="85000"/>
@@ -6328,7 +6329,7 @@
               <a:t> 있지만</a:t>
             </a:r>
             <a:r>
-              <a:rPr lang="en-US" altLang="ko-KR" sz="1100" dirty="0">
+              <a:rPr lang="en-US" altLang="ko-KR" sz="825" dirty="0">
                 <a:solidFill>
                   <a:schemeClr val="tx1">
                     <a:lumMod val="85000"/>
@@ -6345,7 +6346,7 @@
               <a:t>,</a:t>
             </a:r>
             <a:r>
-              <a:rPr lang="ko-KR" altLang="en-US" sz="1100" dirty="0">
+              <a:rPr lang="ko-KR" altLang="en-US" sz="825" dirty="0">
                 <a:solidFill>
                   <a:schemeClr val="tx1">
                     <a:lumMod val="85000"/>
@@ -6362,7 +6363,7 @@
               <a:t> 조회 시간에 따라 해당 날짜의 최신 데이터가 아직 올라오지 않는 경우가 있었습니다</a:t>
             </a:r>
             <a:r>
-              <a:rPr lang="en-US" altLang="ko-KR" sz="1100" dirty="0">
+              <a:rPr lang="en-US" altLang="ko-KR" sz="825" dirty="0">
                 <a:solidFill>
                   <a:schemeClr val="tx1">
                     <a:lumMod val="85000"/>
@@ -6379,7 +6380,7 @@
               <a:t>.</a:t>
             </a:r>
             <a:r>
-              <a:rPr lang="ko-KR" altLang="en-US" sz="1100" dirty="0">
+              <a:rPr lang="ko-KR" altLang="en-US" sz="825" dirty="0">
                 <a:solidFill>
                   <a:schemeClr val="tx1">
                     <a:lumMod val="85000"/>
@@ -6393,7 +6394,7 @@
               <a:t> 그래서</a:t>
             </a:r>
             <a:r>
-              <a:rPr lang="en-US" altLang="ko-KR" sz="1100" dirty="0">
+              <a:rPr lang="en-US" altLang="ko-KR" sz="825" dirty="0">
                 <a:solidFill>
                   <a:schemeClr val="tx1">
                     <a:lumMod val="85000"/>
@@ -6407,7 +6408,7 @@
               <a:t>,</a:t>
             </a:r>
             <a:r>
-              <a:rPr lang="ko-KR" altLang="en-US" sz="1100" dirty="0">
+              <a:rPr lang="ko-KR" altLang="en-US" sz="825" dirty="0">
                 <a:solidFill>
                   <a:schemeClr val="tx1">
                     <a:lumMod val="85000"/>
@@ -6421,7 +6422,7 @@
               <a:t> 현재 날짜로부터 과거 </a:t>
             </a:r>
             <a:r>
-              <a:rPr lang="en-US" altLang="ko-KR" sz="1100" dirty="0">
+              <a:rPr lang="en-US" altLang="ko-KR" sz="825" dirty="0">
                 <a:solidFill>
                   <a:schemeClr val="tx1">
                     <a:lumMod val="85000"/>
@@ -6435,7 +6436,7 @@
               <a:t>7</a:t>
             </a:r>
             <a:r>
-              <a:rPr lang="ko-KR" altLang="en-US" sz="1100" dirty="0">
+              <a:rPr lang="ko-KR" altLang="en-US" sz="825" dirty="0">
                 <a:solidFill>
                   <a:schemeClr val="tx1">
                     <a:lumMod val="85000"/>
@@ -6449,7 +6450,7 @@
               <a:t>일간의 데이터 존재 여부를 확인하고</a:t>
             </a:r>
             <a:r>
-              <a:rPr lang="en-US" altLang="ko-KR" sz="1100" dirty="0">
+              <a:rPr lang="en-US" altLang="ko-KR" sz="825" dirty="0">
                 <a:solidFill>
                   <a:schemeClr val="tx1">
                     <a:lumMod val="85000"/>
@@ -6463,7 +6464,7 @@
               <a:t>,</a:t>
             </a:r>
             <a:r>
-              <a:rPr lang="ko-KR" altLang="en-US" sz="1100" dirty="0">
+              <a:rPr lang="ko-KR" altLang="en-US" sz="825" dirty="0">
                 <a:solidFill>
                   <a:schemeClr val="tx1">
                     <a:lumMod val="85000"/>
@@ -6477,7 +6478,7 @@
               <a:t> 데이터가 있는 가장 최근 날짜의 정보를 받아옵니다</a:t>
             </a:r>
             <a:r>
-              <a:rPr lang="en-US" altLang="ko-KR" sz="1100" dirty="0">
+              <a:rPr lang="en-US" altLang="ko-KR" sz="825" dirty="0">
                 <a:solidFill>
                   <a:schemeClr val="tx1">
                     <a:lumMod val="85000"/>
@@ -6491,7 +6492,7 @@
               <a:t>.</a:t>
             </a:r>
             <a:r>
-              <a:rPr lang="ko-KR" altLang="en-US" sz="1100" dirty="0">
+              <a:rPr lang="ko-KR" altLang="en-US" sz="825" dirty="0">
                 <a:solidFill>
                   <a:schemeClr val="tx1">
                     <a:lumMod val="85000"/>
@@ -6505,7 +6506,7 @@
               <a:t> 해당 </a:t>
             </a:r>
             <a:r>
-              <a:rPr lang="en-US" altLang="ko-KR" sz="1100" dirty="0">
+              <a:rPr lang="en-US" altLang="ko-KR" sz="825" dirty="0">
                 <a:solidFill>
                   <a:schemeClr val="tx1">
                     <a:lumMod val="85000"/>
@@ -6519,7 +6520,7 @@
               <a:t>API</a:t>
             </a:r>
             <a:r>
-              <a:rPr lang="ko-KR" altLang="en-US" sz="1100" dirty="0">
+              <a:rPr lang="ko-KR" altLang="en-US" sz="825" dirty="0">
                 <a:solidFill>
                   <a:schemeClr val="tx1">
                     <a:lumMod val="85000"/>
@@ -6533,7 +6534,7 @@
               <a:t>에서는 </a:t>
             </a:r>
             <a:r>
-              <a:rPr lang="en-US" altLang="ko-KR" sz="1100" dirty="0">
+              <a:rPr lang="en-US" altLang="ko-KR" sz="825" dirty="0">
                 <a:solidFill>
                   <a:schemeClr val="tx1">
                     <a:lumMod val="85000"/>
@@ -6547,7 +6548,7 @@
               <a:t>24</a:t>
             </a:r>
             <a:r>
-              <a:rPr lang="ko-KR" altLang="en-US" sz="1100" dirty="0">
+              <a:rPr lang="ko-KR" altLang="en-US" sz="825" dirty="0">
                 <a:solidFill>
                   <a:schemeClr val="tx1">
                     <a:lumMod val="85000"/>
@@ -6561,7 +6562,7 @@
               <a:t>시간 시간별로 인구 수 데이터를 개별적으로 제공하기 때문에</a:t>
             </a:r>
             <a:r>
-              <a:rPr lang="en-US" altLang="ko-KR" sz="1100" dirty="0">
+              <a:rPr lang="en-US" altLang="ko-KR" sz="825" dirty="0">
                 <a:solidFill>
                   <a:schemeClr val="tx1">
                     <a:lumMod val="85000"/>
@@ -6575,7 +6576,7 @@
               <a:t>,</a:t>
             </a:r>
             <a:r>
-              <a:rPr lang="ko-KR" altLang="en-US" sz="1100" dirty="0">
+              <a:rPr lang="ko-KR" altLang="en-US" sz="825" dirty="0">
                 <a:solidFill>
                   <a:schemeClr val="tx1">
                     <a:lumMod val="85000"/>
@@ -6589,7 +6590,7 @@
               <a:t> 취합을 위해 하루 간의 평균 인구수를 계산하여 최종적으로 해당 데이터를 </a:t>
             </a:r>
             <a:r>
-              <a:rPr lang="en-US" altLang="ko-KR" sz="1100" dirty="0">
+              <a:rPr lang="en-US" altLang="ko-KR" sz="825" dirty="0">
                 <a:solidFill>
                   <a:schemeClr val="tx1">
                     <a:lumMod val="85000"/>
@@ -6603,7 +6604,7 @@
               <a:t>DB</a:t>
             </a:r>
             <a:r>
-              <a:rPr lang="ko-KR" altLang="en-US" sz="1100" dirty="0" err="1">
+              <a:rPr lang="ko-KR" altLang="en-US" sz="825" dirty="0" err="1">
                 <a:solidFill>
                   <a:schemeClr val="tx1">
                     <a:lumMod val="85000"/>
@@ -6617,7 +6618,7 @@
               <a:t>에</a:t>
             </a:r>
             <a:r>
-              <a:rPr lang="ko-KR" altLang="en-US" sz="1100" dirty="0">
+              <a:rPr lang="ko-KR" altLang="en-US" sz="825" dirty="0">
                 <a:solidFill>
                   <a:schemeClr val="tx1">
                     <a:lumMod val="85000"/>
@@ -6631,7 +6632,7 @@
               <a:t> 저장하게 됩니다</a:t>
             </a:r>
             <a:r>
-              <a:rPr lang="en-US" altLang="ko-KR" sz="1100" dirty="0">
+              <a:rPr lang="en-US" altLang="ko-KR" sz="825" dirty="0">
                 <a:solidFill>
                   <a:schemeClr val="tx1">
                     <a:lumMod val="85000"/>
@@ -6645,7 +6646,7 @@
               <a:t>.</a:t>
             </a:r>
             <a:r>
-              <a:rPr lang="ko-KR" altLang="en-US" sz="1100" dirty="0">
+              <a:rPr lang="ko-KR" altLang="en-US" sz="825" dirty="0">
                 <a:solidFill>
                   <a:schemeClr val="tx1">
                     <a:lumMod val="85000"/>
@@ -6659,7 +6660,7 @@
               <a:t> </a:t>
             </a:r>
             <a:r>
-              <a:rPr lang="en-US" altLang="ko-KR" sz="1100" dirty="0">
+              <a:rPr lang="en-US" altLang="ko-KR" sz="825" dirty="0">
                 <a:solidFill>
                   <a:schemeClr val="tx1">
                     <a:lumMod val="85000"/>
@@ -6673,7 +6674,7 @@
               <a:t>24</a:t>
             </a:r>
             <a:r>
-              <a:rPr lang="ko-KR" altLang="en-US" sz="1100" dirty="0">
+              <a:rPr lang="ko-KR" altLang="en-US" sz="825" dirty="0">
                 <a:solidFill>
                   <a:schemeClr val="tx1">
                     <a:lumMod val="85000"/>
@@ -6687,7 +6688,7 @@
               <a:t>시간 </a:t>
             </a:r>
             <a:r>
-              <a:rPr lang="en-US" altLang="ko-KR" sz="1100" dirty="0">
+              <a:rPr lang="en-US" altLang="ko-KR" sz="825" dirty="0">
                 <a:solidFill>
                   <a:schemeClr val="tx1">
                     <a:lumMod val="85000"/>
@@ -6701,7 +6702,7 @@
               <a:t>×  400</a:t>
             </a:r>
             <a:r>
-              <a:rPr lang="ko-KR" altLang="en-US" sz="1100" dirty="0">
+              <a:rPr lang="ko-KR" altLang="en-US" sz="825" dirty="0">
                 <a:solidFill>
                   <a:schemeClr val="tx1">
                     <a:lumMod val="85000"/>
@@ -6715,7 +6716,7 @@
               <a:t>여 곳의 행정동 정보를 받아오기 때문에 </a:t>
             </a:r>
             <a:r>
-              <a:rPr lang="ko-KR" altLang="en-US" sz="1100" dirty="0">
+              <a:rPr lang="ko-KR" altLang="en-US" sz="825" dirty="0">
                 <a:solidFill>
                   <a:schemeClr val="tx1">
                     <a:lumMod val="85000"/>
@@ -6732,7 +6733,7 @@
               <a:t>만 건이 넘는 자료의 요청을 보내야 하지만</a:t>
             </a:r>
             <a:r>
-              <a:rPr lang="en-US" altLang="ko-KR" sz="1100" dirty="0">
+              <a:rPr lang="en-US" altLang="ko-KR" sz="825" dirty="0">
                 <a:solidFill>
                   <a:schemeClr val="tx1">
                     <a:lumMod val="85000"/>
@@ -6749,7 +6750,7 @@
               <a:t>,</a:t>
             </a:r>
             <a:r>
-              <a:rPr lang="ko-KR" altLang="en-US" sz="1100" dirty="0">
+              <a:rPr lang="ko-KR" altLang="en-US" sz="825" dirty="0">
                 <a:solidFill>
                   <a:schemeClr val="tx1">
                     <a:lumMod val="85000"/>
@@ -6766,7 +6767,7 @@
               <a:t> 서울시 </a:t>
             </a:r>
             <a:r>
-              <a:rPr lang="en-US" altLang="ko-KR" sz="1100" dirty="0">
+              <a:rPr lang="en-US" altLang="ko-KR" sz="825" dirty="0">
                 <a:solidFill>
                   <a:schemeClr val="tx1">
                     <a:lumMod val="85000"/>
@@ -6783,7 +6784,7 @@
               <a:t>API</a:t>
             </a:r>
             <a:r>
-              <a:rPr lang="ko-KR" altLang="en-US" sz="1100" dirty="0">
+              <a:rPr lang="ko-KR" altLang="en-US" sz="825" dirty="0">
                 <a:solidFill>
                   <a:schemeClr val="tx1">
                     <a:lumMod val="85000"/>
@@ -6800,7 +6801,7 @@
               <a:t>에서는 한 번에 </a:t>
             </a:r>
             <a:r>
-              <a:rPr lang="en-US" altLang="ko-KR" sz="1100" dirty="0">
+              <a:rPr lang="en-US" altLang="ko-KR" sz="825" dirty="0">
                 <a:solidFill>
                   <a:schemeClr val="tx1">
                     <a:lumMod val="85000"/>
@@ -6817,7 +6818,7 @@
               <a:t>1,000</a:t>
             </a:r>
             <a:r>
-              <a:rPr lang="ko-KR" altLang="en-US" sz="1100" dirty="0">
+              <a:rPr lang="ko-KR" altLang="en-US" sz="825" dirty="0">
                 <a:solidFill>
                   <a:schemeClr val="tx1">
                     <a:lumMod val="85000"/>
@@ -6834,7 +6835,7 @@
               <a:t>건 까지의 요청만 접수하였습니다</a:t>
             </a:r>
             <a:r>
-              <a:rPr lang="en-US" altLang="ko-KR" sz="1100" dirty="0">
+              <a:rPr lang="en-US" altLang="ko-KR" sz="825" dirty="0">
                 <a:solidFill>
                   <a:schemeClr val="tx1">
                     <a:lumMod val="85000"/>
@@ -6851,7 +6852,7 @@
               <a:t>.</a:t>
             </a:r>
             <a:r>
-              <a:rPr lang="ko-KR" altLang="en-US" sz="1100" dirty="0">
+              <a:rPr lang="ko-KR" altLang="en-US" sz="825" dirty="0">
                 <a:solidFill>
                   <a:schemeClr val="tx1">
                     <a:lumMod val="85000"/>
@@ -6865,7 +6866,7 @@
               <a:t> 그래서 </a:t>
             </a:r>
             <a:r>
-              <a:rPr lang="en-US" altLang="ko-KR" sz="1100" dirty="0">
+              <a:rPr lang="en-US" altLang="ko-KR" sz="825" dirty="0">
                 <a:solidFill>
                   <a:schemeClr val="tx1">
                     <a:lumMod val="85000"/>
@@ -6879,7 +6880,7 @@
               <a:t>API</a:t>
             </a:r>
             <a:r>
-              <a:rPr lang="ko-KR" altLang="en-US" sz="1100" dirty="0">
+              <a:rPr lang="ko-KR" altLang="en-US" sz="825" dirty="0">
                 <a:solidFill>
                   <a:schemeClr val="tx1">
                     <a:lumMod val="85000"/>
@@ -6893,7 +6894,7 @@
               <a:t> 자체적으로 제공해 주는 전체 데이터 개수를 파악한 후</a:t>
             </a:r>
             <a:r>
-              <a:rPr lang="en-US" altLang="ko-KR" sz="1100" dirty="0">
+              <a:rPr lang="en-US" altLang="ko-KR" sz="825" dirty="0">
                 <a:solidFill>
                   <a:schemeClr val="tx1">
                     <a:lumMod val="85000"/>
@@ -6907,7 +6908,7 @@
               <a:t>,</a:t>
             </a:r>
             <a:r>
-              <a:rPr lang="ko-KR" altLang="en-US" sz="1100" dirty="0">
+              <a:rPr lang="ko-KR" altLang="en-US" sz="825" dirty="0">
                 <a:solidFill>
                   <a:schemeClr val="tx1">
                     <a:lumMod val="85000"/>
@@ -6921,7 +6922,7 @@
               <a:t> </a:t>
             </a:r>
             <a:r>
-              <a:rPr lang="ko-KR" altLang="en-US" sz="1100" dirty="0" err="1">
+              <a:rPr lang="ko-KR" altLang="en-US" sz="825" dirty="0" err="1">
                 <a:solidFill>
                   <a:schemeClr val="tx1">
                     <a:lumMod val="85000"/>
@@ -6935,7 +6936,7 @@
               <a:t>페이지네이션을</a:t>
             </a:r>
             <a:r>
-              <a:rPr lang="ko-KR" altLang="en-US" sz="1100" dirty="0">
+              <a:rPr lang="ko-KR" altLang="en-US" sz="825" dirty="0">
                 <a:solidFill>
                   <a:schemeClr val="tx1">
                     <a:lumMod val="85000"/>
@@ -6949,7 +6950,7 @@
               <a:t> 통해 </a:t>
             </a:r>
             <a:r>
-              <a:rPr lang="en-US" altLang="ko-KR" sz="1100" dirty="0">
+              <a:rPr lang="en-US" altLang="ko-KR" sz="825" dirty="0">
                 <a:solidFill>
                   <a:schemeClr val="tx1">
                     <a:lumMod val="85000"/>
@@ -6963,7 +6964,7 @@
               <a:t>1,000</a:t>
             </a:r>
             <a:r>
-              <a:rPr lang="ko-KR" altLang="en-US" sz="1100" dirty="0">
+              <a:rPr lang="ko-KR" altLang="en-US" sz="825" dirty="0">
                 <a:solidFill>
                   <a:schemeClr val="tx1">
                     <a:lumMod val="85000"/>
@@ -6977,7 +6978,7 @@
               <a:t>건씩 나누어 요청을 보내는 식으로 처리하였습니다</a:t>
             </a:r>
             <a:r>
-              <a:rPr lang="en-US" altLang="ko-KR" sz="1100" dirty="0">
+              <a:rPr lang="en-US" altLang="ko-KR" sz="825" dirty="0">
                 <a:solidFill>
                   <a:schemeClr val="tx1">
                     <a:lumMod val="85000"/>
@@ -7007,8 +7008,8 @@
         </p:nvSpPr>
         <p:spPr>
           <a:xfrm>
-            <a:off x="2880764" y="2006993"/>
-            <a:ext cx="5992462" cy="691664"/>
+            <a:off x="2160573" y="1505245"/>
+            <a:ext cx="4494347" cy="541815"/>
           </a:xfrm>
           <a:prstGeom prst="rect">
             <a:avLst/>
@@ -7027,7 +7028,7 @@
               </a:lnSpc>
             </a:pPr>
             <a:r>
-              <a:rPr lang="en-US" altLang="ko-KR" sz="900" b="1" dirty="0" err="1">
+              <a:rPr lang="en-US" altLang="ko-KR" sz="675" b="1" dirty="0" err="1">
                 <a:solidFill>
                   <a:schemeClr val="tx1">
                     <a:lumMod val="85000"/>
@@ -7041,7 +7042,7 @@
               <a:t>district_id</a:t>
             </a:r>
             <a:r>
-              <a:rPr lang="en-US" altLang="ko-KR" sz="900" dirty="0">
+              <a:rPr lang="en-US" altLang="ko-KR" sz="675" dirty="0">
                 <a:solidFill>
                   <a:schemeClr val="tx1">
                     <a:lumMod val="85000"/>
@@ -7055,7 +7056,7 @@
               <a:t>: </a:t>
             </a:r>
             <a:r>
-              <a:rPr lang="ko-KR" altLang="en-US" sz="900" dirty="0">
+              <a:rPr lang="ko-KR" altLang="en-US" sz="675" dirty="0">
                 <a:solidFill>
                   <a:schemeClr val="tx1">
                     <a:lumMod val="85000"/>
@@ -7069,7 +7070,7 @@
               <a:t>행정동별 데이터의 구분을 위한</a:t>
             </a:r>
             <a:r>
-              <a:rPr lang="en-US" altLang="ko-KR" sz="900" dirty="0">
+              <a:rPr lang="en-US" altLang="ko-KR" sz="675" dirty="0">
                 <a:solidFill>
                   <a:schemeClr val="tx1">
                     <a:lumMod val="85000"/>
@@ -7083,7 +7084,7 @@
               <a:t> ID</a:t>
             </a:r>
             <a:r>
-              <a:rPr lang="ko-KR" altLang="en-US" sz="900" dirty="0" err="1">
+              <a:rPr lang="ko-KR" altLang="en-US" sz="675" dirty="0" err="1">
                 <a:solidFill>
                   <a:schemeClr val="tx1">
                     <a:lumMod val="85000"/>
@@ -7097,7 +7098,7 @@
               <a:t>를</a:t>
             </a:r>
             <a:r>
-              <a:rPr lang="ko-KR" altLang="en-US" sz="900" dirty="0">
+              <a:rPr lang="ko-KR" altLang="en-US" sz="675" dirty="0">
                 <a:solidFill>
                   <a:schemeClr val="tx1">
                     <a:lumMod val="85000"/>
@@ -7111,7 +7112,7 @@
               <a:t> 담은 데이터입니다</a:t>
             </a:r>
             <a:r>
-              <a:rPr lang="en-US" altLang="ko-KR" sz="900" dirty="0">
+              <a:rPr lang="en-US" altLang="ko-KR" sz="675" dirty="0">
                 <a:solidFill>
                   <a:schemeClr val="tx1">
                     <a:lumMod val="85000"/>
@@ -7132,7 +7133,7 @@
               </a:lnSpc>
             </a:pPr>
             <a:r>
-              <a:rPr lang="en-US" altLang="ko-KR" sz="900" b="1" dirty="0">
+              <a:rPr lang="en-US" altLang="ko-KR" sz="675" b="1" dirty="0">
                 <a:solidFill>
                   <a:schemeClr val="tx1">
                     <a:lumMod val="85000"/>
@@ -7146,7 +7147,7 @@
               <a:t>name</a:t>
             </a:r>
             <a:r>
-              <a:rPr lang="en-US" altLang="ko-KR" sz="900" dirty="0">
+              <a:rPr lang="en-US" altLang="ko-KR" sz="675" dirty="0">
                 <a:solidFill>
                   <a:schemeClr val="tx1">
                     <a:lumMod val="85000"/>
@@ -7160,7 +7161,7 @@
               <a:t>: </a:t>
             </a:r>
             <a:r>
-              <a:rPr lang="ko-KR" altLang="en-US" sz="900" dirty="0">
+              <a:rPr lang="ko-KR" altLang="en-US" sz="675" dirty="0">
                 <a:solidFill>
                   <a:schemeClr val="tx1">
                     <a:lumMod val="85000"/>
@@ -7174,7 +7175,7 @@
               <a:t>사용자에게 데이터를 출력할 때를 고려하여</a:t>
             </a:r>
             <a:r>
-              <a:rPr lang="en-US" altLang="ko-KR" sz="900" dirty="0">
+              <a:rPr lang="en-US" altLang="ko-KR" sz="675" dirty="0">
                 <a:solidFill>
                   <a:schemeClr val="tx1">
                     <a:lumMod val="85000"/>
@@ -7188,7 +7189,7 @@
               <a:t>,</a:t>
             </a:r>
             <a:r>
-              <a:rPr lang="ko-KR" altLang="en-US" sz="900" dirty="0">
+              <a:rPr lang="ko-KR" altLang="en-US" sz="675" dirty="0">
                 <a:solidFill>
                   <a:schemeClr val="tx1">
                     <a:lumMod val="85000"/>
@@ -7202,7 +7203,7 @@
               <a:t> 행정동별</a:t>
             </a:r>
             <a:r>
-              <a:rPr lang="en-US" altLang="ko-KR" sz="900" dirty="0">
+              <a:rPr lang="en-US" altLang="ko-KR" sz="675" dirty="0">
                 <a:solidFill>
                   <a:schemeClr val="tx1">
                     <a:lumMod val="85000"/>
@@ -7216,7 +7217,7 @@
               <a:t> ID</a:t>
             </a:r>
             <a:r>
-              <a:rPr lang="ko-KR" altLang="en-US" sz="900" dirty="0" err="1">
+              <a:rPr lang="ko-KR" altLang="en-US" sz="675" dirty="0" err="1">
                 <a:solidFill>
                   <a:schemeClr val="tx1">
                     <a:lumMod val="85000"/>
@@ -7230,7 +7231,7 @@
               <a:t>에</a:t>
             </a:r>
             <a:r>
-              <a:rPr lang="ko-KR" altLang="en-US" sz="900" dirty="0">
+              <a:rPr lang="ko-KR" altLang="en-US" sz="675" dirty="0">
                 <a:solidFill>
                   <a:schemeClr val="tx1">
                     <a:lumMod val="85000"/>
@@ -7244,7 +7245,7 @@
               <a:t> 따른 행정동 한글명을 담은 데이터입니다</a:t>
             </a:r>
             <a:r>
-              <a:rPr lang="en-US" altLang="ko-KR" sz="900" dirty="0">
+              <a:rPr lang="en-US" altLang="ko-KR" sz="675" dirty="0">
                 <a:solidFill>
                   <a:schemeClr val="tx1">
                     <a:lumMod val="85000"/>
@@ -7265,7 +7266,7 @@
               </a:lnSpc>
             </a:pPr>
             <a:r>
-              <a:rPr lang="en-US" altLang="ko-KR" sz="900" b="1" dirty="0">
+              <a:rPr lang="en-US" altLang="ko-KR" sz="675" b="1" dirty="0">
                 <a:solidFill>
                   <a:schemeClr val="tx1">
                     <a:lumMod val="85000"/>
@@ -7279,7 +7280,7 @@
               <a:t>population</a:t>
             </a:r>
             <a:r>
-              <a:rPr lang="en-US" altLang="ko-KR" sz="900" dirty="0">
+              <a:rPr lang="en-US" altLang="ko-KR" sz="675" dirty="0">
                 <a:solidFill>
                   <a:schemeClr val="tx1">
                     <a:lumMod val="85000"/>
@@ -7293,7 +7294,7 @@
               <a:t>: </a:t>
             </a:r>
             <a:r>
-              <a:rPr lang="ko-KR" altLang="en-US" sz="900" dirty="0">
+              <a:rPr lang="ko-KR" altLang="en-US" sz="675" dirty="0">
                 <a:solidFill>
                   <a:schemeClr val="tx1">
                     <a:lumMod val="85000"/>
@@ -7307,7 +7308,7 @@
               <a:t>인구 수에 대비한 분석을 위해 모으는 인구 수를 담은 데이터입니다</a:t>
             </a:r>
             <a:r>
-              <a:rPr lang="en-US" altLang="ko-KR" sz="900" dirty="0">
+              <a:rPr lang="en-US" altLang="ko-KR" sz="675" dirty="0">
                 <a:solidFill>
                   <a:schemeClr val="tx1">
                     <a:lumMod val="85000"/>
@@ -7339,8 +7340,8 @@
         </p:nvCxnSpPr>
         <p:spPr>
           <a:xfrm>
-            <a:off x="2958353" y="2887688"/>
-            <a:ext cx="5915651" cy="0"/>
+            <a:off x="2218767" y="2165766"/>
+            <a:ext cx="4436738" cy="0"/>
           </a:xfrm>
           <a:prstGeom prst="line">
             <a:avLst/>
@@ -7382,8 +7383,8 @@
         </p:nvCxnSpPr>
         <p:spPr>
           <a:xfrm>
-            <a:off x="0" y="540000"/>
-            <a:ext cx="9144000" cy="0"/>
+            <a:off x="0" y="405000"/>
+            <a:ext cx="6858000" cy="0"/>
           </a:xfrm>
           <a:prstGeom prst="line">
             <a:avLst/>
@@ -7455,14 +7456,14 @@
             </a:extLst>
           </p:cNvPr>
           <p:cNvSpPr>
-            <a:spLocks noGrp="1" noRot="1" noMove="1" noResize="1" noEditPoints="1" noAdjustHandles="1" noChangeArrowheads="1" noChangeShapeType="1"/>
+            <a:spLocks/>
           </p:cNvSpPr>
           <p:nvPr/>
         </p:nvSpPr>
         <p:spPr>
           <a:xfrm>
             <a:off x="0" y="0"/>
-            <a:ext cx="4572000" cy="540000"/>
+            <a:ext cx="3429000" cy="405000"/>
           </a:xfrm>
           <a:prstGeom prst="rect">
             <a:avLst/>
@@ -7493,11 +7494,11 @@
           </a:fontRef>
         </p:style>
         <p:txBody>
-          <a:bodyPr lIns="180000" tIns="46800" rIns="90000" bIns="90000" numCol="1" rtlCol="0" anchor="b"/>
+          <a:bodyPr lIns="135000" tIns="35100" rIns="67500" bIns="67500" numCol="1" rtlCol="0" anchor="b"/>
           <a:lstStyle/>
           <a:p>
             <a:r>
-              <a:rPr lang="en-US" altLang="ko-KR" sz="1200" b="1" dirty="0">
+              <a:rPr lang="en-US" altLang="ko-KR" sz="900" b="1" dirty="0">
                 <a:solidFill>
                   <a:schemeClr val="bg1">
                     <a:lumMod val="65000"/>
@@ -7510,7 +7511,7 @@
               <a:t>./main/</a:t>
             </a:r>
             <a:r>
-              <a:rPr lang="en-US" altLang="ko-KR" sz="1200" b="1" dirty="0" err="1">
+              <a:rPr lang="en-US" altLang="ko-KR" sz="900" b="1" dirty="0" err="1">
                 <a:solidFill>
                   <a:schemeClr val="tx1">
                     <a:lumMod val="85000"/>
@@ -7524,7 +7525,7 @@
               <a:t>models.py</a:t>
             </a:r>
             <a:r>
-              <a:rPr lang="ko-KR" altLang="en-US" sz="1200" b="1" dirty="0">
+              <a:rPr lang="ko-KR" altLang="en-US" sz="900" b="1" dirty="0">
                 <a:solidFill>
                   <a:schemeClr val="tx1">
                     <a:lumMod val="85000"/>
@@ -7538,7 +7539,7 @@
               <a:t> </a:t>
             </a:r>
             <a:r>
-              <a:rPr lang="en-US" altLang="ko-KR" sz="1200" b="1" dirty="0">
+              <a:rPr lang="en-US" altLang="ko-KR" sz="900" b="1" dirty="0">
                 <a:solidFill>
                   <a:schemeClr val="tx1">
                     <a:lumMod val="85000"/>
@@ -7552,7 +7553,7 @@
               <a:t>&gt;</a:t>
             </a:r>
             <a:r>
-              <a:rPr lang="ko-KR" altLang="en-US" sz="1200" b="1" dirty="0">
+              <a:rPr lang="ko-KR" altLang="en-US" sz="900" b="1" dirty="0">
                 <a:solidFill>
                   <a:schemeClr val="tx1">
                     <a:lumMod val="85000"/>
@@ -7566,7 +7567,7 @@
               <a:t> </a:t>
             </a:r>
             <a:r>
-              <a:rPr lang="en-US" altLang="ko-KR" sz="1200" b="1" dirty="0" err="1">
+              <a:rPr lang="en-US" altLang="ko-KR" sz="900" b="1" dirty="0" err="1">
                 <a:solidFill>
                   <a:schemeClr val="tx1">
                     <a:lumMod val="85000"/>
@@ -7579,7 +7580,7 @@
               </a:rPr>
               <a:t>BusStop</a:t>
             </a:r>
-            <a:endParaRPr lang="en-US" altLang="ko-KR" sz="1200" b="1" dirty="0">
+            <a:endParaRPr lang="en-US" altLang="ko-KR" sz="900" b="1" dirty="0">
               <a:solidFill>
                 <a:schemeClr val="tx1">
                   <a:lumMod val="85000"/>
@@ -7609,8 +7610,8 @@
         </p:nvSpPr>
         <p:spPr>
           <a:xfrm>
-            <a:off x="4572000" y="0"/>
-            <a:ext cx="4572000" cy="540000"/>
+            <a:off x="3429000" y="0"/>
+            <a:ext cx="3429000" cy="405000"/>
           </a:xfrm>
           <a:prstGeom prst="rect">
             <a:avLst/>
@@ -7641,12 +7642,12 @@
           </a:fontRef>
         </p:style>
         <p:txBody>
-          <a:bodyPr lIns="90000" tIns="46800" rIns="180000" bIns="90000" numCol="1" rtlCol="0" anchor="b"/>
+          <a:bodyPr lIns="67500" tIns="35100" rIns="135000" bIns="67500" numCol="1" rtlCol="0" anchor="b"/>
           <a:lstStyle/>
           <a:p>
             <a:pPr algn="r"/>
             <a:r>
-              <a:rPr lang="en-US" altLang="ko-KR" sz="1200" b="1" dirty="0" err="1">
+              <a:rPr lang="en-US" altLang="ko-KR" sz="900" b="1" dirty="0" err="1">
                 <a:solidFill>
                   <a:schemeClr val="bg1">
                     <a:lumMod val="65000"/>
@@ -7659,7 +7660,7 @@
               <a:t>seoulbusmap</a:t>
             </a:r>
             <a:r>
-              <a:rPr lang="ko-KR" altLang="en-US" sz="1200" b="1" dirty="0">
+              <a:rPr lang="ko-KR" altLang="en-US" sz="900" b="1" dirty="0">
                 <a:solidFill>
                   <a:schemeClr val="bg1">
                     <a:lumMod val="65000"/>
@@ -7672,7 +7673,7 @@
               <a:t> 프로젝트에 사용될 데이터 구조</a:t>
             </a:r>
             <a:r>
-              <a:rPr lang="en-US" altLang="ko-KR" sz="1200" b="1" dirty="0">
+              <a:rPr lang="en-US" altLang="ko-KR" sz="900" b="1" dirty="0">
                 <a:solidFill>
                   <a:schemeClr val="bg1">
                     <a:lumMod val="65000"/>
@@ -7685,7 +7686,7 @@
               <a:t>(=</a:t>
             </a:r>
             <a:r>
-              <a:rPr lang="ko-KR" altLang="en-US" sz="1200" b="1" dirty="0">
+              <a:rPr lang="ko-KR" altLang="en-US" sz="900" b="1" dirty="0">
                 <a:solidFill>
                   <a:schemeClr val="bg1">
                     <a:lumMod val="65000"/>
@@ -7698,7 +7699,7 @@
               <a:t>모델</a:t>
             </a:r>
             <a:r>
-              <a:rPr lang="en-US" altLang="ko-KR" sz="1200" b="1" dirty="0">
+              <a:rPr lang="en-US" altLang="ko-KR" sz="900" b="1" dirty="0">
                 <a:solidFill>
                   <a:schemeClr val="bg1">
                     <a:lumMod val="65000"/>
@@ -7711,7 +7712,7 @@
               <a:t>)</a:t>
             </a:r>
             <a:r>
-              <a:rPr lang="ko-KR" altLang="en-US" sz="1200" b="1" dirty="0">
+              <a:rPr lang="ko-KR" altLang="en-US" sz="900" b="1" dirty="0">
                 <a:solidFill>
                   <a:schemeClr val="bg1">
                     <a:lumMod val="65000"/>
@@ -7723,7 +7724,7 @@
               </a:rPr>
               <a:t>을 정의</a:t>
             </a:r>
-            <a:endParaRPr lang="en-US" altLang="ko-KR" sz="1200" b="1" dirty="0">
+            <a:endParaRPr lang="en-US" altLang="ko-KR" sz="900" b="1" dirty="0">
               <a:solidFill>
                 <a:schemeClr val="tx1">
                   <a:lumMod val="85000"/>
@@ -7751,8 +7752,8 @@
         </p:nvSpPr>
         <p:spPr>
           <a:xfrm>
-            <a:off x="270768" y="809999"/>
-            <a:ext cx="4542591" cy="5779051"/>
+            <a:off x="203078" y="607501"/>
+            <a:ext cx="1752295" cy="6010388"/>
           </a:xfrm>
           <a:prstGeom prst="rect">
             <a:avLst/>
@@ -7787,7 +7788,7 @@
           <a:lstStyle/>
           <a:p>
             <a:pPr algn="ctr"/>
-            <a:endParaRPr lang="en-KR"/>
+            <a:endParaRPr lang="en-KR" sz="1350"/>
           </a:p>
         </p:txBody>
       </p:sp>
@@ -7805,8 +7806,8 @@
         </p:nvSpPr>
         <p:spPr>
           <a:xfrm>
-            <a:off x="270768" y="810000"/>
-            <a:ext cx="4542590" cy="946754"/>
+            <a:off x="203077" y="607500"/>
+            <a:ext cx="1752296" cy="710066"/>
           </a:xfrm>
           <a:prstGeom prst="rect">
             <a:avLst/>
@@ -7849,7 +7850,7 @@
           <a:lstStyle/>
           <a:p>
             <a:pPr algn="ctr"/>
-            <a:endParaRPr lang="en-KR" dirty="0"/>
+            <a:endParaRPr lang="en-KR" sz="1350" dirty="0"/>
           </a:p>
         </p:txBody>
       </p:sp>
@@ -7867,8 +7868,8 @@
         </p:nvSpPr>
         <p:spPr>
           <a:xfrm>
-            <a:off x="270767" y="809998"/>
-            <a:ext cx="2339996" cy="413681"/>
+            <a:off x="203075" y="607500"/>
+            <a:ext cx="1754997" cy="298719"/>
           </a:xfrm>
           <a:prstGeom prst="rect">
             <a:avLst/>
@@ -7876,13 +7877,13 @@
           <a:noFill/>
         </p:spPr>
         <p:txBody>
-          <a:bodyPr wrap="square" lIns="180000" tIns="180000" rIns="90000" bIns="46800" rtlCol="0">
+          <a:bodyPr wrap="square" lIns="135000" tIns="135000" rIns="67500" bIns="35100" rtlCol="0">
             <a:spAutoFit/>
           </a:bodyPr>
           <a:lstStyle/>
           <a:p>
             <a:r>
-              <a:rPr lang="en-US" sz="1100" b="1" dirty="0" err="1">
+              <a:rPr lang="en-US" sz="825" b="1" dirty="0" err="1">
                 <a:solidFill>
                   <a:schemeClr val="tx1">
                     <a:lumMod val="85000"/>
@@ -7895,7 +7896,7 @@
               </a:rPr>
               <a:t>BusStop</a:t>
             </a:r>
-            <a:endParaRPr lang="en-KR" sz="1100" b="1" dirty="0">
+            <a:endParaRPr lang="en-KR" sz="825" b="1" dirty="0">
               <a:solidFill>
                 <a:schemeClr val="tx1">
                   <a:lumMod val="85000"/>
@@ -7923,8 +7924,8 @@
         </p:nvSpPr>
         <p:spPr>
           <a:xfrm>
-            <a:off x="270767" y="1222588"/>
-            <a:ext cx="4542589" cy="261610"/>
+            <a:off x="203077" y="916943"/>
+            <a:ext cx="1752295" cy="346249"/>
           </a:xfrm>
           <a:prstGeom prst="rect">
             <a:avLst/>
@@ -7932,13 +7933,13 @@
           <a:noFill/>
         </p:spPr>
         <p:txBody>
-          <a:bodyPr wrap="square" lIns="180000" rIns="90000" rtlCol="0">
+          <a:bodyPr wrap="square" lIns="135000" rIns="67500" rtlCol="0">
             <a:spAutoFit/>
           </a:bodyPr>
           <a:lstStyle/>
           <a:p>
             <a:r>
-              <a:rPr lang="ko-KR" altLang="en-US" sz="1100" dirty="0">
+              <a:rPr lang="ko-KR" altLang="en-US" sz="825" dirty="0">
                 <a:solidFill>
                   <a:schemeClr val="bg1">
                     <a:lumMod val="65000"/>
@@ -7950,7 +7951,7 @@
               </a:rPr>
               <a:t>버스 정류장의 기본 정보를 저장하는 모델</a:t>
             </a:r>
-            <a:endParaRPr lang="en-US" altLang="ko-KR" sz="1100" dirty="0">
+            <a:endParaRPr lang="en-US" altLang="ko-KR" sz="825" dirty="0">
               <a:solidFill>
                 <a:schemeClr val="bg1">
                   <a:lumMod val="65000"/>
@@ -7977,8 +7978,8 @@
         </p:nvSpPr>
         <p:spPr>
           <a:xfrm flipH="1">
-            <a:off x="411468" y="1846753"/>
-            <a:ext cx="2048400" cy="1015200"/>
+            <a:off x="308601" y="1385065"/>
+            <a:ext cx="1536300" cy="761400"/>
           </a:xfrm>
           <a:prstGeom prst="rect">
             <a:avLst/>
@@ -8015,7 +8016,7 @@
           <a:lstStyle/>
           <a:p>
             <a:pPr algn="ctr"/>
-            <a:endParaRPr lang="en-KR" dirty="0"/>
+            <a:endParaRPr lang="en-KR" sz="1350" dirty="0"/>
           </a:p>
         </p:txBody>
       </p:sp>
@@ -8033,8 +8034,8 @@
         </p:nvSpPr>
         <p:spPr>
           <a:xfrm>
-            <a:off x="270767" y="809999"/>
-            <a:ext cx="4542591" cy="5779051"/>
+            <a:off x="203076" y="607501"/>
+            <a:ext cx="1752296" cy="6010388"/>
           </a:xfrm>
           <a:prstGeom prst="rect">
             <a:avLst/>
@@ -8069,7 +8070,7 @@
           <a:lstStyle/>
           <a:p>
             <a:pPr algn="ctr"/>
-            <a:endParaRPr lang="en-KR" dirty="0"/>
+            <a:endParaRPr lang="en-KR" sz="1350" dirty="0"/>
           </a:p>
         </p:txBody>
       </p:sp>
@@ -8087,8 +8088,8 @@
         </p:nvSpPr>
         <p:spPr>
           <a:xfrm>
-            <a:off x="408167" y="1849564"/>
-            <a:ext cx="1049089" cy="476690"/>
+            <a:off x="306127" y="1387173"/>
+            <a:ext cx="786817" cy="357518"/>
           </a:xfrm>
           <a:prstGeom prst="rect">
             <a:avLst/>
@@ -8096,13 +8097,13 @@
           <a:noFill/>
         </p:spPr>
         <p:txBody>
-          <a:bodyPr wrap="square" lIns="90000" tIns="90000" rIns="90000" bIns="46800" rtlCol="0">
+          <a:bodyPr wrap="square" lIns="67500" tIns="67500" rIns="67500" bIns="35100" rtlCol="0">
             <a:spAutoFit/>
           </a:bodyPr>
           <a:lstStyle/>
           <a:p>
             <a:r>
-              <a:rPr lang="en-US" sz="1100" b="1" dirty="0" err="1">
+              <a:rPr lang="en-US" sz="825" b="1" dirty="0" err="1">
                 <a:solidFill>
                   <a:schemeClr val="tx1">
                     <a:lumMod val="85000"/>
@@ -8115,7 +8116,7 @@
               </a:rPr>
               <a:t>busstop_id</a:t>
             </a:r>
-            <a:endParaRPr lang="en-US" sz="1100" b="1" dirty="0">
+            <a:endParaRPr lang="en-US" sz="825" b="1" dirty="0">
               <a:solidFill>
                 <a:schemeClr val="tx1">
                   <a:lumMod val="85000"/>
@@ -8129,7 +8130,7 @@
           </a:p>
           <a:p>
             <a:r>
-              <a:rPr lang="en-KR" sz="1100" b="1" dirty="0">
+              <a:rPr lang="en-KR" sz="825" b="1" dirty="0">
                 <a:solidFill>
                   <a:srgbClr val="44B29C"/>
                 </a:solidFill>
@@ -8156,8 +8157,8 @@
         </p:nvSpPr>
         <p:spPr>
           <a:xfrm>
-            <a:off x="408166" y="2357032"/>
-            <a:ext cx="2055301" cy="475600"/>
+            <a:off x="306126" y="1767774"/>
+            <a:ext cx="1541476" cy="368241"/>
           </a:xfrm>
           <a:prstGeom prst="rect">
             <a:avLst/>
@@ -8165,13 +8166,13 @@
           <a:noFill/>
         </p:spPr>
         <p:txBody>
-          <a:bodyPr wrap="square" lIns="90000" rIns="90000" bIns="90000" rtlCol="0">
+          <a:bodyPr wrap="square" lIns="67500" rIns="67500" bIns="67500" rtlCol="0">
             <a:spAutoFit/>
           </a:bodyPr>
           <a:lstStyle/>
           <a:p>
             <a:r>
-              <a:rPr lang="ko-KR" altLang="en-US" sz="1100" dirty="0">
+              <a:rPr lang="ko-KR" altLang="en-US" sz="825" dirty="0">
                 <a:solidFill>
                   <a:schemeClr val="bg1">
                     <a:lumMod val="65000"/>
@@ -8184,7 +8185,7 @@
               <a:t>하나의 정류장 고유</a:t>
             </a:r>
             <a:r>
-              <a:rPr lang="en-US" altLang="ko-KR" sz="1100" dirty="0">
+              <a:rPr lang="en-US" altLang="ko-KR" sz="825" dirty="0">
                 <a:solidFill>
                   <a:schemeClr val="bg1">
                     <a:lumMod val="65000"/>
@@ -8199,7 +8200,7 @@
           </a:p>
           <a:p>
             <a:r>
-              <a:rPr lang="en-US" altLang="ko-KR" sz="1100" dirty="0">
+              <a:rPr lang="en-US" altLang="ko-KR" sz="825" dirty="0">
                 <a:solidFill>
                   <a:schemeClr val="bg1">
                     <a:lumMod val="65000"/>
@@ -8212,7 +8213,7 @@
               <a:t>(</a:t>
             </a:r>
             <a:r>
-              <a:rPr lang="ko-KR" altLang="en-US" sz="1100" dirty="0">
+              <a:rPr lang="ko-KR" altLang="en-US" sz="825" dirty="0">
                 <a:solidFill>
                   <a:schemeClr val="bg1">
                     <a:lumMod val="65000"/>
@@ -8225,7 +8226,7 @@
               <a:t>최대 길이 </a:t>
             </a:r>
             <a:r>
-              <a:rPr lang="en-US" altLang="ko-KR" sz="1100" dirty="0">
+              <a:rPr lang="en-US" altLang="ko-KR" sz="825" dirty="0">
                 <a:solidFill>
                   <a:schemeClr val="bg1">
                     <a:lumMod val="65000"/>
@@ -8238,7 +8239,7 @@
               <a:t>20</a:t>
             </a:r>
             <a:r>
-              <a:rPr lang="ko-KR" altLang="en-US" sz="1100" dirty="0">
+              <a:rPr lang="ko-KR" altLang="en-US" sz="825" dirty="0">
                 <a:solidFill>
                   <a:schemeClr val="bg1">
                     <a:lumMod val="65000"/>
@@ -8251,7 +8252,7 @@
               <a:t>자</a:t>
             </a:r>
             <a:r>
-              <a:rPr lang="en-US" altLang="ko-KR" sz="1100" dirty="0">
+              <a:rPr lang="en-US" altLang="ko-KR" sz="825" dirty="0">
                 <a:solidFill>
                   <a:schemeClr val="bg1">
                     <a:lumMod val="65000"/>
@@ -8264,7 +8265,7 @@
               <a:t>,</a:t>
             </a:r>
             <a:r>
-              <a:rPr lang="ko-KR" altLang="en-US" sz="1100" dirty="0">
+              <a:rPr lang="ko-KR" altLang="en-US" sz="825" dirty="0">
                 <a:solidFill>
                   <a:schemeClr val="bg1">
                     <a:lumMod val="65000"/>
@@ -8277,7 +8278,7 @@
               <a:t> 중복 불가</a:t>
             </a:r>
             <a:r>
-              <a:rPr lang="en-US" altLang="ko-KR" sz="1100" dirty="0">
+              <a:rPr lang="en-US" altLang="ko-KR" sz="825" dirty="0">
                 <a:solidFill>
                   <a:schemeClr val="bg1">
                     <a:lumMod val="65000"/>
@@ -8289,7 +8290,7 @@
               </a:rPr>
               <a:t>)</a:t>
             </a:r>
-            <a:endParaRPr lang="en-KR" sz="1100" dirty="0">
+            <a:endParaRPr lang="en-KR" sz="825" dirty="0">
               <a:solidFill>
                 <a:schemeClr val="bg1">
                   <a:lumMod val="65000"/>
@@ -8316,8 +8317,8 @@
         </p:nvSpPr>
         <p:spPr>
           <a:xfrm flipH="1">
-            <a:off x="411468" y="3000813"/>
-            <a:ext cx="2052000" cy="1015200"/>
+            <a:off x="308601" y="2250610"/>
+            <a:ext cx="1539000" cy="761400"/>
           </a:xfrm>
           <a:prstGeom prst="rect">
             <a:avLst/>
@@ -8354,7 +8355,7 @@
           <a:lstStyle/>
           <a:p>
             <a:pPr algn="ctr"/>
-            <a:endParaRPr lang="en-KR" dirty="0"/>
+            <a:endParaRPr lang="en-KR" sz="1350" dirty="0"/>
           </a:p>
         </p:txBody>
       </p:sp>
@@ -8372,8 +8373,8 @@
         </p:nvSpPr>
         <p:spPr>
           <a:xfrm>
-            <a:off x="408167" y="3003624"/>
-            <a:ext cx="1318394" cy="476690"/>
+            <a:off x="306125" y="2252718"/>
+            <a:ext cx="988796" cy="357518"/>
           </a:xfrm>
           <a:prstGeom prst="rect">
             <a:avLst/>
@@ -8381,13 +8382,13 @@
           <a:noFill/>
         </p:spPr>
         <p:txBody>
-          <a:bodyPr wrap="square" lIns="90000" tIns="90000" rIns="90000" bIns="46800" rtlCol="0">
+          <a:bodyPr wrap="square" lIns="67500" tIns="67500" rIns="67500" bIns="35100" rtlCol="0">
             <a:spAutoFit/>
           </a:bodyPr>
           <a:lstStyle/>
           <a:p>
             <a:r>
-              <a:rPr lang="en-US" sz="1100" b="1" dirty="0">
+              <a:rPr lang="en-US" sz="825" b="1" dirty="0">
                 <a:solidFill>
                   <a:schemeClr val="tx1">
                     <a:lumMod val="85000"/>
@@ -8403,7 +8404,7 @@
           </a:p>
           <a:p>
             <a:r>
-              <a:rPr lang="en-KR" sz="1100" b="1" dirty="0">
+              <a:rPr lang="en-KR" sz="825" b="1" dirty="0">
                 <a:solidFill>
                   <a:srgbClr val="44B29C"/>
                 </a:solidFill>
@@ -8430,8 +8431,8 @@
         </p:nvSpPr>
         <p:spPr>
           <a:xfrm>
-            <a:off x="411467" y="3511092"/>
-            <a:ext cx="2052000" cy="475600"/>
+            <a:off x="308600" y="2633319"/>
+            <a:ext cx="1539000" cy="368241"/>
           </a:xfrm>
           <a:prstGeom prst="rect">
             <a:avLst/>
@@ -8439,13 +8440,13 @@
           <a:noFill/>
         </p:spPr>
         <p:txBody>
-          <a:bodyPr wrap="square" lIns="90000" rIns="90000" bIns="90000" rtlCol="0">
+          <a:bodyPr wrap="square" lIns="67500" rIns="67500" bIns="67500" rtlCol="0">
             <a:spAutoFit/>
           </a:bodyPr>
           <a:lstStyle/>
           <a:p>
             <a:r>
-              <a:rPr lang="ko-KR" altLang="en-US" sz="1100" dirty="0">
+              <a:rPr lang="ko-KR" altLang="en-US" sz="825" dirty="0">
                 <a:solidFill>
                   <a:schemeClr val="bg1">
                     <a:lumMod val="65000"/>
@@ -8458,7 +8459,7 @@
               <a:t>하나의 정류장 고유의 이름</a:t>
             </a:r>
             <a:r>
-              <a:rPr lang="en-US" altLang="ko-KR" sz="1100" dirty="0">
+              <a:rPr lang="en-US" altLang="ko-KR" sz="825" dirty="0">
                 <a:solidFill>
                   <a:schemeClr val="bg1">
                     <a:lumMod val="65000"/>
@@ -8473,7 +8474,7 @@
           </a:p>
           <a:p>
             <a:r>
-              <a:rPr lang="en-US" altLang="ko-KR" sz="1100" dirty="0">
+              <a:rPr lang="en-US" altLang="ko-KR" sz="825" dirty="0">
                 <a:solidFill>
                   <a:schemeClr val="bg1">
                     <a:lumMod val="65000"/>
@@ -8486,7 +8487,7 @@
               <a:t>(</a:t>
             </a:r>
             <a:r>
-              <a:rPr lang="ko-KR" altLang="en-US" sz="1100" dirty="0">
+              <a:rPr lang="ko-KR" altLang="en-US" sz="825" dirty="0">
                 <a:solidFill>
                   <a:schemeClr val="bg1">
                     <a:lumMod val="65000"/>
@@ -8499,7 +8500,7 @@
               <a:t>최대 길이 </a:t>
             </a:r>
             <a:r>
-              <a:rPr lang="en-US" altLang="ko-KR" sz="1100" dirty="0">
+              <a:rPr lang="en-US" altLang="ko-KR" sz="825" dirty="0">
                 <a:solidFill>
                   <a:schemeClr val="bg1">
                     <a:lumMod val="65000"/>
@@ -8512,7 +8513,7 @@
               <a:t>100</a:t>
             </a:r>
             <a:r>
-              <a:rPr lang="ko-KR" altLang="en-US" sz="1100" dirty="0">
+              <a:rPr lang="ko-KR" altLang="en-US" sz="825" dirty="0">
                 <a:solidFill>
                   <a:schemeClr val="bg1">
                     <a:lumMod val="65000"/>
@@ -8525,7 +8526,7 @@
               <a:t>자</a:t>
             </a:r>
             <a:r>
-              <a:rPr lang="en-US" altLang="ko-KR" sz="1100" dirty="0">
+              <a:rPr lang="en-US" altLang="ko-KR" sz="825" dirty="0">
                 <a:solidFill>
                   <a:schemeClr val="bg1">
                     <a:lumMod val="65000"/>
@@ -8537,7 +8538,7 @@
               </a:rPr>
               <a:t>)</a:t>
             </a:r>
-            <a:endParaRPr lang="en-KR" sz="1100" dirty="0">
+            <a:endParaRPr lang="en-KR" sz="825" dirty="0">
               <a:solidFill>
                 <a:schemeClr val="bg1">
                   <a:lumMod val="65000"/>
@@ -8564,8 +8565,8 @@
         </p:nvSpPr>
         <p:spPr>
           <a:xfrm flipH="1">
-            <a:off x="408166" y="4166805"/>
-            <a:ext cx="2052000" cy="1015200"/>
+            <a:off x="306125" y="3125104"/>
+            <a:ext cx="1539000" cy="761400"/>
           </a:xfrm>
           <a:prstGeom prst="rect">
             <a:avLst/>
@@ -8602,7 +8603,7 @@
           <a:lstStyle/>
           <a:p>
             <a:pPr algn="ctr"/>
-            <a:endParaRPr lang="en-KR" dirty="0"/>
+            <a:endParaRPr lang="en-KR" sz="1350" dirty="0"/>
           </a:p>
         </p:txBody>
       </p:sp>
@@ -8620,8 +8621,8 @@
         </p:nvSpPr>
         <p:spPr>
           <a:xfrm>
-            <a:off x="404865" y="4169616"/>
-            <a:ext cx="1318394" cy="476690"/>
+            <a:off x="303649" y="3127212"/>
+            <a:ext cx="988796" cy="357518"/>
           </a:xfrm>
           <a:prstGeom prst="rect">
             <a:avLst/>
@@ -8629,13 +8630,13 @@
           <a:noFill/>
         </p:spPr>
         <p:txBody>
-          <a:bodyPr wrap="square" lIns="90000" tIns="90000" rIns="90000" bIns="46800" rtlCol="0">
+          <a:bodyPr wrap="square" lIns="67500" tIns="67500" rIns="67500" bIns="35100" rtlCol="0">
             <a:spAutoFit/>
           </a:bodyPr>
           <a:lstStyle/>
           <a:p>
             <a:r>
-              <a:rPr lang="en-US" sz="1100" b="1" dirty="0">
+              <a:rPr lang="en-US" sz="825" b="1" dirty="0">
                 <a:solidFill>
                   <a:schemeClr val="tx1">
                     <a:lumMod val="85000"/>
@@ -8651,7 +8652,7 @@
           </a:p>
           <a:p>
             <a:r>
-              <a:rPr lang="en-KR" sz="1100" b="1" dirty="0">
+              <a:rPr lang="en-KR" sz="825" b="1" dirty="0">
                 <a:solidFill>
                   <a:srgbClr val="44B29C"/>
                 </a:solidFill>
@@ -8678,8 +8679,8 @@
         </p:nvSpPr>
         <p:spPr>
           <a:xfrm>
-            <a:off x="408165" y="4677084"/>
-            <a:ext cx="2052000" cy="475600"/>
+            <a:off x="306124" y="3507813"/>
+            <a:ext cx="1539000" cy="368241"/>
           </a:xfrm>
           <a:prstGeom prst="rect">
             <a:avLst/>
@@ -8687,13 +8688,13 @@
           <a:noFill/>
         </p:spPr>
         <p:txBody>
-          <a:bodyPr wrap="square" lIns="90000" rIns="90000" bIns="90000" rtlCol="0">
+          <a:bodyPr wrap="square" lIns="67500" rIns="67500" bIns="67500" rtlCol="0">
             <a:spAutoFit/>
           </a:bodyPr>
           <a:lstStyle/>
           <a:p>
             <a:r>
-              <a:rPr lang="ko-KR" altLang="en-US" sz="1100" dirty="0">
+              <a:rPr lang="ko-KR" altLang="en-US" sz="825" dirty="0">
                 <a:solidFill>
                   <a:schemeClr val="bg1">
                     <a:lumMod val="65000"/>
@@ -8706,7 +8707,7 @@
               <a:t>하나의 정류장의 지도상 경도</a:t>
             </a:r>
             <a:r>
-              <a:rPr lang="en-US" altLang="ko-KR" sz="1100" dirty="0">
+              <a:rPr lang="en-US" altLang="ko-KR" sz="825" dirty="0">
                 <a:solidFill>
                   <a:schemeClr val="bg1">
                     <a:lumMod val="65000"/>
@@ -8721,7 +8722,7 @@
           </a:p>
           <a:p>
             <a:r>
-              <a:rPr lang="en-US" altLang="ko-KR" sz="1100" dirty="0">
+              <a:rPr lang="en-US" altLang="ko-KR" sz="825" dirty="0">
                 <a:solidFill>
                   <a:schemeClr val="bg1">
                     <a:lumMod val="65000"/>
@@ -8734,7 +8735,7 @@
               <a:t>(</a:t>
             </a:r>
             <a:r>
-              <a:rPr lang="ko-KR" altLang="en-US" sz="1100" dirty="0">
+              <a:rPr lang="ko-KR" altLang="en-US" sz="825" dirty="0">
                 <a:solidFill>
                   <a:schemeClr val="bg1">
                     <a:lumMod val="65000"/>
@@ -8747,7 +8748,7 @@
               <a:t>최대 길이 </a:t>
             </a:r>
             <a:r>
-              <a:rPr lang="en-US" altLang="ko-KR" sz="1100" dirty="0">
+              <a:rPr lang="en-US" altLang="ko-KR" sz="825" dirty="0">
                 <a:solidFill>
                   <a:schemeClr val="bg1">
                     <a:lumMod val="65000"/>
@@ -8760,7 +8761,7 @@
               <a:t>10</a:t>
             </a:r>
             <a:r>
-              <a:rPr lang="ko-KR" altLang="en-US" sz="1100" dirty="0">
+              <a:rPr lang="ko-KR" altLang="en-US" sz="825" dirty="0">
                 <a:solidFill>
                   <a:schemeClr val="bg1">
                     <a:lumMod val="65000"/>
@@ -8773,7 +8774,7 @@
               <a:t>자 중 소수점 </a:t>
             </a:r>
             <a:r>
-              <a:rPr lang="en-US" altLang="ko-KR" sz="1100" dirty="0">
+              <a:rPr lang="en-US" altLang="ko-KR" sz="825" dirty="0">
                 <a:solidFill>
                   <a:schemeClr val="bg1">
                     <a:lumMod val="65000"/>
@@ -8786,7 +8787,7 @@
               <a:t>7</a:t>
             </a:r>
             <a:r>
-              <a:rPr lang="ko-KR" altLang="en-US" sz="1100" dirty="0">
+              <a:rPr lang="ko-KR" altLang="en-US" sz="825" dirty="0">
                 <a:solidFill>
                   <a:schemeClr val="bg1">
                     <a:lumMod val="65000"/>
@@ -8799,7 +8800,7 @@
               <a:t>자</a:t>
             </a:r>
             <a:r>
-              <a:rPr lang="en-US" altLang="ko-KR" sz="1100" dirty="0">
+              <a:rPr lang="en-US" altLang="ko-KR" sz="825" dirty="0">
                 <a:solidFill>
                   <a:schemeClr val="bg1">
                     <a:lumMod val="65000"/>
@@ -8811,7 +8812,7 @@
               </a:rPr>
               <a:t>)</a:t>
             </a:r>
-            <a:endParaRPr lang="en-KR" sz="1100" dirty="0">
+            <a:endParaRPr lang="en-KR" sz="825" dirty="0">
               <a:solidFill>
                 <a:schemeClr val="bg1">
                   <a:lumMod val="65000"/>
@@ -8838,8 +8839,8 @@
         </p:nvSpPr>
         <p:spPr>
           <a:xfrm flipH="1">
-            <a:off x="411467" y="5330896"/>
-            <a:ext cx="2052000" cy="1015200"/>
+            <a:off x="308600" y="3998172"/>
+            <a:ext cx="1539000" cy="761400"/>
           </a:xfrm>
           <a:prstGeom prst="rect">
             <a:avLst/>
@@ -8876,7 +8877,7 @@
           <a:lstStyle/>
           <a:p>
             <a:pPr algn="ctr"/>
-            <a:endParaRPr lang="en-KR" dirty="0"/>
+            <a:endParaRPr lang="en-KR" sz="1350" dirty="0"/>
           </a:p>
         </p:txBody>
       </p:sp>
@@ -8894,8 +8895,8 @@
         </p:nvSpPr>
         <p:spPr>
           <a:xfrm>
-            <a:off x="408166" y="5333707"/>
-            <a:ext cx="1318394" cy="476690"/>
+            <a:off x="306124" y="4000280"/>
+            <a:ext cx="988796" cy="357518"/>
           </a:xfrm>
           <a:prstGeom prst="rect">
             <a:avLst/>
@@ -8903,13 +8904,13 @@
           <a:noFill/>
         </p:spPr>
         <p:txBody>
-          <a:bodyPr wrap="square" lIns="90000" tIns="90000" rIns="90000" bIns="46800" rtlCol="0">
+          <a:bodyPr wrap="square" lIns="67500" tIns="67500" rIns="67500" bIns="35100" rtlCol="0">
             <a:spAutoFit/>
           </a:bodyPr>
           <a:lstStyle/>
           <a:p>
             <a:r>
-              <a:rPr lang="en-US" sz="1100" b="1" dirty="0">
+              <a:rPr lang="en-US" sz="825" b="1" dirty="0">
                 <a:solidFill>
                   <a:schemeClr val="tx1">
                     <a:lumMod val="85000"/>
@@ -8925,7 +8926,7 @@
           </a:p>
           <a:p>
             <a:r>
-              <a:rPr lang="en-KR" sz="1100" b="1" dirty="0">
+              <a:rPr lang="en-KR" sz="825" b="1" dirty="0">
                 <a:solidFill>
                   <a:srgbClr val="44B29C"/>
                 </a:solidFill>
@@ -8952,8 +8953,8 @@
         </p:nvSpPr>
         <p:spPr>
           <a:xfrm>
-            <a:off x="411466" y="5841175"/>
-            <a:ext cx="2052000" cy="475600"/>
+            <a:off x="308600" y="4380882"/>
+            <a:ext cx="1539000" cy="368241"/>
           </a:xfrm>
           <a:prstGeom prst="rect">
             <a:avLst/>
@@ -8961,13 +8962,13 @@
           <a:noFill/>
         </p:spPr>
         <p:txBody>
-          <a:bodyPr wrap="square" lIns="90000" rIns="90000" bIns="90000" rtlCol="0">
+          <a:bodyPr wrap="square" lIns="67500" rIns="67500" bIns="67500" rtlCol="0">
             <a:spAutoFit/>
           </a:bodyPr>
           <a:lstStyle/>
           <a:p>
             <a:r>
-              <a:rPr lang="ko-KR" altLang="en-US" sz="1100" dirty="0">
+              <a:rPr lang="ko-KR" altLang="en-US" sz="825" dirty="0">
                 <a:solidFill>
                   <a:schemeClr val="bg1">
                     <a:lumMod val="65000"/>
@@ -8980,7 +8981,7 @@
               <a:t>하나의 정류장의 지도상 위도</a:t>
             </a:r>
             <a:r>
-              <a:rPr lang="en-US" altLang="ko-KR" sz="1100" dirty="0">
+              <a:rPr lang="en-US" altLang="ko-KR" sz="825" dirty="0">
                 <a:solidFill>
                   <a:schemeClr val="bg1">
                     <a:lumMod val="65000"/>
@@ -8995,7 +8996,7 @@
           </a:p>
           <a:p>
             <a:r>
-              <a:rPr lang="en-US" altLang="ko-KR" sz="1100" dirty="0">
+              <a:rPr lang="en-US" altLang="ko-KR" sz="825" dirty="0">
                 <a:solidFill>
                   <a:schemeClr val="bg1">
                     <a:lumMod val="65000"/>
@@ -9008,7 +9009,7 @@
               <a:t>(</a:t>
             </a:r>
             <a:r>
-              <a:rPr lang="ko-KR" altLang="en-US" sz="1100" dirty="0">
+              <a:rPr lang="ko-KR" altLang="en-US" sz="825" dirty="0">
                 <a:solidFill>
                   <a:schemeClr val="bg1">
                     <a:lumMod val="65000"/>
@@ -9021,7 +9022,7 @@
               <a:t>최대 길이 </a:t>
             </a:r>
             <a:r>
-              <a:rPr lang="en-US" altLang="ko-KR" sz="1100" dirty="0">
+              <a:rPr lang="en-US" altLang="ko-KR" sz="825" dirty="0">
                 <a:solidFill>
                   <a:schemeClr val="bg1">
                     <a:lumMod val="65000"/>
@@ -9034,7 +9035,7 @@
               <a:t>10</a:t>
             </a:r>
             <a:r>
-              <a:rPr lang="ko-KR" altLang="en-US" sz="1100" dirty="0">
+              <a:rPr lang="ko-KR" altLang="en-US" sz="825" dirty="0">
                 <a:solidFill>
                   <a:schemeClr val="bg1">
                     <a:lumMod val="65000"/>
@@ -9047,7 +9048,7 @@
               <a:t>자 중 소수점 </a:t>
             </a:r>
             <a:r>
-              <a:rPr lang="en-US" altLang="ko-KR" sz="1100" dirty="0">
+              <a:rPr lang="en-US" altLang="ko-KR" sz="825" dirty="0">
                 <a:solidFill>
                   <a:schemeClr val="bg1">
                     <a:lumMod val="65000"/>
@@ -9060,7 +9061,7 @@
               <a:t>7</a:t>
             </a:r>
             <a:r>
-              <a:rPr lang="ko-KR" altLang="en-US" sz="1100" dirty="0">
+              <a:rPr lang="ko-KR" altLang="en-US" sz="825" dirty="0">
                 <a:solidFill>
                   <a:schemeClr val="bg1">
                     <a:lumMod val="65000"/>
@@ -9073,7 +9074,7 @@
               <a:t>자</a:t>
             </a:r>
             <a:r>
-              <a:rPr lang="en-US" altLang="ko-KR" sz="1100" dirty="0">
+              <a:rPr lang="en-US" altLang="ko-KR" sz="825" dirty="0">
                 <a:solidFill>
                   <a:schemeClr val="bg1">
                     <a:lumMod val="65000"/>
@@ -9085,7 +9086,7 @@
               </a:rPr>
               <a:t>)</a:t>
             </a:r>
-            <a:endParaRPr lang="en-KR" sz="1100" dirty="0">
+            <a:endParaRPr lang="en-KR" sz="825" dirty="0">
               <a:solidFill>
                 <a:schemeClr val="bg1">
                   <a:lumMod val="65000"/>
@@ -9112,10 +9113,10 @@
         </p:nvGrpSpPr>
         <p:grpSpPr>
           <a:xfrm>
-            <a:off x="2610761" y="1844503"/>
-            <a:ext cx="2055301" cy="1017450"/>
+            <a:off x="303424" y="4868956"/>
+            <a:ext cx="1541477" cy="763088"/>
             <a:chOff x="408167" y="1844503"/>
-            <a:chExt cx="2055301" cy="1017450"/>
+            <a:chExt cx="2055302" cy="1017450"/>
           </a:xfrm>
         </p:grpSpPr>
         <p:sp>
@@ -9170,7 +9171,7 @@
             <a:lstStyle/>
             <a:p>
               <a:pPr algn="ctr"/>
-              <a:endParaRPr lang="en-KR" dirty="0"/>
+              <a:endParaRPr lang="en-KR" sz="1350" dirty="0"/>
             </a:p>
           </p:txBody>
         </p:sp>
@@ -9197,13 +9198,13 @@
             <a:noFill/>
           </p:spPr>
           <p:txBody>
-            <a:bodyPr wrap="square" lIns="90000" tIns="90000" rIns="90000" bIns="46800" rtlCol="0">
+            <a:bodyPr wrap="square" lIns="67500" tIns="67500" rIns="67500" bIns="35100" rtlCol="0">
               <a:spAutoFit/>
             </a:bodyPr>
             <a:lstStyle/>
             <a:p>
               <a:r>
-                <a:rPr lang="en-US" sz="1100" b="1" dirty="0" err="1">
+                <a:rPr lang="en-US" sz="825" b="1" dirty="0" err="1">
                   <a:solidFill>
                     <a:schemeClr val="tx1">
                       <a:lumMod val="85000"/>
@@ -9216,7 +9217,7 @@
                 </a:rPr>
                 <a:t>district_id</a:t>
               </a:r>
-              <a:endParaRPr lang="en-US" sz="1100" b="1" dirty="0">
+              <a:endParaRPr lang="en-US" sz="825" b="1" dirty="0">
                 <a:solidFill>
                   <a:schemeClr val="tx1">
                     <a:lumMod val="85000"/>
@@ -9230,7 +9231,7 @@
             </a:p>
             <a:p>
               <a:r>
-                <a:rPr lang="en-KR" sz="1100" b="1" dirty="0">
+                <a:rPr lang="en-KR" sz="825" b="1" dirty="0">
                   <a:solidFill>
                     <a:srgbClr val="44B29C"/>
                   </a:solidFill>
@@ -9258,7 +9259,7 @@
           <p:spPr>
             <a:xfrm>
               <a:off x="408167" y="2357032"/>
-              <a:ext cx="2055301" cy="475600"/>
+              <a:ext cx="2055301" cy="490988"/>
             </a:xfrm>
             <a:prstGeom prst="rect">
               <a:avLst/>
@@ -9266,13 +9267,13 @@
             <a:noFill/>
           </p:spPr>
           <p:txBody>
-            <a:bodyPr wrap="square" lIns="90000" rIns="90000" bIns="90000" rtlCol="0">
+            <a:bodyPr wrap="square" lIns="67500" rIns="67500" bIns="67500" rtlCol="0">
               <a:spAutoFit/>
             </a:bodyPr>
             <a:lstStyle/>
             <a:p>
               <a:r>
-                <a:rPr lang="ko-KR" altLang="en-US" sz="1100" dirty="0">
+                <a:rPr lang="ko-KR" altLang="en-US" sz="825" dirty="0">
                   <a:solidFill>
                     <a:schemeClr val="bg1">
                       <a:lumMod val="65000"/>
@@ -9285,7 +9286,7 @@
                 <a:t>정류장이 속한 행정동 </a:t>
               </a:r>
               <a:r>
-                <a:rPr lang="en-US" altLang="ko-KR" sz="1100" dirty="0">
+                <a:rPr lang="en-US" altLang="ko-KR" sz="825" dirty="0">
                   <a:solidFill>
                     <a:schemeClr val="bg1">
                       <a:lumMod val="65000"/>
@@ -9300,7 +9301,7 @@
             </a:p>
             <a:p>
               <a:r>
-                <a:rPr lang="en-US" altLang="ko-KR" sz="1100" dirty="0">
+                <a:rPr lang="en-US" altLang="ko-KR" sz="825" dirty="0">
                   <a:solidFill>
                     <a:schemeClr val="bg1">
                       <a:lumMod val="65000"/>
@@ -9313,7 +9314,7 @@
                 <a:t>(</a:t>
               </a:r>
               <a:r>
-                <a:rPr lang="ko-KR" altLang="en-US" sz="1100" dirty="0">
+                <a:rPr lang="ko-KR" altLang="en-US" sz="825" dirty="0">
                   <a:solidFill>
                     <a:schemeClr val="bg1">
                       <a:lumMod val="65000"/>
@@ -9326,7 +9327,7 @@
                 <a:t>최대 길이 </a:t>
               </a:r>
               <a:r>
-                <a:rPr lang="en-US" altLang="ko-KR" sz="1100" dirty="0">
+                <a:rPr lang="en-US" altLang="ko-KR" sz="825" dirty="0">
                   <a:solidFill>
                     <a:schemeClr val="bg1">
                       <a:lumMod val="65000"/>
@@ -9339,7 +9340,7 @@
                 <a:t>10</a:t>
               </a:r>
               <a:r>
-                <a:rPr lang="ko-KR" altLang="en-US" sz="1100" dirty="0">
+                <a:rPr lang="ko-KR" altLang="en-US" sz="825" dirty="0">
                   <a:solidFill>
                     <a:schemeClr val="bg1">
                       <a:lumMod val="65000"/>
@@ -9352,7 +9353,7 @@
                 <a:t>자</a:t>
               </a:r>
               <a:r>
-                <a:rPr lang="en-US" altLang="ko-KR" sz="1100" dirty="0">
+                <a:rPr lang="en-US" altLang="ko-KR" sz="825" dirty="0">
                   <a:solidFill>
                     <a:schemeClr val="bg1">
                       <a:lumMod val="65000"/>
@@ -9365,7 +9366,7 @@
                 <a:t>,</a:t>
               </a:r>
               <a:r>
-                <a:rPr lang="ko-KR" altLang="en-US" sz="1100" dirty="0">
+                <a:rPr lang="ko-KR" altLang="en-US" sz="825" dirty="0">
                   <a:solidFill>
                     <a:schemeClr val="bg1">
                       <a:lumMod val="65000"/>
@@ -9378,7 +9379,7 @@
                 <a:t> 빈 값 가능</a:t>
               </a:r>
               <a:r>
-                <a:rPr lang="en-US" altLang="ko-KR" sz="1100" dirty="0">
+                <a:rPr lang="en-US" altLang="ko-KR" sz="825" dirty="0">
                   <a:solidFill>
                     <a:schemeClr val="bg1">
                       <a:lumMod val="65000"/>
@@ -9390,7 +9391,7 @@
                 </a:rPr>
                 <a:t>)</a:t>
               </a:r>
-              <a:endParaRPr lang="en-KR" sz="1100" dirty="0">
+              <a:endParaRPr lang="en-KR" sz="825" dirty="0">
                 <a:solidFill>
                   <a:schemeClr val="bg1">
                     <a:lumMod val="65000"/>
@@ -9417,8 +9418,8 @@
           </p:nvSpPr>
           <p:spPr>
             <a:xfrm>
-              <a:off x="1594655" y="1844503"/>
-              <a:ext cx="868813" cy="307413"/>
+              <a:off x="1437159" y="1844503"/>
+              <a:ext cx="1026310" cy="307413"/>
             </a:xfrm>
             <a:prstGeom prst="rect">
               <a:avLst/>
@@ -9426,14 +9427,14 @@
             <a:noFill/>
           </p:spPr>
           <p:txBody>
-            <a:bodyPr wrap="square" lIns="90000" tIns="90000" rIns="90000" bIns="46800" rtlCol="0">
+            <a:bodyPr wrap="square" lIns="67500" tIns="67500" rIns="67500" bIns="35100" rtlCol="0">
               <a:spAutoFit/>
             </a:bodyPr>
             <a:lstStyle/>
             <a:p>
               <a:pPr algn="r"/>
               <a:r>
-                <a:rPr lang="en-US" altLang="ko-KR" sz="1100" b="1" dirty="0">
+                <a:rPr lang="en-US" altLang="ko-KR" sz="825" b="1" dirty="0">
                   <a:solidFill>
                     <a:schemeClr val="bg1">
                       <a:lumMod val="65000"/>
@@ -9443,35 +9444,9 @@
                   <a:ea typeface="Pretendard" panose="02000503000000020004" pitchFamily="2" charset="-127"/>
                   <a:cs typeface="Pretendard" panose="02000503000000020004" pitchFamily="2" charset="-127"/>
                 </a:rPr>
-                <a:t>“</a:t>
+                <a:t>“11590605”</a:t>
               </a:r>
-              <a:r>
-                <a:rPr lang="ko-KR" altLang="en-US" sz="1100" b="1" dirty="0">
-                  <a:solidFill>
-                    <a:schemeClr val="bg1">
-                      <a:lumMod val="65000"/>
-                    </a:schemeClr>
-                  </a:solidFill>
-                  <a:latin typeface="Pretendard" panose="02000503000000020004" pitchFamily="2" charset="-127"/>
-                  <a:ea typeface="Pretendard" panose="02000503000000020004" pitchFamily="2" charset="-127"/>
-                  <a:cs typeface="Pretendard" panose="02000503000000020004" pitchFamily="2" charset="-127"/>
-                </a:rPr>
-                <a:t>흑석동</a:t>
-              </a:r>
-              <a:r>
-                <a:rPr lang="en-US" altLang="ko-KR" sz="1100" b="1" dirty="0">
-                  <a:solidFill>
-                    <a:schemeClr val="bg1">
-                      <a:lumMod val="65000"/>
-                    </a:schemeClr>
-                  </a:solidFill>
-                  <a:latin typeface="Pretendard" panose="02000503000000020004" pitchFamily="2" charset="-127"/>
-                  <a:ea typeface="Pretendard" panose="02000503000000020004" pitchFamily="2" charset="-127"/>
-                  <a:cs typeface="Pretendard" panose="02000503000000020004" pitchFamily="2" charset="-127"/>
-                </a:rPr>
-                <a:t>”</a:t>
-              </a:r>
-              <a:endParaRPr lang="en-KR" sz="1100" b="1" dirty="0">
+              <a:endParaRPr lang="en-KR" sz="825" b="1" dirty="0">
                 <a:solidFill>
                   <a:schemeClr val="bg1">
                     <a:lumMod val="65000"/>
@@ -9499,8 +9474,8 @@
         </p:nvSpPr>
         <p:spPr>
           <a:xfrm>
-            <a:off x="1591352" y="1844503"/>
-            <a:ext cx="868813" cy="307413"/>
+            <a:off x="1193516" y="1383379"/>
+            <a:ext cx="651610" cy="230560"/>
           </a:xfrm>
           <a:prstGeom prst="rect">
             <a:avLst/>
@@ -9508,14 +9483,14 @@
           <a:noFill/>
         </p:spPr>
         <p:txBody>
-          <a:bodyPr wrap="square" lIns="90000" tIns="90000" rIns="90000" bIns="46800" rtlCol="0">
+          <a:bodyPr wrap="square" lIns="67500" tIns="67500" rIns="67500" bIns="35100" rtlCol="0">
             <a:spAutoFit/>
           </a:bodyPr>
           <a:lstStyle/>
           <a:p>
             <a:pPr algn="r"/>
             <a:r>
-              <a:rPr lang="en-US" altLang="ko-KR" sz="1100" b="1" dirty="0">
+              <a:rPr lang="en-US" altLang="ko-KR" sz="825" b="1" dirty="0">
                 <a:solidFill>
                   <a:schemeClr val="bg1">
                     <a:lumMod val="65000"/>
@@ -9527,7 +9502,7 @@
               </a:rPr>
               <a:t>“20204”</a:t>
             </a:r>
-            <a:endParaRPr lang="en-KR" sz="1100" b="1" dirty="0">
+            <a:endParaRPr lang="en-KR" sz="825" b="1" dirty="0">
               <a:solidFill>
                 <a:schemeClr val="bg1">
                   <a:lumMod val="65000"/>
@@ -9554,8 +9529,8 @@
         </p:nvSpPr>
         <p:spPr>
           <a:xfrm>
-            <a:off x="1141771" y="3000812"/>
-            <a:ext cx="1318393" cy="307413"/>
+            <a:off x="856330" y="2250610"/>
+            <a:ext cx="988795" cy="230560"/>
           </a:xfrm>
           <a:prstGeom prst="rect">
             <a:avLst/>
@@ -9563,14 +9538,14 @@
           <a:noFill/>
         </p:spPr>
         <p:txBody>
-          <a:bodyPr wrap="square" lIns="90000" tIns="90000" rIns="90000" bIns="46800" rtlCol="0">
+          <a:bodyPr wrap="square" lIns="67500" tIns="67500" rIns="67500" bIns="35100" rtlCol="0">
             <a:spAutoFit/>
           </a:bodyPr>
           <a:lstStyle/>
           <a:p>
             <a:pPr algn="r"/>
             <a:r>
-              <a:rPr lang="en-US" altLang="ko-KR" sz="1100" b="1" dirty="0">
+              <a:rPr lang="en-US" altLang="ko-KR" sz="825" b="1" dirty="0">
                 <a:solidFill>
                   <a:schemeClr val="bg1">
                     <a:lumMod val="65000"/>
@@ -9583,7 +9558,7 @@
               <a:t>“</a:t>
             </a:r>
             <a:r>
-              <a:rPr lang="ko-KR" altLang="en-US" sz="1100" b="1" dirty="0" err="1">
+              <a:rPr lang="ko-KR" altLang="en-US" sz="825" b="1" dirty="0" err="1">
                 <a:solidFill>
                   <a:schemeClr val="bg1">
                     <a:lumMod val="65000"/>
@@ -9596,7 +9571,7 @@
               <a:t>중앙대정문</a:t>
             </a:r>
             <a:r>
-              <a:rPr lang="en-US" altLang="ko-KR" sz="1100" b="1" dirty="0">
+              <a:rPr lang="en-US" altLang="ko-KR" sz="825" b="1" dirty="0">
                 <a:solidFill>
                   <a:schemeClr val="bg1">
                     <a:lumMod val="65000"/>
@@ -9608,7 +9583,7 @@
               </a:rPr>
               <a:t>”</a:t>
             </a:r>
-            <a:endParaRPr lang="en-KR" sz="1100" b="1" dirty="0">
+            <a:endParaRPr lang="en-KR" sz="825" b="1" dirty="0">
               <a:solidFill>
                 <a:schemeClr val="bg1">
                   <a:lumMod val="65000"/>
@@ -9635,8 +9610,8 @@
         </p:nvSpPr>
         <p:spPr>
           <a:xfrm>
-            <a:off x="1141771" y="4166000"/>
-            <a:ext cx="1318393" cy="307413"/>
+            <a:off x="856330" y="3124501"/>
+            <a:ext cx="988795" cy="230560"/>
           </a:xfrm>
           <a:prstGeom prst="rect">
             <a:avLst/>
@@ -9644,14 +9619,14 @@
           <a:noFill/>
         </p:spPr>
         <p:txBody>
-          <a:bodyPr wrap="square" lIns="90000" tIns="90000" rIns="90000" bIns="46800" rtlCol="0">
+          <a:bodyPr wrap="square" lIns="67500" tIns="67500" rIns="67500" bIns="35100" rtlCol="0">
             <a:spAutoFit/>
           </a:bodyPr>
           <a:lstStyle/>
           <a:p>
             <a:pPr algn="r"/>
             <a:r>
-              <a:rPr lang="en-US" altLang="ko-KR" sz="1100" b="1" dirty="0">
+              <a:rPr lang="en-US" altLang="ko-KR" sz="825" b="1" dirty="0">
                 <a:solidFill>
                   <a:schemeClr val="bg1">
                     <a:lumMod val="65000"/>
@@ -9663,7 +9638,7 @@
               </a:rPr>
               <a:t>126.9582940</a:t>
             </a:r>
-            <a:endParaRPr lang="en-KR" sz="1100" b="1" dirty="0">
+            <a:endParaRPr lang="en-KR" sz="825" b="1" dirty="0">
               <a:solidFill>
                 <a:schemeClr val="bg1">
                   <a:lumMod val="65000"/>
@@ -9690,8 +9665,8 @@
         </p:nvSpPr>
         <p:spPr>
           <a:xfrm>
-            <a:off x="1148375" y="5329287"/>
-            <a:ext cx="1318393" cy="307413"/>
+            <a:off x="861283" y="3996967"/>
+            <a:ext cx="988795" cy="230560"/>
           </a:xfrm>
           <a:prstGeom prst="rect">
             <a:avLst/>
@@ -9699,14 +9674,14 @@
           <a:noFill/>
         </p:spPr>
         <p:txBody>
-          <a:bodyPr wrap="square" lIns="90000" tIns="90000" rIns="90000" bIns="46800" rtlCol="0">
+          <a:bodyPr wrap="square" lIns="67500" tIns="67500" rIns="67500" bIns="35100" rtlCol="0">
             <a:spAutoFit/>
           </a:bodyPr>
           <a:lstStyle/>
           <a:p>
             <a:pPr algn="r"/>
             <a:r>
-              <a:rPr lang="en-US" altLang="ko-KR" sz="1100" b="1" dirty="0">
+              <a:rPr lang="en-US" altLang="ko-KR" sz="825" b="1" dirty="0">
                 <a:solidFill>
                   <a:schemeClr val="bg1">
                     <a:lumMod val="65000"/>
@@ -9718,7 +9693,7 @@
               </a:rPr>
               <a:t>37.5068110</a:t>
             </a:r>
-            <a:endParaRPr lang="en-KR" sz="1100" b="1" dirty="0">
+            <a:endParaRPr lang="en-KR" sz="825" b="1" dirty="0">
               <a:solidFill>
                 <a:schemeClr val="bg1">
                   <a:lumMod val="65000"/>
@@ -9745,8 +9720,8 @@
         </p:nvGrpSpPr>
         <p:grpSpPr>
           <a:xfrm>
-            <a:off x="2610761" y="2998562"/>
-            <a:ext cx="2055302" cy="1017448"/>
+            <a:off x="303424" y="5734501"/>
+            <a:ext cx="1541477" cy="763086"/>
             <a:chOff x="408167" y="1844503"/>
             <a:chExt cx="2055302" cy="1017448"/>
           </a:xfrm>
@@ -9803,7 +9778,7 @@
             <a:lstStyle/>
             <a:p>
               <a:pPr algn="ctr"/>
-              <a:endParaRPr lang="en-KR" dirty="0"/>
+              <a:endParaRPr lang="en-KR" sz="1350" dirty="0"/>
             </a:p>
           </p:txBody>
         </p:sp>
@@ -9822,7 +9797,7 @@
           <p:spPr>
             <a:xfrm>
               <a:off x="408168" y="1849564"/>
-              <a:ext cx="1186486" cy="476690"/>
+              <a:ext cx="1186486" cy="476691"/>
             </a:xfrm>
             <a:prstGeom prst="rect">
               <a:avLst/>
@@ -9830,13 +9805,13 @@
             <a:noFill/>
           </p:spPr>
           <p:txBody>
-            <a:bodyPr wrap="square" lIns="90000" tIns="90000" rIns="90000" bIns="46800" rtlCol="0">
+            <a:bodyPr wrap="square" lIns="67500" tIns="67500" rIns="67500" bIns="35100" rtlCol="0">
               <a:spAutoFit/>
             </a:bodyPr>
             <a:lstStyle/>
             <a:p>
               <a:r>
-                <a:rPr lang="en-US" sz="1100" b="1" dirty="0" err="1">
+                <a:rPr lang="en-US" sz="825" b="1" dirty="0" err="1">
                   <a:solidFill>
                     <a:schemeClr val="tx1">
                       <a:lumMod val="85000"/>
@@ -9849,7 +9824,7 @@
                 </a:rPr>
                 <a:t>is_active</a:t>
               </a:r>
-              <a:endParaRPr lang="en-US" sz="1100" b="1" dirty="0">
+              <a:endParaRPr lang="en-US" sz="825" b="1" dirty="0">
                 <a:solidFill>
                   <a:schemeClr val="tx1">
                     <a:lumMod val="85000"/>
@@ -9863,7 +9838,7 @@
             </a:p>
             <a:p>
               <a:r>
-                <a:rPr lang="en-KR" sz="1100" b="1" dirty="0">
+                <a:rPr lang="en-KR" sz="825" b="1" dirty="0">
                   <a:solidFill>
                     <a:srgbClr val="44B29C"/>
                   </a:solidFill>
@@ -9891,7 +9866,7 @@
           <p:spPr>
             <a:xfrm>
               <a:off x="408167" y="2357032"/>
-              <a:ext cx="2055301" cy="475600"/>
+              <a:ext cx="2055301" cy="490988"/>
             </a:xfrm>
             <a:prstGeom prst="rect">
               <a:avLst/>
@@ -9899,13 +9874,13 @@
             <a:noFill/>
           </p:spPr>
           <p:txBody>
-            <a:bodyPr wrap="square" lIns="90000" rIns="90000" bIns="90000" rtlCol="0">
+            <a:bodyPr wrap="square" lIns="67500" rIns="67500" bIns="67500" rtlCol="0">
               <a:spAutoFit/>
             </a:bodyPr>
             <a:lstStyle/>
             <a:p>
               <a:r>
-                <a:rPr lang="ko-KR" altLang="en-US" sz="1100" dirty="0">
+                <a:rPr lang="ko-KR" altLang="en-US" sz="825" dirty="0">
                   <a:solidFill>
                     <a:schemeClr val="bg1">
                       <a:lumMod val="65000"/>
@@ -9918,7 +9893,7 @@
                 <a:t>정류장의 활성화 여부</a:t>
               </a:r>
               <a:r>
-                <a:rPr lang="en-US" altLang="ko-KR" sz="1100" dirty="0">
+                <a:rPr lang="en-US" altLang="ko-KR" sz="825" dirty="0">
                   <a:solidFill>
                     <a:schemeClr val="bg1">
                       <a:lumMod val="65000"/>
@@ -9933,7 +9908,7 @@
             </a:p>
             <a:p>
               <a:r>
-                <a:rPr lang="en-US" altLang="ko-KR" sz="1100" dirty="0">
+                <a:rPr lang="en-US" altLang="ko-KR" sz="825" dirty="0">
                   <a:solidFill>
                     <a:schemeClr val="bg1">
                       <a:lumMod val="65000"/>
@@ -9946,7 +9921,7 @@
                 <a:t>(</a:t>
               </a:r>
               <a:r>
-                <a:rPr lang="ko-KR" altLang="en-US" sz="1100" dirty="0">
+                <a:rPr lang="ko-KR" altLang="en-US" sz="825" dirty="0">
                   <a:solidFill>
                     <a:schemeClr val="bg1">
                       <a:lumMod val="65000"/>
@@ -9959,7 +9934,7 @@
                 <a:t>최대 길이 </a:t>
               </a:r>
               <a:r>
-                <a:rPr lang="en-US" altLang="ko-KR" sz="1100" dirty="0">
+                <a:rPr lang="en-US" altLang="ko-KR" sz="825" dirty="0">
                   <a:solidFill>
                     <a:schemeClr val="bg1">
                       <a:lumMod val="65000"/>
@@ -9972,7 +9947,7 @@
                 <a:t>10</a:t>
               </a:r>
               <a:r>
-                <a:rPr lang="ko-KR" altLang="en-US" sz="1100" dirty="0">
+                <a:rPr lang="ko-KR" altLang="en-US" sz="825" dirty="0">
                   <a:solidFill>
                     <a:schemeClr val="bg1">
                       <a:lumMod val="65000"/>
@@ -9985,7 +9960,7 @@
                 <a:t>자</a:t>
               </a:r>
               <a:r>
-                <a:rPr lang="en-US" altLang="ko-KR" sz="1100" dirty="0">
+                <a:rPr lang="en-US" altLang="ko-KR" sz="825" dirty="0">
                   <a:solidFill>
                     <a:schemeClr val="bg1">
                       <a:lumMod val="65000"/>
@@ -9998,7 +9973,7 @@
                 <a:t>,</a:t>
               </a:r>
               <a:r>
-                <a:rPr lang="ko-KR" altLang="en-US" sz="1100" dirty="0">
+                <a:rPr lang="ko-KR" altLang="en-US" sz="825" dirty="0">
                   <a:solidFill>
                     <a:schemeClr val="bg1">
                       <a:lumMod val="65000"/>
@@ -10011,7 +9986,7 @@
                 <a:t> 빈 값 가능</a:t>
               </a:r>
               <a:r>
-                <a:rPr lang="en-US" altLang="ko-KR" sz="1100" dirty="0">
+                <a:rPr lang="en-US" altLang="ko-KR" sz="825" dirty="0">
                   <a:solidFill>
                     <a:schemeClr val="bg1">
                       <a:lumMod val="65000"/>
@@ -10023,7 +9998,7 @@
                 </a:rPr>
                 <a:t>)</a:t>
               </a:r>
-              <a:endParaRPr lang="en-KR" sz="1100" dirty="0">
+              <a:endParaRPr lang="en-KR" sz="825" dirty="0">
                 <a:solidFill>
                   <a:schemeClr val="bg1">
                     <a:lumMod val="65000"/>
@@ -10059,14 +10034,14 @@
             <a:noFill/>
           </p:spPr>
           <p:txBody>
-            <a:bodyPr wrap="square" lIns="90000" tIns="90000" rIns="90000" bIns="46800" rtlCol="0">
+            <a:bodyPr wrap="square" lIns="67500" tIns="67500" rIns="67500" bIns="35100" rtlCol="0">
               <a:spAutoFit/>
             </a:bodyPr>
             <a:lstStyle/>
             <a:p>
               <a:pPr algn="r"/>
               <a:r>
-                <a:rPr lang="en-US" altLang="ko-KR" sz="1100" b="1" dirty="0">
+                <a:rPr lang="en-US" altLang="ko-KR" sz="825" b="1" dirty="0">
                   <a:solidFill>
                     <a:schemeClr val="bg1">
                       <a:lumMod val="65000"/>
@@ -10078,7 +10053,7 @@
                 </a:rPr>
                 <a:t>True</a:t>
               </a:r>
-              <a:endParaRPr lang="en-KR" sz="1100" b="1" dirty="0">
+              <a:endParaRPr lang="en-KR" sz="825" b="1" dirty="0">
                 <a:solidFill>
                   <a:schemeClr val="bg1">
                     <a:lumMod val="65000"/>
@@ -10106,8 +10081,8 @@
         </p:nvSpPr>
         <p:spPr>
           <a:xfrm>
-            <a:off x="5083356" y="1086998"/>
-            <a:ext cx="3789873" cy="919995"/>
+            <a:off x="2157874" y="815251"/>
+            <a:ext cx="4497051" cy="554447"/>
           </a:xfrm>
           <a:prstGeom prst="rect">
             <a:avLst/>
@@ -10126,7 +10101,7 @@
               </a:lnSpc>
             </a:pPr>
             <a:r>
-              <a:rPr lang="ko-KR" altLang="en-US" sz="1100" dirty="0">
+              <a:rPr lang="ko-KR" altLang="en-US" sz="825" dirty="0">
                 <a:solidFill>
                   <a:schemeClr val="tx1">
                     <a:lumMod val="85000"/>
@@ -10140,7 +10115,7 @@
               <a:t>   </a:t>
             </a:r>
             <a:r>
-              <a:rPr lang="ko-KR" altLang="en-US" sz="1100" dirty="0">
+              <a:rPr lang="ko-KR" altLang="en-US" sz="825" dirty="0">
                 <a:solidFill>
                   <a:schemeClr val="tx1">
                     <a:lumMod val="85000"/>
@@ -10157,7 +10132,7 @@
               <a:t>어느 버스 정류장이 어디 위치해 있는지를 받아오는 데이터입니다</a:t>
             </a:r>
             <a:r>
-              <a:rPr lang="en-US" altLang="ko-KR" sz="1100" dirty="0">
+              <a:rPr lang="en-US" altLang="ko-KR" sz="825" dirty="0">
                 <a:solidFill>
                   <a:schemeClr val="tx1">
                     <a:lumMod val="85000"/>
@@ -10174,7 +10149,7 @@
               <a:t>.</a:t>
             </a:r>
             <a:r>
-              <a:rPr lang="ko-KR" altLang="en-US" sz="1100" dirty="0">
+              <a:rPr lang="ko-KR" altLang="en-US" sz="825" dirty="0">
                 <a:solidFill>
                   <a:schemeClr val="tx1">
                     <a:lumMod val="85000"/>
@@ -10188,7 +10163,7 @@
               <a:t> 행정동별 인구 수와 마찬가지로 자주 큰 폭으로 바뀌는 데이터는 아니지만</a:t>
             </a:r>
             <a:r>
-              <a:rPr lang="en-US" altLang="ko-KR" sz="1100" dirty="0">
+              <a:rPr lang="en-US" altLang="ko-KR" sz="825" dirty="0">
                 <a:solidFill>
                   <a:schemeClr val="tx1">
                     <a:lumMod val="85000"/>
@@ -10202,7 +10177,7 @@
               <a:t>,</a:t>
             </a:r>
             <a:r>
-              <a:rPr lang="ko-KR" altLang="en-US" sz="1100" dirty="0">
+              <a:rPr lang="ko-KR" altLang="en-US" sz="825" dirty="0">
                 <a:solidFill>
                   <a:schemeClr val="tx1">
                     <a:lumMod val="85000"/>
@@ -10216,7 +10191,7 @@
               <a:t> 교통 정책의 변화에 따라 비교적 넓은 간격의 주기로 최신화해 줄 필요가 있는 데이터입니다</a:t>
             </a:r>
             <a:r>
-              <a:rPr lang="en-US" altLang="ko-KR" sz="1100" dirty="0">
+              <a:rPr lang="en-US" altLang="ko-KR" sz="825" dirty="0">
                 <a:solidFill>
                   <a:schemeClr val="tx1">
                     <a:lumMod val="85000"/>
@@ -10246,8 +10221,8 @@
         </p:nvSpPr>
         <p:spPr>
           <a:xfrm>
-            <a:off x="5083356" y="809998"/>
-            <a:ext cx="1409360" cy="261610"/>
+            <a:off x="2157874" y="607499"/>
+            <a:ext cx="1103187" cy="219291"/>
           </a:xfrm>
           <a:prstGeom prst="rect">
             <a:avLst/>
@@ -10261,7 +10236,7 @@
           <a:lstStyle/>
           <a:p>
             <a:r>
-              <a:rPr lang="ko-KR" altLang="en-US" sz="1100" b="1" dirty="0">
+              <a:rPr lang="ko-KR" altLang="en-US" sz="825" b="1" dirty="0">
                 <a:solidFill>
                   <a:schemeClr val="tx1">
                     <a:lumMod val="85000"/>
@@ -10274,7 +10249,7 @@
               </a:rPr>
               <a:t>수집 목적 및 사용 방안</a:t>
             </a:r>
-            <a:endParaRPr lang="en-US" altLang="ko-KR" sz="1100" b="1" dirty="0">
+            <a:endParaRPr lang="en-US" altLang="ko-KR" sz="825" b="1" dirty="0">
               <a:solidFill>
                 <a:schemeClr val="tx1">
                   <a:lumMod val="85000"/>
@@ -10302,8 +10277,8 @@
         </p:nvSpPr>
         <p:spPr>
           <a:xfrm>
-            <a:off x="5083356" y="4123515"/>
-            <a:ext cx="3789873" cy="708399"/>
+            <a:off x="2157873" y="2896892"/>
+            <a:ext cx="4497051" cy="554447"/>
           </a:xfrm>
           <a:prstGeom prst="rect">
             <a:avLst/>
@@ -10322,7 +10297,7 @@
               </a:lnSpc>
             </a:pPr>
             <a:r>
-              <a:rPr lang="ko-KR" altLang="en-US" sz="1100" dirty="0">
+              <a:rPr lang="ko-KR" altLang="en-US" sz="825" dirty="0">
                 <a:solidFill>
                   <a:schemeClr val="tx1">
                     <a:lumMod val="85000"/>
@@ -10336,7 +10311,7 @@
               <a:t>   서울 </a:t>
             </a:r>
             <a:r>
-              <a:rPr lang="ko-KR" altLang="en-US" sz="1100" dirty="0" err="1">
+              <a:rPr lang="ko-KR" altLang="en-US" sz="825" dirty="0" err="1">
                 <a:solidFill>
                   <a:schemeClr val="tx1">
                     <a:lumMod val="85000"/>
@@ -10350,7 +10325,7 @@
               <a:t>열린데이터광장에서</a:t>
             </a:r>
             <a:r>
-              <a:rPr lang="ko-KR" altLang="en-US" sz="1100" dirty="0">
+              <a:rPr lang="ko-KR" altLang="en-US" sz="825" dirty="0">
                 <a:solidFill>
                   <a:schemeClr val="tx1">
                     <a:lumMod val="85000"/>
@@ -10364,7 +10339,7 @@
               <a:t> 제공하는 </a:t>
             </a:r>
             <a:r>
-              <a:rPr lang="en-US" altLang="ko-KR" sz="1100" dirty="0">
+              <a:rPr lang="en-US" altLang="ko-KR" sz="825" dirty="0">
                 <a:solidFill>
                   <a:schemeClr val="tx1">
                     <a:lumMod val="85000"/>
@@ -10381,7 +10356,7 @@
               <a:t>’</a:t>
             </a:r>
             <a:r>
-              <a:rPr lang="ko-KR" altLang="en-US" sz="1100" dirty="0">
+              <a:rPr lang="ko-KR" altLang="en-US" sz="825" dirty="0">
                 <a:solidFill>
                   <a:schemeClr val="tx1">
                     <a:lumMod val="85000"/>
@@ -10398,7 +10373,7 @@
               <a:t>서울시 버스정류소 위치정보</a:t>
             </a:r>
             <a:r>
-              <a:rPr lang="en-US" altLang="ko-KR" sz="1100" dirty="0">
+              <a:rPr lang="en-US" altLang="ko-KR" sz="825" dirty="0">
                 <a:solidFill>
                   <a:schemeClr val="tx1">
                     <a:lumMod val="85000"/>
@@ -10415,7 +10390,7 @@
               <a:t>’</a:t>
             </a:r>
             <a:r>
-              <a:rPr lang="ko-KR" altLang="en-US" sz="1100" dirty="0">
+              <a:rPr lang="ko-KR" altLang="en-US" sz="825" dirty="0">
                 <a:solidFill>
                   <a:schemeClr val="tx1">
                     <a:lumMod val="85000"/>
@@ -10429,7 +10404,7 @@
               <a:t> </a:t>
             </a:r>
             <a:r>
-              <a:rPr lang="en-US" altLang="ko-KR" sz="1100" dirty="0">
+              <a:rPr lang="en-US" altLang="ko-KR" sz="825" dirty="0">
                 <a:solidFill>
                   <a:schemeClr val="tx1">
                     <a:lumMod val="85000"/>
@@ -10443,7 +10418,7 @@
               <a:t>API</a:t>
             </a:r>
             <a:r>
-              <a:rPr lang="ko-KR" altLang="en-US" sz="1100" dirty="0">
+              <a:rPr lang="ko-KR" altLang="en-US" sz="825" dirty="0">
                 <a:solidFill>
                   <a:schemeClr val="tx1">
                     <a:lumMod val="85000"/>
@@ -10457,7 +10432,7 @@
               <a:t>에서 정류장 고유 </a:t>
             </a:r>
             <a:r>
-              <a:rPr lang="en-US" altLang="ko-KR" sz="1100" dirty="0">
+              <a:rPr lang="en-US" altLang="ko-KR" sz="825" dirty="0">
                 <a:solidFill>
                   <a:schemeClr val="tx1">
                     <a:lumMod val="85000"/>
@@ -10471,7 +10446,7 @@
               <a:t>ID</a:t>
             </a:r>
             <a:r>
-              <a:rPr lang="ko-KR" altLang="en-US" sz="1100" dirty="0">
+              <a:rPr lang="ko-KR" altLang="en-US" sz="825" dirty="0">
                 <a:solidFill>
                   <a:schemeClr val="tx1">
                     <a:lumMod val="85000"/>
@@ -10485,7 +10460,7 @@
               <a:t>와 그에 대응하는 </a:t>
             </a:r>
             <a:r>
-              <a:rPr lang="ko-KR" altLang="en-US" sz="1100" dirty="0" err="1">
+              <a:rPr lang="ko-KR" altLang="en-US" sz="825" dirty="0" err="1">
                 <a:solidFill>
                   <a:schemeClr val="tx1">
                     <a:lumMod val="85000"/>
@@ -10499,7 +10474,7 @@
               <a:t>한글명</a:t>
             </a:r>
             <a:r>
-              <a:rPr lang="en-US" altLang="ko-KR" sz="1100" dirty="0">
+              <a:rPr lang="en-US" altLang="ko-KR" sz="825" dirty="0">
                 <a:solidFill>
                   <a:schemeClr val="tx1">
                     <a:lumMod val="85000"/>
@@ -10513,7 +10488,7 @@
               <a:t>,</a:t>
             </a:r>
             <a:r>
-              <a:rPr lang="ko-KR" altLang="en-US" sz="1100" dirty="0">
+              <a:rPr lang="ko-KR" altLang="en-US" sz="825" dirty="0">
                 <a:solidFill>
                   <a:schemeClr val="tx1">
                     <a:lumMod val="85000"/>
@@ -10527,7 +10502,148 @@
               <a:t> 지도상 위치를 받아옵니다</a:t>
             </a:r>
             <a:r>
-              <a:rPr lang="en-US" altLang="ko-KR" sz="1100" dirty="0">
+              <a:rPr lang="en-US" altLang="ko-KR" sz="825" dirty="0">
+                <a:solidFill>
+                  <a:schemeClr val="tx1">
+                    <a:lumMod val="85000"/>
+                    <a:lumOff val="15000"/>
+                  </a:schemeClr>
+                </a:solidFill>
+                <a:latin typeface="Pretendard" panose="02000503000000020004" pitchFamily="2" charset="-127"/>
+                <a:ea typeface="Pretendard" panose="02000503000000020004" pitchFamily="2" charset="-127"/>
+                <a:cs typeface="Pretendard" panose="02000503000000020004" pitchFamily="2" charset="-127"/>
+              </a:rPr>
+              <a:t>.</a:t>
+            </a:r>
+            <a:r>
+              <a:rPr lang="ko-KR" altLang="en-US" sz="825" dirty="0">
+                <a:solidFill>
+                  <a:schemeClr val="tx1">
+                    <a:lumMod val="85000"/>
+                    <a:lumOff val="15000"/>
+                  </a:schemeClr>
+                </a:solidFill>
+                <a:latin typeface="Pretendard" panose="02000503000000020004" pitchFamily="2" charset="-127"/>
+                <a:ea typeface="Pretendard" panose="02000503000000020004" pitchFamily="2" charset="-127"/>
+                <a:cs typeface="Pretendard" panose="02000503000000020004" pitchFamily="2" charset="-127"/>
+              </a:rPr>
+              <a:t> 카카오에서 제공하는 </a:t>
+            </a:r>
+            <a:r>
+              <a:rPr lang="en-US" altLang="ko-KR" sz="825" dirty="0">
+                <a:solidFill>
+                  <a:schemeClr val="tx1">
+                    <a:lumMod val="85000"/>
+                    <a:lumOff val="15000"/>
+                  </a:schemeClr>
+                </a:solidFill>
+                <a:highlight>
+                  <a:srgbClr val="FFECB2"/>
+                </a:highlight>
+                <a:latin typeface="Pretendard" panose="02000503000000020004" pitchFamily="2" charset="-127"/>
+                <a:ea typeface="Pretendard" panose="02000503000000020004" pitchFamily="2" charset="-127"/>
+                <a:cs typeface="Pretendard" panose="02000503000000020004" pitchFamily="2" charset="-127"/>
+              </a:rPr>
+              <a:t>’</a:t>
+            </a:r>
+            <a:r>
+              <a:rPr lang="ko-KR" altLang="en-US" sz="825" dirty="0" err="1">
+                <a:solidFill>
+                  <a:schemeClr val="tx1">
+                    <a:lumMod val="85000"/>
+                    <a:lumOff val="15000"/>
+                  </a:schemeClr>
+                </a:solidFill>
+                <a:highlight>
+                  <a:srgbClr val="FFECB2"/>
+                </a:highlight>
+                <a:latin typeface="Pretendard" panose="02000503000000020004" pitchFamily="2" charset="-127"/>
+                <a:ea typeface="Pretendard" panose="02000503000000020004" pitchFamily="2" charset="-127"/>
+                <a:cs typeface="Pretendard" panose="02000503000000020004" pitchFamily="2" charset="-127"/>
+              </a:rPr>
+              <a:t>카카오맵</a:t>
+            </a:r>
+            <a:r>
+              <a:rPr lang="en-US" altLang="ko-KR" sz="825" dirty="0">
+                <a:solidFill>
+                  <a:schemeClr val="tx1">
+                    <a:lumMod val="85000"/>
+                    <a:lumOff val="15000"/>
+                  </a:schemeClr>
+                </a:solidFill>
+                <a:highlight>
+                  <a:srgbClr val="FFECB2"/>
+                </a:highlight>
+                <a:latin typeface="Pretendard" panose="02000503000000020004" pitchFamily="2" charset="-127"/>
+                <a:ea typeface="Pretendard" panose="02000503000000020004" pitchFamily="2" charset="-127"/>
+                <a:cs typeface="Pretendard" panose="02000503000000020004" pitchFamily="2" charset="-127"/>
+              </a:rPr>
+              <a:t> </a:t>
+            </a:r>
+            <a:r>
+              <a:rPr lang="ko-KR" altLang="en-US" sz="825" dirty="0">
+                <a:solidFill>
+                  <a:schemeClr val="tx1">
+                    <a:lumMod val="85000"/>
+                    <a:lumOff val="15000"/>
+                  </a:schemeClr>
+                </a:solidFill>
+                <a:highlight>
+                  <a:srgbClr val="FFECB2"/>
+                </a:highlight>
+                <a:latin typeface="Pretendard" panose="02000503000000020004" pitchFamily="2" charset="-127"/>
+                <a:ea typeface="Pretendard" panose="02000503000000020004" pitchFamily="2" charset="-127"/>
+                <a:cs typeface="Pretendard" panose="02000503000000020004" pitchFamily="2" charset="-127"/>
+              </a:rPr>
+              <a:t>로컬 </a:t>
+            </a:r>
+            <a:r>
+              <a:rPr lang="en-US" altLang="ko-KR" sz="825" dirty="0">
+                <a:solidFill>
+                  <a:schemeClr val="tx1">
+                    <a:lumMod val="85000"/>
+                    <a:lumOff val="15000"/>
+                  </a:schemeClr>
+                </a:solidFill>
+                <a:highlight>
+                  <a:srgbClr val="FFECB2"/>
+                </a:highlight>
+                <a:latin typeface="Pretendard" panose="02000503000000020004" pitchFamily="2" charset="-127"/>
+                <a:ea typeface="Pretendard" panose="02000503000000020004" pitchFamily="2" charset="-127"/>
+                <a:cs typeface="Pretendard" panose="02000503000000020004" pitchFamily="2" charset="-127"/>
+              </a:rPr>
+              <a:t>REST API’</a:t>
+            </a:r>
+            <a:r>
+              <a:rPr lang="ko-KR" altLang="en-US" sz="825" dirty="0" err="1">
+                <a:solidFill>
+                  <a:schemeClr val="tx1">
+                    <a:lumMod val="85000"/>
+                    <a:lumOff val="15000"/>
+                  </a:schemeClr>
+                </a:solidFill>
+                <a:latin typeface="Pretendard" panose="02000503000000020004" pitchFamily="2" charset="-127"/>
+                <a:ea typeface="Pretendard" panose="02000503000000020004" pitchFamily="2" charset="-127"/>
+                <a:cs typeface="Pretendard" panose="02000503000000020004" pitchFamily="2" charset="-127"/>
+              </a:rPr>
+              <a:t>를</a:t>
+            </a:r>
+            <a:r>
+              <a:rPr lang="ko-KR" altLang="en-US" sz="825" dirty="0">
+                <a:solidFill>
+                  <a:schemeClr val="tx1">
+                    <a:lumMod val="85000"/>
+                    <a:lumOff val="15000"/>
+                  </a:schemeClr>
+                </a:solidFill>
+                <a:latin typeface="Pretendard" panose="02000503000000020004" pitchFamily="2" charset="-127"/>
+                <a:ea typeface="Pretendard" panose="02000503000000020004" pitchFamily="2" charset="-127"/>
+                <a:cs typeface="Pretendard" panose="02000503000000020004" pitchFamily="2" charset="-127"/>
+              </a:rPr>
+              <a:t> 활용하여 버스 정류장이 위치한 좌표가 어느 행정동에 속하여 있는지를 받아옵니다</a:t>
+            </a:r>
+            <a:r>
+              <a:rPr lang="en-US" altLang="ko-KR" sz="825" dirty="0">
                 <a:solidFill>
                   <a:schemeClr val="tx1">
                     <a:lumMod val="85000"/>
@@ -10557,8 +10673,8 @@
         </p:nvSpPr>
         <p:spPr>
           <a:xfrm>
-            <a:off x="5083356" y="3861905"/>
-            <a:ext cx="1377300" cy="261610"/>
+            <a:off x="2157874" y="2700684"/>
+            <a:ext cx="1079142" cy="219291"/>
           </a:xfrm>
           <a:prstGeom prst="rect">
             <a:avLst/>
@@ -10572,7 +10688,7 @@
           <a:lstStyle/>
           <a:p>
             <a:r>
-              <a:rPr lang="ko-KR" altLang="en-US" sz="1100" b="1" dirty="0">
+              <a:rPr lang="ko-KR" altLang="en-US" sz="825" b="1" dirty="0">
                 <a:solidFill>
                   <a:schemeClr val="tx1">
                     <a:lumMod val="85000"/>
@@ -10585,7 +10701,7 @@
               </a:rPr>
               <a:t>정보 출처와 저장 절차</a:t>
             </a:r>
-            <a:endParaRPr lang="en-US" altLang="ko-KR" sz="1100" b="1" dirty="0">
+            <a:endParaRPr lang="en-US" altLang="ko-KR" sz="825" b="1" dirty="0">
               <a:solidFill>
                 <a:schemeClr val="tx1">
                   <a:lumMod val="85000"/>
@@ -10613,8 +10729,8 @@
         </p:nvSpPr>
         <p:spPr>
           <a:xfrm>
-            <a:off x="5083356" y="4831914"/>
-            <a:ext cx="3789873" cy="1766381"/>
+            <a:off x="2157873" y="3451339"/>
+            <a:ext cx="4497051" cy="1665328"/>
           </a:xfrm>
           <a:prstGeom prst="rect">
             <a:avLst/>
@@ -10633,7 +10749,7 @@
               </a:lnSpc>
             </a:pPr>
             <a:r>
-              <a:rPr lang="ko-KR" altLang="en-US" sz="1100" dirty="0">
+              <a:rPr lang="ko-KR" altLang="en-US" sz="825" dirty="0">
                 <a:solidFill>
                   <a:schemeClr val="tx1">
                     <a:lumMod val="85000"/>
@@ -10647,7 +10763,7 @@
               <a:t>   </a:t>
             </a:r>
             <a:r>
-              <a:rPr lang="en-US" altLang="ko-KR" sz="1100" dirty="0">
+              <a:rPr lang="en-US" altLang="ko-KR" sz="825" dirty="0">
                 <a:solidFill>
                   <a:schemeClr val="tx1">
                     <a:lumMod val="85000"/>
@@ -10664,7 +10780,7 @@
               <a:t>‘</a:t>
             </a:r>
             <a:r>
-              <a:rPr lang="en-US" altLang="ko-KR" sz="1100" dirty="0" err="1">
+              <a:rPr lang="en-US" altLang="ko-KR" sz="825" dirty="0" err="1">
                 <a:solidFill>
                   <a:schemeClr val="tx1">
                     <a:lumMod val="85000"/>
@@ -10681,7 +10797,7 @@
               <a:t>fetch_busstop_data.py</a:t>
             </a:r>
             <a:r>
-              <a:rPr lang="en-US" altLang="ko-KR" sz="1100" dirty="0">
+              <a:rPr lang="en-US" altLang="ko-KR" sz="825" dirty="0">
                 <a:solidFill>
                   <a:schemeClr val="tx1">
                     <a:lumMod val="85000"/>
@@ -10698,7 +10814,7 @@
               <a:t>’</a:t>
             </a:r>
             <a:r>
-              <a:rPr lang="ko-KR" altLang="en-US" sz="1100" dirty="0">
+              <a:rPr lang="ko-KR" altLang="en-US" sz="825" dirty="0">
                 <a:solidFill>
                   <a:schemeClr val="tx1">
                     <a:lumMod val="85000"/>
@@ -10712,7 +10828,7 @@
               <a:t>에서</a:t>
             </a:r>
             <a:r>
-              <a:rPr lang="en-US" altLang="ko-KR" sz="1100" dirty="0">
+              <a:rPr lang="en-US" altLang="ko-KR" sz="825" dirty="0">
                 <a:solidFill>
                   <a:schemeClr val="tx1">
                     <a:lumMod val="85000"/>
@@ -10726,7 +10842,7 @@
               <a:t> API</a:t>
             </a:r>
             <a:r>
-              <a:rPr lang="ko-KR" altLang="en-US" sz="1100" dirty="0">
+              <a:rPr lang="ko-KR" altLang="en-US" sz="825" dirty="0">
                 <a:solidFill>
                   <a:schemeClr val="tx1">
                     <a:lumMod val="85000"/>
@@ -10740,7 +10856,7 @@
               <a:t> 요청과 </a:t>
             </a:r>
             <a:r>
-              <a:rPr lang="en-US" altLang="ko-KR" sz="1100" dirty="0">
+              <a:rPr lang="en-US" altLang="ko-KR" sz="825" dirty="0">
                 <a:solidFill>
                   <a:schemeClr val="tx1">
                     <a:lumMod val="85000"/>
@@ -10754,21 +10870,35 @@
               <a:t>DB</a:t>
             </a:r>
             <a:r>
-              <a:rPr lang="ko-KR" altLang="en-US" sz="1100" dirty="0">
-                <a:solidFill>
-                  <a:schemeClr val="tx1">
-                    <a:lumMod val="85000"/>
-                    <a:lumOff val="15000"/>
-                  </a:schemeClr>
-                </a:solidFill>
-                <a:latin typeface="Pretendard" panose="02000503000000020004" pitchFamily="2" charset="-127"/>
-                <a:ea typeface="Pretendard" panose="02000503000000020004" pitchFamily="2" charset="-127"/>
-                <a:cs typeface="Pretendard" panose="02000503000000020004" pitchFamily="2" charset="-127"/>
-              </a:rPr>
-              <a:t> 저장을 관리</a:t>
-            </a:r>
-            <a:r>
-              <a:rPr lang="en-US" altLang="ko-KR" sz="1100" dirty="0">
+              <a:rPr lang="ko-KR" altLang="en-US" sz="825" dirty="0">
+                <a:solidFill>
+                  <a:schemeClr val="tx1">
+                    <a:lumMod val="85000"/>
+                    <a:lumOff val="15000"/>
+                  </a:schemeClr>
+                </a:solidFill>
+                <a:latin typeface="Pretendard" panose="02000503000000020004" pitchFamily="2" charset="-127"/>
+                <a:ea typeface="Pretendard" panose="02000503000000020004" pitchFamily="2" charset="-127"/>
+                <a:cs typeface="Pretendard" panose="02000503000000020004" pitchFamily="2" charset="-127"/>
+              </a:rPr>
+              <a:t> 저장을 관리합니다</a:t>
+            </a:r>
+            <a:r>
+              <a:rPr lang="en-US" altLang="ko-KR" sz="825" dirty="0">
+                <a:solidFill>
+                  <a:schemeClr val="tx1">
+                    <a:lumMod val="85000"/>
+                    <a:lumOff val="15000"/>
+                  </a:schemeClr>
+                </a:solidFill>
+                <a:latin typeface="Pretendard" panose="02000503000000020004" pitchFamily="2" charset="-127"/>
+                <a:ea typeface="Pretendard" panose="02000503000000020004" pitchFamily="2" charset="-127"/>
+                <a:cs typeface="Pretendard" panose="02000503000000020004" pitchFamily="2" charset="-127"/>
+              </a:rPr>
+              <a:t>.</a:t>
+            </a:r>
+            <a:r>
+              <a:rPr lang="ko-KR" altLang="en-US" sz="825" dirty="0">
                 <a:solidFill>
                   <a:schemeClr val="tx1">
                     <a:lumMod val="85000"/>
@@ -10782,49 +10912,7 @@
               <a:t> </a:t>
             </a:r>
             <a:r>
-              <a:rPr lang="ko-KR" altLang="en-US" sz="1100" dirty="0">
-                <a:solidFill>
-                  <a:schemeClr val="tx1">
-                    <a:lumMod val="85000"/>
-                    <a:lumOff val="15000"/>
-                  </a:schemeClr>
-                </a:solidFill>
-                <a:latin typeface="Pretendard" panose="02000503000000020004" pitchFamily="2" charset="-127"/>
-                <a:ea typeface="Pretendard" panose="02000503000000020004" pitchFamily="2" charset="-127"/>
-                <a:cs typeface="Pretendard" panose="02000503000000020004" pitchFamily="2" charset="-127"/>
-              </a:rPr>
-              <a:t>합니다</a:t>
-            </a:r>
-            <a:r>
-              <a:rPr lang="en-US" altLang="ko-KR" sz="1100" dirty="0">
-                <a:solidFill>
-                  <a:schemeClr val="tx1">
-                    <a:lumMod val="85000"/>
-                    <a:lumOff val="15000"/>
-                  </a:schemeClr>
-                </a:solidFill>
-                <a:latin typeface="Pretendard" panose="02000503000000020004" pitchFamily="2" charset="-127"/>
-                <a:ea typeface="Pretendard" panose="02000503000000020004" pitchFamily="2" charset="-127"/>
-                <a:cs typeface="Pretendard" panose="02000503000000020004" pitchFamily="2" charset="-127"/>
-              </a:rPr>
-              <a:t>.</a:t>
-            </a:r>
-            <a:r>
-              <a:rPr lang="ko-KR" altLang="en-US" sz="1100" dirty="0">
-                <a:solidFill>
-                  <a:schemeClr val="tx1">
-                    <a:lumMod val="85000"/>
-                    <a:lumOff val="15000"/>
-                  </a:schemeClr>
-                </a:solidFill>
-                <a:latin typeface="Pretendard" panose="02000503000000020004" pitchFamily="2" charset="-127"/>
-                <a:ea typeface="Pretendard" panose="02000503000000020004" pitchFamily="2" charset="-127"/>
-                <a:cs typeface="Pretendard" panose="02000503000000020004" pitchFamily="2" charset="-127"/>
-              </a:rPr>
-              <a:t> </a:t>
-            </a:r>
-            <a:r>
-              <a:rPr lang="ko-KR" altLang="en-US" sz="1100" dirty="0">
+              <a:rPr lang="ko-KR" altLang="en-US" sz="825" dirty="0">
                 <a:solidFill>
                   <a:schemeClr val="tx1">
                     <a:lumMod val="85000"/>
@@ -10841,7 +10929,7 @@
               <a:t>행정동별 인구 수와 마찬가지로 만 개가 넘는 정류장의 데이터를 받아와야 하지만</a:t>
             </a:r>
             <a:r>
-              <a:rPr lang="en-US" altLang="ko-KR" sz="1100" dirty="0">
+              <a:rPr lang="en-US" altLang="ko-KR" sz="825" dirty="0">
                 <a:solidFill>
                   <a:schemeClr val="tx1">
                     <a:lumMod val="85000"/>
@@ -10858,7 +10946,7 @@
               <a:t>,</a:t>
             </a:r>
             <a:r>
-              <a:rPr lang="ko-KR" altLang="en-US" sz="1100" dirty="0">
+              <a:rPr lang="ko-KR" altLang="en-US" sz="825" dirty="0">
                 <a:solidFill>
                   <a:schemeClr val="tx1">
                     <a:lumMod val="85000"/>
@@ -10875,7 +10963,7 @@
               <a:t> 한 번에 </a:t>
             </a:r>
             <a:r>
-              <a:rPr lang="en-US" altLang="ko-KR" sz="1100" dirty="0">
+              <a:rPr lang="en-US" altLang="ko-KR" sz="825" dirty="0">
                 <a:solidFill>
                   <a:schemeClr val="tx1">
                     <a:lumMod val="85000"/>
@@ -10892,7 +10980,7 @@
               <a:t>1,000</a:t>
             </a:r>
             <a:r>
-              <a:rPr lang="ko-KR" altLang="en-US" sz="1100" dirty="0">
+              <a:rPr lang="ko-KR" altLang="en-US" sz="825" dirty="0">
                 <a:solidFill>
                   <a:schemeClr val="tx1">
                     <a:lumMod val="85000"/>
@@ -10906,10 +10994,10 @@
                 <a:ea typeface="Pretendard" panose="02000503000000020004" pitchFamily="2" charset="-127"/>
                 <a:cs typeface="Pretendard" panose="02000503000000020004" pitchFamily="2" charset="-127"/>
               </a:rPr>
-              <a:t>건 까지의 제안이 있기에</a:t>
-            </a:r>
-            <a:r>
-              <a:rPr lang="en-US" altLang="ko-KR" sz="1100" dirty="0">
+              <a:t>건 까지의 제한이 있기에</a:t>
+            </a:r>
+            <a:r>
+              <a:rPr lang="en-US" altLang="ko-KR" sz="825" dirty="0">
                 <a:solidFill>
                   <a:schemeClr val="tx1">
                     <a:lumMod val="85000"/>
@@ -10926,7 +11014,7 @@
               <a:t>,</a:t>
             </a:r>
             <a:r>
-              <a:rPr lang="ko-KR" altLang="en-US" sz="1100" dirty="0">
+              <a:rPr lang="ko-KR" altLang="en-US" sz="825" dirty="0">
                 <a:solidFill>
                   <a:schemeClr val="tx1">
                     <a:lumMod val="85000"/>
@@ -10940,7 +11028,7 @@
               <a:t> 마찬가지로 </a:t>
             </a:r>
             <a:r>
-              <a:rPr lang="ko-KR" altLang="en-US" sz="1100" dirty="0" err="1">
+              <a:rPr lang="ko-KR" altLang="en-US" sz="825" dirty="0" err="1">
                 <a:solidFill>
                   <a:schemeClr val="tx1">
                     <a:lumMod val="85000"/>
@@ -10954,7 +11042,7 @@
               <a:t>페이지네이션을</a:t>
             </a:r>
             <a:r>
-              <a:rPr lang="ko-KR" altLang="en-US" sz="1100" dirty="0">
+              <a:rPr lang="ko-KR" altLang="en-US" sz="825" dirty="0">
                 <a:solidFill>
                   <a:schemeClr val="tx1">
                     <a:lumMod val="85000"/>
@@ -10968,7 +11056,7 @@
               <a:t> 활용하여 </a:t>
             </a:r>
             <a:r>
-              <a:rPr lang="en-US" altLang="ko-KR" sz="1100" dirty="0">
+              <a:rPr lang="en-US" altLang="ko-KR" sz="825" dirty="0">
                 <a:solidFill>
                   <a:schemeClr val="tx1">
                     <a:lumMod val="85000"/>
@@ -10982,7 +11070,7 @@
               <a:t>1,000</a:t>
             </a:r>
             <a:r>
-              <a:rPr lang="ko-KR" altLang="en-US" sz="1100" dirty="0">
+              <a:rPr lang="ko-KR" altLang="en-US" sz="825" dirty="0">
                 <a:solidFill>
                   <a:schemeClr val="tx1">
                     <a:lumMod val="85000"/>
@@ -10996,7 +11084,7 @@
               <a:t>건씩 나누어 요청을 보냅니다</a:t>
             </a:r>
             <a:r>
-              <a:rPr lang="en-US" altLang="ko-KR" sz="1100" dirty="0">
+              <a:rPr lang="en-US" altLang="ko-KR" sz="825" dirty="0">
                 <a:solidFill>
                   <a:schemeClr val="tx1">
                     <a:lumMod val="85000"/>
@@ -11010,7 +11098,7 @@
               <a:t>.</a:t>
             </a:r>
             <a:r>
-              <a:rPr lang="ko-KR" altLang="en-US" sz="1100" dirty="0">
+              <a:rPr lang="ko-KR" altLang="en-US" sz="825" dirty="0">
                 <a:solidFill>
                   <a:schemeClr val="tx1">
                     <a:lumMod val="85000"/>
@@ -11024,7 +11112,7 @@
               <a:t> </a:t>
             </a:r>
             <a:r>
-              <a:rPr lang="ko-KR" altLang="en-US" sz="1100" dirty="0">
+              <a:rPr lang="ko-KR" altLang="en-US" sz="825" dirty="0">
                 <a:solidFill>
                   <a:schemeClr val="tx1">
                     <a:lumMod val="85000"/>
@@ -11041,7 +11129,7 @@
               <a:t>교통 정책에 따라 생겼다 사라질 수도 있는 버스 정류장이기에</a:t>
             </a:r>
             <a:r>
-              <a:rPr lang="en-US" altLang="ko-KR" sz="1100" dirty="0">
+              <a:rPr lang="en-US" altLang="ko-KR" sz="825" dirty="0">
                 <a:solidFill>
                   <a:schemeClr val="tx1">
                     <a:lumMod val="85000"/>
@@ -11058,21 +11146,133 @@
               <a:t>,</a:t>
             </a:r>
             <a:r>
-              <a:rPr lang="ko-KR" altLang="en-US" sz="1100" dirty="0">
-                <a:solidFill>
-                  <a:schemeClr val="tx1">
-                    <a:lumMod val="85000"/>
-                    <a:lumOff val="15000"/>
-                  </a:schemeClr>
-                </a:solidFill>
-                <a:latin typeface="Pretendard" panose="02000503000000020004" pitchFamily="2" charset="-127"/>
-                <a:ea typeface="Pretendard" panose="02000503000000020004" pitchFamily="2" charset="-127"/>
-                <a:cs typeface="Pretendard" panose="02000503000000020004" pitchFamily="2" charset="-127"/>
-              </a:rPr>
-              <a:t> 과거 데이터를 열람하여 시간에 따른 추이를 확인할 수 있게 하고자 </a:t>
-            </a:r>
-            <a:r>
-              <a:rPr lang="en-US" altLang="ko-KR" sz="1100" dirty="0">
+              <a:rPr lang="ko-KR" altLang="en-US" sz="825" dirty="0">
+                <a:solidFill>
+                  <a:schemeClr val="tx1">
+                    <a:lumMod val="85000"/>
+                    <a:lumOff val="15000"/>
+                  </a:schemeClr>
+                </a:solidFill>
+                <a:latin typeface="Pretendard" panose="02000503000000020004" pitchFamily="2" charset="-127"/>
+                <a:ea typeface="Pretendard" panose="02000503000000020004" pitchFamily="2" charset="-127"/>
+                <a:cs typeface="Pretendard" panose="02000503000000020004" pitchFamily="2" charset="-127"/>
+              </a:rPr>
+              <a:t> 정류장이 사용되고 있는지</a:t>
+            </a:r>
+            <a:r>
+              <a:rPr lang="en-US" altLang="ko-KR" sz="825" dirty="0">
+                <a:solidFill>
+                  <a:schemeClr val="tx1">
+                    <a:lumMod val="85000"/>
+                    <a:lumOff val="15000"/>
+                  </a:schemeClr>
+                </a:solidFill>
+                <a:latin typeface="Pretendard" panose="02000503000000020004" pitchFamily="2" charset="-127"/>
+                <a:ea typeface="Pretendard" panose="02000503000000020004" pitchFamily="2" charset="-127"/>
+                <a:cs typeface="Pretendard" panose="02000503000000020004" pitchFamily="2" charset="-127"/>
+              </a:rPr>
+              <a:t>,</a:t>
+            </a:r>
+            <a:r>
+              <a:rPr lang="ko-KR" altLang="en-US" sz="825" dirty="0">
+                <a:solidFill>
+                  <a:schemeClr val="tx1">
+                    <a:lumMod val="85000"/>
+                    <a:lumOff val="15000"/>
+                  </a:schemeClr>
+                </a:solidFill>
+                <a:latin typeface="Pretendard" panose="02000503000000020004" pitchFamily="2" charset="-127"/>
+                <a:ea typeface="Pretendard" panose="02000503000000020004" pitchFamily="2" charset="-127"/>
+                <a:cs typeface="Pretendard" panose="02000503000000020004" pitchFamily="2" charset="-127"/>
+              </a:rPr>
+              <a:t> 아닌지 상태를 별도로 추적합니다</a:t>
+            </a:r>
+            <a:r>
+              <a:rPr lang="en-US" altLang="ko-KR" sz="825" dirty="0">
+                <a:solidFill>
+                  <a:schemeClr val="tx1">
+                    <a:lumMod val="85000"/>
+                    <a:lumOff val="15000"/>
+                  </a:schemeClr>
+                </a:solidFill>
+                <a:latin typeface="Pretendard" panose="02000503000000020004" pitchFamily="2" charset="-127"/>
+                <a:ea typeface="Pretendard" panose="02000503000000020004" pitchFamily="2" charset="-127"/>
+                <a:cs typeface="Pretendard" panose="02000503000000020004" pitchFamily="2" charset="-127"/>
+              </a:rPr>
+              <a:t>.</a:t>
+            </a:r>
+            <a:r>
+              <a:rPr lang="ko-KR" altLang="en-US" sz="825" dirty="0">
+                <a:solidFill>
+                  <a:schemeClr val="tx1">
+                    <a:lumMod val="85000"/>
+                    <a:lumOff val="15000"/>
+                  </a:schemeClr>
+                </a:solidFill>
+                <a:latin typeface="Pretendard" panose="02000503000000020004" pitchFamily="2" charset="-127"/>
+                <a:ea typeface="Pretendard" panose="02000503000000020004" pitchFamily="2" charset="-127"/>
+                <a:cs typeface="Pretendard" panose="02000503000000020004" pitchFamily="2" charset="-127"/>
+              </a:rPr>
+              <a:t> 사용되고 있지 않은 상태</a:t>
+            </a:r>
+            <a:r>
+              <a:rPr lang="en-US" altLang="ko-KR" sz="825" dirty="0">
+                <a:solidFill>
+                  <a:schemeClr val="tx1">
+                    <a:lumMod val="85000"/>
+                    <a:lumOff val="15000"/>
+                  </a:schemeClr>
+                </a:solidFill>
+                <a:latin typeface="Pretendard" panose="02000503000000020004" pitchFamily="2" charset="-127"/>
+                <a:ea typeface="Pretendard" panose="02000503000000020004" pitchFamily="2" charset="-127"/>
+                <a:cs typeface="Pretendard" panose="02000503000000020004" pitchFamily="2" charset="-127"/>
+              </a:rPr>
+              <a:t>(</a:t>
+            </a:r>
+            <a:r>
+              <a:rPr lang="ko-KR" altLang="en-US" sz="825" dirty="0">
+                <a:solidFill>
+                  <a:schemeClr val="tx1">
+                    <a:lumMod val="85000"/>
+                    <a:lumOff val="15000"/>
+                  </a:schemeClr>
+                </a:solidFill>
+                <a:latin typeface="Pretendard" panose="02000503000000020004" pitchFamily="2" charset="-127"/>
+                <a:ea typeface="Pretendard" panose="02000503000000020004" pitchFamily="2" charset="-127"/>
+                <a:cs typeface="Pretendard" panose="02000503000000020004" pitchFamily="2" charset="-127"/>
+              </a:rPr>
+              <a:t>폐지된 정류장</a:t>
+            </a:r>
+            <a:r>
+              <a:rPr lang="en-US" altLang="ko-KR" sz="825" dirty="0">
+                <a:solidFill>
+                  <a:schemeClr val="tx1">
+                    <a:lumMod val="85000"/>
+                    <a:lumOff val="15000"/>
+                  </a:schemeClr>
+                </a:solidFill>
+                <a:latin typeface="Pretendard" panose="02000503000000020004" pitchFamily="2" charset="-127"/>
+                <a:ea typeface="Pretendard" panose="02000503000000020004" pitchFamily="2" charset="-127"/>
+                <a:cs typeface="Pretendard" panose="02000503000000020004" pitchFamily="2" charset="-127"/>
+              </a:rPr>
+              <a:t>)</a:t>
+            </a:r>
+            <a:r>
+              <a:rPr lang="ko-KR" altLang="en-US" sz="825" dirty="0">
+                <a:solidFill>
+                  <a:schemeClr val="tx1">
+                    <a:lumMod val="85000"/>
+                    <a:lumOff val="15000"/>
+                  </a:schemeClr>
+                </a:solidFill>
+                <a:latin typeface="Pretendard" panose="02000503000000020004" pitchFamily="2" charset="-127"/>
+                <a:ea typeface="Pretendard" panose="02000503000000020004" pitchFamily="2" charset="-127"/>
+                <a:cs typeface="Pretendard" panose="02000503000000020004" pitchFamily="2" charset="-127"/>
+              </a:rPr>
+              <a:t>이라도 과거 데이터를 열람하여 시간에 따른 추이를 확인할 수 있게 하고자 </a:t>
+            </a:r>
+            <a:r>
+              <a:rPr lang="en-US" altLang="ko-KR" sz="825" dirty="0">
                 <a:solidFill>
                   <a:schemeClr val="tx1">
                     <a:lumMod val="85000"/>
@@ -11086,7 +11286,7 @@
               <a:t>‘</a:t>
             </a:r>
             <a:r>
-              <a:rPr lang="en-US" altLang="ko-KR" sz="1100" dirty="0" err="1">
+              <a:rPr lang="en-US" altLang="ko-KR" sz="825" dirty="0" err="1">
                 <a:solidFill>
                   <a:schemeClr val="tx1">
                     <a:lumMod val="85000"/>
@@ -11100,7 +11300,7 @@
               <a:t>is_active</a:t>
             </a:r>
             <a:r>
-              <a:rPr lang="en-US" altLang="ko-KR" sz="1100" dirty="0">
+              <a:rPr lang="en-US" altLang="ko-KR" sz="825" dirty="0">
                 <a:solidFill>
                   <a:schemeClr val="tx1">
                     <a:lumMod val="85000"/>
@@ -11114,7 +11314,7 @@
               <a:t>’</a:t>
             </a:r>
             <a:r>
-              <a:rPr lang="ko-KR" altLang="en-US" sz="1100" dirty="0">
+              <a:rPr lang="ko-KR" altLang="en-US" sz="825" dirty="0">
                 <a:solidFill>
                   <a:schemeClr val="tx1">
                     <a:lumMod val="85000"/>
@@ -11128,7 +11328,7 @@
               <a:t> 데이터로 정류장 활성 여부를 추적하여 데이터를 삭제하지 않고 보존합니다</a:t>
             </a:r>
             <a:r>
-              <a:rPr lang="en-US" altLang="ko-KR" sz="1100" dirty="0">
+              <a:rPr lang="en-US" altLang="ko-KR" sz="825" dirty="0">
                 <a:solidFill>
                   <a:schemeClr val="tx1">
                     <a:lumMod val="85000"/>
@@ -11142,7 +11342,35 @@
               <a:t>.</a:t>
             </a:r>
             <a:r>
-              <a:rPr lang="ko-KR" altLang="en-US" sz="1100" dirty="0">
+              <a:rPr lang="ko-KR" altLang="en-US" sz="825" dirty="0">
+                <a:solidFill>
+                  <a:schemeClr val="tx1">
+                    <a:lumMod val="85000"/>
+                    <a:lumOff val="15000"/>
+                  </a:schemeClr>
+                </a:solidFill>
+                <a:latin typeface="Pretendard" panose="02000503000000020004" pitchFamily="2" charset="-127"/>
+                <a:ea typeface="Pretendard" panose="02000503000000020004" pitchFamily="2" charset="-127"/>
+                <a:cs typeface="Pretendard" panose="02000503000000020004" pitchFamily="2" charset="-127"/>
+              </a:rPr>
+              <a:t> 또</a:t>
+            </a:r>
+            <a:r>
+              <a:rPr lang="en-US" altLang="ko-KR" sz="825" dirty="0">
+                <a:solidFill>
+                  <a:schemeClr val="tx1">
+                    <a:lumMod val="85000"/>
+                    <a:lumOff val="15000"/>
+                  </a:schemeClr>
+                </a:solidFill>
+                <a:latin typeface="Pretendard" panose="02000503000000020004" pitchFamily="2" charset="-127"/>
+                <a:ea typeface="Pretendard" panose="02000503000000020004" pitchFamily="2" charset="-127"/>
+                <a:cs typeface="Pretendard" panose="02000503000000020004" pitchFamily="2" charset="-127"/>
+              </a:rPr>
+              <a:t>,</a:t>
+            </a:r>
+            <a:r>
+              <a:rPr lang="ko-KR" altLang="en-US" sz="825" dirty="0">
                 <a:solidFill>
                   <a:schemeClr val="tx1">
                     <a:lumMod val="85000"/>
@@ -11155,17 +11383,172 @@
               </a:rPr>
               <a:t> </a:t>
             </a:r>
-            <a:endParaRPr lang="en-US" altLang="ko-KR" sz="1100" dirty="0">
-              <a:solidFill>
-                <a:schemeClr val="tx1">
-                  <a:lumMod val="85000"/>
-                  <a:lumOff val="15000"/>
-                </a:schemeClr>
-              </a:solidFill>
-              <a:latin typeface="Pretendard" panose="02000503000000020004" pitchFamily="2" charset="-127"/>
-              <a:ea typeface="Pretendard" panose="02000503000000020004" pitchFamily="2" charset="-127"/>
-              <a:cs typeface="Pretendard" panose="02000503000000020004" pitchFamily="2" charset="-127"/>
-            </a:endParaRPr>
+            <a:r>
+              <a:rPr lang="ko-KR" altLang="en-US" sz="825" dirty="0">
+                <a:solidFill>
+                  <a:schemeClr val="tx1">
+                    <a:lumMod val="85000"/>
+                    <a:lumOff val="15000"/>
+                  </a:schemeClr>
+                </a:solidFill>
+                <a:highlight>
+                  <a:srgbClr val="FFDADB"/>
+                </a:highlight>
+                <a:latin typeface="Pretendard" panose="02000503000000020004" pitchFamily="2" charset="-127"/>
+                <a:ea typeface="Pretendard" panose="02000503000000020004" pitchFamily="2" charset="-127"/>
+                <a:cs typeface="Pretendard" panose="02000503000000020004" pitchFamily="2" charset="-127"/>
+              </a:rPr>
+              <a:t>서울시 공공데이터에서는 기본적으로 특정한 버스 정류장이 위치한 지도상의 좌표만 제공하고</a:t>
+            </a:r>
+            <a:r>
+              <a:rPr lang="en-US" altLang="ko-KR" sz="825" dirty="0">
+                <a:solidFill>
+                  <a:schemeClr val="tx1">
+                    <a:lumMod val="85000"/>
+                    <a:lumOff val="15000"/>
+                  </a:schemeClr>
+                </a:solidFill>
+                <a:highlight>
+                  <a:srgbClr val="FFDADB"/>
+                </a:highlight>
+                <a:latin typeface="Pretendard" panose="02000503000000020004" pitchFamily="2" charset="-127"/>
+                <a:ea typeface="Pretendard" panose="02000503000000020004" pitchFamily="2" charset="-127"/>
+                <a:cs typeface="Pretendard" panose="02000503000000020004" pitchFamily="2" charset="-127"/>
+              </a:rPr>
+              <a:t>,</a:t>
+            </a:r>
+            <a:r>
+              <a:rPr lang="ko-KR" altLang="en-US" sz="825" dirty="0">
+                <a:solidFill>
+                  <a:schemeClr val="tx1">
+                    <a:lumMod val="85000"/>
+                    <a:lumOff val="15000"/>
+                  </a:schemeClr>
+                </a:solidFill>
+                <a:highlight>
+                  <a:srgbClr val="FFDADB"/>
+                </a:highlight>
+                <a:latin typeface="Pretendard" panose="02000503000000020004" pitchFamily="2" charset="-127"/>
+                <a:ea typeface="Pretendard" panose="02000503000000020004" pitchFamily="2" charset="-127"/>
+                <a:cs typeface="Pretendard" panose="02000503000000020004" pitchFamily="2" charset="-127"/>
+              </a:rPr>
+              <a:t> 주소나 소속된 행정동 정보는 별도로 제공하지 않기에</a:t>
+            </a:r>
+            <a:r>
+              <a:rPr lang="en-US" altLang="ko-KR" sz="825" dirty="0">
+                <a:solidFill>
+                  <a:schemeClr val="tx1">
+                    <a:lumMod val="85000"/>
+                    <a:lumOff val="15000"/>
+                  </a:schemeClr>
+                </a:solidFill>
+                <a:highlight>
+                  <a:srgbClr val="FFDADB"/>
+                </a:highlight>
+                <a:latin typeface="Pretendard" panose="02000503000000020004" pitchFamily="2" charset="-127"/>
+                <a:ea typeface="Pretendard" panose="02000503000000020004" pitchFamily="2" charset="-127"/>
+                <a:cs typeface="Pretendard" panose="02000503000000020004" pitchFamily="2" charset="-127"/>
+              </a:rPr>
+              <a:t>,</a:t>
+            </a:r>
+            <a:r>
+              <a:rPr lang="ko-KR" altLang="en-US" sz="825" dirty="0">
+                <a:solidFill>
+                  <a:schemeClr val="tx1">
+                    <a:lumMod val="85000"/>
+                    <a:lumOff val="15000"/>
+                  </a:schemeClr>
+                </a:solidFill>
+                <a:latin typeface="Pretendard" panose="02000503000000020004" pitchFamily="2" charset="-127"/>
+                <a:ea typeface="Pretendard" panose="02000503000000020004" pitchFamily="2" charset="-127"/>
+                <a:cs typeface="Pretendard" panose="02000503000000020004" pitchFamily="2" charset="-127"/>
+              </a:rPr>
+              <a:t> 제공되는 좌표를 통해 이 정류장이 어느 행정동에 위치하여 있는지를 확인하는 과정을 </a:t>
+            </a:r>
+            <a:r>
+              <a:rPr lang="en-US" altLang="ko-KR" sz="825" dirty="0">
+                <a:solidFill>
+                  <a:schemeClr val="tx1">
+                    <a:lumMod val="85000"/>
+                    <a:lumOff val="15000"/>
+                  </a:schemeClr>
+                </a:solidFill>
+                <a:latin typeface="Pretendard" panose="02000503000000020004" pitchFamily="2" charset="-127"/>
+                <a:ea typeface="Pretendard" panose="02000503000000020004" pitchFamily="2" charset="-127"/>
+                <a:cs typeface="Pretendard" panose="02000503000000020004" pitchFamily="2" charset="-127"/>
+              </a:rPr>
+              <a:t>‘</a:t>
+            </a:r>
+            <a:r>
+              <a:rPr lang="ko-KR" altLang="en-US" sz="825" dirty="0" err="1">
+                <a:solidFill>
+                  <a:schemeClr val="tx1">
+                    <a:lumMod val="85000"/>
+                    <a:lumOff val="15000"/>
+                  </a:schemeClr>
+                </a:solidFill>
+                <a:latin typeface="Pretendard" panose="02000503000000020004" pitchFamily="2" charset="-127"/>
+                <a:ea typeface="Pretendard" panose="02000503000000020004" pitchFamily="2" charset="-127"/>
+                <a:cs typeface="Pretendard" panose="02000503000000020004" pitchFamily="2" charset="-127"/>
+              </a:rPr>
+              <a:t>카카오맵</a:t>
+            </a:r>
+            <a:r>
+              <a:rPr lang="ko-KR" altLang="en-US" sz="825" dirty="0">
+                <a:solidFill>
+                  <a:schemeClr val="tx1">
+                    <a:lumMod val="85000"/>
+                    <a:lumOff val="15000"/>
+                  </a:schemeClr>
+                </a:solidFill>
+                <a:latin typeface="Pretendard" panose="02000503000000020004" pitchFamily="2" charset="-127"/>
+                <a:ea typeface="Pretendard" panose="02000503000000020004" pitchFamily="2" charset="-127"/>
+                <a:cs typeface="Pretendard" panose="02000503000000020004" pitchFamily="2" charset="-127"/>
+              </a:rPr>
+              <a:t> 로컬 </a:t>
+            </a:r>
+            <a:r>
+              <a:rPr lang="en-US" altLang="ko-KR" sz="825" dirty="0">
+                <a:solidFill>
+                  <a:schemeClr val="tx1">
+                    <a:lumMod val="85000"/>
+                    <a:lumOff val="15000"/>
+                  </a:schemeClr>
+                </a:solidFill>
+                <a:latin typeface="Pretendard" panose="02000503000000020004" pitchFamily="2" charset="-127"/>
+                <a:ea typeface="Pretendard" panose="02000503000000020004" pitchFamily="2" charset="-127"/>
+                <a:cs typeface="Pretendard" panose="02000503000000020004" pitchFamily="2" charset="-127"/>
+              </a:rPr>
+              <a:t>REST API’</a:t>
+            </a:r>
+            <a:r>
+              <a:rPr lang="ko-KR" altLang="en-US" sz="825" dirty="0">
+                <a:solidFill>
+                  <a:schemeClr val="tx1">
+                    <a:lumMod val="85000"/>
+                    <a:lumOff val="15000"/>
+                  </a:schemeClr>
+                </a:solidFill>
+                <a:latin typeface="Pretendard" panose="02000503000000020004" pitchFamily="2" charset="-127"/>
+                <a:ea typeface="Pretendard" panose="02000503000000020004" pitchFamily="2" charset="-127"/>
+                <a:cs typeface="Pretendard" panose="02000503000000020004" pitchFamily="2" charset="-127"/>
+              </a:rPr>
+              <a:t>에서 제공하는 좌표의 행정동 주소로의 변환 서비스를 거쳐 최종 데이터를 수집하게 됩니다</a:t>
+            </a:r>
+            <a:r>
+              <a:rPr lang="en-US" altLang="ko-KR" sz="825" dirty="0">
+                <a:solidFill>
+                  <a:schemeClr val="tx1">
+                    <a:lumMod val="85000"/>
+                    <a:lumOff val="15000"/>
+                  </a:schemeClr>
+                </a:solidFill>
+                <a:latin typeface="Pretendard" panose="02000503000000020004" pitchFamily="2" charset="-127"/>
+                <a:ea typeface="Pretendard" panose="02000503000000020004" pitchFamily="2" charset="-127"/>
+                <a:cs typeface="Pretendard" panose="02000503000000020004" pitchFamily="2" charset="-127"/>
+              </a:rPr>
+              <a:t>.</a:t>
+            </a:r>
           </a:p>
         </p:txBody>
       </p:sp>
@@ -11183,8 +11566,8 @@
         </p:nvSpPr>
         <p:spPr>
           <a:xfrm>
-            <a:off x="5083356" y="2006993"/>
-            <a:ext cx="3789873" cy="1314912"/>
+            <a:off x="2157874" y="1369698"/>
+            <a:ext cx="4497051" cy="1009251"/>
           </a:xfrm>
           <a:prstGeom prst="rect">
             <a:avLst/>
@@ -11203,7 +11586,7 @@
               </a:lnSpc>
             </a:pPr>
             <a:r>
-              <a:rPr lang="en-US" altLang="ko-KR" sz="900" b="1" dirty="0" err="1">
+              <a:rPr lang="en-US" altLang="ko-KR" sz="675" b="1" dirty="0" err="1">
                 <a:solidFill>
                   <a:schemeClr val="tx1">
                     <a:lumMod val="85000"/>
@@ -11217,7 +11600,7 @@
               <a:t>busstop_id</a:t>
             </a:r>
             <a:r>
-              <a:rPr lang="en-US" altLang="ko-KR" sz="900" dirty="0">
+              <a:rPr lang="en-US" altLang="ko-KR" sz="675" dirty="0">
                 <a:solidFill>
                   <a:schemeClr val="tx1">
                     <a:lumMod val="85000"/>
@@ -11231,7 +11614,7 @@
               <a:t>: </a:t>
             </a:r>
             <a:r>
-              <a:rPr lang="ko-KR" altLang="en-US" sz="900" dirty="0">
+              <a:rPr lang="ko-KR" altLang="en-US" sz="675" dirty="0">
                 <a:solidFill>
                   <a:schemeClr val="tx1">
                     <a:lumMod val="85000"/>
@@ -11245,7 +11628,7 @@
               <a:t>버스 정류장별 데이터의 구분을 위한</a:t>
             </a:r>
             <a:r>
-              <a:rPr lang="en-US" altLang="ko-KR" sz="900" dirty="0">
+              <a:rPr lang="en-US" altLang="ko-KR" sz="675" dirty="0">
                 <a:solidFill>
                   <a:schemeClr val="tx1">
                     <a:lumMod val="85000"/>
@@ -11259,7 +11642,7 @@
               <a:t> ID</a:t>
             </a:r>
             <a:r>
-              <a:rPr lang="ko-KR" altLang="en-US" sz="900" dirty="0" err="1">
+              <a:rPr lang="ko-KR" altLang="en-US" sz="675" dirty="0" err="1">
                 <a:solidFill>
                   <a:schemeClr val="tx1">
                     <a:lumMod val="85000"/>
@@ -11273,7 +11656,7 @@
               <a:t>를</a:t>
             </a:r>
             <a:r>
-              <a:rPr lang="ko-KR" altLang="en-US" sz="900" dirty="0">
+              <a:rPr lang="ko-KR" altLang="en-US" sz="675" dirty="0">
                 <a:solidFill>
                   <a:schemeClr val="tx1">
                     <a:lumMod val="85000"/>
@@ -11287,7 +11670,7 @@
               <a:t> 담은 데이터입니다</a:t>
             </a:r>
             <a:r>
-              <a:rPr lang="en-US" altLang="ko-KR" sz="900" dirty="0">
+              <a:rPr lang="en-US" altLang="ko-KR" sz="675" dirty="0">
                 <a:solidFill>
                   <a:schemeClr val="tx1">
                     <a:lumMod val="85000"/>
@@ -11308,7 +11691,7 @@
               </a:lnSpc>
             </a:pPr>
             <a:r>
-              <a:rPr lang="en-US" altLang="ko-KR" sz="900" b="1" dirty="0">
+              <a:rPr lang="en-US" altLang="ko-KR" sz="675" b="1" dirty="0">
                 <a:solidFill>
                   <a:schemeClr val="tx1">
                     <a:lumMod val="85000"/>
@@ -11322,7 +11705,7 @@
               <a:t>name</a:t>
             </a:r>
             <a:r>
-              <a:rPr lang="en-US" altLang="ko-KR" sz="900" dirty="0">
+              <a:rPr lang="en-US" altLang="ko-KR" sz="675" dirty="0">
                 <a:solidFill>
                   <a:schemeClr val="tx1">
                     <a:lumMod val="85000"/>
@@ -11336,21 +11719,49 @@
               <a:t>: </a:t>
             </a:r>
             <a:r>
-              <a:rPr lang="ko-KR" altLang="en-US" sz="900" dirty="0">
-                <a:solidFill>
-                  <a:schemeClr val="tx1">
-                    <a:lumMod val="85000"/>
-                    <a:lumOff val="15000"/>
-                  </a:schemeClr>
-                </a:solidFill>
-                <a:latin typeface="Pretendard" panose="02000503000000020004" pitchFamily="2" charset="-127"/>
-                <a:ea typeface="Pretendard" panose="02000503000000020004" pitchFamily="2" charset="-127"/>
-                <a:cs typeface="Pretendard" panose="02000503000000020004" pitchFamily="2" charset="-127"/>
-              </a:rPr>
-              <a:t>버스 정류별</a:t>
-            </a:r>
-            <a:r>
-              <a:rPr lang="en-US" altLang="ko-KR" sz="900" dirty="0">
+              <a:rPr lang="ko-KR" altLang="en-US" sz="675" dirty="0">
+                <a:solidFill>
+                  <a:schemeClr val="tx1">
+                    <a:lumMod val="85000"/>
+                    <a:lumOff val="15000"/>
+                  </a:schemeClr>
+                </a:solidFill>
+                <a:latin typeface="Pretendard" panose="02000503000000020004" pitchFamily="2" charset="-127"/>
+                <a:ea typeface="Pretendard" panose="02000503000000020004" pitchFamily="2" charset="-127"/>
+                <a:cs typeface="Pretendard" panose="02000503000000020004" pitchFamily="2" charset="-127"/>
+              </a:rPr>
+              <a:t>사용자에게 데이터를 출력해야 할 때를 고려하여</a:t>
+            </a:r>
+            <a:r>
+              <a:rPr lang="en-US" altLang="ko-KR" sz="675" dirty="0">
+                <a:solidFill>
+                  <a:schemeClr val="tx1">
+                    <a:lumMod val="85000"/>
+                    <a:lumOff val="15000"/>
+                  </a:schemeClr>
+                </a:solidFill>
+                <a:latin typeface="Pretendard" panose="02000503000000020004" pitchFamily="2" charset="-127"/>
+                <a:ea typeface="Pretendard" panose="02000503000000020004" pitchFamily="2" charset="-127"/>
+                <a:cs typeface="Pretendard" panose="02000503000000020004" pitchFamily="2" charset="-127"/>
+              </a:rPr>
+              <a:t>,</a:t>
+            </a:r>
+            <a:r>
+              <a:rPr lang="ko-KR" altLang="en-US" sz="675" dirty="0">
+                <a:solidFill>
+                  <a:schemeClr val="tx1">
+                    <a:lumMod val="85000"/>
+                    <a:lumOff val="15000"/>
+                  </a:schemeClr>
+                </a:solidFill>
+                <a:latin typeface="Pretendard" panose="02000503000000020004" pitchFamily="2" charset="-127"/>
+                <a:ea typeface="Pretendard" panose="02000503000000020004" pitchFamily="2" charset="-127"/>
+                <a:cs typeface="Pretendard" panose="02000503000000020004" pitchFamily="2" charset="-127"/>
+              </a:rPr>
+              <a:t> 버스 정류별</a:t>
+            </a:r>
+            <a:r>
+              <a:rPr lang="en-US" altLang="ko-KR" sz="675" dirty="0">
                 <a:solidFill>
                   <a:schemeClr val="tx1">
                     <a:lumMod val="85000"/>
@@ -11364,7 +11775,7 @@
               <a:t> ID</a:t>
             </a:r>
             <a:r>
-              <a:rPr lang="ko-KR" altLang="en-US" sz="900" dirty="0" err="1">
+              <a:rPr lang="ko-KR" altLang="en-US" sz="675" dirty="0" err="1">
                 <a:solidFill>
                   <a:schemeClr val="tx1">
                     <a:lumMod val="85000"/>
@@ -11378,21 +11789,21 @@
               <a:t>에</a:t>
             </a:r>
             <a:r>
-              <a:rPr lang="ko-KR" altLang="en-US" sz="900" dirty="0">
-                <a:solidFill>
-                  <a:schemeClr val="tx1">
-                    <a:lumMod val="85000"/>
-                    <a:lumOff val="15000"/>
-                  </a:schemeClr>
-                </a:solidFill>
-                <a:latin typeface="Pretendard" panose="02000503000000020004" pitchFamily="2" charset="-127"/>
-                <a:ea typeface="Pretendard" panose="02000503000000020004" pitchFamily="2" charset="-127"/>
-                <a:cs typeface="Pretendard" panose="02000503000000020004" pitchFamily="2" charset="-127"/>
-              </a:rPr>
-              <a:t> 따른 한글명을 담은 데이터입니다</a:t>
-            </a:r>
-            <a:r>
-              <a:rPr lang="en-US" altLang="ko-KR" sz="900" dirty="0">
+              <a:rPr lang="ko-KR" altLang="en-US" sz="675" dirty="0">
+                <a:solidFill>
+                  <a:schemeClr val="tx1">
+                    <a:lumMod val="85000"/>
+                    <a:lumOff val="15000"/>
+                  </a:schemeClr>
+                </a:solidFill>
+                <a:latin typeface="Pretendard" panose="02000503000000020004" pitchFamily="2" charset="-127"/>
+                <a:ea typeface="Pretendard" panose="02000503000000020004" pitchFamily="2" charset="-127"/>
+                <a:cs typeface="Pretendard" panose="02000503000000020004" pitchFamily="2" charset="-127"/>
+              </a:rPr>
+              <a:t> 따른 정류장의 한글명을 담은 데이터입니다</a:t>
+            </a:r>
+            <a:r>
+              <a:rPr lang="en-US" altLang="ko-KR" sz="675" dirty="0">
                 <a:solidFill>
                   <a:schemeClr val="tx1">
                     <a:lumMod val="85000"/>
@@ -11413,7 +11824,7 @@
               </a:lnSpc>
             </a:pPr>
             <a:r>
-              <a:rPr lang="en-US" altLang="ko-KR" sz="900" b="1" dirty="0">
+              <a:rPr lang="en-US" altLang="ko-KR" sz="675" b="1" dirty="0">
                 <a:solidFill>
                   <a:schemeClr val="tx1">
                     <a:lumMod val="85000"/>
@@ -11427,7 +11838,7 @@
               <a:t>longitude</a:t>
             </a:r>
             <a:r>
-              <a:rPr lang="en-US" altLang="ko-KR" sz="900" dirty="0">
+              <a:rPr lang="en-US" altLang="ko-KR" sz="675" dirty="0">
                 <a:solidFill>
                   <a:schemeClr val="tx1">
                     <a:lumMod val="85000"/>
@@ -11441,7 +11852,7 @@
               <a:t>: </a:t>
             </a:r>
             <a:r>
-              <a:rPr lang="ko-KR" altLang="en-US" sz="900" dirty="0">
+              <a:rPr lang="ko-KR" altLang="en-US" sz="675" dirty="0">
                 <a:solidFill>
                   <a:schemeClr val="tx1">
                     <a:lumMod val="85000"/>
@@ -11455,7 +11866,7 @@
               <a:t>지도상 위치와 소속 행정동을 찾기 위한 경도 좌표 데이터입니다</a:t>
             </a:r>
             <a:r>
-              <a:rPr lang="en-US" altLang="ko-KR" sz="900" dirty="0">
+              <a:rPr lang="en-US" altLang="ko-KR" sz="675" dirty="0">
                 <a:solidFill>
                   <a:schemeClr val="tx1">
                     <a:lumMod val="85000"/>
@@ -11476,7 +11887,7 @@
               </a:lnSpc>
             </a:pPr>
             <a:r>
-              <a:rPr lang="en-US" altLang="ko-KR" sz="900" b="1" dirty="0">
+              <a:rPr lang="en-US" altLang="ko-KR" sz="675" b="1" dirty="0">
                 <a:solidFill>
                   <a:schemeClr val="tx1">
                     <a:lumMod val="85000"/>
@@ -11490,7 +11901,7 @@
               <a:t>latitude</a:t>
             </a:r>
             <a:r>
-              <a:rPr lang="en-US" altLang="ko-KR" sz="900" dirty="0">
+              <a:rPr lang="en-US" altLang="ko-KR" sz="675" dirty="0">
                 <a:solidFill>
                   <a:schemeClr val="tx1">
                     <a:lumMod val="85000"/>
@@ -11504,7 +11915,7 @@
               <a:t>: </a:t>
             </a:r>
             <a:r>
-              <a:rPr lang="ko-KR" altLang="en-US" sz="900" dirty="0">
+              <a:rPr lang="ko-KR" altLang="en-US" sz="675" dirty="0">
                 <a:solidFill>
                   <a:schemeClr val="tx1">
                     <a:lumMod val="85000"/>
@@ -11518,7 +11929,7 @@
               <a:t>지도상 위치와 소속 행정동을 찾기 위한 위도 좌표 데이터입니다</a:t>
             </a:r>
             <a:r>
-              <a:rPr lang="en-US" altLang="ko-KR" sz="900" dirty="0">
+              <a:rPr lang="en-US" altLang="ko-KR" sz="675" dirty="0">
                 <a:solidFill>
                   <a:schemeClr val="tx1">
                     <a:lumMod val="85000"/>
@@ -11531,7 +11942,7 @@
               </a:rPr>
               <a:t>.</a:t>
             </a:r>
-            <a:endParaRPr lang="en-US" altLang="ko-KR" sz="900" dirty="0">
+            <a:endParaRPr lang="en-US" altLang="ko-KR" sz="675" dirty="0">
               <a:solidFill>
                 <a:schemeClr val="tx1">
                   <a:lumMod val="85000"/>
@@ -11550,7 +11961,7 @@
               </a:lnSpc>
             </a:pPr>
             <a:r>
-              <a:rPr lang="en-US" altLang="ko-KR" sz="900" b="1" dirty="0" err="1">
+              <a:rPr lang="en-US" altLang="ko-KR" sz="675" b="1" dirty="0" err="1">
                 <a:solidFill>
                   <a:schemeClr val="tx1">
                     <a:lumMod val="85000"/>
@@ -11564,7 +11975,7 @@
               <a:t>district_id</a:t>
             </a:r>
             <a:r>
-              <a:rPr lang="en-US" altLang="ko-KR" sz="900" dirty="0">
+              <a:rPr lang="en-US" altLang="ko-KR" sz="675" dirty="0">
                 <a:solidFill>
                   <a:schemeClr val="tx1">
                     <a:lumMod val="85000"/>
@@ -11578,7 +11989,7 @@
               <a:t>: </a:t>
             </a:r>
             <a:r>
-              <a:rPr lang="ko-KR" altLang="en-US" sz="900" dirty="0">
+              <a:rPr lang="ko-KR" altLang="en-US" sz="675" dirty="0">
                 <a:solidFill>
                   <a:schemeClr val="tx1">
                     <a:lumMod val="85000"/>
@@ -11592,7 +12003,7 @@
               <a:t>소속 행정동별 데이터의 구분을 위한</a:t>
             </a:r>
             <a:r>
-              <a:rPr lang="en-US" altLang="ko-KR" sz="900" dirty="0">
+              <a:rPr lang="en-US" altLang="ko-KR" sz="675" dirty="0">
                 <a:solidFill>
                   <a:schemeClr val="tx1">
                     <a:lumMod val="85000"/>
@@ -11606,7 +12017,7 @@
               <a:t> ID</a:t>
             </a:r>
             <a:r>
-              <a:rPr lang="ko-KR" altLang="en-US" sz="900" dirty="0" err="1">
+              <a:rPr lang="ko-KR" altLang="en-US" sz="675" dirty="0" err="1">
                 <a:solidFill>
                   <a:schemeClr val="tx1">
                     <a:lumMod val="85000"/>
@@ -11620,7 +12031,7 @@
               <a:t>를</a:t>
             </a:r>
             <a:r>
-              <a:rPr lang="ko-KR" altLang="en-US" sz="900" dirty="0">
+              <a:rPr lang="ko-KR" altLang="en-US" sz="675" dirty="0">
                 <a:solidFill>
                   <a:schemeClr val="tx1">
                     <a:lumMod val="85000"/>
@@ -11634,7 +12045,7 @@
               <a:t> 담은 데이터입니다</a:t>
             </a:r>
             <a:r>
-              <a:rPr lang="en-US" altLang="ko-KR" sz="900" dirty="0">
+              <a:rPr lang="en-US" altLang="ko-KR" sz="675" dirty="0">
                 <a:solidFill>
                   <a:schemeClr val="tx1">
                     <a:lumMod val="85000"/>
@@ -11655,7 +12066,7 @@
               </a:lnSpc>
             </a:pPr>
             <a:r>
-              <a:rPr lang="en-US" altLang="ko-KR" sz="900" b="1" dirty="0" err="1">
+              <a:rPr lang="en-US" altLang="ko-KR" sz="675" b="1" dirty="0" err="1">
                 <a:solidFill>
                   <a:schemeClr val="tx1">
                     <a:lumMod val="85000"/>
@@ -11669,7 +12080,7 @@
               <a:t>is_active</a:t>
             </a:r>
             <a:r>
-              <a:rPr lang="en-US" altLang="ko-KR" sz="900" dirty="0">
+              <a:rPr lang="en-US" altLang="ko-KR" sz="675" dirty="0">
                 <a:solidFill>
                   <a:schemeClr val="tx1">
                     <a:lumMod val="85000"/>
@@ -11683,7 +12094,7 @@
               <a:t>: </a:t>
             </a:r>
             <a:r>
-              <a:rPr lang="ko-KR" altLang="en-US" sz="900" dirty="0">
+              <a:rPr lang="ko-KR" altLang="en-US" sz="675" dirty="0">
                 <a:solidFill>
                   <a:schemeClr val="tx1">
                     <a:lumMod val="85000"/>
@@ -11697,7 +12108,7 @@
               <a:t>현재 사용되고 있는 정류장인지 여부를 구분하는 데이터입니다</a:t>
             </a:r>
             <a:r>
-              <a:rPr lang="en-US" altLang="ko-KR" sz="900" dirty="0">
+              <a:rPr lang="en-US" altLang="ko-KR" sz="675" dirty="0">
                 <a:solidFill>
                   <a:schemeClr val="tx1">
                     <a:lumMod val="85000"/>
@@ -11715,10 +12126,10 @@
       </p:sp>
       <p:cxnSp>
         <p:nvCxnSpPr>
-          <p:cNvPr id="66" name="Straight Connector 65">
+          <p:cNvPr id="71" name="Straight Connector 70">
             <a:extLst>
               <a:ext uri="{FF2B5EF4-FFF2-40B4-BE49-F238E27FC236}">
-                <a16:creationId xmlns:a16="http://schemas.microsoft.com/office/drawing/2014/main" id="{F9310D22-F92C-F06D-9362-C6FD77CD176F}"/>
+                <a16:creationId xmlns:a16="http://schemas.microsoft.com/office/drawing/2014/main" id="{3F2E7474-7999-49D5-4FE1-D368D8C6C0A9}"/>
               </a:ext>
             </a:extLst>
           </p:cNvPr>
@@ -11729,8 +12140,8 @@
         </p:nvCxnSpPr>
         <p:spPr>
           <a:xfrm>
-            <a:off x="5083356" y="3591905"/>
-            <a:ext cx="3789873" cy="0"/>
+            <a:off x="0" y="405000"/>
+            <a:ext cx="6858000" cy="0"/>
           </a:xfrm>
           <a:prstGeom prst="line">
             <a:avLst/>
@@ -11758,10 +12169,10 @@
       </p:cxnSp>
       <p:cxnSp>
         <p:nvCxnSpPr>
-          <p:cNvPr id="71" name="Straight Connector 70">
+          <p:cNvPr id="2" name="Straight Connector 1">
             <a:extLst>
               <a:ext uri="{FF2B5EF4-FFF2-40B4-BE49-F238E27FC236}">
-                <a16:creationId xmlns:a16="http://schemas.microsoft.com/office/drawing/2014/main" id="{3F2E7474-7999-49D5-4FE1-D368D8C6C0A9}"/>
+                <a16:creationId xmlns:a16="http://schemas.microsoft.com/office/drawing/2014/main" id="{8F53786E-5742-B588-C136-F08F8CD2F469}"/>
               </a:ext>
             </a:extLst>
           </p:cNvPr>
@@ -11772,8 +12183,8 @@
         </p:nvCxnSpPr>
         <p:spPr>
           <a:xfrm>
-            <a:off x="0" y="540000"/>
-            <a:ext cx="9144000" cy="0"/>
+            <a:off x="2218767" y="2513336"/>
+            <a:ext cx="4436738" cy="0"/>
           </a:xfrm>
           <a:prstGeom prst="line">
             <a:avLst/>
@@ -11803,6 +12214,947 @@
     <p:extLst>
       <p:ext uri="{BB962C8B-B14F-4D97-AF65-F5344CB8AC3E}">
         <p14:creationId xmlns:p14="http://schemas.microsoft.com/office/powerpoint/2010/main" val="65275742"/>
+      </p:ext>
+    </p:extLst>
+  </p:cSld>
+  <p:clrMapOvr>
+    <a:masterClrMapping/>
+  </p:clrMapOvr>
+</p:sld>
+</file>
+
+<file path=ppt/slides/slide3.xml><?xml version="1.0" encoding="utf-8"?>
+<p:sld xmlns:a="http://schemas.openxmlformats.org/drawingml/2006/main" xmlns:r="http://schemas.openxmlformats.org/officeDocument/2006/relationships" xmlns:p="http://schemas.openxmlformats.org/presentationml/2006/main">
+  <p:cSld>
+    <p:spTree>
+      <p:nvGrpSpPr>
+        <p:cNvPr id="1" name=""/>
+        <p:cNvGrpSpPr/>
+        <p:nvPr/>
+      </p:nvGrpSpPr>
+      <p:grpSpPr>
+        <a:xfrm>
+          <a:off x="0" y="0"/>
+          <a:ext cx="0" cy="0"/>
+          <a:chOff x="0" y="0"/>
+          <a:chExt cx="0" cy="0"/>
+        </a:xfrm>
+      </p:grpSpPr>
+      <p:sp>
+        <p:nvSpPr>
+          <p:cNvPr id="4" name="Rectangle 3">
+            <a:extLst>
+              <a:ext uri="{FF2B5EF4-FFF2-40B4-BE49-F238E27FC236}">
+                <a16:creationId xmlns:a16="http://schemas.microsoft.com/office/drawing/2014/main" id="{E5F2C96A-7D9C-341F-EE12-6F6372126C01}"/>
+              </a:ext>
+            </a:extLst>
+          </p:cNvPr>
+          <p:cNvSpPr>
+            <a:spLocks/>
+          </p:cNvSpPr>
+          <p:nvPr/>
+        </p:nvSpPr>
+        <p:spPr>
+          <a:xfrm>
+            <a:off x="0" y="0"/>
+            <a:ext cx="3429000" cy="405000"/>
+          </a:xfrm>
+          <a:prstGeom prst="rect">
+            <a:avLst/>
+          </a:prstGeom>
+          <a:solidFill>
+            <a:schemeClr val="bg1">
+              <a:lumMod val="95000"/>
+            </a:schemeClr>
+          </a:solidFill>
+          <a:ln>
+            <a:noFill/>
+          </a:ln>
+        </p:spPr>
+        <p:style>
+          <a:lnRef idx="2">
+            <a:schemeClr val="accent1">
+              <a:shade val="15000"/>
+            </a:schemeClr>
+          </a:lnRef>
+          <a:fillRef idx="1">
+            <a:schemeClr val="accent1"/>
+          </a:fillRef>
+          <a:effectRef idx="0">
+            <a:schemeClr val="accent1"/>
+          </a:effectRef>
+          <a:fontRef idx="minor">
+            <a:schemeClr val="lt1"/>
+          </a:fontRef>
+        </p:style>
+        <p:txBody>
+          <a:bodyPr lIns="135000" tIns="35100" rIns="67500" bIns="67500" numCol="1" rtlCol="0" anchor="b"/>
+          <a:lstStyle/>
+          <a:p>
+            <a:r>
+              <a:rPr lang="ko-KR" altLang="en-US" sz="900" b="1" dirty="0">
+                <a:solidFill>
+                  <a:schemeClr val="tx1">
+                    <a:lumMod val="85000"/>
+                    <a:lumOff val="15000"/>
+                  </a:schemeClr>
+                </a:solidFill>
+                <a:latin typeface="Pretendard" panose="02000503000000020004" pitchFamily="2" charset="-127"/>
+                <a:ea typeface="Pretendard" panose="02000503000000020004" pitchFamily="2" charset="-127"/>
+                <a:cs typeface="Pretendard" panose="02000503000000020004" pitchFamily="2" charset="-127"/>
+              </a:rPr>
+              <a:t>데이터 수집 출처와 과정 다이어그램</a:t>
+            </a:r>
+            <a:endParaRPr lang="en-US" altLang="ko-KR" sz="900" b="1" dirty="0">
+              <a:solidFill>
+                <a:schemeClr val="tx1">
+                  <a:lumMod val="85000"/>
+                  <a:lumOff val="15000"/>
+                </a:schemeClr>
+              </a:solidFill>
+              <a:latin typeface="Pretendard" panose="02000503000000020004" pitchFamily="2" charset="-127"/>
+              <a:ea typeface="Pretendard" panose="02000503000000020004" pitchFamily="2" charset="-127"/>
+              <a:cs typeface="Pretendard" panose="02000503000000020004" pitchFamily="2" charset="-127"/>
+            </a:endParaRPr>
+          </a:p>
+        </p:txBody>
+      </p:sp>
+      <p:sp>
+        <p:nvSpPr>
+          <p:cNvPr id="5" name="Rectangle 4">
+            <a:extLst>
+              <a:ext uri="{FF2B5EF4-FFF2-40B4-BE49-F238E27FC236}">
+                <a16:creationId xmlns:a16="http://schemas.microsoft.com/office/drawing/2014/main" id="{25B4259B-E64E-7ACA-C457-931A3B02A91A}"/>
+              </a:ext>
+            </a:extLst>
+          </p:cNvPr>
+          <p:cNvSpPr>
+            <a:spLocks/>
+          </p:cNvSpPr>
+          <p:nvPr/>
+        </p:nvSpPr>
+        <p:spPr>
+          <a:xfrm>
+            <a:off x="3429000" y="0"/>
+            <a:ext cx="3429000" cy="405000"/>
+          </a:xfrm>
+          <a:prstGeom prst="rect">
+            <a:avLst/>
+          </a:prstGeom>
+          <a:solidFill>
+            <a:schemeClr val="bg1">
+              <a:lumMod val="95000"/>
+            </a:schemeClr>
+          </a:solidFill>
+          <a:ln>
+            <a:noFill/>
+          </a:ln>
+        </p:spPr>
+        <p:style>
+          <a:lnRef idx="2">
+            <a:schemeClr val="accent1">
+              <a:shade val="15000"/>
+            </a:schemeClr>
+          </a:lnRef>
+          <a:fillRef idx="1">
+            <a:schemeClr val="accent1"/>
+          </a:fillRef>
+          <a:effectRef idx="0">
+            <a:schemeClr val="accent1"/>
+          </a:effectRef>
+          <a:fontRef idx="minor">
+            <a:schemeClr val="lt1"/>
+          </a:fontRef>
+        </p:style>
+        <p:txBody>
+          <a:bodyPr lIns="67500" tIns="35100" rIns="135000" bIns="67500" numCol="1" rtlCol="0" anchor="b"/>
+          <a:lstStyle/>
+          <a:p>
+            <a:pPr algn="r"/>
+            <a:r>
+              <a:rPr lang="ko-KR" altLang="en-US" sz="900" b="1" dirty="0">
+                <a:solidFill>
+                  <a:schemeClr val="bg1">
+                    <a:lumMod val="65000"/>
+                  </a:schemeClr>
+                </a:solidFill>
+                <a:latin typeface="Pretendard" panose="02000503000000020004" pitchFamily="2" charset="-127"/>
+                <a:ea typeface="Pretendard" panose="02000503000000020004" pitchFamily="2" charset="-127"/>
+                <a:cs typeface="Pretendard" panose="02000503000000020004" pitchFamily="2" charset="-127"/>
+              </a:rPr>
+              <a:t>데이터 모델 별 저장 정보의 출처와 정보의 이동 경로를 명세</a:t>
+            </a:r>
+            <a:endParaRPr lang="en-US" altLang="ko-KR" sz="900" b="1" dirty="0">
+              <a:solidFill>
+                <a:schemeClr val="tx1">
+                  <a:lumMod val="85000"/>
+                  <a:lumOff val="15000"/>
+                </a:schemeClr>
+              </a:solidFill>
+              <a:latin typeface="Pretendard" panose="02000503000000020004" pitchFamily="2" charset="-127"/>
+              <a:ea typeface="Pretendard" panose="02000503000000020004" pitchFamily="2" charset="-127"/>
+              <a:cs typeface="Pretendard" panose="02000503000000020004" pitchFamily="2" charset="-127"/>
+            </a:endParaRPr>
+          </a:p>
+        </p:txBody>
+      </p:sp>
+      <p:cxnSp>
+        <p:nvCxnSpPr>
+          <p:cNvPr id="6" name="Straight Connector 5">
+            <a:extLst>
+              <a:ext uri="{FF2B5EF4-FFF2-40B4-BE49-F238E27FC236}">
+                <a16:creationId xmlns:a16="http://schemas.microsoft.com/office/drawing/2014/main" id="{D0B76CCA-CA43-075D-AC72-5D22DA418F01}"/>
+              </a:ext>
+            </a:extLst>
+          </p:cNvPr>
+          <p:cNvCxnSpPr>
+            <a:cxnSpLocks/>
+          </p:cNvCxnSpPr>
+          <p:nvPr/>
+        </p:nvCxnSpPr>
+        <p:spPr>
+          <a:xfrm>
+            <a:off x="0" y="405000"/>
+            <a:ext cx="6858000" cy="0"/>
+          </a:xfrm>
+          <a:prstGeom prst="line">
+            <a:avLst/>
+          </a:prstGeom>
+          <a:ln w="12700">
+            <a:solidFill>
+              <a:schemeClr val="bg2"/>
+            </a:solidFill>
+          </a:ln>
+        </p:spPr>
+        <p:style>
+          <a:lnRef idx="2">
+            <a:schemeClr val="accent1"/>
+          </a:lnRef>
+          <a:fillRef idx="0">
+            <a:schemeClr val="accent1"/>
+          </a:fillRef>
+          <a:effectRef idx="1">
+            <a:schemeClr val="accent1"/>
+          </a:effectRef>
+          <a:fontRef idx="minor">
+            <a:schemeClr val="tx1"/>
+          </a:fontRef>
+        </p:style>
+      </p:cxnSp>
+      <p:sp>
+        <p:nvSpPr>
+          <p:cNvPr id="11" name="Freeform 10">
+            <a:extLst>
+              <a:ext uri="{FF2B5EF4-FFF2-40B4-BE49-F238E27FC236}">
+                <a16:creationId xmlns:a16="http://schemas.microsoft.com/office/drawing/2014/main" id="{45113F95-575A-32CD-867D-95488FCA1580}"/>
+              </a:ext>
+            </a:extLst>
+          </p:cNvPr>
+          <p:cNvSpPr/>
+          <p:nvPr/>
+        </p:nvSpPr>
+        <p:spPr>
+          <a:xfrm>
+            <a:off x="801028" y="906142"/>
+            <a:ext cx="940456" cy="540935"/>
+          </a:xfrm>
+          <a:custGeom>
+            <a:avLst/>
+            <a:gdLst>
+              <a:gd name="connsiteX0" fmla="*/ 1250796 w 2404018"/>
+              <a:gd name="connsiteY0" fmla="*/ 0 h 1382752"/>
+              <a:gd name="connsiteX1" fmla="*/ 1887840 w 2404018"/>
+              <a:gd name="connsiteY1" fmla="*/ 422261 h 1382752"/>
+              <a:gd name="connsiteX2" fmla="*/ 1900565 w 2404018"/>
+              <a:gd name="connsiteY2" fmla="*/ 463252 h 1382752"/>
+              <a:gd name="connsiteX3" fmla="*/ 1942171 w 2404018"/>
+              <a:gd name="connsiteY3" fmla="*/ 459058 h 1382752"/>
+              <a:gd name="connsiteX4" fmla="*/ 2404018 w 2404018"/>
+              <a:gd name="connsiteY4" fmla="*/ 920905 h 1382752"/>
+              <a:gd name="connsiteX5" fmla="*/ 1942171 w 2404018"/>
+              <a:gd name="connsiteY5" fmla="*/ 1382752 h 1382752"/>
+              <a:gd name="connsiteX6" fmla="*/ 1942161 w 2404018"/>
+              <a:gd name="connsiteY6" fmla="*/ 1382751 h 1382752"/>
+              <a:gd name="connsiteX7" fmla="*/ 1250806 w 2404018"/>
+              <a:gd name="connsiteY7" fmla="*/ 1382751 h 1382752"/>
+              <a:gd name="connsiteX8" fmla="*/ 1250796 w 2404018"/>
+              <a:gd name="connsiteY8" fmla="*/ 1382752 h 1382752"/>
+              <a:gd name="connsiteX9" fmla="*/ 1250786 w 2404018"/>
+              <a:gd name="connsiteY9" fmla="*/ 1382751 h 1382752"/>
+              <a:gd name="connsiteX10" fmla="*/ 559430 w 2404018"/>
+              <a:gd name="connsiteY10" fmla="*/ 1382751 h 1382752"/>
+              <a:gd name="connsiteX11" fmla="*/ 559420 w 2404018"/>
+              <a:gd name="connsiteY11" fmla="*/ 1382752 h 1382752"/>
+              <a:gd name="connsiteX12" fmla="*/ 0 w 2404018"/>
+              <a:gd name="connsiteY12" fmla="*/ 823332 h 1382752"/>
+              <a:gd name="connsiteX13" fmla="*/ 559420 w 2404018"/>
+              <a:gd name="connsiteY13" fmla="*/ 263912 h 1382752"/>
+              <a:gd name="connsiteX14" fmla="*/ 672163 w 2404018"/>
+              <a:gd name="connsiteY14" fmla="*/ 275277 h 1382752"/>
+              <a:gd name="connsiteX15" fmla="*/ 695815 w 2404018"/>
+              <a:gd name="connsiteY15" fmla="*/ 282619 h 1382752"/>
+              <a:gd name="connsiteX16" fmla="*/ 761920 w 2404018"/>
+              <a:gd name="connsiteY16" fmla="*/ 202499 h 1382752"/>
+              <a:gd name="connsiteX17" fmla="*/ 1250796 w 2404018"/>
+              <a:gd name="connsiteY17" fmla="*/ 0 h 1382752"/>
+            </a:gdLst>
+            <a:ahLst/>
+            <a:cxnLst>
+              <a:cxn ang="0">
+                <a:pos x="connsiteX0" y="connsiteY0"/>
+              </a:cxn>
+              <a:cxn ang="0">
+                <a:pos x="connsiteX1" y="connsiteY1"/>
+              </a:cxn>
+              <a:cxn ang="0">
+                <a:pos x="connsiteX2" y="connsiteY2"/>
+              </a:cxn>
+              <a:cxn ang="0">
+                <a:pos x="connsiteX3" y="connsiteY3"/>
+              </a:cxn>
+              <a:cxn ang="0">
+                <a:pos x="connsiteX4" y="connsiteY4"/>
+              </a:cxn>
+              <a:cxn ang="0">
+                <a:pos x="connsiteX5" y="connsiteY5"/>
+              </a:cxn>
+              <a:cxn ang="0">
+                <a:pos x="connsiteX6" y="connsiteY6"/>
+              </a:cxn>
+              <a:cxn ang="0">
+                <a:pos x="connsiteX7" y="connsiteY7"/>
+              </a:cxn>
+              <a:cxn ang="0">
+                <a:pos x="connsiteX8" y="connsiteY8"/>
+              </a:cxn>
+              <a:cxn ang="0">
+                <a:pos x="connsiteX9" y="connsiteY9"/>
+              </a:cxn>
+              <a:cxn ang="0">
+                <a:pos x="connsiteX10" y="connsiteY10"/>
+              </a:cxn>
+              <a:cxn ang="0">
+                <a:pos x="connsiteX11" y="connsiteY11"/>
+              </a:cxn>
+              <a:cxn ang="0">
+                <a:pos x="connsiteX12" y="connsiteY12"/>
+              </a:cxn>
+              <a:cxn ang="0">
+                <a:pos x="connsiteX13" y="connsiteY13"/>
+              </a:cxn>
+              <a:cxn ang="0">
+                <a:pos x="connsiteX14" y="connsiteY14"/>
+              </a:cxn>
+              <a:cxn ang="0">
+                <a:pos x="connsiteX15" y="connsiteY15"/>
+              </a:cxn>
+              <a:cxn ang="0">
+                <a:pos x="connsiteX16" y="connsiteY16"/>
+              </a:cxn>
+              <a:cxn ang="0">
+                <a:pos x="connsiteX17" y="connsiteY17"/>
+              </a:cxn>
+            </a:cxnLst>
+            <a:rect l="l" t="t" r="r" b="b"/>
+            <a:pathLst>
+              <a:path w="2404018" h="1382752">
+                <a:moveTo>
+                  <a:pt x="1250796" y="0"/>
+                </a:moveTo>
+                <a:cubicBezTo>
+                  <a:pt x="1537173" y="0"/>
+                  <a:pt x="1782884" y="174116"/>
+                  <a:pt x="1887840" y="422261"/>
+                </a:cubicBezTo>
+                <a:lnTo>
+                  <a:pt x="1900565" y="463252"/>
+                </a:lnTo>
+                <a:lnTo>
+                  <a:pt x="1942171" y="459058"/>
+                </a:lnTo>
+                <a:cubicBezTo>
+                  <a:pt x="2197242" y="459058"/>
+                  <a:pt x="2404018" y="665834"/>
+                  <a:pt x="2404018" y="920905"/>
+                </a:cubicBezTo>
+                <a:cubicBezTo>
+                  <a:pt x="2404018" y="1175976"/>
+                  <a:pt x="2197242" y="1382752"/>
+                  <a:pt x="1942171" y="1382752"/>
+                </a:cubicBezTo>
+                <a:lnTo>
+                  <a:pt x="1942161" y="1382751"/>
+                </a:lnTo>
+                <a:lnTo>
+                  <a:pt x="1250806" y="1382751"/>
+                </a:lnTo>
+                <a:lnTo>
+                  <a:pt x="1250796" y="1382752"/>
+                </a:lnTo>
+                <a:lnTo>
+                  <a:pt x="1250786" y="1382751"/>
+                </a:lnTo>
+                <a:lnTo>
+                  <a:pt x="559430" y="1382751"/>
+                </a:lnTo>
+                <a:lnTo>
+                  <a:pt x="559420" y="1382752"/>
+                </a:lnTo>
+                <a:cubicBezTo>
+                  <a:pt x="250461" y="1382752"/>
+                  <a:pt x="0" y="1132291"/>
+                  <a:pt x="0" y="823332"/>
+                </a:cubicBezTo>
+                <a:cubicBezTo>
+                  <a:pt x="0" y="514373"/>
+                  <a:pt x="250461" y="263912"/>
+                  <a:pt x="559420" y="263912"/>
+                </a:cubicBezTo>
+                <a:cubicBezTo>
+                  <a:pt x="598040" y="263912"/>
+                  <a:pt x="635746" y="267825"/>
+                  <a:pt x="672163" y="275277"/>
+                </a:cubicBezTo>
+                <a:lnTo>
+                  <a:pt x="695815" y="282619"/>
+                </a:lnTo>
+                <a:lnTo>
+                  <a:pt x="761920" y="202499"/>
+                </a:lnTo>
+                <a:cubicBezTo>
+                  <a:pt x="887034" y="77385"/>
+                  <a:pt x="1059878" y="0"/>
+                  <a:pt x="1250796" y="0"/>
+                </a:cubicBezTo>
+                <a:close/>
+              </a:path>
+            </a:pathLst>
+          </a:custGeom>
+          <a:solidFill>
+            <a:schemeClr val="bg1">
+              <a:lumMod val="95000"/>
+            </a:schemeClr>
+          </a:solidFill>
+          <a:ln w="12700">
+            <a:solidFill>
+              <a:schemeClr val="bg2"/>
+            </a:solidFill>
+          </a:ln>
+        </p:spPr>
+        <p:style>
+          <a:lnRef idx="2">
+            <a:schemeClr val="accent1">
+              <a:shade val="15000"/>
+            </a:schemeClr>
+          </a:lnRef>
+          <a:fillRef idx="1">
+            <a:schemeClr val="accent1"/>
+          </a:fillRef>
+          <a:effectRef idx="0">
+            <a:schemeClr val="accent1"/>
+          </a:effectRef>
+          <a:fontRef idx="minor">
+            <a:schemeClr val="lt1"/>
+          </a:fontRef>
+        </p:style>
+        <p:txBody>
+          <a:bodyPr wrap="square" tIns="64800" bIns="0" rtlCol="0" anchor="ctr">
+            <a:noAutofit/>
+          </a:bodyPr>
+          <a:lstStyle/>
+          <a:p>
+            <a:pPr algn="ctr"/>
+            <a:r>
+              <a:rPr lang="ko-KR" altLang="en-US" sz="900" b="1" dirty="0">
+                <a:solidFill>
+                  <a:schemeClr val="tx1">
+                    <a:lumMod val="85000"/>
+                    <a:lumOff val="15000"/>
+                  </a:schemeClr>
+                </a:solidFill>
+                <a:latin typeface="Pretendard" panose="02000503000000020004" pitchFamily="2" charset="-127"/>
+                <a:ea typeface="Pretendard" panose="02000503000000020004" pitchFamily="2" charset="-127"/>
+                <a:cs typeface="Pretendard" panose="02000503000000020004" pitchFamily="2" charset="-127"/>
+              </a:rPr>
+              <a:t>서울시</a:t>
+            </a:r>
+            <a:endParaRPr lang="en-US" altLang="ko-KR" sz="900" b="1" dirty="0">
+              <a:solidFill>
+                <a:schemeClr val="tx1">
+                  <a:lumMod val="85000"/>
+                  <a:lumOff val="15000"/>
+                </a:schemeClr>
+              </a:solidFill>
+              <a:latin typeface="Pretendard" panose="02000503000000020004" pitchFamily="2" charset="-127"/>
+              <a:ea typeface="Pretendard" panose="02000503000000020004" pitchFamily="2" charset="-127"/>
+              <a:cs typeface="Pretendard" panose="02000503000000020004" pitchFamily="2" charset="-127"/>
+            </a:endParaRPr>
+          </a:p>
+          <a:p>
+            <a:pPr algn="ctr"/>
+            <a:r>
+              <a:rPr lang="ko-KR" altLang="en-US" sz="900" b="1" dirty="0" err="1">
+                <a:solidFill>
+                  <a:schemeClr val="tx1">
+                    <a:lumMod val="85000"/>
+                    <a:lumOff val="15000"/>
+                  </a:schemeClr>
+                </a:solidFill>
+                <a:latin typeface="Pretendard" panose="02000503000000020004" pitchFamily="2" charset="-127"/>
+                <a:ea typeface="Pretendard" panose="02000503000000020004" pitchFamily="2" charset="-127"/>
+                <a:cs typeface="Pretendard" panose="02000503000000020004" pitchFamily="2" charset="-127"/>
+              </a:rPr>
+              <a:t>열린데이터광장</a:t>
+            </a:r>
+            <a:endParaRPr lang="en-KR" sz="900" b="1" dirty="0">
+              <a:solidFill>
+                <a:schemeClr val="tx1">
+                  <a:lumMod val="85000"/>
+                  <a:lumOff val="15000"/>
+                </a:schemeClr>
+              </a:solidFill>
+              <a:latin typeface="Pretendard" panose="02000503000000020004" pitchFamily="2" charset="-127"/>
+              <a:ea typeface="Pretendard" panose="02000503000000020004" pitchFamily="2" charset="-127"/>
+              <a:cs typeface="Pretendard" panose="02000503000000020004" pitchFamily="2" charset="-127"/>
+            </a:endParaRPr>
+          </a:p>
+        </p:txBody>
+      </p:sp>
+      <p:sp>
+        <p:nvSpPr>
+          <p:cNvPr id="12" name="Rounded Rectangle 11">
+            <a:extLst>
+              <a:ext uri="{FF2B5EF4-FFF2-40B4-BE49-F238E27FC236}">
+                <a16:creationId xmlns:a16="http://schemas.microsoft.com/office/drawing/2014/main" id="{370C658A-1997-A73C-03BE-64C1C10F50A0}"/>
+              </a:ext>
+            </a:extLst>
+          </p:cNvPr>
+          <p:cNvSpPr/>
+          <p:nvPr/>
+        </p:nvSpPr>
+        <p:spPr>
+          <a:xfrm>
+            <a:off x="4845773" y="1488017"/>
+            <a:ext cx="468351" cy="237892"/>
+          </a:xfrm>
+          <a:prstGeom prst="roundRect">
+            <a:avLst>
+              <a:gd name="adj" fmla="val 50000"/>
+            </a:avLst>
+          </a:prstGeom>
+          <a:solidFill>
+            <a:srgbClr val="4DC9B0"/>
+          </a:solidFill>
+          <a:ln w="12700">
+            <a:solidFill>
+              <a:srgbClr val="44B29C"/>
+            </a:solidFill>
+          </a:ln>
+        </p:spPr>
+        <p:style>
+          <a:lnRef idx="2">
+            <a:schemeClr val="accent1">
+              <a:shade val="15000"/>
+            </a:schemeClr>
+          </a:lnRef>
+          <a:fillRef idx="1">
+            <a:schemeClr val="accent1"/>
+          </a:fillRef>
+          <a:effectRef idx="0">
+            <a:schemeClr val="accent1"/>
+          </a:effectRef>
+          <a:fontRef idx="minor">
+            <a:schemeClr val="lt1"/>
+          </a:fontRef>
+        </p:style>
+        <p:txBody>
+          <a:bodyPr rtlCol="0" anchor="ctr"/>
+          <a:lstStyle/>
+          <a:p>
+            <a:pPr algn="ctr"/>
+            <a:r>
+              <a:rPr lang="en-KR" sz="900" dirty="0">
+                <a:solidFill>
+                  <a:schemeClr val="bg1"/>
+                </a:solidFill>
+                <a:latin typeface="Pretendard" panose="02000503000000020004" pitchFamily="2" charset="-127"/>
+                <a:ea typeface="Pretendard" panose="02000503000000020004" pitchFamily="2" charset="-127"/>
+                <a:cs typeface="Pretendard" panose="02000503000000020004" pitchFamily="2" charset="-127"/>
+              </a:rPr>
+              <a:t>API</a:t>
+            </a:r>
+          </a:p>
+        </p:txBody>
+      </p:sp>
+      <p:sp>
+        <p:nvSpPr>
+          <p:cNvPr id="14" name="Freeform 13">
+            <a:extLst>
+              <a:ext uri="{FF2B5EF4-FFF2-40B4-BE49-F238E27FC236}">
+                <a16:creationId xmlns:a16="http://schemas.microsoft.com/office/drawing/2014/main" id="{8B1538BF-881A-BFB4-485D-D178AB0E193B}"/>
+              </a:ext>
+            </a:extLst>
+          </p:cNvPr>
+          <p:cNvSpPr/>
+          <p:nvPr/>
+        </p:nvSpPr>
+        <p:spPr>
+          <a:xfrm>
+            <a:off x="2000248" y="906142"/>
+            <a:ext cx="940456" cy="540935"/>
+          </a:xfrm>
+          <a:custGeom>
+            <a:avLst/>
+            <a:gdLst>
+              <a:gd name="connsiteX0" fmla="*/ 1250796 w 2404018"/>
+              <a:gd name="connsiteY0" fmla="*/ 0 h 1382752"/>
+              <a:gd name="connsiteX1" fmla="*/ 1887840 w 2404018"/>
+              <a:gd name="connsiteY1" fmla="*/ 422261 h 1382752"/>
+              <a:gd name="connsiteX2" fmla="*/ 1900565 w 2404018"/>
+              <a:gd name="connsiteY2" fmla="*/ 463252 h 1382752"/>
+              <a:gd name="connsiteX3" fmla="*/ 1942171 w 2404018"/>
+              <a:gd name="connsiteY3" fmla="*/ 459058 h 1382752"/>
+              <a:gd name="connsiteX4" fmla="*/ 2404018 w 2404018"/>
+              <a:gd name="connsiteY4" fmla="*/ 920905 h 1382752"/>
+              <a:gd name="connsiteX5" fmla="*/ 1942171 w 2404018"/>
+              <a:gd name="connsiteY5" fmla="*/ 1382752 h 1382752"/>
+              <a:gd name="connsiteX6" fmla="*/ 1942161 w 2404018"/>
+              <a:gd name="connsiteY6" fmla="*/ 1382751 h 1382752"/>
+              <a:gd name="connsiteX7" fmla="*/ 1250806 w 2404018"/>
+              <a:gd name="connsiteY7" fmla="*/ 1382751 h 1382752"/>
+              <a:gd name="connsiteX8" fmla="*/ 1250796 w 2404018"/>
+              <a:gd name="connsiteY8" fmla="*/ 1382752 h 1382752"/>
+              <a:gd name="connsiteX9" fmla="*/ 1250786 w 2404018"/>
+              <a:gd name="connsiteY9" fmla="*/ 1382751 h 1382752"/>
+              <a:gd name="connsiteX10" fmla="*/ 559430 w 2404018"/>
+              <a:gd name="connsiteY10" fmla="*/ 1382751 h 1382752"/>
+              <a:gd name="connsiteX11" fmla="*/ 559420 w 2404018"/>
+              <a:gd name="connsiteY11" fmla="*/ 1382752 h 1382752"/>
+              <a:gd name="connsiteX12" fmla="*/ 0 w 2404018"/>
+              <a:gd name="connsiteY12" fmla="*/ 823332 h 1382752"/>
+              <a:gd name="connsiteX13" fmla="*/ 559420 w 2404018"/>
+              <a:gd name="connsiteY13" fmla="*/ 263912 h 1382752"/>
+              <a:gd name="connsiteX14" fmla="*/ 672163 w 2404018"/>
+              <a:gd name="connsiteY14" fmla="*/ 275277 h 1382752"/>
+              <a:gd name="connsiteX15" fmla="*/ 695815 w 2404018"/>
+              <a:gd name="connsiteY15" fmla="*/ 282619 h 1382752"/>
+              <a:gd name="connsiteX16" fmla="*/ 761920 w 2404018"/>
+              <a:gd name="connsiteY16" fmla="*/ 202499 h 1382752"/>
+              <a:gd name="connsiteX17" fmla="*/ 1250796 w 2404018"/>
+              <a:gd name="connsiteY17" fmla="*/ 0 h 1382752"/>
+            </a:gdLst>
+            <a:ahLst/>
+            <a:cxnLst>
+              <a:cxn ang="0">
+                <a:pos x="connsiteX0" y="connsiteY0"/>
+              </a:cxn>
+              <a:cxn ang="0">
+                <a:pos x="connsiteX1" y="connsiteY1"/>
+              </a:cxn>
+              <a:cxn ang="0">
+                <a:pos x="connsiteX2" y="connsiteY2"/>
+              </a:cxn>
+              <a:cxn ang="0">
+                <a:pos x="connsiteX3" y="connsiteY3"/>
+              </a:cxn>
+              <a:cxn ang="0">
+                <a:pos x="connsiteX4" y="connsiteY4"/>
+              </a:cxn>
+              <a:cxn ang="0">
+                <a:pos x="connsiteX5" y="connsiteY5"/>
+              </a:cxn>
+              <a:cxn ang="0">
+                <a:pos x="connsiteX6" y="connsiteY6"/>
+              </a:cxn>
+              <a:cxn ang="0">
+                <a:pos x="connsiteX7" y="connsiteY7"/>
+              </a:cxn>
+              <a:cxn ang="0">
+                <a:pos x="connsiteX8" y="connsiteY8"/>
+              </a:cxn>
+              <a:cxn ang="0">
+                <a:pos x="connsiteX9" y="connsiteY9"/>
+              </a:cxn>
+              <a:cxn ang="0">
+                <a:pos x="connsiteX10" y="connsiteY10"/>
+              </a:cxn>
+              <a:cxn ang="0">
+                <a:pos x="connsiteX11" y="connsiteY11"/>
+              </a:cxn>
+              <a:cxn ang="0">
+                <a:pos x="connsiteX12" y="connsiteY12"/>
+              </a:cxn>
+              <a:cxn ang="0">
+                <a:pos x="connsiteX13" y="connsiteY13"/>
+              </a:cxn>
+              <a:cxn ang="0">
+                <a:pos x="connsiteX14" y="connsiteY14"/>
+              </a:cxn>
+              <a:cxn ang="0">
+                <a:pos x="connsiteX15" y="connsiteY15"/>
+              </a:cxn>
+              <a:cxn ang="0">
+                <a:pos x="connsiteX16" y="connsiteY16"/>
+              </a:cxn>
+              <a:cxn ang="0">
+                <a:pos x="connsiteX17" y="connsiteY17"/>
+              </a:cxn>
+            </a:cxnLst>
+            <a:rect l="l" t="t" r="r" b="b"/>
+            <a:pathLst>
+              <a:path w="2404018" h="1382752">
+                <a:moveTo>
+                  <a:pt x="1250796" y="0"/>
+                </a:moveTo>
+                <a:cubicBezTo>
+                  <a:pt x="1537173" y="0"/>
+                  <a:pt x="1782884" y="174116"/>
+                  <a:pt x="1887840" y="422261"/>
+                </a:cubicBezTo>
+                <a:lnTo>
+                  <a:pt x="1900565" y="463252"/>
+                </a:lnTo>
+                <a:lnTo>
+                  <a:pt x="1942171" y="459058"/>
+                </a:lnTo>
+                <a:cubicBezTo>
+                  <a:pt x="2197242" y="459058"/>
+                  <a:pt x="2404018" y="665834"/>
+                  <a:pt x="2404018" y="920905"/>
+                </a:cubicBezTo>
+                <a:cubicBezTo>
+                  <a:pt x="2404018" y="1175976"/>
+                  <a:pt x="2197242" y="1382752"/>
+                  <a:pt x="1942171" y="1382752"/>
+                </a:cubicBezTo>
+                <a:lnTo>
+                  <a:pt x="1942161" y="1382751"/>
+                </a:lnTo>
+                <a:lnTo>
+                  <a:pt x="1250806" y="1382751"/>
+                </a:lnTo>
+                <a:lnTo>
+                  <a:pt x="1250796" y="1382752"/>
+                </a:lnTo>
+                <a:lnTo>
+                  <a:pt x="1250786" y="1382751"/>
+                </a:lnTo>
+                <a:lnTo>
+                  <a:pt x="559430" y="1382751"/>
+                </a:lnTo>
+                <a:lnTo>
+                  <a:pt x="559420" y="1382752"/>
+                </a:lnTo>
+                <a:cubicBezTo>
+                  <a:pt x="250461" y="1382752"/>
+                  <a:pt x="0" y="1132291"/>
+                  <a:pt x="0" y="823332"/>
+                </a:cubicBezTo>
+                <a:cubicBezTo>
+                  <a:pt x="0" y="514373"/>
+                  <a:pt x="250461" y="263912"/>
+                  <a:pt x="559420" y="263912"/>
+                </a:cubicBezTo>
+                <a:cubicBezTo>
+                  <a:pt x="598040" y="263912"/>
+                  <a:pt x="635746" y="267825"/>
+                  <a:pt x="672163" y="275277"/>
+                </a:cubicBezTo>
+                <a:lnTo>
+                  <a:pt x="695815" y="282619"/>
+                </a:lnTo>
+                <a:lnTo>
+                  <a:pt x="761920" y="202499"/>
+                </a:lnTo>
+                <a:cubicBezTo>
+                  <a:pt x="887034" y="77385"/>
+                  <a:pt x="1059878" y="0"/>
+                  <a:pt x="1250796" y="0"/>
+                </a:cubicBezTo>
+                <a:close/>
+              </a:path>
+            </a:pathLst>
+          </a:custGeom>
+          <a:solidFill>
+            <a:schemeClr val="bg1">
+              <a:lumMod val="95000"/>
+            </a:schemeClr>
+          </a:solidFill>
+          <a:ln w="12700">
+            <a:solidFill>
+              <a:schemeClr val="bg2"/>
+            </a:solidFill>
+          </a:ln>
+        </p:spPr>
+        <p:style>
+          <a:lnRef idx="2">
+            <a:schemeClr val="accent1">
+              <a:shade val="15000"/>
+            </a:schemeClr>
+          </a:lnRef>
+          <a:fillRef idx="1">
+            <a:schemeClr val="accent1"/>
+          </a:fillRef>
+          <a:effectRef idx="0">
+            <a:schemeClr val="accent1"/>
+          </a:effectRef>
+          <a:fontRef idx="minor">
+            <a:schemeClr val="lt1"/>
+          </a:fontRef>
+        </p:style>
+        <p:txBody>
+          <a:bodyPr wrap="square" tIns="64800" bIns="0" rtlCol="0" anchor="ctr">
+            <a:noAutofit/>
+          </a:bodyPr>
+          <a:lstStyle/>
+          <a:p>
+            <a:pPr algn="ctr"/>
+            <a:r>
+              <a:rPr lang="ko-KR" altLang="en-US" sz="900" b="1" dirty="0" err="1">
+                <a:solidFill>
+                  <a:schemeClr val="tx1">
+                    <a:lumMod val="85000"/>
+                    <a:lumOff val="15000"/>
+                  </a:schemeClr>
+                </a:solidFill>
+                <a:latin typeface="Pretendard" panose="02000503000000020004" pitchFamily="2" charset="-127"/>
+                <a:ea typeface="Pretendard" panose="02000503000000020004" pitchFamily="2" charset="-127"/>
+                <a:cs typeface="Pretendard" panose="02000503000000020004" pitchFamily="2" charset="-127"/>
+              </a:rPr>
+              <a:t>카카오맵</a:t>
+            </a:r>
+            <a:endParaRPr lang="en-US" altLang="ko-KR" sz="900" b="1" dirty="0">
+              <a:solidFill>
+                <a:schemeClr val="tx1">
+                  <a:lumMod val="85000"/>
+                  <a:lumOff val="15000"/>
+                </a:schemeClr>
+              </a:solidFill>
+              <a:latin typeface="Pretendard" panose="02000503000000020004" pitchFamily="2" charset="-127"/>
+              <a:ea typeface="Pretendard" panose="02000503000000020004" pitchFamily="2" charset="-127"/>
+              <a:cs typeface="Pretendard" panose="02000503000000020004" pitchFamily="2" charset="-127"/>
+            </a:endParaRPr>
+          </a:p>
+          <a:p>
+            <a:pPr algn="ctr"/>
+            <a:r>
+              <a:rPr lang="ko-KR" altLang="en-US" sz="900" b="1" dirty="0">
+                <a:solidFill>
+                  <a:schemeClr val="tx1">
+                    <a:lumMod val="85000"/>
+                    <a:lumOff val="15000"/>
+                  </a:schemeClr>
+                </a:solidFill>
+                <a:latin typeface="Pretendard" panose="02000503000000020004" pitchFamily="2" charset="-127"/>
+                <a:ea typeface="Pretendard" panose="02000503000000020004" pitchFamily="2" charset="-127"/>
+                <a:cs typeface="Pretendard" panose="02000503000000020004" pitchFamily="2" charset="-127"/>
+              </a:rPr>
+              <a:t>로컬 </a:t>
+            </a:r>
+            <a:r>
+              <a:rPr lang="en-US" altLang="ko-KR" sz="900" b="1" dirty="0">
+                <a:solidFill>
+                  <a:schemeClr val="tx1">
+                    <a:lumMod val="85000"/>
+                    <a:lumOff val="15000"/>
+                  </a:schemeClr>
+                </a:solidFill>
+                <a:latin typeface="Pretendard" panose="02000503000000020004" pitchFamily="2" charset="-127"/>
+                <a:ea typeface="Pretendard" panose="02000503000000020004" pitchFamily="2" charset="-127"/>
+                <a:cs typeface="Pretendard" panose="02000503000000020004" pitchFamily="2" charset="-127"/>
+              </a:rPr>
+              <a:t>REST API</a:t>
+            </a:r>
+          </a:p>
+        </p:txBody>
+      </p:sp>
+      <p:sp>
+        <p:nvSpPr>
+          <p:cNvPr id="17" name="Rounded Rectangle 16">
+            <a:extLst>
+              <a:ext uri="{FF2B5EF4-FFF2-40B4-BE49-F238E27FC236}">
+                <a16:creationId xmlns:a16="http://schemas.microsoft.com/office/drawing/2014/main" id="{CF9F14D6-92EF-F7E4-BF4E-ED4EAE852AF7}"/>
+              </a:ext>
+            </a:extLst>
+          </p:cNvPr>
+          <p:cNvSpPr/>
+          <p:nvPr/>
+        </p:nvSpPr>
+        <p:spPr>
+          <a:xfrm>
+            <a:off x="801028" y="2263789"/>
+            <a:ext cx="1199220" cy="1595935"/>
+          </a:xfrm>
+          <a:prstGeom prst="roundRect">
+            <a:avLst>
+              <a:gd name="adj" fmla="val 8014"/>
+            </a:avLst>
+          </a:prstGeom>
+          <a:solidFill>
+            <a:schemeClr val="bg1">
+              <a:lumMod val="95000"/>
+            </a:schemeClr>
+          </a:solidFill>
+          <a:ln w="12700">
+            <a:solidFill>
+              <a:schemeClr val="bg2"/>
+            </a:solidFill>
+          </a:ln>
+        </p:spPr>
+        <p:style>
+          <a:lnRef idx="2">
+            <a:schemeClr val="accent1">
+              <a:shade val="15000"/>
+            </a:schemeClr>
+          </a:lnRef>
+          <a:fillRef idx="1">
+            <a:schemeClr val="accent1"/>
+          </a:fillRef>
+          <a:effectRef idx="0">
+            <a:schemeClr val="accent1"/>
+          </a:effectRef>
+          <a:fontRef idx="minor">
+            <a:schemeClr val="lt1"/>
+          </a:fontRef>
+        </p:style>
+        <p:txBody>
+          <a:bodyPr wrap="square" tIns="64800" bIns="0" rtlCol="0" anchor="t">
+            <a:noAutofit/>
+          </a:bodyPr>
+          <a:lstStyle/>
+          <a:p>
+            <a:r>
+              <a:rPr lang="en-US" sz="900" b="1" dirty="0" err="1">
+                <a:solidFill>
+                  <a:schemeClr val="tx1">
+                    <a:lumMod val="85000"/>
+                    <a:lumOff val="15000"/>
+                  </a:schemeClr>
+                </a:solidFill>
+                <a:latin typeface="Cascadia Code" panose="020B0609020000020004" pitchFamily="34" charset="0"/>
+                <a:ea typeface="Cascadia Code" panose="020B0609020000020004" pitchFamily="34" charset="0"/>
+                <a:cs typeface="Cascadia Code" panose="020B0609020000020004" pitchFamily="34" charset="0"/>
+              </a:rPr>
+              <a:t>HangJeongDong</a:t>
+            </a:r>
+            <a:endParaRPr lang="en-KR" sz="900" b="1" dirty="0">
+              <a:solidFill>
+                <a:schemeClr val="tx1">
+                  <a:lumMod val="85000"/>
+                  <a:lumOff val="15000"/>
+                </a:schemeClr>
+              </a:solidFill>
+              <a:latin typeface="Cascadia Code" panose="020B0609020000020004" pitchFamily="34" charset="0"/>
+              <a:ea typeface="Cascadia Code" panose="020B0609020000020004" pitchFamily="34" charset="0"/>
+              <a:cs typeface="Cascadia Code" panose="020B0609020000020004" pitchFamily="34" charset="0"/>
+            </a:endParaRPr>
+          </a:p>
+        </p:txBody>
+      </p:sp>
+    </p:spTree>
+    <p:extLst>
+      <p:ext uri="{BB962C8B-B14F-4D97-AF65-F5344CB8AC3E}">
+        <p14:creationId xmlns:p14="http://schemas.microsoft.com/office/powerpoint/2010/main" val="1693884388"/>
       </p:ext>
     </p:extLst>
   </p:cSld>
@@ -12117,28 +13469,6 @@
         </a:fontRef>
       </a:style>
     </a:lnDef>
-    <a:txDef>
-      <a:spPr>
-        <a:noFill/>
-      </a:spPr>
-      <a:bodyPr wrap="none" rtlCol="0">
-        <a:spAutoFit/>
-      </a:bodyPr>
-      <a:lstStyle>
-        <a:defPPr algn="l">
-          <a:defRPr sz="1200" b="1" dirty="0" smtClean="0">
-            <a:solidFill>
-              <a:schemeClr val="bg1">
-                <a:lumMod val="65000"/>
-              </a:schemeClr>
-            </a:solidFill>
-            <a:latin typeface="Cascadia Code" panose="020B0609020000020004" pitchFamily="34" charset="0"/>
-            <a:ea typeface="Cascadia Code" panose="020B0609020000020004" pitchFamily="34" charset="0"/>
-            <a:cs typeface="Cascadia Code" panose="020B0609020000020004" pitchFamily="34" charset="0"/>
-          </a:defRPr>
-        </a:defPPr>
-      </a:lstStyle>
-    </a:txDef>
   </a:objectDefaults>
   <a:extraClrSchemeLst/>
   <a:extLst>

--- a/documents/기능 명세서 및 다이어그램 그래픽.pptx
+++ b/documents/기능 명세서 및 다이어그램 그래픽.pptx
@@ -7,22 +7,24 @@
   <p:sldIdLst>
     <p:sldId id="256" r:id="rId2"/>
     <p:sldId id="257" r:id="rId3"/>
-    <p:sldId id="258" r:id="rId4"/>
+    <p:sldId id="259" r:id="rId4"/>
+    <p:sldId id="260" r:id="rId5"/>
+    <p:sldId id="258" r:id="rId6"/>
   </p:sldIdLst>
   <p:sldSz cx="6858000" cy="9906000" type="A4"/>
   <p:notesSz cx="6858000" cy="9144000"/>
   <p:embeddedFontLst>
     <p:embeddedFont>
       <p:font typeface="Cascadia Code" panose="020B0609020000020004" pitchFamily="34" charset="0"/>
-      <p:regular r:id="rId5"/>
-      <p:bold r:id="rId6"/>
-      <p:italic r:id="rId7"/>
-      <p:boldItalic r:id="rId8"/>
+      <p:regular r:id="rId7"/>
+      <p:bold r:id="rId8"/>
+      <p:italic r:id="rId9"/>
+      <p:boldItalic r:id="rId10"/>
     </p:embeddedFont>
     <p:embeddedFont>
       <p:font typeface="Pretendard" panose="02000503000000020004" pitchFamily="2" charset="-127"/>
-      <p:regular r:id="rId9"/>
-      <p:bold r:id="rId10"/>
+      <p:regular r:id="rId11"/>
+      <p:bold r:id="rId12"/>
     </p:embeddedFont>
   </p:embeddedFontLst>
   <p:defaultTextStyle>
@@ -259,7 +261,7 @@
           <a:p>
             <a:fld id="{FBCF496E-1423-0F43-9D3A-7484EF9BE24D}" type="datetimeFigureOut">
               <a:rPr lang="en-KR" smtClean="0"/>
-              <a:t>10/23/25</a:t>
+              <a:t>10/27/25</a:t>
             </a:fld>
             <a:endParaRPr lang="en-KR"/>
           </a:p>
@@ -429,7 +431,7 @@
           <a:p>
             <a:fld id="{FBCF496E-1423-0F43-9D3A-7484EF9BE24D}" type="datetimeFigureOut">
               <a:rPr lang="en-KR" smtClean="0"/>
-              <a:t>10/23/25</a:t>
+              <a:t>10/27/25</a:t>
             </a:fld>
             <a:endParaRPr lang="en-KR"/>
           </a:p>
@@ -609,7 +611,7 @@
           <a:p>
             <a:fld id="{FBCF496E-1423-0F43-9D3A-7484EF9BE24D}" type="datetimeFigureOut">
               <a:rPr lang="en-KR" smtClean="0"/>
-              <a:t>10/23/25</a:t>
+              <a:t>10/27/25</a:t>
             </a:fld>
             <a:endParaRPr lang="en-KR"/>
           </a:p>
@@ -779,7 +781,7 @@
           <a:p>
             <a:fld id="{FBCF496E-1423-0F43-9D3A-7484EF9BE24D}" type="datetimeFigureOut">
               <a:rPr lang="en-KR" smtClean="0"/>
-              <a:t>10/23/25</a:t>
+              <a:t>10/27/25</a:t>
             </a:fld>
             <a:endParaRPr lang="en-KR"/>
           </a:p>
@@ -1025,7 +1027,7 @@
           <a:p>
             <a:fld id="{FBCF496E-1423-0F43-9D3A-7484EF9BE24D}" type="datetimeFigureOut">
               <a:rPr lang="en-KR" smtClean="0"/>
-              <a:t>10/23/25</a:t>
+              <a:t>10/27/25</a:t>
             </a:fld>
             <a:endParaRPr lang="en-KR"/>
           </a:p>
@@ -1257,7 +1259,7 @@
           <a:p>
             <a:fld id="{FBCF496E-1423-0F43-9D3A-7484EF9BE24D}" type="datetimeFigureOut">
               <a:rPr lang="en-KR" smtClean="0"/>
-              <a:t>10/23/25</a:t>
+              <a:t>10/27/25</a:t>
             </a:fld>
             <a:endParaRPr lang="en-KR"/>
           </a:p>
@@ -1624,7 +1626,7 @@
           <a:p>
             <a:fld id="{FBCF496E-1423-0F43-9D3A-7484EF9BE24D}" type="datetimeFigureOut">
               <a:rPr lang="en-KR" smtClean="0"/>
-              <a:t>10/23/25</a:t>
+              <a:t>10/27/25</a:t>
             </a:fld>
             <a:endParaRPr lang="en-KR"/>
           </a:p>
@@ -1742,7 +1744,7 @@
           <a:p>
             <a:fld id="{FBCF496E-1423-0F43-9D3A-7484EF9BE24D}" type="datetimeFigureOut">
               <a:rPr lang="en-KR" smtClean="0"/>
-              <a:t>10/23/25</a:t>
+              <a:t>10/27/25</a:t>
             </a:fld>
             <a:endParaRPr lang="en-KR"/>
           </a:p>
@@ -1837,7 +1839,7 @@
           <a:p>
             <a:fld id="{FBCF496E-1423-0F43-9D3A-7484EF9BE24D}" type="datetimeFigureOut">
               <a:rPr lang="en-KR" smtClean="0"/>
-              <a:t>10/23/25</a:t>
+              <a:t>10/27/25</a:t>
             </a:fld>
             <a:endParaRPr lang="en-KR"/>
           </a:p>
@@ -2114,7 +2116,7 @@
           <a:p>
             <a:fld id="{FBCF496E-1423-0F43-9D3A-7484EF9BE24D}" type="datetimeFigureOut">
               <a:rPr lang="en-KR" smtClean="0"/>
-              <a:t>10/23/25</a:t>
+              <a:t>10/27/25</a:t>
             </a:fld>
             <a:endParaRPr lang="en-KR"/>
           </a:p>
@@ -2371,7 +2373,7 @@
           <a:p>
             <a:fld id="{FBCF496E-1423-0F43-9D3A-7484EF9BE24D}" type="datetimeFigureOut">
               <a:rPr lang="en-KR" smtClean="0"/>
-              <a:t>10/23/25</a:t>
+              <a:t>10/27/25</a:t>
             </a:fld>
             <a:endParaRPr lang="en-KR"/>
           </a:p>
@@ -2584,7 +2586,7 @@
           <a:p>
             <a:fld id="{FBCF496E-1423-0F43-9D3A-7484EF9BE24D}" type="datetimeFigureOut">
               <a:rPr lang="en-KR" smtClean="0"/>
-              <a:t>10/23/25</a:t>
+              <a:t>10/27/25</a:t>
             </a:fld>
             <a:endParaRPr lang="en-KR"/>
           </a:p>
@@ -3226,7 +3228,7 @@
                 <a:ea typeface="Pretendard" panose="02000503000000020004" pitchFamily="2" charset="-127"/>
                 <a:cs typeface="Pretendard" panose="02000503000000020004" pitchFamily="2" charset="-127"/>
               </a:rPr>
-              <a:t>(=</a:t>
+              <a:t>(</a:t>
             </a:r>
             <a:r>
               <a:rPr lang="ko-KR" altLang="en-US" sz="900" b="1" dirty="0">
@@ -7683,7 +7685,7 @@
                 <a:ea typeface="Pretendard" panose="02000503000000020004" pitchFamily="2" charset="-127"/>
                 <a:cs typeface="Pretendard" panose="02000503000000020004" pitchFamily="2" charset="-127"/>
               </a:rPr>
-              <a:t>(=</a:t>
+              <a:t>(</a:t>
             </a:r>
             <a:r>
               <a:rPr lang="ko-KR" altLang="en-US" sz="900" b="1" dirty="0">
@@ -9474,8 +9476,8 @@
         </p:nvSpPr>
         <p:spPr>
           <a:xfrm>
-            <a:off x="1193516" y="1383379"/>
-            <a:ext cx="651610" cy="230560"/>
+            <a:off x="1058309" y="1383379"/>
+            <a:ext cx="786817" cy="230560"/>
           </a:xfrm>
           <a:prstGeom prst="rect">
             <a:avLst/>
@@ -9500,7 +9502,7 @@
                 <a:ea typeface="Pretendard" panose="02000503000000020004" pitchFamily="2" charset="-127"/>
                 <a:cs typeface="Pretendard" panose="02000503000000020004" pitchFamily="2" charset="-127"/>
               </a:rPr>
-              <a:t>“20204”</a:t>
+              <a:t>“119900101”</a:t>
             </a:r>
             <a:endParaRPr lang="en-KR" sz="825" b="1" dirty="0">
               <a:solidFill>
@@ -10278,7 +10280,7 @@
         <p:spPr>
           <a:xfrm>
             <a:off x="2157873" y="2896892"/>
-            <a:ext cx="4497051" cy="554447"/>
+            <a:ext cx="4497051" cy="713144"/>
           </a:xfrm>
           <a:prstGeom prst="rect">
             <a:avLst/>
@@ -10655,6 +10657,118 @@
                 <a:cs typeface="Pretendard" panose="02000503000000020004" pitchFamily="2" charset="-127"/>
               </a:rPr>
               <a:t>.</a:t>
+            </a:r>
+            <a:r>
+              <a:rPr lang="ko-KR" altLang="en-US" sz="825" dirty="0">
+                <a:solidFill>
+                  <a:schemeClr val="tx1">
+                    <a:lumMod val="85000"/>
+                    <a:lumOff val="15000"/>
+                  </a:schemeClr>
+                </a:solidFill>
+                <a:latin typeface="Pretendard" panose="02000503000000020004" pitchFamily="2" charset="-127"/>
+                <a:ea typeface="Pretendard" panose="02000503000000020004" pitchFamily="2" charset="-127"/>
+                <a:cs typeface="Pretendard" panose="02000503000000020004" pitchFamily="2" charset="-127"/>
+              </a:rPr>
+              <a:t> </a:t>
+            </a:r>
+            <a:r>
+              <a:rPr lang="en-US" altLang="ko-KR" sz="825" dirty="0">
+                <a:solidFill>
+                  <a:schemeClr val="tx1">
+                    <a:lumMod val="85000"/>
+                    <a:lumOff val="15000"/>
+                  </a:schemeClr>
+                </a:solidFill>
+                <a:latin typeface="Pretendard" panose="02000503000000020004" pitchFamily="2" charset="-127"/>
+                <a:ea typeface="Pretendard" panose="02000503000000020004" pitchFamily="2" charset="-127"/>
+                <a:cs typeface="Pretendard" panose="02000503000000020004" pitchFamily="2" charset="-127"/>
+              </a:rPr>
+              <a:t>(</a:t>
+            </a:r>
+            <a:r>
+              <a:rPr lang="ko-KR" altLang="en-US" sz="825" dirty="0">
+                <a:solidFill>
+                  <a:schemeClr val="tx1">
+                    <a:lumMod val="85000"/>
+                    <a:lumOff val="15000"/>
+                  </a:schemeClr>
+                </a:solidFill>
+                <a:latin typeface="Pretendard" panose="02000503000000020004" pitchFamily="2" charset="-127"/>
+                <a:ea typeface="Pretendard" panose="02000503000000020004" pitchFamily="2" charset="-127"/>
+                <a:cs typeface="Pretendard" panose="02000503000000020004" pitchFamily="2" charset="-127"/>
+              </a:rPr>
+              <a:t>네</a:t>
+            </a:r>
+            <a:r>
+              <a:rPr lang="en-US" altLang="ko-KR" sz="825" dirty="0">
+                <a:solidFill>
+                  <a:schemeClr val="tx1">
+                    <a:lumMod val="85000"/>
+                    <a:lumOff val="15000"/>
+                  </a:schemeClr>
+                </a:solidFill>
+                <a:latin typeface="Pretendard" panose="02000503000000020004" pitchFamily="2" charset="-127"/>
+                <a:ea typeface="Pretendard" panose="02000503000000020004" pitchFamily="2" charset="-127"/>
+                <a:cs typeface="Pretendard" panose="02000503000000020004" pitchFamily="2" charset="-127"/>
+              </a:rPr>
+              <a:t>,</a:t>
+            </a:r>
+            <a:r>
+              <a:rPr lang="ko-KR" altLang="en-US" sz="825" dirty="0">
+                <a:solidFill>
+                  <a:schemeClr val="tx1">
+                    <a:lumMod val="85000"/>
+                    <a:lumOff val="15000"/>
+                  </a:schemeClr>
+                </a:solidFill>
+                <a:latin typeface="Pretendard" panose="02000503000000020004" pitchFamily="2" charset="-127"/>
+                <a:ea typeface="Pretendard" panose="02000503000000020004" pitchFamily="2" charset="-127"/>
+                <a:cs typeface="Pretendard" panose="02000503000000020004" pitchFamily="2" charset="-127"/>
+              </a:rPr>
+              <a:t> 서울시에서 네이티브로 제공하는 정류장 마스터 </a:t>
+            </a:r>
+            <a:r>
+              <a:rPr lang="en-US" altLang="ko-KR" sz="825" dirty="0">
+                <a:solidFill>
+                  <a:schemeClr val="tx1">
+                    <a:lumMod val="85000"/>
+                    <a:lumOff val="15000"/>
+                  </a:schemeClr>
+                </a:solidFill>
+                <a:latin typeface="Pretendard" panose="02000503000000020004" pitchFamily="2" charset="-127"/>
+                <a:ea typeface="Pretendard" panose="02000503000000020004" pitchFamily="2" charset="-127"/>
+                <a:cs typeface="Pretendard" panose="02000503000000020004" pitchFamily="2" charset="-127"/>
+              </a:rPr>
+              <a:t>API</a:t>
+            </a:r>
+            <a:r>
+              <a:rPr lang="ko-KR" altLang="en-US" sz="825" dirty="0">
+                <a:solidFill>
+                  <a:schemeClr val="tx1">
+                    <a:lumMod val="85000"/>
+                    <a:lumOff val="15000"/>
+                  </a:schemeClr>
+                </a:solidFill>
+                <a:latin typeface="Pretendard" panose="02000503000000020004" pitchFamily="2" charset="-127"/>
+                <a:ea typeface="Pretendard" panose="02000503000000020004" pitchFamily="2" charset="-127"/>
+                <a:cs typeface="Pretendard" panose="02000503000000020004" pitchFamily="2" charset="-127"/>
+              </a:rPr>
+              <a:t>에는 좌표만 포함되며 정류장이 위치한 한글 주소는 직접 찾아야 합니다</a:t>
+            </a:r>
+            <a:r>
+              <a:rPr lang="en-US" altLang="ko-KR" sz="825" dirty="0">
+                <a:solidFill>
+                  <a:schemeClr val="tx1">
+                    <a:lumMod val="85000"/>
+                    <a:lumOff val="15000"/>
+                  </a:schemeClr>
+                </a:solidFill>
+                <a:latin typeface="Pretendard" panose="02000503000000020004" pitchFamily="2" charset="-127"/>
+                <a:ea typeface="Pretendard" panose="02000503000000020004" pitchFamily="2" charset="-127"/>
+                <a:cs typeface="Pretendard" panose="02000503000000020004" pitchFamily="2" charset="-127"/>
+              </a:rPr>
+              <a:t>.)</a:t>
             </a:r>
           </a:p>
         </p:txBody>
@@ -10729,7 +10843,7 @@
         </p:nvSpPr>
         <p:spPr>
           <a:xfrm>
-            <a:off x="2157873" y="3451339"/>
+            <a:off x="2157873" y="3610036"/>
             <a:ext cx="4497051" cy="1665328"/>
           </a:xfrm>
           <a:prstGeom prst="rect">
@@ -12224,6 +12338,5327 @@
 </file>
 
 <file path=ppt/slides/slide3.xml><?xml version="1.0" encoding="utf-8"?>
+<p:sld xmlns:a="http://schemas.openxmlformats.org/drawingml/2006/main" xmlns:r="http://schemas.openxmlformats.org/officeDocument/2006/relationships" xmlns:p="http://schemas.openxmlformats.org/presentationml/2006/main">
+  <p:cSld>
+    <p:spTree>
+      <p:nvGrpSpPr>
+        <p:cNvPr id="1" name="">
+          <a:extLst>
+            <a:ext uri="{FF2B5EF4-FFF2-40B4-BE49-F238E27FC236}">
+              <a16:creationId xmlns:a16="http://schemas.microsoft.com/office/drawing/2014/main" id="{1E862BA6-8E79-1605-6871-6DC31FA6C008}"/>
+            </a:ext>
+          </a:extLst>
+        </p:cNvPr>
+        <p:cNvGrpSpPr/>
+        <p:nvPr/>
+      </p:nvGrpSpPr>
+      <p:grpSpPr>
+        <a:xfrm>
+          <a:off x="0" y="0"/>
+          <a:ext cx="0" cy="0"/>
+          <a:chOff x="0" y="0"/>
+          <a:chExt cx="0" cy="0"/>
+        </a:xfrm>
+      </p:grpSpPr>
+      <p:sp>
+        <p:nvSpPr>
+          <p:cNvPr id="5" name="Rectangle 4">
+            <a:extLst>
+              <a:ext uri="{FF2B5EF4-FFF2-40B4-BE49-F238E27FC236}">
+                <a16:creationId xmlns:a16="http://schemas.microsoft.com/office/drawing/2014/main" id="{EA9751C1-6E6C-1CB0-8C99-D73DE207B797}"/>
+              </a:ext>
+            </a:extLst>
+          </p:cNvPr>
+          <p:cNvSpPr>
+            <a:spLocks/>
+          </p:cNvSpPr>
+          <p:nvPr/>
+        </p:nvSpPr>
+        <p:spPr>
+          <a:xfrm>
+            <a:off x="0" y="0"/>
+            <a:ext cx="3429000" cy="405000"/>
+          </a:xfrm>
+          <a:prstGeom prst="rect">
+            <a:avLst/>
+          </a:prstGeom>
+          <a:solidFill>
+            <a:schemeClr val="bg1">
+              <a:lumMod val="95000"/>
+            </a:schemeClr>
+          </a:solidFill>
+          <a:ln>
+            <a:noFill/>
+          </a:ln>
+        </p:spPr>
+        <p:style>
+          <a:lnRef idx="2">
+            <a:schemeClr val="accent1">
+              <a:shade val="15000"/>
+            </a:schemeClr>
+          </a:lnRef>
+          <a:fillRef idx="1">
+            <a:schemeClr val="accent1"/>
+          </a:fillRef>
+          <a:effectRef idx="0">
+            <a:schemeClr val="accent1"/>
+          </a:effectRef>
+          <a:fontRef idx="minor">
+            <a:schemeClr val="lt1"/>
+          </a:fontRef>
+        </p:style>
+        <p:txBody>
+          <a:bodyPr lIns="135000" tIns="35100" rIns="67500" bIns="67500" numCol="1" rtlCol="0" anchor="b"/>
+          <a:lstStyle/>
+          <a:p>
+            <a:r>
+              <a:rPr lang="en-US" altLang="ko-KR" sz="900" b="1" dirty="0">
+                <a:solidFill>
+                  <a:schemeClr val="bg1">
+                    <a:lumMod val="65000"/>
+                  </a:schemeClr>
+                </a:solidFill>
+                <a:latin typeface="Pretendard" panose="02000503000000020004" pitchFamily="2" charset="-127"/>
+                <a:ea typeface="Pretendard" panose="02000503000000020004" pitchFamily="2" charset="-127"/>
+                <a:cs typeface="Pretendard" panose="02000503000000020004" pitchFamily="2" charset="-127"/>
+              </a:rPr>
+              <a:t>./main/</a:t>
+            </a:r>
+            <a:r>
+              <a:rPr lang="en-US" altLang="ko-KR" sz="900" b="1" dirty="0" err="1">
+                <a:solidFill>
+                  <a:schemeClr val="tx1">
+                    <a:lumMod val="85000"/>
+                    <a:lumOff val="15000"/>
+                  </a:schemeClr>
+                </a:solidFill>
+                <a:latin typeface="Pretendard" panose="02000503000000020004" pitchFamily="2" charset="-127"/>
+                <a:ea typeface="Pretendard" panose="02000503000000020004" pitchFamily="2" charset="-127"/>
+                <a:cs typeface="Pretendard" panose="02000503000000020004" pitchFamily="2" charset="-127"/>
+              </a:rPr>
+              <a:t>models.py</a:t>
+            </a:r>
+            <a:r>
+              <a:rPr lang="ko-KR" altLang="en-US" sz="900" b="1" dirty="0">
+                <a:solidFill>
+                  <a:schemeClr val="tx1">
+                    <a:lumMod val="85000"/>
+                    <a:lumOff val="15000"/>
+                  </a:schemeClr>
+                </a:solidFill>
+                <a:latin typeface="Pretendard" panose="02000503000000020004" pitchFamily="2" charset="-127"/>
+                <a:ea typeface="Pretendard" panose="02000503000000020004" pitchFamily="2" charset="-127"/>
+                <a:cs typeface="Pretendard" panose="02000503000000020004" pitchFamily="2" charset="-127"/>
+              </a:rPr>
+              <a:t> </a:t>
+            </a:r>
+            <a:r>
+              <a:rPr lang="en-US" altLang="ko-KR" sz="900" b="1" dirty="0">
+                <a:solidFill>
+                  <a:schemeClr val="tx1">
+                    <a:lumMod val="85000"/>
+                    <a:lumOff val="15000"/>
+                  </a:schemeClr>
+                </a:solidFill>
+                <a:latin typeface="Pretendard" panose="02000503000000020004" pitchFamily="2" charset="-127"/>
+                <a:ea typeface="Pretendard" panose="02000503000000020004" pitchFamily="2" charset="-127"/>
+                <a:cs typeface="Pretendard" panose="02000503000000020004" pitchFamily="2" charset="-127"/>
+              </a:rPr>
+              <a:t>&gt;</a:t>
+            </a:r>
+            <a:r>
+              <a:rPr lang="ko-KR" altLang="en-US" sz="900" b="1" dirty="0">
+                <a:solidFill>
+                  <a:schemeClr val="tx1">
+                    <a:lumMod val="85000"/>
+                    <a:lumOff val="15000"/>
+                  </a:schemeClr>
+                </a:solidFill>
+                <a:latin typeface="Pretendard" panose="02000503000000020004" pitchFamily="2" charset="-127"/>
+                <a:ea typeface="Pretendard" panose="02000503000000020004" pitchFamily="2" charset="-127"/>
+                <a:cs typeface="Pretendard" panose="02000503000000020004" pitchFamily="2" charset="-127"/>
+              </a:rPr>
+              <a:t> </a:t>
+            </a:r>
+            <a:r>
+              <a:rPr lang="en-US" altLang="ko-KR" sz="900" b="1" dirty="0" err="1">
+                <a:solidFill>
+                  <a:schemeClr val="tx1">
+                    <a:lumMod val="85000"/>
+                    <a:lumOff val="15000"/>
+                  </a:schemeClr>
+                </a:solidFill>
+                <a:latin typeface="Pretendard" panose="02000503000000020004" pitchFamily="2" charset="-127"/>
+                <a:ea typeface="Pretendard" panose="02000503000000020004" pitchFamily="2" charset="-127"/>
+                <a:cs typeface="Pretendard" panose="02000503000000020004" pitchFamily="2" charset="-127"/>
+              </a:rPr>
+              <a:t>BusData</a:t>
+            </a:r>
+            <a:endParaRPr lang="en-US" altLang="ko-KR" sz="900" b="1" dirty="0">
+              <a:solidFill>
+                <a:schemeClr val="tx1">
+                  <a:lumMod val="85000"/>
+                  <a:lumOff val="15000"/>
+                </a:schemeClr>
+              </a:solidFill>
+              <a:latin typeface="Pretendard" panose="02000503000000020004" pitchFamily="2" charset="-127"/>
+              <a:ea typeface="Pretendard" panose="02000503000000020004" pitchFamily="2" charset="-127"/>
+              <a:cs typeface="Pretendard" panose="02000503000000020004" pitchFamily="2" charset="-127"/>
+            </a:endParaRPr>
+          </a:p>
+        </p:txBody>
+      </p:sp>
+      <p:sp>
+        <p:nvSpPr>
+          <p:cNvPr id="6" name="Rectangle 5">
+            <a:extLst>
+              <a:ext uri="{FF2B5EF4-FFF2-40B4-BE49-F238E27FC236}">
+                <a16:creationId xmlns:a16="http://schemas.microsoft.com/office/drawing/2014/main" id="{7752740F-5190-4834-EAEB-5838DFE5AC7D}"/>
+              </a:ext>
+            </a:extLst>
+          </p:cNvPr>
+          <p:cNvSpPr>
+            <a:spLocks/>
+          </p:cNvSpPr>
+          <p:nvPr/>
+        </p:nvSpPr>
+        <p:spPr>
+          <a:xfrm>
+            <a:off x="3429000" y="0"/>
+            <a:ext cx="3429000" cy="405000"/>
+          </a:xfrm>
+          <a:prstGeom prst="rect">
+            <a:avLst/>
+          </a:prstGeom>
+          <a:solidFill>
+            <a:schemeClr val="bg1">
+              <a:lumMod val="95000"/>
+            </a:schemeClr>
+          </a:solidFill>
+          <a:ln>
+            <a:noFill/>
+          </a:ln>
+        </p:spPr>
+        <p:style>
+          <a:lnRef idx="2">
+            <a:schemeClr val="accent1">
+              <a:shade val="15000"/>
+            </a:schemeClr>
+          </a:lnRef>
+          <a:fillRef idx="1">
+            <a:schemeClr val="accent1"/>
+          </a:fillRef>
+          <a:effectRef idx="0">
+            <a:schemeClr val="accent1"/>
+          </a:effectRef>
+          <a:fontRef idx="minor">
+            <a:schemeClr val="lt1"/>
+          </a:fontRef>
+        </p:style>
+        <p:txBody>
+          <a:bodyPr lIns="67500" tIns="35100" rIns="135000" bIns="67500" numCol="1" rtlCol="0" anchor="b"/>
+          <a:lstStyle/>
+          <a:p>
+            <a:pPr algn="r"/>
+            <a:r>
+              <a:rPr lang="en-US" altLang="ko-KR" sz="900" b="1" dirty="0" err="1">
+                <a:solidFill>
+                  <a:schemeClr val="bg1">
+                    <a:lumMod val="65000"/>
+                  </a:schemeClr>
+                </a:solidFill>
+                <a:latin typeface="Pretendard" panose="02000503000000020004" pitchFamily="2" charset="-127"/>
+                <a:ea typeface="Pretendard" panose="02000503000000020004" pitchFamily="2" charset="-127"/>
+                <a:cs typeface="Pretendard" panose="02000503000000020004" pitchFamily="2" charset="-127"/>
+              </a:rPr>
+              <a:t>seoulbusmap</a:t>
+            </a:r>
+            <a:r>
+              <a:rPr lang="ko-KR" altLang="en-US" sz="900" b="1" dirty="0">
+                <a:solidFill>
+                  <a:schemeClr val="bg1">
+                    <a:lumMod val="65000"/>
+                  </a:schemeClr>
+                </a:solidFill>
+                <a:latin typeface="Pretendard" panose="02000503000000020004" pitchFamily="2" charset="-127"/>
+                <a:ea typeface="Pretendard" panose="02000503000000020004" pitchFamily="2" charset="-127"/>
+                <a:cs typeface="Pretendard" panose="02000503000000020004" pitchFamily="2" charset="-127"/>
+              </a:rPr>
+              <a:t> 프로젝트에 사용될 데이터 구조</a:t>
+            </a:r>
+            <a:r>
+              <a:rPr lang="en-US" altLang="ko-KR" sz="900" b="1" dirty="0">
+                <a:solidFill>
+                  <a:schemeClr val="bg1">
+                    <a:lumMod val="65000"/>
+                  </a:schemeClr>
+                </a:solidFill>
+                <a:latin typeface="Pretendard" panose="02000503000000020004" pitchFamily="2" charset="-127"/>
+                <a:ea typeface="Pretendard" panose="02000503000000020004" pitchFamily="2" charset="-127"/>
+                <a:cs typeface="Pretendard" panose="02000503000000020004" pitchFamily="2" charset="-127"/>
+              </a:rPr>
+              <a:t>(</a:t>
+            </a:r>
+            <a:r>
+              <a:rPr lang="ko-KR" altLang="en-US" sz="900" b="1" dirty="0">
+                <a:solidFill>
+                  <a:schemeClr val="bg1">
+                    <a:lumMod val="65000"/>
+                  </a:schemeClr>
+                </a:solidFill>
+                <a:latin typeface="Pretendard" panose="02000503000000020004" pitchFamily="2" charset="-127"/>
+                <a:ea typeface="Pretendard" panose="02000503000000020004" pitchFamily="2" charset="-127"/>
+                <a:cs typeface="Pretendard" panose="02000503000000020004" pitchFamily="2" charset="-127"/>
+              </a:rPr>
+              <a:t>모델</a:t>
+            </a:r>
+            <a:r>
+              <a:rPr lang="en-US" altLang="ko-KR" sz="900" b="1" dirty="0">
+                <a:solidFill>
+                  <a:schemeClr val="bg1">
+                    <a:lumMod val="65000"/>
+                  </a:schemeClr>
+                </a:solidFill>
+                <a:latin typeface="Pretendard" panose="02000503000000020004" pitchFamily="2" charset="-127"/>
+                <a:ea typeface="Pretendard" panose="02000503000000020004" pitchFamily="2" charset="-127"/>
+                <a:cs typeface="Pretendard" panose="02000503000000020004" pitchFamily="2" charset="-127"/>
+              </a:rPr>
+              <a:t>)</a:t>
+            </a:r>
+            <a:r>
+              <a:rPr lang="ko-KR" altLang="en-US" sz="900" b="1" dirty="0">
+                <a:solidFill>
+                  <a:schemeClr val="bg1">
+                    <a:lumMod val="65000"/>
+                  </a:schemeClr>
+                </a:solidFill>
+                <a:latin typeface="Pretendard" panose="02000503000000020004" pitchFamily="2" charset="-127"/>
+                <a:ea typeface="Pretendard" panose="02000503000000020004" pitchFamily="2" charset="-127"/>
+                <a:cs typeface="Pretendard" panose="02000503000000020004" pitchFamily="2" charset="-127"/>
+              </a:rPr>
+              <a:t>을 정의</a:t>
+            </a:r>
+            <a:endParaRPr lang="en-US" altLang="ko-KR" sz="900" b="1" dirty="0">
+              <a:solidFill>
+                <a:schemeClr val="tx1">
+                  <a:lumMod val="85000"/>
+                  <a:lumOff val="15000"/>
+                </a:schemeClr>
+              </a:solidFill>
+              <a:latin typeface="Pretendard" panose="02000503000000020004" pitchFamily="2" charset="-127"/>
+              <a:ea typeface="Pretendard" panose="02000503000000020004" pitchFamily="2" charset="-127"/>
+              <a:cs typeface="Pretendard" panose="02000503000000020004" pitchFamily="2" charset="-127"/>
+            </a:endParaRPr>
+          </a:p>
+        </p:txBody>
+      </p:sp>
+      <p:sp>
+        <p:nvSpPr>
+          <p:cNvPr id="37" name="Rectangle 36">
+            <a:extLst>
+              <a:ext uri="{FF2B5EF4-FFF2-40B4-BE49-F238E27FC236}">
+                <a16:creationId xmlns:a16="http://schemas.microsoft.com/office/drawing/2014/main" id="{0AC204ED-C662-FDA9-B202-234225142759}"/>
+              </a:ext>
+            </a:extLst>
+          </p:cNvPr>
+          <p:cNvSpPr/>
+          <p:nvPr/>
+        </p:nvSpPr>
+        <p:spPr>
+          <a:xfrm>
+            <a:off x="203078" y="607501"/>
+            <a:ext cx="1752295" cy="5146064"/>
+          </a:xfrm>
+          <a:prstGeom prst="rect">
+            <a:avLst/>
+          </a:prstGeom>
+          <a:solidFill>
+            <a:schemeClr val="bg1">
+              <a:lumMod val="95000"/>
+            </a:schemeClr>
+          </a:solidFill>
+          <a:ln>
+            <a:noFill/>
+          </a:ln>
+        </p:spPr>
+        <p:style>
+          <a:lnRef idx="2">
+            <a:schemeClr val="accent1">
+              <a:shade val="15000"/>
+            </a:schemeClr>
+          </a:lnRef>
+          <a:fillRef idx="1">
+            <a:schemeClr val="accent1"/>
+          </a:fillRef>
+          <a:effectRef idx="0">
+            <a:schemeClr val="accent1"/>
+          </a:effectRef>
+          <a:fontRef idx="minor">
+            <a:schemeClr val="lt1"/>
+          </a:fontRef>
+        </p:style>
+        <p:txBody>
+          <a:bodyPr rtlCol="0" anchor="ctr"/>
+          <a:lstStyle/>
+          <a:p>
+            <a:pPr algn="ctr"/>
+            <a:endParaRPr lang="en-KR" sz="1350"/>
+          </a:p>
+        </p:txBody>
+      </p:sp>
+      <p:sp>
+        <p:nvSpPr>
+          <p:cNvPr id="38" name="Rectangle 37">
+            <a:extLst>
+              <a:ext uri="{FF2B5EF4-FFF2-40B4-BE49-F238E27FC236}">
+                <a16:creationId xmlns:a16="http://schemas.microsoft.com/office/drawing/2014/main" id="{08C3E396-0C1F-DAEB-B085-4525FCE7795E}"/>
+              </a:ext>
+            </a:extLst>
+          </p:cNvPr>
+          <p:cNvSpPr/>
+          <p:nvPr/>
+        </p:nvSpPr>
+        <p:spPr>
+          <a:xfrm>
+            <a:off x="203077" y="607500"/>
+            <a:ext cx="1752296" cy="710066"/>
+          </a:xfrm>
+          <a:prstGeom prst="rect">
+            <a:avLst/>
+          </a:prstGeom>
+          <a:gradFill>
+            <a:gsLst>
+              <a:gs pos="0">
+                <a:schemeClr val="bg2"/>
+              </a:gs>
+              <a:gs pos="100000">
+                <a:schemeClr val="bg1">
+                  <a:lumMod val="95000"/>
+                </a:schemeClr>
+              </a:gs>
+            </a:gsLst>
+            <a:lin ang="5400000" scaled="1"/>
+          </a:gradFill>
+          <a:ln>
+            <a:noFill/>
+          </a:ln>
+        </p:spPr>
+        <p:style>
+          <a:lnRef idx="2">
+            <a:schemeClr val="accent1">
+              <a:shade val="15000"/>
+            </a:schemeClr>
+          </a:lnRef>
+          <a:fillRef idx="1">
+            <a:schemeClr val="accent1"/>
+          </a:fillRef>
+          <a:effectRef idx="0">
+            <a:schemeClr val="accent1"/>
+          </a:effectRef>
+          <a:fontRef idx="minor">
+            <a:schemeClr val="lt1"/>
+          </a:fontRef>
+        </p:style>
+        <p:txBody>
+          <a:bodyPr rtlCol="0" anchor="ctr"/>
+          <a:lstStyle/>
+          <a:p>
+            <a:pPr algn="ctr"/>
+            <a:endParaRPr lang="en-KR" sz="1350" dirty="0"/>
+          </a:p>
+        </p:txBody>
+      </p:sp>
+      <p:sp>
+        <p:nvSpPr>
+          <p:cNvPr id="39" name="TextBox 38">
+            <a:extLst>
+              <a:ext uri="{FF2B5EF4-FFF2-40B4-BE49-F238E27FC236}">
+                <a16:creationId xmlns:a16="http://schemas.microsoft.com/office/drawing/2014/main" id="{6C19AE78-5D04-1A2C-7EA9-81E0DE189854}"/>
+              </a:ext>
+            </a:extLst>
+          </p:cNvPr>
+          <p:cNvSpPr txBox="1"/>
+          <p:nvPr/>
+        </p:nvSpPr>
+        <p:spPr>
+          <a:xfrm>
+            <a:off x="203075" y="607500"/>
+            <a:ext cx="1754997" cy="298719"/>
+          </a:xfrm>
+          <a:prstGeom prst="rect">
+            <a:avLst/>
+          </a:prstGeom>
+          <a:noFill/>
+        </p:spPr>
+        <p:txBody>
+          <a:bodyPr wrap="square" lIns="135000" tIns="135000" rIns="67500" bIns="35100" rtlCol="0">
+            <a:spAutoFit/>
+          </a:bodyPr>
+          <a:lstStyle/>
+          <a:p>
+            <a:r>
+              <a:rPr lang="en-US" sz="825" b="1" dirty="0" err="1">
+                <a:solidFill>
+                  <a:schemeClr val="tx1">
+                    <a:lumMod val="85000"/>
+                    <a:lumOff val="15000"/>
+                  </a:schemeClr>
+                </a:solidFill>
+                <a:latin typeface="Cascadia Code" panose="020B0609020000020004" pitchFamily="34" charset="0"/>
+                <a:ea typeface="Cascadia Code" panose="020B0609020000020004" pitchFamily="34" charset="0"/>
+                <a:cs typeface="Cascadia Code" panose="020B0609020000020004" pitchFamily="34" charset="0"/>
+              </a:rPr>
+              <a:t>BusData</a:t>
+            </a:r>
+            <a:endParaRPr lang="en-KR" sz="825" b="1" dirty="0">
+              <a:solidFill>
+                <a:schemeClr val="tx1">
+                  <a:lumMod val="85000"/>
+                  <a:lumOff val="15000"/>
+                </a:schemeClr>
+              </a:solidFill>
+              <a:latin typeface="Cascadia Code" panose="020B0609020000020004" pitchFamily="34" charset="0"/>
+              <a:ea typeface="Cascadia Code" panose="020B0609020000020004" pitchFamily="34" charset="0"/>
+              <a:cs typeface="Cascadia Code" panose="020B0609020000020004" pitchFamily="34" charset="0"/>
+            </a:endParaRPr>
+          </a:p>
+        </p:txBody>
+      </p:sp>
+      <p:sp>
+        <p:nvSpPr>
+          <p:cNvPr id="40" name="TextBox 39">
+            <a:extLst>
+              <a:ext uri="{FF2B5EF4-FFF2-40B4-BE49-F238E27FC236}">
+                <a16:creationId xmlns:a16="http://schemas.microsoft.com/office/drawing/2014/main" id="{C4311BF7-2C6D-1779-E16C-0934D704B2A6}"/>
+              </a:ext>
+            </a:extLst>
+          </p:cNvPr>
+          <p:cNvSpPr txBox="1"/>
+          <p:nvPr/>
+        </p:nvSpPr>
+        <p:spPr>
+          <a:xfrm>
+            <a:off x="203077" y="916943"/>
+            <a:ext cx="1752295" cy="346249"/>
+          </a:xfrm>
+          <a:prstGeom prst="rect">
+            <a:avLst/>
+          </a:prstGeom>
+          <a:noFill/>
+        </p:spPr>
+        <p:txBody>
+          <a:bodyPr wrap="square" lIns="135000" rIns="67500" rtlCol="0">
+            <a:spAutoFit/>
+          </a:bodyPr>
+          <a:lstStyle/>
+          <a:p>
+            <a:r>
+              <a:rPr lang="ko-KR" altLang="en-US" sz="825" dirty="0">
+                <a:solidFill>
+                  <a:schemeClr val="bg1">
+                    <a:lumMod val="65000"/>
+                  </a:schemeClr>
+                </a:solidFill>
+                <a:latin typeface="Pretendard" panose="02000503000000020004" pitchFamily="2" charset="-127"/>
+                <a:ea typeface="Pretendard" panose="02000503000000020004" pitchFamily="2" charset="-127"/>
+                <a:cs typeface="Pretendard" panose="02000503000000020004" pitchFamily="2" charset="-127"/>
+              </a:rPr>
+              <a:t>버스 정류장의 </a:t>
+            </a:r>
+            <a:r>
+              <a:rPr lang="ko-KR" altLang="en-US" sz="825" dirty="0" err="1">
+                <a:solidFill>
+                  <a:schemeClr val="bg1">
+                    <a:lumMod val="65000"/>
+                  </a:schemeClr>
+                </a:solidFill>
+                <a:latin typeface="Pretendard" panose="02000503000000020004" pitchFamily="2" charset="-127"/>
+                <a:ea typeface="Pretendard" panose="02000503000000020004" pitchFamily="2" charset="-127"/>
+                <a:cs typeface="Pretendard" panose="02000503000000020004" pitchFamily="2" charset="-127"/>
+              </a:rPr>
+              <a:t>승하차</a:t>
+            </a:r>
+            <a:r>
+              <a:rPr lang="ko-KR" altLang="en-US" sz="825" dirty="0">
+                <a:solidFill>
+                  <a:schemeClr val="bg1">
+                    <a:lumMod val="65000"/>
+                  </a:schemeClr>
+                </a:solidFill>
+                <a:latin typeface="Pretendard" panose="02000503000000020004" pitchFamily="2" charset="-127"/>
+                <a:ea typeface="Pretendard" panose="02000503000000020004" pitchFamily="2" charset="-127"/>
+                <a:cs typeface="Pretendard" panose="02000503000000020004" pitchFamily="2" charset="-127"/>
+              </a:rPr>
+              <a:t> 인원수를 저장하는 모델</a:t>
+            </a:r>
+            <a:endParaRPr lang="en-US" altLang="ko-KR" sz="825" dirty="0">
+              <a:solidFill>
+                <a:schemeClr val="bg1">
+                  <a:lumMod val="65000"/>
+                </a:schemeClr>
+              </a:solidFill>
+              <a:latin typeface="Pretendard" panose="02000503000000020004" pitchFamily="2" charset="-127"/>
+              <a:ea typeface="Pretendard" panose="02000503000000020004" pitchFamily="2" charset="-127"/>
+              <a:cs typeface="Pretendard" panose="02000503000000020004" pitchFamily="2" charset="-127"/>
+            </a:endParaRPr>
+          </a:p>
+        </p:txBody>
+      </p:sp>
+      <p:sp>
+        <p:nvSpPr>
+          <p:cNvPr id="41" name="Rectangle 40">
+            <a:extLst>
+              <a:ext uri="{FF2B5EF4-FFF2-40B4-BE49-F238E27FC236}">
+                <a16:creationId xmlns:a16="http://schemas.microsoft.com/office/drawing/2014/main" id="{91647604-D8FA-0203-679C-D19F87C30193}"/>
+              </a:ext>
+            </a:extLst>
+          </p:cNvPr>
+          <p:cNvSpPr/>
+          <p:nvPr/>
+        </p:nvSpPr>
+        <p:spPr>
+          <a:xfrm flipH="1">
+            <a:off x="308601" y="1385065"/>
+            <a:ext cx="1536300" cy="761400"/>
+          </a:xfrm>
+          <a:prstGeom prst="rect">
+            <a:avLst/>
+          </a:prstGeom>
+          <a:solidFill>
+            <a:schemeClr val="bg2"/>
+          </a:solidFill>
+          <a:ln w="12700">
+            <a:solidFill>
+              <a:schemeClr val="bg2">
+                <a:lumMod val="90000"/>
+              </a:schemeClr>
+            </a:solidFill>
+          </a:ln>
+        </p:spPr>
+        <p:style>
+          <a:lnRef idx="2">
+            <a:schemeClr val="accent1">
+              <a:shade val="15000"/>
+            </a:schemeClr>
+          </a:lnRef>
+          <a:fillRef idx="1">
+            <a:schemeClr val="accent1"/>
+          </a:fillRef>
+          <a:effectRef idx="0">
+            <a:schemeClr val="accent1"/>
+          </a:effectRef>
+          <a:fontRef idx="minor">
+            <a:schemeClr val="lt1"/>
+          </a:fontRef>
+        </p:style>
+        <p:txBody>
+          <a:bodyPr rtlCol="0" anchor="ctr"/>
+          <a:lstStyle/>
+          <a:p>
+            <a:pPr algn="ctr"/>
+            <a:endParaRPr lang="en-KR" sz="1350" dirty="0"/>
+          </a:p>
+        </p:txBody>
+      </p:sp>
+      <p:sp>
+        <p:nvSpPr>
+          <p:cNvPr id="42" name="Rectangle 41">
+            <a:extLst>
+              <a:ext uri="{FF2B5EF4-FFF2-40B4-BE49-F238E27FC236}">
+                <a16:creationId xmlns:a16="http://schemas.microsoft.com/office/drawing/2014/main" id="{33E44B06-56BB-B6FD-4ECE-0687A59BF422}"/>
+              </a:ext>
+            </a:extLst>
+          </p:cNvPr>
+          <p:cNvSpPr/>
+          <p:nvPr/>
+        </p:nvSpPr>
+        <p:spPr>
+          <a:xfrm>
+            <a:off x="203076" y="607501"/>
+            <a:ext cx="1752296" cy="5146064"/>
+          </a:xfrm>
+          <a:prstGeom prst="rect">
+            <a:avLst/>
+          </a:prstGeom>
+          <a:noFill/>
+          <a:ln w="12700">
+            <a:solidFill>
+              <a:schemeClr val="bg2">
+                <a:lumMod val="90000"/>
+              </a:schemeClr>
+            </a:solidFill>
+          </a:ln>
+        </p:spPr>
+        <p:style>
+          <a:lnRef idx="2">
+            <a:schemeClr val="accent1">
+              <a:shade val="15000"/>
+            </a:schemeClr>
+          </a:lnRef>
+          <a:fillRef idx="1">
+            <a:schemeClr val="accent1"/>
+          </a:fillRef>
+          <a:effectRef idx="0">
+            <a:schemeClr val="accent1"/>
+          </a:effectRef>
+          <a:fontRef idx="minor">
+            <a:schemeClr val="lt1"/>
+          </a:fontRef>
+        </p:style>
+        <p:txBody>
+          <a:bodyPr rtlCol="0" anchor="ctr"/>
+          <a:lstStyle/>
+          <a:p>
+            <a:pPr algn="ctr"/>
+            <a:endParaRPr lang="en-KR" sz="1350" dirty="0"/>
+          </a:p>
+        </p:txBody>
+      </p:sp>
+      <p:sp>
+        <p:nvSpPr>
+          <p:cNvPr id="43" name="TextBox 42">
+            <a:extLst>
+              <a:ext uri="{FF2B5EF4-FFF2-40B4-BE49-F238E27FC236}">
+                <a16:creationId xmlns:a16="http://schemas.microsoft.com/office/drawing/2014/main" id="{833E7694-6579-3719-BD18-372EB8379E01}"/>
+              </a:ext>
+            </a:extLst>
+          </p:cNvPr>
+          <p:cNvSpPr txBox="1"/>
+          <p:nvPr/>
+        </p:nvSpPr>
+        <p:spPr>
+          <a:xfrm>
+            <a:off x="306127" y="1387173"/>
+            <a:ext cx="786817" cy="357518"/>
+          </a:xfrm>
+          <a:prstGeom prst="rect">
+            <a:avLst/>
+          </a:prstGeom>
+          <a:noFill/>
+        </p:spPr>
+        <p:txBody>
+          <a:bodyPr wrap="square" lIns="67500" tIns="67500" rIns="67500" bIns="35100" rtlCol="0">
+            <a:spAutoFit/>
+          </a:bodyPr>
+          <a:lstStyle/>
+          <a:p>
+            <a:r>
+              <a:rPr lang="en-US" sz="825" b="1" dirty="0" err="1">
+                <a:solidFill>
+                  <a:schemeClr val="tx1">
+                    <a:lumMod val="85000"/>
+                    <a:lumOff val="15000"/>
+                  </a:schemeClr>
+                </a:solidFill>
+                <a:latin typeface="Cascadia Code" panose="020B0609020000020004" pitchFamily="34" charset="0"/>
+                <a:ea typeface="Cascadia Code" panose="020B0609020000020004" pitchFamily="34" charset="0"/>
+                <a:cs typeface="Cascadia Code" panose="020B0609020000020004" pitchFamily="34" charset="0"/>
+              </a:rPr>
+              <a:t>busstop_id</a:t>
+            </a:r>
+            <a:endParaRPr lang="en-US" sz="825" b="1" dirty="0">
+              <a:solidFill>
+                <a:schemeClr val="tx1">
+                  <a:lumMod val="85000"/>
+                  <a:lumOff val="15000"/>
+                </a:schemeClr>
+              </a:solidFill>
+              <a:latin typeface="Cascadia Code" panose="020B0609020000020004" pitchFamily="34" charset="0"/>
+              <a:ea typeface="Cascadia Code" panose="020B0609020000020004" pitchFamily="34" charset="0"/>
+              <a:cs typeface="Cascadia Code" panose="020B0609020000020004" pitchFamily="34" charset="0"/>
+            </a:endParaRPr>
+          </a:p>
+          <a:p>
+            <a:r>
+              <a:rPr lang="en-KR" sz="825" b="1" dirty="0">
+                <a:solidFill>
+                  <a:srgbClr val="44B29C"/>
+                </a:solidFill>
+                <a:latin typeface="Cascadia Code" panose="020B0609020000020004" pitchFamily="34" charset="0"/>
+                <a:ea typeface="Cascadia Code" panose="020B0609020000020004" pitchFamily="34" charset="0"/>
+                <a:cs typeface="Cascadia Code" panose="020B0609020000020004" pitchFamily="34" charset="0"/>
+              </a:rPr>
+              <a:t>CharField</a:t>
+            </a:r>
+          </a:p>
+        </p:txBody>
+      </p:sp>
+      <p:sp>
+        <p:nvSpPr>
+          <p:cNvPr id="44" name="TextBox 43">
+            <a:extLst>
+              <a:ext uri="{FF2B5EF4-FFF2-40B4-BE49-F238E27FC236}">
+                <a16:creationId xmlns:a16="http://schemas.microsoft.com/office/drawing/2014/main" id="{40CAFE3B-F889-B68B-7811-19B08DC84FE4}"/>
+              </a:ext>
+            </a:extLst>
+          </p:cNvPr>
+          <p:cNvSpPr txBox="1"/>
+          <p:nvPr/>
+        </p:nvSpPr>
+        <p:spPr>
+          <a:xfrm>
+            <a:off x="306126" y="1767774"/>
+            <a:ext cx="1541476" cy="368241"/>
+          </a:xfrm>
+          <a:prstGeom prst="rect">
+            <a:avLst/>
+          </a:prstGeom>
+          <a:noFill/>
+        </p:spPr>
+        <p:txBody>
+          <a:bodyPr wrap="square" lIns="67500" rIns="67500" bIns="67500" rtlCol="0">
+            <a:spAutoFit/>
+          </a:bodyPr>
+          <a:lstStyle/>
+          <a:p>
+            <a:r>
+              <a:rPr lang="ko-KR" altLang="en-US" sz="825" dirty="0">
+                <a:solidFill>
+                  <a:schemeClr val="bg1">
+                    <a:lumMod val="65000"/>
+                  </a:schemeClr>
+                </a:solidFill>
+                <a:latin typeface="Pretendard" panose="02000503000000020004" pitchFamily="2" charset="-127"/>
+                <a:ea typeface="Pretendard" panose="02000503000000020004" pitchFamily="2" charset="-127"/>
+                <a:cs typeface="Pretendard" panose="02000503000000020004" pitchFamily="2" charset="-127"/>
+              </a:rPr>
+              <a:t>하나의 정류장 고유</a:t>
+            </a:r>
+            <a:r>
+              <a:rPr lang="en-US" altLang="ko-KR" sz="825" dirty="0">
+                <a:solidFill>
+                  <a:schemeClr val="bg1">
+                    <a:lumMod val="65000"/>
+                  </a:schemeClr>
+                </a:solidFill>
+                <a:latin typeface="Pretendard" panose="02000503000000020004" pitchFamily="2" charset="-127"/>
+                <a:ea typeface="Pretendard" panose="02000503000000020004" pitchFamily="2" charset="-127"/>
+                <a:cs typeface="Pretendard" panose="02000503000000020004" pitchFamily="2" charset="-127"/>
+              </a:rPr>
+              <a:t> ID.</a:t>
+            </a:r>
+          </a:p>
+          <a:p>
+            <a:r>
+              <a:rPr lang="en-US" altLang="ko-KR" sz="825" dirty="0">
+                <a:solidFill>
+                  <a:schemeClr val="bg1">
+                    <a:lumMod val="65000"/>
+                  </a:schemeClr>
+                </a:solidFill>
+                <a:latin typeface="Pretendard" panose="02000503000000020004" pitchFamily="2" charset="-127"/>
+                <a:ea typeface="Pretendard" panose="02000503000000020004" pitchFamily="2" charset="-127"/>
+                <a:cs typeface="Pretendard" panose="02000503000000020004" pitchFamily="2" charset="-127"/>
+              </a:rPr>
+              <a:t>(</a:t>
+            </a:r>
+            <a:r>
+              <a:rPr lang="ko-KR" altLang="en-US" sz="825" dirty="0">
+                <a:solidFill>
+                  <a:schemeClr val="bg1">
+                    <a:lumMod val="65000"/>
+                  </a:schemeClr>
+                </a:solidFill>
+                <a:latin typeface="Pretendard" panose="02000503000000020004" pitchFamily="2" charset="-127"/>
+                <a:ea typeface="Pretendard" panose="02000503000000020004" pitchFamily="2" charset="-127"/>
+                <a:cs typeface="Pretendard" panose="02000503000000020004" pitchFamily="2" charset="-127"/>
+              </a:rPr>
+              <a:t>최대 길이 </a:t>
+            </a:r>
+            <a:r>
+              <a:rPr lang="en-US" altLang="ko-KR" sz="825" dirty="0">
+                <a:solidFill>
+                  <a:schemeClr val="bg1">
+                    <a:lumMod val="65000"/>
+                  </a:schemeClr>
+                </a:solidFill>
+                <a:latin typeface="Pretendard" panose="02000503000000020004" pitchFamily="2" charset="-127"/>
+                <a:ea typeface="Pretendard" panose="02000503000000020004" pitchFamily="2" charset="-127"/>
+                <a:cs typeface="Pretendard" panose="02000503000000020004" pitchFamily="2" charset="-127"/>
+              </a:rPr>
+              <a:t>20</a:t>
+            </a:r>
+            <a:r>
+              <a:rPr lang="ko-KR" altLang="en-US" sz="825" dirty="0">
+                <a:solidFill>
+                  <a:schemeClr val="bg1">
+                    <a:lumMod val="65000"/>
+                  </a:schemeClr>
+                </a:solidFill>
+                <a:latin typeface="Pretendard" panose="02000503000000020004" pitchFamily="2" charset="-127"/>
+                <a:ea typeface="Pretendard" panose="02000503000000020004" pitchFamily="2" charset="-127"/>
+                <a:cs typeface="Pretendard" panose="02000503000000020004" pitchFamily="2" charset="-127"/>
+              </a:rPr>
+              <a:t>자</a:t>
+            </a:r>
+            <a:r>
+              <a:rPr lang="en-US" altLang="ko-KR" sz="825" dirty="0">
+                <a:solidFill>
+                  <a:schemeClr val="bg1">
+                    <a:lumMod val="65000"/>
+                  </a:schemeClr>
+                </a:solidFill>
+                <a:latin typeface="Pretendard" panose="02000503000000020004" pitchFamily="2" charset="-127"/>
+                <a:ea typeface="Pretendard" panose="02000503000000020004" pitchFamily="2" charset="-127"/>
+                <a:cs typeface="Pretendard" panose="02000503000000020004" pitchFamily="2" charset="-127"/>
+              </a:rPr>
+              <a:t>,</a:t>
+            </a:r>
+            <a:r>
+              <a:rPr lang="ko-KR" altLang="en-US" sz="825" dirty="0">
+                <a:solidFill>
+                  <a:schemeClr val="bg1">
+                    <a:lumMod val="65000"/>
+                  </a:schemeClr>
+                </a:solidFill>
+                <a:latin typeface="Pretendard" panose="02000503000000020004" pitchFamily="2" charset="-127"/>
+                <a:ea typeface="Pretendard" panose="02000503000000020004" pitchFamily="2" charset="-127"/>
+                <a:cs typeface="Pretendard" panose="02000503000000020004" pitchFamily="2" charset="-127"/>
+              </a:rPr>
+              <a:t> 중복 가능</a:t>
+            </a:r>
+            <a:r>
+              <a:rPr lang="en-US" altLang="ko-KR" sz="825" dirty="0">
+                <a:solidFill>
+                  <a:schemeClr val="bg1">
+                    <a:lumMod val="65000"/>
+                  </a:schemeClr>
+                </a:solidFill>
+                <a:latin typeface="Pretendard" panose="02000503000000020004" pitchFamily="2" charset="-127"/>
+                <a:ea typeface="Pretendard" panose="02000503000000020004" pitchFamily="2" charset="-127"/>
+                <a:cs typeface="Pretendard" panose="02000503000000020004" pitchFamily="2" charset="-127"/>
+              </a:rPr>
+              <a:t>)</a:t>
+            </a:r>
+            <a:endParaRPr lang="en-KR" sz="825" dirty="0">
+              <a:solidFill>
+                <a:schemeClr val="bg1">
+                  <a:lumMod val="65000"/>
+                </a:schemeClr>
+              </a:solidFill>
+              <a:latin typeface="Pretendard" panose="02000503000000020004" pitchFamily="2" charset="-127"/>
+              <a:ea typeface="Pretendard" panose="02000503000000020004" pitchFamily="2" charset="-127"/>
+              <a:cs typeface="Pretendard" panose="02000503000000020004" pitchFamily="2" charset="-127"/>
+            </a:endParaRPr>
+          </a:p>
+        </p:txBody>
+      </p:sp>
+      <p:sp>
+        <p:nvSpPr>
+          <p:cNvPr id="45" name="Rectangle 44">
+            <a:extLst>
+              <a:ext uri="{FF2B5EF4-FFF2-40B4-BE49-F238E27FC236}">
+                <a16:creationId xmlns:a16="http://schemas.microsoft.com/office/drawing/2014/main" id="{15DA5027-91B6-88C2-3834-7D40C92F5656}"/>
+              </a:ext>
+            </a:extLst>
+          </p:cNvPr>
+          <p:cNvSpPr/>
+          <p:nvPr/>
+        </p:nvSpPr>
+        <p:spPr>
+          <a:xfrm flipH="1">
+            <a:off x="308601" y="2250610"/>
+            <a:ext cx="1539000" cy="761400"/>
+          </a:xfrm>
+          <a:prstGeom prst="rect">
+            <a:avLst/>
+          </a:prstGeom>
+          <a:solidFill>
+            <a:schemeClr val="bg2"/>
+          </a:solidFill>
+          <a:ln w="12700">
+            <a:solidFill>
+              <a:schemeClr val="bg2">
+                <a:lumMod val="90000"/>
+              </a:schemeClr>
+            </a:solidFill>
+          </a:ln>
+        </p:spPr>
+        <p:style>
+          <a:lnRef idx="2">
+            <a:schemeClr val="accent1">
+              <a:shade val="15000"/>
+            </a:schemeClr>
+          </a:lnRef>
+          <a:fillRef idx="1">
+            <a:schemeClr val="accent1"/>
+          </a:fillRef>
+          <a:effectRef idx="0">
+            <a:schemeClr val="accent1"/>
+          </a:effectRef>
+          <a:fontRef idx="minor">
+            <a:schemeClr val="lt1"/>
+          </a:fontRef>
+        </p:style>
+        <p:txBody>
+          <a:bodyPr rtlCol="0" anchor="ctr"/>
+          <a:lstStyle/>
+          <a:p>
+            <a:pPr algn="ctr"/>
+            <a:endParaRPr lang="en-KR" sz="1350" dirty="0"/>
+          </a:p>
+        </p:txBody>
+      </p:sp>
+      <p:sp>
+        <p:nvSpPr>
+          <p:cNvPr id="46" name="TextBox 45">
+            <a:extLst>
+              <a:ext uri="{FF2B5EF4-FFF2-40B4-BE49-F238E27FC236}">
+                <a16:creationId xmlns:a16="http://schemas.microsoft.com/office/drawing/2014/main" id="{2D0F2A3A-B56B-42A6-3D80-7D2D9990AE3E}"/>
+              </a:ext>
+            </a:extLst>
+          </p:cNvPr>
+          <p:cNvSpPr txBox="1"/>
+          <p:nvPr/>
+        </p:nvSpPr>
+        <p:spPr>
+          <a:xfrm>
+            <a:off x="306125" y="2252718"/>
+            <a:ext cx="988796" cy="357518"/>
+          </a:xfrm>
+          <a:prstGeom prst="rect">
+            <a:avLst/>
+          </a:prstGeom>
+          <a:noFill/>
+        </p:spPr>
+        <p:txBody>
+          <a:bodyPr wrap="square" lIns="67500" tIns="67500" rIns="67500" bIns="35100" rtlCol="0">
+            <a:spAutoFit/>
+          </a:bodyPr>
+          <a:lstStyle/>
+          <a:p>
+            <a:r>
+              <a:rPr lang="en-US" sz="825" b="1" dirty="0" err="1">
+                <a:solidFill>
+                  <a:schemeClr val="tx1">
+                    <a:lumMod val="85000"/>
+                    <a:lumOff val="15000"/>
+                  </a:schemeClr>
+                </a:solidFill>
+                <a:latin typeface="Cascadia Code" panose="020B0609020000020004" pitchFamily="34" charset="0"/>
+                <a:ea typeface="Cascadia Code" panose="020B0609020000020004" pitchFamily="34" charset="0"/>
+                <a:cs typeface="Cascadia Code" panose="020B0609020000020004" pitchFamily="34" charset="0"/>
+              </a:rPr>
+              <a:t>bus_id</a:t>
+            </a:r>
+            <a:endParaRPr lang="en-US" sz="825" b="1" dirty="0">
+              <a:solidFill>
+                <a:schemeClr val="tx1">
+                  <a:lumMod val="85000"/>
+                  <a:lumOff val="15000"/>
+                </a:schemeClr>
+              </a:solidFill>
+              <a:latin typeface="Cascadia Code" panose="020B0609020000020004" pitchFamily="34" charset="0"/>
+              <a:ea typeface="Cascadia Code" panose="020B0609020000020004" pitchFamily="34" charset="0"/>
+              <a:cs typeface="Cascadia Code" panose="020B0609020000020004" pitchFamily="34" charset="0"/>
+            </a:endParaRPr>
+          </a:p>
+          <a:p>
+            <a:r>
+              <a:rPr lang="en-KR" sz="825" b="1" dirty="0">
+                <a:solidFill>
+                  <a:srgbClr val="44B29C"/>
+                </a:solidFill>
+                <a:latin typeface="Cascadia Code" panose="020B0609020000020004" pitchFamily="34" charset="0"/>
+                <a:ea typeface="Cascadia Code" panose="020B0609020000020004" pitchFamily="34" charset="0"/>
+                <a:cs typeface="Cascadia Code" panose="020B0609020000020004" pitchFamily="34" charset="0"/>
+              </a:rPr>
+              <a:t>CharField</a:t>
+            </a:r>
+          </a:p>
+        </p:txBody>
+      </p:sp>
+      <p:sp>
+        <p:nvSpPr>
+          <p:cNvPr id="47" name="TextBox 46">
+            <a:extLst>
+              <a:ext uri="{FF2B5EF4-FFF2-40B4-BE49-F238E27FC236}">
+                <a16:creationId xmlns:a16="http://schemas.microsoft.com/office/drawing/2014/main" id="{027FE57F-695E-1B02-CB20-061DCED34B61}"/>
+              </a:ext>
+            </a:extLst>
+          </p:cNvPr>
+          <p:cNvSpPr txBox="1"/>
+          <p:nvPr/>
+        </p:nvSpPr>
+        <p:spPr>
+          <a:xfrm>
+            <a:off x="308600" y="2633319"/>
+            <a:ext cx="1539000" cy="368241"/>
+          </a:xfrm>
+          <a:prstGeom prst="rect">
+            <a:avLst/>
+          </a:prstGeom>
+          <a:noFill/>
+        </p:spPr>
+        <p:txBody>
+          <a:bodyPr wrap="square" lIns="67500" rIns="67500" bIns="67500" rtlCol="0">
+            <a:spAutoFit/>
+          </a:bodyPr>
+          <a:lstStyle/>
+          <a:p>
+            <a:r>
+              <a:rPr lang="ko-KR" altLang="en-US" sz="825" dirty="0">
+                <a:solidFill>
+                  <a:schemeClr val="bg1">
+                    <a:lumMod val="65000"/>
+                  </a:schemeClr>
+                </a:solidFill>
+                <a:latin typeface="Pretendard" panose="02000503000000020004" pitchFamily="2" charset="-127"/>
+                <a:ea typeface="Pretendard" panose="02000503000000020004" pitchFamily="2" charset="-127"/>
+                <a:cs typeface="Pretendard" panose="02000503000000020004" pitchFamily="2" charset="-127"/>
+              </a:rPr>
+              <a:t>하나의 버스 노선 고유 </a:t>
+            </a:r>
+            <a:r>
+              <a:rPr lang="en-US" altLang="ko-KR" sz="825" dirty="0">
+                <a:solidFill>
+                  <a:schemeClr val="bg1">
+                    <a:lumMod val="65000"/>
+                  </a:schemeClr>
+                </a:solidFill>
+                <a:latin typeface="Pretendard" panose="02000503000000020004" pitchFamily="2" charset="-127"/>
+                <a:ea typeface="Pretendard" panose="02000503000000020004" pitchFamily="2" charset="-127"/>
+                <a:cs typeface="Pretendard" panose="02000503000000020004" pitchFamily="2" charset="-127"/>
+              </a:rPr>
+              <a:t>ID.</a:t>
+            </a:r>
+          </a:p>
+          <a:p>
+            <a:r>
+              <a:rPr lang="en-US" altLang="ko-KR" sz="825" dirty="0">
+                <a:solidFill>
+                  <a:schemeClr val="bg1">
+                    <a:lumMod val="65000"/>
+                  </a:schemeClr>
+                </a:solidFill>
+                <a:latin typeface="Pretendard" panose="02000503000000020004" pitchFamily="2" charset="-127"/>
+                <a:ea typeface="Pretendard" panose="02000503000000020004" pitchFamily="2" charset="-127"/>
+                <a:cs typeface="Pretendard" panose="02000503000000020004" pitchFamily="2" charset="-127"/>
+              </a:rPr>
+              <a:t>(</a:t>
+            </a:r>
+            <a:r>
+              <a:rPr lang="ko-KR" altLang="en-US" sz="825" dirty="0">
+                <a:solidFill>
+                  <a:schemeClr val="bg1">
+                    <a:lumMod val="65000"/>
+                  </a:schemeClr>
+                </a:solidFill>
+                <a:latin typeface="Pretendard" panose="02000503000000020004" pitchFamily="2" charset="-127"/>
+                <a:ea typeface="Pretendard" panose="02000503000000020004" pitchFamily="2" charset="-127"/>
+                <a:cs typeface="Pretendard" panose="02000503000000020004" pitchFamily="2" charset="-127"/>
+              </a:rPr>
+              <a:t>최대 길이 </a:t>
+            </a:r>
+            <a:r>
+              <a:rPr lang="en-US" altLang="ko-KR" sz="825" dirty="0">
+                <a:solidFill>
+                  <a:schemeClr val="bg1">
+                    <a:lumMod val="65000"/>
+                  </a:schemeClr>
+                </a:solidFill>
+                <a:latin typeface="Pretendard" panose="02000503000000020004" pitchFamily="2" charset="-127"/>
+                <a:ea typeface="Pretendard" panose="02000503000000020004" pitchFamily="2" charset="-127"/>
+                <a:cs typeface="Pretendard" panose="02000503000000020004" pitchFamily="2" charset="-127"/>
+              </a:rPr>
+              <a:t>20</a:t>
+            </a:r>
+            <a:r>
+              <a:rPr lang="ko-KR" altLang="en-US" sz="825" dirty="0">
+                <a:solidFill>
+                  <a:schemeClr val="bg1">
+                    <a:lumMod val="65000"/>
+                  </a:schemeClr>
+                </a:solidFill>
+                <a:latin typeface="Pretendard" panose="02000503000000020004" pitchFamily="2" charset="-127"/>
+                <a:ea typeface="Pretendard" panose="02000503000000020004" pitchFamily="2" charset="-127"/>
+                <a:cs typeface="Pretendard" panose="02000503000000020004" pitchFamily="2" charset="-127"/>
+              </a:rPr>
+              <a:t>자</a:t>
+            </a:r>
+            <a:r>
+              <a:rPr lang="en-US" altLang="ko-KR" sz="825" dirty="0">
+                <a:solidFill>
+                  <a:schemeClr val="bg1">
+                    <a:lumMod val="65000"/>
+                  </a:schemeClr>
+                </a:solidFill>
+                <a:latin typeface="Pretendard" panose="02000503000000020004" pitchFamily="2" charset="-127"/>
+                <a:ea typeface="Pretendard" panose="02000503000000020004" pitchFamily="2" charset="-127"/>
+                <a:cs typeface="Pretendard" panose="02000503000000020004" pitchFamily="2" charset="-127"/>
+              </a:rPr>
+              <a:t>, </a:t>
+            </a:r>
+            <a:r>
+              <a:rPr lang="ko-KR" altLang="en-US" sz="825" dirty="0">
+                <a:solidFill>
+                  <a:schemeClr val="bg1">
+                    <a:lumMod val="65000"/>
+                  </a:schemeClr>
+                </a:solidFill>
+                <a:latin typeface="Pretendard" panose="02000503000000020004" pitchFamily="2" charset="-127"/>
+                <a:ea typeface="Pretendard" panose="02000503000000020004" pitchFamily="2" charset="-127"/>
+                <a:cs typeface="Pretendard" panose="02000503000000020004" pitchFamily="2" charset="-127"/>
+              </a:rPr>
+              <a:t>중복 가능</a:t>
+            </a:r>
+            <a:r>
+              <a:rPr lang="en-US" altLang="ko-KR" sz="825" dirty="0">
+                <a:solidFill>
+                  <a:schemeClr val="bg1">
+                    <a:lumMod val="65000"/>
+                  </a:schemeClr>
+                </a:solidFill>
+                <a:latin typeface="Pretendard" panose="02000503000000020004" pitchFamily="2" charset="-127"/>
+                <a:ea typeface="Pretendard" panose="02000503000000020004" pitchFamily="2" charset="-127"/>
+                <a:cs typeface="Pretendard" panose="02000503000000020004" pitchFamily="2" charset="-127"/>
+              </a:rPr>
+              <a:t>)</a:t>
+            </a:r>
+            <a:endParaRPr lang="en-KR" sz="825" dirty="0">
+              <a:solidFill>
+                <a:schemeClr val="bg1">
+                  <a:lumMod val="65000"/>
+                </a:schemeClr>
+              </a:solidFill>
+              <a:latin typeface="Pretendard" panose="02000503000000020004" pitchFamily="2" charset="-127"/>
+              <a:ea typeface="Pretendard" panose="02000503000000020004" pitchFamily="2" charset="-127"/>
+              <a:cs typeface="Pretendard" panose="02000503000000020004" pitchFamily="2" charset="-127"/>
+            </a:endParaRPr>
+          </a:p>
+        </p:txBody>
+      </p:sp>
+      <p:sp>
+        <p:nvSpPr>
+          <p:cNvPr id="4" name="Rectangle 3">
+            <a:extLst>
+              <a:ext uri="{FF2B5EF4-FFF2-40B4-BE49-F238E27FC236}">
+                <a16:creationId xmlns:a16="http://schemas.microsoft.com/office/drawing/2014/main" id="{FC1D68FD-3465-73C5-422D-DBCE717FC8F9}"/>
+              </a:ext>
+            </a:extLst>
+          </p:cNvPr>
+          <p:cNvSpPr/>
+          <p:nvPr/>
+        </p:nvSpPr>
+        <p:spPr>
+          <a:xfrm flipH="1">
+            <a:off x="306125" y="3125104"/>
+            <a:ext cx="1539000" cy="761400"/>
+          </a:xfrm>
+          <a:prstGeom prst="rect">
+            <a:avLst/>
+          </a:prstGeom>
+          <a:solidFill>
+            <a:schemeClr val="bg2"/>
+          </a:solidFill>
+          <a:ln w="12700">
+            <a:solidFill>
+              <a:schemeClr val="bg2">
+                <a:lumMod val="90000"/>
+              </a:schemeClr>
+            </a:solidFill>
+          </a:ln>
+        </p:spPr>
+        <p:style>
+          <a:lnRef idx="2">
+            <a:schemeClr val="accent1">
+              <a:shade val="15000"/>
+            </a:schemeClr>
+          </a:lnRef>
+          <a:fillRef idx="1">
+            <a:schemeClr val="accent1"/>
+          </a:fillRef>
+          <a:effectRef idx="0">
+            <a:schemeClr val="accent1"/>
+          </a:effectRef>
+          <a:fontRef idx="minor">
+            <a:schemeClr val="lt1"/>
+          </a:fontRef>
+        </p:style>
+        <p:txBody>
+          <a:bodyPr rtlCol="0" anchor="ctr"/>
+          <a:lstStyle/>
+          <a:p>
+            <a:pPr algn="ctr"/>
+            <a:endParaRPr lang="en-KR" sz="1350" dirty="0"/>
+          </a:p>
+        </p:txBody>
+      </p:sp>
+      <p:sp>
+        <p:nvSpPr>
+          <p:cNvPr id="8" name="TextBox 7">
+            <a:extLst>
+              <a:ext uri="{FF2B5EF4-FFF2-40B4-BE49-F238E27FC236}">
+                <a16:creationId xmlns:a16="http://schemas.microsoft.com/office/drawing/2014/main" id="{696E0B40-A2F2-AEA3-87A1-C58228585184}"/>
+              </a:ext>
+            </a:extLst>
+          </p:cNvPr>
+          <p:cNvSpPr txBox="1"/>
+          <p:nvPr/>
+        </p:nvSpPr>
+        <p:spPr>
+          <a:xfrm>
+            <a:off x="303649" y="3127212"/>
+            <a:ext cx="988796" cy="357518"/>
+          </a:xfrm>
+          <a:prstGeom prst="rect">
+            <a:avLst/>
+          </a:prstGeom>
+          <a:noFill/>
+        </p:spPr>
+        <p:txBody>
+          <a:bodyPr wrap="square" lIns="67500" tIns="67500" rIns="67500" bIns="35100" rtlCol="0">
+            <a:spAutoFit/>
+          </a:bodyPr>
+          <a:lstStyle/>
+          <a:p>
+            <a:r>
+              <a:rPr lang="en-US" sz="825" b="1" dirty="0">
+                <a:solidFill>
+                  <a:schemeClr val="tx1">
+                    <a:lumMod val="85000"/>
+                    <a:lumOff val="15000"/>
+                  </a:schemeClr>
+                </a:solidFill>
+                <a:latin typeface="Cascadia Code" panose="020B0609020000020004" pitchFamily="34" charset="0"/>
+                <a:ea typeface="Cascadia Code" panose="020B0609020000020004" pitchFamily="34" charset="0"/>
+                <a:cs typeface="Cascadia Code" panose="020B0609020000020004" pitchFamily="34" charset="0"/>
+              </a:rPr>
+              <a:t>timestamp</a:t>
+            </a:r>
+          </a:p>
+          <a:p>
+            <a:r>
+              <a:rPr lang="en-KR" sz="825" b="1" dirty="0">
+                <a:solidFill>
+                  <a:srgbClr val="44B29C"/>
+                </a:solidFill>
+                <a:latin typeface="Cascadia Code" panose="020B0609020000020004" pitchFamily="34" charset="0"/>
+                <a:ea typeface="Cascadia Code" panose="020B0609020000020004" pitchFamily="34" charset="0"/>
+                <a:cs typeface="Cascadia Code" panose="020B0609020000020004" pitchFamily="34" charset="0"/>
+              </a:rPr>
+              <a:t>DateTimeField</a:t>
+            </a:r>
+          </a:p>
+        </p:txBody>
+      </p:sp>
+      <p:sp>
+        <p:nvSpPr>
+          <p:cNvPr id="10" name="TextBox 9">
+            <a:extLst>
+              <a:ext uri="{FF2B5EF4-FFF2-40B4-BE49-F238E27FC236}">
+                <a16:creationId xmlns:a16="http://schemas.microsoft.com/office/drawing/2014/main" id="{3E9ADF64-914A-C1E9-CB18-72EE778027F3}"/>
+              </a:ext>
+            </a:extLst>
+          </p:cNvPr>
+          <p:cNvSpPr txBox="1"/>
+          <p:nvPr/>
+        </p:nvSpPr>
+        <p:spPr>
+          <a:xfrm>
+            <a:off x="306124" y="3507813"/>
+            <a:ext cx="1539000" cy="368241"/>
+          </a:xfrm>
+          <a:prstGeom prst="rect">
+            <a:avLst/>
+          </a:prstGeom>
+          <a:noFill/>
+        </p:spPr>
+        <p:txBody>
+          <a:bodyPr wrap="square" lIns="67500" rIns="67500" bIns="67500" rtlCol="0">
+            <a:spAutoFit/>
+          </a:bodyPr>
+          <a:lstStyle/>
+          <a:p>
+            <a:r>
+              <a:rPr lang="ko-KR" altLang="en-US" sz="825" dirty="0">
+                <a:solidFill>
+                  <a:schemeClr val="bg1">
+                    <a:lumMod val="65000"/>
+                  </a:schemeClr>
+                </a:solidFill>
+                <a:latin typeface="Pretendard" panose="02000503000000020004" pitchFamily="2" charset="-127"/>
+                <a:ea typeface="Pretendard" panose="02000503000000020004" pitchFamily="2" charset="-127"/>
+                <a:cs typeface="Pretendard" panose="02000503000000020004" pitchFamily="2" charset="-127"/>
+              </a:rPr>
+              <a:t>데이터가 수집된 기준 시간</a:t>
+            </a:r>
+            <a:r>
+              <a:rPr lang="en-US" altLang="ko-KR" sz="825" dirty="0">
+                <a:solidFill>
+                  <a:schemeClr val="bg1">
+                    <a:lumMod val="65000"/>
+                  </a:schemeClr>
+                </a:solidFill>
+                <a:latin typeface="Pretendard" panose="02000503000000020004" pitchFamily="2" charset="-127"/>
+                <a:ea typeface="Pretendard" panose="02000503000000020004" pitchFamily="2" charset="-127"/>
+                <a:cs typeface="Pretendard" panose="02000503000000020004" pitchFamily="2" charset="-127"/>
+              </a:rPr>
+              <a:t>.</a:t>
+            </a:r>
+          </a:p>
+          <a:p>
+            <a:r>
+              <a:rPr lang="en-US" altLang="ko-KR" sz="825" dirty="0">
+                <a:solidFill>
+                  <a:schemeClr val="bg1">
+                    <a:lumMod val="65000"/>
+                  </a:schemeClr>
+                </a:solidFill>
+                <a:latin typeface="Pretendard" panose="02000503000000020004" pitchFamily="2" charset="-127"/>
+                <a:ea typeface="Pretendard" panose="02000503000000020004" pitchFamily="2" charset="-127"/>
+                <a:cs typeface="Pretendard" panose="02000503000000020004" pitchFamily="2" charset="-127"/>
+              </a:rPr>
+              <a:t>(</a:t>
+            </a:r>
+            <a:r>
+              <a:rPr lang="ko-KR" altLang="en-US" sz="825" dirty="0">
+                <a:solidFill>
+                  <a:schemeClr val="bg1">
+                    <a:lumMod val="65000"/>
+                  </a:schemeClr>
+                </a:solidFill>
+                <a:latin typeface="Pretendard" panose="02000503000000020004" pitchFamily="2" charset="-127"/>
+                <a:ea typeface="Pretendard" panose="02000503000000020004" pitchFamily="2" charset="-127"/>
+                <a:cs typeface="Pretendard" panose="02000503000000020004" pitchFamily="2" charset="-127"/>
+              </a:rPr>
+              <a:t>날짜</a:t>
+            </a:r>
+            <a:r>
+              <a:rPr lang="en-US" altLang="ko-KR" sz="825" dirty="0">
+                <a:solidFill>
+                  <a:schemeClr val="bg1">
+                    <a:lumMod val="65000"/>
+                  </a:schemeClr>
+                </a:solidFill>
+                <a:latin typeface="Pretendard" panose="02000503000000020004" pitchFamily="2" charset="-127"/>
+                <a:ea typeface="Pretendard" panose="02000503000000020004" pitchFamily="2" charset="-127"/>
+                <a:cs typeface="Pretendard" panose="02000503000000020004" pitchFamily="2" charset="-127"/>
+              </a:rPr>
+              <a:t>/</a:t>
+            </a:r>
+            <a:r>
+              <a:rPr lang="ko-KR" altLang="en-US" sz="825" dirty="0">
+                <a:solidFill>
+                  <a:schemeClr val="bg1">
+                    <a:lumMod val="65000"/>
+                  </a:schemeClr>
+                </a:solidFill>
+                <a:latin typeface="Pretendard" panose="02000503000000020004" pitchFamily="2" charset="-127"/>
+                <a:ea typeface="Pretendard" panose="02000503000000020004" pitchFamily="2" charset="-127"/>
+                <a:cs typeface="Pretendard" panose="02000503000000020004" pitchFamily="2" charset="-127"/>
+              </a:rPr>
+              <a:t>시간 형식</a:t>
+            </a:r>
+            <a:r>
+              <a:rPr lang="en-US" altLang="ko-KR" sz="825" dirty="0">
+                <a:solidFill>
+                  <a:schemeClr val="bg1">
+                    <a:lumMod val="65000"/>
+                  </a:schemeClr>
+                </a:solidFill>
+                <a:latin typeface="Pretendard" panose="02000503000000020004" pitchFamily="2" charset="-127"/>
+                <a:ea typeface="Pretendard" panose="02000503000000020004" pitchFamily="2" charset="-127"/>
+                <a:cs typeface="Pretendard" panose="02000503000000020004" pitchFamily="2" charset="-127"/>
+              </a:rPr>
+              <a:t>)</a:t>
+            </a:r>
+            <a:endParaRPr lang="en-KR" sz="825" dirty="0">
+              <a:solidFill>
+                <a:schemeClr val="bg1">
+                  <a:lumMod val="65000"/>
+                </a:schemeClr>
+              </a:solidFill>
+              <a:latin typeface="Pretendard" panose="02000503000000020004" pitchFamily="2" charset="-127"/>
+              <a:ea typeface="Pretendard" panose="02000503000000020004" pitchFamily="2" charset="-127"/>
+              <a:cs typeface="Pretendard" panose="02000503000000020004" pitchFamily="2" charset="-127"/>
+            </a:endParaRPr>
+          </a:p>
+        </p:txBody>
+      </p:sp>
+      <p:sp>
+        <p:nvSpPr>
+          <p:cNvPr id="11" name="Rectangle 10">
+            <a:extLst>
+              <a:ext uri="{FF2B5EF4-FFF2-40B4-BE49-F238E27FC236}">
+                <a16:creationId xmlns:a16="http://schemas.microsoft.com/office/drawing/2014/main" id="{64B943FE-2F56-0C0B-3BF9-05B0131FE3C3}"/>
+              </a:ext>
+            </a:extLst>
+          </p:cNvPr>
+          <p:cNvSpPr/>
+          <p:nvPr/>
+        </p:nvSpPr>
+        <p:spPr>
+          <a:xfrm flipH="1">
+            <a:off x="308600" y="3998172"/>
+            <a:ext cx="1539000" cy="761400"/>
+          </a:xfrm>
+          <a:prstGeom prst="rect">
+            <a:avLst/>
+          </a:prstGeom>
+          <a:solidFill>
+            <a:schemeClr val="bg2"/>
+          </a:solidFill>
+          <a:ln w="12700">
+            <a:solidFill>
+              <a:schemeClr val="bg2">
+                <a:lumMod val="90000"/>
+              </a:schemeClr>
+            </a:solidFill>
+          </a:ln>
+        </p:spPr>
+        <p:style>
+          <a:lnRef idx="2">
+            <a:schemeClr val="accent1">
+              <a:shade val="15000"/>
+            </a:schemeClr>
+          </a:lnRef>
+          <a:fillRef idx="1">
+            <a:schemeClr val="accent1"/>
+          </a:fillRef>
+          <a:effectRef idx="0">
+            <a:schemeClr val="accent1"/>
+          </a:effectRef>
+          <a:fontRef idx="minor">
+            <a:schemeClr val="lt1"/>
+          </a:fontRef>
+        </p:style>
+        <p:txBody>
+          <a:bodyPr rtlCol="0" anchor="ctr"/>
+          <a:lstStyle/>
+          <a:p>
+            <a:pPr algn="ctr"/>
+            <a:endParaRPr lang="en-KR" sz="1350" dirty="0"/>
+          </a:p>
+        </p:txBody>
+      </p:sp>
+      <p:sp>
+        <p:nvSpPr>
+          <p:cNvPr id="16" name="TextBox 15">
+            <a:extLst>
+              <a:ext uri="{FF2B5EF4-FFF2-40B4-BE49-F238E27FC236}">
+                <a16:creationId xmlns:a16="http://schemas.microsoft.com/office/drawing/2014/main" id="{D56F9747-9B69-71C5-B9E9-489411E13052}"/>
+              </a:ext>
+            </a:extLst>
+          </p:cNvPr>
+          <p:cNvSpPr txBox="1"/>
+          <p:nvPr/>
+        </p:nvSpPr>
+        <p:spPr>
+          <a:xfrm>
+            <a:off x="306124" y="4000280"/>
+            <a:ext cx="988796" cy="357518"/>
+          </a:xfrm>
+          <a:prstGeom prst="rect">
+            <a:avLst/>
+          </a:prstGeom>
+          <a:noFill/>
+        </p:spPr>
+        <p:txBody>
+          <a:bodyPr wrap="square" lIns="67500" tIns="67500" rIns="67500" bIns="35100" rtlCol="0">
+            <a:spAutoFit/>
+          </a:bodyPr>
+          <a:lstStyle/>
+          <a:p>
+            <a:r>
+              <a:rPr lang="en-US" sz="825" b="1" dirty="0" err="1">
+                <a:solidFill>
+                  <a:schemeClr val="tx1">
+                    <a:lumMod val="85000"/>
+                    <a:lumOff val="15000"/>
+                  </a:schemeClr>
+                </a:solidFill>
+                <a:latin typeface="Cascadia Code" panose="020B0609020000020004" pitchFamily="34" charset="0"/>
+                <a:ea typeface="Cascadia Code" panose="020B0609020000020004" pitchFamily="34" charset="0"/>
+                <a:cs typeface="Cascadia Code" panose="020B0609020000020004" pitchFamily="34" charset="0"/>
+              </a:rPr>
+              <a:t>passenger_on</a:t>
+            </a:r>
+            <a:endParaRPr lang="en-US" sz="825" b="1" dirty="0">
+              <a:solidFill>
+                <a:schemeClr val="tx1">
+                  <a:lumMod val="85000"/>
+                  <a:lumOff val="15000"/>
+                </a:schemeClr>
+              </a:solidFill>
+              <a:latin typeface="Cascadia Code" panose="020B0609020000020004" pitchFamily="34" charset="0"/>
+              <a:ea typeface="Cascadia Code" panose="020B0609020000020004" pitchFamily="34" charset="0"/>
+              <a:cs typeface="Cascadia Code" panose="020B0609020000020004" pitchFamily="34" charset="0"/>
+            </a:endParaRPr>
+          </a:p>
+          <a:p>
+            <a:r>
+              <a:rPr lang="en-KR" sz="825" b="1" dirty="0">
+                <a:solidFill>
+                  <a:srgbClr val="44B29C"/>
+                </a:solidFill>
+                <a:latin typeface="Cascadia Code" panose="020B0609020000020004" pitchFamily="34" charset="0"/>
+                <a:ea typeface="Cascadia Code" panose="020B0609020000020004" pitchFamily="34" charset="0"/>
+                <a:cs typeface="Cascadia Code" panose="020B0609020000020004" pitchFamily="34" charset="0"/>
+              </a:rPr>
+              <a:t>IntegerField</a:t>
+            </a:r>
+          </a:p>
+        </p:txBody>
+      </p:sp>
+      <p:sp>
+        <p:nvSpPr>
+          <p:cNvPr id="17" name="TextBox 16">
+            <a:extLst>
+              <a:ext uri="{FF2B5EF4-FFF2-40B4-BE49-F238E27FC236}">
+                <a16:creationId xmlns:a16="http://schemas.microsoft.com/office/drawing/2014/main" id="{4A573FE8-7556-53BA-AE86-7C1C31AA9B44}"/>
+              </a:ext>
+            </a:extLst>
+          </p:cNvPr>
+          <p:cNvSpPr txBox="1"/>
+          <p:nvPr/>
+        </p:nvSpPr>
+        <p:spPr>
+          <a:xfrm>
+            <a:off x="308600" y="4380882"/>
+            <a:ext cx="1539000" cy="368241"/>
+          </a:xfrm>
+          <a:prstGeom prst="rect">
+            <a:avLst/>
+          </a:prstGeom>
+          <a:noFill/>
+        </p:spPr>
+        <p:txBody>
+          <a:bodyPr wrap="square" lIns="67500" rIns="67500" bIns="67500" rtlCol="0">
+            <a:spAutoFit/>
+          </a:bodyPr>
+          <a:lstStyle/>
+          <a:p>
+            <a:r>
+              <a:rPr lang="ko-KR" altLang="en-US" sz="825" dirty="0">
+                <a:solidFill>
+                  <a:schemeClr val="bg1">
+                    <a:lumMod val="65000"/>
+                  </a:schemeClr>
+                </a:solidFill>
+                <a:latin typeface="Pretendard" panose="02000503000000020004" pitchFamily="2" charset="-127"/>
+                <a:ea typeface="Pretendard" panose="02000503000000020004" pitchFamily="2" charset="-127"/>
+                <a:cs typeface="Pretendard" panose="02000503000000020004" pitchFamily="2" charset="-127"/>
+              </a:rPr>
+              <a:t>해당 정류장의 하루간 승차 인원</a:t>
+            </a:r>
+            <a:r>
+              <a:rPr lang="en-US" altLang="ko-KR" sz="825" dirty="0">
+                <a:solidFill>
+                  <a:schemeClr val="bg1">
+                    <a:lumMod val="65000"/>
+                  </a:schemeClr>
+                </a:solidFill>
+                <a:latin typeface="Pretendard" panose="02000503000000020004" pitchFamily="2" charset="-127"/>
+                <a:ea typeface="Pretendard" panose="02000503000000020004" pitchFamily="2" charset="-127"/>
+                <a:cs typeface="Pretendard" panose="02000503000000020004" pitchFamily="2" charset="-127"/>
+              </a:rPr>
+              <a:t>.</a:t>
+            </a:r>
+          </a:p>
+          <a:p>
+            <a:r>
+              <a:rPr lang="en-US" altLang="ko-KR" sz="825" dirty="0">
+                <a:solidFill>
+                  <a:schemeClr val="bg1">
+                    <a:lumMod val="65000"/>
+                  </a:schemeClr>
+                </a:solidFill>
+                <a:latin typeface="Pretendard" panose="02000503000000020004" pitchFamily="2" charset="-127"/>
+                <a:ea typeface="Pretendard" panose="02000503000000020004" pitchFamily="2" charset="-127"/>
+                <a:cs typeface="Pretendard" panose="02000503000000020004" pitchFamily="2" charset="-127"/>
+              </a:rPr>
+              <a:t>(</a:t>
+            </a:r>
+            <a:r>
+              <a:rPr lang="ko-KR" altLang="en-US" sz="825" dirty="0">
+                <a:solidFill>
+                  <a:schemeClr val="bg1">
+                    <a:lumMod val="65000"/>
+                  </a:schemeClr>
+                </a:solidFill>
+                <a:latin typeface="Pretendard" panose="02000503000000020004" pitchFamily="2" charset="-127"/>
+                <a:ea typeface="Pretendard" panose="02000503000000020004" pitchFamily="2" charset="-127"/>
+                <a:cs typeface="Pretendard" panose="02000503000000020004" pitchFamily="2" charset="-127"/>
+              </a:rPr>
+              <a:t>정수 형식</a:t>
+            </a:r>
+            <a:r>
+              <a:rPr lang="en-US" altLang="ko-KR" sz="825" dirty="0">
+                <a:solidFill>
+                  <a:schemeClr val="bg1">
+                    <a:lumMod val="65000"/>
+                  </a:schemeClr>
+                </a:solidFill>
+                <a:latin typeface="Pretendard" panose="02000503000000020004" pitchFamily="2" charset="-127"/>
+                <a:ea typeface="Pretendard" panose="02000503000000020004" pitchFamily="2" charset="-127"/>
+                <a:cs typeface="Pretendard" panose="02000503000000020004" pitchFamily="2" charset="-127"/>
+              </a:rPr>
+              <a:t>)</a:t>
+            </a:r>
+            <a:endParaRPr lang="en-KR" sz="825" dirty="0">
+              <a:solidFill>
+                <a:schemeClr val="bg1">
+                  <a:lumMod val="65000"/>
+                </a:schemeClr>
+              </a:solidFill>
+              <a:latin typeface="Pretendard" panose="02000503000000020004" pitchFamily="2" charset="-127"/>
+              <a:ea typeface="Pretendard" panose="02000503000000020004" pitchFamily="2" charset="-127"/>
+              <a:cs typeface="Pretendard" panose="02000503000000020004" pitchFamily="2" charset="-127"/>
+            </a:endParaRPr>
+          </a:p>
+        </p:txBody>
+      </p:sp>
+      <p:grpSp>
+        <p:nvGrpSpPr>
+          <p:cNvPr id="30" name="Group 29">
+            <a:extLst>
+              <a:ext uri="{FF2B5EF4-FFF2-40B4-BE49-F238E27FC236}">
+                <a16:creationId xmlns:a16="http://schemas.microsoft.com/office/drawing/2014/main" id="{895907B6-04C1-737F-AA59-3DEBE77622AB}"/>
+              </a:ext>
+            </a:extLst>
+          </p:cNvPr>
+          <p:cNvGrpSpPr/>
+          <p:nvPr/>
+        </p:nvGrpSpPr>
+        <p:grpSpPr>
+          <a:xfrm>
+            <a:off x="303424" y="4868956"/>
+            <a:ext cx="1541477" cy="763088"/>
+            <a:chOff x="408167" y="1844503"/>
+            <a:chExt cx="2055302" cy="1017450"/>
+          </a:xfrm>
+        </p:grpSpPr>
+        <p:sp>
+          <p:nvSpPr>
+            <p:cNvPr id="31" name="Rectangle 30">
+              <a:extLst>
+                <a:ext uri="{FF2B5EF4-FFF2-40B4-BE49-F238E27FC236}">
+                  <a16:creationId xmlns:a16="http://schemas.microsoft.com/office/drawing/2014/main" id="{FB20EC13-6180-2891-AB77-64CDE2CB70EC}"/>
+                </a:ext>
+              </a:extLst>
+            </p:cNvPr>
+            <p:cNvSpPr/>
+            <p:nvPr/>
+          </p:nvSpPr>
+          <p:spPr>
+            <a:xfrm flipH="1">
+              <a:off x="411469" y="1846753"/>
+              <a:ext cx="2048400" cy="1015200"/>
+            </a:xfrm>
+            <a:prstGeom prst="rect">
+              <a:avLst/>
+            </a:prstGeom>
+            <a:solidFill>
+              <a:schemeClr val="bg2"/>
+            </a:solidFill>
+            <a:ln w="12700">
+              <a:solidFill>
+                <a:schemeClr val="bg2">
+                  <a:lumMod val="90000"/>
+                </a:schemeClr>
+              </a:solidFill>
+            </a:ln>
+          </p:spPr>
+          <p:style>
+            <a:lnRef idx="2">
+              <a:schemeClr val="accent1">
+                <a:shade val="15000"/>
+              </a:schemeClr>
+            </a:lnRef>
+            <a:fillRef idx="1">
+              <a:schemeClr val="accent1"/>
+            </a:fillRef>
+            <a:effectRef idx="0">
+              <a:schemeClr val="accent1"/>
+            </a:effectRef>
+            <a:fontRef idx="minor">
+              <a:schemeClr val="lt1"/>
+            </a:fontRef>
+          </p:style>
+          <p:txBody>
+            <a:bodyPr rtlCol="0" anchor="ctr"/>
+            <a:lstStyle/>
+            <a:p>
+              <a:pPr algn="ctr"/>
+              <a:endParaRPr lang="en-KR" sz="1350" dirty="0"/>
+            </a:p>
+          </p:txBody>
+        </p:sp>
+        <p:sp>
+          <p:nvSpPr>
+            <p:cNvPr id="33" name="TextBox 32">
+              <a:extLst>
+                <a:ext uri="{FF2B5EF4-FFF2-40B4-BE49-F238E27FC236}">
+                  <a16:creationId xmlns:a16="http://schemas.microsoft.com/office/drawing/2014/main" id="{763D958E-B810-F594-4E61-6B4389A69F60}"/>
+                </a:ext>
+              </a:extLst>
+            </p:cNvPr>
+            <p:cNvSpPr txBox="1"/>
+            <p:nvPr/>
+          </p:nvSpPr>
+          <p:spPr>
+            <a:xfrm>
+              <a:off x="408168" y="1849564"/>
+              <a:ext cx="1399520" cy="476690"/>
+            </a:xfrm>
+            <a:prstGeom prst="rect">
+              <a:avLst/>
+            </a:prstGeom>
+            <a:noFill/>
+          </p:spPr>
+          <p:txBody>
+            <a:bodyPr wrap="square" lIns="67500" tIns="67500" rIns="67500" bIns="35100" rtlCol="0">
+              <a:spAutoFit/>
+            </a:bodyPr>
+            <a:lstStyle/>
+            <a:p>
+              <a:r>
+                <a:rPr lang="en-US" sz="825" b="1" dirty="0" err="1">
+                  <a:solidFill>
+                    <a:schemeClr val="tx1">
+                      <a:lumMod val="85000"/>
+                      <a:lumOff val="15000"/>
+                    </a:schemeClr>
+                  </a:solidFill>
+                  <a:latin typeface="Cascadia Code" panose="020B0609020000020004" pitchFamily="34" charset="0"/>
+                  <a:ea typeface="Cascadia Code" panose="020B0609020000020004" pitchFamily="34" charset="0"/>
+                  <a:cs typeface="Cascadia Code" panose="020B0609020000020004" pitchFamily="34" charset="0"/>
+                </a:rPr>
+                <a:t>passenger_off</a:t>
+              </a:r>
+              <a:endParaRPr lang="en-US" sz="825" b="1" dirty="0">
+                <a:solidFill>
+                  <a:schemeClr val="tx1">
+                    <a:lumMod val="85000"/>
+                    <a:lumOff val="15000"/>
+                  </a:schemeClr>
+                </a:solidFill>
+                <a:latin typeface="Cascadia Code" panose="020B0609020000020004" pitchFamily="34" charset="0"/>
+                <a:ea typeface="Cascadia Code" panose="020B0609020000020004" pitchFamily="34" charset="0"/>
+                <a:cs typeface="Cascadia Code" panose="020B0609020000020004" pitchFamily="34" charset="0"/>
+              </a:endParaRPr>
+            </a:p>
+            <a:p>
+              <a:r>
+                <a:rPr lang="en-KR" sz="825" b="1" dirty="0">
+                  <a:solidFill>
+                    <a:srgbClr val="44B29C"/>
+                  </a:solidFill>
+                  <a:latin typeface="Cascadia Code" panose="020B0609020000020004" pitchFamily="34" charset="0"/>
+                  <a:ea typeface="Cascadia Code" panose="020B0609020000020004" pitchFamily="34" charset="0"/>
+                  <a:cs typeface="Cascadia Code" panose="020B0609020000020004" pitchFamily="34" charset="0"/>
+                </a:rPr>
+                <a:t>IntegerField</a:t>
+              </a:r>
+            </a:p>
+          </p:txBody>
+        </p:sp>
+        <p:sp>
+          <p:nvSpPr>
+            <p:cNvPr id="34" name="TextBox 33">
+              <a:extLst>
+                <a:ext uri="{FF2B5EF4-FFF2-40B4-BE49-F238E27FC236}">
+                  <a16:creationId xmlns:a16="http://schemas.microsoft.com/office/drawing/2014/main" id="{D218ED3D-9052-55A8-F83C-81D8F60AB3A7}"/>
+                </a:ext>
+              </a:extLst>
+            </p:cNvPr>
+            <p:cNvSpPr txBox="1"/>
+            <p:nvPr/>
+          </p:nvSpPr>
+          <p:spPr>
+            <a:xfrm>
+              <a:off x="408167" y="2357032"/>
+              <a:ext cx="2055301" cy="490988"/>
+            </a:xfrm>
+            <a:prstGeom prst="rect">
+              <a:avLst/>
+            </a:prstGeom>
+            <a:noFill/>
+          </p:spPr>
+          <p:txBody>
+            <a:bodyPr wrap="square" lIns="67500" rIns="67500" bIns="67500" rtlCol="0">
+              <a:spAutoFit/>
+            </a:bodyPr>
+            <a:lstStyle/>
+            <a:p>
+              <a:r>
+                <a:rPr lang="ko-KR" altLang="en-US" sz="825" dirty="0">
+                  <a:solidFill>
+                    <a:schemeClr val="bg1">
+                      <a:lumMod val="65000"/>
+                    </a:schemeClr>
+                  </a:solidFill>
+                  <a:latin typeface="Pretendard" panose="02000503000000020004" pitchFamily="2" charset="-127"/>
+                  <a:ea typeface="Pretendard" panose="02000503000000020004" pitchFamily="2" charset="-127"/>
+                  <a:cs typeface="Pretendard" panose="02000503000000020004" pitchFamily="2" charset="-127"/>
+                </a:rPr>
+                <a:t>해당 정류장의 하루간 하차 인원</a:t>
+              </a:r>
+              <a:r>
+                <a:rPr lang="en-US" altLang="ko-KR" sz="825" dirty="0">
+                  <a:solidFill>
+                    <a:schemeClr val="bg1">
+                      <a:lumMod val="65000"/>
+                    </a:schemeClr>
+                  </a:solidFill>
+                  <a:latin typeface="Pretendard" panose="02000503000000020004" pitchFamily="2" charset="-127"/>
+                  <a:ea typeface="Pretendard" panose="02000503000000020004" pitchFamily="2" charset="-127"/>
+                  <a:cs typeface="Pretendard" panose="02000503000000020004" pitchFamily="2" charset="-127"/>
+                </a:rPr>
+                <a:t>.</a:t>
+              </a:r>
+            </a:p>
+            <a:p>
+              <a:r>
+                <a:rPr lang="en-US" altLang="ko-KR" sz="825" dirty="0">
+                  <a:solidFill>
+                    <a:schemeClr val="bg1">
+                      <a:lumMod val="65000"/>
+                    </a:schemeClr>
+                  </a:solidFill>
+                  <a:latin typeface="Pretendard" panose="02000503000000020004" pitchFamily="2" charset="-127"/>
+                  <a:ea typeface="Pretendard" panose="02000503000000020004" pitchFamily="2" charset="-127"/>
+                  <a:cs typeface="Pretendard" panose="02000503000000020004" pitchFamily="2" charset="-127"/>
+                </a:rPr>
+                <a:t>(</a:t>
+              </a:r>
+              <a:r>
+                <a:rPr lang="ko-KR" altLang="en-US" sz="825" dirty="0">
+                  <a:solidFill>
+                    <a:schemeClr val="bg1">
+                      <a:lumMod val="65000"/>
+                    </a:schemeClr>
+                  </a:solidFill>
+                  <a:latin typeface="Pretendard" panose="02000503000000020004" pitchFamily="2" charset="-127"/>
+                  <a:ea typeface="Pretendard" panose="02000503000000020004" pitchFamily="2" charset="-127"/>
+                  <a:cs typeface="Pretendard" panose="02000503000000020004" pitchFamily="2" charset="-127"/>
+                </a:rPr>
+                <a:t>정수 형식</a:t>
+              </a:r>
+              <a:r>
+                <a:rPr lang="en-US" altLang="ko-KR" sz="825" dirty="0">
+                  <a:solidFill>
+                    <a:schemeClr val="bg1">
+                      <a:lumMod val="65000"/>
+                    </a:schemeClr>
+                  </a:solidFill>
+                  <a:latin typeface="Pretendard" panose="02000503000000020004" pitchFamily="2" charset="-127"/>
+                  <a:ea typeface="Pretendard" panose="02000503000000020004" pitchFamily="2" charset="-127"/>
+                  <a:cs typeface="Pretendard" panose="02000503000000020004" pitchFamily="2" charset="-127"/>
+                </a:rPr>
+                <a:t>)</a:t>
+              </a:r>
+              <a:endParaRPr lang="en-KR" sz="825" dirty="0">
+                <a:solidFill>
+                  <a:schemeClr val="bg1">
+                    <a:lumMod val="65000"/>
+                  </a:schemeClr>
+                </a:solidFill>
+                <a:latin typeface="Pretendard" panose="02000503000000020004" pitchFamily="2" charset="-127"/>
+                <a:ea typeface="Pretendard" panose="02000503000000020004" pitchFamily="2" charset="-127"/>
+                <a:cs typeface="Pretendard" panose="02000503000000020004" pitchFamily="2" charset="-127"/>
+              </a:endParaRPr>
+            </a:p>
+          </p:txBody>
+        </p:sp>
+        <p:sp>
+          <p:nvSpPr>
+            <p:cNvPr id="35" name="TextBox 34">
+              <a:extLst>
+                <a:ext uri="{FF2B5EF4-FFF2-40B4-BE49-F238E27FC236}">
+                  <a16:creationId xmlns:a16="http://schemas.microsoft.com/office/drawing/2014/main" id="{D60FC429-DDD7-DAB9-8804-3B58B21D0A5F}"/>
+                </a:ext>
+              </a:extLst>
+            </p:cNvPr>
+            <p:cNvSpPr txBox="1"/>
+            <p:nvPr/>
+          </p:nvSpPr>
+          <p:spPr>
+            <a:xfrm>
+              <a:off x="1437159" y="1844503"/>
+              <a:ext cx="1026310" cy="307413"/>
+            </a:xfrm>
+            <a:prstGeom prst="rect">
+              <a:avLst/>
+            </a:prstGeom>
+            <a:noFill/>
+          </p:spPr>
+          <p:txBody>
+            <a:bodyPr wrap="square" lIns="67500" tIns="67500" rIns="67500" bIns="35100" rtlCol="0">
+              <a:spAutoFit/>
+            </a:bodyPr>
+            <a:lstStyle/>
+            <a:p>
+              <a:pPr algn="r"/>
+              <a:r>
+                <a:rPr lang="en-US" altLang="ko-KR" sz="825" b="1" dirty="0">
+                  <a:solidFill>
+                    <a:schemeClr val="bg1">
+                      <a:lumMod val="65000"/>
+                    </a:schemeClr>
+                  </a:solidFill>
+                  <a:latin typeface="Pretendard" panose="02000503000000020004" pitchFamily="2" charset="-127"/>
+                  <a:ea typeface="Pretendard" panose="02000503000000020004" pitchFamily="2" charset="-127"/>
+                  <a:cs typeface="Pretendard" panose="02000503000000020004" pitchFamily="2" charset="-127"/>
+                </a:rPr>
+                <a:t>954</a:t>
+              </a:r>
+              <a:endParaRPr lang="en-KR" sz="825" b="1" dirty="0">
+                <a:solidFill>
+                  <a:schemeClr val="bg1">
+                    <a:lumMod val="65000"/>
+                  </a:schemeClr>
+                </a:solidFill>
+                <a:latin typeface="Pretendard" panose="02000503000000020004" pitchFamily="2" charset="-127"/>
+                <a:ea typeface="Pretendard" panose="02000503000000020004" pitchFamily="2" charset="-127"/>
+                <a:cs typeface="Pretendard" panose="02000503000000020004" pitchFamily="2" charset="-127"/>
+              </a:endParaRPr>
+            </a:p>
+          </p:txBody>
+        </p:sp>
+      </p:grpSp>
+      <p:sp>
+        <p:nvSpPr>
+          <p:cNvPr id="49" name="TextBox 48">
+            <a:extLst>
+              <a:ext uri="{FF2B5EF4-FFF2-40B4-BE49-F238E27FC236}">
+                <a16:creationId xmlns:a16="http://schemas.microsoft.com/office/drawing/2014/main" id="{4DD899D2-6BC1-50CD-6426-3F4B030F1760}"/>
+              </a:ext>
+            </a:extLst>
+          </p:cNvPr>
+          <p:cNvSpPr txBox="1"/>
+          <p:nvPr/>
+        </p:nvSpPr>
+        <p:spPr>
+          <a:xfrm>
+            <a:off x="1058309" y="1383379"/>
+            <a:ext cx="786817" cy="230560"/>
+          </a:xfrm>
+          <a:prstGeom prst="rect">
+            <a:avLst/>
+          </a:prstGeom>
+          <a:noFill/>
+        </p:spPr>
+        <p:txBody>
+          <a:bodyPr wrap="square" lIns="67500" tIns="67500" rIns="67500" bIns="35100" rtlCol="0">
+            <a:spAutoFit/>
+          </a:bodyPr>
+          <a:lstStyle/>
+          <a:p>
+            <a:pPr algn="r"/>
+            <a:r>
+              <a:rPr lang="en-US" altLang="ko-KR" sz="825" b="1" dirty="0">
+                <a:solidFill>
+                  <a:schemeClr val="bg1">
+                    <a:lumMod val="65000"/>
+                  </a:schemeClr>
+                </a:solidFill>
+                <a:latin typeface="Pretendard" panose="02000503000000020004" pitchFamily="2" charset="-127"/>
+                <a:ea typeface="Pretendard" panose="02000503000000020004" pitchFamily="2" charset="-127"/>
+                <a:cs typeface="Pretendard" panose="02000503000000020004" pitchFamily="2" charset="-127"/>
+              </a:rPr>
+              <a:t>“119900101”</a:t>
+            </a:r>
+            <a:endParaRPr lang="en-KR" sz="825" b="1" dirty="0">
+              <a:solidFill>
+                <a:schemeClr val="bg1">
+                  <a:lumMod val="65000"/>
+                </a:schemeClr>
+              </a:solidFill>
+              <a:latin typeface="Pretendard" panose="02000503000000020004" pitchFamily="2" charset="-127"/>
+              <a:ea typeface="Pretendard" panose="02000503000000020004" pitchFamily="2" charset="-127"/>
+              <a:cs typeface="Pretendard" panose="02000503000000020004" pitchFamily="2" charset="-127"/>
+            </a:endParaRPr>
+          </a:p>
+        </p:txBody>
+      </p:sp>
+      <p:sp>
+        <p:nvSpPr>
+          <p:cNvPr id="51" name="TextBox 50">
+            <a:extLst>
+              <a:ext uri="{FF2B5EF4-FFF2-40B4-BE49-F238E27FC236}">
+                <a16:creationId xmlns:a16="http://schemas.microsoft.com/office/drawing/2014/main" id="{888ED51D-BB2D-0FAB-0134-EDBB59206F60}"/>
+              </a:ext>
+            </a:extLst>
+          </p:cNvPr>
+          <p:cNvSpPr txBox="1"/>
+          <p:nvPr/>
+        </p:nvSpPr>
+        <p:spPr>
+          <a:xfrm>
+            <a:off x="856330" y="2250610"/>
+            <a:ext cx="988795" cy="230560"/>
+          </a:xfrm>
+          <a:prstGeom prst="rect">
+            <a:avLst/>
+          </a:prstGeom>
+          <a:noFill/>
+        </p:spPr>
+        <p:txBody>
+          <a:bodyPr wrap="square" lIns="67500" tIns="67500" rIns="67500" bIns="35100" rtlCol="0">
+            <a:spAutoFit/>
+          </a:bodyPr>
+          <a:lstStyle/>
+          <a:p>
+            <a:pPr algn="r"/>
+            <a:r>
+              <a:rPr lang="en-US" altLang="ko-KR" sz="825" b="1" dirty="0">
+                <a:solidFill>
+                  <a:schemeClr val="bg1">
+                    <a:lumMod val="65000"/>
+                  </a:schemeClr>
+                </a:solidFill>
+                <a:latin typeface="Pretendard" panose="02000503000000020004" pitchFamily="2" charset="-127"/>
+                <a:ea typeface="Pretendard" panose="02000503000000020004" pitchFamily="2" charset="-127"/>
+                <a:cs typeface="Pretendard" panose="02000503000000020004" pitchFamily="2" charset="-127"/>
+              </a:rPr>
+              <a:t>“11110602”</a:t>
+            </a:r>
+            <a:endParaRPr lang="en-KR" sz="825" b="1" dirty="0">
+              <a:solidFill>
+                <a:schemeClr val="bg1">
+                  <a:lumMod val="65000"/>
+                </a:schemeClr>
+              </a:solidFill>
+              <a:latin typeface="Pretendard" panose="02000503000000020004" pitchFamily="2" charset="-127"/>
+              <a:ea typeface="Pretendard" panose="02000503000000020004" pitchFamily="2" charset="-127"/>
+              <a:cs typeface="Pretendard" panose="02000503000000020004" pitchFamily="2" charset="-127"/>
+            </a:endParaRPr>
+          </a:p>
+        </p:txBody>
+      </p:sp>
+      <p:sp>
+        <p:nvSpPr>
+          <p:cNvPr id="52" name="TextBox 51">
+            <a:extLst>
+              <a:ext uri="{FF2B5EF4-FFF2-40B4-BE49-F238E27FC236}">
+                <a16:creationId xmlns:a16="http://schemas.microsoft.com/office/drawing/2014/main" id="{C8E90A3A-23CD-4C66-2DA8-F7B1F66AAC57}"/>
+              </a:ext>
+            </a:extLst>
+          </p:cNvPr>
+          <p:cNvSpPr txBox="1"/>
+          <p:nvPr/>
+        </p:nvSpPr>
+        <p:spPr>
+          <a:xfrm>
+            <a:off x="856330" y="3124501"/>
+            <a:ext cx="988795" cy="357518"/>
+          </a:xfrm>
+          <a:prstGeom prst="rect">
+            <a:avLst/>
+          </a:prstGeom>
+          <a:noFill/>
+        </p:spPr>
+        <p:txBody>
+          <a:bodyPr wrap="square" lIns="67500" tIns="67500" rIns="67500" bIns="35100" rtlCol="0">
+            <a:spAutoFit/>
+          </a:bodyPr>
+          <a:lstStyle/>
+          <a:p>
+            <a:pPr algn="r"/>
+            <a:r>
+              <a:rPr lang="en-US" sz="825" b="1" dirty="0">
+                <a:solidFill>
+                  <a:schemeClr val="bg1">
+                    <a:lumMod val="65000"/>
+                  </a:schemeClr>
+                </a:solidFill>
+                <a:latin typeface="Pretendard" panose="02000503000000020004" pitchFamily="2" charset="-127"/>
+                <a:ea typeface="Pretendard" panose="02000503000000020004" pitchFamily="2" charset="-127"/>
+                <a:cs typeface="Pretendard" panose="02000503000000020004" pitchFamily="2" charset="-127"/>
+              </a:rPr>
+              <a:t>2025-10-30 00:00</a:t>
+            </a:r>
+            <a:endParaRPr lang="en-KR" sz="825" b="1" dirty="0">
+              <a:solidFill>
+                <a:schemeClr val="bg1">
+                  <a:lumMod val="65000"/>
+                </a:schemeClr>
+              </a:solidFill>
+              <a:latin typeface="Pretendard" panose="02000503000000020004" pitchFamily="2" charset="-127"/>
+              <a:ea typeface="Pretendard" panose="02000503000000020004" pitchFamily="2" charset="-127"/>
+              <a:cs typeface="Pretendard" panose="02000503000000020004" pitchFamily="2" charset="-127"/>
+            </a:endParaRPr>
+          </a:p>
+        </p:txBody>
+      </p:sp>
+      <p:sp>
+        <p:nvSpPr>
+          <p:cNvPr id="53" name="TextBox 52">
+            <a:extLst>
+              <a:ext uri="{FF2B5EF4-FFF2-40B4-BE49-F238E27FC236}">
+                <a16:creationId xmlns:a16="http://schemas.microsoft.com/office/drawing/2014/main" id="{D006C40E-FDD9-92E7-EB3F-DFC753AF364F}"/>
+              </a:ext>
+            </a:extLst>
+          </p:cNvPr>
+          <p:cNvSpPr txBox="1"/>
+          <p:nvPr/>
+        </p:nvSpPr>
+        <p:spPr>
+          <a:xfrm>
+            <a:off x="861283" y="3996967"/>
+            <a:ext cx="988795" cy="230560"/>
+          </a:xfrm>
+          <a:prstGeom prst="rect">
+            <a:avLst/>
+          </a:prstGeom>
+          <a:noFill/>
+        </p:spPr>
+        <p:txBody>
+          <a:bodyPr wrap="square" lIns="67500" tIns="67500" rIns="67500" bIns="35100" rtlCol="0">
+            <a:spAutoFit/>
+          </a:bodyPr>
+          <a:lstStyle/>
+          <a:p>
+            <a:pPr algn="r"/>
+            <a:r>
+              <a:rPr lang="en-US" altLang="ko-KR" sz="825" b="1" dirty="0">
+                <a:solidFill>
+                  <a:schemeClr val="bg1">
+                    <a:lumMod val="65000"/>
+                  </a:schemeClr>
+                </a:solidFill>
+                <a:latin typeface="Pretendard" panose="02000503000000020004" pitchFamily="2" charset="-127"/>
+                <a:ea typeface="Pretendard" panose="02000503000000020004" pitchFamily="2" charset="-127"/>
+                <a:cs typeface="Pretendard" panose="02000503000000020004" pitchFamily="2" charset="-127"/>
+              </a:rPr>
+              <a:t>134</a:t>
+            </a:r>
+            <a:endParaRPr lang="en-KR" sz="825" b="1" dirty="0">
+              <a:solidFill>
+                <a:schemeClr val="bg1">
+                  <a:lumMod val="65000"/>
+                </a:schemeClr>
+              </a:solidFill>
+              <a:latin typeface="Pretendard" panose="02000503000000020004" pitchFamily="2" charset="-127"/>
+              <a:ea typeface="Pretendard" panose="02000503000000020004" pitchFamily="2" charset="-127"/>
+              <a:cs typeface="Pretendard" panose="02000503000000020004" pitchFamily="2" charset="-127"/>
+            </a:endParaRPr>
+          </a:p>
+        </p:txBody>
+      </p:sp>
+      <p:sp>
+        <p:nvSpPr>
+          <p:cNvPr id="60" name="TextBox 59">
+            <a:extLst>
+              <a:ext uri="{FF2B5EF4-FFF2-40B4-BE49-F238E27FC236}">
+                <a16:creationId xmlns:a16="http://schemas.microsoft.com/office/drawing/2014/main" id="{42EDF3C9-B279-B2CF-8835-C67898708452}"/>
+              </a:ext>
+            </a:extLst>
+          </p:cNvPr>
+          <p:cNvSpPr txBox="1"/>
+          <p:nvPr/>
+        </p:nvSpPr>
+        <p:spPr>
+          <a:xfrm>
+            <a:off x="2157874" y="815251"/>
+            <a:ext cx="4497051" cy="395749"/>
+          </a:xfrm>
+          <a:prstGeom prst="rect">
+            <a:avLst/>
+          </a:prstGeom>
+          <a:noFill/>
+        </p:spPr>
+        <p:txBody>
+          <a:bodyPr wrap="square" rtlCol="0">
+            <a:spAutoFit/>
+          </a:bodyPr>
+          <a:lstStyle/>
+          <a:p>
+            <a:pPr algn="just">
+              <a:lnSpc>
+                <a:spcPct val="125000"/>
+              </a:lnSpc>
+            </a:pPr>
+            <a:r>
+              <a:rPr lang="ko-KR" altLang="en-US" sz="825" dirty="0">
+                <a:solidFill>
+                  <a:schemeClr val="tx1">
+                    <a:lumMod val="85000"/>
+                    <a:lumOff val="15000"/>
+                  </a:schemeClr>
+                </a:solidFill>
+                <a:latin typeface="Pretendard" panose="02000503000000020004" pitchFamily="2" charset="-127"/>
+                <a:ea typeface="Pretendard" panose="02000503000000020004" pitchFamily="2" charset="-127"/>
+                <a:cs typeface="Pretendard" panose="02000503000000020004" pitchFamily="2" charset="-127"/>
+              </a:rPr>
+              <a:t>   </a:t>
+            </a:r>
+            <a:r>
+              <a:rPr lang="ko-KR" altLang="en-US" sz="825" dirty="0">
+                <a:solidFill>
+                  <a:schemeClr val="tx1">
+                    <a:lumMod val="85000"/>
+                    <a:lumOff val="15000"/>
+                  </a:schemeClr>
+                </a:solidFill>
+                <a:highlight>
+                  <a:srgbClr val="FFECB2"/>
+                </a:highlight>
+                <a:latin typeface="Pretendard" panose="02000503000000020004" pitchFamily="2" charset="-127"/>
+                <a:ea typeface="Pretendard" panose="02000503000000020004" pitchFamily="2" charset="-127"/>
+                <a:cs typeface="Pretendard" panose="02000503000000020004" pitchFamily="2" charset="-127"/>
+              </a:rPr>
+              <a:t>버스 정류장별 </a:t>
+            </a:r>
+            <a:r>
+              <a:rPr lang="ko-KR" altLang="en-US" sz="825" dirty="0" err="1">
+                <a:solidFill>
+                  <a:schemeClr val="tx1">
+                    <a:lumMod val="85000"/>
+                    <a:lumOff val="15000"/>
+                  </a:schemeClr>
+                </a:solidFill>
+                <a:highlight>
+                  <a:srgbClr val="FFECB2"/>
+                </a:highlight>
+                <a:latin typeface="Pretendard" panose="02000503000000020004" pitchFamily="2" charset="-127"/>
+                <a:ea typeface="Pretendard" panose="02000503000000020004" pitchFamily="2" charset="-127"/>
+                <a:cs typeface="Pretendard" panose="02000503000000020004" pitchFamily="2" charset="-127"/>
+              </a:rPr>
+              <a:t>승하차</a:t>
+            </a:r>
+            <a:r>
+              <a:rPr lang="ko-KR" altLang="en-US" sz="825" dirty="0">
+                <a:solidFill>
+                  <a:schemeClr val="tx1">
+                    <a:lumMod val="85000"/>
+                    <a:lumOff val="15000"/>
+                  </a:schemeClr>
+                </a:solidFill>
+                <a:highlight>
+                  <a:srgbClr val="FFECB2"/>
+                </a:highlight>
+                <a:latin typeface="Pretendard" panose="02000503000000020004" pitchFamily="2" charset="-127"/>
+                <a:ea typeface="Pretendard" panose="02000503000000020004" pitchFamily="2" charset="-127"/>
+                <a:cs typeface="Pretendard" panose="02000503000000020004" pitchFamily="2" charset="-127"/>
+              </a:rPr>
+              <a:t> 인원수를 받아오는 데이터입니다</a:t>
+            </a:r>
+            <a:r>
+              <a:rPr lang="en-US" altLang="ko-KR" sz="825" dirty="0">
+                <a:solidFill>
+                  <a:schemeClr val="tx1">
+                    <a:lumMod val="85000"/>
+                    <a:lumOff val="15000"/>
+                  </a:schemeClr>
+                </a:solidFill>
+                <a:highlight>
+                  <a:srgbClr val="FFECB2"/>
+                </a:highlight>
+                <a:latin typeface="Pretendard" panose="02000503000000020004" pitchFamily="2" charset="-127"/>
+                <a:ea typeface="Pretendard" panose="02000503000000020004" pitchFamily="2" charset="-127"/>
+                <a:cs typeface="Pretendard" panose="02000503000000020004" pitchFamily="2" charset="-127"/>
+              </a:rPr>
+              <a:t>.</a:t>
+            </a:r>
+            <a:r>
+              <a:rPr lang="ko-KR" altLang="en-US" sz="825" dirty="0">
+                <a:solidFill>
+                  <a:schemeClr val="tx1">
+                    <a:lumMod val="85000"/>
+                    <a:lumOff val="15000"/>
+                  </a:schemeClr>
+                </a:solidFill>
+                <a:latin typeface="Pretendard" panose="02000503000000020004" pitchFamily="2" charset="-127"/>
+                <a:ea typeface="Pretendard" panose="02000503000000020004" pitchFamily="2" charset="-127"/>
+                <a:cs typeface="Pretendard" panose="02000503000000020004" pitchFamily="2" charset="-127"/>
+              </a:rPr>
+              <a:t> 본 프로젝트 주제의 골자가 되는 중요한 데이터 로</a:t>
+            </a:r>
+            <a:r>
+              <a:rPr lang="en-US" altLang="ko-KR" sz="825" dirty="0">
+                <a:solidFill>
+                  <a:schemeClr val="tx1">
+                    <a:lumMod val="85000"/>
+                    <a:lumOff val="15000"/>
+                  </a:schemeClr>
+                </a:solidFill>
+                <a:latin typeface="Pretendard" panose="02000503000000020004" pitchFamily="2" charset="-127"/>
+                <a:ea typeface="Pretendard" panose="02000503000000020004" pitchFamily="2" charset="-127"/>
+                <a:cs typeface="Pretendard" panose="02000503000000020004" pitchFamily="2" charset="-127"/>
+              </a:rPr>
+              <a:t>,</a:t>
+            </a:r>
+            <a:r>
+              <a:rPr lang="ko-KR" altLang="en-US" sz="825" dirty="0">
+                <a:solidFill>
+                  <a:schemeClr val="tx1">
+                    <a:lumMod val="85000"/>
+                    <a:lumOff val="15000"/>
+                  </a:schemeClr>
+                </a:solidFill>
+                <a:latin typeface="Pretendard" panose="02000503000000020004" pitchFamily="2" charset="-127"/>
+                <a:ea typeface="Pretendard" panose="02000503000000020004" pitchFamily="2" charset="-127"/>
+                <a:cs typeface="Pretendard" panose="02000503000000020004" pitchFamily="2" charset="-127"/>
+              </a:rPr>
+              <a:t> 매일매일 </a:t>
+            </a:r>
+            <a:endParaRPr lang="en-US" altLang="ko-KR" sz="825" dirty="0">
+              <a:solidFill>
+                <a:schemeClr val="tx1">
+                  <a:lumMod val="85000"/>
+                  <a:lumOff val="15000"/>
+                </a:schemeClr>
+              </a:solidFill>
+              <a:latin typeface="Pretendard" panose="02000503000000020004" pitchFamily="2" charset="-127"/>
+              <a:ea typeface="Pretendard" panose="02000503000000020004" pitchFamily="2" charset="-127"/>
+              <a:cs typeface="Pretendard" panose="02000503000000020004" pitchFamily="2" charset="-127"/>
+            </a:endParaRPr>
+          </a:p>
+        </p:txBody>
+      </p:sp>
+      <p:sp>
+        <p:nvSpPr>
+          <p:cNvPr id="61" name="TextBox 60">
+            <a:extLst>
+              <a:ext uri="{FF2B5EF4-FFF2-40B4-BE49-F238E27FC236}">
+                <a16:creationId xmlns:a16="http://schemas.microsoft.com/office/drawing/2014/main" id="{50FB1958-B538-9428-3E5C-B8D8A37BBF69}"/>
+              </a:ext>
+            </a:extLst>
+          </p:cNvPr>
+          <p:cNvSpPr txBox="1"/>
+          <p:nvPr/>
+        </p:nvSpPr>
+        <p:spPr>
+          <a:xfrm>
+            <a:off x="2157874" y="607499"/>
+            <a:ext cx="1103187" cy="219291"/>
+          </a:xfrm>
+          <a:prstGeom prst="rect">
+            <a:avLst/>
+          </a:prstGeom>
+          <a:noFill/>
+        </p:spPr>
+        <p:txBody>
+          <a:bodyPr wrap="none" rtlCol="0">
+            <a:spAutoFit/>
+          </a:bodyPr>
+          <a:lstStyle/>
+          <a:p>
+            <a:r>
+              <a:rPr lang="ko-KR" altLang="en-US" sz="825" b="1" dirty="0">
+                <a:solidFill>
+                  <a:schemeClr val="tx1">
+                    <a:lumMod val="85000"/>
+                    <a:lumOff val="15000"/>
+                  </a:schemeClr>
+                </a:solidFill>
+                <a:latin typeface="Pretendard" panose="02000503000000020004" pitchFamily="2" charset="-127"/>
+                <a:ea typeface="Pretendard" panose="02000503000000020004" pitchFamily="2" charset="-127"/>
+                <a:cs typeface="Pretendard" panose="02000503000000020004" pitchFamily="2" charset="-127"/>
+              </a:rPr>
+              <a:t>수집 목적 및 사용 방안</a:t>
+            </a:r>
+            <a:endParaRPr lang="en-US" altLang="ko-KR" sz="825" b="1" dirty="0">
+              <a:solidFill>
+                <a:schemeClr val="tx1">
+                  <a:lumMod val="85000"/>
+                  <a:lumOff val="15000"/>
+                </a:schemeClr>
+              </a:solidFill>
+              <a:latin typeface="Pretendard" panose="02000503000000020004" pitchFamily="2" charset="-127"/>
+              <a:ea typeface="Pretendard" panose="02000503000000020004" pitchFamily="2" charset="-127"/>
+              <a:cs typeface="Pretendard" panose="02000503000000020004" pitchFamily="2" charset="-127"/>
+            </a:endParaRPr>
+          </a:p>
+        </p:txBody>
+      </p:sp>
+      <p:sp>
+        <p:nvSpPr>
+          <p:cNvPr id="62" name="TextBox 61">
+            <a:extLst>
+              <a:ext uri="{FF2B5EF4-FFF2-40B4-BE49-F238E27FC236}">
+                <a16:creationId xmlns:a16="http://schemas.microsoft.com/office/drawing/2014/main" id="{376B88AE-1474-B239-05E1-6832B73C279C}"/>
+              </a:ext>
+            </a:extLst>
+          </p:cNvPr>
+          <p:cNvSpPr txBox="1"/>
+          <p:nvPr/>
+        </p:nvSpPr>
+        <p:spPr>
+          <a:xfrm>
+            <a:off x="2157873" y="2896892"/>
+            <a:ext cx="4497051" cy="554447"/>
+          </a:xfrm>
+          <a:prstGeom prst="rect">
+            <a:avLst/>
+          </a:prstGeom>
+          <a:noFill/>
+        </p:spPr>
+        <p:txBody>
+          <a:bodyPr wrap="square" rtlCol="0">
+            <a:spAutoFit/>
+          </a:bodyPr>
+          <a:lstStyle/>
+          <a:p>
+            <a:pPr algn="just">
+              <a:lnSpc>
+                <a:spcPct val="125000"/>
+              </a:lnSpc>
+            </a:pPr>
+            <a:r>
+              <a:rPr lang="ko-KR" altLang="en-US" sz="825" dirty="0">
+                <a:solidFill>
+                  <a:schemeClr val="tx1">
+                    <a:lumMod val="85000"/>
+                    <a:lumOff val="15000"/>
+                  </a:schemeClr>
+                </a:solidFill>
+                <a:latin typeface="Pretendard" panose="02000503000000020004" pitchFamily="2" charset="-127"/>
+                <a:ea typeface="Pretendard" panose="02000503000000020004" pitchFamily="2" charset="-127"/>
+                <a:cs typeface="Pretendard" panose="02000503000000020004" pitchFamily="2" charset="-127"/>
+              </a:rPr>
+              <a:t>   서울 </a:t>
+            </a:r>
+            <a:r>
+              <a:rPr lang="ko-KR" altLang="en-US" sz="825" dirty="0" err="1">
+                <a:solidFill>
+                  <a:schemeClr val="tx1">
+                    <a:lumMod val="85000"/>
+                    <a:lumOff val="15000"/>
+                  </a:schemeClr>
+                </a:solidFill>
+                <a:latin typeface="Pretendard" panose="02000503000000020004" pitchFamily="2" charset="-127"/>
+                <a:ea typeface="Pretendard" panose="02000503000000020004" pitchFamily="2" charset="-127"/>
+                <a:cs typeface="Pretendard" panose="02000503000000020004" pitchFamily="2" charset="-127"/>
+              </a:rPr>
+              <a:t>열린데이터광장에서</a:t>
+            </a:r>
+            <a:r>
+              <a:rPr lang="ko-KR" altLang="en-US" sz="825" dirty="0">
+                <a:solidFill>
+                  <a:schemeClr val="tx1">
+                    <a:lumMod val="85000"/>
+                    <a:lumOff val="15000"/>
+                  </a:schemeClr>
+                </a:solidFill>
+                <a:latin typeface="Pretendard" panose="02000503000000020004" pitchFamily="2" charset="-127"/>
+                <a:ea typeface="Pretendard" panose="02000503000000020004" pitchFamily="2" charset="-127"/>
+                <a:cs typeface="Pretendard" panose="02000503000000020004" pitchFamily="2" charset="-127"/>
+              </a:rPr>
+              <a:t> 제공하는 </a:t>
+            </a:r>
+            <a:r>
+              <a:rPr lang="en-US" altLang="ko-KR" sz="825" dirty="0">
+                <a:solidFill>
+                  <a:schemeClr val="tx1">
+                    <a:lumMod val="85000"/>
+                    <a:lumOff val="15000"/>
+                  </a:schemeClr>
+                </a:solidFill>
+                <a:highlight>
+                  <a:srgbClr val="FFECB2"/>
+                </a:highlight>
+                <a:latin typeface="Pretendard" panose="02000503000000020004" pitchFamily="2" charset="-127"/>
+                <a:ea typeface="Pretendard" panose="02000503000000020004" pitchFamily="2" charset="-127"/>
+                <a:cs typeface="Pretendard" panose="02000503000000020004" pitchFamily="2" charset="-127"/>
+              </a:rPr>
+              <a:t>’</a:t>
+            </a:r>
+            <a:r>
+              <a:rPr lang="ko-KR" altLang="en-US" sz="825" dirty="0">
+                <a:solidFill>
+                  <a:schemeClr val="tx1">
+                    <a:lumMod val="85000"/>
+                    <a:lumOff val="15000"/>
+                  </a:schemeClr>
+                </a:solidFill>
+                <a:highlight>
+                  <a:srgbClr val="FFECB2"/>
+                </a:highlight>
+                <a:latin typeface="Pretendard" panose="02000503000000020004" pitchFamily="2" charset="-127"/>
+                <a:ea typeface="Pretendard" panose="02000503000000020004" pitchFamily="2" charset="-127"/>
+                <a:cs typeface="Pretendard" panose="02000503000000020004" pitchFamily="2" charset="-127"/>
+              </a:rPr>
+              <a:t>서울시 버스정류소 위치정보</a:t>
+            </a:r>
+            <a:r>
+              <a:rPr lang="en-US" altLang="ko-KR" sz="825" dirty="0">
+                <a:solidFill>
+                  <a:schemeClr val="tx1">
+                    <a:lumMod val="85000"/>
+                    <a:lumOff val="15000"/>
+                  </a:schemeClr>
+                </a:solidFill>
+                <a:highlight>
+                  <a:srgbClr val="FFECB2"/>
+                </a:highlight>
+                <a:latin typeface="Pretendard" panose="02000503000000020004" pitchFamily="2" charset="-127"/>
+                <a:ea typeface="Pretendard" panose="02000503000000020004" pitchFamily="2" charset="-127"/>
+                <a:cs typeface="Pretendard" panose="02000503000000020004" pitchFamily="2" charset="-127"/>
+              </a:rPr>
+              <a:t>’</a:t>
+            </a:r>
+            <a:r>
+              <a:rPr lang="ko-KR" altLang="en-US" sz="825" dirty="0">
+                <a:solidFill>
+                  <a:schemeClr val="tx1">
+                    <a:lumMod val="85000"/>
+                    <a:lumOff val="15000"/>
+                  </a:schemeClr>
+                </a:solidFill>
+                <a:latin typeface="Pretendard" panose="02000503000000020004" pitchFamily="2" charset="-127"/>
+                <a:ea typeface="Pretendard" panose="02000503000000020004" pitchFamily="2" charset="-127"/>
+                <a:cs typeface="Pretendard" panose="02000503000000020004" pitchFamily="2" charset="-127"/>
+              </a:rPr>
+              <a:t> </a:t>
+            </a:r>
+            <a:r>
+              <a:rPr lang="en-US" altLang="ko-KR" sz="825" dirty="0">
+                <a:solidFill>
+                  <a:schemeClr val="tx1">
+                    <a:lumMod val="85000"/>
+                    <a:lumOff val="15000"/>
+                  </a:schemeClr>
+                </a:solidFill>
+                <a:latin typeface="Pretendard" panose="02000503000000020004" pitchFamily="2" charset="-127"/>
+                <a:ea typeface="Pretendard" panose="02000503000000020004" pitchFamily="2" charset="-127"/>
+                <a:cs typeface="Pretendard" panose="02000503000000020004" pitchFamily="2" charset="-127"/>
+              </a:rPr>
+              <a:t>API</a:t>
+            </a:r>
+            <a:r>
+              <a:rPr lang="ko-KR" altLang="en-US" sz="825" dirty="0">
+                <a:solidFill>
+                  <a:schemeClr val="tx1">
+                    <a:lumMod val="85000"/>
+                    <a:lumOff val="15000"/>
+                  </a:schemeClr>
+                </a:solidFill>
+                <a:latin typeface="Pretendard" panose="02000503000000020004" pitchFamily="2" charset="-127"/>
+                <a:ea typeface="Pretendard" panose="02000503000000020004" pitchFamily="2" charset="-127"/>
+                <a:cs typeface="Pretendard" panose="02000503000000020004" pitchFamily="2" charset="-127"/>
+              </a:rPr>
+              <a:t>에서 정류장 고유 </a:t>
+            </a:r>
+            <a:r>
+              <a:rPr lang="en-US" altLang="ko-KR" sz="825" dirty="0">
+                <a:solidFill>
+                  <a:schemeClr val="tx1">
+                    <a:lumMod val="85000"/>
+                    <a:lumOff val="15000"/>
+                  </a:schemeClr>
+                </a:solidFill>
+                <a:latin typeface="Pretendard" panose="02000503000000020004" pitchFamily="2" charset="-127"/>
+                <a:ea typeface="Pretendard" panose="02000503000000020004" pitchFamily="2" charset="-127"/>
+                <a:cs typeface="Pretendard" panose="02000503000000020004" pitchFamily="2" charset="-127"/>
+              </a:rPr>
+              <a:t>ID</a:t>
+            </a:r>
+            <a:r>
+              <a:rPr lang="ko-KR" altLang="en-US" sz="825" dirty="0">
+                <a:solidFill>
+                  <a:schemeClr val="tx1">
+                    <a:lumMod val="85000"/>
+                    <a:lumOff val="15000"/>
+                  </a:schemeClr>
+                </a:solidFill>
+                <a:latin typeface="Pretendard" panose="02000503000000020004" pitchFamily="2" charset="-127"/>
+                <a:ea typeface="Pretendard" panose="02000503000000020004" pitchFamily="2" charset="-127"/>
+                <a:cs typeface="Pretendard" panose="02000503000000020004" pitchFamily="2" charset="-127"/>
+              </a:rPr>
+              <a:t>와 그에 대응하는 </a:t>
+            </a:r>
+            <a:r>
+              <a:rPr lang="ko-KR" altLang="en-US" sz="825" dirty="0" err="1">
+                <a:solidFill>
+                  <a:schemeClr val="tx1">
+                    <a:lumMod val="85000"/>
+                    <a:lumOff val="15000"/>
+                  </a:schemeClr>
+                </a:solidFill>
+                <a:latin typeface="Pretendard" panose="02000503000000020004" pitchFamily="2" charset="-127"/>
+                <a:ea typeface="Pretendard" panose="02000503000000020004" pitchFamily="2" charset="-127"/>
+                <a:cs typeface="Pretendard" panose="02000503000000020004" pitchFamily="2" charset="-127"/>
+              </a:rPr>
+              <a:t>한글명</a:t>
+            </a:r>
+            <a:r>
+              <a:rPr lang="en-US" altLang="ko-KR" sz="825" dirty="0">
+                <a:solidFill>
+                  <a:schemeClr val="tx1">
+                    <a:lumMod val="85000"/>
+                    <a:lumOff val="15000"/>
+                  </a:schemeClr>
+                </a:solidFill>
+                <a:latin typeface="Pretendard" panose="02000503000000020004" pitchFamily="2" charset="-127"/>
+                <a:ea typeface="Pretendard" panose="02000503000000020004" pitchFamily="2" charset="-127"/>
+                <a:cs typeface="Pretendard" panose="02000503000000020004" pitchFamily="2" charset="-127"/>
+              </a:rPr>
+              <a:t>,</a:t>
+            </a:r>
+            <a:r>
+              <a:rPr lang="ko-KR" altLang="en-US" sz="825" dirty="0">
+                <a:solidFill>
+                  <a:schemeClr val="tx1">
+                    <a:lumMod val="85000"/>
+                    <a:lumOff val="15000"/>
+                  </a:schemeClr>
+                </a:solidFill>
+                <a:latin typeface="Pretendard" panose="02000503000000020004" pitchFamily="2" charset="-127"/>
+                <a:ea typeface="Pretendard" panose="02000503000000020004" pitchFamily="2" charset="-127"/>
+                <a:cs typeface="Pretendard" panose="02000503000000020004" pitchFamily="2" charset="-127"/>
+              </a:rPr>
+              <a:t> 지도상 위치를 받아옵니다</a:t>
+            </a:r>
+            <a:r>
+              <a:rPr lang="en-US" altLang="ko-KR" sz="825" dirty="0">
+                <a:solidFill>
+                  <a:schemeClr val="tx1">
+                    <a:lumMod val="85000"/>
+                    <a:lumOff val="15000"/>
+                  </a:schemeClr>
+                </a:solidFill>
+                <a:latin typeface="Pretendard" panose="02000503000000020004" pitchFamily="2" charset="-127"/>
+                <a:ea typeface="Pretendard" panose="02000503000000020004" pitchFamily="2" charset="-127"/>
+                <a:cs typeface="Pretendard" panose="02000503000000020004" pitchFamily="2" charset="-127"/>
+              </a:rPr>
+              <a:t>.</a:t>
+            </a:r>
+            <a:r>
+              <a:rPr lang="ko-KR" altLang="en-US" sz="825" dirty="0">
+                <a:solidFill>
+                  <a:schemeClr val="tx1">
+                    <a:lumMod val="85000"/>
+                    <a:lumOff val="15000"/>
+                  </a:schemeClr>
+                </a:solidFill>
+                <a:latin typeface="Pretendard" panose="02000503000000020004" pitchFamily="2" charset="-127"/>
+                <a:ea typeface="Pretendard" panose="02000503000000020004" pitchFamily="2" charset="-127"/>
+                <a:cs typeface="Pretendard" panose="02000503000000020004" pitchFamily="2" charset="-127"/>
+              </a:rPr>
+              <a:t> 카카오에서 제공하는 </a:t>
+            </a:r>
+            <a:r>
+              <a:rPr lang="en-US" altLang="ko-KR" sz="825" dirty="0">
+                <a:solidFill>
+                  <a:schemeClr val="tx1">
+                    <a:lumMod val="85000"/>
+                    <a:lumOff val="15000"/>
+                  </a:schemeClr>
+                </a:solidFill>
+                <a:highlight>
+                  <a:srgbClr val="FFECB2"/>
+                </a:highlight>
+                <a:latin typeface="Pretendard" panose="02000503000000020004" pitchFamily="2" charset="-127"/>
+                <a:ea typeface="Pretendard" panose="02000503000000020004" pitchFamily="2" charset="-127"/>
+                <a:cs typeface="Pretendard" panose="02000503000000020004" pitchFamily="2" charset="-127"/>
+              </a:rPr>
+              <a:t>’</a:t>
+            </a:r>
+            <a:r>
+              <a:rPr lang="ko-KR" altLang="en-US" sz="825" dirty="0" err="1">
+                <a:solidFill>
+                  <a:schemeClr val="tx1">
+                    <a:lumMod val="85000"/>
+                    <a:lumOff val="15000"/>
+                  </a:schemeClr>
+                </a:solidFill>
+                <a:highlight>
+                  <a:srgbClr val="FFECB2"/>
+                </a:highlight>
+                <a:latin typeface="Pretendard" panose="02000503000000020004" pitchFamily="2" charset="-127"/>
+                <a:ea typeface="Pretendard" panose="02000503000000020004" pitchFamily="2" charset="-127"/>
+                <a:cs typeface="Pretendard" panose="02000503000000020004" pitchFamily="2" charset="-127"/>
+              </a:rPr>
+              <a:t>카카오맵</a:t>
+            </a:r>
+            <a:r>
+              <a:rPr lang="en-US" altLang="ko-KR" sz="825" dirty="0">
+                <a:solidFill>
+                  <a:schemeClr val="tx1">
+                    <a:lumMod val="85000"/>
+                    <a:lumOff val="15000"/>
+                  </a:schemeClr>
+                </a:solidFill>
+                <a:highlight>
+                  <a:srgbClr val="FFECB2"/>
+                </a:highlight>
+                <a:latin typeface="Pretendard" panose="02000503000000020004" pitchFamily="2" charset="-127"/>
+                <a:ea typeface="Pretendard" panose="02000503000000020004" pitchFamily="2" charset="-127"/>
+                <a:cs typeface="Pretendard" panose="02000503000000020004" pitchFamily="2" charset="-127"/>
+              </a:rPr>
+              <a:t> </a:t>
+            </a:r>
+            <a:r>
+              <a:rPr lang="ko-KR" altLang="en-US" sz="825" dirty="0">
+                <a:solidFill>
+                  <a:schemeClr val="tx1">
+                    <a:lumMod val="85000"/>
+                    <a:lumOff val="15000"/>
+                  </a:schemeClr>
+                </a:solidFill>
+                <a:highlight>
+                  <a:srgbClr val="FFECB2"/>
+                </a:highlight>
+                <a:latin typeface="Pretendard" panose="02000503000000020004" pitchFamily="2" charset="-127"/>
+                <a:ea typeface="Pretendard" panose="02000503000000020004" pitchFamily="2" charset="-127"/>
+                <a:cs typeface="Pretendard" panose="02000503000000020004" pitchFamily="2" charset="-127"/>
+              </a:rPr>
+              <a:t>로컬 </a:t>
+            </a:r>
+            <a:r>
+              <a:rPr lang="en-US" altLang="ko-KR" sz="825" dirty="0">
+                <a:solidFill>
+                  <a:schemeClr val="tx1">
+                    <a:lumMod val="85000"/>
+                    <a:lumOff val="15000"/>
+                  </a:schemeClr>
+                </a:solidFill>
+                <a:highlight>
+                  <a:srgbClr val="FFECB2"/>
+                </a:highlight>
+                <a:latin typeface="Pretendard" panose="02000503000000020004" pitchFamily="2" charset="-127"/>
+                <a:ea typeface="Pretendard" panose="02000503000000020004" pitchFamily="2" charset="-127"/>
+                <a:cs typeface="Pretendard" panose="02000503000000020004" pitchFamily="2" charset="-127"/>
+              </a:rPr>
+              <a:t>REST API’</a:t>
+            </a:r>
+            <a:r>
+              <a:rPr lang="ko-KR" altLang="en-US" sz="825" dirty="0" err="1">
+                <a:solidFill>
+                  <a:schemeClr val="tx1">
+                    <a:lumMod val="85000"/>
+                    <a:lumOff val="15000"/>
+                  </a:schemeClr>
+                </a:solidFill>
+                <a:latin typeface="Pretendard" panose="02000503000000020004" pitchFamily="2" charset="-127"/>
+                <a:ea typeface="Pretendard" panose="02000503000000020004" pitchFamily="2" charset="-127"/>
+                <a:cs typeface="Pretendard" panose="02000503000000020004" pitchFamily="2" charset="-127"/>
+              </a:rPr>
+              <a:t>를</a:t>
+            </a:r>
+            <a:r>
+              <a:rPr lang="ko-KR" altLang="en-US" sz="825" dirty="0">
+                <a:solidFill>
+                  <a:schemeClr val="tx1">
+                    <a:lumMod val="85000"/>
+                    <a:lumOff val="15000"/>
+                  </a:schemeClr>
+                </a:solidFill>
+                <a:latin typeface="Pretendard" panose="02000503000000020004" pitchFamily="2" charset="-127"/>
+                <a:ea typeface="Pretendard" panose="02000503000000020004" pitchFamily="2" charset="-127"/>
+                <a:cs typeface="Pretendard" panose="02000503000000020004" pitchFamily="2" charset="-127"/>
+              </a:rPr>
+              <a:t> 활용하여 버스 정류장이 위치한 좌표가 어느 행정동에 속하여 있는지를 받아옵니다</a:t>
+            </a:r>
+            <a:r>
+              <a:rPr lang="en-US" altLang="ko-KR" sz="825" dirty="0">
+                <a:solidFill>
+                  <a:schemeClr val="tx1">
+                    <a:lumMod val="85000"/>
+                    <a:lumOff val="15000"/>
+                  </a:schemeClr>
+                </a:solidFill>
+                <a:latin typeface="Pretendard" panose="02000503000000020004" pitchFamily="2" charset="-127"/>
+                <a:ea typeface="Pretendard" panose="02000503000000020004" pitchFamily="2" charset="-127"/>
+                <a:cs typeface="Pretendard" panose="02000503000000020004" pitchFamily="2" charset="-127"/>
+              </a:rPr>
+              <a:t>.</a:t>
+            </a:r>
+          </a:p>
+        </p:txBody>
+      </p:sp>
+      <p:sp>
+        <p:nvSpPr>
+          <p:cNvPr id="63" name="TextBox 62">
+            <a:extLst>
+              <a:ext uri="{FF2B5EF4-FFF2-40B4-BE49-F238E27FC236}">
+                <a16:creationId xmlns:a16="http://schemas.microsoft.com/office/drawing/2014/main" id="{C5469D47-14C3-FC52-CDDE-C15291F3C5A9}"/>
+              </a:ext>
+            </a:extLst>
+          </p:cNvPr>
+          <p:cNvSpPr txBox="1"/>
+          <p:nvPr/>
+        </p:nvSpPr>
+        <p:spPr>
+          <a:xfrm>
+            <a:off x="2157874" y="2700684"/>
+            <a:ext cx="1079142" cy="219291"/>
+          </a:xfrm>
+          <a:prstGeom prst="rect">
+            <a:avLst/>
+          </a:prstGeom>
+          <a:noFill/>
+        </p:spPr>
+        <p:txBody>
+          <a:bodyPr wrap="none" rtlCol="0">
+            <a:spAutoFit/>
+          </a:bodyPr>
+          <a:lstStyle/>
+          <a:p>
+            <a:r>
+              <a:rPr lang="ko-KR" altLang="en-US" sz="825" b="1" dirty="0">
+                <a:solidFill>
+                  <a:schemeClr val="tx1">
+                    <a:lumMod val="85000"/>
+                    <a:lumOff val="15000"/>
+                  </a:schemeClr>
+                </a:solidFill>
+                <a:latin typeface="Pretendard" panose="02000503000000020004" pitchFamily="2" charset="-127"/>
+                <a:ea typeface="Pretendard" panose="02000503000000020004" pitchFamily="2" charset="-127"/>
+                <a:cs typeface="Pretendard" panose="02000503000000020004" pitchFamily="2" charset="-127"/>
+              </a:rPr>
+              <a:t>정보 출처와 저장 절차</a:t>
+            </a:r>
+            <a:endParaRPr lang="en-US" altLang="ko-KR" sz="825" b="1" dirty="0">
+              <a:solidFill>
+                <a:schemeClr val="tx1">
+                  <a:lumMod val="85000"/>
+                  <a:lumOff val="15000"/>
+                </a:schemeClr>
+              </a:solidFill>
+              <a:latin typeface="Pretendard" panose="02000503000000020004" pitchFamily="2" charset="-127"/>
+              <a:ea typeface="Pretendard" panose="02000503000000020004" pitchFamily="2" charset="-127"/>
+              <a:cs typeface="Pretendard" panose="02000503000000020004" pitchFamily="2" charset="-127"/>
+            </a:endParaRPr>
+          </a:p>
+        </p:txBody>
+      </p:sp>
+      <p:sp>
+        <p:nvSpPr>
+          <p:cNvPr id="64" name="TextBox 63">
+            <a:extLst>
+              <a:ext uri="{FF2B5EF4-FFF2-40B4-BE49-F238E27FC236}">
+                <a16:creationId xmlns:a16="http://schemas.microsoft.com/office/drawing/2014/main" id="{4EB63DD6-0C12-DB96-95AF-8B93AE82F43B}"/>
+              </a:ext>
+            </a:extLst>
+          </p:cNvPr>
+          <p:cNvSpPr txBox="1"/>
+          <p:nvPr/>
+        </p:nvSpPr>
+        <p:spPr>
+          <a:xfrm>
+            <a:off x="2157873" y="3451339"/>
+            <a:ext cx="4497051" cy="1665328"/>
+          </a:xfrm>
+          <a:prstGeom prst="rect">
+            <a:avLst/>
+          </a:prstGeom>
+          <a:noFill/>
+        </p:spPr>
+        <p:txBody>
+          <a:bodyPr wrap="square" rtlCol="0">
+            <a:spAutoFit/>
+          </a:bodyPr>
+          <a:lstStyle/>
+          <a:p>
+            <a:pPr algn="just">
+              <a:lnSpc>
+                <a:spcPct val="125000"/>
+              </a:lnSpc>
+            </a:pPr>
+            <a:r>
+              <a:rPr lang="ko-KR" altLang="en-US" sz="825" dirty="0">
+                <a:solidFill>
+                  <a:schemeClr val="tx1">
+                    <a:lumMod val="85000"/>
+                    <a:lumOff val="15000"/>
+                  </a:schemeClr>
+                </a:solidFill>
+                <a:latin typeface="Pretendard" panose="02000503000000020004" pitchFamily="2" charset="-127"/>
+                <a:ea typeface="Pretendard" panose="02000503000000020004" pitchFamily="2" charset="-127"/>
+                <a:cs typeface="Pretendard" panose="02000503000000020004" pitchFamily="2" charset="-127"/>
+              </a:rPr>
+              <a:t>   </a:t>
+            </a:r>
+            <a:r>
+              <a:rPr lang="en-US" altLang="ko-KR" sz="825" dirty="0">
+                <a:solidFill>
+                  <a:schemeClr val="tx1">
+                    <a:lumMod val="85000"/>
+                    <a:lumOff val="15000"/>
+                  </a:schemeClr>
+                </a:solidFill>
+                <a:highlight>
+                  <a:srgbClr val="FFECB2"/>
+                </a:highlight>
+                <a:latin typeface="Pretendard" panose="02000503000000020004" pitchFamily="2" charset="-127"/>
+                <a:ea typeface="Pretendard" panose="02000503000000020004" pitchFamily="2" charset="-127"/>
+                <a:cs typeface="Pretendard" panose="02000503000000020004" pitchFamily="2" charset="-127"/>
+              </a:rPr>
+              <a:t>‘</a:t>
+            </a:r>
+            <a:r>
+              <a:rPr lang="en-US" altLang="ko-KR" sz="825" dirty="0" err="1">
+                <a:solidFill>
+                  <a:schemeClr val="tx1">
+                    <a:lumMod val="85000"/>
+                    <a:lumOff val="15000"/>
+                  </a:schemeClr>
+                </a:solidFill>
+                <a:highlight>
+                  <a:srgbClr val="FFECB2"/>
+                </a:highlight>
+                <a:latin typeface="Pretendard" panose="02000503000000020004" pitchFamily="2" charset="-127"/>
+                <a:ea typeface="Pretendard" panose="02000503000000020004" pitchFamily="2" charset="-127"/>
+                <a:cs typeface="Pretendard" panose="02000503000000020004" pitchFamily="2" charset="-127"/>
+              </a:rPr>
+              <a:t>fetch_busstop_data.py</a:t>
+            </a:r>
+            <a:r>
+              <a:rPr lang="en-US" altLang="ko-KR" sz="825" dirty="0">
+                <a:solidFill>
+                  <a:schemeClr val="tx1">
+                    <a:lumMod val="85000"/>
+                    <a:lumOff val="15000"/>
+                  </a:schemeClr>
+                </a:solidFill>
+                <a:highlight>
+                  <a:srgbClr val="FFECB2"/>
+                </a:highlight>
+                <a:latin typeface="Pretendard" panose="02000503000000020004" pitchFamily="2" charset="-127"/>
+                <a:ea typeface="Pretendard" panose="02000503000000020004" pitchFamily="2" charset="-127"/>
+                <a:cs typeface="Pretendard" panose="02000503000000020004" pitchFamily="2" charset="-127"/>
+              </a:rPr>
+              <a:t>’</a:t>
+            </a:r>
+            <a:r>
+              <a:rPr lang="ko-KR" altLang="en-US" sz="825" dirty="0">
+                <a:solidFill>
+                  <a:schemeClr val="tx1">
+                    <a:lumMod val="85000"/>
+                    <a:lumOff val="15000"/>
+                  </a:schemeClr>
+                </a:solidFill>
+                <a:latin typeface="Pretendard" panose="02000503000000020004" pitchFamily="2" charset="-127"/>
+                <a:ea typeface="Pretendard" panose="02000503000000020004" pitchFamily="2" charset="-127"/>
+                <a:cs typeface="Pretendard" panose="02000503000000020004" pitchFamily="2" charset="-127"/>
+              </a:rPr>
+              <a:t>에서</a:t>
+            </a:r>
+            <a:r>
+              <a:rPr lang="en-US" altLang="ko-KR" sz="825" dirty="0">
+                <a:solidFill>
+                  <a:schemeClr val="tx1">
+                    <a:lumMod val="85000"/>
+                    <a:lumOff val="15000"/>
+                  </a:schemeClr>
+                </a:solidFill>
+                <a:latin typeface="Pretendard" panose="02000503000000020004" pitchFamily="2" charset="-127"/>
+                <a:ea typeface="Pretendard" panose="02000503000000020004" pitchFamily="2" charset="-127"/>
+                <a:cs typeface="Pretendard" panose="02000503000000020004" pitchFamily="2" charset="-127"/>
+              </a:rPr>
+              <a:t> API</a:t>
+            </a:r>
+            <a:r>
+              <a:rPr lang="ko-KR" altLang="en-US" sz="825" dirty="0">
+                <a:solidFill>
+                  <a:schemeClr val="tx1">
+                    <a:lumMod val="85000"/>
+                    <a:lumOff val="15000"/>
+                  </a:schemeClr>
+                </a:solidFill>
+                <a:latin typeface="Pretendard" panose="02000503000000020004" pitchFamily="2" charset="-127"/>
+                <a:ea typeface="Pretendard" panose="02000503000000020004" pitchFamily="2" charset="-127"/>
+                <a:cs typeface="Pretendard" panose="02000503000000020004" pitchFamily="2" charset="-127"/>
+              </a:rPr>
+              <a:t> 요청과 </a:t>
+            </a:r>
+            <a:r>
+              <a:rPr lang="en-US" altLang="ko-KR" sz="825" dirty="0">
+                <a:solidFill>
+                  <a:schemeClr val="tx1">
+                    <a:lumMod val="85000"/>
+                    <a:lumOff val="15000"/>
+                  </a:schemeClr>
+                </a:solidFill>
+                <a:latin typeface="Pretendard" panose="02000503000000020004" pitchFamily="2" charset="-127"/>
+                <a:ea typeface="Pretendard" panose="02000503000000020004" pitchFamily="2" charset="-127"/>
+                <a:cs typeface="Pretendard" panose="02000503000000020004" pitchFamily="2" charset="-127"/>
+              </a:rPr>
+              <a:t>DB</a:t>
+            </a:r>
+            <a:r>
+              <a:rPr lang="ko-KR" altLang="en-US" sz="825" dirty="0">
+                <a:solidFill>
+                  <a:schemeClr val="tx1">
+                    <a:lumMod val="85000"/>
+                    <a:lumOff val="15000"/>
+                  </a:schemeClr>
+                </a:solidFill>
+                <a:latin typeface="Pretendard" panose="02000503000000020004" pitchFamily="2" charset="-127"/>
+                <a:ea typeface="Pretendard" panose="02000503000000020004" pitchFamily="2" charset="-127"/>
+                <a:cs typeface="Pretendard" panose="02000503000000020004" pitchFamily="2" charset="-127"/>
+              </a:rPr>
+              <a:t> 저장을 관리합니다</a:t>
+            </a:r>
+            <a:r>
+              <a:rPr lang="en-US" altLang="ko-KR" sz="825" dirty="0">
+                <a:solidFill>
+                  <a:schemeClr val="tx1">
+                    <a:lumMod val="85000"/>
+                    <a:lumOff val="15000"/>
+                  </a:schemeClr>
+                </a:solidFill>
+                <a:latin typeface="Pretendard" panose="02000503000000020004" pitchFamily="2" charset="-127"/>
+                <a:ea typeface="Pretendard" panose="02000503000000020004" pitchFamily="2" charset="-127"/>
+                <a:cs typeface="Pretendard" panose="02000503000000020004" pitchFamily="2" charset="-127"/>
+              </a:rPr>
+              <a:t>.</a:t>
+            </a:r>
+            <a:r>
+              <a:rPr lang="ko-KR" altLang="en-US" sz="825" dirty="0">
+                <a:solidFill>
+                  <a:schemeClr val="tx1">
+                    <a:lumMod val="85000"/>
+                    <a:lumOff val="15000"/>
+                  </a:schemeClr>
+                </a:solidFill>
+                <a:latin typeface="Pretendard" panose="02000503000000020004" pitchFamily="2" charset="-127"/>
+                <a:ea typeface="Pretendard" panose="02000503000000020004" pitchFamily="2" charset="-127"/>
+                <a:cs typeface="Pretendard" panose="02000503000000020004" pitchFamily="2" charset="-127"/>
+              </a:rPr>
+              <a:t> </a:t>
+            </a:r>
+            <a:r>
+              <a:rPr lang="ko-KR" altLang="en-US" sz="825" dirty="0">
+                <a:solidFill>
+                  <a:schemeClr val="tx1">
+                    <a:lumMod val="85000"/>
+                    <a:lumOff val="15000"/>
+                  </a:schemeClr>
+                </a:solidFill>
+                <a:highlight>
+                  <a:srgbClr val="FFDADB"/>
+                </a:highlight>
+                <a:latin typeface="Pretendard" panose="02000503000000020004" pitchFamily="2" charset="-127"/>
+                <a:ea typeface="Pretendard" panose="02000503000000020004" pitchFamily="2" charset="-127"/>
+                <a:cs typeface="Pretendard" panose="02000503000000020004" pitchFamily="2" charset="-127"/>
+              </a:rPr>
+              <a:t>행정동별 인구 수와 마찬가지로 만 개가 넘는 정류장의 데이터를 받아와야 하지만</a:t>
+            </a:r>
+            <a:r>
+              <a:rPr lang="en-US" altLang="ko-KR" sz="825" dirty="0">
+                <a:solidFill>
+                  <a:schemeClr val="tx1">
+                    <a:lumMod val="85000"/>
+                    <a:lumOff val="15000"/>
+                  </a:schemeClr>
+                </a:solidFill>
+                <a:highlight>
+                  <a:srgbClr val="FFDADB"/>
+                </a:highlight>
+                <a:latin typeface="Pretendard" panose="02000503000000020004" pitchFamily="2" charset="-127"/>
+                <a:ea typeface="Pretendard" panose="02000503000000020004" pitchFamily="2" charset="-127"/>
+                <a:cs typeface="Pretendard" panose="02000503000000020004" pitchFamily="2" charset="-127"/>
+              </a:rPr>
+              <a:t>,</a:t>
+            </a:r>
+            <a:r>
+              <a:rPr lang="ko-KR" altLang="en-US" sz="825" dirty="0">
+                <a:solidFill>
+                  <a:schemeClr val="tx1">
+                    <a:lumMod val="85000"/>
+                    <a:lumOff val="15000"/>
+                  </a:schemeClr>
+                </a:solidFill>
+                <a:highlight>
+                  <a:srgbClr val="FFDADB"/>
+                </a:highlight>
+                <a:latin typeface="Pretendard" panose="02000503000000020004" pitchFamily="2" charset="-127"/>
+                <a:ea typeface="Pretendard" panose="02000503000000020004" pitchFamily="2" charset="-127"/>
+                <a:cs typeface="Pretendard" panose="02000503000000020004" pitchFamily="2" charset="-127"/>
+              </a:rPr>
+              <a:t> 한 번에 </a:t>
+            </a:r>
+            <a:r>
+              <a:rPr lang="en-US" altLang="ko-KR" sz="825" dirty="0">
+                <a:solidFill>
+                  <a:schemeClr val="tx1">
+                    <a:lumMod val="85000"/>
+                    <a:lumOff val="15000"/>
+                  </a:schemeClr>
+                </a:solidFill>
+                <a:highlight>
+                  <a:srgbClr val="FFDADB"/>
+                </a:highlight>
+                <a:latin typeface="Pretendard" panose="02000503000000020004" pitchFamily="2" charset="-127"/>
+                <a:ea typeface="Pretendard" panose="02000503000000020004" pitchFamily="2" charset="-127"/>
+                <a:cs typeface="Pretendard" panose="02000503000000020004" pitchFamily="2" charset="-127"/>
+              </a:rPr>
+              <a:t>1,000</a:t>
+            </a:r>
+            <a:r>
+              <a:rPr lang="ko-KR" altLang="en-US" sz="825" dirty="0">
+                <a:solidFill>
+                  <a:schemeClr val="tx1">
+                    <a:lumMod val="85000"/>
+                    <a:lumOff val="15000"/>
+                  </a:schemeClr>
+                </a:solidFill>
+                <a:highlight>
+                  <a:srgbClr val="FFDADB"/>
+                </a:highlight>
+                <a:latin typeface="Pretendard" panose="02000503000000020004" pitchFamily="2" charset="-127"/>
+                <a:ea typeface="Pretendard" panose="02000503000000020004" pitchFamily="2" charset="-127"/>
+                <a:cs typeface="Pretendard" panose="02000503000000020004" pitchFamily="2" charset="-127"/>
+              </a:rPr>
+              <a:t>건 까지의 제한이 있기에</a:t>
+            </a:r>
+            <a:r>
+              <a:rPr lang="en-US" altLang="ko-KR" sz="825" dirty="0">
+                <a:solidFill>
+                  <a:schemeClr val="tx1">
+                    <a:lumMod val="85000"/>
+                    <a:lumOff val="15000"/>
+                  </a:schemeClr>
+                </a:solidFill>
+                <a:highlight>
+                  <a:srgbClr val="FFDADB"/>
+                </a:highlight>
+                <a:latin typeface="Pretendard" panose="02000503000000020004" pitchFamily="2" charset="-127"/>
+                <a:ea typeface="Pretendard" panose="02000503000000020004" pitchFamily="2" charset="-127"/>
+                <a:cs typeface="Pretendard" panose="02000503000000020004" pitchFamily="2" charset="-127"/>
+              </a:rPr>
+              <a:t>,</a:t>
+            </a:r>
+            <a:r>
+              <a:rPr lang="ko-KR" altLang="en-US" sz="825" dirty="0">
+                <a:solidFill>
+                  <a:schemeClr val="tx1">
+                    <a:lumMod val="85000"/>
+                    <a:lumOff val="15000"/>
+                  </a:schemeClr>
+                </a:solidFill>
+                <a:latin typeface="Pretendard" panose="02000503000000020004" pitchFamily="2" charset="-127"/>
+                <a:ea typeface="Pretendard" panose="02000503000000020004" pitchFamily="2" charset="-127"/>
+                <a:cs typeface="Pretendard" panose="02000503000000020004" pitchFamily="2" charset="-127"/>
+              </a:rPr>
+              <a:t> 마찬가지로 </a:t>
+            </a:r>
+            <a:r>
+              <a:rPr lang="ko-KR" altLang="en-US" sz="825" dirty="0" err="1">
+                <a:solidFill>
+                  <a:schemeClr val="tx1">
+                    <a:lumMod val="85000"/>
+                    <a:lumOff val="15000"/>
+                  </a:schemeClr>
+                </a:solidFill>
+                <a:latin typeface="Pretendard" panose="02000503000000020004" pitchFamily="2" charset="-127"/>
+                <a:ea typeface="Pretendard" panose="02000503000000020004" pitchFamily="2" charset="-127"/>
+                <a:cs typeface="Pretendard" panose="02000503000000020004" pitchFamily="2" charset="-127"/>
+              </a:rPr>
+              <a:t>페이지네이션을</a:t>
+            </a:r>
+            <a:r>
+              <a:rPr lang="ko-KR" altLang="en-US" sz="825" dirty="0">
+                <a:solidFill>
+                  <a:schemeClr val="tx1">
+                    <a:lumMod val="85000"/>
+                    <a:lumOff val="15000"/>
+                  </a:schemeClr>
+                </a:solidFill>
+                <a:latin typeface="Pretendard" panose="02000503000000020004" pitchFamily="2" charset="-127"/>
+                <a:ea typeface="Pretendard" panose="02000503000000020004" pitchFamily="2" charset="-127"/>
+                <a:cs typeface="Pretendard" panose="02000503000000020004" pitchFamily="2" charset="-127"/>
+              </a:rPr>
+              <a:t> 활용하여 </a:t>
+            </a:r>
+            <a:r>
+              <a:rPr lang="en-US" altLang="ko-KR" sz="825" dirty="0">
+                <a:solidFill>
+                  <a:schemeClr val="tx1">
+                    <a:lumMod val="85000"/>
+                    <a:lumOff val="15000"/>
+                  </a:schemeClr>
+                </a:solidFill>
+                <a:latin typeface="Pretendard" panose="02000503000000020004" pitchFamily="2" charset="-127"/>
+                <a:ea typeface="Pretendard" panose="02000503000000020004" pitchFamily="2" charset="-127"/>
+                <a:cs typeface="Pretendard" panose="02000503000000020004" pitchFamily="2" charset="-127"/>
+              </a:rPr>
+              <a:t>1,000</a:t>
+            </a:r>
+            <a:r>
+              <a:rPr lang="ko-KR" altLang="en-US" sz="825" dirty="0">
+                <a:solidFill>
+                  <a:schemeClr val="tx1">
+                    <a:lumMod val="85000"/>
+                    <a:lumOff val="15000"/>
+                  </a:schemeClr>
+                </a:solidFill>
+                <a:latin typeface="Pretendard" panose="02000503000000020004" pitchFamily="2" charset="-127"/>
+                <a:ea typeface="Pretendard" panose="02000503000000020004" pitchFamily="2" charset="-127"/>
+                <a:cs typeface="Pretendard" panose="02000503000000020004" pitchFamily="2" charset="-127"/>
+              </a:rPr>
+              <a:t>건씩 나누어 요청을 보냅니다</a:t>
+            </a:r>
+            <a:r>
+              <a:rPr lang="en-US" altLang="ko-KR" sz="825" dirty="0">
+                <a:solidFill>
+                  <a:schemeClr val="tx1">
+                    <a:lumMod val="85000"/>
+                    <a:lumOff val="15000"/>
+                  </a:schemeClr>
+                </a:solidFill>
+                <a:latin typeface="Pretendard" panose="02000503000000020004" pitchFamily="2" charset="-127"/>
+                <a:ea typeface="Pretendard" panose="02000503000000020004" pitchFamily="2" charset="-127"/>
+                <a:cs typeface="Pretendard" panose="02000503000000020004" pitchFamily="2" charset="-127"/>
+              </a:rPr>
+              <a:t>.</a:t>
+            </a:r>
+            <a:r>
+              <a:rPr lang="ko-KR" altLang="en-US" sz="825" dirty="0">
+                <a:solidFill>
+                  <a:schemeClr val="tx1">
+                    <a:lumMod val="85000"/>
+                    <a:lumOff val="15000"/>
+                  </a:schemeClr>
+                </a:solidFill>
+                <a:latin typeface="Pretendard" panose="02000503000000020004" pitchFamily="2" charset="-127"/>
+                <a:ea typeface="Pretendard" panose="02000503000000020004" pitchFamily="2" charset="-127"/>
+                <a:cs typeface="Pretendard" panose="02000503000000020004" pitchFamily="2" charset="-127"/>
+              </a:rPr>
+              <a:t> </a:t>
+            </a:r>
+            <a:r>
+              <a:rPr lang="ko-KR" altLang="en-US" sz="825" dirty="0">
+                <a:solidFill>
+                  <a:schemeClr val="tx1">
+                    <a:lumMod val="85000"/>
+                    <a:lumOff val="15000"/>
+                  </a:schemeClr>
+                </a:solidFill>
+                <a:highlight>
+                  <a:srgbClr val="FFDADB"/>
+                </a:highlight>
+                <a:latin typeface="Pretendard" panose="02000503000000020004" pitchFamily="2" charset="-127"/>
+                <a:ea typeface="Pretendard" panose="02000503000000020004" pitchFamily="2" charset="-127"/>
+                <a:cs typeface="Pretendard" panose="02000503000000020004" pitchFamily="2" charset="-127"/>
+              </a:rPr>
+              <a:t>교통 정책에 따라 생겼다 사라질 수도 있는 버스 정류장이기에</a:t>
+            </a:r>
+            <a:r>
+              <a:rPr lang="en-US" altLang="ko-KR" sz="825" dirty="0">
+                <a:solidFill>
+                  <a:schemeClr val="tx1">
+                    <a:lumMod val="85000"/>
+                    <a:lumOff val="15000"/>
+                  </a:schemeClr>
+                </a:solidFill>
+                <a:highlight>
+                  <a:srgbClr val="FFDADB"/>
+                </a:highlight>
+                <a:latin typeface="Pretendard" panose="02000503000000020004" pitchFamily="2" charset="-127"/>
+                <a:ea typeface="Pretendard" panose="02000503000000020004" pitchFamily="2" charset="-127"/>
+                <a:cs typeface="Pretendard" panose="02000503000000020004" pitchFamily="2" charset="-127"/>
+              </a:rPr>
+              <a:t>,</a:t>
+            </a:r>
+            <a:r>
+              <a:rPr lang="ko-KR" altLang="en-US" sz="825" dirty="0">
+                <a:solidFill>
+                  <a:schemeClr val="tx1">
+                    <a:lumMod val="85000"/>
+                    <a:lumOff val="15000"/>
+                  </a:schemeClr>
+                </a:solidFill>
+                <a:latin typeface="Pretendard" panose="02000503000000020004" pitchFamily="2" charset="-127"/>
+                <a:ea typeface="Pretendard" panose="02000503000000020004" pitchFamily="2" charset="-127"/>
+                <a:cs typeface="Pretendard" panose="02000503000000020004" pitchFamily="2" charset="-127"/>
+              </a:rPr>
+              <a:t> 정류장이 사용되고 있는지</a:t>
+            </a:r>
+            <a:r>
+              <a:rPr lang="en-US" altLang="ko-KR" sz="825" dirty="0">
+                <a:solidFill>
+                  <a:schemeClr val="tx1">
+                    <a:lumMod val="85000"/>
+                    <a:lumOff val="15000"/>
+                  </a:schemeClr>
+                </a:solidFill>
+                <a:latin typeface="Pretendard" panose="02000503000000020004" pitchFamily="2" charset="-127"/>
+                <a:ea typeface="Pretendard" panose="02000503000000020004" pitchFamily="2" charset="-127"/>
+                <a:cs typeface="Pretendard" panose="02000503000000020004" pitchFamily="2" charset="-127"/>
+              </a:rPr>
+              <a:t>,</a:t>
+            </a:r>
+            <a:r>
+              <a:rPr lang="ko-KR" altLang="en-US" sz="825" dirty="0">
+                <a:solidFill>
+                  <a:schemeClr val="tx1">
+                    <a:lumMod val="85000"/>
+                    <a:lumOff val="15000"/>
+                  </a:schemeClr>
+                </a:solidFill>
+                <a:latin typeface="Pretendard" panose="02000503000000020004" pitchFamily="2" charset="-127"/>
+                <a:ea typeface="Pretendard" panose="02000503000000020004" pitchFamily="2" charset="-127"/>
+                <a:cs typeface="Pretendard" panose="02000503000000020004" pitchFamily="2" charset="-127"/>
+              </a:rPr>
+              <a:t> 아닌지 상태를 별도로 추적합니다</a:t>
+            </a:r>
+            <a:r>
+              <a:rPr lang="en-US" altLang="ko-KR" sz="825" dirty="0">
+                <a:solidFill>
+                  <a:schemeClr val="tx1">
+                    <a:lumMod val="85000"/>
+                    <a:lumOff val="15000"/>
+                  </a:schemeClr>
+                </a:solidFill>
+                <a:latin typeface="Pretendard" panose="02000503000000020004" pitchFamily="2" charset="-127"/>
+                <a:ea typeface="Pretendard" panose="02000503000000020004" pitchFamily="2" charset="-127"/>
+                <a:cs typeface="Pretendard" panose="02000503000000020004" pitchFamily="2" charset="-127"/>
+              </a:rPr>
+              <a:t>.</a:t>
+            </a:r>
+            <a:r>
+              <a:rPr lang="ko-KR" altLang="en-US" sz="825" dirty="0">
+                <a:solidFill>
+                  <a:schemeClr val="tx1">
+                    <a:lumMod val="85000"/>
+                    <a:lumOff val="15000"/>
+                  </a:schemeClr>
+                </a:solidFill>
+                <a:latin typeface="Pretendard" panose="02000503000000020004" pitchFamily="2" charset="-127"/>
+                <a:ea typeface="Pretendard" panose="02000503000000020004" pitchFamily="2" charset="-127"/>
+                <a:cs typeface="Pretendard" panose="02000503000000020004" pitchFamily="2" charset="-127"/>
+              </a:rPr>
+              <a:t> 사용되고 있지 않은 상태</a:t>
+            </a:r>
+            <a:r>
+              <a:rPr lang="en-US" altLang="ko-KR" sz="825" dirty="0">
+                <a:solidFill>
+                  <a:schemeClr val="tx1">
+                    <a:lumMod val="85000"/>
+                    <a:lumOff val="15000"/>
+                  </a:schemeClr>
+                </a:solidFill>
+                <a:latin typeface="Pretendard" panose="02000503000000020004" pitchFamily="2" charset="-127"/>
+                <a:ea typeface="Pretendard" panose="02000503000000020004" pitchFamily="2" charset="-127"/>
+                <a:cs typeface="Pretendard" panose="02000503000000020004" pitchFamily="2" charset="-127"/>
+              </a:rPr>
+              <a:t>(</a:t>
+            </a:r>
+            <a:r>
+              <a:rPr lang="ko-KR" altLang="en-US" sz="825" dirty="0">
+                <a:solidFill>
+                  <a:schemeClr val="tx1">
+                    <a:lumMod val="85000"/>
+                    <a:lumOff val="15000"/>
+                  </a:schemeClr>
+                </a:solidFill>
+                <a:latin typeface="Pretendard" panose="02000503000000020004" pitchFamily="2" charset="-127"/>
+                <a:ea typeface="Pretendard" panose="02000503000000020004" pitchFamily="2" charset="-127"/>
+                <a:cs typeface="Pretendard" panose="02000503000000020004" pitchFamily="2" charset="-127"/>
+              </a:rPr>
+              <a:t>폐지된 정류장</a:t>
+            </a:r>
+            <a:r>
+              <a:rPr lang="en-US" altLang="ko-KR" sz="825" dirty="0">
+                <a:solidFill>
+                  <a:schemeClr val="tx1">
+                    <a:lumMod val="85000"/>
+                    <a:lumOff val="15000"/>
+                  </a:schemeClr>
+                </a:solidFill>
+                <a:latin typeface="Pretendard" panose="02000503000000020004" pitchFamily="2" charset="-127"/>
+                <a:ea typeface="Pretendard" panose="02000503000000020004" pitchFamily="2" charset="-127"/>
+                <a:cs typeface="Pretendard" panose="02000503000000020004" pitchFamily="2" charset="-127"/>
+              </a:rPr>
+              <a:t>)</a:t>
+            </a:r>
+            <a:r>
+              <a:rPr lang="ko-KR" altLang="en-US" sz="825" dirty="0">
+                <a:solidFill>
+                  <a:schemeClr val="tx1">
+                    <a:lumMod val="85000"/>
+                    <a:lumOff val="15000"/>
+                  </a:schemeClr>
+                </a:solidFill>
+                <a:latin typeface="Pretendard" panose="02000503000000020004" pitchFamily="2" charset="-127"/>
+                <a:ea typeface="Pretendard" panose="02000503000000020004" pitchFamily="2" charset="-127"/>
+                <a:cs typeface="Pretendard" panose="02000503000000020004" pitchFamily="2" charset="-127"/>
+              </a:rPr>
+              <a:t>이라도 과거 데이터를 열람하여 시간에 따른 추이를 확인할 수 있게 하고자 </a:t>
+            </a:r>
+            <a:r>
+              <a:rPr lang="en-US" altLang="ko-KR" sz="825" dirty="0">
+                <a:solidFill>
+                  <a:schemeClr val="tx1">
+                    <a:lumMod val="85000"/>
+                    <a:lumOff val="15000"/>
+                  </a:schemeClr>
+                </a:solidFill>
+                <a:latin typeface="Pretendard" panose="02000503000000020004" pitchFamily="2" charset="-127"/>
+                <a:ea typeface="Pretendard" panose="02000503000000020004" pitchFamily="2" charset="-127"/>
+                <a:cs typeface="Pretendard" panose="02000503000000020004" pitchFamily="2" charset="-127"/>
+              </a:rPr>
+              <a:t>‘</a:t>
+            </a:r>
+            <a:r>
+              <a:rPr lang="en-US" altLang="ko-KR" sz="825" dirty="0" err="1">
+                <a:solidFill>
+                  <a:schemeClr val="tx1">
+                    <a:lumMod val="85000"/>
+                    <a:lumOff val="15000"/>
+                  </a:schemeClr>
+                </a:solidFill>
+                <a:latin typeface="Pretendard" panose="02000503000000020004" pitchFamily="2" charset="-127"/>
+                <a:ea typeface="Pretendard" panose="02000503000000020004" pitchFamily="2" charset="-127"/>
+                <a:cs typeface="Pretendard" panose="02000503000000020004" pitchFamily="2" charset="-127"/>
+              </a:rPr>
+              <a:t>is_active</a:t>
+            </a:r>
+            <a:r>
+              <a:rPr lang="en-US" altLang="ko-KR" sz="825" dirty="0">
+                <a:solidFill>
+                  <a:schemeClr val="tx1">
+                    <a:lumMod val="85000"/>
+                    <a:lumOff val="15000"/>
+                  </a:schemeClr>
+                </a:solidFill>
+                <a:latin typeface="Pretendard" panose="02000503000000020004" pitchFamily="2" charset="-127"/>
+                <a:ea typeface="Pretendard" panose="02000503000000020004" pitchFamily="2" charset="-127"/>
+                <a:cs typeface="Pretendard" panose="02000503000000020004" pitchFamily="2" charset="-127"/>
+              </a:rPr>
+              <a:t>’</a:t>
+            </a:r>
+            <a:r>
+              <a:rPr lang="ko-KR" altLang="en-US" sz="825" dirty="0">
+                <a:solidFill>
+                  <a:schemeClr val="tx1">
+                    <a:lumMod val="85000"/>
+                    <a:lumOff val="15000"/>
+                  </a:schemeClr>
+                </a:solidFill>
+                <a:latin typeface="Pretendard" panose="02000503000000020004" pitchFamily="2" charset="-127"/>
+                <a:ea typeface="Pretendard" panose="02000503000000020004" pitchFamily="2" charset="-127"/>
+                <a:cs typeface="Pretendard" panose="02000503000000020004" pitchFamily="2" charset="-127"/>
+              </a:rPr>
+              <a:t> 데이터로 정류장 활성 여부를 추적하여 데이터를 삭제하지 않고 보존합니다</a:t>
+            </a:r>
+            <a:r>
+              <a:rPr lang="en-US" altLang="ko-KR" sz="825" dirty="0">
+                <a:solidFill>
+                  <a:schemeClr val="tx1">
+                    <a:lumMod val="85000"/>
+                    <a:lumOff val="15000"/>
+                  </a:schemeClr>
+                </a:solidFill>
+                <a:latin typeface="Pretendard" panose="02000503000000020004" pitchFamily="2" charset="-127"/>
+                <a:ea typeface="Pretendard" panose="02000503000000020004" pitchFamily="2" charset="-127"/>
+                <a:cs typeface="Pretendard" panose="02000503000000020004" pitchFamily="2" charset="-127"/>
+              </a:rPr>
+              <a:t>.</a:t>
+            </a:r>
+            <a:r>
+              <a:rPr lang="ko-KR" altLang="en-US" sz="825" dirty="0">
+                <a:solidFill>
+                  <a:schemeClr val="tx1">
+                    <a:lumMod val="85000"/>
+                    <a:lumOff val="15000"/>
+                  </a:schemeClr>
+                </a:solidFill>
+                <a:latin typeface="Pretendard" panose="02000503000000020004" pitchFamily="2" charset="-127"/>
+                <a:ea typeface="Pretendard" panose="02000503000000020004" pitchFamily="2" charset="-127"/>
+                <a:cs typeface="Pretendard" panose="02000503000000020004" pitchFamily="2" charset="-127"/>
+              </a:rPr>
+              <a:t> 또</a:t>
+            </a:r>
+            <a:r>
+              <a:rPr lang="en-US" altLang="ko-KR" sz="825" dirty="0">
+                <a:solidFill>
+                  <a:schemeClr val="tx1">
+                    <a:lumMod val="85000"/>
+                    <a:lumOff val="15000"/>
+                  </a:schemeClr>
+                </a:solidFill>
+                <a:latin typeface="Pretendard" panose="02000503000000020004" pitchFamily="2" charset="-127"/>
+                <a:ea typeface="Pretendard" panose="02000503000000020004" pitchFamily="2" charset="-127"/>
+                <a:cs typeface="Pretendard" panose="02000503000000020004" pitchFamily="2" charset="-127"/>
+              </a:rPr>
+              <a:t>,</a:t>
+            </a:r>
+            <a:r>
+              <a:rPr lang="ko-KR" altLang="en-US" sz="825" dirty="0">
+                <a:solidFill>
+                  <a:schemeClr val="tx1">
+                    <a:lumMod val="85000"/>
+                    <a:lumOff val="15000"/>
+                  </a:schemeClr>
+                </a:solidFill>
+                <a:latin typeface="Pretendard" panose="02000503000000020004" pitchFamily="2" charset="-127"/>
+                <a:ea typeface="Pretendard" panose="02000503000000020004" pitchFamily="2" charset="-127"/>
+                <a:cs typeface="Pretendard" panose="02000503000000020004" pitchFamily="2" charset="-127"/>
+              </a:rPr>
+              <a:t> </a:t>
+            </a:r>
+            <a:r>
+              <a:rPr lang="ko-KR" altLang="en-US" sz="825" dirty="0">
+                <a:solidFill>
+                  <a:schemeClr val="tx1">
+                    <a:lumMod val="85000"/>
+                    <a:lumOff val="15000"/>
+                  </a:schemeClr>
+                </a:solidFill>
+                <a:highlight>
+                  <a:srgbClr val="FFDADB"/>
+                </a:highlight>
+                <a:latin typeface="Pretendard" panose="02000503000000020004" pitchFamily="2" charset="-127"/>
+                <a:ea typeface="Pretendard" panose="02000503000000020004" pitchFamily="2" charset="-127"/>
+                <a:cs typeface="Pretendard" panose="02000503000000020004" pitchFamily="2" charset="-127"/>
+              </a:rPr>
+              <a:t>서울시 공공데이터에서는 기본적으로 특정한 버스 정류장이 위치한 지도상의 좌표만 제공하고</a:t>
+            </a:r>
+            <a:r>
+              <a:rPr lang="en-US" altLang="ko-KR" sz="825" dirty="0">
+                <a:solidFill>
+                  <a:schemeClr val="tx1">
+                    <a:lumMod val="85000"/>
+                    <a:lumOff val="15000"/>
+                  </a:schemeClr>
+                </a:solidFill>
+                <a:highlight>
+                  <a:srgbClr val="FFDADB"/>
+                </a:highlight>
+                <a:latin typeface="Pretendard" panose="02000503000000020004" pitchFamily="2" charset="-127"/>
+                <a:ea typeface="Pretendard" panose="02000503000000020004" pitchFamily="2" charset="-127"/>
+                <a:cs typeface="Pretendard" panose="02000503000000020004" pitchFamily="2" charset="-127"/>
+              </a:rPr>
+              <a:t>,</a:t>
+            </a:r>
+            <a:r>
+              <a:rPr lang="ko-KR" altLang="en-US" sz="825" dirty="0">
+                <a:solidFill>
+                  <a:schemeClr val="tx1">
+                    <a:lumMod val="85000"/>
+                    <a:lumOff val="15000"/>
+                  </a:schemeClr>
+                </a:solidFill>
+                <a:highlight>
+                  <a:srgbClr val="FFDADB"/>
+                </a:highlight>
+                <a:latin typeface="Pretendard" panose="02000503000000020004" pitchFamily="2" charset="-127"/>
+                <a:ea typeface="Pretendard" panose="02000503000000020004" pitchFamily="2" charset="-127"/>
+                <a:cs typeface="Pretendard" panose="02000503000000020004" pitchFamily="2" charset="-127"/>
+              </a:rPr>
+              <a:t> 주소나 소속된 행정동 정보는 별도로 제공하지 않기에</a:t>
+            </a:r>
+            <a:r>
+              <a:rPr lang="en-US" altLang="ko-KR" sz="825" dirty="0">
+                <a:solidFill>
+                  <a:schemeClr val="tx1">
+                    <a:lumMod val="85000"/>
+                    <a:lumOff val="15000"/>
+                  </a:schemeClr>
+                </a:solidFill>
+                <a:highlight>
+                  <a:srgbClr val="FFDADB"/>
+                </a:highlight>
+                <a:latin typeface="Pretendard" panose="02000503000000020004" pitchFamily="2" charset="-127"/>
+                <a:ea typeface="Pretendard" panose="02000503000000020004" pitchFamily="2" charset="-127"/>
+                <a:cs typeface="Pretendard" panose="02000503000000020004" pitchFamily="2" charset="-127"/>
+              </a:rPr>
+              <a:t>,</a:t>
+            </a:r>
+            <a:r>
+              <a:rPr lang="ko-KR" altLang="en-US" sz="825" dirty="0">
+                <a:solidFill>
+                  <a:schemeClr val="tx1">
+                    <a:lumMod val="85000"/>
+                    <a:lumOff val="15000"/>
+                  </a:schemeClr>
+                </a:solidFill>
+                <a:latin typeface="Pretendard" panose="02000503000000020004" pitchFamily="2" charset="-127"/>
+                <a:ea typeface="Pretendard" panose="02000503000000020004" pitchFamily="2" charset="-127"/>
+                <a:cs typeface="Pretendard" panose="02000503000000020004" pitchFamily="2" charset="-127"/>
+              </a:rPr>
+              <a:t> 제공되는 좌표를 통해 이 정류장이 어느 행정동에 위치하여 있는지를 확인하는 과정을 </a:t>
+            </a:r>
+            <a:r>
+              <a:rPr lang="en-US" altLang="ko-KR" sz="825" dirty="0">
+                <a:solidFill>
+                  <a:schemeClr val="tx1">
+                    <a:lumMod val="85000"/>
+                    <a:lumOff val="15000"/>
+                  </a:schemeClr>
+                </a:solidFill>
+                <a:latin typeface="Pretendard" panose="02000503000000020004" pitchFamily="2" charset="-127"/>
+                <a:ea typeface="Pretendard" panose="02000503000000020004" pitchFamily="2" charset="-127"/>
+                <a:cs typeface="Pretendard" panose="02000503000000020004" pitchFamily="2" charset="-127"/>
+              </a:rPr>
+              <a:t>‘</a:t>
+            </a:r>
+            <a:r>
+              <a:rPr lang="ko-KR" altLang="en-US" sz="825" dirty="0" err="1">
+                <a:solidFill>
+                  <a:schemeClr val="tx1">
+                    <a:lumMod val="85000"/>
+                    <a:lumOff val="15000"/>
+                  </a:schemeClr>
+                </a:solidFill>
+                <a:latin typeface="Pretendard" panose="02000503000000020004" pitchFamily="2" charset="-127"/>
+                <a:ea typeface="Pretendard" panose="02000503000000020004" pitchFamily="2" charset="-127"/>
+                <a:cs typeface="Pretendard" panose="02000503000000020004" pitchFamily="2" charset="-127"/>
+              </a:rPr>
+              <a:t>카카오맵</a:t>
+            </a:r>
+            <a:r>
+              <a:rPr lang="ko-KR" altLang="en-US" sz="825" dirty="0">
+                <a:solidFill>
+                  <a:schemeClr val="tx1">
+                    <a:lumMod val="85000"/>
+                    <a:lumOff val="15000"/>
+                  </a:schemeClr>
+                </a:solidFill>
+                <a:latin typeface="Pretendard" panose="02000503000000020004" pitchFamily="2" charset="-127"/>
+                <a:ea typeface="Pretendard" panose="02000503000000020004" pitchFamily="2" charset="-127"/>
+                <a:cs typeface="Pretendard" panose="02000503000000020004" pitchFamily="2" charset="-127"/>
+              </a:rPr>
+              <a:t> 로컬 </a:t>
+            </a:r>
+            <a:r>
+              <a:rPr lang="en-US" altLang="ko-KR" sz="825" dirty="0">
+                <a:solidFill>
+                  <a:schemeClr val="tx1">
+                    <a:lumMod val="85000"/>
+                    <a:lumOff val="15000"/>
+                  </a:schemeClr>
+                </a:solidFill>
+                <a:latin typeface="Pretendard" panose="02000503000000020004" pitchFamily="2" charset="-127"/>
+                <a:ea typeface="Pretendard" panose="02000503000000020004" pitchFamily="2" charset="-127"/>
+                <a:cs typeface="Pretendard" panose="02000503000000020004" pitchFamily="2" charset="-127"/>
+              </a:rPr>
+              <a:t>REST API’</a:t>
+            </a:r>
+            <a:r>
+              <a:rPr lang="ko-KR" altLang="en-US" sz="825" dirty="0">
+                <a:solidFill>
+                  <a:schemeClr val="tx1">
+                    <a:lumMod val="85000"/>
+                    <a:lumOff val="15000"/>
+                  </a:schemeClr>
+                </a:solidFill>
+                <a:latin typeface="Pretendard" panose="02000503000000020004" pitchFamily="2" charset="-127"/>
+                <a:ea typeface="Pretendard" panose="02000503000000020004" pitchFamily="2" charset="-127"/>
+                <a:cs typeface="Pretendard" panose="02000503000000020004" pitchFamily="2" charset="-127"/>
+              </a:rPr>
+              <a:t>에서 제공하는 좌표의 행정동 주소로의 변환 서비스를 거쳐 최종 데이터를 수집하게 됩니다</a:t>
+            </a:r>
+            <a:r>
+              <a:rPr lang="en-US" altLang="ko-KR" sz="825" dirty="0">
+                <a:solidFill>
+                  <a:schemeClr val="tx1">
+                    <a:lumMod val="85000"/>
+                    <a:lumOff val="15000"/>
+                  </a:schemeClr>
+                </a:solidFill>
+                <a:latin typeface="Pretendard" panose="02000503000000020004" pitchFamily="2" charset="-127"/>
+                <a:ea typeface="Pretendard" panose="02000503000000020004" pitchFamily="2" charset="-127"/>
+                <a:cs typeface="Pretendard" panose="02000503000000020004" pitchFamily="2" charset="-127"/>
+              </a:rPr>
+              <a:t>.</a:t>
+            </a:r>
+          </a:p>
+        </p:txBody>
+      </p:sp>
+      <p:sp>
+        <p:nvSpPr>
+          <p:cNvPr id="65" name="TextBox 64">
+            <a:extLst>
+              <a:ext uri="{FF2B5EF4-FFF2-40B4-BE49-F238E27FC236}">
+                <a16:creationId xmlns:a16="http://schemas.microsoft.com/office/drawing/2014/main" id="{D9E0585F-2838-5025-3620-38F986E45044}"/>
+              </a:ext>
+            </a:extLst>
+          </p:cNvPr>
+          <p:cNvSpPr txBox="1"/>
+          <p:nvPr/>
+        </p:nvSpPr>
+        <p:spPr>
+          <a:xfrm>
+            <a:off x="2157874" y="1369698"/>
+            <a:ext cx="4497051" cy="1009251"/>
+          </a:xfrm>
+          <a:prstGeom prst="rect">
+            <a:avLst/>
+          </a:prstGeom>
+          <a:noFill/>
+        </p:spPr>
+        <p:txBody>
+          <a:bodyPr wrap="square" rtlCol="0">
+            <a:spAutoFit/>
+          </a:bodyPr>
+          <a:lstStyle/>
+          <a:p>
+            <a:pPr algn="just">
+              <a:lnSpc>
+                <a:spcPct val="150000"/>
+              </a:lnSpc>
+            </a:pPr>
+            <a:r>
+              <a:rPr lang="en-US" altLang="ko-KR" sz="675" b="1" dirty="0" err="1">
+                <a:solidFill>
+                  <a:schemeClr val="tx1">
+                    <a:lumMod val="85000"/>
+                    <a:lumOff val="15000"/>
+                  </a:schemeClr>
+                </a:solidFill>
+                <a:latin typeface="Cascadia Code" panose="020B0609020000020004" pitchFamily="34" charset="0"/>
+                <a:ea typeface="Cascadia Code" panose="020B0609020000020004" pitchFamily="34" charset="0"/>
+                <a:cs typeface="Cascadia Code" panose="020B0609020000020004" pitchFamily="34" charset="0"/>
+              </a:rPr>
+              <a:t>busstop_id</a:t>
+            </a:r>
+            <a:r>
+              <a:rPr lang="en-US" altLang="ko-KR" sz="675" dirty="0">
+                <a:solidFill>
+                  <a:schemeClr val="tx1">
+                    <a:lumMod val="85000"/>
+                    <a:lumOff val="15000"/>
+                  </a:schemeClr>
+                </a:solidFill>
+                <a:latin typeface="Pretendard" panose="02000503000000020004" pitchFamily="2" charset="-127"/>
+                <a:ea typeface="Pretendard" panose="02000503000000020004" pitchFamily="2" charset="-127"/>
+                <a:cs typeface="Pretendard" panose="02000503000000020004" pitchFamily="2" charset="-127"/>
+              </a:rPr>
+              <a:t>: </a:t>
+            </a:r>
+            <a:r>
+              <a:rPr lang="ko-KR" altLang="en-US" sz="675" dirty="0">
+                <a:solidFill>
+                  <a:schemeClr val="tx1">
+                    <a:lumMod val="85000"/>
+                    <a:lumOff val="15000"/>
+                  </a:schemeClr>
+                </a:solidFill>
+                <a:latin typeface="Pretendard" panose="02000503000000020004" pitchFamily="2" charset="-127"/>
+                <a:ea typeface="Pretendard" panose="02000503000000020004" pitchFamily="2" charset="-127"/>
+                <a:cs typeface="Pretendard" panose="02000503000000020004" pitchFamily="2" charset="-127"/>
+              </a:rPr>
+              <a:t>버스 정류장별 데이터의 구분을 위한</a:t>
+            </a:r>
+            <a:r>
+              <a:rPr lang="en-US" altLang="ko-KR" sz="675" dirty="0">
+                <a:solidFill>
+                  <a:schemeClr val="tx1">
+                    <a:lumMod val="85000"/>
+                    <a:lumOff val="15000"/>
+                  </a:schemeClr>
+                </a:solidFill>
+                <a:latin typeface="Pretendard" panose="02000503000000020004" pitchFamily="2" charset="-127"/>
+                <a:ea typeface="Pretendard" panose="02000503000000020004" pitchFamily="2" charset="-127"/>
+                <a:cs typeface="Pretendard" panose="02000503000000020004" pitchFamily="2" charset="-127"/>
+              </a:rPr>
+              <a:t> ID</a:t>
+            </a:r>
+            <a:r>
+              <a:rPr lang="ko-KR" altLang="en-US" sz="675" dirty="0" err="1">
+                <a:solidFill>
+                  <a:schemeClr val="tx1">
+                    <a:lumMod val="85000"/>
+                    <a:lumOff val="15000"/>
+                  </a:schemeClr>
+                </a:solidFill>
+                <a:latin typeface="Pretendard" panose="02000503000000020004" pitchFamily="2" charset="-127"/>
+                <a:ea typeface="Pretendard" panose="02000503000000020004" pitchFamily="2" charset="-127"/>
+                <a:cs typeface="Pretendard" panose="02000503000000020004" pitchFamily="2" charset="-127"/>
+              </a:rPr>
+              <a:t>를</a:t>
+            </a:r>
+            <a:r>
+              <a:rPr lang="ko-KR" altLang="en-US" sz="675" dirty="0">
+                <a:solidFill>
+                  <a:schemeClr val="tx1">
+                    <a:lumMod val="85000"/>
+                    <a:lumOff val="15000"/>
+                  </a:schemeClr>
+                </a:solidFill>
+                <a:latin typeface="Pretendard" panose="02000503000000020004" pitchFamily="2" charset="-127"/>
+                <a:ea typeface="Pretendard" panose="02000503000000020004" pitchFamily="2" charset="-127"/>
+                <a:cs typeface="Pretendard" panose="02000503000000020004" pitchFamily="2" charset="-127"/>
+              </a:rPr>
+              <a:t> 담은 데이터입니다</a:t>
+            </a:r>
+            <a:r>
+              <a:rPr lang="en-US" altLang="ko-KR" sz="675" dirty="0">
+                <a:solidFill>
+                  <a:schemeClr val="tx1">
+                    <a:lumMod val="85000"/>
+                    <a:lumOff val="15000"/>
+                  </a:schemeClr>
+                </a:solidFill>
+                <a:latin typeface="Pretendard" panose="02000503000000020004" pitchFamily="2" charset="-127"/>
+                <a:ea typeface="Pretendard" panose="02000503000000020004" pitchFamily="2" charset="-127"/>
+                <a:cs typeface="Pretendard" panose="02000503000000020004" pitchFamily="2" charset="-127"/>
+              </a:rPr>
+              <a:t>.</a:t>
+            </a:r>
+            <a:r>
+              <a:rPr lang="ko-KR" altLang="en-US" sz="675" dirty="0">
+                <a:solidFill>
+                  <a:schemeClr val="tx1">
+                    <a:lumMod val="85000"/>
+                    <a:lumOff val="15000"/>
+                  </a:schemeClr>
+                </a:solidFill>
+                <a:latin typeface="Pretendard" panose="02000503000000020004" pitchFamily="2" charset="-127"/>
+                <a:ea typeface="Pretendard" panose="02000503000000020004" pitchFamily="2" charset="-127"/>
+                <a:cs typeface="Pretendard" panose="02000503000000020004" pitchFamily="2" charset="-127"/>
+              </a:rPr>
+              <a:t> 서울시에서는 정류장별 데이터를 제공할 때 노선별로도 나누어 따로 출력하므로 중복 가능합니다</a:t>
+            </a:r>
+            <a:r>
+              <a:rPr lang="en-US" altLang="ko-KR" sz="675" dirty="0">
+                <a:solidFill>
+                  <a:schemeClr val="tx1">
+                    <a:lumMod val="85000"/>
+                    <a:lumOff val="15000"/>
+                  </a:schemeClr>
+                </a:solidFill>
+                <a:latin typeface="Pretendard" panose="02000503000000020004" pitchFamily="2" charset="-127"/>
+                <a:ea typeface="Pretendard" panose="02000503000000020004" pitchFamily="2" charset="-127"/>
+                <a:cs typeface="Pretendard" panose="02000503000000020004" pitchFamily="2" charset="-127"/>
+              </a:rPr>
+              <a:t>.</a:t>
+            </a:r>
+          </a:p>
+          <a:p>
+            <a:pPr algn="just">
+              <a:lnSpc>
+                <a:spcPct val="150000"/>
+              </a:lnSpc>
+            </a:pPr>
+            <a:r>
+              <a:rPr lang="en-US" altLang="ko-KR" sz="675" b="1" dirty="0" err="1">
+                <a:solidFill>
+                  <a:schemeClr val="tx1">
+                    <a:lumMod val="85000"/>
+                    <a:lumOff val="15000"/>
+                  </a:schemeClr>
+                </a:solidFill>
+                <a:latin typeface="Cascadia Code" panose="020B0609020000020004" pitchFamily="34" charset="0"/>
+                <a:ea typeface="Pretendard" panose="02000503000000020004" pitchFamily="2" charset="-127"/>
+                <a:cs typeface="Cascadia Code" panose="020B0609020000020004" pitchFamily="34" charset="0"/>
+              </a:rPr>
+              <a:t>bus_id</a:t>
+            </a:r>
+            <a:r>
+              <a:rPr lang="en-US" altLang="ko-KR" sz="675" dirty="0">
+                <a:solidFill>
+                  <a:schemeClr val="tx1">
+                    <a:lumMod val="85000"/>
+                    <a:lumOff val="15000"/>
+                  </a:schemeClr>
+                </a:solidFill>
+                <a:latin typeface="Pretendard" panose="02000503000000020004" pitchFamily="2" charset="-127"/>
+                <a:ea typeface="Pretendard" panose="02000503000000020004" pitchFamily="2" charset="-127"/>
+                <a:cs typeface="Pretendard" panose="02000503000000020004" pitchFamily="2" charset="-127"/>
+              </a:rPr>
+              <a:t>: </a:t>
+            </a:r>
+            <a:r>
+              <a:rPr lang="ko-KR" altLang="en-US" sz="675" dirty="0">
+                <a:solidFill>
+                  <a:schemeClr val="tx1">
+                    <a:lumMod val="85000"/>
+                    <a:lumOff val="15000"/>
+                  </a:schemeClr>
+                </a:solidFill>
+                <a:latin typeface="Pretendard" panose="02000503000000020004" pitchFamily="2" charset="-127"/>
+                <a:ea typeface="Pretendard" panose="02000503000000020004" pitchFamily="2" charset="-127"/>
+                <a:cs typeface="Pretendard" panose="02000503000000020004" pitchFamily="2" charset="-127"/>
+              </a:rPr>
+              <a:t>사용자에게 데이터를 출력해야 할 때를 고려하여</a:t>
+            </a:r>
+            <a:r>
+              <a:rPr lang="en-US" altLang="ko-KR" sz="675" dirty="0">
+                <a:solidFill>
+                  <a:schemeClr val="tx1">
+                    <a:lumMod val="85000"/>
+                    <a:lumOff val="15000"/>
+                  </a:schemeClr>
+                </a:solidFill>
+                <a:latin typeface="Pretendard" panose="02000503000000020004" pitchFamily="2" charset="-127"/>
+                <a:ea typeface="Pretendard" panose="02000503000000020004" pitchFamily="2" charset="-127"/>
+                <a:cs typeface="Pretendard" panose="02000503000000020004" pitchFamily="2" charset="-127"/>
+              </a:rPr>
+              <a:t>,</a:t>
+            </a:r>
+            <a:r>
+              <a:rPr lang="ko-KR" altLang="en-US" sz="675" dirty="0">
+                <a:solidFill>
+                  <a:schemeClr val="tx1">
+                    <a:lumMod val="85000"/>
+                    <a:lumOff val="15000"/>
+                  </a:schemeClr>
+                </a:solidFill>
+                <a:latin typeface="Pretendard" panose="02000503000000020004" pitchFamily="2" charset="-127"/>
+                <a:ea typeface="Pretendard" panose="02000503000000020004" pitchFamily="2" charset="-127"/>
+                <a:cs typeface="Pretendard" panose="02000503000000020004" pitchFamily="2" charset="-127"/>
+              </a:rPr>
+              <a:t> 버스 정류별</a:t>
+            </a:r>
+            <a:r>
+              <a:rPr lang="en-US" altLang="ko-KR" sz="675" dirty="0">
+                <a:solidFill>
+                  <a:schemeClr val="tx1">
+                    <a:lumMod val="85000"/>
+                    <a:lumOff val="15000"/>
+                  </a:schemeClr>
+                </a:solidFill>
+                <a:latin typeface="Pretendard" panose="02000503000000020004" pitchFamily="2" charset="-127"/>
+                <a:ea typeface="Pretendard" panose="02000503000000020004" pitchFamily="2" charset="-127"/>
+                <a:cs typeface="Pretendard" panose="02000503000000020004" pitchFamily="2" charset="-127"/>
+              </a:rPr>
+              <a:t> ID</a:t>
+            </a:r>
+            <a:r>
+              <a:rPr lang="ko-KR" altLang="en-US" sz="675" dirty="0" err="1">
+                <a:solidFill>
+                  <a:schemeClr val="tx1">
+                    <a:lumMod val="85000"/>
+                    <a:lumOff val="15000"/>
+                  </a:schemeClr>
+                </a:solidFill>
+                <a:latin typeface="Pretendard" panose="02000503000000020004" pitchFamily="2" charset="-127"/>
+                <a:ea typeface="Pretendard" panose="02000503000000020004" pitchFamily="2" charset="-127"/>
+                <a:cs typeface="Pretendard" panose="02000503000000020004" pitchFamily="2" charset="-127"/>
+              </a:rPr>
+              <a:t>에</a:t>
+            </a:r>
+            <a:r>
+              <a:rPr lang="ko-KR" altLang="en-US" sz="675" dirty="0">
+                <a:solidFill>
+                  <a:schemeClr val="tx1">
+                    <a:lumMod val="85000"/>
+                    <a:lumOff val="15000"/>
+                  </a:schemeClr>
+                </a:solidFill>
+                <a:latin typeface="Pretendard" panose="02000503000000020004" pitchFamily="2" charset="-127"/>
+                <a:ea typeface="Pretendard" panose="02000503000000020004" pitchFamily="2" charset="-127"/>
+                <a:cs typeface="Pretendard" panose="02000503000000020004" pitchFamily="2" charset="-127"/>
+              </a:rPr>
+              <a:t> 따른 정류장의 한글명을 담은 데이터입니다</a:t>
+            </a:r>
+            <a:r>
+              <a:rPr lang="en-US" altLang="ko-KR" sz="675" dirty="0">
+                <a:solidFill>
+                  <a:schemeClr val="tx1">
+                    <a:lumMod val="85000"/>
+                    <a:lumOff val="15000"/>
+                  </a:schemeClr>
+                </a:solidFill>
+                <a:latin typeface="Pretendard" panose="02000503000000020004" pitchFamily="2" charset="-127"/>
+                <a:ea typeface="Pretendard" panose="02000503000000020004" pitchFamily="2" charset="-127"/>
+                <a:cs typeface="Pretendard" panose="02000503000000020004" pitchFamily="2" charset="-127"/>
+              </a:rPr>
+              <a:t>.</a:t>
+            </a:r>
+          </a:p>
+          <a:p>
+            <a:pPr algn="just">
+              <a:lnSpc>
+                <a:spcPct val="150000"/>
+              </a:lnSpc>
+            </a:pPr>
+            <a:r>
+              <a:rPr lang="en-US" altLang="ko-KR" sz="675" b="1" dirty="0">
+                <a:solidFill>
+                  <a:schemeClr val="tx1">
+                    <a:lumMod val="85000"/>
+                    <a:lumOff val="15000"/>
+                  </a:schemeClr>
+                </a:solidFill>
+                <a:latin typeface="Cascadia Code" panose="020B0609020000020004" pitchFamily="34" charset="0"/>
+                <a:ea typeface="Cascadia Code" panose="020B0609020000020004" pitchFamily="34" charset="0"/>
+                <a:cs typeface="Cascadia Code" panose="020B0609020000020004" pitchFamily="34" charset="0"/>
+              </a:rPr>
+              <a:t>timestamp</a:t>
+            </a:r>
+            <a:r>
+              <a:rPr lang="en-US" altLang="ko-KR" sz="675" dirty="0">
+                <a:solidFill>
+                  <a:schemeClr val="tx1">
+                    <a:lumMod val="85000"/>
+                    <a:lumOff val="15000"/>
+                  </a:schemeClr>
+                </a:solidFill>
+                <a:latin typeface="Pretendard" panose="02000503000000020004" pitchFamily="2" charset="-127"/>
+                <a:ea typeface="Pretendard" panose="02000503000000020004" pitchFamily="2" charset="-127"/>
+                <a:cs typeface="Pretendard" panose="02000503000000020004" pitchFamily="2" charset="-127"/>
+              </a:rPr>
+              <a:t>: </a:t>
+            </a:r>
+            <a:r>
+              <a:rPr lang="ko-KR" altLang="en-US" sz="675" dirty="0">
+                <a:solidFill>
+                  <a:schemeClr val="tx1">
+                    <a:lumMod val="85000"/>
+                    <a:lumOff val="15000"/>
+                  </a:schemeClr>
+                </a:solidFill>
+                <a:latin typeface="Pretendard" panose="02000503000000020004" pitchFamily="2" charset="-127"/>
+                <a:ea typeface="Pretendard" panose="02000503000000020004" pitchFamily="2" charset="-127"/>
+                <a:cs typeface="Pretendard" panose="02000503000000020004" pitchFamily="2" charset="-127"/>
+              </a:rPr>
+              <a:t>지도상 위치와 소속 행정동을 찾기 위한 경도 좌표 데이터입니다</a:t>
+            </a:r>
+            <a:r>
+              <a:rPr lang="en-US" altLang="ko-KR" sz="675" dirty="0">
+                <a:solidFill>
+                  <a:schemeClr val="tx1">
+                    <a:lumMod val="85000"/>
+                    <a:lumOff val="15000"/>
+                  </a:schemeClr>
+                </a:solidFill>
+                <a:latin typeface="Pretendard" panose="02000503000000020004" pitchFamily="2" charset="-127"/>
+                <a:ea typeface="Pretendard" panose="02000503000000020004" pitchFamily="2" charset="-127"/>
+                <a:cs typeface="Pretendard" panose="02000503000000020004" pitchFamily="2" charset="-127"/>
+              </a:rPr>
+              <a:t>.</a:t>
+            </a:r>
+          </a:p>
+          <a:p>
+            <a:pPr algn="just">
+              <a:lnSpc>
+                <a:spcPct val="150000"/>
+              </a:lnSpc>
+            </a:pPr>
+            <a:r>
+              <a:rPr lang="en-US" altLang="ko-KR" sz="675" b="1" dirty="0" err="1">
+                <a:solidFill>
+                  <a:schemeClr val="tx1">
+                    <a:lumMod val="85000"/>
+                    <a:lumOff val="15000"/>
+                  </a:schemeClr>
+                </a:solidFill>
+                <a:latin typeface="Cascadia Code" panose="020B0609020000020004" pitchFamily="34" charset="0"/>
+                <a:ea typeface="Cascadia Code" panose="020B0609020000020004" pitchFamily="34" charset="0"/>
+                <a:cs typeface="Cascadia Code" panose="020B0609020000020004" pitchFamily="34" charset="0"/>
+              </a:rPr>
+              <a:t>passenger_on</a:t>
+            </a:r>
+            <a:r>
+              <a:rPr lang="en-US" altLang="ko-KR" sz="675" dirty="0">
+                <a:solidFill>
+                  <a:schemeClr val="tx1">
+                    <a:lumMod val="85000"/>
+                    <a:lumOff val="15000"/>
+                  </a:schemeClr>
+                </a:solidFill>
+                <a:latin typeface="Pretendard" panose="02000503000000020004" pitchFamily="2" charset="-127"/>
+                <a:ea typeface="Pretendard" panose="02000503000000020004" pitchFamily="2" charset="-127"/>
+                <a:cs typeface="Pretendard" panose="02000503000000020004" pitchFamily="2" charset="-127"/>
+              </a:rPr>
+              <a:t>: </a:t>
+            </a:r>
+            <a:r>
+              <a:rPr lang="ko-KR" altLang="en-US" sz="675" dirty="0">
+                <a:solidFill>
+                  <a:schemeClr val="tx1">
+                    <a:lumMod val="85000"/>
+                    <a:lumOff val="15000"/>
+                  </a:schemeClr>
+                </a:solidFill>
+                <a:latin typeface="Pretendard" panose="02000503000000020004" pitchFamily="2" charset="-127"/>
+                <a:ea typeface="Pretendard" panose="02000503000000020004" pitchFamily="2" charset="-127"/>
+                <a:cs typeface="Pretendard" panose="02000503000000020004" pitchFamily="2" charset="-127"/>
+              </a:rPr>
+              <a:t>지도상 위치와 소속 행정동을 찾기 위한 위도 좌표 데이터입니다</a:t>
+            </a:r>
+            <a:r>
+              <a:rPr lang="en-US" altLang="ko-KR" sz="675" dirty="0">
+                <a:solidFill>
+                  <a:schemeClr val="tx1">
+                    <a:lumMod val="85000"/>
+                    <a:lumOff val="15000"/>
+                  </a:schemeClr>
+                </a:solidFill>
+                <a:latin typeface="Pretendard" panose="02000503000000020004" pitchFamily="2" charset="-127"/>
+                <a:ea typeface="Pretendard" panose="02000503000000020004" pitchFamily="2" charset="-127"/>
+                <a:cs typeface="Pretendard" panose="02000503000000020004" pitchFamily="2" charset="-127"/>
+              </a:rPr>
+              <a:t>.</a:t>
+            </a:r>
+            <a:endParaRPr lang="en-US" altLang="ko-KR" sz="675" dirty="0">
+              <a:solidFill>
+                <a:schemeClr val="tx1">
+                  <a:lumMod val="85000"/>
+                  <a:lumOff val="15000"/>
+                </a:schemeClr>
+              </a:solidFill>
+              <a:latin typeface="Cascadia Code" panose="020B0609020000020004" pitchFamily="34" charset="0"/>
+              <a:ea typeface="Cascadia Code" panose="020B0609020000020004" pitchFamily="34" charset="0"/>
+              <a:cs typeface="Cascadia Code" panose="020B0609020000020004" pitchFamily="34" charset="0"/>
+            </a:endParaRPr>
+          </a:p>
+          <a:p>
+            <a:pPr algn="just">
+              <a:lnSpc>
+                <a:spcPct val="150000"/>
+              </a:lnSpc>
+            </a:pPr>
+            <a:r>
+              <a:rPr lang="en-US" altLang="ko-KR" sz="675" b="1" dirty="0" err="1">
+                <a:solidFill>
+                  <a:schemeClr val="tx1">
+                    <a:lumMod val="85000"/>
+                    <a:lumOff val="15000"/>
+                  </a:schemeClr>
+                </a:solidFill>
+                <a:latin typeface="Cascadia Code" panose="020B0609020000020004" pitchFamily="34" charset="0"/>
+                <a:ea typeface="Cascadia Code" panose="020B0609020000020004" pitchFamily="34" charset="0"/>
+                <a:cs typeface="Cascadia Code" panose="020B0609020000020004" pitchFamily="34" charset="0"/>
+              </a:rPr>
+              <a:t>passenger_off</a:t>
+            </a:r>
+            <a:r>
+              <a:rPr lang="en-US" altLang="ko-KR" sz="675" dirty="0">
+                <a:solidFill>
+                  <a:schemeClr val="tx1">
+                    <a:lumMod val="85000"/>
+                    <a:lumOff val="15000"/>
+                  </a:schemeClr>
+                </a:solidFill>
+                <a:latin typeface="Pretendard" panose="02000503000000020004" pitchFamily="2" charset="-127"/>
+                <a:ea typeface="Pretendard" panose="02000503000000020004" pitchFamily="2" charset="-127"/>
+                <a:cs typeface="Pretendard" panose="02000503000000020004" pitchFamily="2" charset="-127"/>
+              </a:rPr>
+              <a:t>: </a:t>
+            </a:r>
+            <a:r>
+              <a:rPr lang="ko-KR" altLang="en-US" sz="675" dirty="0">
+                <a:solidFill>
+                  <a:schemeClr val="tx1">
+                    <a:lumMod val="85000"/>
+                    <a:lumOff val="15000"/>
+                  </a:schemeClr>
+                </a:solidFill>
+                <a:latin typeface="Pretendard" panose="02000503000000020004" pitchFamily="2" charset="-127"/>
+                <a:ea typeface="Pretendard" panose="02000503000000020004" pitchFamily="2" charset="-127"/>
+                <a:cs typeface="Pretendard" panose="02000503000000020004" pitchFamily="2" charset="-127"/>
+              </a:rPr>
+              <a:t>소속 행정동별 데이터의 구분을 위한</a:t>
+            </a:r>
+            <a:r>
+              <a:rPr lang="en-US" altLang="ko-KR" sz="675" dirty="0">
+                <a:solidFill>
+                  <a:schemeClr val="tx1">
+                    <a:lumMod val="85000"/>
+                    <a:lumOff val="15000"/>
+                  </a:schemeClr>
+                </a:solidFill>
+                <a:latin typeface="Pretendard" panose="02000503000000020004" pitchFamily="2" charset="-127"/>
+                <a:ea typeface="Pretendard" panose="02000503000000020004" pitchFamily="2" charset="-127"/>
+                <a:cs typeface="Pretendard" panose="02000503000000020004" pitchFamily="2" charset="-127"/>
+              </a:rPr>
+              <a:t> ID</a:t>
+            </a:r>
+            <a:r>
+              <a:rPr lang="ko-KR" altLang="en-US" sz="675" dirty="0" err="1">
+                <a:solidFill>
+                  <a:schemeClr val="tx1">
+                    <a:lumMod val="85000"/>
+                    <a:lumOff val="15000"/>
+                  </a:schemeClr>
+                </a:solidFill>
+                <a:latin typeface="Pretendard" panose="02000503000000020004" pitchFamily="2" charset="-127"/>
+                <a:ea typeface="Pretendard" panose="02000503000000020004" pitchFamily="2" charset="-127"/>
+                <a:cs typeface="Pretendard" panose="02000503000000020004" pitchFamily="2" charset="-127"/>
+              </a:rPr>
+              <a:t>를</a:t>
+            </a:r>
+            <a:r>
+              <a:rPr lang="ko-KR" altLang="en-US" sz="675" dirty="0">
+                <a:solidFill>
+                  <a:schemeClr val="tx1">
+                    <a:lumMod val="85000"/>
+                    <a:lumOff val="15000"/>
+                  </a:schemeClr>
+                </a:solidFill>
+                <a:latin typeface="Pretendard" panose="02000503000000020004" pitchFamily="2" charset="-127"/>
+                <a:ea typeface="Pretendard" panose="02000503000000020004" pitchFamily="2" charset="-127"/>
+                <a:cs typeface="Pretendard" panose="02000503000000020004" pitchFamily="2" charset="-127"/>
+              </a:rPr>
+              <a:t> 담은 데이터입니다</a:t>
+            </a:r>
+            <a:r>
+              <a:rPr lang="en-US" altLang="ko-KR" sz="675" dirty="0">
+                <a:solidFill>
+                  <a:schemeClr val="tx1">
+                    <a:lumMod val="85000"/>
+                    <a:lumOff val="15000"/>
+                  </a:schemeClr>
+                </a:solidFill>
+                <a:latin typeface="Pretendard" panose="02000503000000020004" pitchFamily="2" charset="-127"/>
+                <a:ea typeface="Pretendard" panose="02000503000000020004" pitchFamily="2" charset="-127"/>
+                <a:cs typeface="Pretendard" panose="02000503000000020004" pitchFamily="2" charset="-127"/>
+              </a:rPr>
+              <a:t>.</a:t>
+            </a:r>
+          </a:p>
+        </p:txBody>
+      </p:sp>
+      <p:cxnSp>
+        <p:nvCxnSpPr>
+          <p:cNvPr id="71" name="Straight Connector 70">
+            <a:extLst>
+              <a:ext uri="{FF2B5EF4-FFF2-40B4-BE49-F238E27FC236}">
+                <a16:creationId xmlns:a16="http://schemas.microsoft.com/office/drawing/2014/main" id="{6FD12CF1-A6B7-B90B-00CE-C3840F039903}"/>
+              </a:ext>
+            </a:extLst>
+          </p:cNvPr>
+          <p:cNvCxnSpPr>
+            <a:cxnSpLocks/>
+          </p:cNvCxnSpPr>
+          <p:nvPr/>
+        </p:nvCxnSpPr>
+        <p:spPr>
+          <a:xfrm>
+            <a:off x="0" y="405000"/>
+            <a:ext cx="6858000" cy="0"/>
+          </a:xfrm>
+          <a:prstGeom prst="line">
+            <a:avLst/>
+          </a:prstGeom>
+          <a:ln w="12700">
+            <a:solidFill>
+              <a:schemeClr val="bg2"/>
+            </a:solidFill>
+          </a:ln>
+        </p:spPr>
+        <p:style>
+          <a:lnRef idx="2">
+            <a:schemeClr val="accent1"/>
+          </a:lnRef>
+          <a:fillRef idx="0">
+            <a:schemeClr val="accent1"/>
+          </a:fillRef>
+          <a:effectRef idx="1">
+            <a:schemeClr val="accent1"/>
+          </a:effectRef>
+          <a:fontRef idx="minor">
+            <a:schemeClr val="tx1"/>
+          </a:fontRef>
+        </p:style>
+      </p:cxnSp>
+      <p:cxnSp>
+        <p:nvCxnSpPr>
+          <p:cNvPr id="2" name="Straight Connector 1">
+            <a:extLst>
+              <a:ext uri="{FF2B5EF4-FFF2-40B4-BE49-F238E27FC236}">
+                <a16:creationId xmlns:a16="http://schemas.microsoft.com/office/drawing/2014/main" id="{FFD18A5A-0235-83D3-5032-7FD6B1C7A2D6}"/>
+              </a:ext>
+            </a:extLst>
+          </p:cNvPr>
+          <p:cNvCxnSpPr>
+            <a:cxnSpLocks/>
+          </p:cNvCxnSpPr>
+          <p:nvPr/>
+        </p:nvCxnSpPr>
+        <p:spPr>
+          <a:xfrm>
+            <a:off x="2218767" y="2513336"/>
+            <a:ext cx="4436738" cy="0"/>
+          </a:xfrm>
+          <a:prstGeom prst="line">
+            <a:avLst/>
+          </a:prstGeom>
+          <a:ln w="12700">
+            <a:solidFill>
+              <a:schemeClr val="bg2"/>
+            </a:solidFill>
+          </a:ln>
+        </p:spPr>
+        <p:style>
+          <a:lnRef idx="2">
+            <a:schemeClr val="accent1"/>
+          </a:lnRef>
+          <a:fillRef idx="0">
+            <a:schemeClr val="accent1"/>
+          </a:fillRef>
+          <a:effectRef idx="1">
+            <a:schemeClr val="accent1"/>
+          </a:effectRef>
+          <a:fontRef idx="minor">
+            <a:schemeClr val="tx1"/>
+          </a:fontRef>
+        </p:style>
+      </p:cxnSp>
+    </p:spTree>
+    <p:extLst>
+      <p:ext uri="{BB962C8B-B14F-4D97-AF65-F5344CB8AC3E}">
+        <p14:creationId xmlns:p14="http://schemas.microsoft.com/office/powerpoint/2010/main" val="2730245992"/>
+      </p:ext>
+    </p:extLst>
+  </p:cSld>
+  <p:clrMapOvr>
+    <a:masterClrMapping/>
+  </p:clrMapOvr>
+</p:sld>
+</file>
+
+<file path=ppt/slides/slide4.xml><?xml version="1.0" encoding="utf-8"?>
+<p:sld xmlns:a="http://schemas.openxmlformats.org/drawingml/2006/main" xmlns:r="http://schemas.openxmlformats.org/officeDocument/2006/relationships" xmlns:p="http://schemas.openxmlformats.org/presentationml/2006/main">
+  <p:cSld>
+    <p:spTree>
+      <p:nvGrpSpPr>
+        <p:cNvPr id="1" name="">
+          <a:extLst>
+            <a:ext uri="{FF2B5EF4-FFF2-40B4-BE49-F238E27FC236}">
+              <a16:creationId xmlns:a16="http://schemas.microsoft.com/office/drawing/2014/main" id="{D12DAFA3-6AF1-4247-E881-D906C62343DB}"/>
+            </a:ext>
+          </a:extLst>
+        </p:cNvPr>
+        <p:cNvGrpSpPr/>
+        <p:nvPr/>
+      </p:nvGrpSpPr>
+      <p:grpSpPr>
+        <a:xfrm>
+          <a:off x="0" y="0"/>
+          <a:ext cx="0" cy="0"/>
+          <a:chOff x="0" y="0"/>
+          <a:chExt cx="0" cy="0"/>
+        </a:xfrm>
+      </p:grpSpPr>
+      <p:sp>
+        <p:nvSpPr>
+          <p:cNvPr id="5" name="Rectangle 4">
+            <a:extLst>
+              <a:ext uri="{FF2B5EF4-FFF2-40B4-BE49-F238E27FC236}">
+                <a16:creationId xmlns:a16="http://schemas.microsoft.com/office/drawing/2014/main" id="{2F4FEFBD-EDEF-2331-3B4E-F084B2B8E04E}"/>
+              </a:ext>
+            </a:extLst>
+          </p:cNvPr>
+          <p:cNvSpPr>
+            <a:spLocks/>
+          </p:cNvSpPr>
+          <p:nvPr/>
+        </p:nvSpPr>
+        <p:spPr>
+          <a:xfrm>
+            <a:off x="0" y="0"/>
+            <a:ext cx="3429000" cy="405000"/>
+          </a:xfrm>
+          <a:prstGeom prst="rect">
+            <a:avLst/>
+          </a:prstGeom>
+          <a:solidFill>
+            <a:schemeClr val="bg1">
+              <a:lumMod val="95000"/>
+            </a:schemeClr>
+          </a:solidFill>
+          <a:ln>
+            <a:noFill/>
+          </a:ln>
+        </p:spPr>
+        <p:style>
+          <a:lnRef idx="2">
+            <a:schemeClr val="accent1">
+              <a:shade val="15000"/>
+            </a:schemeClr>
+          </a:lnRef>
+          <a:fillRef idx="1">
+            <a:schemeClr val="accent1"/>
+          </a:fillRef>
+          <a:effectRef idx="0">
+            <a:schemeClr val="accent1"/>
+          </a:effectRef>
+          <a:fontRef idx="minor">
+            <a:schemeClr val="lt1"/>
+          </a:fontRef>
+        </p:style>
+        <p:txBody>
+          <a:bodyPr lIns="135000" tIns="35100" rIns="67500" bIns="67500" numCol="1" rtlCol="0" anchor="b"/>
+          <a:lstStyle/>
+          <a:p>
+            <a:r>
+              <a:rPr lang="en-US" altLang="ko-KR" sz="900" b="1" dirty="0">
+                <a:solidFill>
+                  <a:schemeClr val="tx1">
+                    <a:lumMod val="85000"/>
+                    <a:lumOff val="15000"/>
+                  </a:schemeClr>
+                </a:solidFill>
+                <a:latin typeface="Pretendard" panose="02000503000000020004" pitchFamily="2" charset="-127"/>
+                <a:ea typeface="Pretendard" panose="02000503000000020004" pitchFamily="2" charset="-127"/>
+                <a:cs typeface="Pretendard" panose="02000503000000020004" pitchFamily="2" charset="-127"/>
+              </a:rPr>
+              <a:t>History</a:t>
+            </a:r>
+            <a:r>
+              <a:rPr lang="ko-KR" altLang="en-US" sz="900" b="1" dirty="0">
+                <a:solidFill>
+                  <a:schemeClr val="tx1">
+                    <a:lumMod val="85000"/>
+                    <a:lumOff val="15000"/>
+                  </a:schemeClr>
+                </a:solidFill>
+                <a:latin typeface="Pretendard" panose="02000503000000020004" pitchFamily="2" charset="-127"/>
+                <a:ea typeface="Pretendard" panose="02000503000000020004" pitchFamily="2" charset="-127"/>
+                <a:cs typeface="Pretendard" panose="02000503000000020004" pitchFamily="2" charset="-127"/>
+              </a:rPr>
+              <a:t> 데이터 모델</a:t>
+            </a:r>
+            <a:endParaRPr lang="en-US" altLang="ko-KR" sz="900" b="1" dirty="0">
+              <a:solidFill>
+                <a:schemeClr val="tx1">
+                  <a:lumMod val="85000"/>
+                  <a:lumOff val="15000"/>
+                </a:schemeClr>
+              </a:solidFill>
+              <a:latin typeface="Pretendard" panose="02000503000000020004" pitchFamily="2" charset="-127"/>
+              <a:ea typeface="Pretendard" panose="02000503000000020004" pitchFamily="2" charset="-127"/>
+              <a:cs typeface="Pretendard" panose="02000503000000020004" pitchFamily="2" charset="-127"/>
+            </a:endParaRPr>
+          </a:p>
+        </p:txBody>
+      </p:sp>
+      <p:sp>
+        <p:nvSpPr>
+          <p:cNvPr id="6" name="Rectangle 5">
+            <a:extLst>
+              <a:ext uri="{FF2B5EF4-FFF2-40B4-BE49-F238E27FC236}">
+                <a16:creationId xmlns:a16="http://schemas.microsoft.com/office/drawing/2014/main" id="{825DEDE6-E389-7291-F5DF-D1046BF6A31A}"/>
+              </a:ext>
+            </a:extLst>
+          </p:cNvPr>
+          <p:cNvSpPr>
+            <a:spLocks/>
+          </p:cNvSpPr>
+          <p:nvPr/>
+        </p:nvSpPr>
+        <p:spPr>
+          <a:xfrm>
+            <a:off x="3429000" y="0"/>
+            <a:ext cx="3429000" cy="405000"/>
+          </a:xfrm>
+          <a:prstGeom prst="rect">
+            <a:avLst/>
+          </a:prstGeom>
+          <a:solidFill>
+            <a:schemeClr val="bg1">
+              <a:lumMod val="95000"/>
+            </a:schemeClr>
+          </a:solidFill>
+          <a:ln>
+            <a:noFill/>
+          </a:ln>
+        </p:spPr>
+        <p:style>
+          <a:lnRef idx="2">
+            <a:schemeClr val="accent1">
+              <a:shade val="15000"/>
+            </a:schemeClr>
+          </a:lnRef>
+          <a:fillRef idx="1">
+            <a:schemeClr val="accent1"/>
+          </a:fillRef>
+          <a:effectRef idx="0">
+            <a:schemeClr val="accent1"/>
+          </a:effectRef>
+          <a:fontRef idx="minor">
+            <a:schemeClr val="lt1"/>
+          </a:fontRef>
+        </p:style>
+        <p:txBody>
+          <a:bodyPr lIns="67500" tIns="35100" rIns="135000" bIns="67500" numCol="1" rtlCol="0" anchor="b"/>
+          <a:lstStyle/>
+          <a:p>
+            <a:pPr algn="r"/>
+            <a:r>
+              <a:rPr lang="en-US" altLang="ko-KR" sz="900" b="1" dirty="0" err="1">
+                <a:solidFill>
+                  <a:schemeClr val="bg1">
+                    <a:lumMod val="65000"/>
+                  </a:schemeClr>
+                </a:solidFill>
+                <a:latin typeface="Pretendard" panose="02000503000000020004" pitchFamily="2" charset="-127"/>
+                <a:ea typeface="Pretendard" panose="02000503000000020004" pitchFamily="2" charset="-127"/>
+                <a:cs typeface="Pretendard" panose="02000503000000020004" pitchFamily="2" charset="-127"/>
+              </a:rPr>
+              <a:t>seoulbusmap</a:t>
+            </a:r>
+            <a:r>
+              <a:rPr lang="ko-KR" altLang="en-US" sz="900" b="1" dirty="0">
+                <a:solidFill>
+                  <a:schemeClr val="bg1">
+                    <a:lumMod val="65000"/>
+                  </a:schemeClr>
+                </a:solidFill>
+                <a:latin typeface="Pretendard" panose="02000503000000020004" pitchFamily="2" charset="-127"/>
+                <a:ea typeface="Pretendard" panose="02000503000000020004" pitchFamily="2" charset="-127"/>
+                <a:cs typeface="Pretendard" panose="02000503000000020004" pitchFamily="2" charset="-127"/>
+              </a:rPr>
+              <a:t> 프로젝트에 사용될 데이터 구조</a:t>
+            </a:r>
+            <a:r>
+              <a:rPr lang="en-US" altLang="ko-KR" sz="900" b="1" dirty="0">
+                <a:solidFill>
+                  <a:schemeClr val="bg1">
+                    <a:lumMod val="65000"/>
+                  </a:schemeClr>
+                </a:solidFill>
+                <a:latin typeface="Pretendard" panose="02000503000000020004" pitchFamily="2" charset="-127"/>
+                <a:ea typeface="Pretendard" panose="02000503000000020004" pitchFamily="2" charset="-127"/>
+                <a:cs typeface="Pretendard" panose="02000503000000020004" pitchFamily="2" charset="-127"/>
+              </a:rPr>
+              <a:t>(</a:t>
+            </a:r>
+            <a:r>
+              <a:rPr lang="ko-KR" altLang="en-US" sz="900" b="1" dirty="0">
+                <a:solidFill>
+                  <a:schemeClr val="bg1">
+                    <a:lumMod val="65000"/>
+                  </a:schemeClr>
+                </a:solidFill>
+                <a:latin typeface="Pretendard" panose="02000503000000020004" pitchFamily="2" charset="-127"/>
+                <a:ea typeface="Pretendard" panose="02000503000000020004" pitchFamily="2" charset="-127"/>
+                <a:cs typeface="Pretendard" panose="02000503000000020004" pitchFamily="2" charset="-127"/>
+              </a:rPr>
+              <a:t>모델</a:t>
+            </a:r>
+            <a:r>
+              <a:rPr lang="en-US" altLang="ko-KR" sz="900" b="1" dirty="0">
+                <a:solidFill>
+                  <a:schemeClr val="bg1">
+                    <a:lumMod val="65000"/>
+                  </a:schemeClr>
+                </a:solidFill>
+                <a:latin typeface="Pretendard" panose="02000503000000020004" pitchFamily="2" charset="-127"/>
+                <a:ea typeface="Pretendard" panose="02000503000000020004" pitchFamily="2" charset="-127"/>
+                <a:cs typeface="Pretendard" panose="02000503000000020004" pitchFamily="2" charset="-127"/>
+              </a:rPr>
+              <a:t>)</a:t>
+            </a:r>
+            <a:r>
+              <a:rPr lang="ko-KR" altLang="en-US" sz="900" b="1" dirty="0">
+                <a:solidFill>
+                  <a:schemeClr val="bg1">
+                    <a:lumMod val="65000"/>
+                  </a:schemeClr>
+                </a:solidFill>
+                <a:latin typeface="Pretendard" panose="02000503000000020004" pitchFamily="2" charset="-127"/>
+                <a:ea typeface="Pretendard" panose="02000503000000020004" pitchFamily="2" charset="-127"/>
+                <a:cs typeface="Pretendard" panose="02000503000000020004" pitchFamily="2" charset="-127"/>
+              </a:rPr>
+              <a:t>을 정의</a:t>
+            </a:r>
+            <a:endParaRPr lang="en-US" altLang="ko-KR" sz="900" b="1" dirty="0">
+              <a:solidFill>
+                <a:schemeClr val="tx1">
+                  <a:lumMod val="85000"/>
+                  <a:lumOff val="15000"/>
+                </a:schemeClr>
+              </a:solidFill>
+              <a:latin typeface="Pretendard" panose="02000503000000020004" pitchFamily="2" charset="-127"/>
+              <a:ea typeface="Pretendard" panose="02000503000000020004" pitchFamily="2" charset="-127"/>
+              <a:cs typeface="Pretendard" panose="02000503000000020004" pitchFamily="2" charset="-127"/>
+            </a:endParaRPr>
+          </a:p>
+        </p:txBody>
+      </p:sp>
+      <p:cxnSp>
+        <p:nvCxnSpPr>
+          <p:cNvPr id="71" name="Straight Connector 70">
+            <a:extLst>
+              <a:ext uri="{FF2B5EF4-FFF2-40B4-BE49-F238E27FC236}">
+                <a16:creationId xmlns:a16="http://schemas.microsoft.com/office/drawing/2014/main" id="{A00D3BDF-81E4-EBD3-310C-BDAE6B08C5E1}"/>
+              </a:ext>
+            </a:extLst>
+          </p:cNvPr>
+          <p:cNvCxnSpPr>
+            <a:cxnSpLocks/>
+          </p:cNvCxnSpPr>
+          <p:nvPr/>
+        </p:nvCxnSpPr>
+        <p:spPr>
+          <a:xfrm>
+            <a:off x="0" y="405000"/>
+            <a:ext cx="6858000" cy="0"/>
+          </a:xfrm>
+          <a:prstGeom prst="line">
+            <a:avLst/>
+          </a:prstGeom>
+          <a:ln w="12700">
+            <a:solidFill>
+              <a:schemeClr val="bg2"/>
+            </a:solidFill>
+          </a:ln>
+        </p:spPr>
+        <p:style>
+          <a:lnRef idx="2">
+            <a:schemeClr val="accent1"/>
+          </a:lnRef>
+          <a:fillRef idx="0">
+            <a:schemeClr val="accent1"/>
+          </a:fillRef>
+          <a:effectRef idx="1">
+            <a:schemeClr val="accent1"/>
+          </a:effectRef>
+          <a:fontRef idx="minor">
+            <a:schemeClr val="tx1"/>
+          </a:fontRef>
+        </p:style>
+      </p:cxnSp>
+      <p:sp>
+        <p:nvSpPr>
+          <p:cNvPr id="3" name="Rectangle 2">
+            <a:extLst>
+              <a:ext uri="{FF2B5EF4-FFF2-40B4-BE49-F238E27FC236}">
+                <a16:creationId xmlns:a16="http://schemas.microsoft.com/office/drawing/2014/main" id="{90B3A72B-CCE3-8852-8C49-67F4BFCAF83F}"/>
+              </a:ext>
+            </a:extLst>
+          </p:cNvPr>
+          <p:cNvSpPr/>
+          <p:nvPr/>
+        </p:nvSpPr>
+        <p:spPr>
+          <a:xfrm>
+            <a:off x="203077" y="607501"/>
+            <a:ext cx="1754999" cy="1900362"/>
+          </a:xfrm>
+          <a:prstGeom prst="rect">
+            <a:avLst/>
+          </a:prstGeom>
+          <a:solidFill>
+            <a:schemeClr val="bg1">
+              <a:lumMod val="95000"/>
+            </a:schemeClr>
+          </a:solidFill>
+          <a:ln>
+            <a:noFill/>
+          </a:ln>
+        </p:spPr>
+        <p:style>
+          <a:lnRef idx="2">
+            <a:schemeClr val="accent1">
+              <a:shade val="15000"/>
+            </a:schemeClr>
+          </a:lnRef>
+          <a:fillRef idx="1">
+            <a:schemeClr val="accent1"/>
+          </a:fillRef>
+          <a:effectRef idx="0">
+            <a:schemeClr val="accent1"/>
+          </a:effectRef>
+          <a:fontRef idx="minor">
+            <a:schemeClr val="lt1"/>
+          </a:fontRef>
+        </p:style>
+        <p:txBody>
+          <a:bodyPr rtlCol="0" anchor="ctr"/>
+          <a:lstStyle/>
+          <a:p>
+            <a:pPr algn="ctr"/>
+            <a:endParaRPr lang="en-KR" sz="1350"/>
+          </a:p>
+        </p:txBody>
+      </p:sp>
+      <p:sp>
+        <p:nvSpPr>
+          <p:cNvPr id="7" name="Rectangle 6">
+            <a:extLst>
+              <a:ext uri="{FF2B5EF4-FFF2-40B4-BE49-F238E27FC236}">
+                <a16:creationId xmlns:a16="http://schemas.microsoft.com/office/drawing/2014/main" id="{4CB83049-971E-F5DC-D5CB-A59C1B89D3EF}"/>
+              </a:ext>
+            </a:extLst>
+          </p:cNvPr>
+          <p:cNvSpPr/>
+          <p:nvPr/>
+        </p:nvSpPr>
+        <p:spPr>
+          <a:xfrm>
+            <a:off x="203079" y="607500"/>
+            <a:ext cx="1754999" cy="710066"/>
+          </a:xfrm>
+          <a:prstGeom prst="rect">
+            <a:avLst/>
+          </a:prstGeom>
+          <a:gradFill>
+            <a:gsLst>
+              <a:gs pos="0">
+                <a:schemeClr val="bg2"/>
+              </a:gs>
+              <a:gs pos="100000">
+                <a:schemeClr val="bg1">
+                  <a:lumMod val="95000"/>
+                </a:schemeClr>
+              </a:gs>
+            </a:gsLst>
+            <a:lin ang="5400000" scaled="1"/>
+          </a:gradFill>
+          <a:ln>
+            <a:noFill/>
+          </a:ln>
+        </p:spPr>
+        <p:style>
+          <a:lnRef idx="2">
+            <a:schemeClr val="accent1">
+              <a:shade val="15000"/>
+            </a:schemeClr>
+          </a:lnRef>
+          <a:fillRef idx="1">
+            <a:schemeClr val="accent1"/>
+          </a:fillRef>
+          <a:effectRef idx="0">
+            <a:schemeClr val="accent1"/>
+          </a:effectRef>
+          <a:fontRef idx="minor">
+            <a:schemeClr val="lt1"/>
+          </a:fontRef>
+        </p:style>
+        <p:txBody>
+          <a:bodyPr rtlCol="0" anchor="ctr"/>
+          <a:lstStyle/>
+          <a:p>
+            <a:pPr algn="ctr"/>
+            <a:endParaRPr lang="en-KR" sz="1350" dirty="0"/>
+          </a:p>
+        </p:txBody>
+      </p:sp>
+      <p:sp>
+        <p:nvSpPr>
+          <p:cNvPr id="9" name="TextBox 8">
+            <a:extLst>
+              <a:ext uri="{FF2B5EF4-FFF2-40B4-BE49-F238E27FC236}">
+                <a16:creationId xmlns:a16="http://schemas.microsoft.com/office/drawing/2014/main" id="{E213F9E8-3A05-7FB5-4F5D-AAE11996C8CE}"/>
+              </a:ext>
+            </a:extLst>
+          </p:cNvPr>
+          <p:cNvSpPr txBox="1"/>
+          <p:nvPr/>
+        </p:nvSpPr>
+        <p:spPr>
+          <a:xfrm>
+            <a:off x="203076" y="607499"/>
+            <a:ext cx="1754997" cy="298719"/>
+          </a:xfrm>
+          <a:prstGeom prst="rect">
+            <a:avLst/>
+          </a:prstGeom>
+          <a:noFill/>
+        </p:spPr>
+        <p:txBody>
+          <a:bodyPr wrap="square" lIns="135000" tIns="135000" rIns="67500" bIns="35100" rtlCol="0">
+            <a:spAutoFit/>
+          </a:bodyPr>
+          <a:lstStyle/>
+          <a:p>
+            <a:r>
+              <a:rPr lang="en-US" sz="825" b="1" dirty="0" err="1">
+                <a:solidFill>
+                  <a:schemeClr val="tx1">
+                    <a:lumMod val="85000"/>
+                    <a:lumOff val="15000"/>
+                  </a:schemeClr>
+                </a:solidFill>
+                <a:latin typeface="Cascadia Code" panose="020B0609020000020004" pitchFamily="34" charset="0"/>
+                <a:ea typeface="Cascadia Code" panose="020B0609020000020004" pitchFamily="34" charset="0"/>
+                <a:cs typeface="Cascadia Code" panose="020B0609020000020004" pitchFamily="34" charset="0"/>
+              </a:rPr>
+              <a:t>HangJeongDong</a:t>
+            </a:r>
+            <a:endParaRPr lang="en-KR" sz="825" b="1" dirty="0">
+              <a:solidFill>
+                <a:schemeClr val="tx1">
+                  <a:lumMod val="85000"/>
+                  <a:lumOff val="15000"/>
+                </a:schemeClr>
+              </a:solidFill>
+              <a:latin typeface="Cascadia Code" panose="020B0609020000020004" pitchFamily="34" charset="0"/>
+              <a:ea typeface="Cascadia Code" panose="020B0609020000020004" pitchFamily="34" charset="0"/>
+              <a:cs typeface="Cascadia Code" panose="020B0609020000020004" pitchFamily="34" charset="0"/>
+            </a:endParaRPr>
+          </a:p>
+        </p:txBody>
+      </p:sp>
+      <p:sp>
+        <p:nvSpPr>
+          <p:cNvPr id="13" name="Rectangle 12">
+            <a:extLst>
+              <a:ext uri="{FF2B5EF4-FFF2-40B4-BE49-F238E27FC236}">
+                <a16:creationId xmlns:a16="http://schemas.microsoft.com/office/drawing/2014/main" id="{53D251F7-56B9-BC2B-3800-DA47C952FD4D}"/>
+              </a:ext>
+            </a:extLst>
+          </p:cNvPr>
+          <p:cNvSpPr/>
+          <p:nvPr/>
+        </p:nvSpPr>
+        <p:spPr>
+          <a:xfrm>
+            <a:off x="203076" y="607500"/>
+            <a:ext cx="1755000" cy="1900363"/>
+          </a:xfrm>
+          <a:prstGeom prst="rect">
+            <a:avLst/>
+          </a:prstGeom>
+          <a:noFill/>
+          <a:ln w="12700">
+            <a:solidFill>
+              <a:schemeClr val="bg2">
+                <a:lumMod val="90000"/>
+              </a:schemeClr>
+            </a:solidFill>
+          </a:ln>
+        </p:spPr>
+        <p:style>
+          <a:lnRef idx="2">
+            <a:schemeClr val="accent1">
+              <a:shade val="15000"/>
+            </a:schemeClr>
+          </a:lnRef>
+          <a:fillRef idx="1">
+            <a:schemeClr val="accent1"/>
+          </a:fillRef>
+          <a:effectRef idx="0">
+            <a:schemeClr val="accent1"/>
+          </a:effectRef>
+          <a:fontRef idx="minor">
+            <a:schemeClr val="lt1"/>
+          </a:fontRef>
+        </p:style>
+        <p:txBody>
+          <a:bodyPr rtlCol="0" anchor="ctr"/>
+          <a:lstStyle/>
+          <a:p>
+            <a:pPr algn="ctr"/>
+            <a:endParaRPr lang="en-KR" sz="1350" dirty="0"/>
+          </a:p>
+        </p:txBody>
+      </p:sp>
+      <p:grpSp>
+        <p:nvGrpSpPr>
+          <p:cNvPr id="14" name="Group 13">
+            <a:extLst>
+              <a:ext uri="{FF2B5EF4-FFF2-40B4-BE49-F238E27FC236}">
+                <a16:creationId xmlns:a16="http://schemas.microsoft.com/office/drawing/2014/main" id="{4ECF9BBC-1529-5F8F-DA75-D93AA87E55CF}"/>
+              </a:ext>
+            </a:extLst>
+          </p:cNvPr>
+          <p:cNvGrpSpPr/>
+          <p:nvPr/>
+        </p:nvGrpSpPr>
+        <p:grpSpPr>
+          <a:xfrm>
+            <a:off x="306126" y="1385062"/>
+            <a:ext cx="1539676" cy="270000"/>
+            <a:chOff x="408168" y="1846751"/>
+            <a:chExt cx="2052901" cy="360000"/>
+          </a:xfrm>
+        </p:grpSpPr>
+        <p:sp>
+          <p:nvSpPr>
+            <p:cNvPr id="15" name="Rectangle 14">
+              <a:extLst>
+                <a:ext uri="{FF2B5EF4-FFF2-40B4-BE49-F238E27FC236}">
+                  <a16:creationId xmlns:a16="http://schemas.microsoft.com/office/drawing/2014/main" id="{2E7046E0-6384-06E9-D43F-DDF036BB84E6}"/>
+                </a:ext>
+              </a:extLst>
+            </p:cNvPr>
+            <p:cNvSpPr/>
+            <p:nvPr/>
+          </p:nvSpPr>
+          <p:spPr>
+            <a:xfrm flipH="1">
+              <a:off x="411469" y="1846751"/>
+              <a:ext cx="2049600" cy="360000"/>
+            </a:xfrm>
+            <a:prstGeom prst="rect">
+              <a:avLst/>
+            </a:prstGeom>
+            <a:solidFill>
+              <a:schemeClr val="bg2"/>
+            </a:solidFill>
+            <a:ln w="12700">
+              <a:solidFill>
+                <a:schemeClr val="bg2">
+                  <a:lumMod val="90000"/>
+                </a:schemeClr>
+              </a:solidFill>
+            </a:ln>
+          </p:spPr>
+          <p:style>
+            <a:lnRef idx="2">
+              <a:schemeClr val="accent1">
+                <a:shade val="15000"/>
+              </a:schemeClr>
+            </a:lnRef>
+            <a:fillRef idx="1">
+              <a:schemeClr val="accent1"/>
+            </a:fillRef>
+            <a:effectRef idx="0">
+              <a:schemeClr val="accent1"/>
+            </a:effectRef>
+            <a:fontRef idx="minor">
+              <a:schemeClr val="lt1"/>
+            </a:fontRef>
+          </p:style>
+          <p:txBody>
+            <a:bodyPr rtlCol="0" anchor="ctr"/>
+            <a:lstStyle/>
+            <a:p>
+              <a:pPr algn="ctr"/>
+              <a:endParaRPr lang="en-KR" sz="1350" dirty="0"/>
+            </a:p>
+          </p:txBody>
+        </p:sp>
+        <p:sp>
+          <p:nvSpPr>
+            <p:cNvPr id="18" name="TextBox 17">
+              <a:extLst>
+                <a:ext uri="{FF2B5EF4-FFF2-40B4-BE49-F238E27FC236}">
+                  <a16:creationId xmlns:a16="http://schemas.microsoft.com/office/drawing/2014/main" id="{1CD5C482-578A-DE89-F849-006CE2FA1330}"/>
+                </a:ext>
+              </a:extLst>
+            </p:cNvPr>
+            <p:cNvSpPr txBox="1"/>
+            <p:nvPr/>
+          </p:nvSpPr>
+          <p:spPr>
+            <a:xfrm>
+              <a:off x="408168" y="1849564"/>
+              <a:ext cx="1186486" cy="307413"/>
+            </a:xfrm>
+            <a:prstGeom prst="rect">
+              <a:avLst/>
+            </a:prstGeom>
+            <a:noFill/>
+          </p:spPr>
+          <p:txBody>
+            <a:bodyPr wrap="square" lIns="67500" tIns="67500" rIns="67500" bIns="35100" rtlCol="0">
+              <a:spAutoFit/>
+            </a:bodyPr>
+            <a:lstStyle/>
+            <a:p>
+              <a:r>
+                <a:rPr lang="en-US" sz="825" b="1" dirty="0" err="1">
+                  <a:solidFill>
+                    <a:schemeClr val="tx1">
+                      <a:lumMod val="85000"/>
+                      <a:lumOff val="15000"/>
+                    </a:schemeClr>
+                  </a:solidFill>
+                  <a:latin typeface="Cascadia Code" panose="020B0609020000020004" pitchFamily="34" charset="0"/>
+                  <a:ea typeface="Cascadia Code" panose="020B0609020000020004" pitchFamily="34" charset="0"/>
+                  <a:cs typeface="Cascadia Code" panose="020B0609020000020004" pitchFamily="34" charset="0"/>
+                </a:rPr>
+                <a:t>district_id</a:t>
+              </a:r>
+              <a:endParaRPr lang="en-US" sz="825" b="1" dirty="0">
+                <a:solidFill>
+                  <a:schemeClr val="tx1">
+                    <a:lumMod val="85000"/>
+                    <a:lumOff val="15000"/>
+                  </a:schemeClr>
+                </a:solidFill>
+                <a:latin typeface="Cascadia Code" panose="020B0609020000020004" pitchFamily="34" charset="0"/>
+                <a:ea typeface="Cascadia Code" panose="020B0609020000020004" pitchFamily="34" charset="0"/>
+                <a:cs typeface="Cascadia Code" panose="020B0609020000020004" pitchFamily="34" charset="0"/>
+              </a:endParaRPr>
+            </a:p>
+          </p:txBody>
+        </p:sp>
+      </p:grpSp>
+      <p:grpSp>
+        <p:nvGrpSpPr>
+          <p:cNvPr id="36" name="Group 35">
+            <a:extLst>
+              <a:ext uri="{FF2B5EF4-FFF2-40B4-BE49-F238E27FC236}">
+                <a16:creationId xmlns:a16="http://schemas.microsoft.com/office/drawing/2014/main" id="{D73F64B1-E75D-8555-B09C-5B59A30EC355}"/>
+              </a:ext>
+            </a:extLst>
+          </p:cNvPr>
+          <p:cNvGrpSpPr/>
+          <p:nvPr/>
+        </p:nvGrpSpPr>
+        <p:grpSpPr>
+          <a:xfrm>
+            <a:off x="307364" y="1761050"/>
+            <a:ext cx="1539676" cy="270000"/>
+            <a:chOff x="408168" y="1846751"/>
+            <a:chExt cx="2052901" cy="360000"/>
+          </a:xfrm>
+        </p:grpSpPr>
+        <p:sp>
+          <p:nvSpPr>
+            <p:cNvPr id="48" name="Rectangle 47">
+              <a:extLst>
+                <a:ext uri="{FF2B5EF4-FFF2-40B4-BE49-F238E27FC236}">
+                  <a16:creationId xmlns:a16="http://schemas.microsoft.com/office/drawing/2014/main" id="{FFB17EE9-0F72-6C40-23E2-917E24FB452E}"/>
+                </a:ext>
+              </a:extLst>
+            </p:cNvPr>
+            <p:cNvSpPr/>
+            <p:nvPr/>
+          </p:nvSpPr>
+          <p:spPr>
+            <a:xfrm flipH="1">
+              <a:off x="411469" y="1846751"/>
+              <a:ext cx="2049600" cy="360000"/>
+            </a:xfrm>
+            <a:prstGeom prst="rect">
+              <a:avLst/>
+            </a:prstGeom>
+            <a:solidFill>
+              <a:schemeClr val="bg2"/>
+            </a:solidFill>
+            <a:ln w="12700">
+              <a:solidFill>
+                <a:schemeClr val="bg2">
+                  <a:lumMod val="90000"/>
+                </a:schemeClr>
+              </a:solidFill>
+            </a:ln>
+          </p:spPr>
+          <p:style>
+            <a:lnRef idx="2">
+              <a:schemeClr val="accent1">
+                <a:shade val="15000"/>
+              </a:schemeClr>
+            </a:lnRef>
+            <a:fillRef idx="1">
+              <a:schemeClr val="accent1"/>
+            </a:fillRef>
+            <a:effectRef idx="0">
+              <a:schemeClr val="accent1"/>
+            </a:effectRef>
+            <a:fontRef idx="minor">
+              <a:schemeClr val="lt1"/>
+            </a:fontRef>
+          </p:style>
+          <p:txBody>
+            <a:bodyPr rtlCol="0" anchor="ctr"/>
+            <a:lstStyle/>
+            <a:p>
+              <a:pPr algn="ctr"/>
+              <a:endParaRPr lang="en-KR" sz="1350" dirty="0"/>
+            </a:p>
+          </p:txBody>
+        </p:sp>
+        <p:sp>
+          <p:nvSpPr>
+            <p:cNvPr id="50" name="TextBox 49">
+              <a:extLst>
+                <a:ext uri="{FF2B5EF4-FFF2-40B4-BE49-F238E27FC236}">
+                  <a16:creationId xmlns:a16="http://schemas.microsoft.com/office/drawing/2014/main" id="{4AECB37A-7B7D-EBB5-FE58-776765DF4959}"/>
+                </a:ext>
+              </a:extLst>
+            </p:cNvPr>
+            <p:cNvSpPr txBox="1"/>
+            <p:nvPr/>
+          </p:nvSpPr>
+          <p:spPr>
+            <a:xfrm>
+              <a:off x="408168" y="1849564"/>
+              <a:ext cx="1186486" cy="307413"/>
+            </a:xfrm>
+            <a:prstGeom prst="rect">
+              <a:avLst/>
+            </a:prstGeom>
+            <a:noFill/>
+          </p:spPr>
+          <p:txBody>
+            <a:bodyPr wrap="square" lIns="67500" tIns="67500" rIns="67500" bIns="35100" rtlCol="0">
+              <a:spAutoFit/>
+            </a:bodyPr>
+            <a:lstStyle/>
+            <a:p>
+              <a:r>
+                <a:rPr lang="en-US" sz="825" b="1" dirty="0">
+                  <a:solidFill>
+                    <a:schemeClr val="tx1">
+                      <a:lumMod val="85000"/>
+                      <a:lumOff val="15000"/>
+                    </a:schemeClr>
+                  </a:solidFill>
+                  <a:latin typeface="Cascadia Code" panose="020B0609020000020004" pitchFamily="34" charset="0"/>
+                  <a:ea typeface="Cascadia Code" panose="020B0609020000020004" pitchFamily="34" charset="0"/>
+                  <a:cs typeface="Cascadia Code" panose="020B0609020000020004" pitchFamily="34" charset="0"/>
+                </a:rPr>
+                <a:t>name</a:t>
+              </a:r>
+            </a:p>
+          </p:txBody>
+        </p:sp>
+      </p:grpSp>
+      <p:grpSp>
+        <p:nvGrpSpPr>
+          <p:cNvPr id="54" name="Group 53">
+            <a:extLst>
+              <a:ext uri="{FF2B5EF4-FFF2-40B4-BE49-F238E27FC236}">
+                <a16:creationId xmlns:a16="http://schemas.microsoft.com/office/drawing/2014/main" id="{6EFF3262-C444-81EA-B5EA-ED416C228B07}"/>
+              </a:ext>
+            </a:extLst>
+          </p:cNvPr>
+          <p:cNvGrpSpPr/>
+          <p:nvPr/>
+        </p:nvGrpSpPr>
+        <p:grpSpPr>
+          <a:xfrm>
+            <a:off x="306126" y="2139222"/>
+            <a:ext cx="1539676" cy="270000"/>
+            <a:chOff x="408168" y="1846751"/>
+            <a:chExt cx="2052901" cy="360000"/>
+          </a:xfrm>
+        </p:grpSpPr>
+        <p:sp>
+          <p:nvSpPr>
+            <p:cNvPr id="55" name="Rectangle 54">
+              <a:extLst>
+                <a:ext uri="{FF2B5EF4-FFF2-40B4-BE49-F238E27FC236}">
+                  <a16:creationId xmlns:a16="http://schemas.microsoft.com/office/drawing/2014/main" id="{7DA9AD67-B6BC-93C8-0C98-57EB858D033B}"/>
+                </a:ext>
+              </a:extLst>
+            </p:cNvPr>
+            <p:cNvSpPr/>
+            <p:nvPr/>
+          </p:nvSpPr>
+          <p:spPr>
+            <a:xfrm flipH="1">
+              <a:off x="411469" y="1846751"/>
+              <a:ext cx="2049600" cy="360000"/>
+            </a:xfrm>
+            <a:prstGeom prst="rect">
+              <a:avLst/>
+            </a:prstGeom>
+            <a:solidFill>
+              <a:schemeClr val="bg2"/>
+            </a:solidFill>
+            <a:ln w="12700">
+              <a:solidFill>
+                <a:schemeClr val="bg2">
+                  <a:lumMod val="90000"/>
+                </a:schemeClr>
+              </a:solidFill>
+            </a:ln>
+          </p:spPr>
+          <p:style>
+            <a:lnRef idx="2">
+              <a:schemeClr val="accent1">
+                <a:shade val="15000"/>
+              </a:schemeClr>
+            </a:lnRef>
+            <a:fillRef idx="1">
+              <a:schemeClr val="accent1"/>
+            </a:fillRef>
+            <a:effectRef idx="0">
+              <a:schemeClr val="accent1"/>
+            </a:effectRef>
+            <a:fontRef idx="minor">
+              <a:schemeClr val="lt1"/>
+            </a:fontRef>
+          </p:style>
+          <p:txBody>
+            <a:bodyPr rtlCol="0" anchor="ctr"/>
+            <a:lstStyle/>
+            <a:p>
+              <a:pPr algn="ctr"/>
+              <a:endParaRPr lang="en-KR" sz="1350" dirty="0"/>
+            </a:p>
+          </p:txBody>
+        </p:sp>
+        <p:sp>
+          <p:nvSpPr>
+            <p:cNvPr id="56" name="TextBox 55">
+              <a:extLst>
+                <a:ext uri="{FF2B5EF4-FFF2-40B4-BE49-F238E27FC236}">
+                  <a16:creationId xmlns:a16="http://schemas.microsoft.com/office/drawing/2014/main" id="{355BCA54-089E-0F4F-21A4-57CED222D23C}"/>
+                </a:ext>
+              </a:extLst>
+            </p:cNvPr>
+            <p:cNvSpPr txBox="1"/>
+            <p:nvPr/>
+          </p:nvSpPr>
+          <p:spPr>
+            <a:xfrm>
+              <a:off x="408168" y="1849564"/>
+              <a:ext cx="1186486" cy="307413"/>
+            </a:xfrm>
+            <a:prstGeom prst="rect">
+              <a:avLst/>
+            </a:prstGeom>
+            <a:noFill/>
+          </p:spPr>
+          <p:txBody>
+            <a:bodyPr wrap="square" lIns="67500" tIns="67500" rIns="67500" bIns="35100" rtlCol="0">
+              <a:spAutoFit/>
+            </a:bodyPr>
+            <a:lstStyle/>
+            <a:p>
+              <a:r>
+                <a:rPr lang="en-US" sz="825" b="1" dirty="0">
+                  <a:solidFill>
+                    <a:schemeClr val="tx1">
+                      <a:lumMod val="85000"/>
+                      <a:lumOff val="15000"/>
+                    </a:schemeClr>
+                  </a:solidFill>
+                  <a:latin typeface="Cascadia Code" panose="020B0609020000020004" pitchFamily="34" charset="0"/>
+                  <a:ea typeface="Cascadia Code" panose="020B0609020000020004" pitchFamily="34" charset="0"/>
+                  <a:cs typeface="Cascadia Code" panose="020B0609020000020004" pitchFamily="34" charset="0"/>
+                </a:rPr>
+                <a:t>population</a:t>
+              </a:r>
+            </a:p>
+          </p:txBody>
+        </p:sp>
+      </p:grpSp>
+      <p:sp>
+        <p:nvSpPr>
+          <p:cNvPr id="58" name="Rectangle 57">
+            <a:extLst>
+              <a:ext uri="{FF2B5EF4-FFF2-40B4-BE49-F238E27FC236}">
+                <a16:creationId xmlns:a16="http://schemas.microsoft.com/office/drawing/2014/main" id="{8FD9EED8-D7D4-7837-7BBD-4ABFF93BEE90}"/>
+              </a:ext>
+            </a:extLst>
+          </p:cNvPr>
+          <p:cNvSpPr/>
+          <p:nvPr/>
+        </p:nvSpPr>
+        <p:spPr>
+          <a:xfrm>
+            <a:off x="946260" y="2406197"/>
+            <a:ext cx="768240" cy="101666"/>
+          </a:xfrm>
+          <a:prstGeom prst="rect">
+            <a:avLst/>
+          </a:prstGeom>
+          <a:ln>
+            <a:noFill/>
+          </a:ln>
+        </p:spPr>
+        <p:style>
+          <a:lnRef idx="2">
+            <a:schemeClr val="accent1">
+              <a:shade val="15000"/>
+            </a:schemeClr>
+          </a:lnRef>
+          <a:fillRef idx="1">
+            <a:schemeClr val="accent1"/>
+          </a:fillRef>
+          <a:effectRef idx="0">
+            <a:schemeClr val="accent1"/>
+          </a:effectRef>
+          <a:fontRef idx="minor">
+            <a:schemeClr val="lt1"/>
+          </a:fontRef>
+        </p:style>
+        <p:txBody>
+          <a:bodyPr rtlCol="0" anchor="ctr"/>
+          <a:lstStyle/>
+          <a:p>
+            <a:pPr algn="ctr"/>
+            <a:endParaRPr lang="en-KR"/>
+          </a:p>
+        </p:txBody>
+      </p:sp>
+    </p:spTree>
+    <p:extLst>
+      <p:ext uri="{BB962C8B-B14F-4D97-AF65-F5344CB8AC3E}">
+        <p14:creationId xmlns:p14="http://schemas.microsoft.com/office/powerpoint/2010/main" val="1585240748"/>
+      </p:ext>
+    </p:extLst>
+  </p:cSld>
+  <p:clrMapOvr>
+    <a:masterClrMapping/>
+  </p:clrMapOvr>
+</p:sld>
+</file>
+
+<file path=ppt/slides/slide5.xml><?xml version="1.0" encoding="utf-8"?>
 <p:sld xmlns:a="http://schemas.openxmlformats.org/drawingml/2006/main" xmlns:r="http://schemas.openxmlformats.org/officeDocument/2006/relationships" xmlns:p="http://schemas.openxmlformats.org/presentationml/2006/main">
   <p:cSld>
     <p:spTree>

--- a/documents/기능 명세서 및 다이어그램 그래픽.pptx
+++ b/documents/기능 명세서 및 다이어그램 그래픽.pptx
@@ -3536,7 +3536,7 @@
         <p:spPr>
           <a:xfrm>
             <a:off x="203077" y="607501"/>
-            <a:ext cx="1752295" cy="3407420"/>
+            <a:ext cx="1752295" cy="4273038"/>
           </a:xfrm>
           <a:prstGeom prst="rect">
             <a:avLst/>
@@ -3787,7 +3787,7 @@
         <p:spPr>
           <a:xfrm>
             <a:off x="203076" y="607500"/>
-            <a:ext cx="1752296" cy="3407417"/>
+            <a:ext cx="1752296" cy="4273024"/>
           </a:xfrm>
           <a:prstGeom prst="rect">
             <a:avLst/>
@@ -3896,7 +3896,7 @@
         </p:nvSpPr>
         <p:spPr>
           <a:xfrm>
-            <a:off x="2160573" y="2496865"/>
+            <a:off x="2160573" y="2668463"/>
             <a:ext cx="4494347" cy="554447"/>
           </a:xfrm>
           <a:prstGeom prst="rect">
@@ -4374,7 +4374,7 @@
         </p:nvSpPr>
         <p:spPr>
           <a:xfrm>
-            <a:off x="2160573" y="2300656"/>
+            <a:off x="2160573" y="2443097"/>
             <a:ext cx="1079142" cy="219291"/>
           </a:xfrm>
           <a:prstGeom prst="rect">
@@ -5465,7 +5465,7 @@
         </p:nvSpPr>
         <p:spPr>
           <a:xfrm>
-            <a:off x="2160573" y="3028165"/>
+            <a:off x="2160573" y="3222910"/>
             <a:ext cx="4494347" cy="1982722"/>
           </a:xfrm>
           <a:prstGeom prst="rect">
@@ -7011,7 +7011,7 @@
         <p:spPr>
           <a:xfrm>
             <a:off x="2160574" y="1505245"/>
-            <a:ext cx="743048" cy="541815"/>
+            <a:ext cx="743048" cy="697692"/>
           </a:xfrm>
           <a:prstGeom prst="rect">
             <a:avLst/>
@@ -7105,9 +7105,30 @@
                 <a:ea typeface="Cascadia Code" panose="020B0609020000020004" pitchFamily="34" charset="0"/>
                 <a:cs typeface="Cascadia Code" panose="020B0609020000020004" pitchFamily="34" charset="0"/>
               </a:rPr>
-              <a:t>population</a:t>
-            </a:r>
-            <a:endParaRPr lang="en-US" altLang="ko-KR" sz="675" dirty="0">
+              <a:t>population </a:t>
+            </a:r>
+          </a:p>
+          <a:p>
+            <a:pPr algn="just">
+              <a:lnSpc>
+                <a:spcPct val="150000"/>
+              </a:lnSpc>
+            </a:pPr>
+            <a:r>
+              <a:rPr lang="en-US" altLang="ko-KR" sz="675" b="1" dirty="0">
+                <a:solidFill>
+                  <a:schemeClr val="tx1">
+                    <a:lumMod val="85000"/>
+                    <a:lumOff val="15000"/>
+                  </a:schemeClr>
+                </a:solidFill>
+                <a:latin typeface="Cascadia Code" panose="020B0609020000020004" pitchFamily="34" charset="0"/>
+                <a:ea typeface="Cascadia Code" panose="020B0609020000020004" pitchFamily="34" charset="0"/>
+                <a:cs typeface="Cascadia Code" panose="020B0609020000020004" pitchFamily="34" charset="0"/>
+              </a:rPr>
+              <a:t>timestamp</a:t>
+            </a:r>
+            <a:endParaRPr lang="en-US" altLang="ko-KR" sz="675" b="1" dirty="0">
               <a:solidFill>
                 <a:schemeClr val="tx1">
                   <a:lumMod val="85000"/>
@@ -7137,7 +7158,7 @@
         </p:nvCxnSpPr>
         <p:spPr>
           <a:xfrm>
-            <a:off x="2218767" y="2165766"/>
+            <a:off x="2218767" y="2308207"/>
             <a:ext cx="4436738" cy="0"/>
           </a:xfrm>
           <a:prstGeom prst="line">
@@ -7222,7 +7243,7 @@
         <p:spPr>
           <a:xfrm>
             <a:off x="2845238" y="1505245"/>
-            <a:ext cx="3809682" cy="541815"/>
+            <a:ext cx="3809682" cy="697627"/>
           </a:xfrm>
           <a:prstGeom prst="rect">
             <a:avLst/>
@@ -7504,8 +7525,367 @@
               <a:t>.</a:t>
             </a:r>
           </a:p>
+          <a:p>
+            <a:pPr algn="just">
+              <a:lnSpc>
+                <a:spcPct val="150000"/>
+              </a:lnSpc>
+            </a:pPr>
+            <a:r>
+              <a:rPr lang="ko-KR" altLang="en-US" sz="675" dirty="0">
+                <a:solidFill>
+                  <a:schemeClr val="tx1">
+                    <a:lumMod val="85000"/>
+                    <a:lumOff val="15000"/>
+                  </a:schemeClr>
+                </a:solidFill>
+                <a:latin typeface="Pretendard" panose="02000503000000020004" pitchFamily="2" charset="-127"/>
+                <a:ea typeface="Pretendard" panose="02000503000000020004" pitchFamily="2" charset="-127"/>
+                <a:cs typeface="Pretendard" panose="02000503000000020004" pitchFamily="2" charset="-127"/>
+              </a:rPr>
+              <a:t>일자별 조회와 분석을 위해 수집 시각을 기록하는 데이터입니다</a:t>
+            </a:r>
+            <a:r>
+              <a:rPr lang="en-US" altLang="ko-KR" sz="675" dirty="0">
+                <a:solidFill>
+                  <a:schemeClr val="tx1">
+                    <a:lumMod val="85000"/>
+                    <a:lumOff val="15000"/>
+                  </a:schemeClr>
+                </a:solidFill>
+                <a:latin typeface="Pretendard" panose="02000503000000020004" pitchFamily="2" charset="-127"/>
+                <a:ea typeface="Pretendard" panose="02000503000000020004" pitchFamily="2" charset="-127"/>
+                <a:cs typeface="Pretendard" panose="02000503000000020004" pitchFamily="2" charset="-127"/>
+              </a:rPr>
+              <a:t>.</a:t>
+            </a:r>
+          </a:p>
         </p:txBody>
       </p:sp>
+      <p:grpSp>
+        <p:nvGrpSpPr>
+          <p:cNvPr id="2" name="Group 1">
+            <a:extLst>
+              <a:ext uri="{FF2B5EF4-FFF2-40B4-BE49-F238E27FC236}">
+                <a16:creationId xmlns:a16="http://schemas.microsoft.com/office/drawing/2014/main" id="{3557F007-1AB2-6FD3-3F1F-E208F07A4786}"/>
+              </a:ext>
+            </a:extLst>
+          </p:cNvPr>
+          <p:cNvGrpSpPr/>
+          <p:nvPr/>
+        </p:nvGrpSpPr>
+        <p:grpSpPr>
+          <a:xfrm>
+            <a:off x="306124" y="4008089"/>
+            <a:ext cx="1541476" cy="762493"/>
+            <a:chOff x="408168" y="3007410"/>
+            <a:chExt cx="2055301" cy="1016657"/>
+          </a:xfrm>
+        </p:grpSpPr>
+        <p:sp>
+          <p:nvSpPr>
+            <p:cNvPr id="3" name="Rectangle 2">
+              <a:extLst>
+                <a:ext uri="{FF2B5EF4-FFF2-40B4-BE49-F238E27FC236}">
+                  <a16:creationId xmlns:a16="http://schemas.microsoft.com/office/drawing/2014/main" id="{603226C5-322F-3AF1-E5F9-77EF2E96BC40}"/>
+                </a:ext>
+              </a:extLst>
+            </p:cNvPr>
+            <p:cNvSpPr/>
+            <p:nvPr/>
+          </p:nvSpPr>
+          <p:spPr>
+            <a:xfrm flipH="1">
+              <a:off x="411469" y="3007410"/>
+              <a:ext cx="2052000" cy="1016657"/>
+            </a:xfrm>
+            <a:prstGeom prst="rect">
+              <a:avLst/>
+            </a:prstGeom>
+            <a:solidFill>
+              <a:schemeClr val="bg2"/>
+            </a:solidFill>
+            <a:ln w="12700">
+              <a:solidFill>
+                <a:schemeClr val="bg2">
+                  <a:lumMod val="90000"/>
+                </a:schemeClr>
+              </a:solidFill>
+            </a:ln>
+          </p:spPr>
+          <p:style>
+            <a:lnRef idx="2">
+              <a:schemeClr val="accent1">
+                <a:shade val="15000"/>
+              </a:schemeClr>
+            </a:lnRef>
+            <a:fillRef idx="1">
+              <a:schemeClr val="accent1"/>
+            </a:fillRef>
+            <a:effectRef idx="0">
+              <a:schemeClr val="accent1"/>
+            </a:effectRef>
+            <a:fontRef idx="minor">
+              <a:schemeClr val="lt1"/>
+            </a:fontRef>
+          </p:style>
+          <p:txBody>
+            <a:bodyPr rtlCol="0" anchor="ctr"/>
+            <a:lstStyle/>
+            <a:p>
+              <a:pPr algn="ctr"/>
+              <a:endParaRPr lang="en-KR" sz="1350" dirty="0"/>
+            </a:p>
+          </p:txBody>
+        </p:sp>
+        <p:sp>
+          <p:nvSpPr>
+            <p:cNvPr id="8" name="TextBox 7">
+              <a:extLst>
+                <a:ext uri="{FF2B5EF4-FFF2-40B4-BE49-F238E27FC236}">
+                  <a16:creationId xmlns:a16="http://schemas.microsoft.com/office/drawing/2014/main" id="{1D581FED-00A6-DCCA-38BC-29C28E1DC48B}"/>
+                </a:ext>
+              </a:extLst>
+            </p:cNvPr>
+            <p:cNvSpPr txBox="1"/>
+            <p:nvPr/>
+          </p:nvSpPr>
+          <p:spPr>
+            <a:xfrm>
+              <a:off x="408168" y="3010222"/>
+              <a:ext cx="1318394" cy="476691"/>
+            </a:xfrm>
+            <a:prstGeom prst="rect">
+              <a:avLst/>
+            </a:prstGeom>
+            <a:noFill/>
+          </p:spPr>
+          <p:txBody>
+            <a:bodyPr wrap="square" lIns="67500" tIns="67500" rIns="67500" bIns="35100" rtlCol="0">
+              <a:spAutoFit/>
+            </a:bodyPr>
+            <a:lstStyle/>
+            <a:p>
+              <a:r>
+                <a:rPr lang="en-US" sz="825" b="1" dirty="0">
+                  <a:solidFill>
+                    <a:schemeClr val="tx1">
+                      <a:lumMod val="85000"/>
+                      <a:lumOff val="15000"/>
+                    </a:schemeClr>
+                  </a:solidFill>
+                  <a:latin typeface="Cascadia Code" panose="020B0609020000020004" pitchFamily="34" charset="0"/>
+                  <a:ea typeface="Cascadia Code" panose="020B0609020000020004" pitchFamily="34" charset="0"/>
+                  <a:cs typeface="Cascadia Code" panose="020B0609020000020004" pitchFamily="34" charset="0"/>
+                </a:rPr>
+                <a:t>timestamp</a:t>
+              </a:r>
+            </a:p>
+            <a:p>
+              <a:r>
+                <a:rPr lang="en-KR" sz="825" b="1" dirty="0">
+                  <a:solidFill>
+                    <a:srgbClr val="44B29C"/>
+                  </a:solidFill>
+                  <a:latin typeface="Cascadia Code" panose="020B0609020000020004" pitchFamily="34" charset="0"/>
+                  <a:ea typeface="Cascadia Code" panose="020B0609020000020004" pitchFamily="34" charset="0"/>
+                  <a:cs typeface="Cascadia Code" panose="020B0609020000020004" pitchFamily="34" charset="0"/>
+                </a:rPr>
+                <a:t>DateTimeField</a:t>
+              </a:r>
+            </a:p>
+          </p:txBody>
+        </p:sp>
+        <p:sp>
+          <p:nvSpPr>
+            <p:cNvPr id="10" name="TextBox 9">
+              <a:extLst>
+                <a:ext uri="{FF2B5EF4-FFF2-40B4-BE49-F238E27FC236}">
+                  <a16:creationId xmlns:a16="http://schemas.microsoft.com/office/drawing/2014/main" id="{94F2CED8-412E-C56C-3033-8A05E570108D}"/>
+                </a:ext>
+              </a:extLst>
+            </p:cNvPr>
+            <p:cNvSpPr txBox="1"/>
+            <p:nvPr/>
+          </p:nvSpPr>
+          <p:spPr>
+            <a:xfrm>
+              <a:off x="411468" y="3517690"/>
+              <a:ext cx="2052000" cy="490988"/>
+            </a:xfrm>
+            <a:prstGeom prst="rect">
+              <a:avLst/>
+            </a:prstGeom>
+            <a:noFill/>
+          </p:spPr>
+          <p:txBody>
+            <a:bodyPr wrap="square" lIns="67500" rIns="67500" bIns="67500" rtlCol="0">
+              <a:spAutoFit/>
+            </a:bodyPr>
+            <a:lstStyle/>
+            <a:p>
+              <a:r>
+                <a:rPr lang="ko-KR" altLang="en-US" sz="825" dirty="0">
+                  <a:solidFill>
+                    <a:schemeClr val="bg1">
+                      <a:lumMod val="65000"/>
+                    </a:schemeClr>
+                  </a:solidFill>
+                  <a:latin typeface="Pretendard" panose="02000503000000020004" pitchFamily="2" charset="-127"/>
+                  <a:ea typeface="Pretendard" panose="02000503000000020004" pitchFamily="2" charset="-127"/>
+                  <a:cs typeface="Pretendard" panose="02000503000000020004" pitchFamily="2" charset="-127"/>
+                </a:rPr>
+                <a:t>데이터가 수집된 기준 시간</a:t>
+              </a:r>
+              <a:r>
+                <a:rPr lang="en-US" altLang="ko-KR" sz="825" dirty="0">
+                  <a:solidFill>
+                    <a:schemeClr val="bg1">
+                      <a:lumMod val="65000"/>
+                    </a:schemeClr>
+                  </a:solidFill>
+                  <a:latin typeface="Pretendard" panose="02000503000000020004" pitchFamily="2" charset="-127"/>
+                  <a:ea typeface="Pretendard" panose="02000503000000020004" pitchFamily="2" charset="-127"/>
+                  <a:cs typeface="Pretendard" panose="02000503000000020004" pitchFamily="2" charset="-127"/>
+                </a:rPr>
+                <a:t>.</a:t>
+              </a:r>
+            </a:p>
+            <a:p>
+              <a:r>
+                <a:rPr lang="en-US" altLang="ko-KR" sz="825" dirty="0">
+                  <a:solidFill>
+                    <a:schemeClr val="bg1">
+                      <a:lumMod val="65000"/>
+                    </a:schemeClr>
+                  </a:solidFill>
+                  <a:latin typeface="Pretendard" panose="02000503000000020004" pitchFamily="2" charset="-127"/>
+                  <a:ea typeface="Pretendard" panose="02000503000000020004" pitchFamily="2" charset="-127"/>
+                  <a:cs typeface="Pretendard" panose="02000503000000020004" pitchFamily="2" charset="-127"/>
+                </a:rPr>
+                <a:t>(</a:t>
+              </a:r>
+              <a:r>
+                <a:rPr lang="ko-KR" altLang="en-US" sz="825" dirty="0">
+                  <a:solidFill>
+                    <a:schemeClr val="bg1">
+                      <a:lumMod val="65000"/>
+                    </a:schemeClr>
+                  </a:solidFill>
+                  <a:latin typeface="Pretendard" panose="02000503000000020004" pitchFamily="2" charset="-127"/>
+                  <a:ea typeface="Pretendard" panose="02000503000000020004" pitchFamily="2" charset="-127"/>
+                  <a:cs typeface="Pretendard" panose="02000503000000020004" pitchFamily="2" charset="-127"/>
+                </a:rPr>
+                <a:t>날짜</a:t>
+              </a:r>
+              <a:r>
+                <a:rPr lang="en-US" altLang="ko-KR" sz="825" dirty="0">
+                  <a:solidFill>
+                    <a:schemeClr val="bg1">
+                      <a:lumMod val="65000"/>
+                    </a:schemeClr>
+                  </a:solidFill>
+                  <a:latin typeface="Pretendard" panose="02000503000000020004" pitchFamily="2" charset="-127"/>
+                  <a:ea typeface="Pretendard" panose="02000503000000020004" pitchFamily="2" charset="-127"/>
+                  <a:cs typeface="Pretendard" panose="02000503000000020004" pitchFamily="2" charset="-127"/>
+                </a:rPr>
+                <a:t>/</a:t>
+              </a:r>
+              <a:r>
+                <a:rPr lang="ko-KR" altLang="en-US" sz="825" dirty="0">
+                  <a:solidFill>
+                    <a:schemeClr val="bg1">
+                      <a:lumMod val="65000"/>
+                    </a:schemeClr>
+                  </a:solidFill>
+                  <a:latin typeface="Pretendard" panose="02000503000000020004" pitchFamily="2" charset="-127"/>
+                  <a:ea typeface="Pretendard" panose="02000503000000020004" pitchFamily="2" charset="-127"/>
+                  <a:cs typeface="Pretendard" panose="02000503000000020004" pitchFamily="2" charset="-127"/>
+                </a:rPr>
+                <a:t>시간 형식</a:t>
+              </a:r>
+              <a:r>
+                <a:rPr lang="en-US" altLang="ko-KR" sz="825" dirty="0">
+                  <a:solidFill>
+                    <a:schemeClr val="bg1">
+                      <a:lumMod val="65000"/>
+                    </a:schemeClr>
+                  </a:solidFill>
+                  <a:latin typeface="Pretendard" panose="02000503000000020004" pitchFamily="2" charset="-127"/>
+                  <a:ea typeface="Pretendard" panose="02000503000000020004" pitchFamily="2" charset="-127"/>
+                  <a:cs typeface="Pretendard" panose="02000503000000020004" pitchFamily="2" charset="-127"/>
+                </a:rPr>
+                <a:t>)</a:t>
+              </a:r>
+              <a:endParaRPr lang="en-KR" sz="825" dirty="0">
+                <a:solidFill>
+                  <a:schemeClr val="bg1">
+                    <a:lumMod val="65000"/>
+                  </a:schemeClr>
+                </a:solidFill>
+                <a:latin typeface="Pretendard" panose="02000503000000020004" pitchFamily="2" charset="-127"/>
+                <a:ea typeface="Pretendard" panose="02000503000000020004" pitchFamily="2" charset="-127"/>
+                <a:cs typeface="Pretendard" panose="02000503000000020004" pitchFamily="2" charset="-127"/>
+              </a:endParaRPr>
+            </a:p>
+          </p:txBody>
+        </p:sp>
+        <p:sp>
+          <p:nvSpPr>
+            <p:cNvPr id="11" name="TextBox 10">
+              <a:extLst>
+                <a:ext uri="{FF2B5EF4-FFF2-40B4-BE49-F238E27FC236}">
+                  <a16:creationId xmlns:a16="http://schemas.microsoft.com/office/drawing/2014/main" id="{35D655EF-B33C-A59F-CB20-EB61CD204740}"/>
+                </a:ext>
+              </a:extLst>
+            </p:cNvPr>
+            <p:cNvSpPr txBox="1"/>
+            <p:nvPr/>
+          </p:nvSpPr>
+          <p:spPr>
+            <a:xfrm>
+              <a:off x="1457258" y="3013989"/>
+              <a:ext cx="1006209" cy="476691"/>
+            </a:xfrm>
+            <a:prstGeom prst="rect">
+              <a:avLst/>
+            </a:prstGeom>
+            <a:noFill/>
+          </p:spPr>
+          <p:txBody>
+            <a:bodyPr wrap="square" lIns="67500" tIns="67500" rIns="67500" bIns="35100" rtlCol="0">
+              <a:spAutoFit/>
+            </a:bodyPr>
+            <a:lstStyle/>
+            <a:p>
+              <a:pPr algn="r"/>
+              <a:r>
+                <a:rPr lang="en-US" sz="825" b="1" dirty="0">
+                  <a:solidFill>
+                    <a:schemeClr val="bg1">
+                      <a:lumMod val="65000"/>
+                    </a:schemeClr>
+                  </a:solidFill>
+                  <a:latin typeface="Pretendard" panose="02000503000000020004" pitchFamily="2" charset="-127"/>
+                  <a:ea typeface="Pretendard" panose="02000503000000020004" pitchFamily="2" charset="-127"/>
+                  <a:cs typeface="Pretendard" panose="02000503000000020004" pitchFamily="2" charset="-127"/>
+                </a:rPr>
+                <a:t>2025-10-30 00:00</a:t>
+              </a:r>
+              <a:endParaRPr lang="en-KR" sz="825" b="1" dirty="0">
+                <a:solidFill>
+                  <a:schemeClr val="bg1">
+                    <a:lumMod val="65000"/>
+                  </a:schemeClr>
+                </a:solidFill>
+                <a:latin typeface="Pretendard" panose="02000503000000020004" pitchFamily="2" charset="-127"/>
+                <a:ea typeface="Pretendard" panose="02000503000000020004" pitchFamily="2" charset="-127"/>
+                <a:cs typeface="Pretendard" panose="02000503000000020004" pitchFamily="2" charset="-127"/>
+              </a:endParaRPr>
+            </a:p>
+          </p:txBody>
+        </p:sp>
+      </p:grpSp>
     </p:spTree>
     <p:extLst>
       <p:ext uri="{BB962C8B-B14F-4D97-AF65-F5344CB8AC3E}">
@@ -7848,8 +8228,8 @@
         </p:nvSpPr>
         <p:spPr>
           <a:xfrm>
-            <a:off x="203078" y="607501"/>
-            <a:ext cx="1752295" cy="6010388"/>
+            <a:off x="203078" y="607500"/>
+            <a:ext cx="1752295" cy="6882601"/>
           </a:xfrm>
           <a:prstGeom prst="rect">
             <a:avLst/>
@@ -8131,7 +8511,7 @@
         <p:spPr>
           <a:xfrm>
             <a:off x="203076" y="607501"/>
-            <a:ext cx="1752296" cy="6010388"/>
+            <a:ext cx="1752296" cy="6882600"/>
           </a:xfrm>
           <a:prstGeom prst="rect">
             <a:avLst/>
@@ -10373,7 +10753,7 @@
         </p:nvSpPr>
         <p:spPr>
           <a:xfrm>
-            <a:off x="2157873" y="2896892"/>
+            <a:off x="2157873" y="3016875"/>
             <a:ext cx="4497051" cy="554447"/>
           </a:xfrm>
           <a:prstGeom prst="rect">
@@ -10769,7 +11149,7 @@
         </p:nvSpPr>
         <p:spPr>
           <a:xfrm>
-            <a:off x="2157874" y="2700684"/>
+            <a:off x="2157874" y="2820667"/>
             <a:ext cx="1079142" cy="219291"/>
           </a:xfrm>
           <a:prstGeom prst="rect">
@@ -10870,7 +11250,7 @@
         </p:nvCxnSpPr>
         <p:spPr>
           <a:xfrm>
-            <a:off x="2218767" y="2513336"/>
+            <a:off x="2218767" y="2633319"/>
             <a:ext cx="4436738" cy="0"/>
           </a:xfrm>
           <a:prstGeom prst="line">
@@ -10912,7 +11292,7 @@
         <p:spPr>
           <a:xfrm>
             <a:off x="2160573" y="1369697"/>
-            <a:ext cx="4494347" cy="1009251"/>
+            <a:ext cx="4494347" cy="1165063"/>
           </a:xfrm>
           <a:prstGeom prst="rect">
             <a:avLst/>
@@ -11106,6 +11486,38 @@
                 <a:cs typeface="Cascadia Code" panose="020B0609020000020004" pitchFamily="34" charset="0"/>
               </a:rPr>
               <a:t>is_active</a:t>
+            </a:r>
+            <a:endParaRPr lang="en-US" altLang="ko-KR" sz="675" b="1" dirty="0">
+              <a:solidFill>
+                <a:schemeClr val="tx1">
+                  <a:lumMod val="85000"/>
+                  <a:lumOff val="15000"/>
+                </a:schemeClr>
+              </a:solidFill>
+              <a:latin typeface="Cascadia Code" panose="020B0609020000020004" pitchFamily="34" charset="0"/>
+              <a:ea typeface="Cascadia Code" panose="020B0609020000020004" pitchFamily="34" charset="0"/>
+              <a:cs typeface="Cascadia Code" panose="020B0609020000020004" pitchFamily="34" charset="0"/>
+            </a:endParaRPr>
+          </a:p>
+          <a:p>
+            <a:pPr algn="just">
+              <a:lnSpc>
+                <a:spcPct val="150000"/>
+              </a:lnSpc>
+            </a:pPr>
+            <a:r>
+              <a:rPr lang="en-US" altLang="ko-KR" sz="675" b="1" dirty="0">
+                <a:solidFill>
+                  <a:schemeClr val="tx1">
+                    <a:lumMod val="85000"/>
+                    <a:lumOff val="15000"/>
+                  </a:schemeClr>
+                </a:solidFill>
+                <a:latin typeface="Cascadia Code" panose="020B0609020000020004" pitchFamily="34" charset="0"/>
+                <a:ea typeface="Pretendard" panose="02000503000000020004" pitchFamily="2" charset="-127"/>
+                <a:cs typeface="Cascadia Code" panose="020B0609020000020004" pitchFamily="34" charset="0"/>
+              </a:rPr>
+              <a:t>timestamp</a:t>
             </a:r>
             <a:endParaRPr lang="en-US" altLang="ko-KR" sz="675" dirty="0">
               <a:solidFill>
@@ -11136,7 +11548,7 @@
         <p:spPr>
           <a:xfrm>
             <a:off x="2810603" y="1369697"/>
-            <a:ext cx="3844317" cy="1009251"/>
+            <a:ext cx="3844317" cy="1165063"/>
           </a:xfrm>
           <a:prstGeom prst="rect">
             <a:avLst/>
@@ -11629,6 +12041,41 @@
               <a:t>.</a:t>
             </a:r>
           </a:p>
+          <a:p>
+            <a:pPr algn="just">
+              <a:lnSpc>
+                <a:spcPct val="150000"/>
+              </a:lnSpc>
+            </a:pPr>
+            <a:r>
+              <a:rPr lang="ko-KR" altLang="en-US" sz="675" dirty="0">
+                <a:solidFill>
+                  <a:schemeClr val="tx1">
+                    <a:lumMod val="85000"/>
+                    <a:lumOff val="15000"/>
+                  </a:schemeClr>
+                </a:solidFill>
+                <a:latin typeface="Pretendard" panose="02000503000000020004" pitchFamily="2" charset="-127"/>
+                <a:ea typeface="Pretendard" panose="02000503000000020004" pitchFamily="2" charset="-127"/>
+                <a:cs typeface="Pretendard" panose="02000503000000020004" pitchFamily="2" charset="-127"/>
+              </a:rPr>
+              <a:t>일자별 조회와 분석을 위해 수집 시각을 기록하는 데이터입니다</a:t>
+            </a:r>
+            <a:r>
+              <a:rPr lang="en-US" altLang="ko-KR" sz="675" dirty="0">
+                <a:solidFill>
+                  <a:schemeClr val="tx1">
+                    <a:lumMod val="85000"/>
+                    <a:lumOff val="15000"/>
+                  </a:schemeClr>
+                </a:solidFill>
+                <a:latin typeface="Pretendard" panose="02000503000000020004" pitchFamily="2" charset="-127"/>
+                <a:ea typeface="Pretendard" panose="02000503000000020004" pitchFamily="2" charset="-127"/>
+                <a:cs typeface="Pretendard" panose="02000503000000020004" pitchFamily="2" charset="-127"/>
+              </a:rPr>
+              <a:t>.</a:t>
+            </a:r>
+          </a:p>
         </p:txBody>
       </p:sp>
       <p:sp>
@@ -11645,7 +12092,7 @@
         </p:nvSpPr>
         <p:spPr>
           <a:xfrm>
-            <a:off x="2157873" y="3451339"/>
+            <a:off x="2157873" y="3571322"/>
             <a:ext cx="4497051" cy="1665328"/>
           </a:xfrm>
           <a:prstGeom prst="rect">
@@ -12516,7 +12963,7 @@
         </p:nvSpPr>
         <p:spPr>
           <a:xfrm>
-            <a:off x="2157869" y="5116667"/>
+            <a:off x="2157869" y="5236650"/>
             <a:ext cx="4497051" cy="1506631"/>
           </a:xfrm>
           <a:prstGeom prst="rect">
@@ -13038,6 +13485,330 @@
           </a:p>
         </p:txBody>
       </p:sp>
+      <p:grpSp>
+        <p:nvGrpSpPr>
+          <p:cNvPr id="12" name="Group 11">
+            <a:extLst>
+              <a:ext uri="{FF2B5EF4-FFF2-40B4-BE49-F238E27FC236}">
+                <a16:creationId xmlns:a16="http://schemas.microsoft.com/office/drawing/2014/main" id="{C325C0DC-59D7-F34E-3F20-B74BCFCA9E58}"/>
+              </a:ext>
+            </a:extLst>
+          </p:cNvPr>
+          <p:cNvGrpSpPr/>
+          <p:nvPr/>
+        </p:nvGrpSpPr>
+        <p:grpSpPr>
+          <a:xfrm>
+            <a:off x="306124" y="6617646"/>
+            <a:ext cx="1541476" cy="762493"/>
+            <a:chOff x="408168" y="3007410"/>
+            <a:chExt cx="2055301" cy="1016657"/>
+          </a:xfrm>
+        </p:grpSpPr>
+        <p:sp>
+          <p:nvSpPr>
+            <p:cNvPr id="13" name="Rectangle 12">
+              <a:extLst>
+                <a:ext uri="{FF2B5EF4-FFF2-40B4-BE49-F238E27FC236}">
+                  <a16:creationId xmlns:a16="http://schemas.microsoft.com/office/drawing/2014/main" id="{23DB8C61-7FBD-6D7D-E37E-5C97A7ABB602}"/>
+                </a:ext>
+              </a:extLst>
+            </p:cNvPr>
+            <p:cNvSpPr/>
+            <p:nvPr/>
+          </p:nvSpPr>
+          <p:spPr>
+            <a:xfrm flipH="1">
+              <a:off x="411469" y="3007410"/>
+              <a:ext cx="2052000" cy="1016657"/>
+            </a:xfrm>
+            <a:prstGeom prst="rect">
+              <a:avLst/>
+            </a:prstGeom>
+            <a:solidFill>
+              <a:schemeClr val="bg2"/>
+            </a:solidFill>
+            <a:ln w="12700">
+              <a:solidFill>
+                <a:schemeClr val="bg2">
+                  <a:lumMod val="90000"/>
+                </a:schemeClr>
+              </a:solidFill>
+            </a:ln>
+          </p:spPr>
+          <p:style>
+            <a:lnRef idx="2">
+              <a:schemeClr val="accent1">
+                <a:shade val="15000"/>
+              </a:schemeClr>
+            </a:lnRef>
+            <a:fillRef idx="1">
+              <a:schemeClr val="accent1"/>
+            </a:fillRef>
+            <a:effectRef idx="0">
+              <a:schemeClr val="accent1"/>
+            </a:effectRef>
+            <a:fontRef idx="minor">
+              <a:schemeClr val="lt1"/>
+            </a:fontRef>
+          </p:style>
+          <p:txBody>
+            <a:bodyPr rtlCol="0" anchor="ctr"/>
+            <a:lstStyle/>
+            <a:p>
+              <a:pPr algn="ctr"/>
+              <a:endParaRPr lang="en-KR" sz="1350" dirty="0"/>
+            </a:p>
+          </p:txBody>
+        </p:sp>
+        <p:sp>
+          <p:nvSpPr>
+            <p:cNvPr id="15" name="TextBox 14">
+              <a:extLst>
+                <a:ext uri="{FF2B5EF4-FFF2-40B4-BE49-F238E27FC236}">
+                  <a16:creationId xmlns:a16="http://schemas.microsoft.com/office/drawing/2014/main" id="{8EFDF0CB-D8FB-2292-965A-974F766F5774}"/>
+                </a:ext>
+              </a:extLst>
+            </p:cNvPr>
+            <p:cNvSpPr txBox="1"/>
+            <p:nvPr/>
+          </p:nvSpPr>
+          <p:spPr>
+            <a:xfrm>
+              <a:off x="408168" y="3010222"/>
+              <a:ext cx="1318394" cy="476691"/>
+            </a:xfrm>
+            <a:prstGeom prst="rect">
+              <a:avLst/>
+            </a:prstGeom>
+            <a:noFill/>
+          </p:spPr>
+          <p:txBody>
+            <a:bodyPr wrap="square" lIns="67500" tIns="67500" rIns="67500" bIns="35100" rtlCol="0">
+              <a:spAutoFit/>
+            </a:bodyPr>
+            <a:lstStyle/>
+            <a:p>
+              <a:r>
+                <a:rPr lang="en-US" sz="825" b="1" dirty="0">
+                  <a:solidFill>
+                    <a:schemeClr val="tx1">
+                      <a:lumMod val="85000"/>
+                      <a:lumOff val="15000"/>
+                    </a:schemeClr>
+                  </a:solidFill>
+                  <a:latin typeface="Cascadia Code" panose="020B0609020000020004" pitchFamily="34" charset="0"/>
+                  <a:ea typeface="Cascadia Code" panose="020B0609020000020004" pitchFamily="34" charset="0"/>
+                  <a:cs typeface="Cascadia Code" panose="020B0609020000020004" pitchFamily="34" charset="0"/>
+                </a:rPr>
+                <a:t>timestamp</a:t>
+              </a:r>
+            </a:p>
+            <a:p>
+              <a:r>
+                <a:rPr lang="en-KR" sz="825" b="1" dirty="0">
+                  <a:solidFill>
+                    <a:srgbClr val="44B29C"/>
+                  </a:solidFill>
+                  <a:latin typeface="Cascadia Code" panose="020B0609020000020004" pitchFamily="34" charset="0"/>
+                  <a:ea typeface="Cascadia Code" panose="020B0609020000020004" pitchFamily="34" charset="0"/>
+                  <a:cs typeface="Cascadia Code" panose="020B0609020000020004" pitchFamily="34" charset="0"/>
+                </a:rPr>
+                <a:t>DateTimeField</a:t>
+              </a:r>
+            </a:p>
+          </p:txBody>
+        </p:sp>
+        <p:sp>
+          <p:nvSpPr>
+            <p:cNvPr id="18" name="TextBox 17">
+              <a:extLst>
+                <a:ext uri="{FF2B5EF4-FFF2-40B4-BE49-F238E27FC236}">
+                  <a16:creationId xmlns:a16="http://schemas.microsoft.com/office/drawing/2014/main" id="{A527C30D-8F3F-3AF7-901B-8968CFD12F3A}"/>
+                </a:ext>
+              </a:extLst>
+            </p:cNvPr>
+            <p:cNvSpPr txBox="1"/>
+            <p:nvPr/>
+          </p:nvSpPr>
+          <p:spPr>
+            <a:xfrm>
+              <a:off x="411468" y="3517690"/>
+              <a:ext cx="2052000" cy="490988"/>
+            </a:xfrm>
+            <a:prstGeom prst="rect">
+              <a:avLst/>
+            </a:prstGeom>
+            <a:noFill/>
+          </p:spPr>
+          <p:txBody>
+            <a:bodyPr wrap="square" lIns="67500" rIns="67500" bIns="67500" rtlCol="0">
+              <a:spAutoFit/>
+            </a:bodyPr>
+            <a:lstStyle/>
+            <a:p>
+              <a:r>
+                <a:rPr lang="ko-KR" altLang="en-US" sz="825" dirty="0">
+                  <a:solidFill>
+                    <a:schemeClr val="bg1">
+                      <a:lumMod val="65000"/>
+                    </a:schemeClr>
+                  </a:solidFill>
+                  <a:latin typeface="Pretendard" panose="02000503000000020004" pitchFamily="2" charset="-127"/>
+                  <a:ea typeface="Pretendard" panose="02000503000000020004" pitchFamily="2" charset="-127"/>
+                  <a:cs typeface="Pretendard" panose="02000503000000020004" pitchFamily="2" charset="-127"/>
+                </a:rPr>
+                <a:t>데이터가 수집된 기준 시간</a:t>
+              </a:r>
+              <a:r>
+                <a:rPr lang="en-US" altLang="ko-KR" sz="825" dirty="0">
+                  <a:solidFill>
+                    <a:schemeClr val="bg1">
+                      <a:lumMod val="65000"/>
+                    </a:schemeClr>
+                  </a:solidFill>
+                  <a:latin typeface="Pretendard" panose="02000503000000020004" pitchFamily="2" charset="-127"/>
+                  <a:ea typeface="Pretendard" panose="02000503000000020004" pitchFamily="2" charset="-127"/>
+                  <a:cs typeface="Pretendard" panose="02000503000000020004" pitchFamily="2" charset="-127"/>
+                </a:rPr>
+                <a:t>.</a:t>
+              </a:r>
+            </a:p>
+            <a:p>
+              <a:r>
+                <a:rPr lang="en-US" altLang="ko-KR" sz="825" dirty="0">
+                  <a:solidFill>
+                    <a:schemeClr val="bg1">
+                      <a:lumMod val="65000"/>
+                    </a:schemeClr>
+                  </a:solidFill>
+                  <a:latin typeface="Pretendard" panose="02000503000000020004" pitchFamily="2" charset="-127"/>
+                  <a:ea typeface="Pretendard" panose="02000503000000020004" pitchFamily="2" charset="-127"/>
+                  <a:cs typeface="Pretendard" panose="02000503000000020004" pitchFamily="2" charset="-127"/>
+                </a:rPr>
+                <a:t>(</a:t>
+              </a:r>
+              <a:r>
+                <a:rPr lang="ko-KR" altLang="en-US" sz="825" dirty="0">
+                  <a:solidFill>
+                    <a:schemeClr val="bg1">
+                      <a:lumMod val="65000"/>
+                    </a:schemeClr>
+                  </a:solidFill>
+                  <a:latin typeface="Pretendard" panose="02000503000000020004" pitchFamily="2" charset="-127"/>
+                  <a:ea typeface="Pretendard" panose="02000503000000020004" pitchFamily="2" charset="-127"/>
+                  <a:cs typeface="Pretendard" panose="02000503000000020004" pitchFamily="2" charset="-127"/>
+                </a:rPr>
+                <a:t>날짜</a:t>
+              </a:r>
+              <a:r>
+                <a:rPr lang="en-US" altLang="ko-KR" sz="825" dirty="0">
+                  <a:solidFill>
+                    <a:schemeClr val="bg1">
+                      <a:lumMod val="65000"/>
+                    </a:schemeClr>
+                  </a:solidFill>
+                  <a:latin typeface="Pretendard" panose="02000503000000020004" pitchFamily="2" charset="-127"/>
+                  <a:ea typeface="Pretendard" panose="02000503000000020004" pitchFamily="2" charset="-127"/>
+                  <a:cs typeface="Pretendard" panose="02000503000000020004" pitchFamily="2" charset="-127"/>
+                </a:rPr>
+                <a:t>/</a:t>
+              </a:r>
+              <a:r>
+                <a:rPr lang="ko-KR" altLang="en-US" sz="825" dirty="0">
+                  <a:solidFill>
+                    <a:schemeClr val="bg1">
+                      <a:lumMod val="65000"/>
+                    </a:schemeClr>
+                  </a:solidFill>
+                  <a:latin typeface="Pretendard" panose="02000503000000020004" pitchFamily="2" charset="-127"/>
+                  <a:ea typeface="Pretendard" panose="02000503000000020004" pitchFamily="2" charset="-127"/>
+                  <a:cs typeface="Pretendard" panose="02000503000000020004" pitchFamily="2" charset="-127"/>
+                </a:rPr>
+                <a:t>시간 형식</a:t>
+              </a:r>
+              <a:r>
+                <a:rPr lang="en-US" altLang="ko-KR" sz="825" dirty="0">
+                  <a:solidFill>
+                    <a:schemeClr val="bg1">
+                      <a:lumMod val="65000"/>
+                    </a:schemeClr>
+                  </a:solidFill>
+                  <a:latin typeface="Pretendard" panose="02000503000000020004" pitchFamily="2" charset="-127"/>
+                  <a:ea typeface="Pretendard" panose="02000503000000020004" pitchFamily="2" charset="-127"/>
+                  <a:cs typeface="Pretendard" panose="02000503000000020004" pitchFamily="2" charset="-127"/>
+                </a:rPr>
+                <a:t>)</a:t>
+              </a:r>
+              <a:endParaRPr lang="en-KR" sz="825" dirty="0">
+                <a:solidFill>
+                  <a:schemeClr val="bg1">
+                    <a:lumMod val="65000"/>
+                  </a:schemeClr>
+                </a:solidFill>
+                <a:latin typeface="Pretendard" panose="02000503000000020004" pitchFamily="2" charset="-127"/>
+                <a:ea typeface="Pretendard" panose="02000503000000020004" pitchFamily="2" charset="-127"/>
+                <a:cs typeface="Pretendard" panose="02000503000000020004" pitchFamily="2" charset="-127"/>
+              </a:endParaRPr>
+            </a:p>
+          </p:txBody>
+        </p:sp>
+        <p:sp>
+          <p:nvSpPr>
+            <p:cNvPr id="19" name="TextBox 18">
+              <a:extLst>
+                <a:ext uri="{FF2B5EF4-FFF2-40B4-BE49-F238E27FC236}">
+                  <a16:creationId xmlns:a16="http://schemas.microsoft.com/office/drawing/2014/main" id="{A6DADA28-F512-51FF-630D-B8E67E894FBF}"/>
+                </a:ext>
+              </a:extLst>
+            </p:cNvPr>
+            <p:cNvSpPr txBox="1"/>
+            <p:nvPr/>
+          </p:nvSpPr>
+          <p:spPr>
+            <a:xfrm>
+              <a:off x="1457258" y="3013989"/>
+              <a:ext cx="1006209" cy="476691"/>
+            </a:xfrm>
+            <a:prstGeom prst="rect">
+              <a:avLst/>
+            </a:prstGeom>
+            <a:noFill/>
+          </p:spPr>
+          <p:txBody>
+            <a:bodyPr wrap="square" lIns="67500" tIns="67500" rIns="67500" bIns="35100" rtlCol="0">
+              <a:spAutoFit/>
+            </a:bodyPr>
+            <a:lstStyle/>
+            <a:p>
+              <a:pPr algn="r"/>
+              <a:r>
+                <a:rPr lang="en-US" sz="825" b="1" dirty="0">
+                  <a:solidFill>
+                    <a:schemeClr val="bg1">
+                      <a:lumMod val="65000"/>
+                    </a:schemeClr>
+                  </a:solidFill>
+                  <a:latin typeface="Pretendard" panose="02000503000000020004" pitchFamily="2" charset="-127"/>
+                  <a:ea typeface="Pretendard" panose="02000503000000020004" pitchFamily="2" charset="-127"/>
+                  <a:cs typeface="Pretendard" panose="02000503000000020004" pitchFamily="2" charset="-127"/>
+                </a:rPr>
+                <a:t>2025-10-30 00:00</a:t>
+              </a:r>
+              <a:endParaRPr lang="en-KR" sz="825" b="1" dirty="0">
+                <a:solidFill>
+                  <a:schemeClr val="bg1">
+                    <a:lumMod val="65000"/>
+                  </a:schemeClr>
+                </a:solidFill>
+                <a:latin typeface="Pretendard" panose="02000503000000020004" pitchFamily="2" charset="-127"/>
+                <a:ea typeface="Pretendard" panose="02000503000000020004" pitchFamily="2" charset="-127"/>
+                <a:cs typeface="Pretendard" panose="02000503000000020004" pitchFamily="2" charset="-127"/>
+              </a:endParaRPr>
+            </a:p>
+          </p:txBody>
+        </p:sp>
+      </p:grpSp>
     </p:spTree>
     <p:extLst>
       <p:ext uri="{BB962C8B-B14F-4D97-AF65-F5344CB8AC3E}">
@@ -14244,254 +15015,6 @@
       </p:sp>
       <p:sp>
         <p:nvSpPr>
-          <p:cNvPr id="4" name="Rectangle 3">
-            <a:extLst>
-              <a:ext uri="{FF2B5EF4-FFF2-40B4-BE49-F238E27FC236}">
-                <a16:creationId xmlns:a16="http://schemas.microsoft.com/office/drawing/2014/main" id="{FC1D68FD-3465-73C5-422D-DBCE717FC8F9}"/>
-              </a:ext>
-            </a:extLst>
-          </p:cNvPr>
-          <p:cNvSpPr/>
-          <p:nvPr/>
-        </p:nvSpPr>
-        <p:spPr>
-          <a:xfrm flipH="1">
-            <a:off x="306125" y="3125104"/>
-            <a:ext cx="1539000" cy="761400"/>
-          </a:xfrm>
-          <a:prstGeom prst="rect">
-            <a:avLst/>
-          </a:prstGeom>
-          <a:solidFill>
-            <a:schemeClr val="bg2"/>
-          </a:solidFill>
-          <a:ln w="12700">
-            <a:solidFill>
-              <a:schemeClr val="bg2">
-                <a:lumMod val="90000"/>
-              </a:schemeClr>
-            </a:solidFill>
-          </a:ln>
-        </p:spPr>
-        <p:style>
-          <a:lnRef idx="2">
-            <a:schemeClr val="accent1">
-              <a:shade val="15000"/>
-            </a:schemeClr>
-          </a:lnRef>
-          <a:fillRef idx="1">
-            <a:schemeClr val="accent1"/>
-          </a:fillRef>
-          <a:effectRef idx="0">
-            <a:schemeClr val="accent1"/>
-          </a:effectRef>
-          <a:fontRef idx="minor">
-            <a:schemeClr val="lt1"/>
-          </a:fontRef>
-        </p:style>
-        <p:txBody>
-          <a:bodyPr rtlCol="0" anchor="ctr"/>
-          <a:lstStyle/>
-          <a:p>
-            <a:pPr algn="ctr"/>
-            <a:endParaRPr lang="en-KR" sz="1350" dirty="0"/>
-          </a:p>
-        </p:txBody>
-      </p:sp>
-      <p:sp>
-        <p:nvSpPr>
-          <p:cNvPr id="8" name="TextBox 7">
-            <a:extLst>
-              <a:ext uri="{FF2B5EF4-FFF2-40B4-BE49-F238E27FC236}">
-                <a16:creationId xmlns:a16="http://schemas.microsoft.com/office/drawing/2014/main" id="{696E0B40-A2F2-AEA3-87A1-C58228585184}"/>
-              </a:ext>
-            </a:extLst>
-          </p:cNvPr>
-          <p:cNvSpPr txBox="1"/>
-          <p:nvPr/>
-        </p:nvSpPr>
-        <p:spPr>
-          <a:xfrm>
-            <a:off x="303649" y="3127212"/>
-            <a:ext cx="988796" cy="357518"/>
-          </a:xfrm>
-          <a:prstGeom prst="rect">
-            <a:avLst/>
-          </a:prstGeom>
-          <a:noFill/>
-        </p:spPr>
-        <p:txBody>
-          <a:bodyPr wrap="square" lIns="67500" tIns="67500" rIns="67500" bIns="35100" rtlCol="0">
-            <a:spAutoFit/>
-          </a:bodyPr>
-          <a:lstStyle/>
-          <a:p>
-            <a:r>
-              <a:rPr lang="en-US" sz="825" b="1" dirty="0">
-                <a:solidFill>
-                  <a:schemeClr val="tx1">
-                    <a:lumMod val="85000"/>
-                    <a:lumOff val="15000"/>
-                  </a:schemeClr>
-                </a:solidFill>
-                <a:latin typeface="Cascadia Code" panose="020B0609020000020004" pitchFamily="34" charset="0"/>
-                <a:ea typeface="Cascadia Code" panose="020B0609020000020004" pitchFamily="34" charset="0"/>
-                <a:cs typeface="Cascadia Code" panose="020B0609020000020004" pitchFamily="34" charset="0"/>
-              </a:rPr>
-              <a:t>timestamp</a:t>
-            </a:r>
-          </a:p>
-          <a:p>
-            <a:r>
-              <a:rPr lang="en-KR" sz="825" b="1" dirty="0">
-                <a:solidFill>
-                  <a:srgbClr val="44B29C"/>
-                </a:solidFill>
-                <a:latin typeface="Cascadia Code" panose="020B0609020000020004" pitchFamily="34" charset="0"/>
-                <a:ea typeface="Cascadia Code" panose="020B0609020000020004" pitchFamily="34" charset="0"/>
-                <a:cs typeface="Cascadia Code" panose="020B0609020000020004" pitchFamily="34" charset="0"/>
-              </a:rPr>
-              <a:t>DateTimeField</a:t>
-            </a:r>
-          </a:p>
-        </p:txBody>
-      </p:sp>
-      <p:sp>
-        <p:nvSpPr>
-          <p:cNvPr id="10" name="TextBox 9">
-            <a:extLst>
-              <a:ext uri="{FF2B5EF4-FFF2-40B4-BE49-F238E27FC236}">
-                <a16:creationId xmlns:a16="http://schemas.microsoft.com/office/drawing/2014/main" id="{3E9ADF64-914A-C1E9-CB18-72EE778027F3}"/>
-              </a:ext>
-            </a:extLst>
-          </p:cNvPr>
-          <p:cNvSpPr txBox="1"/>
-          <p:nvPr/>
-        </p:nvSpPr>
-        <p:spPr>
-          <a:xfrm>
-            <a:off x="306124" y="3507813"/>
-            <a:ext cx="1539000" cy="368241"/>
-          </a:xfrm>
-          <a:prstGeom prst="rect">
-            <a:avLst/>
-          </a:prstGeom>
-          <a:noFill/>
-        </p:spPr>
-        <p:txBody>
-          <a:bodyPr wrap="square" lIns="67500" rIns="67500" bIns="67500" rtlCol="0">
-            <a:spAutoFit/>
-          </a:bodyPr>
-          <a:lstStyle/>
-          <a:p>
-            <a:r>
-              <a:rPr lang="ko-KR" altLang="en-US" sz="825" dirty="0">
-                <a:solidFill>
-                  <a:schemeClr val="bg1">
-                    <a:lumMod val="65000"/>
-                  </a:schemeClr>
-                </a:solidFill>
-                <a:latin typeface="Pretendard" panose="02000503000000020004" pitchFamily="2" charset="-127"/>
-                <a:ea typeface="Pretendard" panose="02000503000000020004" pitchFamily="2" charset="-127"/>
-                <a:cs typeface="Pretendard" panose="02000503000000020004" pitchFamily="2" charset="-127"/>
-              </a:rPr>
-              <a:t>데이터가 수집된 기준 시간</a:t>
-            </a:r>
-            <a:r>
-              <a:rPr lang="en-US" altLang="ko-KR" sz="825" dirty="0">
-                <a:solidFill>
-                  <a:schemeClr val="bg1">
-                    <a:lumMod val="65000"/>
-                  </a:schemeClr>
-                </a:solidFill>
-                <a:latin typeface="Pretendard" panose="02000503000000020004" pitchFamily="2" charset="-127"/>
-                <a:ea typeface="Pretendard" panose="02000503000000020004" pitchFamily="2" charset="-127"/>
-                <a:cs typeface="Pretendard" panose="02000503000000020004" pitchFamily="2" charset="-127"/>
-              </a:rPr>
-              <a:t>.</a:t>
-            </a:r>
-          </a:p>
-          <a:p>
-            <a:r>
-              <a:rPr lang="en-US" altLang="ko-KR" sz="825" dirty="0">
-                <a:solidFill>
-                  <a:schemeClr val="bg1">
-                    <a:lumMod val="65000"/>
-                  </a:schemeClr>
-                </a:solidFill>
-                <a:latin typeface="Pretendard" panose="02000503000000020004" pitchFamily="2" charset="-127"/>
-                <a:ea typeface="Pretendard" panose="02000503000000020004" pitchFamily="2" charset="-127"/>
-                <a:cs typeface="Pretendard" panose="02000503000000020004" pitchFamily="2" charset="-127"/>
-              </a:rPr>
-              <a:t>(</a:t>
-            </a:r>
-            <a:r>
-              <a:rPr lang="ko-KR" altLang="en-US" sz="825" dirty="0">
-                <a:solidFill>
-                  <a:schemeClr val="bg1">
-                    <a:lumMod val="65000"/>
-                  </a:schemeClr>
-                </a:solidFill>
-                <a:latin typeface="Pretendard" panose="02000503000000020004" pitchFamily="2" charset="-127"/>
-                <a:ea typeface="Pretendard" panose="02000503000000020004" pitchFamily="2" charset="-127"/>
-                <a:cs typeface="Pretendard" panose="02000503000000020004" pitchFamily="2" charset="-127"/>
-              </a:rPr>
-              <a:t>날짜</a:t>
-            </a:r>
-            <a:r>
-              <a:rPr lang="en-US" altLang="ko-KR" sz="825" dirty="0">
-                <a:solidFill>
-                  <a:schemeClr val="bg1">
-                    <a:lumMod val="65000"/>
-                  </a:schemeClr>
-                </a:solidFill>
-                <a:latin typeface="Pretendard" panose="02000503000000020004" pitchFamily="2" charset="-127"/>
-                <a:ea typeface="Pretendard" panose="02000503000000020004" pitchFamily="2" charset="-127"/>
-                <a:cs typeface="Pretendard" panose="02000503000000020004" pitchFamily="2" charset="-127"/>
-              </a:rPr>
-              <a:t>/</a:t>
-            </a:r>
-            <a:r>
-              <a:rPr lang="ko-KR" altLang="en-US" sz="825" dirty="0">
-                <a:solidFill>
-                  <a:schemeClr val="bg1">
-                    <a:lumMod val="65000"/>
-                  </a:schemeClr>
-                </a:solidFill>
-                <a:latin typeface="Pretendard" panose="02000503000000020004" pitchFamily="2" charset="-127"/>
-                <a:ea typeface="Pretendard" panose="02000503000000020004" pitchFamily="2" charset="-127"/>
-                <a:cs typeface="Pretendard" panose="02000503000000020004" pitchFamily="2" charset="-127"/>
-              </a:rPr>
-              <a:t>시간 형식</a:t>
-            </a:r>
-            <a:r>
-              <a:rPr lang="en-US" altLang="ko-KR" sz="825" dirty="0">
-                <a:solidFill>
-                  <a:schemeClr val="bg1">
-                    <a:lumMod val="65000"/>
-                  </a:schemeClr>
-                </a:solidFill>
-                <a:latin typeface="Pretendard" panose="02000503000000020004" pitchFamily="2" charset="-127"/>
-                <a:ea typeface="Pretendard" panose="02000503000000020004" pitchFamily="2" charset="-127"/>
-                <a:cs typeface="Pretendard" panose="02000503000000020004" pitchFamily="2" charset="-127"/>
-              </a:rPr>
-              <a:t>)</a:t>
-            </a:r>
-            <a:endParaRPr lang="en-KR" sz="825" dirty="0">
-              <a:solidFill>
-                <a:schemeClr val="bg1">
-                  <a:lumMod val="65000"/>
-                </a:schemeClr>
-              </a:solidFill>
-              <a:latin typeface="Pretendard" panose="02000503000000020004" pitchFamily="2" charset="-127"/>
-              <a:ea typeface="Pretendard" panose="02000503000000020004" pitchFamily="2" charset="-127"/>
-              <a:cs typeface="Pretendard" panose="02000503000000020004" pitchFamily="2" charset="-127"/>
-            </a:endParaRPr>
-          </a:p>
-        </p:txBody>
-      </p:sp>
-      <p:sp>
-        <p:nvSpPr>
           <p:cNvPr id="11" name="Rectangle 10">
             <a:extLst>
               <a:ext uri="{FF2B5EF4-FFF2-40B4-BE49-F238E27FC236}">
@@ -14737,7 +15260,7 @@
         </p:nvGrpSpPr>
         <p:grpSpPr>
           <a:xfrm>
-            <a:off x="303424" y="4868956"/>
+            <a:off x="303424" y="3127462"/>
             <a:ext cx="1541477" cy="763088"/>
             <a:chOff x="408167" y="1844503"/>
             <a:chExt cx="2055302" cy="1017450"/>
@@ -15142,37 +15665,262 @@
           </a:p>
         </p:txBody>
       </p:sp>
-      <p:sp>
-        <p:nvSpPr>
-          <p:cNvPr id="52" name="TextBox 51">
+      <p:grpSp>
+        <p:nvGrpSpPr>
+          <p:cNvPr id="3" name="Group 2">
             <a:extLst>
               <a:ext uri="{FF2B5EF4-FFF2-40B4-BE49-F238E27FC236}">
-                <a16:creationId xmlns:a16="http://schemas.microsoft.com/office/drawing/2014/main" id="{C8E90A3A-23CD-4C66-2DA8-F7B1F66AAC57}"/>
+                <a16:creationId xmlns:a16="http://schemas.microsoft.com/office/drawing/2014/main" id="{0114B35E-1FAB-52F4-9E98-F5CD4EE1E728}"/>
               </a:ext>
             </a:extLst>
           </p:cNvPr>
-          <p:cNvSpPr txBox="1"/>
+          <p:cNvGrpSpPr/>
           <p:nvPr/>
-        </p:nvSpPr>
-        <p:spPr>
+        </p:nvGrpSpPr>
+        <p:grpSpPr>
           <a:xfrm>
-            <a:off x="856330" y="3124501"/>
-            <a:ext cx="988795" cy="357518"/>
+            <a:off x="303649" y="4873662"/>
+            <a:ext cx="1541476" cy="762003"/>
+            <a:chOff x="303649" y="3124501"/>
+            <a:chExt cx="1541476" cy="762003"/>
           </a:xfrm>
-          <a:prstGeom prst="rect">
-            <a:avLst/>
-          </a:prstGeom>
-          <a:noFill/>
-        </p:spPr>
-        <p:txBody>
-          <a:bodyPr wrap="square" lIns="67500" tIns="67500" rIns="67500" bIns="35100" rtlCol="0">
-            <a:spAutoFit/>
-          </a:bodyPr>
-          <a:lstStyle/>
-          <a:p>
-            <a:pPr algn="r"/>
-            <a:r>
-              <a:rPr lang="en-US" sz="825" b="1" dirty="0">
+        </p:grpSpPr>
+        <p:sp>
+          <p:nvSpPr>
+            <p:cNvPr id="4" name="Rectangle 3">
+              <a:extLst>
+                <a:ext uri="{FF2B5EF4-FFF2-40B4-BE49-F238E27FC236}">
+                  <a16:creationId xmlns:a16="http://schemas.microsoft.com/office/drawing/2014/main" id="{FC1D68FD-3465-73C5-422D-DBCE717FC8F9}"/>
+                </a:ext>
+              </a:extLst>
+            </p:cNvPr>
+            <p:cNvSpPr/>
+            <p:nvPr/>
+          </p:nvSpPr>
+          <p:spPr>
+            <a:xfrm flipH="1">
+              <a:off x="306125" y="3125104"/>
+              <a:ext cx="1539000" cy="761400"/>
+            </a:xfrm>
+            <a:prstGeom prst="rect">
+              <a:avLst/>
+            </a:prstGeom>
+            <a:solidFill>
+              <a:schemeClr val="bg2"/>
+            </a:solidFill>
+            <a:ln w="12700">
+              <a:solidFill>
+                <a:schemeClr val="bg2">
+                  <a:lumMod val="90000"/>
+                </a:schemeClr>
+              </a:solidFill>
+            </a:ln>
+          </p:spPr>
+          <p:style>
+            <a:lnRef idx="2">
+              <a:schemeClr val="accent1">
+                <a:shade val="15000"/>
+              </a:schemeClr>
+            </a:lnRef>
+            <a:fillRef idx="1">
+              <a:schemeClr val="accent1"/>
+            </a:fillRef>
+            <a:effectRef idx="0">
+              <a:schemeClr val="accent1"/>
+            </a:effectRef>
+            <a:fontRef idx="minor">
+              <a:schemeClr val="lt1"/>
+            </a:fontRef>
+          </p:style>
+          <p:txBody>
+            <a:bodyPr rtlCol="0" anchor="ctr"/>
+            <a:lstStyle/>
+            <a:p>
+              <a:pPr algn="ctr"/>
+              <a:endParaRPr lang="en-KR" sz="1350" dirty="0"/>
+            </a:p>
+          </p:txBody>
+        </p:sp>
+        <p:sp>
+          <p:nvSpPr>
+            <p:cNvPr id="8" name="TextBox 7">
+              <a:extLst>
+                <a:ext uri="{FF2B5EF4-FFF2-40B4-BE49-F238E27FC236}">
+                  <a16:creationId xmlns:a16="http://schemas.microsoft.com/office/drawing/2014/main" id="{696E0B40-A2F2-AEA3-87A1-C58228585184}"/>
+                </a:ext>
+              </a:extLst>
+            </p:cNvPr>
+            <p:cNvSpPr txBox="1"/>
+            <p:nvPr/>
+          </p:nvSpPr>
+          <p:spPr>
+            <a:xfrm>
+              <a:off x="303649" y="3127212"/>
+              <a:ext cx="988796" cy="357518"/>
+            </a:xfrm>
+            <a:prstGeom prst="rect">
+              <a:avLst/>
+            </a:prstGeom>
+            <a:noFill/>
+          </p:spPr>
+          <p:txBody>
+            <a:bodyPr wrap="square" lIns="67500" tIns="67500" rIns="67500" bIns="35100" rtlCol="0">
+              <a:spAutoFit/>
+            </a:bodyPr>
+            <a:lstStyle/>
+            <a:p>
+              <a:r>
+                <a:rPr lang="en-US" sz="825" b="1" dirty="0">
+                  <a:solidFill>
+                    <a:schemeClr val="tx1">
+                      <a:lumMod val="85000"/>
+                      <a:lumOff val="15000"/>
+                    </a:schemeClr>
+                  </a:solidFill>
+                  <a:latin typeface="Cascadia Code" panose="020B0609020000020004" pitchFamily="34" charset="0"/>
+                  <a:ea typeface="Cascadia Code" panose="020B0609020000020004" pitchFamily="34" charset="0"/>
+                  <a:cs typeface="Cascadia Code" panose="020B0609020000020004" pitchFamily="34" charset="0"/>
+                </a:rPr>
+                <a:t>timestamp</a:t>
+              </a:r>
+            </a:p>
+            <a:p>
+              <a:r>
+                <a:rPr lang="en-KR" sz="825" b="1" dirty="0">
+                  <a:solidFill>
+                    <a:srgbClr val="44B29C"/>
+                  </a:solidFill>
+                  <a:latin typeface="Cascadia Code" panose="020B0609020000020004" pitchFamily="34" charset="0"/>
+                  <a:ea typeface="Cascadia Code" panose="020B0609020000020004" pitchFamily="34" charset="0"/>
+                  <a:cs typeface="Cascadia Code" panose="020B0609020000020004" pitchFamily="34" charset="0"/>
+                </a:rPr>
+                <a:t>DateTimeField</a:t>
+              </a:r>
+            </a:p>
+          </p:txBody>
+        </p:sp>
+        <p:sp>
+          <p:nvSpPr>
+            <p:cNvPr id="10" name="TextBox 9">
+              <a:extLst>
+                <a:ext uri="{FF2B5EF4-FFF2-40B4-BE49-F238E27FC236}">
+                  <a16:creationId xmlns:a16="http://schemas.microsoft.com/office/drawing/2014/main" id="{3E9ADF64-914A-C1E9-CB18-72EE778027F3}"/>
+                </a:ext>
+              </a:extLst>
+            </p:cNvPr>
+            <p:cNvSpPr txBox="1"/>
+            <p:nvPr/>
+          </p:nvSpPr>
+          <p:spPr>
+            <a:xfrm>
+              <a:off x="306124" y="3507813"/>
+              <a:ext cx="1539000" cy="368241"/>
+            </a:xfrm>
+            <a:prstGeom prst="rect">
+              <a:avLst/>
+            </a:prstGeom>
+            <a:noFill/>
+          </p:spPr>
+          <p:txBody>
+            <a:bodyPr wrap="square" lIns="67500" rIns="67500" bIns="67500" rtlCol="0">
+              <a:spAutoFit/>
+            </a:bodyPr>
+            <a:lstStyle/>
+            <a:p>
+              <a:r>
+                <a:rPr lang="ko-KR" altLang="en-US" sz="825" dirty="0">
+                  <a:solidFill>
+                    <a:schemeClr val="bg1">
+                      <a:lumMod val="65000"/>
+                    </a:schemeClr>
+                  </a:solidFill>
+                  <a:latin typeface="Pretendard" panose="02000503000000020004" pitchFamily="2" charset="-127"/>
+                  <a:ea typeface="Pretendard" panose="02000503000000020004" pitchFamily="2" charset="-127"/>
+                  <a:cs typeface="Pretendard" panose="02000503000000020004" pitchFamily="2" charset="-127"/>
+                </a:rPr>
+                <a:t>데이터가 수집된 기준 시간</a:t>
+              </a:r>
+              <a:r>
+                <a:rPr lang="en-US" altLang="ko-KR" sz="825" dirty="0">
+                  <a:solidFill>
+                    <a:schemeClr val="bg1">
+                      <a:lumMod val="65000"/>
+                    </a:schemeClr>
+                  </a:solidFill>
+                  <a:latin typeface="Pretendard" panose="02000503000000020004" pitchFamily="2" charset="-127"/>
+                  <a:ea typeface="Pretendard" panose="02000503000000020004" pitchFamily="2" charset="-127"/>
+                  <a:cs typeface="Pretendard" panose="02000503000000020004" pitchFamily="2" charset="-127"/>
+                </a:rPr>
+                <a:t>.</a:t>
+              </a:r>
+            </a:p>
+            <a:p>
+              <a:r>
+                <a:rPr lang="en-US" altLang="ko-KR" sz="825" dirty="0">
+                  <a:solidFill>
+                    <a:schemeClr val="bg1">
+                      <a:lumMod val="65000"/>
+                    </a:schemeClr>
+                  </a:solidFill>
+                  <a:latin typeface="Pretendard" panose="02000503000000020004" pitchFamily="2" charset="-127"/>
+                  <a:ea typeface="Pretendard" panose="02000503000000020004" pitchFamily="2" charset="-127"/>
+                  <a:cs typeface="Pretendard" panose="02000503000000020004" pitchFamily="2" charset="-127"/>
+                </a:rPr>
+                <a:t>(</a:t>
+              </a:r>
+              <a:r>
+                <a:rPr lang="ko-KR" altLang="en-US" sz="825" dirty="0">
+                  <a:solidFill>
+                    <a:schemeClr val="bg1">
+                      <a:lumMod val="65000"/>
+                    </a:schemeClr>
+                  </a:solidFill>
+                  <a:latin typeface="Pretendard" panose="02000503000000020004" pitchFamily="2" charset="-127"/>
+                  <a:ea typeface="Pretendard" panose="02000503000000020004" pitchFamily="2" charset="-127"/>
+                  <a:cs typeface="Pretendard" panose="02000503000000020004" pitchFamily="2" charset="-127"/>
+                </a:rPr>
+                <a:t>날짜</a:t>
+              </a:r>
+              <a:r>
+                <a:rPr lang="en-US" altLang="ko-KR" sz="825" dirty="0">
+                  <a:solidFill>
+                    <a:schemeClr val="bg1">
+                      <a:lumMod val="65000"/>
+                    </a:schemeClr>
+                  </a:solidFill>
+                  <a:latin typeface="Pretendard" panose="02000503000000020004" pitchFamily="2" charset="-127"/>
+                  <a:ea typeface="Pretendard" panose="02000503000000020004" pitchFamily="2" charset="-127"/>
+                  <a:cs typeface="Pretendard" panose="02000503000000020004" pitchFamily="2" charset="-127"/>
+                </a:rPr>
+                <a:t>/</a:t>
+              </a:r>
+              <a:r>
+                <a:rPr lang="ko-KR" altLang="en-US" sz="825" dirty="0">
+                  <a:solidFill>
+                    <a:schemeClr val="bg1">
+                      <a:lumMod val="65000"/>
+                    </a:schemeClr>
+                  </a:solidFill>
+                  <a:latin typeface="Pretendard" panose="02000503000000020004" pitchFamily="2" charset="-127"/>
+                  <a:ea typeface="Pretendard" panose="02000503000000020004" pitchFamily="2" charset="-127"/>
+                  <a:cs typeface="Pretendard" panose="02000503000000020004" pitchFamily="2" charset="-127"/>
+                </a:rPr>
+                <a:t>시간 형식</a:t>
+              </a:r>
+              <a:r>
+                <a:rPr lang="en-US" altLang="ko-KR" sz="825" dirty="0">
+                  <a:solidFill>
+                    <a:schemeClr val="bg1">
+                      <a:lumMod val="65000"/>
+                    </a:schemeClr>
+                  </a:solidFill>
+                  <a:latin typeface="Pretendard" panose="02000503000000020004" pitchFamily="2" charset="-127"/>
+                  <a:ea typeface="Pretendard" panose="02000503000000020004" pitchFamily="2" charset="-127"/>
+                  <a:cs typeface="Pretendard" panose="02000503000000020004" pitchFamily="2" charset="-127"/>
+                </a:rPr>
+                <a:t>)</a:t>
+              </a:r>
+              <a:endParaRPr lang="en-KR" sz="825" dirty="0">
                 <a:solidFill>
                   <a:schemeClr val="bg1">
                     <a:lumMod val="65000"/>
@@ -15181,22 +15929,66 @@
                 <a:latin typeface="Pretendard" panose="02000503000000020004" pitchFamily="2" charset="-127"/>
                 <a:ea typeface="Pretendard" panose="02000503000000020004" pitchFamily="2" charset="-127"/>
                 <a:cs typeface="Pretendard" panose="02000503000000020004" pitchFamily="2" charset="-127"/>
-              </a:rPr>
-              <a:t>2025-10-30 00:00</a:t>
-            </a:r>
-            <a:endParaRPr lang="en-KR" sz="825" b="1" dirty="0">
-              <a:solidFill>
-                <a:schemeClr val="bg1">
-                  <a:lumMod val="65000"/>
-                </a:schemeClr>
-              </a:solidFill>
-              <a:latin typeface="Pretendard" panose="02000503000000020004" pitchFamily="2" charset="-127"/>
-              <a:ea typeface="Pretendard" panose="02000503000000020004" pitchFamily="2" charset="-127"/>
-              <a:cs typeface="Pretendard" panose="02000503000000020004" pitchFamily="2" charset="-127"/>
-            </a:endParaRPr>
-          </a:p>
-        </p:txBody>
-      </p:sp>
+              </a:endParaRPr>
+            </a:p>
+          </p:txBody>
+        </p:sp>
+        <p:sp>
+          <p:nvSpPr>
+            <p:cNvPr id="52" name="TextBox 51">
+              <a:extLst>
+                <a:ext uri="{FF2B5EF4-FFF2-40B4-BE49-F238E27FC236}">
+                  <a16:creationId xmlns:a16="http://schemas.microsoft.com/office/drawing/2014/main" id="{C8E90A3A-23CD-4C66-2DA8-F7B1F66AAC57}"/>
+                </a:ext>
+              </a:extLst>
+            </p:cNvPr>
+            <p:cNvSpPr txBox="1"/>
+            <p:nvPr/>
+          </p:nvSpPr>
+          <p:spPr>
+            <a:xfrm>
+              <a:off x="856330" y="3124501"/>
+              <a:ext cx="988795" cy="357518"/>
+            </a:xfrm>
+            <a:prstGeom prst="rect">
+              <a:avLst/>
+            </a:prstGeom>
+            <a:noFill/>
+          </p:spPr>
+          <p:txBody>
+            <a:bodyPr wrap="square" lIns="67500" tIns="67500" rIns="67500" bIns="35100" rtlCol="0">
+              <a:spAutoFit/>
+            </a:bodyPr>
+            <a:lstStyle/>
+            <a:p>
+              <a:pPr algn="r"/>
+              <a:r>
+                <a:rPr lang="en-US" sz="825" b="1" dirty="0">
+                  <a:solidFill>
+                    <a:schemeClr val="bg1">
+                      <a:lumMod val="65000"/>
+                    </a:schemeClr>
+                  </a:solidFill>
+                  <a:latin typeface="Pretendard" panose="02000503000000020004" pitchFamily="2" charset="-127"/>
+                  <a:ea typeface="Pretendard" panose="02000503000000020004" pitchFamily="2" charset="-127"/>
+                  <a:cs typeface="Pretendard" panose="02000503000000020004" pitchFamily="2" charset="-127"/>
+                </a:rPr>
+                <a:t>2025-10-30 00:00</a:t>
+              </a:r>
+              <a:endParaRPr lang="en-KR" sz="825" b="1" dirty="0">
+                <a:solidFill>
+                  <a:schemeClr val="bg1">
+                    <a:lumMod val="65000"/>
+                  </a:schemeClr>
+                </a:solidFill>
+                <a:latin typeface="Pretendard" panose="02000503000000020004" pitchFamily="2" charset="-127"/>
+                <a:ea typeface="Pretendard" panose="02000503000000020004" pitchFamily="2" charset="-127"/>
+                <a:cs typeface="Pretendard" panose="02000503000000020004" pitchFamily="2" charset="-127"/>
+              </a:endParaRPr>
+            </a:p>
+          </p:txBody>
+        </p:sp>
+      </p:grpSp>
       <p:sp>
         <p:nvSpPr>
           <p:cNvPr id="53" name="TextBox 52">
@@ -16168,7 +16960,7 @@
               </a:lnSpc>
             </a:pPr>
             <a:r>
-              <a:rPr lang="en-US" altLang="ko-KR" sz="675" b="1" dirty="0">
+              <a:rPr lang="en-US" altLang="ko-KR" sz="675" b="1" dirty="0" err="1">
                 <a:solidFill>
                   <a:schemeClr val="tx1">
                     <a:lumMod val="85000"/>
@@ -16179,7 +16971,7 @@
                 <a:ea typeface="Cascadia Code" panose="020B0609020000020004" pitchFamily="34" charset="0"/>
                 <a:cs typeface="Cascadia Code" panose="020B0609020000020004" pitchFamily="34" charset="0"/>
               </a:rPr>
-              <a:t>timestamp</a:t>
+              <a:t>passenger_on</a:t>
             </a:r>
             <a:endParaRPr lang="en-US" altLang="ko-KR" sz="675" dirty="0">
               <a:solidFill>
@@ -16211,18 +17003,18 @@
                 <a:ea typeface="Cascadia Code" panose="020B0609020000020004" pitchFamily="34" charset="0"/>
                 <a:cs typeface="Cascadia Code" panose="020B0609020000020004" pitchFamily="34" charset="0"/>
               </a:rPr>
-              <a:t>passenger_on</a:t>
-            </a:r>
-            <a:endParaRPr lang="en-US" altLang="ko-KR" sz="675" dirty="0">
+              <a:t>passenger_off</a:t>
+            </a:r>
+            <a:endParaRPr lang="en-US" altLang="ko-KR" sz="675" b="1" dirty="0">
               <a:solidFill>
                 <a:schemeClr val="tx1">
                   <a:lumMod val="85000"/>
                   <a:lumOff val="15000"/>
                 </a:schemeClr>
               </a:solidFill>
-              <a:latin typeface="Pretendard" panose="02000503000000020004" pitchFamily="2" charset="-127"/>
-              <a:ea typeface="Pretendard" panose="02000503000000020004" pitchFamily="2" charset="-127"/>
-              <a:cs typeface="Pretendard" panose="02000503000000020004" pitchFamily="2" charset="-127"/>
+              <a:latin typeface="Cascadia Code" panose="020B0609020000020004" pitchFamily="34" charset="0"/>
+              <a:ea typeface="Cascadia Code" panose="020B0609020000020004" pitchFamily="34" charset="0"/>
+              <a:cs typeface="Cascadia Code" panose="020B0609020000020004" pitchFamily="34" charset="0"/>
             </a:endParaRPr>
           </a:p>
           <a:p>
@@ -16232,7 +17024,7 @@
               </a:lnSpc>
             </a:pPr>
             <a:r>
-              <a:rPr lang="en-US" altLang="ko-KR" sz="675" b="1" dirty="0" err="1">
+              <a:rPr lang="en-US" altLang="ko-KR" sz="675" b="1" dirty="0">
                 <a:solidFill>
                   <a:schemeClr val="tx1">
                     <a:lumMod val="85000"/>
@@ -16243,7 +17035,7 @@
                 <a:ea typeface="Cascadia Code" panose="020B0609020000020004" pitchFamily="34" charset="0"/>
                 <a:cs typeface="Cascadia Code" panose="020B0609020000020004" pitchFamily="34" charset="0"/>
               </a:rPr>
-              <a:t>passenger_off</a:t>
+              <a:t>timestamp</a:t>
             </a:r>
             <a:endParaRPr lang="en-US" altLang="ko-KR" sz="675" dirty="0">
               <a:solidFill>
@@ -16637,7 +17429,7 @@
                 <a:ea typeface="Pretendard" panose="02000503000000020004" pitchFamily="2" charset="-127"/>
                 <a:cs typeface="Pretendard" panose="02000503000000020004" pitchFamily="2" charset="-127"/>
               </a:rPr>
-              <a:t>하루 동안 해당 버스 정류장에서의 해당 노선 버스에서 몇 명이 하차했는지 데이터입니다</a:t>
+              <a:t>일자별 조회와 분석을 위해 수집 시각을 기록하는 데이터입니다</a:t>
             </a:r>
             <a:r>
               <a:rPr lang="en-US" altLang="ko-KR" sz="675" dirty="0">
@@ -17847,6 +18639,216 @@
                 <a:cs typeface="Pretendard" panose="02000503000000020004" pitchFamily="2" charset="-127"/>
               </a:rPr>
               <a:t> 데이터를 수집할 때에도 이 메서드를 사용하였습니다</a:t>
+            </a:r>
+            <a:r>
+              <a:rPr lang="en-US" altLang="ko-KR" sz="825" dirty="0">
+                <a:solidFill>
+                  <a:schemeClr val="tx1">
+                    <a:lumMod val="85000"/>
+                    <a:lumOff val="15000"/>
+                  </a:schemeClr>
+                </a:solidFill>
+                <a:latin typeface="Pretendard" panose="02000503000000020004" pitchFamily="2" charset="-127"/>
+                <a:ea typeface="Pretendard" panose="02000503000000020004" pitchFamily="2" charset="-127"/>
+                <a:cs typeface="Pretendard" panose="02000503000000020004" pitchFamily="2" charset="-127"/>
+              </a:rPr>
+              <a:t>.</a:t>
+            </a:r>
+          </a:p>
+        </p:txBody>
+      </p:sp>
+      <p:sp>
+        <p:nvSpPr>
+          <p:cNvPr id="7" name="TextBox 6">
+            <a:extLst>
+              <a:ext uri="{FF2B5EF4-FFF2-40B4-BE49-F238E27FC236}">
+                <a16:creationId xmlns:a16="http://schemas.microsoft.com/office/drawing/2014/main" id="{670C48B2-6228-F731-322B-A307CB2179D4}"/>
+              </a:ext>
+            </a:extLst>
+          </p:cNvPr>
+          <p:cNvSpPr txBox="1"/>
+          <p:nvPr/>
+        </p:nvSpPr>
+        <p:spPr>
+          <a:xfrm>
+            <a:off x="2157869" y="5619160"/>
+            <a:ext cx="4497051" cy="554447"/>
+          </a:xfrm>
+          <a:prstGeom prst="rect">
+            <a:avLst/>
+          </a:prstGeom>
+          <a:noFill/>
+        </p:spPr>
+        <p:txBody>
+          <a:bodyPr wrap="square" rtlCol="0">
+            <a:spAutoFit/>
+          </a:bodyPr>
+          <a:lstStyle/>
+          <a:p>
+            <a:pPr algn="just">
+              <a:lnSpc>
+                <a:spcPct val="125000"/>
+              </a:lnSpc>
+            </a:pPr>
+            <a:r>
+              <a:rPr lang="ko-KR" altLang="en-US" sz="825" dirty="0">
+                <a:solidFill>
+                  <a:schemeClr val="tx1">
+                    <a:lumMod val="85000"/>
+                    <a:lumOff val="15000"/>
+                  </a:schemeClr>
+                </a:solidFill>
+                <a:latin typeface="Pretendard" panose="02000503000000020004" pitchFamily="2" charset="-127"/>
+                <a:ea typeface="Pretendard" panose="02000503000000020004" pitchFamily="2" charset="-127"/>
+                <a:cs typeface="Pretendard" panose="02000503000000020004" pitchFamily="2" charset="-127"/>
+              </a:rPr>
+              <a:t>   행정동과 정류장 기초 데이터는 최신화 빈도가 적어 </a:t>
+            </a:r>
+            <a:r>
+              <a:rPr lang="en-US" altLang="ko-KR" sz="825" dirty="0">
+                <a:solidFill>
+                  <a:schemeClr val="tx1">
+                    <a:lumMod val="85000"/>
+                    <a:lumOff val="15000"/>
+                  </a:schemeClr>
+                </a:solidFill>
+                <a:latin typeface="Pretendard" panose="02000503000000020004" pitchFamily="2" charset="-127"/>
+                <a:ea typeface="Pretendard" panose="02000503000000020004" pitchFamily="2" charset="-127"/>
+                <a:cs typeface="Pretendard" panose="02000503000000020004" pitchFamily="2" charset="-127"/>
+              </a:rPr>
+              <a:t>timestamp</a:t>
+            </a:r>
+            <a:r>
+              <a:rPr lang="ko-KR" altLang="en-US" sz="825" dirty="0" err="1">
+                <a:solidFill>
+                  <a:schemeClr val="tx1">
+                    <a:lumMod val="85000"/>
+                    <a:lumOff val="15000"/>
+                  </a:schemeClr>
+                </a:solidFill>
+                <a:latin typeface="Pretendard" panose="02000503000000020004" pitchFamily="2" charset="-127"/>
+                <a:ea typeface="Pretendard" panose="02000503000000020004" pitchFamily="2" charset="-127"/>
+                <a:cs typeface="Pretendard" panose="02000503000000020004" pitchFamily="2" charset="-127"/>
+              </a:rPr>
+              <a:t>를</a:t>
+            </a:r>
+            <a:r>
+              <a:rPr lang="ko-KR" altLang="en-US" sz="825" dirty="0">
+                <a:solidFill>
+                  <a:schemeClr val="tx1">
+                    <a:lumMod val="85000"/>
+                    <a:lumOff val="15000"/>
+                  </a:schemeClr>
+                </a:solidFill>
+                <a:latin typeface="Pretendard" panose="02000503000000020004" pitchFamily="2" charset="-127"/>
+                <a:ea typeface="Pretendard" panose="02000503000000020004" pitchFamily="2" charset="-127"/>
+                <a:cs typeface="Pretendard" panose="02000503000000020004" pitchFamily="2" charset="-127"/>
+              </a:rPr>
+              <a:t> 서버 시간 기준으로 해도 무관하였 지만</a:t>
+            </a:r>
+            <a:r>
+              <a:rPr lang="en-US" altLang="ko-KR" sz="825" dirty="0">
+                <a:solidFill>
+                  <a:schemeClr val="tx1">
+                    <a:lumMod val="85000"/>
+                    <a:lumOff val="15000"/>
+                  </a:schemeClr>
+                </a:solidFill>
+                <a:latin typeface="Pretendard" panose="02000503000000020004" pitchFamily="2" charset="-127"/>
+                <a:ea typeface="Pretendard" panose="02000503000000020004" pitchFamily="2" charset="-127"/>
+                <a:cs typeface="Pretendard" panose="02000503000000020004" pitchFamily="2" charset="-127"/>
+              </a:rPr>
+              <a:t>,</a:t>
+            </a:r>
+            <a:r>
+              <a:rPr lang="ko-KR" altLang="en-US" sz="825" dirty="0">
+                <a:solidFill>
+                  <a:schemeClr val="tx1">
+                    <a:lumMod val="85000"/>
+                    <a:lumOff val="15000"/>
+                  </a:schemeClr>
+                </a:solidFill>
+                <a:latin typeface="Pretendard" panose="02000503000000020004" pitchFamily="2" charset="-127"/>
+                <a:ea typeface="Pretendard" panose="02000503000000020004" pitchFamily="2" charset="-127"/>
+                <a:cs typeface="Pretendard" panose="02000503000000020004" pitchFamily="2" charset="-127"/>
+              </a:rPr>
+              <a:t> 일일 데이터는 </a:t>
+            </a:r>
+            <a:r>
+              <a:rPr lang="ko-KR" altLang="en-US" sz="825" dirty="0">
+                <a:solidFill>
+                  <a:schemeClr val="tx1">
+                    <a:lumMod val="85000"/>
+                    <a:lumOff val="15000"/>
+                  </a:schemeClr>
+                </a:solidFill>
+                <a:highlight>
+                  <a:srgbClr val="FFDADB"/>
+                </a:highlight>
+                <a:latin typeface="Pretendard" panose="02000503000000020004" pitchFamily="2" charset="-127"/>
+                <a:ea typeface="Pretendard" panose="02000503000000020004" pitchFamily="2" charset="-127"/>
+                <a:cs typeface="Pretendard" panose="02000503000000020004" pitchFamily="2" charset="-127"/>
+              </a:rPr>
+              <a:t>야간 버스에서 자정을 넘어가는 경우 등에서 기준 일자와 저장 시간대가 불일치하는 경우가 있었습니다</a:t>
+            </a:r>
+            <a:r>
+              <a:rPr lang="en-US" altLang="ko-KR" sz="825" dirty="0">
+                <a:solidFill>
+                  <a:schemeClr val="tx1">
+                    <a:lumMod val="85000"/>
+                    <a:lumOff val="15000"/>
+                  </a:schemeClr>
+                </a:solidFill>
+                <a:highlight>
+                  <a:srgbClr val="FFDADB"/>
+                </a:highlight>
+                <a:latin typeface="Pretendard" panose="02000503000000020004" pitchFamily="2" charset="-127"/>
+                <a:ea typeface="Pretendard" panose="02000503000000020004" pitchFamily="2" charset="-127"/>
+                <a:cs typeface="Pretendard" panose="02000503000000020004" pitchFamily="2" charset="-127"/>
+              </a:rPr>
+              <a:t>.</a:t>
+            </a:r>
+            <a:r>
+              <a:rPr lang="ko-KR" altLang="en-US" sz="825" dirty="0">
+                <a:solidFill>
+                  <a:schemeClr val="tx1">
+                    <a:lumMod val="85000"/>
+                    <a:lumOff val="15000"/>
+                  </a:schemeClr>
+                </a:solidFill>
+                <a:latin typeface="Pretendard" panose="02000503000000020004" pitchFamily="2" charset="-127"/>
+                <a:ea typeface="Pretendard" panose="02000503000000020004" pitchFamily="2" charset="-127"/>
+                <a:cs typeface="Pretendard" panose="02000503000000020004" pitchFamily="2" charset="-127"/>
+              </a:rPr>
+              <a:t> 그래서 본 데이터에서의 </a:t>
+            </a:r>
+            <a:r>
+              <a:rPr lang="en-US" altLang="ko-KR" sz="825" dirty="0">
+                <a:solidFill>
+                  <a:schemeClr val="tx1">
+                    <a:lumMod val="85000"/>
+                    <a:lumOff val="15000"/>
+                  </a:schemeClr>
+                </a:solidFill>
+                <a:latin typeface="Pretendard" panose="02000503000000020004" pitchFamily="2" charset="-127"/>
+                <a:ea typeface="Pretendard" panose="02000503000000020004" pitchFamily="2" charset="-127"/>
+                <a:cs typeface="Pretendard" panose="02000503000000020004" pitchFamily="2" charset="-127"/>
+              </a:rPr>
+              <a:t>timestamp</a:t>
+            </a:r>
+            <a:r>
+              <a:rPr lang="ko-KR" altLang="en-US" sz="825" dirty="0">
+                <a:solidFill>
+                  <a:schemeClr val="tx1">
+                    <a:lumMod val="85000"/>
+                    <a:lumOff val="15000"/>
+                  </a:schemeClr>
+                </a:solidFill>
+                <a:latin typeface="Pretendard" panose="02000503000000020004" pitchFamily="2" charset="-127"/>
+                <a:ea typeface="Pretendard" panose="02000503000000020004" pitchFamily="2" charset="-127"/>
+                <a:cs typeface="Pretendard" panose="02000503000000020004" pitchFamily="2" charset="-127"/>
+              </a:rPr>
+              <a:t>는 서울시에서 제공하는 날짜 데이터로 채웁니다</a:t>
             </a:r>
             <a:r>
               <a:rPr lang="en-US" altLang="ko-KR" sz="825" dirty="0">
@@ -18181,12 +19183,238 @@
           </a:fontRef>
         </p:style>
       </p:cxnSp>
+      <p:sp>
+        <p:nvSpPr>
+          <p:cNvPr id="3" name="Rectangle 2">
+            <a:extLst>
+              <a:ext uri="{FF2B5EF4-FFF2-40B4-BE49-F238E27FC236}">
+                <a16:creationId xmlns:a16="http://schemas.microsoft.com/office/drawing/2014/main" id="{90B3A72B-CCE3-8852-8C49-67F4BFCAF83F}"/>
+              </a:ext>
+            </a:extLst>
+          </p:cNvPr>
+          <p:cNvSpPr/>
+          <p:nvPr/>
+        </p:nvSpPr>
+        <p:spPr>
+          <a:xfrm>
+            <a:off x="203077" y="1577454"/>
+            <a:ext cx="1754999" cy="2541224"/>
+          </a:xfrm>
+          <a:prstGeom prst="rect">
+            <a:avLst/>
+          </a:prstGeom>
+          <a:solidFill>
+            <a:schemeClr val="bg1">
+              <a:lumMod val="95000"/>
+            </a:schemeClr>
+          </a:solidFill>
+          <a:ln>
+            <a:noFill/>
+          </a:ln>
+        </p:spPr>
+        <p:style>
+          <a:lnRef idx="2">
+            <a:schemeClr val="accent1">
+              <a:shade val="15000"/>
+            </a:schemeClr>
+          </a:lnRef>
+          <a:fillRef idx="1">
+            <a:schemeClr val="accent1"/>
+          </a:fillRef>
+          <a:effectRef idx="0">
+            <a:schemeClr val="accent1"/>
+          </a:effectRef>
+          <a:fontRef idx="minor">
+            <a:schemeClr val="lt1"/>
+          </a:fontRef>
+        </p:style>
+        <p:txBody>
+          <a:bodyPr rtlCol="0" anchor="ctr"/>
+          <a:lstStyle/>
+          <a:p>
+            <a:pPr algn="ctr"/>
+            <a:endParaRPr lang="en-KR" sz="1350"/>
+          </a:p>
+        </p:txBody>
+      </p:sp>
+      <p:sp>
+        <p:nvSpPr>
+          <p:cNvPr id="7" name="Rectangle 6">
+            <a:extLst>
+              <a:ext uri="{FF2B5EF4-FFF2-40B4-BE49-F238E27FC236}">
+                <a16:creationId xmlns:a16="http://schemas.microsoft.com/office/drawing/2014/main" id="{4CB83049-971E-F5DC-D5CB-A59C1B89D3EF}"/>
+              </a:ext>
+            </a:extLst>
+          </p:cNvPr>
+          <p:cNvSpPr/>
+          <p:nvPr/>
+        </p:nvSpPr>
+        <p:spPr>
+          <a:xfrm>
+            <a:off x="203079" y="1577453"/>
+            <a:ext cx="1754999" cy="710066"/>
+          </a:xfrm>
+          <a:prstGeom prst="rect">
+            <a:avLst/>
+          </a:prstGeom>
+          <a:gradFill>
+            <a:gsLst>
+              <a:gs pos="0">
+                <a:schemeClr val="bg2"/>
+              </a:gs>
+              <a:gs pos="100000">
+                <a:schemeClr val="bg1">
+                  <a:lumMod val="95000"/>
+                </a:schemeClr>
+              </a:gs>
+            </a:gsLst>
+            <a:lin ang="5400000" scaled="1"/>
+          </a:gradFill>
+          <a:ln>
+            <a:noFill/>
+          </a:ln>
+        </p:spPr>
+        <p:style>
+          <a:lnRef idx="2">
+            <a:schemeClr val="accent1">
+              <a:shade val="15000"/>
+            </a:schemeClr>
+          </a:lnRef>
+          <a:fillRef idx="1">
+            <a:schemeClr val="accent1"/>
+          </a:fillRef>
+          <a:effectRef idx="0">
+            <a:schemeClr val="accent1"/>
+          </a:effectRef>
+          <a:fontRef idx="minor">
+            <a:schemeClr val="lt1"/>
+          </a:fontRef>
+        </p:style>
+        <p:txBody>
+          <a:bodyPr rtlCol="0" anchor="ctr"/>
+          <a:lstStyle/>
+          <a:p>
+            <a:pPr algn="ctr"/>
+            <a:endParaRPr lang="en-KR" sz="1350" dirty="0"/>
+          </a:p>
+        </p:txBody>
+      </p:sp>
+      <p:sp>
+        <p:nvSpPr>
+          <p:cNvPr id="9" name="TextBox 8">
+            <a:extLst>
+              <a:ext uri="{FF2B5EF4-FFF2-40B4-BE49-F238E27FC236}">
+                <a16:creationId xmlns:a16="http://schemas.microsoft.com/office/drawing/2014/main" id="{E213F9E8-3A05-7FB5-4F5D-AAE11996C8CE}"/>
+              </a:ext>
+            </a:extLst>
+          </p:cNvPr>
+          <p:cNvSpPr txBox="1"/>
+          <p:nvPr/>
+        </p:nvSpPr>
+        <p:spPr>
+          <a:xfrm>
+            <a:off x="203076" y="1577452"/>
+            <a:ext cx="1754997" cy="298719"/>
+          </a:xfrm>
+          <a:prstGeom prst="rect">
+            <a:avLst/>
+          </a:prstGeom>
+          <a:noFill/>
+        </p:spPr>
+        <p:txBody>
+          <a:bodyPr wrap="square" lIns="135000" tIns="135000" rIns="67500" bIns="35100" rtlCol="0">
+            <a:spAutoFit/>
+          </a:bodyPr>
+          <a:lstStyle/>
+          <a:p>
+            <a:r>
+              <a:rPr lang="en-US" sz="825" b="1" dirty="0" err="1">
+                <a:solidFill>
+                  <a:schemeClr val="tx1">
+                    <a:lumMod val="85000"/>
+                    <a:lumOff val="15000"/>
+                  </a:schemeClr>
+                </a:solidFill>
+                <a:latin typeface="Cascadia Code" panose="020B0609020000020004" pitchFamily="34" charset="0"/>
+                <a:ea typeface="Cascadia Code" panose="020B0609020000020004" pitchFamily="34" charset="0"/>
+                <a:cs typeface="Cascadia Code" panose="020B0609020000020004" pitchFamily="34" charset="0"/>
+              </a:rPr>
+              <a:t>HangJeongDong</a:t>
+            </a:r>
+            <a:endParaRPr lang="en-KR" sz="825" b="1" dirty="0">
+              <a:solidFill>
+                <a:schemeClr val="tx1">
+                  <a:lumMod val="85000"/>
+                  <a:lumOff val="15000"/>
+                </a:schemeClr>
+              </a:solidFill>
+              <a:latin typeface="Cascadia Code" panose="020B0609020000020004" pitchFamily="34" charset="0"/>
+              <a:ea typeface="Cascadia Code" panose="020B0609020000020004" pitchFamily="34" charset="0"/>
+              <a:cs typeface="Cascadia Code" panose="020B0609020000020004" pitchFamily="34" charset="0"/>
+            </a:endParaRPr>
+          </a:p>
+        </p:txBody>
+      </p:sp>
+      <p:sp>
+        <p:nvSpPr>
+          <p:cNvPr id="13" name="Rectangle 12">
+            <a:extLst>
+              <a:ext uri="{FF2B5EF4-FFF2-40B4-BE49-F238E27FC236}">
+                <a16:creationId xmlns:a16="http://schemas.microsoft.com/office/drawing/2014/main" id="{53D251F7-56B9-BC2B-3800-DA47C952FD4D}"/>
+              </a:ext>
+            </a:extLst>
+          </p:cNvPr>
+          <p:cNvSpPr/>
+          <p:nvPr/>
+        </p:nvSpPr>
+        <p:spPr>
+          <a:xfrm>
+            <a:off x="203076" y="1577453"/>
+            <a:ext cx="1755000" cy="2541224"/>
+          </a:xfrm>
+          <a:prstGeom prst="rect">
+            <a:avLst/>
+          </a:prstGeom>
+          <a:noFill/>
+          <a:ln w="12700">
+            <a:solidFill>
+              <a:schemeClr val="bg2">
+                <a:lumMod val="90000"/>
+              </a:schemeClr>
+            </a:solidFill>
+          </a:ln>
+        </p:spPr>
+        <p:style>
+          <a:lnRef idx="2">
+            <a:schemeClr val="accent1">
+              <a:shade val="15000"/>
+            </a:schemeClr>
+          </a:lnRef>
+          <a:fillRef idx="1">
+            <a:schemeClr val="accent1"/>
+          </a:fillRef>
+          <a:effectRef idx="0">
+            <a:schemeClr val="accent1"/>
+          </a:effectRef>
+          <a:fontRef idx="minor">
+            <a:schemeClr val="lt1"/>
+          </a:fontRef>
+        </p:style>
+        <p:txBody>
+          <a:bodyPr rtlCol="0" anchor="ctr"/>
+          <a:lstStyle/>
+          <a:p>
+            <a:pPr algn="ctr"/>
+            <a:endParaRPr lang="en-KR" sz="1350" dirty="0"/>
+          </a:p>
+        </p:txBody>
+      </p:sp>
       <p:grpSp>
         <p:nvGrpSpPr>
-          <p:cNvPr id="150" name="Group 149">
+          <p:cNvPr id="14" name="Group 13">
             <a:extLst>
               <a:ext uri="{FF2B5EF4-FFF2-40B4-BE49-F238E27FC236}">
-                <a16:creationId xmlns:a16="http://schemas.microsoft.com/office/drawing/2014/main" id="{D88B166B-3D99-32D7-55D7-65A392FCF686}"/>
+                <a16:creationId xmlns:a16="http://schemas.microsoft.com/office/drawing/2014/main" id="{4ECF9BBC-1529-5F8F-DA75-D93AA87E55CF}"/>
               </a:ext>
             </a:extLst>
           </p:cNvPr>
@@ -18195,18 +19423,18 @@
         </p:nvGrpSpPr>
         <p:grpSpPr>
           <a:xfrm>
-            <a:off x="203076" y="2329767"/>
-            <a:ext cx="1755002" cy="2265670"/>
-            <a:chOff x="203076" y="607499"/>
-            <a:chExt cx="1755002" cy="2265670"/>
+            <a:off x="306126" y="1959239"/>
+            <a:ext cx="1539676" cy="270000"/>
+            <a:chOff x="408168" y="1846751"/>
+            <a:chExt cx="2052901" cy="360000"/>
           </a:xfrm>
         </p:grpSpPr>
         <p:sp>
           <p:nvSpPr>
-            <p:cNvPr id="3" name="Rectangle 2">
+            <p:cNvPr id="15" name="Rectangle 14">
               <a:extLst>
                 <a:ext uri="{FF2B5EF4-FFF2-40B4-BE49-F238E27FC236}">
-                  <a16:creationId xmlns:a16="http://schemas.microsoft.com/office/drawing/2014/main" id="{90B3A72B-CCE3-8852-8C49-67F4BFCAF83F}"/>
+                  <a16:creationId xmlns:a16="http://schemas.microsoft.com/office/drawing/2014/main" id="{2E7046E0-6384-06E9-D43F-DDF036BB84E6}"/>
                 </a:ext>
               </a:extLst>
             </p:cNvPr>
@@ -18214,186 +19442,16 @@
             <p:nvPr/>
           </p:nvSpPr>
           <p:spPr>
-            <a:xfrm>
-              <a:off x="203077" y="607501"/>
-              <a:ext cx="1754999" cy="2265668"/>
+            <a:xfrm flipH="1">
+              <a:off x="411469" y="1846751"/>
+              <a:ext cx="2049600" cy="360000"/>
             </a:xfrm>
             <a:prstGeom prst="rect">
               <a:avLst/>
             </a:prstGeom>
             <a:solidFill>
-              <a:schemeClr val="bg1">
-                <a:lumMod val="95000"/>
-              </a:schemeClr>
+              <a:schemeClr val="bg2"/>
             </a:solidFill>
-            <a:ln>
-              <a:noFill/>
-            </a:ln>
-          </p:spPr>
-          <p:style>
-            <a:lnRef idx="2">
-              <a:schemeClr val="accent1">
-                <a:shade val="15000"/>
-              </a:schemeClr>
-            </a:lnRef>
-            <a:fillRef idx="1">
-              <a:schemeClr val="accent1"/>
-            </a:fillRef>
-            <a:effectRef idx="0">
-              <a:schemeClr val="accent1"/>
-            </a:effectRef>
-            <a:fontRef idx="minor">
-              <a:schemeClr val="lt1"/>
-            </a:fontRef>
-          </p:style>
-          <p:txBody>
-            <a:bodyPr rtlCol="0" anchor="ctr"/>
-            <a:lstStyle/>
-            <a:p>
-              <a:pPr algn="ctr"/>
-              <a:endParaRPr lang="en-KR" sz="1350"/>
-            </a:p>
-          </p:txBody>
-        </p:sp>
-        <p:sp>
-          <p:nvSpPr>
-            <p:cNvPr id="7" name="Rectangle 6">
-              <a:extLst>
-                <a:ext uri="{FF2B5EF4-FFF2-40B4-BE49-F238E27FC236}">
-                  <a16:creationId xmlns:a16="http://schemas.microsoft.com/office/drawing/2014/main" id="{4CB83049-971E-F5DC-D5CB-A59C1B89D3EF}"/>
-                </a:ext>
-              </a:extLst>
-            </p:cNvPr>
-            <p:cNvSpPr/>
-            <p:nvPr/>
-          </p:nvSpPr>
-          <p:spPr>
-            <a:xfrm>
-              <a:off x="203079" y="607500"/>
-              <a:ext cx="1754999" cy="710066"/>
-            </a:xfrm>
-            <a:prstGeom prst="rect">
-              <a:avLst/>
-            </a:prstGeom>
-            <a:gradFill>
-              <a:gsLst>
-                <a:gs pos="0">
-                  <a:schemeClr val="bg2"/>
-                </a:gs>
-                <a:gs pos="100000">
-                  <a:schemeClr val="bg1">
-                    <a:lumMod val="95000"/>
-                  </a:schemeClr>
-                </a:gs>
-              </a:gsLst>
-              <a:lin ang="5400000" scaled="1"/>
-            </a:gradFill>
-            <a:ln>
-              <a:noFill/>
-            </a:ln>
-          </p:spPr>
-          <p:style>
-            <a:lnRef idx="2">
-              <a:schemeClr val="accent1">
-                <a:shade val="15000"/>
-              </a:schemeClr>
-            </a:lnRef>
-            <a:fillRef idx="1">
-              <a:schemeClr val="accent1"/>
-            </a:fillRef>
-            <a:effectRef idx="0">
-              <a:schemeClr val="accent1"/>
-            </a:effectRef>
-            <a:fontRef idx="minor">
-              <a:schemeClr val="lt1"/>
-            </a:fontRef>
-          </p:style>
-          <p:txBody>
-            <a:bodyPr rtlCol="0" anchor="ctr"/>
-            <a:lstStyle/>
-            <a:p>
-              <a:pPr algn="ctr"/>
-              <a:endParaRPr lang="en-KR" sz="1350" dirty="0"/>
-            </a:p>
-          </p:txBody>
-        </p:sp>
-        <p:sp>
-          <p:nvSpPr>
-            <p:cNvPr id="9" name="TextBox 8">
-              <a:extLst>
-                <a:ext uri="{FF2B5EF4-FFF2-40B4-BE49-F238E27FC236}">
-                  <a16:creationId xmlns:a16="http://schemas.microsoft.com/office/drawing/2014/main" id="{E213F9E8-3A05-7FB5-4F5D-AAE11996C8CE}"/>
-                </a:ext>
-              </a:extLst>
-            </p:cNvPr>
-            <p:cNvSpPr txBox="1"/>
-            <p:nvPr/>
-          </p:nvSpPr>
-          <p:spPr>
-            <a:xfrm>
-              <a:off x="203076" y="607499"/>
-              <a:ext cx="1754997" cy="298719"/>
-            </a:xfrm>
-            <a:prstGeom prst="rect">
-              <a:avLst/>
-            </a:prstGeom>
-            <a:noFill/>
-          </p:spPr>
-          <p:txBody>
-            <a:bodyPr wrap="square" lIns="135000" tIns="135000" rIns="67500" bIns="35100" rtlCol="0">
-              <a:spAutoFit/>
-            </a:bodyPr>
-            <a:lstStyle/>
-            <a:p>
-              <a:r>
-                <a:rPr lang="en-US" sz="825" b="1" dirty="0" err="1">
-                  <a:solidFill>
-                    <a:schemeClr val="tx1">
-                      <a:lumMod val="85000"/>
-                      <a:lumOff val="15000"/>
-                    </a:schemeClr>
-                  </a:solidFill>
-                  <a:latin typeface="Cascadia Code" panose="020B0609020000020004" pitchFamily="34" charset="0"/>
-                  <a:ea typeface="Cascadia Code" panose="020B0609020000020004" pitchFamily="34" charset="0"/>
-                  <a:cs typeface="Cascadia Code" panose="020B0609020000020004" pitchFamily="34" charset="0"/>
-                </a:rPr>
-                <a:t>HangJeongDong</a:t>
-              </a:r>
-              <a:endParaRPr lang="en-KR" sz="825" b="1" dirty="0">
-                <a:solidFill>
-                  <a:schemeClr val="tx1">
-                    <a:lumMod val="85000"/>
-                    <a:lumOff val="15000"/>
-                  </a:schemeClr>
-                </a:solidFill>
-                <a:latin typeface="Cascadia Code" panose="020B0609020000020004" pitchFamily="34" charset="0"/>
-                <a:ea typeface="Cascadia Code" panose="020B0609020000020004" pitchFamily="34" charset="0"/>
-                <a:cs typeface="Cascadia Code" panose="020B0609020000020004" pitchFamily="34" charset="0"/>
-              </a:endParaRPr>
-            </a:p>
-          </p:txBody>
-        </p:sp>
-        <p:sp>
-          <p:nvSpPr>
-            <p:cNvPr id="13" name="Rectangle 12">
-              <a:extLst>
-                <a:ext uri="{FF2B5EF4-FFF2-40B4-BE49-F238E27FC236}">
-                  <a16:creationId xmlns:a16="http://schemas.microsoft.com/office/drawing/2014/main" id="{53D251F7-56B9-BC2B-3800-DA47C952FD4D}"/>
-                </a:ext>
-              </a:extLst>
-            </p:cNvPr>
-            <p:cNvSpPr/>
-            <p:nvPr/>
-          </p:nvSpPr>
-          <p:spPr>
-            <a:xfrm>
-              <a:off x="203076" y="607500"/>
-              <a:ext cx="1755000" cy="2265669"/>
-            </a:xfrm>
-            <a:prstGeom prst="rect">
-              <a:avLst/>
-            </a:prstGeom>
-            <a:noFill/>
             <a:ln w="12700">
               <a:solidFill>
                 <a:schemeClr val="bg2">
@@ -18423,134 +19481,46 @@
             <a:lstStyle/>
             <a:p>
               <a:pPr algn="ctr"/>
-              <a:endParaRPr lang="en-KR" sz="1350" dirty="0"/>
+              <a:endParaRPr lang="en-KR" sz="1350" dirty="0">
+                <a:solidFill>
+                  <a:schemeClr val="bg1">
+                    <a:lumMod val="65000"/>
+                  </a:schemeClr>
+                </a:solidFill>
+              </a:endParaRPr>
             </a:p>
           </p:txBody>
         </p:sp>
-        <p:grpSp>
-          <p:nvGrpSpPr>
-            <p:cNvPr id="14" name="Group 13">
+        <p:sp>
+          <p:nvSpPr>
+            <p:cNvPr id="18" name="TextBox 17">
               <a:extLst>
                 <a:ext uri="{FF2B5EF4-FFF2-40B4-BE49-F238E27FC236}">
-                  <a16:creationId xmlns:a16="http://schemas.microsoft.com/office/drawing/2014/main" id="{4ECF9BBC-1529-5F8F-DA75-D93AA87E55CF}"/>
+                  <a16:creationId xmlns:a16="http://schemas.microsoft.com/office/drawing/2014/main" id="{1CD5C482-578A-DE89-F849-006CE2FA1330}"/>
                 </a:ext>
               </a:extLst>
             </p:cNvPr>
-            <p:cNvGrpSpPr/>
+            <p:cNvSpPr txBox="1"/>
             <p:nvPr/>
-          </p:nvGrpSpPr>
-          <p:grpSpPr>
+          </p:nvSpPr>
+          <p:spPr>
             <a:xfrm>
-              <a:off x="306126" y="989286"/>
-              <a:ext cx="1539676" cy="270000"/>
-              <a:chOff x="408168" y="1846751"/>
-              <a:chExt cx="2052901" cy="360000"/>
+              <a:off x="408168" y="1849564"/>
+              <a:ext cx="1186486" cy="307413"/>
             </a:xfrm>
-          </p:grpSpPr>
-          <p:sp>
-            <p:nvSpPr>
-              <p:cNvPr id="15" name="Rectangle 14">
-                <a:extLst>
-                  <a:ext uri="{FF2B5EF4-FFF2-40B4-BE49-F238E27FC236}">
-                    <a16:creationId xmlns:a16="http://schemas.microsoft.com/office/drawing/2014/main" id="{2E7046E0-6384-06E9-D43F-DDF036BB84E6}"/>
-                  </a:ext>
-                </a:extLst>
-              </p:cNvPr>
-              <p:cNvSpPr/>
-              <p:nvPr/>
-            </p:nvSpPr>
-            <p:spPr>
-              <a:xfrm flipH="1">
-                <a:off x="411469" y="1846751"/>
-                <a:ext cx="2049600" cy="360000"/>
-              </a:xfrm>
-              <a:prstGeom prst="rect">
-                <a:avLst/>
-              </a:prstGeom>
-              <a:solidFill>
-                <a:schemeClr val="bg2"/>
-              </a:solidFill>
-              <a:ln w="12700">
-                <a:solidFill>
-                  <a:schemeClr val="bg2">
-                    <a:lumMod val="90000"/>
-                  </a:schemeClr>
-                </a:solidFill>
-              </a:ln>
-            </p:spPr>
-            <p:style>
-              <a:lnRef idx="2">
-                <a:schemeClr val="accent1">
-                  <a:shade val="15000"/>
-                </a:schemeClr>
-              </a:lnRef>
-              <a:fillRef idx="1">
-                <a:schemeClr val="accent1"/>
-              </a:fillRef>
-              <a:effectRef idx="0">
-                <a:schemeClr val="accent1"/>
-              </a:effectRef>
-              <a:fontRef idx="minor">
-                <a:schemeClr val="lt1"/>
-              </a:fontRef>
-            </p:style>
-            <p:txBody>
-              <a:bodyPr rtlCol="0" anchor="ctr"/>
-              <a:lstStyle/>
-              <a:p>
-                <a:pPr algn="ctr"/>
-                <a:endParaRPr lang="en-KR" sz="1350" dirty="0">
-                  <a:solidFill>
-                    <a:schemeClr val="bg1">
-                      <a:lumMod val="65000"/>
-                    </a:schemeClr>
-                  </a:solidFill>
-                </a:endParaRPr>
-              </a:p>
-            </p:txBody>
-          </p:sp>
-          <p:sp>
-            <p:nvSpPr>
-              <p:cNvPr id="18" name="TextBox 17">
-                <a:extLst>
-                  <a:ext uri="{FF2B5EF4-FFF2-40B4-BE49-F238E27FC236}">
-                    <a16:creationId xmlns:a16="http://schemas.microsoft.com/office/drawing/2014/main" id="{1CD5C482-578A-DE89-F849-006CE2FA1330}"/>
-                  </a:ext>
-                </a:extLst>
-              </p:cNvPr>
-              <p:cNvSpPr txBox="1"/>
-              <p:nvPr/>
-            </p:nvSpPr>
-            <p:spPr>
-              <a:xfrm>
-                <a:off x="408168" y="1849564"/>
-                <a:ext cx="1186486" cy="307413"/>
-              </a:xfrm>
-              <a:prstGeom prst="rect">
-                <a:avLst/>
-              </a:prstGeom>
-              <a:noFill/>
-            </p:spPr>
-            <p:txBody>
-              <a:bodyPr wrap="square" lIns="67500" tIns="67500" rIns="67500" bIns="35100" rtlCol="0">
-                <a:spAutoFit/>
-              </a:bodyPr>
-              <a:lstStyle/>
-              <a:p>
-                <a:r>
-                  <a:rPr lang="en-US" sz="825" b="1" dirty="0" err="1">
-                    <a:solidFill>
-                      <a:schemeClr val="bg1">
-                        <a:lumMod val="65000"/>
-                      </a:schemeClr>
-                    </a:solidFill>
-                    <a:latin typeface="Cascadia Code" panose="020B0609020000020004" pitchFamily="34" charset="0"/>
-                    <a:ea typeface="Cascadia Code" panose="020B0609020000020004" pitchFamily="34" charset="0"/>
-                    <a:cs typeface="Cascadia Code" panose="020B0609020000020004" pitchFamily="34" charset="0"/>
-                  </a:rPr>
-                  <a:t>district_id</a:t>
-                </a:r>
-                <a:endParaRPr lang="en-US" sz="825" b="1" dirty="0">
+            <a:prstGeom prst="rect">
+              <a:avLst/>
+            </a:prstGeom>
+            <a:noFill/>
+          </p:spPr>
+          <p:txBody>
+            <a:bodyPr wrap="square" lIns="67500" tIns="67500" rIns="67500" bIns="35100" rtlCol="0">
+              <a:spAutoFit/>
+            </a:bodyPr>
+            <a:lstStyle/>
+            <a:p>
+              <a:r>
+                <a:rPr lang="en-US" sz="825" b="1" dirty="0" err="1">
                   <a:solidFill>
                     <a:schemeClr val="bg1">
                       <a:lumMod val="65000"/>
@@ -18559,265 +19529,297 @@
                   <a:latin typeface="Cascadia Code" panose="020B0609020000020004" pitchFamily="34" charset="0"/>
                   <a:ea typeface="Cascadia Code" panose="020B0609020000020004" pitchFamily="34" charset="0"/>
                   <a:cs typeface="Cascadia Code" panose="020B0609020000020004" pitchFamily="34" charset="0"/>
-                </a:endParaRPr>
-              </a:p>
-            </p:txBody>
-          </p:sp>
-        </p:grpSp>
-        <p:grpSp>
-          <p:nvGrpSpPr>
-            <p:cNvPr id="36" name="Group 35">
+                </a:rPr>
+                <a:t>district_id</a:t>
+              </a:r>
+              <a:endParaRPr lang="en-US" sz="825" b="1" dirty="0">
+                <a:solidFill>
+                  <a:schemeClr val="bg1">
+                    <a:lumMod val="65000"/>
+                  </a:schemeClr>
+                </a:solidFill>
+                <a:latin typeface="Cascadia Code" panose="020B0609020000020004" pitchFamily="34" charset="0"/>
+                <a:ea typeface="Cascadia Code" panose="020B0609020000020004" pitchFamily="34" charset="0"/>
+                <a:cs typeface="Cascadia Code" panose="020B0609020000020004" pitchFamily="34" charset="0"/>
+              </a:endParaRPr>
+            </a:p>
+          </p:txBody>
+        </p:sp>
+      </p:grpSp>
+      <p:grpSp>
+        <p:nvGrpSpPr>
+          <p:cNvPr id="36" name="Group 35">
+            <a:extLst>
+              <a:ext uri="{FF2B5EF4-FFF2-40B4-BE49-F238E27FC236}">
+                <a16:creationId xmlns:a16="http://schemas.microsoft.com/office/drawing/2014/main" id="{D73F64B1-E75D-8555-B09C-5B59A30EC355}"/>
+              </a:ext>
+            </a:extLst>
+          </p:cNvPr>
+          <p:cNvGrpSpPr/>
+          <p:nvPr/>
+        </p:nvGrpSpPr>
+        <p:grpSpPr>
+          <a:xfrm>
+            <a:off x="307364" y="2278057"/>
+            <a:ext cx="1539676" cy="270000"/>
+            <a:chOff x="408168" y="1846751"/>
+            <a:chExt cx="2052901" cy="360000"/>
+          </a:xfrm>
+        </p:grpSpPr>
+        <p:sp>
+          <p:nvSpPr>
+            <p:cNvPr id="48" name="Rectangle 47">
               <a:extLst>
                 <a:ext uri="{FF2B5EF4-FFF2-40B4-BE49-F238E27FC236}">
-                  <a16:creationId xmlns:a16="http://schemas.microsoft.com/office/drawing/2014/main" id="{D73F64B1-E75D-8555-B09C-5B59A30EC355}"/>
+                  <a16:creationId xmlns:a16="http://schemas.microsoft.com/office/drawing/2014/main" id="{FFB17EE9-0F72-6C40-23E2-917E24FB452E}"/>
                 </a:ext>
               </a:extLst>
             </p:cNvPr>
-            <p:cNvGrpSpPr/>
+            <p:cNvSpPr/>
             <p:nvPr/>
-          </p:nvGrpSpPr>
-          <p:grpSpPr>
+          </p:nvSpPr>
+          <p:spPr>
+            <a:xfrm flipH="1">
+              <a:off x="411469" y="1846751"/>
+              <a:ext cx="2049600" cy="360000"/>
+            </a:xfrm>
+            <a:prstGeom prst="rect">
+              <a:avLst/>
+            </a:prstGeom>
+            <a:solidFill>
+              <a:schemeClr val="bg2"/>
+            </a:solidFill>
+            <a:ln w="12700">
+              <a:solidFill>
+                <a:schemeClr val="bg2">
+                  <a:lumMod val="90000"/>
+                </a:schemeClr>
+              </a:solidFill>
+            </a:ln>
+          </p:spPr>
+          <p:style>
+            <a:lnRef idx="2">
+              <a:schemeClr val="accent1">
+                <a:shade val="15000"/>
+              </a:schemeClr>
+            </a:lnRef>
+            <a:fillRef idx="1">
+              <a:schemeClr val="accent1"/>
+            </a:fillRef>
+            <a:effectRef idx="0">
+              <a:schemeClr val="accent1"/>
+            </a:effectRef>
+            <a:fontRef idx="minor">
+              <a:schemeClr val="lt1"/>
+            </a:fontRef>
+          </p:style>
+          <p:txBody>
+            <a:bodyPr rtlCol="0" anchor="ctr"/>
+            <a:lstStyle/>
+            <a:p>
+              <a:pPr algn="ctr"/>
+              <a:endParaRPr lang="en-KR" sz="1350" dirty="0">
+                <a:solidFill>
+                  <a:schemeClr val="bg1">
+                    <a:lumMod val="65000"/>
+                  </a:schemeClr>
+                </a:solidFill>
+              </a:endParaRPr>
+            </a:p>
+          </p:txBody>
+        </p:sp>
+        <p:sp>
+          <p:nvSpPr>
+            <p:cNvPr id="50" name="TextBox 49">
+              <a:extLst>
+                <a:ext uri="{FF2B5EF4-FFF2-40B4-BE49-F238E27FC236}">
+                  <a16:creationId xmlns:a16="http://schemas.microsoft.com/office/drawing/2014/main" id="{4AECB37A-7B7D-EBB5-FE58-776765DF4959}"/>
+                </a:ext>
+              </a:extLst>
+            </p:cNvPr>
+            <p:cNvSpPr txBox="1"/>
+            <p:nvPr/>
+          </p:nvSpPr>
+          <p:spPr>
             <a:xfrm>
-              <a:off x="307364" y="1308104"/>
-              <a:ext cx="1539676" cy="270000"/>
-              <a:chOff x="408168" y="1846751"/>
-              <a:chExt cx="2052901" cy="360000"/>
+              <a:off x="408168" y="1849564"/>
+              <a:ext cx="1186486" cy="307413"/>
             </a:xfrm>
-          </p:grpSpPr>
-          <p:sp>
-            <p:nvSpPr>
-              <p:cNvPr id="48" name="Rectangle 47">
-                <a:extLst>
-                  <a:ext uri="{FF2B5EF4-FFF2-40B4-BE49-F238E27FC236}">
-                    <a16:creationId xmlns:a16="http://schemas.microsoft.com/office/drawing/2014/main" id="{FFB17EE9-0F72-6C40-23E2-917E24FB452E}"/>
-                  </a:ext>
-                </a:extLst>
-              </p:cNvPr>
-              <p:cNvSpPr/>
-              <p:nvPr/>
-            </p:nvSpPr>
-            <p:spPr>
-              <a:xfrm flipH="1">
-                <a:off x="411469" y="1846751"/>
-                <a:ext cx="2049600" cy="360000"/>
-              </a:xfrm>
-              <a:prstGeom prst="rect">
-                <a:avLst/>
-              </a:prstGeom>
-              <a:solidFill>
-                <a:schemeClr val="bg2"/>
-              </a:solidFill>
-              <a:ln w="12700">
-                <a:solidFill>
-                  <a:schemeClr val="bg2">
-                    <a:lumMod val="90000"/>
-                  </a:schemeClr>
-                </a:solidFill>
-              </a:ln>
-            </p:spPr>
-            <p:style>
-              <a:lnRef idx="2">
-                <a:schemeClr val="accent1">
-                  <a:shade val="15000"/>
-                </a:schemeClr>
-              </a:lnRef>
-              <a:fillRef idx="1">
-                <a:schemeClr val="accent1"/>
-              </a:fillRef>
-              <a:effectRef idx="0">
-                <a:schemeClr val="accent1"/>
-              </a:effectRef>
-              <a:fontRef idx="minor">
-                <a:schemeClr val="lt1"/>
-              </a:fontRef>
-            </p:style>
-            <p:txBody>
-              <a:bodyPr rtlCol="0" anchor="ctr"/>
-              <a:lstStyle/>
-              <a:p>
-                <a:pPr algn="ctr"/>
-                <a:endParaRPr lang="en-KR" sz="1350" dirty="0">
+            <a:prstGeom prst="rect">
+              <a:avLst/>
+            </a:prstGeom>
+            <a:noFill/>
+          </p:spPr>
+          <p:txBody>
+            <a:bodyPr wrap="square" lIns="67500" tIns="67500" rIns="67500" bIns="35100" rtlCol="0">
+              <a:spAutoFit/>
+            </a:bodyPr>
+            <a:lstStyle/>
+            <a:p>
+              <a:r>
+                <a:rPr lang="en-US" sz="825" b="1" dirty="0">
                   <a:solidFill>
                     <a:schemeClr val="bg1">
                       <a:lumMod val="65000"/>
                     </a:schemeClr>
                   </a:solidFill>
-                </a:endParaRPr>
-              </a:p>
-            </p:txBody>
-          </p:sp>
-          <p:sp>
-            <p:nvSpPr>
-              <p:cNvPr id="50" name="TextBox 49">
-                <a:extLst>
-                  <a:ext uri="{FF2B5EF4-FFF2-40B4-BE49-F238E27FC236}">
-                    <a16:creationId xmlns:a16="http://schemas.microsoft.com/office/drawing/2014/main" id="{4AECB37A-7B7D-EBB5-FE58-776765DF4959}"/>
-                  </a:ext>
-                </a:extLst>
-              </p:cNvPr>
-              <p:cNvSpPr txBox="1"/>
-              <p:nvPr/>
-            </p:nvSpPr>
-            <p:spPr>
-              <a:xfrm>
-                <a:off x="408168" y="1849564"/>
-                <a:ext cx="1186486" cy="307413"/>
-              </a:xfrm>
-              <a:prstGeom prst="rect">
-                <a:avLst/>
-              </a:prstGeom>
-              <a:noFill/>
-            </p:spPr>
-            <p:txBody>
-              <a:bodyPr wrap="square" lIns="67500" tIns="67500" rIns="67500" bIns="35100" rtlCol="0">
-                <a:spAutoFit/>
-              </a:bodyPr>
-              <a:lstStyle/>
-              <a:p>
-                <a:r>
-                  <a:rPr lang="en-US" sz="825" b="1" dirty="0">
-                    <a:solidFill>
-                      <a:schemeClr val="bg1">
-                        <a:lumMod val="65000"/>
-                      </a:schemeClr>
-                    </a:solidFill>
-                    <a:latin typeface="Cascadia Code" panose="020B0609020000020004" pitchFamily="34" charset="0"/>
-                    <a:ea typeface="Cascadia Code" panose="020B0609020000020004" pitchFamily="34" charset="0"/>
-                    <a:cs typeface="Cascadia Code" panose="020B0609020000020004" pitchFamily="34" charset="0"/>
-                  </a:rPr>
-                  <a:t>name</a:t>
-                </a:r>
-              </a:p>
-            </p:txBody>
-          </p:sp>
-        </p:grpSp>
-        <p:grpSp>
-          <p:nvGrpSpPr>
-            <p:cNvPr id="54" name="Group 53">
+                  <a:latin typeface="Cascadia Code" panose="020B0609020000020004" pitchFamily="34" charset="0"/>
+                  <a:ea typeface="Cascadia Code" panose="020B0609020000020004" pitchFamily="34" charset="0"/>
+                  <a:cs typeface="Cascadia Code" panose="020B0609020000020004" pitchFamily="34" charset="0"/>
+                </a:rPr>
+                <a:t>name</a:t>
+              </a:r>
+            </a:p>
+          </p:txBody>
+        </p:sp>
+      </p:grpSp>
+      <p:grpSp>
+        <p:nvGrpSpPr>
+          <p:cNvPr id="54" name="Group 53">
+            <a:extLst>
+              <a:ext uri="{FF2B5EF4-FFF2-40B4-BE49-F238E27FC236}">
+                <a16:creationId xmlns:a16="http://schemas.microsoft.com/office/drawing/2014/main" id="{6EFF3262-C444-81EA-B5EA-ED416C228B07}"/>
+              </a:ext>
+            </a:extLst>
+          </p:cNvPr>
+          <p:cNvGrpSpPr/>
+          <p:nvPr/>
+        </p:nvGrpSpPr>
+        <p:grpSpPr>
+          <a:xfrm>
+            <a:off x="306126" y="2596875"/>
+            <a:ext cx="1539676" cy="270000"/>
+            <a:chOff x="408168" y="1846751"/>
+            <a:chExt cx="2052901" cy="360000"/>
+          </a:xfrm>
+        </p:grpSpPr>
+        <p:sp>
+          <p:nvSpPr>
+            <p:cNvPr id="55" name="Rectangle 54">
               <a:extLst>
                 <a:ext uri="{FF2B5EF4-FFF2-40B4-BE49-F238E27FC236}">
-                  <a16:creationId xmlns:a16="http://schemas.microsoft.com/office/drawing/2014/main" id="{6EFF3262-C444-81EA-B5EA-ED416C228B07}"/>
+                  <a16:creationId xmlns:a16="http://schemas.microsoft.com/office/drawing/2014/main" id="{7DA9AD67-B6BC-93C8-0C98-57EB858D033B}"/>
                 </a:ext>
               </a:extLst>
             </p:cNvPr>
-            <p:cNvGrpSpPr/>
+            <p:cNvSpPr/>
             <p:nvPr/>
-          </p:nvGrpSpPr>
-          <p:grpSpPr>
+          </p:nvSpPr>
+          <p:spPr>
+            <a:xfrm flipH="1">
+              <a:off x="411469" y="1846751"/>
+              <a:ext cx="2049600" cy="360000"/>
+            </a:xfrm>
+            <a:prstGeom prst="rect">
+              <a:avLst/>
+            </a:prstGeom>
+            <a:solidFill>
+              <a:schemeClr val="bg2"/>
+            </a:solidFill>
+            <a:ln w="12700">
+              <a:solidFill>
+                <a:schemeClr val="bg2">
+                  <a:lumMod val="90000"/>
+                </a:schemeClr>
+              </a:solidFill>
+            </a:ln>
+          </p:spPr>
+          <p:style>
+            <a:lnRef idx="2">
+              <a:schemeClr val="accent1">
+                <a:shade val="15000"/>
+              </a:schemeClr>
+            </a:lnRef>
+            <a:fillRef idx="1">
+              <a:schemeClr val="accent1"/>
+            </a:fillRef>
+            <a:effectRef idx="0">
+              <a:schemeClr val="accent1"/>
+            </a:effectRef>
+            <a:fontRef idx="minor">
+              <a:schemeClr val="lt1"/>
+            </a:fontRef>
+          </p:style>
+          <p:txBody>
+            <a:bodyPr rtlCol="0" anchor="ctr"/>
+            <a:lstStyle/>
+            <a:p>
+              <a:pPr algn="ctr"/>
+              <a:endParaRPr lang="en-KR" sz="1350" dirty="0">
+                <a:solidFill>
+                  <a:schemeClr val="bg1">
+                    <a:lumMod val="65000"/>
+                  </a:schemeClr>
+                </a:solidFill>
+              </a:endParaRPr>
+            </a:p>
+          </p:txBody>
+        </p:sp>
+        <p:sp>
+          <p:nvSpPr>
+            <p:cNvPr id="56" name="TextBox 55">
+              <a:extLst>
+                <a:ext uri="{FF2B5EF4-FFF2-40B4-BE49-F238E27FC236}">
+                  <a16:creationId xmlns:a16="http://schemas.microsoft.com/office/drawing/2014/main" id="{355BCA54-089E-0F4F-21A4-57CED222D23C}"/>
+                </a:ext>
+              </a:extLst>
+            </p:cNvPr>
+            <p:cNvSpPr txBox="1"/>
+            <p:nvPr/>
+          </p:nvSpPr>
+          <p:spPr>
             <a:xfrm>
-              <a:off x="306126" y="1626922"/>
-              <a:ext cx="1539676" cy="270000"/>
-              <a:chOff x="408168" y="1846751"/>
-              <a:chExt cx="2052901" cy="360000"/>
+              <a:off x="408168" y="1849564"/>
+              <a:ext cx="1186486" cy="307413"/>
             </a:xfrm>
-          </p:grpSpPr>
-          <p:sp>
-            <p:nvSpPr>
-              <p:cNvPr id="55" name="Rectangle 54">
-                <a:extLst>
-                  <a:ext uri="{FF2B5EF4-FFF2-40B4-BE49-F238E27FC236}">
-                    <a16:creationId xmlns:a16="http://schemas.microsoft.com/office/drawing/2014/main" id="{7DA9AD67-B6BC-93C8-0C98-57EB858D033B}"/>
-                  </a:ext>
-                </a:extLst>
-              </p:cNvPr>
-              <p:cNvSpPr/>
-              <p:nvPr/>
-            </p:nvSpPr>
-            <p:spPr>
-              <a:xfrm flipH="1">
-                <a:off x="411469" y="1846751"/>
-                <a:ext cx="2049600" cy="360000"/>
-              </a:xfrm>
-              <a:prstGeom prst="rect">
-                <a:avLst/>
-              </a:prstGeom>
-              <a:solidFill>
-                <a:schemeClr val="bg2"/>
-              </a:solidFill>
-              <a:ln w="12700">
-                <a:solidFill>
-                  <a:schemeClr val="bg2">
-                    <a:lumMod val="90000"/>
-                  </a:schemeClr>
-                </a:solidFill>
-              </a:ln>
-            </p:spPr>
-            <p:style>
-              <a:lnRef idx="2">
-                <a:schemeClr val="accent1">
-                  <a:shade val="15000"/>
-                </a:schemeClr>
-              </a:lnRef>
-              <a:fillRef idx="1">
-                <a:schemeClr val="accent1"/>
-              </a:fillRef>
-              <a:effectRef idx="0">
-                <a:schemeClr val="accent1"/>
-              </a:effectRef>
-              <a:fontRef idx="minor">
-                <a:schemeClr val="lt1"/>
-              </a:fontRef>
-            </p:style>
-            <p:txBody>
-              <a:bodyPr rtlCol="0" anchor="ctr"/>
-              <a:lstStyle/>
-              <a:p>
-                <a:pPr algn="ctr"/>
-                <a:endParaRPr lang="en-KR" sz="1350" dirty="0">
+            <a:prstGeom prst="rect">
+              <a:avLst/>
+            </a:prstGeom>
+            <a:noFill/>
+          </p:spPr>
+          <p:txBody>
+            <a:bodyPr wrap="square" lIns="67500" tIns="67500" rIns="67500" bIns="35100" rtlCol="0">
+              <a:spAutoFit/>
+            </a:bodyPr>
+            <a:lstStyle/>
+            <a:p>
+              <a:r>
+                <a:rPr lang="en-US" sz="825" b="1" dirty="0">
                   <a:solidFill>
                     <a:schemeClr val="bg1">
                       <a:lumMod val="65000"/>
                     </a:schemeClr>
                   </a:solidFill>
-                </a:endParaRPr>
-              </a:p>
-            </p:txBody>
-          </p:sp>
-          <p:sp>
-            <p:nvSpPr>
-              <p:cNvPr id="56" name="TextBox 55">
-                <a:extLst>
-                  <a:ext uri="{FF2B5EF4-FFF2-40B4-BE49-F238E27FC236}">
-                    <a16:creationId xmlns:a16="http://schemas.microsoft.com/office/drawing/2014/main" id="{355BCA54-089E-0F4F-21A4-57CED222D23C}"/>
-                  </a:ext>
-                </a:extLst>
-              </p:cNvPr>
-              <p:cNvSpPr txBox="1"/>
-              <p:nvPr/>
-            </p:nvSpPr>
-            <p:spPr>
-              <a:xfrm>
-                <a:off x="408168" y="1849564"/>
-                <a:ext cx="1186486" cy="307413"/>
-              </a:xfrm>
-              <a:prstGeom prst="rect">
-                <a:avLst/>
-              </a:prstGeom>
-              <a:noFill/>
-            </p:spPr>
-            <p:txBody>
-              <a:bodyPr wrap="square" lIns="67500" tIns="67500" rIns="67500" bIns="35100" rtlCol="0">
-                <a:spAutoFit/>
-              </a:bodyPr>
-              <a:lstStyle/>
-              <a:p>
-                <a:r>
-                  <a:rPr lang="en-US" sz="825" b="1" dirty="0">
-                    <a:solidFill>
-                      <a:schemeClr val="bg1">
-                        <a:lumMod val="65000"/>
-                      </a:schemeClr>
-                    </a:solidFill>
-                    <a:latin typeface="Cascadia Code" panose="020B0609020000020004" pitchFamily="34" charset="0"/>
-                    <a:ea typeface="Cascadia Code" panose="020B0609020000020004" pitchFamily="34" charset="0"/>
-                    <a:cs typeface="Cascadia Code" panose="020B0609020000020004" pitchFamily="34" charset="0"/>
-                  </a:rPr>
-                  <a:t>population</a:t>
-                </a:r>
-              </a:p>
-            </p:txBody>
-          </p:sp>
-        </p:grpSp>
+                  <a:latin typeface="Cascadia Code" panose="020B0609020000020004" pitchFamily="34" charset="0"/>
+                  <a:ea typeface="Cascadia Code" panose="020B0609020000020004" pitchFamily="34" charset="0"/>
+                  <a:cs typeface="Cascadia Code" panose="020B0609020000020004" pitchFamily="34" charset="0"/>
+                </a:rPr>
+                <a:t>population</a:t>
+              </a:r>
+            </a:p>
+          </p:txBody>
+        </p:sp>
+      </p:grpSp>
+      <p:grpSp>
+        <p:nvGrpSpPr>
+          <p:cNvPr id="4" name="Group 3">
+            <a:extLst>
+              <a:ext uri="{FF2B5EF4-FFF2-40B4-BE49-F238E27FC236}">
+                <a16:creationId xmlns:a16="http://schemas.microsoft.com/office/drawing/2014/main" id="{65BE6DCF-DB92-2DC3-9626-345F29B9322D}"/>
+              </a:ext>
+            </a:extLst>
+          </p:cNvPr>
+          <p:cNvGrpSpPr/>
+          <p:nvPr/>
+        </p:nvGrpSpPr>
+        <p:grpSpPr>
+          <a:xfrm>
+            <a:off x="303649" y="3252857"/>
+            <a:ext cx="1541476" cy="762003"/>
+            <a:chOff x="303649" y="2970459"/>
+            <a:chExt cx="1541476" cy="762003"/>
+          </a:xfrm>
+        </p:grpSpPr>
         <p:sp>
           <p:nvSpPr>
             <p:cNvPr id="68" name="Rectangle 67">
@@ -18832,7 +19834,7 @@
           </p:nvSpPr>
           <p:spPr>
             <a:xfrm flipH="1">
-              <a:off x="306125" y="2001109"/>
+              <a:off x="306125" y="2971062"/>
               <a:ext cx="1539000" cy="761400"/>
             </a:xfrm>
             <a:prstGeom prst="rect">
@@ -18888,7 +19890,7 @@
           </p:nvSpPr>
           <p:spPr>
             <a:xfrm>
-              <a:off x="303649" y="2003217"/>
+              <a:off x="303649" y="2973170"/>
               <a:ext cx="988796" cy="357518"/>
             </a:xfrm>
             <a:prstGeom prst="rect">
@@ -18957,7 +19959,7 @@
           </p:nvSpPr>
           <p:spPr>
             <a:xfrm>
-              <a:off x="306124" y="2383818"/>
+              <a:off x="306124" y="3353771"/>
               <a:ext cx="1539000" cy="368241"/>
             </a:xfrm>
             <a:prstGeom prst="rect">
@@ -19115,7 +20117,7 @@
           </p:nvSpPr>
           <p:spPr>
             <a:xfrm>
-              <a:off x="856330" y="2000506"/>
+              <a:off x="856330" y="2970459"/>
               <a:ext cx="988795" cy="357518"/>
             </a:xfrm>
             <a:prstGeom prst="rect">
@@ -19157,12 +20159,238 @@
           </p:txBody>
         </p:sp>
       </p:grpSp>
+      <p:sp>
+        <p:nvSpPr>
+          <p:cNvPr id="73" name="Rectangle 72">
+            <a:extLst>
+              <a:ext uri="{FF2B5EF4-FFF2-40B4-BE49-F238E27FC236}">
+                <a16:creationId xmlns:a16="http://schemas.microsoft.com/office/drawing/2014/main" id="{4441B44A-6AD7-186A-B883-D783CF1C900B}"/>
+              </a:ext>
+            </a:extLst>
+          </p:cNvPr>
+          <p:cNvSpPr/>
+          <p:nvPr/>
+        </p:nvSpPr>
+        <p:spPr>
+          <a:xfrm>
+            <a:off x="2161137" y="1577452"/>
+            <a:ext cx="1754999" cy="3502068"/>
+          </a:xfrm>
+          <a:prstGeom prst="rect">
+            <a:avLst/>
+          </a:prstGeom>
+          <a:solidFill>
+            <a:schemeClr val="bg1">
+              <a:lumMod val="95000"/>
+            </a:schemeClr>
+          </a:solidFill>
+          <a:ln>
+            <a:noFill/>
+          </a:ln>
+        </p:spPr>
+        <p:style>
+          <a:lnRef idx="2">
+            <a:schemeClr val="accent1">
+              <a:shade val="15000"/>
+            </a:schemeClr>
+          </a:lnRef>
+          <a:fillRef idx="1">
+            <a:schemeClr val="accent1"/>
+          </a:fillRef>
+          <a:effectRef idx="0">
+            <a:schemeClr val="accent1"/>
+          </a:effectRef>
+          <a:fontRef idx="minor">
+            <a:schemeClr val="lt1"/>
+          </a:fontRef>
+        </p:style>
+        <p:txBody>
+          <a:bodyPr rtlCol="0" anchor="ctr"/>
+          <a:lstStyle/>
+          <a:p>
+            <a:pPr algn="ctr"/>
+            <a:endParaRPr lang="en-KR" sz="1350"/>
+          </a:p>
+        </p:txBody>
+      </p:sp>
+      <p:sp>
+        <p:nvSpPr>
+          <p:cNvPr id="74" name="Rectangle 73">
+            <a:extLst>
+              <a:ext uri="{FF2B5EF4-FFF2-40B4-BE49-F238E27FC236}">
+                <a16:creationId xmlns:a16="http://schemas.microsoft.com/office/drawing/2014/main" id="{C2E22911-FA1B-ABD0-73D4-F1775B2A10D0}"/>
+              </a:ext>
+            </a:extLst>
+          </p:cNvPr>
+          <p:cNvSpPr/>
+          <p:nvPr/>
+        </p:nvSpPr>
+        <p:spPr>
+          <a:xfrm>
+            <a:off x="2161139" y="1577451"/>
+            <a:ext cx="1754999" cy="710066"/>
+          </a:xfrm>
+          <a:prstGeom prst="rect">
+            <a:avLst/>
+          </a:prstGeom>
+          <a:gradFill>
+            <a:gsLst>
+              <a:gs pos="0">
+                <a:schemeClr val="bg2"/>
+              </a:gs>
+              <a:gs pos="100000">
+                <a:schemeClr val="bg1">
+                  <a:lumMod val="95000"/>
+                </a:schemeClr>
+              </a:gs>
+            </a:gsLst>
+            <a:lin ang="5400000" scaled="1"/>
+          </a:gradFill>
+          <a:ln>
+            <a:noFill/>
+          </a:ln>
+        </p:spPr>
+        <p:style>
+          <a:lnRef idx="2">
+            <a:schemeClr val="accent1">
+              <a:shade val="15000"/>
+            </a:schemeClr>
+          </a:lnRef>
+          <a:fillRef idx="1">
+            <a:schemeClr val="accent1"/>
+          </a:fillRef>
+          <a:effectRef idx="0">
+            <a:schemeClr val="accent1"/>
+          </a:effectRef>
+          <a:fontRef idx="minor">
+            <a:schemeClr val="lt1"/>
+          </a:fontRef>
+        </p:style>
+        <p:txBody>
+          <a:bodyPr rtlCol="0" anchor="ctr"/>
+          <a:lstStyle/>
+          <a:p>
+            <a:pPr algn="ctr"/>
+            <a:endParaRPr lang="en-KR" sz="1350" dirty="0"/>
+          </a:p>
+        </p:txBody>
+      </p:sp>
+      <p:sp>
+        <p:nvSpPr>
+          <p:cNvPr id="75" name="TextBox 74">
+            <a:extLst>
+              <a:ext uri="{FF2B5EF4-FFF2-40B4-BE49-F238E27FC236}">
+                <a16:creationId xmlns:a16="http://schemas.microsoft.com/office/drawing/2014/main" id="{E5048759-08F2-3B7F-4C3F-C18A2EC93B7D}"/>
+              </a:ext>
+            </a:extLst>
+          </p:cNvPr>
+          <p:cNvSpPr txBox="1"/>
+          <p:nvPr/>
+        </p:nvSpPr>
+        <p:spPr>
+          <a:xfrm>
+            <a:off x="2161136" y="1577450"/>
+            <a:ext cx="1754997" cy="298719"/>
+          </a:xfrm>
+          <a:prstGeom prst="rect">
+            <a:avLst/>
+          </a:prstGeom>
+          <a:noFill/>
+        </p:spPr>
+        <p:txBody>
+          <a:bodyPr wrap="square" lIns="135000" tIns="135000" rIns="67500" bIns="35100" rtlCol="0">
+            <a:spAutoFit/>
+          </a:bodyPr>
+          <a:lstStyle/>
+          <a:p>
+            <a:r>
+              <a:rPr lang="en-US" sz="825" b="1" dirty="0" err="1">
+                <a:solidFill>
+                  <a:schemeClr val="tx1">
+                    <a:lumMod val="85000"/>
+                    <a:lumOff val="15000"/>
+                  </a:schemeClr>
+                </a:solidFill>
+                <a:latin typeface="Cascadia Code" panose="020B0609020000020004" pitchFamily="34" charset="0"/>
+                <a:ea typeface="Cascadia Code" panose="020B0609020000020004" pitchFamily="34" charset="0"/>
+                <a:cs typeface="Cascadia Code" panose="020B0609020000020004" pitchFamily="34" charset="0"/>
+              </a:rPr>
+              <a:t>BusStopHistory</a:t>
+            </a:r>
+            <a:endParaRPr lang="en-KR" sz="825" b="1" dirty="0">
+              <a:solidFill>
+                <a:schemeClr val="tx1">
+                  <a:lumMod val="85000"/>
+                  <a:lumOff val="15000"/>
+                </a:schemeClr>
+              </a:solidFill>
+              <a:latin typeface="Cascadia Code" panose="020B0609020000020004" pitchFamily="34" charset="0"/>
+              <a:ea typeface="Cascadia Code" panose="020B0609020000020004" pitchFamily="34" charset="0"/>
+              <a:cs typeface="Cascadia Code" panose="020B0609020000020004" pitchFamily="34" charset="0"/>
+            </a:endParaRPr>
+          </a:p>
+        </p:txBody>
+      </p:sp>
+      <p:sp>
+        <p:nvSpPr>
+          <p:cNvPr id="76" name="Rectangle 75">
+            <a:extLst>
+              <a:ext uri="{FF2B5EF4-FFF2-40B4-BE49-F238E27FC236}">
+                <a16:creationId xmlns:a16="http://schemas.microsoft.com/office/drawing/2014/main" id="{926DD798-0FD2-E1FE-633A-938FD9BEB3E1}"/>
+              </a:ext>
+            </a:extLst>
+          </p:cNvPr>
+          <p:cNvSpPr/>
+          <p:nvPr/>
+        </p:nvSpPr>
+        <p:spPr>
+          <a:xfrm>
+            <a:off x="2161136" y="1577451"/>
+            <a:ext cx="1755000" cy="3502068"/>
+          </a:xfrm>
+          <a:prstGeom prst="rect">
+            <a:avLst/>
+          </a:prstGeom>
+          <a:noFill/>
+          <a:ln w="12700">
+            <a:solidFill>
+              <a:schemeClr val="bg2">
+                <a:lumMod val="90000"/>
+              </a:schemeClr>
+            </a:solidFill>
+          </a:ln>
+        </p:spPr>
+        <p:style>
+          <a:lnRef idx="2">
+            <a:schemeClr val="accent1">
+              <a:shade val="15000"/>
+            </a:schemeClr>
+          </a:lnRef>
+          <a:fillRef idx="1">
+            <a:schemeClr val="accent1"/>
+          </a:fillRef>
+          <a:effectRef idx="0">
+            <a:schemeClr val="accent1"/>
+          </a:effectRef>
+          <a:fontRef idx="minor">
+            <a:schemeClr val="lt1"/>
+          </a:fontRef>
+        </p:style>
+        <p:txBody>
+          <a:bodyPr rtlCol="0" anchor="ctr"/>
+          <a:lstStyle/>
+          <a:p>
+            <a:pPr algn="ctr"/>
+            <a:endParaRPr lang="en-KR" sz="1350" dirty="0"/>
+          </a:p>
+        </p:txBody>
+      </p:sp>
       <p:grpSp>
         <p:nvGrpSpPr>
-          <p:cNvPr id="149" name="Group 148">
+          <p:cNvPr id="77" name="Group 76">
             <a:extLst>
               <a:ext uri="{FF2B5EF4-FFF2-40B4-BE49-F238E27FC236}">
-                <a16:creationId xmlns:a16="http://schemas.microsoft.com/office/drawing/2014/main" id="{7194D2F4-C757-DEFE-7539-2A0806D9A18F}"/>
+                <a16:creationId xmlns:a16="http://schemas.microsoft.com/office/drawing/2014/main" id="{1F8ABE50-D03F-AECA-D9C3-35F227D56822}"/>
               </a:ext>
             </a:extLst>
           </p:cNvPr>
@@ -19171,18 +20399,18 @@
         </p:nvGrpSpPr>
         <p:grpSpPr>
           <a:xfrm>
-            <a:off x="2161136" y="2329765"/>
-            <a:ext cx="1755002" cy="3217520"/>
-            <a:chOff x="2161136" y="607497"/>
-            <a:chExt cx="1755002" cy="3217520"/>
+            <a:off x="2263846" y="1959237"/>
+            <a:ext cx="1539676" cy="270000"/>
+            <a:chOff x="408168" y="1846751"/>
+            <a:chExt cx="2052901" cy="360000"/>
           </a:xfrm>
         </p:grpSpPr>
         <p:sp>
           <p:nvSpPr>
-            <p:cNvPr id="73" name="Rectangle 72">
+            <p:cNvPr id="78" name="Rectangle 77">
               <a:extLst>
                 <a:ext uri="{FF2B5EF4-FFF2-40B4-BE49-F238E27FC236}">
-                  <a16:creationId xmlns:a16="http://schemas.microsoft.com/office/drawing/2014/main" id="{4441B44A-6AD7-186A-B883-D783CF1C900B}"/>
+                  <a16:creationId xmlns:a16="http://schemas.microsoft.com/office/drawing/2014/main" id="{1A8770FF-71FB-DA83-1BB6-AAB67DF7C32D}"/>
                 </a:ext>
               </a:extLst>
             </p:cNvPr>
@@ -19190,186 +20418,16 @@
             <p:nvPr/>
           </p:nvSpPr>
           <p:spPr>
-            <a:xfrm>
-              <a:off x="2161137" y="607499"/>
-              <a:ext cx="1754999" cy="3217518"/>
+            <a:xfrm flipH="1">
+              <a:off x="411469" y="1846751"/>
+              <a:ext cx="2049600" cy="360000"/>
             </a:xfrm>
             <a:prstGeom prst="rect">
               <a:avLst/>
             </a:prstGeom>
             <a:solidFill>
-              <a:schemeClr val="bg1">
-                <a:lumMod val="95000"/>
-              </a:schemeClr>
+              <a:schemeClr val="bg2"/>
             </a:solidFill>
-            <a:ln>
-              <a:noFill/>
-            </a:ln>
-          </p:spPr>
-          <p:style>
-            <a:lnRef idx="2">
-              <a:schemeClr val="accent1">
-                <a:shade val="15000"/>
-              </a:schemeClr>
-            </a:lnRef>
-            <a:fillRef idx="1">
-              <a:schemeClr val="accent1"/>
-            </a:fillRef>
-            <a:effectRef idx="0">
-              <a:schemeClr val="accent1"/>
-            </a:effectRef>
-            <a:fontRef idx="minor">
-              <a:schemeClr val="lt1"/>
-            </a:fontRef>
-          </p:style>
-          <p:txBody>
-            <a:bodyPr rtlCol="0" anchor="ctr"/>
-            <a:lstStyle/>
-            <a:p>
-              <a:pPr algn="ctr"/>
-              <a:endParaRPr lang="en-KR" sz="1350"/>
-            </a:p>
-          </p:txBody>
-        </p:sp>
-        <p:sp>
-          <p:nvSpPr>
-            <p:cNvPr id="74" name="Rectangle 73">
-              <a:extLst>
-                <a:ext uri="{FF2B5EF4-FFF2-40B4-BE49-F238E27FC236}">
-                  <a16:creationId xmlns:a16="http://schemas.microsoft.com/office/drawing/2014/main" id="{C2E22911-FA1B-ABD0-73D4-F1775B2A10D0}"/>
-                </a:ext>
-              </a:extLst>
-            </p:cNvPr>
-            <p:cNvSpPr/>
-            <p:nvPr/>
-          </p:nvSpPr>
-          <p:spPr>
-            <a:xfrm>
-              <a:off x="2161139" y="607498"/>
-              <a:ext cx="1754999" cy="710066"/>
-            </a:xfrm>
-            <a:prstGeom prst="rect">
-              <a:avLst/>
-            </a:prstGeom>
-            <a:gradFill>
-              <a:gsLst>
-                <a:gs pos="0">
-                  <a:schemeClr val="bg2"/>
-                </a:gs>
-                <a:gs pos="100000">
-                  <a:schemeClr val="bg1">
-                    <a:lumMod val="95000"/>
-                  </a:schemeClr>
-                </a:gs>
-              </a:gsLst>
-              <a:lin ang="5400000" scaled="1"/>
-            </a:gradFill>
-            <a:ln>
-              <a:noFill/>
-            </a:ln>
-          </p:spPr>
-          <p:style>
-            <a:lnRef idx="2">
-              <a:schemeClr val="accent1">
-                <a:shade val="15000"/>
-              </a:schemeClr>
-            </a:lnRef>
-            <a:fillRef idx="1">
-              <a:schemeClr val="accent1"/>
-            </a:fillRef>
-            <a:effectRef idx="0">
-              <a:schemeClr val="accent1"/>
-            </a:effectRef>
-            <a:fontRef idx="minor">
-              <a:schemeClr val="lt1"/>
-            </a:fontRef>
-          </p:style>
-          <p:txBody>
-            <a:bodyPr rtlCol="0" anchor="ctr"/>
-            <a:lstStyle/>
-            <a:p>
-              <a:pPr algn="ctr"/>
-              <a:endParaRPr lang="en-KR" sz="1350" dirty="0"/>
-            </a:p>
-          </p:txBody>
-        </p:sp>
-        <p:sp>
-          <p:nvSpPr>
-            <p:cNvPr id="75" name="TextBox 74">
-              <a:extLst>
-                <a:ext uri="{FF2B5EF4-FFF2-40B4-BE49-F238E27FC236}">
-                  <a16:creationId xmlns:a16="http://schemas.microsoft.com/office/drawing/2014/main" id="{E5048759-08F2-3B7F-4C3F-C18A2EC93B7D}"/>
-                </a:ext>
-              </a:extLst>
-            </p:cNvPr>
-            <p:cNvSpPr txBox="1"/>
-            <p:nvPr/>
-          </p:nvSpPr>
-          <p:spPr>
-            <a:xfrm>
-              <a:off x="2161136" y="607497"/>
-              <a:ext cx="1754997" cy="298719"/>
-            </a:xfrm>
-            <a:prstGeom prst="rect">
-              <a:avLst/>
-            </a:prstGeom>
-            <a:noFill/>
-          </p:spPr>
-          <p:txBody>
-            <a:bodyPr wrap="square" lIns="135000" tIns="135000" rIns="67500" bIns="35100" rtlCol="0">
-              <a:spAutoFit/>
-            </a:bodyPr>
-            <a:lstStyle/>
-            <a:p>
-              <a:r>
-                <a:rPr lang="en-US" sz="825" b="1" dirty="0" err="1">
-                  <a:solidFill>
-                    <a:schemeClr val="tx1">
-                      <a:lumMod val="85000"/>
-                      <a:lumOff val="15000"/>
-                    </a:schemeClr>
-                  </a:solidFill>
-                  <a:latin typeface="Cascadia Code" panose="020B0609020000020004" pitchFamily="34" charset="0"/>
-                  <a:ea typeface="Cascadia Code" panose="020B0609020000020004" pitchFamily="34" charset="0"/>
-                  <a:cs typeface="Cascadia Code" panose="020B0609020000020004" pitchFamily="34" charset="0"/>
-                </a:rPr>
-                <a:t>BusStopHistory</a:t>
-              </a:r>
-              <a:endParaRPr lang="en-KR" sz="825" b="1" dirty="0">
-                <a:solidFill>
-                  <a:schemeClr val="tx1">
-                    <a:lumMod val="85000"/>
-                    <a:lumOff val="15000"/>
-                  </a:schemeClr>
-                </a:solidFill>
-                <a:latin typeface="Cascadia Code" panose="020B0609020000020004" pitchFamily="34" charset="0"/>
-                <a:ea typeface="Cascadia Code" panose="020B0609020000020004" pitchFamily="34" charset="0"/>
-                <a:cs typeface="Cascadia Code" panose="020B0609020000020004" pitchFamily="34" charset="0"/>
-              </a:endParaRPr>
-            </a:p>
-          </p:txBody>
-        </p:sp>
-        <p:sp>
-          <p:nvSpPr>
-            <p:cNvPr id="76" name="Rectangle 75">
-              <a:extLst>
-                <a:ext uri="{FF2B5EF4-FFF2-40B4-BE49-F238E27FC236}">
-                  <a16:creationId xmlns:a16="http://schemas.microsoft.com/office/drawing/2014/main" id="{926DD798-0FD2-E1FE-633A-938FD9BEB3E1}"/>
-                </a:ext>
-              </a:extLst>
-            </p:cNvPr>
-            <p:cNvSpPr/>
-            <p:nvPr/>
-          </p:nvSpPr>
-          <p:spPr>
-            <a:xfrm>
-              <a:off x="2161136" y="607498"/>
-              <a:ext cx="1755000" cy="3217519"/>
-            </a:xfrm>
-            <a:prstGeom prst="rect">
-              <a:avLst/>
-            </a:prstGeom>
-            <a:noFill/>
             <a:ln w="12700">
               <a:solidFill>
                 <a:schemeClr val="bg2">
@@ -19399,134 +20457,46 @@
             <a:lstStyle/>
             <a:p>
               <a:pPr algn="ctr"/>
-              <a:endParaRPr lang="en-KR" sz="1350" dirty="0"/>
+              <a:endParaRPr lang="en-KR" sz="1350" dirty="0">
+                <a:solidFill>
+                  <a:schemeClr val="bg1">
+                    <a:lumMod val="65000"/>
+                  </a:schemeClr>
+                </a:solidFill>
+              </a:endParaRPr>
             </a:p>
           </p:txBody>
         </p:sp>
-        <p:grpSp>
-          <p:nvGrpSpPr>
-            <p:cNvPr id="77" name="Group 76">
+        <p:sp>
+          <p:nvSpPr>
+            <p:cNvPr id="79" name="TextBox 78">
               <a:extLst>
                 <a:ext uri="{FF2B5EF4-FFF2-40B4-BE49-F238E27FC236}">
-                  <a16:creationId xmlns:a16="http://schemas.microsoft.com/office/drawing/2014/main" id="{1F8ABE50-D03F-AECA-D9C3-35F227D56822}"/>
+                  <a16:creationId xmlns:a16="http://schemas.microsoft.com/office/drawing/2014/main" id="{529393C3-BFA0-4300-B6A9-C154C1C12111}"/>
                 </a:ext>
               </a:extLst>
             </p:cNvPr>
-            <p:cNvGrpSpPr/>
+            <p:cNvSpPr txBox="1"/>
             <p:nvPr/>
-          </p:nvGrpSpPr>
-          <p:grpSpPr>
+          </p:nvSpPr>
+          <p:spPr>
             <a:xfrm>
-              <a:off x="2263846" y="989284"/>
-              <a:ext cx="1539676" cy="270000"/>
-              <a:chOff x="408168" y="1846751"/>
-              <a:chExt cx="2052901" cy="360000"/>
+              <a:off x="408168" y="1849564"/>
+              <a:ext cx="1186486" cy="307413"/>
             </a:xfrm>
-          </p:grpSpPr>
-          <p:sp>
-            <p:nvSpPr>
-              <p:cNvPr id="78" name="Rectangle 77">
-                <a:extLst>
-                  <a:ext uri="{FF2B5EF4-FFF2-40B4-BE49-F238E27FC236}">
-                    <a16:creationId xmlns:a16="http://schemas.microsoft.com/office/drawing/2014/main" id="{1A8770FF-71FB-DA83-1BB6-AAB67DF7C32D}"/>
-                  </a:ext>
-                </a:extLst>
-              </p:cNvPr>
-              <p:cNvSpPr/>
-              <p:nvPr/>
-            </p:nvSpPr>
-            <p:spPr>
-              <a:xfrm flipH="1">
-                <a:off x="411469" y="1846751"/>
-                <a:ext cx="2049600" cy="360000"/>
-              </a:xfrm>
-              <a:prstGeom prst="rect">
-                <a:avLst/>
-              </a:prstGeom>
-              <a:solidFill>
-                <a:schemeClr val="bg2"/>
-              </a:solidFill>
-              <a:ln w="12700">
-                <a:solidFill>
-                  <a:schemeClr val="bg2">
-                    <a:lumMod val="90000"/>
-                  </a:schemeClr>
-                </a:solidFill>
-              </a:ln>
-            </p:spPr>
-            <p:style>
-              <a:lnRef idx="2">
-                <a:schemeClr val="accent1">
-                  <a:shade val="15000"/>
-                </a:schemeClr>
-              </a:lnRef>
-              <a:fillRef idx="1">
-                <a:schemeClr val="accent1"/>
-              </a:fillRef>
-              <a:effectRef idx="0">
-                <a:schemeClr val="accent1"/>
-              </a:effectRef>
-              <a:fontRef idx="minor">
-                <a:schemeClr val="lt1"/>
-              </a:fontRef>
-            </p:style>
-            <p:txBody>
-              <a:bodyPr rtlCol="0" anchor="ctr"/>
-              <a:lstStyle/>
-              <a:p>
-                <a:pPr algn="ctr"/>
-                <a:endParaRPr lang="en-KR" sz="1350" dirty="0">
-                  <a:solidFill>
-                    <a:schemeClr val="bg1">
-                      <a:lumMod val="65000"/>
-                    </a:schemeClr>
-                  </a:solidFill>
-                </a:endParaRPr>
-              </a:p>
-            </p:txBody>
-          </p:sp>
-          <p:sp>
-            <p:nvSpPr>
-              <p:cNvPr id="79" name="TextBox 78">
-                <a:extLst>
-                  <a:ext uri="{FF2B5EF4-FFF2-40B4-BE49-F238E27FC236}">
-                    <a16:creationId xmlns:a16="http://schemas.microsoft.com/office/drawing/2014/main" id="{529393C3-BFA0-4300-B6A9-C154C1C12111}"/>
-                  </a:ext>
-                </a:extLst>
-              </p:cNvPr>
-              <p:cNvSpPr txBox="1"/>
-              <p:nvPr/>
-            </p:nvSpPr>
-            <p:spPr>
-              <a:xfrm>
-                <a:off x="408168" y="1849564"/>
-                <a:ext cx="1186486" cy="307413"/>
-              </a:xfrm>
-              <a:prstGeom prst="rect">
-                <a:avLst/>
-              </a:prstGeom>
-              <a:noFill/>
-            </p:spPr>
-            <p:txBody>
-              <a:bodyPr wrap="square" lIns="67500" tIns="67500" rIns="67500" bIns="35100" rtlCol="0">
-                <a:spAutoFit/>
-              </a:bodyPr>
-              <a:lstStyle/>
-              <a:p>
-                <a:r>
-                  <a:rPr lang="en-US" sz="825" b="1" dirty="0" err="1">
-                    <a:solidFill>
-                      <a:schemeClr val="bg1">
-                        <a:lumMod val="65000"/>
-                      </a:schemeClr>
-                    </a:solidFill>
-                    <a:latin typeface="Cascadia Code" panose="020B0609020000020004" pitchFamily="34" charset="0"/>
-                    <a:ea typeface="Cascadia Code" panose="020B0609020000020004" pitchFamily="34" charset="0"/>
-                    <a:cs typeface="Cascadia Code" panose="020B0609020000020004" pitchFamily="34" charset="0"/>
-                  </a:rPr>
-                  <a:t>busstop_id</a:t>
-                </a:r>
-                <a:endParaRPr lang="en-US" sz="825" b="1" dirty="0">
+            <a:prstGeom prst="rect">
+              <a:avLst/>
+            </a:prstGeom>
+            <a:noFill/>
+          </p:spPr>
+          <p:txBody>
+            <a:bodyPr wrap="square" lIns="67500" tIns="67500" rIns="67500" bIns="35100" rtlCol="0">
+              <a:spAutoFit/>
+            </a:bodyPr>
+            <a:lstStyle/>
+            <a:p>
+              <a:r>
+                <a:rPr lang="en-US" sz="825" b="1" dirty="0" err="1">
                   <a:solidFill>
                     <a:schemeClr val="bg1">
                       <a:lumMod val="65000"/>
@@ -19535,516 +20505,135 @@
                   <a:latin typeface="Cascadia Code" panose="020B0609020000020004" pitchFamily="34" charset="0"/>
                   <a:ea typeface="Cascadia Code" panose="020B0609020000020004" pitchFamily="34" charset="0"/>
                   <a:cs typeface="Cascadia Code" panose="020B0609020000020004" pitchFamily="34" charset="0"/>
-                </a:endParaRPr>
-              </a:p>
-            </p:txBody>
-          </p:sp>
-        </p:grpSp>
-        <p:grpSp>
-          <p:nvGrpSpPr>
-            <p:cNvPr id="80" name="Group 79">
+                </a:rPr>
+                <a:t>busstop_id</a:t>
+              </a:r>
+              <a:endParaRPr lang="en-US" sz="825" b="1" dirty="0">
+                <a:solidFill>
+                  <a:schemeClr val="bg1">
+                    <a:lumMod val="65000"/>
+                  </a:schemeClr>
+                </a:solidFill>
+                <a:latin typeface="Cascadia Code" panose="020B0609020000020004" pitchFamily="34" charset="0"/>
+                <a:ea typeface="Cascadia Code" panose="020B0609020000020004" pitchFamily="34" charset="0"/>
+                <a:cs typeface="Cascadia Code" panose="020B0609020000020004" pitchFamily="34" charset="0"/>
+              </a:endParaRPr>
+            </a:p>
+          </p:txBody>
+        </p:sp>
+      </p:grpSp>
+      <p:grpSp>
+        <p:nvGrpSpPr>
+          <p:cNvPr id="80" name="Group 79">
+            <a:extLst>
+              <a:ext uri="{FF2B5EF4-FFF2-40B4-BE49-F238E27FC236}">
+                <a16:creationId xmlns:a16="http://schemas.microsoft.com/office/drawing/2014/main" id="{45D50264-4952-1BB6-7EB3-A1BA2B7C7AFE}"/>
+              </a:ext>
+            </a:extLst>
+          </p:cNvPr>
+          <p:cNvGrpSpPr/>
+          <p:nvPr/>
+        </p:nvGrpSpPr>
+        <p:grpSpPr>
+          <a:xfrm>
+            <a:off x="2265424" y="2279204"/>
+            <a:ext cx="1539676" cy="270000"/>
+            <a:chOff x="408168" y="1846751"/>
+            <a:chExt cx="2052901" cy="360000"/>
+          </a:xfrm>
+        </p:grpSpPr>
+        <p:sp>
+          <p:nvSpPr>
+            <p:cNvPr id="81" name="Rectangle 80">
               <a:extLst>
                 <a:ext uri="{FF2B5EF4-FFF2-40B4-BE49-F238E27FC236}">
-                  <a16:creationId xmlns:a16="http://schemas.microsoft.com/office/drawing/2014/main" id="{45D50264-4952-1BB6-7EB3-A1BA2B7C7AFE}"/>
+                  <a16:creationId xmlns:a16="http://schemas.microsoft.com/office/drawing/2014/main" id="{B0AA2001-39DD-55A6-37B0-8FC68A829623}"/>
                 </a:ext>
               </a:extLst>
             </p:cNvPr>
-            <p:cNvGrpSpPr/>
+            <p:cNvSpPr/>
             <p:nvPr/>
-          </p:nvGrpSpPr>
-          <p:grpSpPr>
-            <a:xfrm>
-              <a:off x="2265424" y="1309251"/>
-              <a:ext cx="1539676" cy="270000"/>
-              <a:chOff x="408168" y="1846751"/>
-              <a:chExt cx="2052901" cy="360000"/>
+          </p:nvSpPr>
+          <p:spPr>
+            <a:xfrm flipH="1">
+              <a:off x="411469" y="1846751"/>
+              <a:ext cx="2049600" cy="360000"/>
             </a:xfrm>
-          </p:grpSpPr>
-          <p:sp>
-            <p:nvSpPr>
-              <p:cNvPr id="81" name="Rectangle 80">
-                <a:extLst>
-                  <a:ext uri="{FF2B5EF4-FFF2-40B4-BE49-F238E27FC236}">
-                    <a16:creationId xmlns:a16="http://schemas.microsoft.com/office/drawing/2014/main" id="{B0AA2001-39DD-55A6-37B0-8FC68A829623}"/>
-                  </a:ext>
-                </a:extLst>
-              </p:cNvPr>
-              <p:cNvSpPr/>
-              <p:nvPr/>
-            </p:nvSpPr>
-            <p:spPr>
-              <a:xfrm flipH="1">
-                <a:off x="411469" y="1846751"/>
-                <a:ext cx="2049600" cy="360000"/>
-              </a:xfrm>
-              <a:prstGeom prst="rect">
-                <a:avLst/>
-              </a:prstGeom>
+            <a:prstGeom prst="rect">
+              <a:avLst/>
+            </a:prstGeom>
+            <a:solidFill>
+              <a:schemeClr val="bg2"/>
+            </a:solidFill>
+            <a:ln w="12700">
               <a:solidFill>
-                <a:schemeClr val="bg2"/>
+                <a:schemeClr val="bg2">
+                  <a:lumMod val="90000"/>
+                </a:schemeClr>
               </a:solidFill>
-              <a:ln w="12700">
-                <a:solidFill>
-                  <a:schemeClr val="bg2">
-                    <a:lumMod val="90000"/>
-                  </a:schemeClr>
-                </a:solidFill>
-              </a:ln>
-            </p:spPr>
-            <p:style>
-              <a:lnRef idx="2">
-                <a:schemeClr val="accent1">
-                  <a:shade val="15000"/>
-                </a:schemeClr>
-              </a:lnRef>
-              <a:fillRef idx="1">
-                <a:schemeClr val="accent1"/>
-              </a:fillRef>
-              <a:effectRef idx="0">
-                <a:schemeClr val="accent1"/>
-              </a:effectRef>
-              <a:fontRef idx="minor">
-                <a:schemeClr val="lt1"/>
-              </a:fontRef>
-            </p:style>
-            <p:txBody>
-              <a:bodyPr rtlCol="0" anchor="ctr"/>
-              <a:lstStyle/>
-              <a:p>
-                <a:pPr algn="ctr"/>
-                <a:endParaRPr lang="en-KR" sz="1350" dirty="0">
-                  <a:solidFill>
-                    <a:schemeClr val="bg1">
-                      <a:lumMod val="65000"/>
-                    </a:schemeClr>
-                  </a:solidFill>
-                </a:endParaRPr>
-              </a:p>
-            </p:txBody>
-          </p:sp>
-          <p:sp>
-            <p:nvSpPr>
-              <p:cNvPr id="82" name="TextBox 81">
-                <a:extLst>
-                  <a:ext uri="{FF2B5EF4-FFF2-40B4-BE49-F238E27FC236}">
-                    <a16:creationId xmlns:a16="http://schemas.microsoft.com/office/drawing/2014/main" id="{7C9CB7C8-2D01-3226-EE04-D6B59C2CB27A}"/>
-                  </a:ext>
-                </a:extLst>
-              </p:cNvPr>
-              <p:cNvSpPr txBox="1"/>
-              <p:nvPr/>
-            </p:nvSpPr>
-            <p:spPr>
-              <a:xfrm>
-                <a:off x="408168" y="1849564"/>
-                <a:ext cx="1186486" cy="307413"/>
-              </a:xfrm>
-              <a:prstGeom prst="rect">
-                <a:avLst/>
-              </a:prstGeom>
-              <a:noFill/>
-            </p:spPr>
-            <p:txBody>
-              <a:bodyPr wrap="square" lIns="67500" tIns="67500" rIns="67500" bIns="35100" rtlCol="0">
-                <a:spAutoFit/>
-              </a:bodyPr>
-              <a:lstStyle/>
-              <a:p>
-                <a:r>
-                  <a:rPr lang="en-US" sz="825" b="1" dirty="0">
-                    <a:solidFill>
-                      <a:schemeClr val="bg1">
-                        <a:lumMod val="65000"/>
-                      </a:schemeClr>
-                    </a:solidFill>
-                    <a:latin typeface="Cascadia Code" panose="020B0609020000020004" pitchFamily="34" charset="0"/>
-                    <a:ea typeface="Cascadia Code" panose="020B0609020000020004" pitchFamily="34" charset="0"/>
-                    <a:cs typeface="Cascadia Code" panose="020B0609020000020004" pitchFamily="34" charset="0"/>
-                  </a:rPr>
-                  <a:t>name</a:t>
-                </a:r>
-              </a:p>
-            </p:txBody>
-          </p:sp>
-        </p:grpSp>
-        <p:grpSp>
-          <p:nvGrpSpPr>
-            <p:cNvPr id="83" name="Group 82">
+            </a:ln>
+          </p:spPr>
+          <p:style>
+            <a:lnRef idx="2">
+              <a:schemeClr val="accent1">
+                <a:shade val="15000"/>
+              </a:schemeClr>
+            </a:lnRef>
+            <a:fillRef idx="1">
+              <a:schemeClr val="accent1"/>
+            </a:fillRef>
+            <a:effectRef idx="0">
+              <a:schemeClr val="accent1"/>
+            </a:effectRef>
+            <a:fontRef idx="minor">
+              <a:schemeClr val="lt1"/>
+            </a:fontRef>
+          </p:style>
+          <p:txBody>
+            <a:bodyPr rtlCol="0" anchor="ctr"/>
+            <a:lstStyle/>
+            <a:p>
+              <a:pPr algn="ctr"/>
+              <a:endParaRPr lang="en-KR" sz="1350" dirty="0">
+                <a:solidFill>
+                  <a:schemeClr val="bg1">
+                    <a:lumMod val="65000"/>
+                  </a:schemeClr>
+                </a:solidFill>
+              </a:endParaRPr>
+            </a:p>
+          </p:txBody>
+        </p:sp>
+        <p:sp>
+          <p:nvSpPr>
+            <p:cNvPr id="82" name="TextBox 81">
               <a:extLst>
                 <a:ext uri="{FF2B5EF4-FFF2-40B4-BE49-F238E27FC236}">
-                  <a16:creationId xmlns:a16="http://schemas.microsoft.com/office/drawing/2014/main" id="{2B05B968-AC9D-E25F-0C69-ED0D90209E7F}"/>
+                  <a16:creationId xmlns:a16="http://schemas.microsoft.com/office/drawing/2014/main" id="{7C9CB7C8-2D01-3226-EE04-D6B59C2CB27A}"/>
                 </a:ext>
               </a:extLst>
             </p:cNvPr>
-            <p:cNvGrpSpPr/>
+            <p:cNvSpPr txBox="1"/>
             <p:nvPr/>
-          </p:nvGrpSpPr>
-          <p:grpSpPr>
+          </p:nvSpPr>
+          <p:spPr>
             <a:xfrm>
-              <a:off x="2264186" y="1629218"/>
-              <a:ext cx="1539676" cy="270000"/>
-              <a:chOff x="408168" y="1846751"/>
-              <a:chExt cx="2052901" cy="360000"/>
+              <a:off x="408168" y="1849564"/>
+              <a:ext cx="1186486" cy="307413"/>
             </a:xfrm>
-          </p:grpSpPr>
-          <p:sp>
-            <p:nvSpPr>
-              <p:cNvPr id="84" name="Rectangle 83">
-                <a:extLst>
-                  <a:ext uri="{FF2B5EF4-FFF2-40B4-BE49-F238E27FC236}">
-                    <a16:creationId xmlns:a16="http://schemas.microsoft.com/office/drawing/2014/main" id="{4D4C7A09-61BD-4ED9-3C4D-89626BFF9F0C}"/>
-                  </a:ext>
-                </a:extLst>
-              </p:cNvPr>
-              <p:cNvSpPr/>
-              <p:nvPr/>
-            </p:nvSpPr>
-            <p:spPr>
-              <a:xfrm flipH="1">
-                <a:off x="411469" y="1846751"/>
-                <a:ext cx="2049600" cy="360000"/>
-              </a:xfrm>
-              <a:prstGeom prst="rect">
-                <a:avLst/>
-              </a:prstGeom>
-              <a:solidFill>
-                <a:schemeClr val="bg2"/>
-              </a:solidFill>
-              <a:ln w="12700">
-                <a:solidFill>
-                  <a:schemeClr val="bg2">
-                    <a:lumMod val="90000"/>
-                  </a:schemeClr>
-                </a:solidFill>
-              </a:ln>
-            </p:spPr>
-            <p:style>
-              <a:lnRef idx="2">
-                <a:schemeClr val="accent1">
-                  <a:shade val="15000"/>
-                </a:schemeClr>
-              </a:lnRef>
-              <a:fillRef idx="1">
-                <a:schemeClr val="accent1"/>
-              </a:fillRef>
-              <a:effectRef idx="0">
-                <a:schemeClr val="accent1"/>
-              </a:effectRef>
-              <a:fontRef idx="minor">
-                <a:schemeClr val="lt1"/>
-              </a:fontRef>
-            </p:style>
-            <p:txBody>
-              <a:bodyPr rtlCol="0" anchor="ctr"/>
-              <a:lstStyle/>
-              <a:p>
-                <a:pPr algn="ctr"/>
-                <a:endParaRPr lang="en-KR" sz="1350" dirty="0">
-                  <a:solidFill>
-                    <a:schemeClr val="bg1">
-                      <a:lumMod val="65000"/>
-                    </a:schemeClr>
-                  </a:solidFill>
-                </a:endParaRPr>
-              </a:p>
-            </p:txBody>
-          </p:sp>
-          <p:sp>
-            <p:nvSpPr>
-              <p:cNvPr id="85" name="TextBox 84">
-                <a:extLst>
-                  <a:ext uri="{FF2B5EF4-FFF2-40B4-BE49-F238E27FC236}">
-                    <a16:creationId xmlns:a16="http://schemas.microsoft.com/office/drawing/2014/main" id="{CA9978DC-3750-3971-B6EF-E7371E2855FE}"/>
-                  </a:ext>
-                </a:extLst>
-              </p:cNvPr>
-              <p:cNvSpPr txBox="1"/>
-              <p:nvPr/>
-            </p:nvSpPr>
-            <p:spPr>
-              <a:xfrm>
-                <a:off x="408168" y="1849564"/>
-                <a:ext cx="1186486" cy="307413"/>
-              </a:xfrm>
-              <a:prstGeom prst="rect">
-                <a:avLst/>
-              </a:prstGeom>
-              <a:noFill/>
-            </p:spPr>
-            <p:txBody>
-              <a:bodyPr wrap="square" lIns="67500" tIns="67500" rIns="67500" bIns="35100" rtlCol="0">
-                <a:spAutoFit/>
-              </a:bodyPr>
-              <a:lstStyle/>
-              <a:p>
-                <a:r>
-                  <a:rPr lang="en-US" sz="825" b="1" dirty="0">
-                    <a:solidFill>
-                      <a:schemeClr val="bg1">
-                        <a:lumMod val="65000"/>
-                      </a:schemeClr>
-                    </a:solidFill>
-                    <a:latin typeface="Cascadia Code" panose="020B0609020000020004" pitchFamily="34" charset="0"/>
-                    <a:ea typeface="Cascadia Code" panose="020B0609020000020004" pitchFamily="34" charset="0"/>
-                    <a:cs typeface="Cascadia Code" panose="020B0609020000020004" pitchFamily="34" charset="0"/>
-                  </a:rPr>
-                  <a:t>longitude</a:t>
-                </a:r>
-              </a:p>
-            </p:txBody>
-          </p:sp>
-        </p:grpSp>
-        <p:grpSp>
-          <p:nvGrpSpPr>
-            <p:cNvPr id="108" name="Group 107">
-              <a:extLst>
-                <a:ext uri="{FF2B5EF4-FFF2-40B4-BE49-F238E27FC236}">
-                  <a16:creationId xmlns:a16="http://schemas.microsoft.com/office/drawing/2014/main" id="{90258E8B-15D2-2DC9-A36F-FB3371001409}"/>
-                </a:ext>
-              </a:extLst>
-            </p:cNvPr>
-            <p:cNvGrpSpPr/>
-            <p:nvPr/>
-          </p:nvGrpSpPr>
-          <p:grpSpPr>
-            <a:xfrm>
-              <a:off x="2263508" y="1949185"/>
-              <a:ext cx="1539676" cy="270000"/>
-              <a:chOff x="408168" y="1846751"/>
-              <a:chExt cx="2052901" cy="360000"/>
-            </a:xfrm>
-          </p:grpSpPr>
-          <p:sp>
-            <p:nvSpPr>
-              <p:cNvPr id="109" name="Rectangle 108">
-                <a:extLst>
-                  <a:ext uri="{FF2B5EF4-FFF2-40B4-BE49-F238E27FC236}">
-                    <a16:creationId xmlns:a16="http://schemas.microsoft.com/office/drawing/2014/main" id="{EFE84383-2FE5-B950-34F6-B89175B02AC9}"/>
-                  </a:ext>
-                </a:extLst>
-              </p:cNvPr>
-              <p:cNvSpPr/>
-              <p:nvPr/>
-            </p:nvSpPr>
-            <p:spPr>
-              <a:xfrm flipH="1">
-                <a:off x="411469" y="1846751"/>
-                <a:ext cx="2049600" cy="360000"/>
-              </a:xfrm>
-              <a:prstGeom prst="rect">
-                <a:avLst/>
-              </a:prstGeom>
-              <a:solidFill>
-                <a:schemeClr val="bg2"/>
-              </a:solidFill>
-              <a:ln w="12700">
-                <a:solidFill>
-                  <a:schemeClr val="bg2">
-                    <a:lumMod val="90000"/>
-                  </a:schemeClr>
-                </a:solidFill>
-              </a:ln>
-            </p:spPr>
-            <p:style>
-              <a:lnRef idx="2">
-                <a:schemeClr val="accent1">
-                  <a:shade val="15000"/>
-                </a:schemeClr>
-              </a:lnRef>
-              <a:fillRef idx="1">
-                <a:schemeClr val="accent1"/>
-              </a:fillRef>
-              <a:effectRef idx="0">
-                <a:schemeClr val="accent1"/>
-              </a:effectRef>
-              <a:fontRef idx="minor">
-                <a:schemeClr val="lt1"/>
-              </a:fontRef>
-            </p:style>
-            <p:txBody>
-              <a:bodyPr rtlCol="0" anchor="ctr"/>
-              <a:lstStyle/>
-              <a:p>
-                <a:pPr algn="ctr"/>
-                <a:endParaRPr lang="en-KR" sz="1350" dirty="0">
-                  <a:solidFill>
-                    <a:schemeClr val="bg1">
-                      <a:lumMod val="65000"/>
-                    </a:schemeClr>
-                  </a:solidFill>
-                </a:endParaRPr>
-              </a:p>
-            </p:txBody>
-          </p:sp>
-          <p:sp>
-            <p:nvSpPr>
-              <p:cNvPr id="110" name="TextBox 109">
-                <a:extLst>
-                  <a:ext uri="{FF2B5EF4-FFF2-40B4-BE49-F238E27FC236}">
-                    <a16:creationId xmlns:a16="http://schemas.microsoft.com/office/drawing/2014/main" id="{73D7B783-DAA6-A335-984B-3BFF9D61654F}"/>
-                  </a:ext>
-                </a:extLst>
-              </p:cNvPr>
-              <p:cNvSpPr txBox="1"/>
-              <p:nvPr/>
-            </p:nvSpPr>
-            <p:spPr>
-              <a:xfrm>
-                <a:off x="408168" y="1849564"/>
-                <a:ext cx="1186486" cy="307413"/>
-              </a:xfrm>
-              <a:prstGeom prst="rect">
-                <a:avLst/>
-              </a:prstGeom>
-              <a:noFill/>
-            </p:spPr>
-            <p:txBody>
-              <a:bodyPr wrap="square" lIns="67500" tIns="67500" rIns="67500" bIns="35100" rtlCol="0">
-                <a:spAutoFit/>
-              </a:bodyPr>
-              <a:lstStyle/>
-              <a:p>
-                <a:r>
-                  <a:rPr lang="en-US" sz="825" b="1" dirty="0">
-                    <a:solidFill>
-                      <a:schemeClr val="bg1">
-                        <a:lumMod val="65000"/>
-                      </a:schemeClr>
-                    </a:solidFill>
-                    <a:latin typeface="Cascadia Code" panose="020B0609020000020004" pitchFamily="34" charset="0"/>
-                    <a:ea typeface="Cascadia Code" panose="020B0609020000020004" pitchFamily="34" charset="0"/>
-                    <a:cs typeface="Cascadia Code" panose="020B0609020000020004" pitchFamily="34" charset="0"/>
-                  </a:rPr>
-                  <a:t>latitude</a:t>
-                </a:r>
-              </a:p>
-            </p:txBody>
-          </p:sp>
-        </p:grpSp>
-        <p:grpSp>
-          <p:nvGrpSpPr>
-            <p:cNvPr id="112" name="Group 111">
-              <a:extLst>
-                <a:ext uri="{FF2B5EF4-FFF2-40B4-BE49-F238E27FC236}">
-                  <a16:creationId xmlns:a16="http://schemas.microsoft.com/office/drawing/2014/main" id="{F7E69A82-CFCB-18E5-01A7-62DD9D98F30D}"/>
-                </a:ext>
-              </a:extLst>
-            </p:cNvPr>
-            <p:cNvGrpSpPr/>
-            <p:nvPr/>
-          </p:nvGrpSpPr>
-          <p:grpSpPr>
-            <a:xfrm>
-              <a:off x="2261709" y="2269152"/>
-              <a:ext cx="1539676" cy="270000"/>
-              <a:chOff x="408168" y="1846751"/>
-              <a:chExt cx="2052901" cy="360000"/>
-            </a:xfrm>
-          </p:grpSpPr>
-          <p:sp>
-            <p:nvSpPr>
-              <p:cNvPr id="113" name="Rectangle 112">
-                <a:extLst>
-                  <a:ext uri="{FF2B5EF4-FFF2-40B4-BE49-F238E27FC236}">
-                    <a16:creationId xmlns:a16="http://schemas.microsoft.com/office/drawing/2014/main" id="{0B23736A-AC7E-25AE-3418-8E7A313083DC}"/>
-                  </a:ext>
-                </a:extLst>
-              </p:cNvPr>
-              <p:cNvSpPr/>
-              <p:nvPr/>
-            </p:nvSpPr>
-            <p:spPr>
-              <a:xfrm flipH="1">
-                <a:off x="411469" y="1846751"/>
-                <a:ext cx="2049600" cy="360000"/>
-              </a:xfrm>
-              <a:prstGeom prst="rect">
-                <a:avLst/>
-              </a:prstGeom>
-              <a:solidFill>
-                <a:schemeClr val="bg2"/>
-              </a:solidFill>
-              <a:ln w="12700">
-                <a:solidFill>
-                  <a:schemeClr val="bg2">
-                    <a:lumMod val="90000"/>
-                  </a:schemeClr>
-                </a:solidFill>
-              </a:ln>
-            </p:spPr>
-            <p:style>
-              <a:lnRef idx="2">
-                <a:schemeClr val="accent1">
-                  <a:shade val="15000"/>
-                </a:schemeClr>
-              </a:lnRef>
-              <a:fillRef idx="1">
-                <a:schemeClr val="accent1"/>
-              </a:fillRef>
-              <a:effectRef idx="0">
-                <a:schemeClr val="accent1"/>
-              </a:effectRef>
-              <a:fontRef idx="minor">
-                <a:schemeClr val="lt1"/>
-              </a:fontRef>
-            </p:style>
-            <p:txBody>
-              <a:bodyPr rtlCol="0" anchor="ctr"/>
-              <a:lstStyle/>
-              <a:p>
-                <a:pPr algn="ctr"/>
-                <a:endParaRPr lang="en-KR" sz="1350" dirty="0">
-                  <a:solidFill>
-                    <a:schemeClr val="bg1">
-                      <a:lumMod val="65000"/>
-                    </a:schemeClr>
-                  </a:solidFill>
-                </a:endParaRPr>
-              </a:p>
-            </p:txBody>
-          </p:sp>
-          <p:sp>
-            <p:nvSpPr>
-              <p:cNvPr id="114" name="TextBox 113">
-                <a:extLst>
-                  <a:ext uri="{FF2B5EF4-FFF2-40B4-BE49-F238E27FC236}">
-                    <a16:creationId xmlns:a16="http://schemas.microsoft.com/office/drawing/2014/main" id="{68623F40-38C4-3ABD-AD0C-C406D0CCFE3B}"/>
-                  </a:ext>
-                </a:extLst>
-              </p:cNvPr>
-              <p:cNvSpPr txBox="1"/>
-              <p:nvPr/>
-            </p:nvSpPr>
-            <p:spPr>
-              <a:xfrm>
-                <a:off x="408168" y="1849564"/>
-                <a:ext cx="1186486" cy="307413"/>
-              </a:xfrm>
-              <a:prstGeom prst="rect">
-                <a:avLst/>
-              </a:prstGeom>
-              <a:noFill/>
-            </p:spPr>
-            <p:txBody>
-              <a:bodyPr wrap="square" lIns="67500" tIns="67500" rIns="67500" bIns="35100" rtlCol="0">
-                <a:spAutoFit/>
-              </a:bodyPr>
-              <a:lstStyle/>
-              <a:p>
-                <a:r>
-                  <a:rPr lang="en-US" sz="825" b="1" dirty="0" err="1">
-                    <a:solidFill>
-                      <a:schemeClr val="bg1">
-                        <a:lumMod val="65000"/>
-                      </a:schemeClr>
-                    </a:solidFill>
-                    <a:latin typeface="Cascadia Code" panose="020B0609020000020004" pitchFamily="34" charset="0"/>
-                    <a:ea typeface="Cascadia Code" panose="020B0609020000020004" pitchFamily="34" charset="0"/>
-                    <a:cs typeface="Cascadia Code" panose="020B0609020000020004" pitchFamily="34" charset="0"/>
-                  </a:rPr>
-                  <a:t>district_id</a:t>
-                </a:r>
-                <a:endParaRPr lang="en-US" sz="825" b="1" dirty="0">
+            <a:prstGeom prst="rect">
+              <a:avLst/>
+            </a:prstGeom>
+            <a:noFill/>
+          </p:spPr>
+          <p:txBody>
+            <a:bodyPr wrap="square" lIns="67500" tIns="67500" rIns="67500" bIns="35100" rtlCol="0">
+              <a:spAutoFit/>
+            </a:bodyPr>
+            <a:lstStyle/>
+            <a:p>
+              <a:r>
+                <a:rPr lang="en-US" sz="825" b="1" dirty="0">
                   <a:solidFill>
                     <a:schemeClr val="bg1">
                       <a:lumMod val="65000"/>
@@ -20053,135 +20642,125 @@
                   <a:latin typeface="Cascadia Code" panose="020B0609020000020004" pitchFamily="34" charset="0"/>
                   <a:ea typeface="Cascadia Code" panose="020B0609020000020004" pitchFamily="34" charset="0"/>
                   <a:cs typeface="Cascadia Code" panose="020B0609020000020004" pitchFamily="34" charset="0"/>
-                </a:endParaRPr>
-              </a:p>
-            </p:txBody>
-          </p:sp>
-        </p:grpSp>
-        <p:grpSp>
-          <p:nvGrpSpPr>
-            <p:cNvPr id="115" name="Group 114">
+                </a:rPr>
+                <a:t>name</a:t>
+              </a:r>
+            </a:p>
+          </p:txBody>
+        </p:sp>
+      </p:grpSp>
+      <p:grpSp>
+        <p:nvGrpSpPr>
+          <p:cNvPr id="83" name="Group 82">
+            <a:extLst>
+              <a:ext uri="{FF2B5EF4-FFF2-40B4-BE49-F238E27FC236}">
+                <a16:creationId xmlns:a16="http://schemas.microsoft.com/office/drawing/2014/main" id="{2B05B968-AC9D-E25F-0C69-ED0D90209E7F}"/>
+              </a:ext>
+            </a:extLst>
+          </p:cNvPr>
+          <p:cNvGrpSpPr/>
+          <p:nvPr/>
+        </p:nvGrpSpPr>
+        <p:grpSpPr>
+          <a:xfrm>
+            <a:off x="2264186" y="2599171"/>
+            <a:ext cx="1539676" cy="270000"/>
+            <a:chOff x="408168" y="1846751"/>
+            <a:chExt cx="2052901" cy="360000"/>
+          </a:xfrm>
+        </p:grpSpPr>
+        <p:sp>
+          <p:nvSpPr>
+            <p:cNvPr id="84" name="Rectangle 83">
               <a:extLst>
                 <a:ext uri="{FF2B5EF4-FFF2-40B4-BE49-F238E27FC236}">
-                  <a16:creationId xmlns:a16="http://schemas.microsoft.com/office/drawing/2014/main" id="{1C47365D-D8A9-FD0E-0BDF-E3C89E9B1265}"/>
+                  <a16:creationId xmlns:a16="http://schemas.microsoft.com/office/drawing/2014/main" id="{4D4C7A09-61BD-4ED9-3C4D-89626BFF9F0C}"/>
                 </a:ext>
               </a:extLst>
             </p:cNvPr>
-            <p:cNvGrpSpPr/>
+            <p:cNvSpPr/>
             <p:nvPr/>
-          </p:nvGrpSpPr>
-          <p:grpSpPr>
+          </p:nvSpPr>
+          <p:spPr>
+            <a:xfrm flipH="1">
+              <a:off x="411469" y="1846751"/>
+              <a:ext cx="2049600" cy="360000"/>
+            </a:xfrm>
+            <a:prstGeom prst="rect">
+              <a:avLst/>
+            </a:prstGeom>
+            <a:solidFill>
+              <a:schemeClr val="bg2"/>
+            </a:solidFill>
+            <a:ln w="12700">
+              <a:solidFill>
+                <a:schemeClr val="bg2">
+                  <a:lumMod val="90000"/>
+                </a:schemeClr>
+              </a:solidFill>
+            </a:ln>
+          </p:spPr>
+          <p:style>
+            <a:lnRef idx="2">
+              <a:schemeClr val="accent1">
+                <a:shade val="15000"/>
+              </a:schemeClr>
+            </a:lnRef>
+            <a:fillRef idx="1">
+              <a:schemeClr val="accent1"/>
+            </a:fillRef>
+            <a:effectRef idx="0">
+              <a:schemeClr val="accent1"/>
+            </a:effectRef>
+            <a:fontRef idx="minor">
+              <a:schemeClr val="lt1"/>
+            </a:fontRef>
+          </p:style>
+          <p:txBody>
+            <a:bodyPr rtlCol="0" anchor="ctr"/>
+            <a:lstStyle/>
+            <a:p>
+              <a:pPr algn="ctr"/>
+              <a:endParaRPr lang="en-KR" sz="1350" dirty="0">
+                <a:solidFill>
+                  <a:schemeClr val="bg1">
+                    <a:lumMod val="65000"/>
+                  </a:schemeClr>
+                </a:solidFill>
+              </a:endParaRPr>
+            </a:p>
+          </p:txBody>
+        </p:sp>
+        <p:sp>
+          <p:nvSpPr>
+            <p:cNvPr id="85" name="TextBox 84">
+              <a:extLst>
+                <a:ext uri="{FF2B5EF4-FFF2-40B4-BE49-F238E27FC236}">
+                  <a16:creationId xmlns:a16="http://schemas.microsoft.com/office/drawing/2014/main" id="{CA9978DC-3750-3971-B6EF-E7371E2855FE}"/>
+                </a:ext>
+              </a:extLst>
+            </p:cNvPr>
+            <p:cNvSpPr txBox="1"/>
+            <p:nvPr/>
+          </p:nvSpPr>
+          <p:spPr>
             <a:xfrm>
-              <a:off x="2260471" y="2589119"/>
-              <a:ext cx="1539676" cy="270000"/>
-              <a:chOff x="408168" y="1846751"/>
-              <a:chExt cx="2052901" cy="360000"/>
+              <a:off x="408168" y="1849564"/>
+              <a:ext cx="1186486" cy="307413"/>
             </a:xfrm>
-          </p:grpSpPr>
-          <p:sp>
-            <p:nvSpPr>
-              <p:cNvPr id="116" name="Rectangle 115">
-                <a:extLst>
-                  <a:ext uri="{FF2B5EF4-FFF2-40B4-BE49-F238E27FC236}">
-                    <a16:creationId xmlns:a16="http://schemas.microsoft.com/office/drawing/2014/main" id="{D166FFF4-CF63-F94E-52B6-0FB53BBB4BC2}"/>
-                  </a:ext>
-                </a:extLst>
-              </p:cNvPr>
-              <p:cNvSpPr/>
-              <p:nvPr/>
-            </p:nvSpPr>
-            <p:spPr>
-              <a:xfrm flipH="1">
-                <a:off x="411469" y="1846751"/>
-                <a:ext cx="2049600" cy="360000"/>
-              </a:xfrm>
-              <a:prstGeom prst="rect">
-                <a:avLst/>
-              </a:prstGeom>
-              <a:solidFill>
-                <a:schemeClr val="bg2"/>
-              </a:solidFill>
-              <a:ln w="12700">
-                <a:solidFill>
-                  <a:schemeClr val="bg2">
-                    <a:lumMod val="90000"/>
-                  </a:schemeClr>
-                </a:solidFill>
-              </a:ln>
-            </p:spPr>
-            <p:style>
-              <a:lnRef idx="2">
-                <a:schemeClr val="accent1">
-                  <a:shade val="15000"/>
-                </a:schemeClr>
-              </a:lnRef>
-              <a:fillRef idx="1">
-                <a:schemeClr val="accent1"/>
-              </a:fillRef>
-              <a:effectRef idx="0">
-                <a:schemeClr val="accent1"/>
-              </a:effectRef>
-              <a:fontRef idx="minor">
-                <a:schemeClr val="lt1"/>
-              </a:fontRef>
-            </p:style>
-            <p:txBody>
-              <a:bodyPr rtlCol="0" anchor="ctr"/>
-              <a:lstStyle/>
-              <a:p>
-                <a:pPr algn="ctr"/>
-                <a:endParaRPr lang="en-KR" sz="1350" dirty="0">
-                  <a:solidFill>
-                    <a:schemeClr val="bg1">
-                      <a:lumMod val="65000"/>
-                    </a:schemeClr>
-                  </a:solidFill>
-                </a:endParaRPr>
-              </a:p>
-            </p:txBody>
-          </p:sp>
-          <p:sp>
-            <p:nvSpPr>
-              <p:cNvPr id="117" name="TextBox 116">
-                <a:extLst>
-                  <a:ext uri="{FF2B5EF4-FFF2-40B4-BE49-F238E27FC236}">
-                    <a16:creationId xmlns:a16="http://schemas.microsoft.com/office/drawing/2014/main" id="{BD862BEA-D95C-FACF-0DC5-C5A8FE63E13C}"/>
-                  </a:ext>
-                </a:extLst>
-              </p:cNvPr>
-              <p:cNvSpPr txBox="1"/>
-              <p:nvPr/>
-            </p:nvSpPr>
-            <p:spPr>
-              <a:xfrm>
-                <a:off x="408168" y="1849564"/>
-                <a:ext cx="1186486" cy="307413"/>
-              </a:xfrm>
-              <a:prstGeom prst="rect">
-                <a:avLst/>
-              </a:prstGeom>
-              <a:noFill/>
-            </p:spPr>
-            <p:txBody>
-              <a:bodyPr wrap="square" lIns="67500" tIns="67500" rIns="67500" bIns="35100" rtlCol="0">
-                <a:spAutoFit/>
-              </a:bodyPr>
-              <a:lstStyle/>
-              <a:p>
-                <a:r>
-                  <a:rPr lang="en-US" sz="825" b="1" dirty="0" err="1">
-                    <a:solidFill>
-                      <a:schemeClr val="bg1">
-                        <a:lumMod val="65000"/>
-                      </a:schemeClr>
-                    </a:solidFill>
-                    <a:latin typeface="Cascadia Code" panose="020B0609020000020004" pitchFamily="34" charset="0"/>
-                    <a:ea typeface="Cascadia Code" panose="020B0609020000020004" pitchFamily="34" charset="0"/>
-                    <a:cs typeface="Cascadia Code" panose="020B0609020000020004" pitchFamily="34" charset="0"/>
-                  </a:rPr>
-                  <a:t>is_active</a:t>
-                </a:r>
-                <a:endParaRPr lang="en-US" sz="825" b="1" dirty="0">
+            <a:prstGeom prst="rect">
+              <a:avLst/>
+            </a:prstGeom>
+            <a:noFill/>
+          </p:spPr>
+          <p:txBody>
+            <a:bodyPr wrap="square" lIns="67500" tIns="67500" rIns="67500" bIns="35100" rtlCol="0">
+              <a:spAutoFit/>
+            </a:bodyPr>
+            <a:lstStyle/>
+            <a:p>
+              <a:r>
+                <a:rPr lang="en-US" sz="825" b="1" dirty="0">
                   <a:solidFill>
                     <a:schemeClr val="bg1">
                       <a:lumMod val="65000"/>
@@ -20190,11 +20769,434 @@
                   <a:latin typeface="Cascadia Code" panose="020B0609020000020004" pitchFamily="34" charset="0"/>
                   <a:ea typeface="Cascadia Code" panose="020B0609020000020004" pitchFamily="34" charset="0"/>
                   <a:cs typeface="Cascadia Code" panose="020B0609020000020004" pitchFamily="34" charset="0"/>
-                </a:endParaRPr>
-              </a:p>
-            </p:txBody>
-          </p:sp>
-        </p:grpSp>
+                </a:rPr>
+                <a:t>longitude</a:t>
+              </a:r>
+            </a:p>
+          </p:txBody>
+        </p:sp>
+      </p:grpSp>
+      <p:grpSp>
+        <p:nvGrpSpPr>
+          <p:cNvPr id="108" name="Group 107">
+            <a:extLst>
+              <a:ext uri="{FF2B5EF4-FFF2-40B4-BE49-F238E27FC236}">
+                <a16:creationId xmlns:a16="http://schemas.microsoft.com/office/drawing/2014/main" id="{90258E8B-15D2-2DC9-A36F-FB3371001409}"/>
+              </a:ext>
+            </a:extLst>
+          </p:cNvPr>
+          <p:cNvGrpSpPr/>
+          <p:nvPr/>
+        </p:nvGrpSpPr>
+        <p:grpSpPr>
+          <a:xfrm>
+            <a:off x="2263508" y="2919138"/>
+            <a:ext cx="1539676" cy="270000"/>
+            <a:chOff x="408168" y="1846751"/>
+            <a:chExt cx="2052901" cy="360000"/>
+          </a:xfrm>
+        </p:grpSpPr>
+        <p:sp>
+          <p:nvSpPr>
+            <p:cNvPr id="109" name="Rectangle 108">
+              <a:extLst>
+                <a:ext uri="{FF2B5EF4-FFF2-40B4-BE49-F238E27FC236}">
+                  <a16:creationId xmlns:a16="http://schemas.microsoft.com/office/drawing/2014/main" id="{EFE84383-2FE5-B950-34F6-B89175B02AC9}"/>
+                </a:ext>
+              </a:extLst>
+            </p:cNvPr>
+            <p:cNvSpPr/>
+            <p:nvPr/>
+          </p:nvSpPr>
+          <p:spPr>
+            <a:xfrm flipH="1">
+              <a:off x="411469" y="1846751"/>
+              <a:ext cx="2049600" cy="360000"/>
+            </a:xfrm>
+            <a:prstGeom prst="rect">
+              <a:avLst/>
+            </a:prstGeom>
+            <a:solidFill>
+              <a:schemeClr val="bg2"/>
+            </a:solidFill>
+            <a:ln w="12700">
+              <a:solidFill>
+                <a:schemeClr val="bg2">
+                  <a:lumMod val="90000"/>
+                </a:schemeClr>
+              </a:solidFill>
+            </a:ln>
+          </p:spPr>
+          <p:style>
+            <a:lnRef idx="2">
+              <a:schemeClr val="accent1">
+                <a:shade val="15000"/>
+              </a:schemeClr>
+            </a:lnRef>
+            <a:fillRef idx="1">
+              <a:schemeClr val="accent1"/>
+            </a:fillRef>
+            <a:effectRef idx="0">
+              <a:schemeClr val="accent1"/>
+            </a:effectRef>
+            <a:fontRef idx="minor">
+              <a:schemeClr val="lt1"/>
+            </a:fontRef>
+          </p:style>
+          <p:txBody>
+            <a:bodyPr rtlCol="0" anchor="ctr"/>
+            <a:lstStyle/>
+            <a:p>
+              <a:pPr algn="ctr"/>
+              <a:endParaRPr lang="en-KR" sz="1350" dirty="0">
+                <a:solidFill>
+                  <a:schemeClr val="bg1">
+                    <a:lumMod val="65000"/>
+                  </a:schemeClr>
+                </a:solidFill>
+              </a:endParaRPr>
+            </a:p>
+          </p:txBody>
+        </p:sp>
+        <p:sp>
+          <p:nvSpPr>
+            <p:cNvPr id="110" name="TextBox 109">
+              <a:extLst>
+                <a:ext uri="{FF2B5EF4-FFF2-40B4-BE49-F238E27FC236}">
+                  <a16:creationId xmlns:a16="http://schemas.microsoft.com/office/drawing/2014/main" id="{73D7B783-DAA6-A335-984B-3BFF9D61654F}"/>
+                </a:ext>
+              </a:extLst>
+            </p:cNvPr>
+            <p:cNvSpPr txBox="1"/>
+            <p:nvPr/>
+          </p:nvSpPr>
+          <p:spPr>
+            <a:xfrm>
+              <a:off x="408168" y="1849564"/>
+              <a:ext cx="1186486" cy="307413"/>
+            </a:xfrm>
+            <a:prstGeom prst="rect">
+              <a:avLst/>
+            </a:prstGeom>
+            <a:noFill/>
+          </p:spPr>
+          <p:txBody>
+            <a:bodyPr wrap="square" lIns="67500" tIns="67500" rIns="67500" bIns="35100" rtlCol="0">
+              <a:spAutoFit/>
+            </a:bodyPr>
+            <a:lstStyle/>
+            <a:p>
+              <a:r>
+                <a:rPr lang="en-US" sz="825" b="1" dirty="0">
+                  <a:solidFill>
+                    <a:schemeClr val="bg1">
+                      <a:lumMod val="65000"/>
+                    </a:schemeClr>
+                  </a:solidFill>
+                  <a:latin typeface="Cascadia Code" panose="020B0609020000020004" pitchFamily="34" charset="0"/>
+                  <a:ea typeface="Cascadia Code" panose="020B0609020000020004" pitchFamily="34" charset="0"/>
+                  <a:cs typeface="Cascadia Code" panose="020B0609020000020004" pitchFamily="34" charset="0"/>
+                </a:rPr>
+                <a:t>latitude</a:t>
+              </a:r>
+            </a:p>
+          </p:txBody>
+        </p:sp>
+      </p:grpSp>
+      <p:grpSp>
+        <p:nvGrpSpPr>
+          <p:cNvPr id="112" name="Group 111">
+            <a:extLst>
+              <a:ext uri="{FF2B5EF4-FFF2-40B4-BE49-F238E27FC236}">
+                <a16:creationId xmlns:a16="http://schemas.microsoft.com/office/drawing/2014/main" id="{F7E69A82-CFCB-18E5-01A7-62DD9D98F30D}"/>
+              </a:ext>
+            </a:extLst>
+          </p:cNvPr>
+          <p:cNvGrpSpPr/>
+          <p:nvPr/>
+        </p:nvGrpSpPr>
+        <p:grpSpPr>
+          <a:xfrm>
+            <a:off x="2261709" y="3239105"/>
+            <a:ext cx="1539676" cy="270000"/>
+            <a:chOff x="408168" y="1846751"/>
+            <a:chExt cx="2052901" cy="360000"/>
+          </a:xfrm>
+        </p:grpSpPr>
+        <p:sp>
+          <p:nvSpPr>
+            <p:cNvPr id="113" name="Rectangle 112">
+              <a:extLst>
+                <a:ext uri="{FF2B5EF4-FFF2-40B4-BE49-F238E27FC236}">
+                  <a16:creationId xmlns:a16="http://schemas.microsoft.com/office/drawing/2014/main" id="{0B23736A-AC7E-25AE-3418-8E7A313083DC}"/>
+                </a:ext>
+              </a:extLst>
+            </p:cNvPr>
+            <p:cNvSpPr/>
+            <p:nvPr/>
+          </p:nvSpPr>
+          <p:spPr>
+            <a:xfrm flipH="1">
+              <a:off x="411469" y="1846751"/>
+              <a:ext cx="2049600" cy="360000"/>
+            </a:xfrm>
+            <a:prstGeom prst="rect">
+              <a:avLst/>
+            </a:prstGeom>
+            <a:solidFill>
+              <a:schemeClr val="bg2"/>
+            </a:solidFill>
+            <a:ln w="12700">
+              <a:solidFill>
+                <a:schemeClr val="bg2">
+                  <a:lumMod val="90000"/>
+                </a:schemeClr>
+              </a:solidFill>
+            </a:ln>
+          </p:spPr>
+          <p:style>
+            <a:lnRef idx="2">
+              <a:schemeClr val="accent1">
+                <a:shade val="15000"/>
+              </a:schemeClr>
+            </a:lnRef>
+            <a:fillRef idx="1">
+              <a:schemeClr val="accent1"/>
+            </a:fillRef>
+            <a:effectRef idx="0">
+              <a:schemeClr val="accent1"/>
+            </a:effectRef>
+            <a:fontRef idx="minor">
+              <a:schemeClr val="lt1"/>
+            </a:fontRef>
+          </p:style>
+          <p:txBody>
+            <a:bodyPr rtlCol="0" anchor="ctr"/>
+            <a:lstStyle/>
+            <a:p>
+              <a:pPr algn="ctr"/>
+              <a:endParaRPr lang="en-KR" sz="1350" dirty="0">
+                <a:solidFill>
+                  <a:schemeClr val="bg1">
+                    <a:lumMod val="65000"/>
+                  </a:schemeClr>
+                </a:solidFill>
+              </a:endParaRPr>
+            </a:p>
+          </p:txBody>
+        </p:sp>
+        <p:sp>
+          <p:nvSpPr>
+            <p:cNvPr id="114" name="TextBox 113">
+              <a:extLst>
+                <a:ext uri="{FF2B5EF4-FFF2-40B4-BE49-F238E27FC236}">
+                  <a16:creationId xmlns:a16="http://schemas.microsoft.com/office/drawing/2014/main" id="{68623F40-38C4-3ABD-AD0C-C406D0CCFE3B}"/>
+                </a:ext>
+              </a:extLst>
+            </p:cNvPr>
+            <p:cNvSpPr txBox="1"/>
+            <p:nvPr/>
+          </p:nvSpPr>
+          <p:spPr>
+            <a:xfrm>
+              <a:off x="408168" y="1849564"/>
+              <a:ext cx="1186486" cy="307413"/>
+            </a:xfrm>
+            <a:prstGeom prst="rect">
+              <a:avLst/>
+            </a:prstGeom>
+            <a:noFill/>
+          </p:spPr>
+          <p:txBody>
+            <a:bodyPr wrap="square" lIns="67500" tIns="67500" rIns="67500" bIns="35100" rtlCol="0">
+              <a:spAutoFit/>
+            </a:bodyPr>
+            <a:lstStyle/>
+            <a:p>
+              <a:r>
+                <a:rPr lang="en-US" sz="825" b="1" dirty="0" err="1">
+                  <a:solidFill>
+                    <a:schemeClr val="bg1">
+                      <a:lumMod val="65000"/>
+                    </a:schemeClr>
+                  </a:solidFill>
+                  <a:latin typeface="Cascadia Code" panose="020B0609020000020004" pitchFamily="34" charset="0"/>
+                  <a:ea typeface="Cascadia Code" panose="020B0609020000020004" pitchFamily="34" charset="0"/>
+                  <a:cs typeface="Cascadia Code" panose="020B0609020000020004" pitchFamily="34" charset="0"/>
+                </a:rPr>
+                <a:t>district_id</a:t>
+              </a:r>
+              <a:endParaRPr lang="en-US" sz="825" b="1" dirty="0">
+                <a:solidFill>
+                  <a:schemeClr val="bg1">
+                    <a:lumMod val="65000"/>
+                  </a:schemeClr>
+                </a:solidFill>
+                <a:latin typeface="Cascadia Code" panose="020B0609020000020004" pitchFamily="34" charset="0"/>
+                <a:ea typeface="Cascadia Code" panose="020B0609020000020004" pitchFamily="34" charset="0"/>
+                <a:cs typeface="Cascadia Code" panose="020B0609020000020004" pitchFamily="34" charset="0"/>
+              </a:endParaRPr>
+            </a:p>
+          </p:txBody>
+        </p:sp>
+      </p:grpSp>
+      <p:grpSp>
+        <p:nvGrpSpPr>
+          <p:cNvPr id="115" name="Group 114">
+            <a:extLst>
+              <a:ext uri="{FF2B5EF4-FFF2-40B4-BE49-F238E27FC236}">
+                <a16:creationId xmlns:a16="http://schemas.microsoft.com/office/drawing/2014/main" id="{1C47365D-D8A9-FD0E-0BDF-E3C89E9B1265}"/>
+              </a:ext>
+            </a:extLst>
+          </p:cNvPr>
+          <p:cNvGrpSpPr/>
+          <p:nvPr/>
+        </p:nvGrpSpPr>
+        <p:grpSpPr>
+          <a:xfrm>
+            <a:off x="2260471" y="3559072"/>
+            <a:ext cx="1539676" cy="270000"/>
+            <a:chOff x="408168" y="1846751"/>
+            <a:chExt cx="2052901" cy="360000"/>
+          </a:xfrm>
+        </p:grpSpPr>
+        <p:sp>
+          <p:nvSpPr>
+            <p:cNvPr id="116" name="Rectangle 115">
+              <a:extLst>
+                <a:ext uri="{FF2B5EF4-FFF2-40B4-BE49-F238E27FC236}">
+                  <a16:creationId xmlns:a16="http://schemas.microsoft.com/office/drawing/2014/main" id="{D166FFF4-CF63-F94E-52B6-0FB53BBB4BC2}"/>
+                </a:ext>
+              </a:extLst>
+            </p:cNvPr>
+            <p:cNvSpPr/>
+            <p:nvPr/>
+          </p:nvSpPr>
+          <p:spPr>
+            <a:xfrm flipH="1">
+              <a:off x="411469" y="1846751"/>
+              <a:ext cx="2049600" cy="360000"/>
+            </a:xfrm>
+            <a:prstGeom prst="rect">
+              <a:avLst/>
+            </a:prstGeom>
+            <a:solidFill>
+              <a:schemeClr val="bg2"/>
+            </a:solidFill>
+            <a:ln w="12700">
+              <a:solidFill>
+                <a:schemeClr val="bg2">
+                  <a:lumMod val="90000"/>
+                </a:schemeClr>
+              </a:solidFill>
+            </a:ln>
+          </p:spPr>
+          <p:style>
+            <a:lnRef idx="2">
+              <a:schemeClr val="accent1">
+                <a:shade val="15000"/>
+              </a:schemeClr>
+            </a:lnRef>
+            <a:fillRef idx="1">
+              <a:schemeClr val="accent1"/>
+            </a:fillRef>
+            <a:effectRef idx="0">
+              <a:schemeClr val="accent1"/>
+            </a:effectRef>
+            <a:fontRef idx="minor">
+              <a:schemeClr val="lt1"/>
+            </a:fontRef>
+          </p:style>
+          <p:txBody>
+            <a:bodyPr rtlCol="0" anchor="ctr"/>
+            <a:lstStyle/>
+            <a:p>
+              <a:pPr algn="ctr"/>
+              <a:endParaRPr lang="en-KR" sz="1350" dirty="0">
+                <a:solidFill>
+                  <a:schemeClr val="bg1">
+                    <a:lumMod val="65000"/>
+                  </a:schemeClr>
+                </a:solidFill>
+              </a:endParaRPr>
+            </a:p>
+          </p:txBody>
+        </p:sp>
+        <p:sp>
+          <p:nvSpPr>
+            <p:cNvPr id="117" name="TextBox 116">
+              <a:extLst>
+                <a:ext uri="{FF2B5EF4-FFF2-40B4-BE49-F238E27FC236}">
+                  <a16:creationId xmlns:a16="http://schemas.microsoft.com/office/drawing/2014/main" id="{BD862BEA-D95C-FACF-0DC5-C5A8FE63E13C}"/>
+                </a:ext>
+              </a:extLst>
+            </p:cNvPr>
+            <p:cNvSpPr txBox="1"/>
+            <p:nvPr/>
+          </p:nvSpPr>
+          <p:spPr>
+            <a:xfrm>
+              <a:off x="408168" y="1849564"/>
+              <a:ext cx="1186486" cy="307413"/>
+            </a:xfrm>
+            <a:prstGeom prst="rect">
+              <a:avLst/>
+            </a:prstGeom>
+            <a:noFill/>
+          </p:spPr>
+          <p:txBody>
+            <a:bodyPr wrap="square" lIns="67500" tIns="67500" rIns="67500" bIns="35100" rtlCol="0">
+              <a:spAutoFit/>
+            </a:bodyPr>
+            <a:lstStyle/>
+            <a:p>
+              <a:r>
+                <a:rPr lang="en-US" sz="825" b="1" dirty="0" err="1">
+                  <a:solidFill>
+                    <a:schemeClr val="bg1">
+                      <a:lumMod val="65000"/>
+                    </a:schemeClr>
+                  </a:solidFill>
+                  <a:latin typeface="Cascadia Code" panose="020B0609020000020004" pitchFamily="34" charset="0"/>
+                  <a:ea typeface="Cascadia Code" panose="020B0609020000020004" pitchFamily="34" charset="0"/>
+                  <a:cs typeface="Cascadia Code" panose="020B0609020000020004" pitchFamily="34" charset="0"/>
+                </a:rPr>
+                <a:t>is_active</a:t>
+              </a:r>
+              <a:endParaRPr lang="en-US" sz="825" b="1" dirty="0">
+                <a:solidFill>
+                  <a:schemeClr val="bg1">
+                    <a:lumMod val="65000"/>
+                  </a:schemeClr>
+                </a:solidFill>
+                <a:latin typeface="Cascadia Code" panose="020B0609020000020004" pitchFamily="34" charset="0"/>
+                <a:ea typeface="Cascadia Code" panose="020B0609020000020004" pitchFamily="34" charset="0"/>
+                <a:cs typeface="Cascadia Code" panose="020B0609020000020004" pitchFamily="34" charset="0"/>
+              </a:endParaRPr>
+            </a:p>
+          </p:txBody>
+        </p:sp>
+      </p:grpSp>
+      <p:grpSp>
+        <p:nvGrpSpPr>
+          <p:cNvPr id="8" name="Group 7">
+            <a:extLst>
+              <a:ext uri="{FF2B5EF4-FFF2-40B4-BE49-F238E27FC236}">
+                <a16:creationId xmlns:a16="http://schemas.microsoft.com/office/drawing/2014/main" id="{94D18D82-8425-C029-2840-8DFB222096DB}"/>
+              </a:ext>
+            </a:extLst>
+          </p:cNvPr>
+          <p:cNvGrpSpPr/>
+          <p:nvPr/>
+        </p:nvGrpSpPr>
+        <p:grpSpPr>
+          <a:xfrm>
+            <a:off x="2263847" y="4213699"/>
+            <a:ext cx="1541476" cy="762003"/>
+            <a:chOff x="2263847" y="3931301"/>
+            <a:chExt cx="1541476" cy="762003"/>
+          </a:xfrm>
+        </p:grpSpPr>
         <p:sp>
           <p:nvSpPr>
             <p:cNvPr id="125" name="Rectangle 124">
@@ -20209,7 +21211,7 @@
           </p:nvSpPr>
           <p:spPr>
             <a:xfrm flipH="1">
-              <a:off x="2266323" y="2961951"/>
+              <a:off x="2266323" y="3931904"/>
               <a:ext cx="1539000" cy="761400"/>
             </a:xfrm>
             <a:prstGeom prst="rect">
@@ -20265,7 +21267,7 @@
           </p:nvSpPr>
           <p:spPr>
             <a:xfrm>
-              <a:off x="2263847" y="2964059"/>
+              <a:off x="2263847" y="3934012"/>
               <a:ext cx="988796" cy="357518"/>
             </a:xfrm>
             <a:prstGeom prst="rect">
@@ -20334,7 +21336,7 @@
           </p:nvSpPr>
           <p:spPr>
             <a:xfrm>
-              <a:off x="2266322" y="3344660"/>
+              <a:off x="2266322" y="4314613"/>
               <a:ext cx="1539000" cy="368241"/>
             </a:xfrm>
             <a:prstGeom prst="rect">
@@ -20492,7 +21494,7 @@
           </p:nvSpPr>
           <p:spPr>
             <a:xfrm>
-              <a:off x="2816528" y="2961348"/>
+              <a:off x="2816528" y="3931301"/>
               <a:ext cx="988795" cy="357518"/>
             </a:xfrm>
             <a:prstGeom prst="rect">
@@ -20534,12 +21536,238 @@
           </p:txBody>
         </p:sp>
       </p:grpSp>
+      <p:sp>
+        <p:nvSpPr>
+          <p:cNvPr id="91" name="Rectangle 90">
+            <a:extLst>
+              <a:ext uri="{FF2B5EF4-FFF2-40B4-BE49-F238E27FC236}">
+                <a16:creationId xmlns:a16="http://schemas.microsoft.com/office/drawing/2014/main" id="{7EA3E285-7341-712D-CE4C-9B72D9CC91E7}"/>
+              </a:ext>
+            </a:extLst>
+          </p:cNvPr>
+          <p:cNvSpPr/>
+          <p:nvPr/>
+        </p:nvSpPr>
+        <p:spPr>
+          <a:xfrm>
+            <a:off x="4119192" y="1577451"/>
+            <a:ext cx="1754999" cy="3179814"/>
+          </a:xfrm>
+          <a:prstGeom prst="rect">
+            <a:avLst/>
+          </a:prstGeom>
+          <a:solidFill>
+            <a:schemeClr val="bg1">
+              <a:lumMod val="95000"/>
+            </a:schemeClr>
+          </a:solidFill>
+          <a:ln>
+            <a:noFill/>
+          </a:ln>
+        </p:spPr>
+        <p:style>
+          <a:lnRef idx="2">
+            <a:schemeClr val="accent1">
+              <a:shade val="15000"/>
+            </a:schemeClr>
+          </a:lnRef>
+          <a:fillRef idx="1">
+            <a:schemeClr val="accent1"/>
+          </a:fillRef>
+          <a:effectRef idx="0">
+            <a:schemeClr val="accent1"/>
+          </a:effectRef>
+          <a:fontRef idx="minor">
+            <a:schemeClr val="lt1"/>
+          </a:fontRef>
+        </p:style>
+        <p:txBody>
+          <a:bodyPr rtlCol="0" anchor="ctr"/>
+          <a:lstStyle/>
+          <a:p>
+            <a:pPr algn="ctr"/>
+            <a:endParaRPr lang="en-KR" sz="1350"/>
+          </a:p>
+        </p:txBody>
+      </p:sp>
+      <p:sp>
+        <p:nvSpPr>
+          <p:cNvPr id="92" name="Rectangle 91">
+            <a:extLst>
+              <a:ext uri="{FF2B5EF4-FFF2-40B4-BE49-F238E27FC236}">
+                <a16:creationId xmlns:a16="http://schemas.microsoft.com/office/drawing/2014/main" id="{821B80AE-2FBC-0B23-F12F-C6A62BB2C5CD}"/>
+              </a:ext>
+            </a:extLst>
+          </p:cNvPr>
+          <p:cNvSpPr/>
+          <p:nvPr/>
+        </p:nvSpPr>
+        <p:spPr>
+          <a:xfrm>
+            <a:off x="4119194" y="1577451"/>
+            <a:ext cx="1754999" cy="710066"/>
+          </a:xfrm>
+          <a:prstGeom prst="rect">
+            <a:avLst/>
+          </a:prstGeom>
+          <a:gradFill>
+            <a:gsLst>
+              <a:gs pos="0">
+                <a:schemeClr val="bg2"/>
+              </a:gs>
+              <a:gs pos="100000">
+                <a:schemeClr val="bg1">
+                  <a:lumMod val="95000"/>
+                </a:schemeClr>
+              </a:gs>
+            </a:gsLst>
+            <a:lin ang="5400000" scaled="1"/>
+          </a:gradFill>
+          <a:ln>
+            <a:noFill/>
+          </a:ln>
+        </p:spPr>
+        <p:style>
+          <a:lnRef idx="2">
+            <a:schemeClr val="accent1">
+              <a:shade val="15000"/>
+            </a:schemeClr>
+          </a:lnRef>
+          <a:fillRef idx="1">
+            <a:schemeClr val="accent1"/>
+          </a:fillRef>
+          <a:effectRef idx="0">
+            <a:schemeClr val="accent1"/>
+          </a:effectRef>
+          <a:fontRef idx="minor">
+            <a:schemeClr val="lt1"/>
+          </a:fontRef>
+        </p:style>
+        <p:txBody>
+          <a:bodyPr rtlCol="0" anchor="ctr"/>
+          <a:lstStyle/>
+          <a:p>
+            <a:pPr algn="ctr"/>
+            <a:endParaRPr lang="en-KR" sz="1350" dirty="0"/>
+          </a:p>
+        </p:txBody>
+      </p:sp>
+      <p:sp>
+        <p:nvSpPr>
+          <p:cNvPr id="93" name="TextBox 92">
+            <a:extLst>
+              <a:ext uri="{FF2B5EF4-FFF2-40B4-BE49-F238E27FC236}">
+                <a16:creationId xmlns:a16="http://schemas.microsoft.com/office/drawing/2014/main" id="{D7A344DA-55D6-3CAF-110D-271E643A1592}"/>
+              </a:ext>
+            </a:extLst>
+          </p:cNvPr>
+          <p:cNvSpPr txBox="1"/>
+          <p:nvPr/>
+        </p:nvSpPr>
+        <p:spPr>
+          <a:xfrm>
+            <a:off x="4119191" y="1577450"/>
+            <a:ext cx="1754997" cy="298719"/>
+          </a:xfrm>
+          <a:prstGeom prst="rect">
+            <a:avLst/>
+          </a:prstGeom>
+          <a:noFill/>
+        </p:spPr>
+        <p:txBody>
+          <a:bodyPr wrap="square" lIns="135000" tIns="135000" rIns="67500" bIns="35100" rtlCol="0">
+            <a:spAutoFit/>
+          </a:bodyPr>
+          <a:lstStyle/>
+          <a:p>
+            <a:r>
+              <a:rPr lang="en-US" sz="825" b="1" dirty="0" err="1">
+                <a:solidFill>
+                  <a:schemeClr val="tx1">
+                    <a:lumMod val="85000"/>
+                    <a:lumOff val="15000"/>
+                  </a:schemeClr>
+                </a:solidFill>
+                <a:latin typeface="Cascadia Code" panose="020B0609020000020004" pitchFamily="34" charset="0"/>
+                <a:ea typeface="Cascadia Code" panose="020B0609020000020004" pitchFamily="34" charset="0"/>
+                <a:cs typeface="Cascadia Code" panose="020B0609020000020004" pitchFamily="34" charset="0"/>
+              </a:rPr>
+              <a:t>BusDataHistory</a:t>
+            </a:r>
+            <a:endParaRPr lang="en-KR" sz="825" b="1" dirty="0">
+              <a:solidFill>
+                <a:schemeClr val="tx1">
+                  <a:lumMod val="85000"/>
+                  <a:lumOff val="15000"/>
+                </a:schemeClr>
+              </a:solidFill>
+              <a:latin typeface="Cascadia Code" panose="020B0609020000020004" pitchFamily="34" charset="0"/>
+              <a:ea typeface="Cascadia Code" panose="020B0609020000020004" pitchFamily="34" charset="0"/>
+              <a:cs typeface="Cascadia Code" panose="020B0609020000020004" pitchFamily="34" charset="0"/>
+            </a:endParaRPr>
+          </a:p>
+        </p:txBody>
+      </p:sp>
+      <p:sp>
+        <p:nvSpPr>
+          <p:cNvPr id="94" name="Rectangle 93">
+            <a:extLst>
+              <a:ext uri="{FF2B5EF4-FFF2-40B4-BE49-F238E27FC236}">
+                <a16:creationId xmlns:a16="http://schemas.microsoft.com/office/drawing/2014/main" id="{3DC0BB03-4629-A684-FC51-37153845D7E8}"/>
+              </a:ext>
+            </a:extLst>
+          </p:cNvPr>
+          <p:cNvSpPr/>
+          <p:nvPr/>
+        </p:nvSpPr>
+        <p:spPr>
+          <a:xfrm>
+            <a:off x="4119191" y="1577451"/>
+            <a:ext cx="1755000" cy="3179814"/>
+          </a:xfrm>
+          <a:prstGeom prst="rect">
+            <a:avLst/>
+          </a:prstGeom>
+          <a:noFill/>
+          <a:ln w="12700">
+            <a:solidFill>
+              <a:schemeClr val="bg2">
+                <a:lumMod val="90000"/>
+              </a:schemeClr>
+            </a:solidFill>
+          </a:ln>
+        </p:spPr>
+        <p:style>
+          <a:lnRef idx="2">
+            <a:schemeClr val="accent1">
+              <a:shade val="15000"/>
+            </a:schemeClr>
+          </a:lnRef>
+          <a:fillRef idx="1">
+            <a:schemeClr val="accent1"/>
+          </a:fillRef>
+          <a:effectRef idx="0">
+            <a:schemeClr val="accent1"/>
+          </a:effectRef>
+          <a:fontRef idx="minor">
+            <a:schemeClr val="lt1"/>
+          </a:fontRef>
+        </p:style>
+        <p:txBody>
+          <a:bodyPr rtlCol="0" anchor="ctr"/>
+          <a:lstStyle/>
+          <a:p>
+            <a:pPr algn="ctr"/>
+            <a:endParaRPr lang="en-KR" sz="1350" dirty="0"/>
+          </a:p>
+        </p:txBody>
+      </p:sp>
       <p:grpSp>
         <p:nvGrpSpPr>
-          <p:cNvPr id="148" name="Group 147">
+          <p:cNvPr id="129" name="Group 128">
             <a:extLst>
               <a:ext uri="{FF2B5EF4-FFF2-40B4-BE49-F238E27FC236}">
-                <a16:creationId xmlns:a16="http://schemas.microsoft.com/office/drawing/2014/main" id="{E17DB789-43A3-BE98-B353-C6F7DFF2C1BB}"/>
+                <a16:creationId xmlns:a16="http://schemas.microsoft.com/office/drawing/2014/main" id="{4DD6E15A-960A-B930-0759-2C8256F59AFE}"/>
               </a:ext>
             </a:extLst>
           </p:cNvPr>
@@ -20548,18 +21776,18 @@
         </p:nvGrpSpPr>
         <p:grpSpPr>
           <a:xfrm>
-            <a:off x="4119191" y="2329765"/>
-            <a:ext cx="1755002" cy="2891153"/>
-            <a:chOff x="4119191" y="607497"/>
-            <a:chExt cx="1755002" cy="2891153"/>
+            <a:off x="4223221" y="1959237"/>
+            <a:ext cx="1539676" cy="270000"/>
+            <a:chOff x="408168" y="1846751"/>
+            <a:chExt cx="2052901" cy="360000"/>
           </a:xfrm>
         </p:grpSpPr>
         <p:sp>
           <p:nvSpPr>
-            <p:cNvPr id="91" name="Rectangle 90">
+            <p:cNvPr id="130" name="Rectangle 129">
               <a:extLst>
                 <a:ext uri="{FF2B5EF4-FFF2-40B4-BE49-F238E27FC236}">
-                  <a16:creationId xmlns:a16="http://schemas.microsoft.com/office/drawing/2014/main" id="{7EA3E285-7341-712D-CE4C-9B72D9CC91E7}"/>
+                  <a16:creationId xmlns:a16="http://schemas.microsoft.com/office/drawing/2014/main" id="{41127BEC-D1A0-1C29-8452-686C319A9FC9}"/>
                 </a:ext>
               </a:extLst>
             </p:cNvPr>
@@ -20567,186 +21795,16 @@
             <p:nvPr/>
           </p:nvSpPr>
           <p:spPr>
-            <a:xfrm>
-              <a:off x="4119192" y="607498"/>
-              <a:ext cx="1754999" cy="2891151"/>
+            <a:xfrm flipH="1">
+              <a:off x="411469" y="1846751"/>
+              <a:ext cx="2049600" cy="360000"/>
             </a:xfrm>
             <a:prstGeom prst="rect">
               <a:avLst/>
             </a:prstGeom>
             <a:solidFill>
-              <a:schemeClr val="bg1">
-                <a:lumMod val="95000"/>
-              </a:schemeClr>
+              <a:schemeClr val="bg2"/>
             </a:solidFill>
-            <a:ln>
-              <a:noFill/>
-            </a:ln>
-          </p:spPr>
-          <p:style>
-            <a:lnRef idx="2">
-              <a:schemeClr val="accent1">
-                <a:shade val="15000"/>
-              </a:schemeClr>
-            </a:lnRef>
-            <a:fillRef idx="1">
-              <a:schemeClr val="accent1"/>
-            </a:fillRef>
-            <a:effectRef idx="0">
-              <a:schemeClr val="accent1"/>
-            </a:effectRef>
-            <a:fontRef idx="minor">
-              <a:schemeClr val="lt1"/>
-            </a:fontRef>
-          </p:style>
-          <p:txBody>
-            <a:bodyPr rtlCol="0" anchor="ctr"/>
-            <a:lstStyle/>
-            <a:p>
-              <a:pPr algn="ctr"/>
-              <a:endParaRPr lang="en-KR" sz="1350"/>
-            </a:p>
-          </p:txBody>
-        </p:sp>
-        <p:sp>
-          <p:nvSpPr>
-            <p:cNvPr id="92" name="Rectangle 91">
-              <a:extLst>
-                <a:ext uri="{FF2B5EF4-FFF2-40B4-BE49-F238E27FC236}">
-                  <a16:creationId xmlns:a16="http://schemas.microsoft.com/office/drawing/2014/main" id="{821B80AE-2FBC-0B23-F12F-C6A62BB2C5CD}"/>
-                </a:ext>
-              </a:extLst>
-            </p:cNvPr>
-            <p:cNvSpPr/>
-            <p:nvPr/>
-          </p:nvSpPr>
-          <p:spPr>
-            <a:xfrm>
-              <a:off x="4119194" y="607498"/>
-              <a:ext cx="1754999" cy="710066"/>
-            </a:xfrm>
-            <a:prstGeom prst="rect">
-              <a:avLst/>
-            </a:prstGeom>
-            <a:gradFill>
-              <a:gsLst>
-                <a:gs pos="0">
-                  <a:schemeClr val="bg2"/>
-                </a:gs>
-                <a:gs pos="100000">
-                  <a:schemeClr val="bg1">
-                    <a:lumMod val="95000"/>
-                  </a:schemeClr>
-                </a:gs>
-              </a:gsLst>
-              <a:lin ang="5400000" scaled="1"/>
-            </a:gradFill>
-            <a:ln>
-              <a:noFill/>
-            </a:ln>
-          </p:spPr>
-          <p:style>
-            <a:lnRef idx="2">
-              <a:schemeClr val="accent1">
-                <a:shade val="15000"/>
-              </a:schemeClr>
-            </a:lnRef>
-            <a:fillRef idx="1">
-              <a:schemeClr val="accent1"/>
-            </a:fillRef>
-            <a:effectRef idx="0">
-              <a:schemeClr val="accent1"/>
-            </a:effectRef>
-            <a:fontRef idx="minor">
-              <a:schemeClr val="lt1"/>
-            </a:fontRef>
-          </p:style>
-          <p:txBody>
-            <a:bodyPr rtlCol="0" anchor="ctr"/>
-            <a:lstStyle/>
-            <a:p>
-              <a:pPr algn="ctr"/>
-              <a:endParaRPr lang="en-KR" sz="1350" dirty="0"/>
-            </a:p>
-          </p:txBody>
-        </p:sp>
-        <p:sp>
-          <p:nvSpPr>
-            <p:cNvPr id="93" name="TextBox 92">
-              <a:extLst>
-                <a:ext uri="{FF2B5EF4-FFF2-40B4-BE49-F238E27FC236}">
-                  <a16:creationId xmlns:a16="http://schemas.microsoft.com/office/drawing/2014/main" id="{D7A344DA-55D6-3CAF-110D-271E643A1592}"/>
-                </a:ext>
-              </a:extLst>
-            </p:cNvPr>
-            <p:cNvSpPr txBox="1"/>
-            <p:nvPr/>
-          </p:nvSpPr>
-          <p:spPr>
-            <a:xfrm>
-              <a:off x="4119191" y="607497"/>
-              <a:ext cx="1754997" cy="298719"/>
-            </a:xfrm>
-            <a:prstGeom prst="rect">
-              <a:avLst/>
-            </a:prstGeom>
-            <a:noFill/>
-          </p:spPr>
-          <p:txBody>
-            <a:bodyPr wrap="square" lIns="135000" tIns="135000" rIns="67500" bIns="35100" rtlCol="0">
-              <a:spAutoFit/>
-            </a:bodyPr>
-            <a:lstStyle/>
-            <a:p>
-              <a:r>
-                <a:rPr lang="en-US" sz="825" b="1" dirty="0" err="1">
-                  <a:solidFill>
-                    <a:schemeClr val="tx1">
-                      <a:lumMod val="85000"/>
-                      <a:lumOff val="15000"/>
-                    </a:schemeClr>
-                  </a:solidFill>
-                  <a:latin typeface="Cascadia Code" panose="020B0609020000020004" pitchFamily="34" charset="0"/>
-                  <a:ea typeface="Cascadia Code" panose="020B0609020000020004" pitchFamily="34" charset="0"/>
-                  <a:cs typeface="Cascadia Code" panose="020B0609020000020004" pitchFamily="34" charset="0"/>
-                </a:rPr>
-                <a:t>BusDataHistory</a:t>
-              </a:r>
-              <a:endParaRPr lang="en-KR" sz="825" b="1" dirty="0">
-                <a:solidFill>
-                  <a:schemeClr val="tx1">
-                    <a:lumMod val="85000"/>
-                    <a:lumOff val="15000"/>
-                  </a:schemeClr>
-                </a:solidFill>
-                <a:latin typeface="Cascadia Code" panose="020B0609020000020004" pitchFamily="34" charset="0"/>
-                <a:ea typeface="Cascadia Code" panose="020B0609020000020004" pitchFamily="34" charset="0"/>
-                <a:cs typeface="Cascadia Code" panose="020B0609020000020004" pitchFamily="34" charset="0"/>
-              </a:endParaRPr>
-            </a:p>
-          </p:txBody>
-        </p:sp>
-        <p:sp>
-          <p:nvSpPr>
-            <p:cNvPr id="94" name="Rectangle 93">
-              <a:extLst>
-                <a:ext uri="{FF2B5EF4-FFF2-40B4-BE49-F238E27FC236}">
-                  <a16:creationId xmlns:a16="http://schemas.microsoft.com/office/drawing/2014/main" id="{3DC0BB03-4629-A684-FC51-37153845D7E8}"/>
-                </a:ext>
-              </a:extLst>
-            </p:cNvPr>
-            <p:cNvSpPr/>
-            <p:nvPr/>
-          </p:nvSpPr>
-          <p:spPr>
-            <a:xfrm>
-              <a:off x="4119191" y="607498"/>
-              <a:ext cx="1755000" cy="2891152"/>
-            </a:xfrm>
-            <a:prstGeom prst="rect">
-              <a:avLst/>
-            </a:prstGeom>
-            <a:noFill/>
             <a:ln w="12700">
               <a:solidFill>
                 <a:schemeClr val="bg2">
@@ -20776,134 +21834,46 @@
             <a:lstStyle/>
             <a:p>
               <a:pPr algn="ctr"/>
-              <a:endParaRPr lang="en-KR" sz="1350" dirty="0"/>
+              <a:endParaRPr lang="en-KR" sz="1350" dirty="0">
+                <a:solidFill>
+                  <a:schemeClr val="bg1">
+                    <a:lumMod val="65000"/>
+                  </a:schemeClr>
+                </a:solidFill>
+              </a:endParaRPr>
             </a:p>
           </p:txBody>
         </p:sp>
-        <p:grpSp>
-          <p:nvGrpSpPr>
-            <p:cNvPr id="129" name="Group 128">
+        <p:sp>
+          <p:nvSpPr>
+            <p:cNvPr id="131" name="TextBox 130">
               <a:extLst>
                 <a:ext uri="{FF2B5EF4-FFF2-40B4-BE49-F238E27FC236}">
-                  <a16:creationId xmlns:a16="http://schemas.microsoft.com/office/drawing/2014/main" id="{4DD6E15A-960A-B930-0759-2C8256F59AFE}"/>
+                  <a16:creationId xmlns:a16="http://schemas.microsoft.com/office/drawing/2014/main" id="{F95208C7-B796-60C9-6330-FF91BD367C3D}"/>
                 </a:ext>
               </a:extLst>
             </p:cNvPr>
-            <p:cNvGrpSpPr/>
+            <p:cNvSpPr txBox="1"/>
             <p:nvPr/>
-          </p:nvGrpSpPr>
-          <p:grpSpPr>
+          </p:nvSpPr>
+          <p:spPr>
             <a:xfrm>
-              <a:off x="4223221" y="989284"/>
-              <a:ext cx="1539676" cy="270000"/>
-              <a:chOff x="408168" y="1846751"/>
-              <a:chExt cx="2052901" cy="360000"/>
+              <a:off x="408168" y="1849564"/>
+              <a:ext cx="1186486" cy="307413"/>
             </a:xfrm>
-          </p:grpSpPr>
-          <p:sp>
-            <p:nvSpPr>
-              <p:cNvPr id="130" name="Rectangle 129">
-                <a:extLst>
-                  <a:ext uri="{FF2B5EF4-FFF2-40B4-BE49-F238E27FC236}">
-                    <a16:creationId xmlns:a16="http://schemas.microsoft.com/office/drawing/2014/main" id="{41127BEC-D1A0-1C29-8452-686C319A9FC9}"/>
-                  </a:ext>
-                </a:extLst>
-              </p:cNvPr>
-              <p:cNvSpPr/>
-              <p:nvPr/>
-            </p:nvSpPr>
-            <p:spPr>
-              <a:xfrm flipH="1">
-                <a:off x="411469" y="1846751"/>
-                <a:ext cx="2049600" cy="360000"/>
-              </a:xfrm>
-              <a:prstGeom prst="rect">
-                <a:avLst/>
-              </a:prstGeom>
-              <a:solidFill>
-                <a:schemeClr val="bg2"/>
-              </a:solidFill>
-              <a:ln w="12700">
-                <a:solidFill>
-                  <a:schemeClr val="bg2">
-                    <a:lumMod val="90000"/>
-                  </a:schemeClr>
-                </a:solidFill>
-              </a:ln>
-            </p:spPr>
-            <p:style>
-              <a:lnRef idx="2">
-                <a:schemeClr val="accent1">
-                  <a:shade val="15000"/>
-                </a:schemeClr>
-              </a:lnRef>
-              <a:fillRef idx="1">
-                <a:schemeClr val="accent1"/>
-              </a:fillRef>
-              <a:effectRef idx="0">
-                <a:schemeClr val="accent1"/>
-              </a:effectRef>
-              <a:fontRef idx="minor">
-                <a:schemeClr val="lt1"/>
-              </a:fontRef>
-            </p:style>
-            <p:txBody>
-              <a:bodyPr rtlCol="0" anchor="ctr"/>
-              <a:lstStyle/>
-              <a:p>
-                <a:pPr algn="ctr"/>
-                <a:endParaRPr lang="en-KR" sz="1350" dirty="0">
-                  <a:solidFill>
-                    <a:schemeClr val="bg1">
-                      <a:lumMod val="65000"/>
-                    </a:schemeClr>
-                  </a:solidFill>
-                </a:endParaRPr>
-              </a:p>
-            </p:txBody>
-          </p:sp>
-          <p:sp>
-            <p:nvSpPr>
-              <p:cNvPr id="131" name="TextBox 130">
-                <a:extLst>
-                  <a:ext uri="{FF2B5EF4-FFF2-40B4-BE49-F238E27FC236}">
-                    <a16:creationId xmlns:a16="http://schemas.microsoft.com/office/drawing/2014/main" id="{F95208C7-B796-60C9-6330-FF91BD367C3D}"/>
-                  </a:ext>
-                </a:extLst>
-              </p:cNvPr>
-              <p:cNvSpPr txBox="1"/>
-              <p:nvPr/>
-            </p:nvSpPr>
-            <p:spPr>
-              <a:xfrm>
-                <a:off x="408168" y="1849564"/>
-                <a:ext cx="1186486" cy="307413"/>
-              </a:xfrm>
-              <a:prstGeom prst="rect">
-                <a:avLst/>
-              </a:prstGeom>
-              <a:noFill/>
-            </p:spPr>
-            <p:txBody>
-              <a:bodyPr wrap="square" lIns="67500" tIns="67500" rIns="67500" bIns="35100" rtlCol="0">
-                <a:spAutoFit/>
-              </a:bodyPr>
-              <a:lstStyle/>
-              <a:p>
-                <a:r>
-                  <a:rPr lang="en-US" sz="825" b="1" dirty="0" err="1">
-                    <a:solidFill>
-                      <a:schemeClr val="bg1">
-                        <a:lumMod val="65000"/>
-                      </a:schemeClr>
-                    </a:solidFill>
-                    <a:latin typeface="Cascadia Code" panose="020B0609020000020004" pitchFamily="34" charset="0"/>
-                    <a:ea typeface="Cascadia Code" panose="020B0609020000020004" pitchFamily="34" charset="0"/>
-                    <a:cs typeface="Cascadia Code" panose="020B0609020000020004" pitchFamily="34" charset="0"/>
-                  </a:rPr>
-                  <a:t>busstop_id</a:t>
-                </a:r>
-                <a:endParaRPr lang="en-US" sz="825" b="1" dirty="0">
+            <a:prstGeom prst="rect">
+              <a:avLst/>
+            </a:prstGeom>
+            <a:noFill/>
+          </p:spPr>
+          <p:txBody>
+            <a:bodyPr wrap="square" lIns="67500" tIns="67500" rIns="67500" bIns="35100" rtlCol="0">
+              <a:spAutoFit/>
+            </a:bodyPr>
+            <a:lstStyle/>
+            <a:p>
+              <a:r>
+                <a:rPr lang="en-US" sz="825" b="1" dirty="0" err="1">
                   <a:solidFill>
                     <a:schemeClr val="bg1">
                       <a:lumMod val="65000"/>
@@ -20912,135 +21882,135 @@
                   <a:latin typeface="Cascadia Code" panose="020B0609020000020004" pitchFamily="34" charset="0"/>
                   <a:ea typeface="Cascadia Code" panose="020B0609020000020004" pitchFamily="34" charset="0"/>
                   <a:cs typeface="Cascadia Code" panose="020B0609020000020004" pitchFamily="34" charset="0"/>
-                </a:endParaRPr>
-              </a:p>
-            </p:txBody>
-          </p:sp>
-        </p:grpSp>
-        <p:grpSp>
-          <p:nvGrpSpPr>
-            <p:cNvPr id="132" name="Group 131">
+                </a:rPr>
+                <a:t>busstop_id</a:t>
+              </a:r>
+              <a:endParaRPr lang="en-US" sz="825" b="1" dirty="0">
+                <a:solidFill>
+                  <a:schemeClr val="bg1">
+                    <a:lumMod val="65000"/>
+                  </a:schemeClr>
+                </a:solidFill>
+                <a:latin typeface="Cascadia Code" panose="020B0609020000020004" pitchFamily="34" charset="0"/>
+                <a:ea typeface="Cascadia Code" panose="020B0609020000020004" pitchFamily="34" charset="0"/>
+                <a:cs typeface="Cascadia Code" panose="020B0609020000020004" pitchFamily="34" charset="0"/>
+              </a:endParaRPr>
+            </a:p>
+          </p:txBody>
+        </p:sp>
+      </p:grpSp>
+      <p:grpSp>
+        <p:nvGrpSpPr>
+          <p:cNvPr id="132" name="Group 131">
+            <a:extLst>
+              <a:ext uri="{FF2B5EF4-FFF2-40B4-BE49-F238E27FC236}">
+                <a16:creationId xmlns:a16="http://schemas.microsoft.com/office/drawing/2014/main" id="{57FE2813-8FA3-8C94-72EA-53284CBB4D63}"/>
+              </a:ext>
+            </a:extLst>
+          </p:cNvPr>
+          <p:cNvGrpSpPr/>
+          <p:nvPr/>
+        </p:nvGrpSpPr>
+        <p:grpSpPr>
+          <a:xfrm>
+            <a:off x="4224799" y="2279204"/>
+            <a:ext cx="1539676" cy="270000"/>
+            <a:chOff x="408168" y="1846751"/>
+            <a:chExt cx="2052901" cy="360000"/>
+          </a:xfrm>
+        </p:grpSpPr>
+        <p:sp>
+          <p:nvSpPr>
+            <p:cNvPr id="133" name="Rectangle 132">
               <a:extLst>
                 <a:ext uri="{FF2B5EF4-FFF2-40B4-BE49-F238E27FC236}">
-                  <a16:creationId xmlns:a16="http://schemas.microsoft.com/office/drawing/2014/main" id="{57FE2813-8FA3-8C94-72EA-53284CBB4D63}"/>
+                  <a16:creationId xmlns:a16="http://schemas.microsoft.com/office/drawing/2014/main" id="{EA1772F2-455B-C915-82D0-A6F4DDD19E2B}"/>
                 </a:ext>
               </a:extLst>
             </p:cNvPr>
-            <p:cNvGrpSpPr/>
+            <p:cNvSpPr/>
             <p:nvPr/>
-          </p:nvGrpSpPr>
-          <p:grpSpPr>
+          </p:nvSpPr>
+          <p:spPr>
+            <a:xfrm flipH="1">
+              <a:off x="411469" y="1846751"/>
+              <a:ext cx="2049600" cy="360000"/>
+            </a:xfrm>
+            <a:prstGeom prst="rect">
+              <a:avLst/>
+            </a:prstGeom>
+            <a:solidFill>
+              <a:schemeClr val="bg2"/>
+            </a:solidFill>
+            <a:ln w="12700">
+              <a:solidFill>
+                <a:schemeClr val="bg2">
+                  <a:lumMod val="90000"/>
+                </a:schemeClr>
+              </a:solidFill>
+            </a:ln>
+          </p:spPr>
+          <p:style>
+            <a:lnRef idx="2">
+              <a:schemeClr val="accent1">
+                <a:shade val="15000"/>
+              </a:schemeClr>
+            </a:lnRef>
+            <a:fillRef idx="1">
+              <a:schemeClr val="accent1"/>
+            </a:fillRef>
+            <a:effectRef idx="0">
+              <a:schemeClr val="accent1"/>
+            </a:effectRef>
+            <a:fontRef idx="minor">
+              <a:schemeClr val="lt1"/>
+            </a:fontRef>
+          </p:style>
+          <p:txBody>
+            <a:bodyPr rtlCol="0" anchor="ctr"/>
+            <a:lstStyle/>
+            <a:p>
+              <a:pPr algn="ctr"/>
+              <a:endParaRPr lang="en-KR" sz="1350" dirty="0">
+                <a:solidFill>
+                  <a:schemeClr val="bg1">
+                    <a:lumMod val="65000"/>
+                  </a:schemeClr>
+                </a:solidFill>
+              </a:endParaRPr>
+            </a:p>
+          </p:txBody>
+        </p:sp>
+        <p:sp>
+          <p:nvSpPr>
+            <p:cNvPr id="134" name="TextBox 133">
+              <a:extLst>
+                <a:ext uri="{FF2B5EF4-FFF2-40B4-BE49-F238E27FC236}">
+                  <a16:creationId xmlns:a16="http://schemas.microsoft.com/office/drawing/2014/main" id="{0A8315C2-5FDF-CE24-092A-9E19457A7712}"/>
+                </a:ext>
+              </a:extLst>
+            </p:cNvPr>
+            <p:cNvSpPr txBox="1"/>
+            <p:nvPr/>
+          </p:nvSpPr>
+          <p:spPr>
             <a:xfrm>
-              <a:off x="4224799" y="1309251"/>
-              <a:ext cx="1539676" cy="270000"/>
-              <a:chOff x="408168" y="1846751"/>
-              <a:chExt cx="2052901" cy="360000"/>
+              <a:off x="408168" y="1849564"/>
+              <a:ext cx="1186486" cy="307413"/>
             </a:xfrm>
-          </p:grpSpPr>
-          <p:sp>
-            <p:nvSpPr>
-              <p:cNvPr id="133" name="Rectangle 132">
-                <a:extLst>
-                  <a:ext uri="{FF2B5EF4-FFF2-40B4-BE49-F238E27FC236}">
-                    <a16:creationId xmlns:a16="http://schemas.microsoft.com/office/drawing/2014/main" id="{EA1772F2-455B-C915-82D0-A6F4DDD19E2B}"/>
-                  </a:ext>
-                </a:extLst>
-              </p:cNvPr>
-              <p:cNvSpPr/>
-              <p:nvPr/>
-            </p:nvSpPr>
-            <p:spPr>
-              <a:xfrm flipH="1">
-                <a:off x="411469" y="1846751"/>
-                <a:ext cx="2049600" cy="360000"/>
-              </a:xfrm>
-              <a:prstGeom prst="rect">
-                <a:avLst/>
-              </a:prstGeom>
-              <a:solidFill>
-                <a:schemeClr val="bg2"/>
-              </a:solidFill>
-              <a:ln w="12700">
-                <a:solidFill>
-                  <a:schemeClr val="bg2">
-                    <a:lumMod val="90000"/>
-                  </a:schemeClr>
-                </a:solidFill>
-              </a:ln>
-            </p:spPr>
-            <p:style>
-              <a:lnRef idx="2">
-                <a:schemeClr val="accent1">
-                  <a:shade val="15000"/>
-                </a:schemeClr>
-              </a:lnRef>
-              <a:fillRef idx="1">
-                <a:schemeClr val="accent1"/>
-              </a:fillRef>
-              <a:effectRef idx="0">
-                <a:schemeClr val="accent1"/>
-              </a:effectRef>
-              <a:fontRef idx="minor">
-                <a:schemeClr val="lt1"/>
-              </a:fontRef>
-            </p:style>
-            <p:txBody>
-              <a:bodyPr rtlCol="0" anchor="ctr"/>
-              <a:lstStyle/>
-              <a:p>
-                <a:pPr algn="ctr"/>
-                <a:endParaRPr lang="en-KR" sz="1350" dirty="0">
-                  <a:solidFill>
-                    <a:schemeClr val="bg1">
-                      <a:lumMod val="65000"/>
-                    </a:schemeClr>
-                  </a:solidFill>
-                </a:endParaRPr>
-              </a:p>
-            </p:txBody>
-          </p:sp>
-          <p:sp>
-            <p:nvSpPr>
-              <p:cNvPr id="134" name="TextBox 133">
-                <a:extLst>
-                  <a:ext uri="{FF2B5EF4-FFF2-40B4-BE49-F238E27FC236}">
-                    <a16:creationId xmlns:a16="http://schemas.microsoft.com/office/drawing/2014/main" id="{0A8315C2-5FDF-CE24-092A-9E19457A7712}"/>
-                  </a:ext>
-                </a:extLst>
-              </p:cNvPr>
-              <p:cNvSpPr txBox="1"/>
-              <p:nvPr/>
-            </p:nvSpPr>
-            <p:spPr>
-              <a:xfrm>
-                <a:off x="408168" y="1849564"/>
-                <a:ext cx="1186486" cy="307413"/>
-              </a:xfrm>
-              <a:prstGeom prst="rect">
-                <a:avLst/>
-              </a:prstGeom>
-              <a:noFill/>
-            </p:spPr>
-            <p:txBody>
-              <a:bodyPr wrap="square" lIns="67500" tIns="67500" rIns="67500" bIns="35100" rtlCol="0">
-                <a:spAutoFit/>
-              </a:bodyPr>
-              <a:lstStyle/>
-              <a:p>
-                <a:r>
-                  <a:rPr lang="en-US" sz="825" b="1" dirty="0" err="1">
-                    <a:solidFill>
-                      <a:schemeClr val="bg1">
-                        <a:lumMod val="65000"/>
-                      </a:schemeClr>
-                    </a:solidFill>
-                    <a:latin typeface="Cascadia Code" panose="020B0609020000020004" pitchFamily="34" charset="0"/>
-                    <a:ea typeface="Cascadia Code" panose="020B0609020000020004" pitchFamily="34" charset="0"/>
-                    <a:cs typeface="Cascadia Code" panose="020B0609020000020004" pitchFamily="34" charset="0"/>
-                  </a:rPr>
-                  <a:t>bus_id</a:t>
-                </a:r>
-                <a:endParaRPr lang="en-US" sz="825" b="1" dirty="0">
+            <a:prstGeom prst="rect">
+              <a:avLst/>
+            </a:prstGeom>
+            <a:noFill/>
+          </p:spPr>
+          <p:txBody>
+            <a:bodyPr wrap="square" lIns="67500" tIns="67500" rIns="67500" bIns="35100" rtlCol="0">
+              <a:spAutoFit/>
+            </a:bodyPr>
+            <a:lstStyle/>
+            <a:p>
+              <a:r>
+                <a:rPr lang="en-US" sz="825" b="1" dirty="0" err="1">
                   <a:solidFill>
                     <a:schemeClr val="bg1">
                       <a:lumMod val="65000"/>
@@ -21049,262 +22019,135 @@
                   <a:latin typeface="Cascadia Code" panose="020B0609020000020004" pitchFamily="34" charset="0"/>
                   <a:ea typeface="Cascadia Code" panose="020B0609020000020004" pitchFamily="34" charset="0"/>
                   <a:cs typeface="Cascadia Code" panose="020B0609020000020004" pitchFamily="34" charset="0"/>
-                </a:endParaRPr>
-              </a:p>
-            </p:txBody>
-          </p:sp>
-        </p:grpSp>
-        <p:grpSp>
-          <p:nvGrpSpPr>
-            <p:cNvPr id="135" name="Group 134">
+                </a:rPr>
+                <a:t>bus_id</a:t>
+              </a:r>
+              <a:endParaRPr lang="en-US" sz="825" b="1" dirty="0">
+                <a:solidFill>
+                  <a:schemeClr val="bg1">
+                    <a:lumMod val="65000"/>
+                  </a:schemeClr>
+                </a:solidFill>
+                <a:latin typeface="Cascadia Code" panose="020B0609020000020004" pitchFamily="34" charset="0"/>
+                <a:ea typeface="Cascadia Code" panose="020B0609020000020004" pitchFamily="34" charset="0"/>
+                <a:cs typeface="Cascadia Code" panose="020B0609020000020004" pitchFamily="34" charset="0"/>
+              </a:endParaRPr>
+            </a:p>
+          </p:txBody>
+        </p:sp>
+      </p:grpSp>
+      <p:grpSp>
+        <p:nvGrpSpPr>
+          <p:cNvPr id="135" name="Group 134">
+            <a:extLst>
+              <a:ext uri="{FF2B5EF4-FFF2-40B4-BE49-F238E27FC236}">
+                <a16:creationId xmlns:a16="http://schemas.microsoft.com/office/drawing/2014/main" id="{4948BC1A-A7A6-066B-0FC8-EB21C7B0D96D}"/>
+              </a:ext>
+            </a:extLst>
+          </p:cNvPr>
+          <p:cNvGrpSpPr/>
+          <p:nvPr/>
+        </p:nvGrpSpPr>
+        <p:grpSpPr>
+          <a:xfrm>
+            <a:off x="4223561" y="2599171"/>
+            <a:ext cx="1539676" cy="270000"/>
+            <a:chOff x="408168" y="1846751"/>
+            <a:chExt cx="2052901" cy="360000"/>
+          </a:xfrm>
+        </p:grpSpPr>
+        <p:sp>
+          <p:nvSpPr>
+            <p:cNvPr id="136" name="Rectangle 135">
               <a:extLst>
                 <a:ext uri="{FF2B5EF4-FFF2-40B4-BE49-F238E27FC236}">
-                  <a16:creationId xmlns:a16="http://schemas.microsoft.com/office/drawing/2014/main" id="{4948BC1A-A7A6-066B-0FC8-EB21C7B0D96D}"/>
+                  <a16:creationId xmlns:a16="http://schemas.microsoft.com/office/drawing/2014/main" id="{4110146D-200B-AFB6-5D21-C3047368492E}"/>
                 </a:ext>
               </a:extLst>
             </p:cNvPr>
-            <p:cNvGrpSpPr/>
+            <p:cNvSpPr/>
             <p:nvPr/>
-          </p:nvGrpSpPr>
-          <p:grpSpPr>
-            <a:xfrm>
-              <a:off x="4223561" y="1629218"/>
-              <a:ext cx="1539676" cy="270000"/>
-              <a:chOff x="408168" y="1846751"/>
-              <a:chExt cx="2052901" cy="360000"/>
+          </p:nvSpPr>
+          <p:spPr>
+            <a:xfrm flipH="1">
+              <a:off x="411469" y="1846751"/>
+              <a:ext cx="2049600" cy="360000"/>
             </a:xfrm>
-          </p:grpSpPr>
-          <p:sp>
-            <p:nvSpPr>
-              <p:cNvPr id="136" name="Rectangle 135">
-                <a:extLst>
-                  <a:ext uri="{FF2B5EF4-FFF2-40B4-BE49-F238E27FC236}">
-                    <a16:creationId xmlns:a16="http://schemas.microsoft.com/office/drawing/2014/main" id="{4110146D-200B-AFB6-5D21-C3047368492E}"/>
-                  </a:ext>
-                </a:extLst>
-              </p:cNvPr>
-              <p:cNvSpPr/>
-              <p:nvPr/>
-            </p:nvSpPr>
-            <p:spPr>
-              <a:xfrm flipH="1">
-                <a:off x="411469" y="1846751"/>
-                <a:ext cx="2049600" cy="360000"/>
-              </a:xfrm>
-              <a:prstGeom prst="rect">
-                <a:avLst/>
-              </a:prstGeom>
+            <a:prstGeom prst="rect">
+              <a:avLst/>
+            </a:prstGeom>
+            <a:solidFill>
+              <a:schemeClr val="bg2"/>
+            </a:solidFill>
+            <a:ln w="12700">
               <a:solidFill>
-                <a:schemeClr val="bg2"/>
+                <a:schemeClr val="bg2">
+                  <a:lumMod val="90000"/>
+                </a:schemeClr>
               </a:solidFill>
-              <a:ln w="12700">
-                <a:solidFill>
-                  <a:schemeClr val="bg2">
-                    <a:lumMod val="90000"/>
-                  </a:schemeClr>
-                </a:solidFill>
-              </a:ln>
-            </p:spPr>
-            <p:style>
-              <a:lnRef idx="2">
-                <a:schemeClr val="accent1">
-                  <a:shade val="15000"/>
-                </a:schemeClr>
-              </a:lnRef>
-              <a:fillRef idx="1">
-                <a:schemeClr val="accent1"/>
-              </a:fillRef>
-              <a:effectRef idx="0">
-                <a:schemeClr val="accent1"/>
-              </a:effectRef>
-              <a:fontRef idx="minor">
-                <a:schemeClr val="lt1"/>
-              </a:fontRef>
-            </p:style>
-            <p:txBody>
-              <a:bodyPr rtlCol="0" anchor="ctr"/>
-              <a:lstStyle/>
-              <a:p>
-                <a:pPr algn="ctr"/>
-                <a:endParaRPr lang="en-KR" sz="1350" dirty="0">
-                  <a:solidFill>
-                    <a:schemeClr val="bg1">
-                      <a:lumMod val="65000"/>
-                    </a:schemeClr>
-                  </a:solidFill>
-                </a:endParaRPr>
-              </a:p>
-            </p:txBody>
-          </p:sp>
-          <p:sp>
-            <p:nvSpPr>
-              <p:cNvPr id="137" name="TextBox 136">
-                <a:extLst>
-                  <a:ext uri="{FF2B5EF4-FFF2-40B4-BE49-F238E27FC236}">
-                    <a16:creationId xmlns:a16="http://schemas.microsoft.com/office/drawing/2014/main" id="{3245BAE0-6A2E-8FFC-7F53-8925432A7B81}"/>
-                  </a:ext>
-                </a:extLst>
-              </p:cNvPr>
-              <p:cNvSpPr txBox="1"/>
-              <p:nvPr/>
-            </p:nvSpPr>
-            <p:spPr>
-              <a:xfrm>
-                <a:off x="408168" y="1849564"/>
-                <a:ext cx="1186486" cy="307413"/>
-              </a:xfrm>
-              <a:prstGeom prst="rect">
-                <a:avLst/>
-              </a:prstGeom>
-              <a:noFill/>
-            </p:spPr>
-            <p:txBody>
-              <a:bodyPr wrap="square" lIns="67500" tIns="67500" rIns="67500" bIns="35100" rtlCol="0">
-                <a:spAutoFit/>
-              </a:bodyPr>
-              <a:lstStyle/>
-              <a:p>
-                <a:r>
-                  <a:rPr lang="en-US" sz="825" b="1" dirty="0">
-                    <a:solidFill>
-                      <a:schemeClr val="bg1">
-                        <a:lumMod val="65000"/>
-                      </a:schemeClr>
-                    </a:solidFill>
-                    <a:latin typeface="Cascadia Code" panose="020B0609020000020004" pitchFamily="34" charset="0"/>
-                    <a:ea typeface="Cascadia Code" panose="020B0609020000020004" pitchFamily="34" charset="0"/>
-                    <a:cs typeface="Cascadia Code" panose="020B0609020000020004" pitchFamily="34" charset="0"/>
-                  </a:rPr>
-                  <a:t>timestamp</a:t>
-                </a:r>
-              </a:p>
-            </p:txBody>
-          </p:sp>
-        </p:grpSp>
-        <p:grpSp>
-          <p:nvGrpSpPr>
-            <p:cNvPr id="138" name="Group 137">
+            </a:ln>
+          </p:spPr>
+          <p:style>
+            <a:lnRef idx="2">
+              <a:schemeClr val="accent1">
+                <a:shade val="15000"/>
+              </a:schemeClr>
+            </a:lnRef>
+            <a:fillRef idx="1">
+              <a:schemeClr val="accent1"/>
+            </a:fillRef>
+            <a:effectRef idx="0">
+              <a:schemeClr val="accent1"/>
+            </a:effectRef>
+            <a:fontRef idx="minor">
+              <a:schemeClr val="lt1"/>
+            </a:fontRef>
+          </p:style>
+          <p:txBody>
+            <a:bodyPr rtlCol="0" anchor="ctr"/>
+            <a:lstStyle/>
+            <a:p>
+              <a:pPr algn="ctr"/>
+              <a:endParaRPr lang="en-KR" sz="1350" dirty="0">
+                <a:solidFill>
+                  <a:schemeClr val="bg1">
+                    <a:lumMod val="65000"/>
+                  </a:schemeClr>
+                </a:solidFill>
+              </a:endParaRPr>
+            </a:p>
+          </p:txBody>
+        </p:sp>
+        <p:sp>
+          <p:nvSpPr>
+            <p:cNvPr id="137" name="TextBox 136">
               <a:extLst>
                 <a:ext uri="{FF2B5EF4-FFF2-40B4-BE49-F238E27FC236}">
-                  <a16:creationId xmlns:a16="http://schemas.microsoft.com/office/drawing/2014/main" id="{2BE102D8-D3F6-22EA-06CE-63E44EE188B7}"/>
+                  <a16:creationId xmlns:a16="http://schemas.microsoft.com/office/drawing/2014/main" id="{3245BAE0-6A2E-8FFC-7F53-8925432A7B81}"/>
                 </a:ext>
               </a:extLst>
             </p:cNvPr>
-            <p:cNvGrpSpPr/>
+            <p:cNvSpPr txBox="1"/>
             <p:nvPr/>
-          </p:nvGrpSpPr>
-          <p:grpSpPr>
+          </p:nvSpPr>
+          <p:spPr>
             <a:xfrm>
-              <a:off x="4222883" y="1949185"/>
-              <a:ext cx="1539676" cy="270000"/>
-              <a:chOff x="408168" y="1846751"/>
-              <a:chExt cx="2052901" cy="360000"/>
+              <a:off x="408168" y="1849564"/>
+              <a:ext cx="1186486" cy="307413"/>
             </a:xfrm>
-          </p:grpSpPr>
-          <p:sp>
-            <p:nvSpPr>
-              <p:cNvPr id="139" name="Rectangle 138">
-                <a:extLst>
-                  <a:ext uri="{FF2B5EF4-FFF2-40B4-BE49-F238E27FC236}">
-                    <a16:creationId xmlns:a16="http://schemas.microsoft.com/office/drawing/2014/main" id="{6210398A-DA5F-CF7A-5B81-503A66FBE38A}"/>
-                  </a:ext>
-                </a:extLst>
-              </p:cNvPr>
-              <p:cNvSpPr/>
-              <p:nvPr/>
-            </p:nvSpPr>
-            <p:spPr>
-              <a:xfrm flipH="1">
-                <a:off x="411469" y="1846751"/>
-                <a:ext cx="2049600" cy="360000"/>
-              </a:xfrm>
-              <a:prstGeom prst="rect">
-                <a:avLst/>
-              </a:prstGeom>
-              <a:solidFill>
-                <a:schemeClr val="bg2"/>
-              </a:solidFill>
-              <a:ln w="12700">
-                <a:solidFill>
-                  <a:schemeClr val="bg2">
-                    <a:lumMod val="90000"/>
-                  </a:schemeClr>
-                </a:solidFill>
-              </a:ln>
-            </p:spPr>
-            <p:style>
-              <a:lnRef idx="2">
-                <a:schemeClr val="accent1">
-                  <a:shade val="15000"/>
-                </a:schemeClr>
-              </a:lnRef>
-              <a:fillRef idx="1">
-                <a:schemeClr val="accent1"/>
-              </a:fillRef>
-              <a:effectRef idx="0">
-                <a:schemeClr val="accent1"/>
-              </a:effectRef>
-              <a:fontRef idx="minor">
-                <a:schemeClr val="lt1"/>
-              </a:fontRef>
-            </p:style>
-            <p:txBody>
-              <a:bodyPr rtlCol="0" anchor="ctr"/>
-              <a:lstStyle/>
-              <a:p>
-                <a:pPr algn="ctr"/>
-                <a:endParaRPr lang="en-KR" sz="1350" dirty="0">
-                  <a:solidFill>
-                    <a:schemeClr val="bg1">
-                      <a:lumMod val="65000"/>
-                    </a:schemeClr>
-                  </a:solidFill>
-                </a:endParaRPr>
-              </a:p>
-            </p:txBody>
-          </p:sp>
-          <p:sp>
-            <p:nvSpPr>
-              <p:cNvPr id="140" name="TextBox 139">
-                <a:extLst>
-                  <a:ext uri="{FF2B5EF4-FFF2-40B4-BE49-F238E27FC236}">
-                    <a16:creationId xmlns:a16="http://schemas.microsoft.com/office/drawing/2014/main" id="{569C091C-9B64-0071-57B4-CADF33E86DA9}"/>
-                  </a:ext>
-                </a:extLst>
-              </p:cNvPr>
-              <p:cNvSpPr txBox="1"/>
-              <p:nvPr/>
-            </p:nvSpPr>
-            <p:spPr>
-              <a:xfrm>
-                <a:off x="408168" y="1849564"/>
-                <a:ext cx="1677209" cy="307413"/>
-              </a:xfrm>
-              <a:prstGeom prst="rect">
-                <a:avLst/>
-              </a:prstGeom>
-              <a:noFill/>
-            </p:spPr>
-            <p:txBody>
-              <a:bodyPr wrap="square" lIns="67500" tIns="67500" rIns="67500" bIns="35100" rtlCol="0">
-                <a:spAutoFit/>
-              </a:bodyPr>
-              <a:lstStyle/>
-              <a:p>
-                <a:r>
-                  <a:rPr lang="en-US" sz="825" b="1" dirty="0" err="1">
-                    <a:solidFill>
-                      <a:schemeClr val="bg1">
-                        <a:lumMod val="65000"/>
-                      </a:schemeClr>
-                    </a:solidFill>
-                    <a:latin typeface="Cascadia Code" panose="020B0609020000020004" pitchFamily="34" charset="0"/>
-                    <a:ea typeface="Cascadia Code" panose="020B0609020000020004" pitchFamily="34" charset="0"/>
-                    <a:cs typeface="Cascadia Code" panose="020B0609020000020004" pitchFamily="34" charset="0"/>
-                  </a:rPr>
-                  <a:t>passengers_on</a:t>
-                </a:r>
-                <a:endParaRPr lang="en-US" sz="825" b="1" dirty="0">
+            <a:prstGeom prst="rect">
+              <a:avLst/>
+            </a:prstGeom>
+            <a:noFill/>
+          </p:spPr>
+          <p:txBody>
+            <a:bodyPr wrap="square" lIns="67500" tIns="67500" rIns="67500" bIns="35100" rtlCol="0">
+              <a:spAutoFit/>
+            </a:bodyPr>
+            <a:lstStyle/>
+            <a:p>
+              <a:r>
+                <a:rPr lang="en-US" sz="825" b="1" dirty="0">
                   <a:solidFill>
                     <a:schemeClr val="bg1">
                       <a:lumMod val="65000"/>
@@ -21313,135 +22156,125 @@
                   <a:latin typeface="Cascadia Code" panose="020B0609020000020004" pitchFamily="34" charset="0"/>
                   <a:ea typeface="Cascadia Code" panose="020B0609020000020004" pitchFamily="34" charset="0"/>
                   <a:cs typeface="Cascadia Code" panose="020B0609020000020004" pitchFamily="34" charset="0"/>
-                </a:endParaRPr>
-              </a:p>
-            </p:txBody>
-          </p:sp>
-        </p:grpSp>
-        <p:grpSp>
-          <p:nvGrpSpPr>
-            <p:cNvPr id="141" name="Group 140">
+                </a:rPr>
+                <a:t>timestamp</a:t>
+              </a:r>
+            </a:p>
+          </p:txBody>
+        </p:sp>
+      </p:grpSp>
+      <p:grpSp>
+        <p:nvGrpSpPr>
+          <p:cNvPr id="138" name="Group 137">
+            <a:extLst>
+              <a:ext uri="{FF2B5EF4-FFF2-40B4-BE49-F238E27FC236}">
+                <a16:creationId xmlns:a16="http://schemas.microsoft.com/office/drawing/2014/main" id="{2BE102D8-D3F6-22EA-06CE-63E44EE188B7}"/>
+              </a:ext>
+            </a:extLst>
+          </p:cNvPr>
+          <p:cNvGrpSpPr/>
+          <p:nvPr/>
+        </p:nvGrpSpPr>
+        <p:grpSpPr>
+          <a:xfrm>
+            <a:off x="4222883" y="2919138"/>
+            <a:ext cx="1539676" cy="270000"/>
+            <a:chOff x="408168" y="1846751"/>
+            <a:chExt cx="2052901" cy="360000"/>
+          </a:xfrm>
+        </p:grpSpPr>
+        <p:sp>
+          <p:nvSpPr>
+            <p:cNvPr id="139" name="Rectangle 138">
               <a:extLst>
                 <a:ext uri="{FF2B5EF4-FFF2-40B4-BE49-F238E27FC236}">
-                  <a16:creationId xmlns:a16="http://schemas.microsoft.com/office/drawing/2014/main" id="{D45CBCB7-0ACD-8BE4-CFBD-3A590C0737EF}"/>
+                  <a16:creationId xmlns:a16="http://schemas.microsoft.com/office/drawing/2014/main" id="{6210398A-DA5F-CF7A-5B81-503A66FBE38A}"/>
                 </a:ext>
               </a:extLst>
             </p:cNvPr>
-            <p:cNvGrpSpPr/>
+            <p:cNvSpPr/>
             <p:nvPr/>
-          </p:nvGrpSpPr>
-          <p:grpSpPr>
+          </p:nvSpPr>
+          <p:spPr>
+            <a:xfrm flipH="1">
+              <a:off x="411469" y="1846751"/>
+              <a:ext cx="2049600" cy="360000"/>
+            </a:xfrm>
+            <a:prstGeom prst="rect">
+              <a:avLst/>
+            </a:prstGeom>
+            <a:solidFill>
+              <a:schemeClr val="bg2"/>
+            </a:solidFill>
+            <a:ln w="12700">
+              <a:solidFill>
+                <a:schemeClr val="bg2">
+                  <a:lumMod val="90000"/>
+                </a:schemeClr>
+              </a:solidFill>
+            </a:ln>
+          </p:spPr>
+          <p:style>
+            <a:lnRef idx="2">
+              <a:schemeClr val="accent1">
+                <a:shade val="15000"/>
+              </a:schemeClr>
+            </a:lnRef>
+            <a:fillRef idx="1">
+              <a:schemeClr val="accent1"/>
+            </a:fillRef>
+            <a:effectRef idx="0">
+              <a:schemeClr val="accent1"/>
+            </a:effectRef>
+            <a:fontRef idx="minor">
+              <a:schemeClr val="lt1"/>
+            </a:fontRef>
+          </p:style>
+          <p:txBody>
+            <a:bodyPr rtlCol="0" anchor="ctr"/>
+            <a:lstStyle/>
+            <a:p>
+              <a:pPr algn="ctr"/>
+              <a:endParaRPr lang="en-KR" sz="1350" dirty="0">
+                <a:solidFill>
+                  <a:schemeClr val="bg1">
+                    <a:lumMod val="65000"/>
+                  </a:schemeClr>
+                </a:solidFill>
+              </a:endParaRPr>
+            </a:p>
+          </p:txBody>
+        </p:sp>
+        <p:sp>
+          <p:nvSpPr>
+            <p:cNvPr id="140" name="TextBox 139">
+              <a:extLst>
+                <a:ext uri="{FF2B5EF4-FFF2-40B4-BE49-F238E27FC236}">
+                  <a16:creationId xmlns:a16="http://schemas.microsoft.com/office/drawing/2014/main" id="{569C091C-9B64-0071-57B4-CADF33E86DA9}"/>
+                </a:ext>
+              </a:extLst>
+            </p:cNvPr>
+            <p:cNvSpPr txBox="1"/>
+            <p:nvPr/>
+          </p:nvSpPr>
+          <p:spPr>
             <a:xfrm>
-              <a:off x="4221084" y="2269152"/>
-              <a:ext cx="1539676" cy="270000"/>
-              <a:chOff x="408168" y="1846751"/>
-              <a:chExt cx="2052901" cy="360000"/>
+              <a:off x="408168" y="1849564"/>
+              <a:ext cx="1677209" cy="307413"/>
             </a:xfrm>
-          </p:grpSpPr>
-          <p:sp>
-            <p:nvSpPr>
-              <p:cNvPr id="142" name="Rectangle 141">
-                <a:extLst>
-                  <a:ext uri="{FF2B5EF4-FFF2-40B4-BE49-F238E27FC236}">
-                    <a16:creationId xmlns:a16="http://schemas.microsoft.com/office/drawing/2014/main" id="{52A3E69A-7E77-74DE-BE04-D1C79B08DCE2}"/>
-                  </a:ext>
-                </a:extLst>
-              </p:cNvPr>
-              <p:cNvSpPr/>
-              <p:nvPr/>
-            </p:nvSpPr>
-            <p:spPr>
-              <a:xfrm flipH="1">
-                <a:off x="411469" y="1846751"/>
-                <a:ext cx="2049600" cy="360000"/>
-              </a:xfrm>
-              <a:prstGeom prst="rect">
-                <a:avLst/>
-              </a:prstGeom>
-              <a:solidFill>
-                <a:schemeClr val="bg2"/>
-              </a:solidFill>
-              <a:ln w="12700">
-                <a:solidFill>
-                  <a:schemeClr val="bg2">
-                    <a:lumMod val="90000"/>
-                  </a:schemeClr>
-                </a:solidFill>
-              </a:ln>
-            </p:spPr>
-            <p:style>
-              <a:lnRef idx="2">
-                <a:schemeClr val="accent1">
-                  <a:shade val="15000"/>
-                </a:schemeClr>
-              </a:lnRef>
-              <a:fillRef idx="1">
-                <a:schemeClr val="accent1"/>
-              </a:fillRef>
-              <a:effectRef idx="0">
-                <a:schemeClr val="accent1"/>
-              </a:effectRef>
-              <a:fontRef idx="minor">
-                <a:schemeClr val="lt1"/>
-              </a:fontRef>
-            </p:style>
-            <p:txBody>
-              <a:bodyPr rtlCol="0" anchor="ctr"/>
-              <a:lstStyle/>
-              <a:p>
-                <a:pPr algn="ctr"/>
-                <a:endParaRPr lang="en-KR" sz="1350" dirty="0">
-                  <a:solidFill>
-                    <a:schemeClr val="bg1">
-                      <a:lumMod val="65000"/>
-                    </a:schemeClr>
-                  </a:solidFill>
-                </a:endParaRPr>
-              </a:p>
-            </p:txBody>
-          </p:sp>
-          <p:sp>
-            <p:nvSpPr>
-              <p:cNvPr id="143" name="TextBox 142">
-                <a:extLst>
-                  <a:ext uri="{FF2B5EF4-FFF2-40B4-BE49-F238E27FC236}">
-                    <a16:creationId xmlns:a16="http://schemas.microsoft.com/office/drawing/2014/main" id="{F09CB65D-1AA8-A50D-13AA-0E0CA26829E9}"/>
-                  </a:ext>
-                </a:extLst>
-              </p:cNvPr>
-              <p:cNvSpPr txBox="1"/>
-              <p:nvPr/>
-            </p:nvSpPr>
-            <p:spPr>
-              <a:xfrm>
-                <a:off x="408168" y="1849564"/>
-                <a:ext cx="1739446" cy="307413"/>
-              </a:xfrm>
-              <a:prstGeom prst="rect">
-                <a:avLst/>
-              </a:prstGeom>
-              <a:noFill/>
-            </p:spPr>
-            <p:txBody>
-              <a:bodyPr wrap="square" lIns="67500" tIns="67500" rIns="67500" bIns="35100" rtlCol="0">
-                <a:spAutoFit/>
-              </a:bodyPr>
-              <a:lstStyle/>
-              <a:p>
-                <a:r>
-                  <a:rPr lang="en-US" sz="825" b="1" dirty="0" err="1">
-                    <a:solidFill>
-                      <a:schemeClr val="bg1">
-                        <a:lumMod val="65000"/>
-                      </a:schemeClr>
-                    </a:solidFill>
-                    <a:latin typeface="Cascadia Code" panose="020B0609020000020004" pitchFamily="34" charset="0"/>
-                    <a:ea typeface="Cascadia Code" panose="020B0609020000020004" pitchFamily="34" charset="0"/>
-                    <a:cs typeface="Cascadia Code" panose="020B0609020000020004" pitchFamily="34" charset="0"/>
-                  </a:rPr>
-                  <a:t>passengers_off</a:t>
-                </a:r>
-                <a:endParaRPr lang="en-US" sz="825" b="1" dirty="0">
+            <a:prstGeom prst="rect">
+              <a:avLst/>
+            </a:prstGeom>
+            <a:noFill/>
+          </p:spPr>
+          <p:txBody>
+            <a:bodyPr wrap="square" lIns="67500" tIns="67500" rIns="67500" bIns="35100" rtlCol="0">
+              <a:spAutoFit/>
+            </a:bodyPr>
+            <a:lstStyle/>
+            <a:p>
+              <a:r>
+                <a:rPr lang="en-US" sz="825" b="1" dirty="0" err="1">
                   <a:solidFill>
                     <a:schemeClr val="bg1">
                       <a:lumMod val="65000"/>
@@ -21450,11 +22283,180 @@
                   <a:latin typeface="Cascadia Code" panose="020B0609020000020004" pitchFamily="34" charset="0"/>
                   <a:ea typeface="Cascadia Code" panose="020B0609020000020004" pitchFamily="34" charset="0"/>
                   <a:cs typeface="Cascadia Code" panose="020B0609020000020004" pitchFamily="34" charset="0"/>
-                </a:endParaRPr>
-              </a:p>
-            </p:txBody>
-          </p:sp>
-        </p:grpSp>
+                </a:rPr>
+                <a:t>passengers_on</a:t>
+              </a:r>
+              <a:endParaRPr lang="en-US" sz="825" b="1" dirty="0">
+                <a:solidFill>
+                  <a:schemeClr val="bg1">
+                    <a:lumMod val="65000"/>
+                  </a:schemeClr>
+                </a:solidFill>
+                <a:latin typeface="Cascadia Code" panose="020B0609020000020004" pitchFamily="34" charset="0"/>
+                <a:ea typeface="Cascadia Code" panose="020B0609020000020004" pitchFamily="34" charset="0"/>
+                <a:cs typeface="Cascadia Code" panose="020B0609020000020004" pitchFamily="34" charset="0"/>
+              </a:endParaRPr>
+            </a:p>
+          </p:txBody>
+        </p:sp>
+      </p:grpSp>
+      <p:grpSp>
+        <p:nvGrpSpPr>
+          <p:cNvPr id="141" name="Group 140">
+            <a:extLst>
+              <a:ext uri="{FF2B5EF4-FFF2-40B4-BE49-F238E27FC236}">
+                <a16:creationId xmlns:a16="http://schemas.microsoft.com/office/drawing/2014/main" id="{D45CBCB7-0ACD-8BE4-CFBD-3A590C0737EF}"/>
+              </a:ext>
+            </a:extLst>
+          </p:cNvPr>
+          <p:cNvGrpSpPr/>
+          <p:nvPr/>
+        </p:nvGrpSpPr>
+        <p:grpSpPr>
+          <a:xfrm>
+            <a:off x="4221084" y="3239105"/>
+            <a:ext cx="1539676" cy="270000"/>
+            <a:chOff x="408168" y="1846751"/>
+            <a:chExt cx="2052901" cy="360000"/>
+          </a:xfrm>
+        </p:grpSpPr>
+        <p:sp>
+          <p:nvSpPr>
+            <p:cNvPr id="142" name="Rectangle 141">
+              <a:extLst>
+                <a:ext uri="{FF2B5EF4-FFF2-40B4-BE49-F238E27FC236}">
+                  <a16:creationId xmlns:a16="http://schemas.microsoft.com/office/drawing/2014/main" id="{52A3E69A-7E77-74DE-BE04-D1C79B08DCE2}"/>
+                </a:ext>
+              </a:extLst>
+            </p:cNvPr>
+            <p:cNvSpPr/>
+            <p:nvPr/>
+          </p:nvSpPr>
+          <p:spPr>
+            <a:xfrm flipH="1">
+              <a:off x="411469" y="1846751"/>
+              <a:ext cx="2049600" cy="360000"/>
+            </a:xfrm>
+            <a:prstGeom prst="rect">
+              <a:avLst/>
+            </a:prstGeom>
+            <a:solidFill>
+              <a:schemeClr val="bg2"/>
+            </a:solidFill>
+            <a:ln w="12700">
+              <a:solidFill>
+                <a:schemeClr val="bg2">
+                  <a:lumMod val="90000"/>
+                </a:schemeClr>
+              </a:solidFill>
+            </a:ln>
+          </p:spPr>
+          <p:style>
+            <a:lnRef idx="2">
+              <a:schemeClr val="accent1">
+                <a:shade val="15000"/>
+              </a:schemeClr>
+            </a:lnRef>
+            <a:fillRef idx="1">
+              <a:schemeClr val="accent1"/>
+            </a:fillRef>
+            <a:effectRef idx="0">
+              <a:schemeClr val="accent1"/>
+            </a:effectRef>
+            <a:fontRef idx="minor">
+              <a:schemeClr val="lt1"/>
+            </a:fontRef>
+          </p:style>
+          <p:txBody>
+            <a:bodyPr rtlCol="0" anchor="ctr"/>
+            <a:lstStyle/>
+            <a:p>
+              <a:pPr algn="ctr"/>
+              <a:endParaRPr lang="en-KR" sz="1350" dirty="0">
+                <a:solidFill>
+                  <a:schemeClr val="bg1">
+                    <a:lumMod val="65000"/>
+                  </a:schemeClr>
+                </a:solidFill>
+              </a:endParaRPr>
+            </a:p>
+          </p:txBody>
+        </p:sp>
+        <p:sp>
+          <p:nvSpPr>
+            <p:cNvPr id="143" name="TextBox 142">
+              <a:extLst>
+                <a:ext uri="{FF2B5EF4-FFF2-40B4-BE49-F238E27FC236}">
+                  <a16:creationId xmlns:a16="http://schemas.microsoft.com/office/drawing/2014/main" id="{F09CB65D-1AA8-A50D-13AA-0E0CA26829E9}"/>
+                </a:ext>
+              </a:extLst>
+            </p:cNvPr>
+            <p:cNvSpPr txBox="1"/>
+            <p:nvPr/>
+          </p:nvSpPr>
+          <p:spPr>
+            <a:xfrm>
+              <a:off x="408168" y="1849564"/>
+              <a:ext cx="1739446" cy="307413"/>
+            </a:xfrm>
+            <a:prstGeom prst="rect">
+              <a:avLst/>
+            </a:prstGeom>
+            <a:noFill/>
+          </p:spPr>
+          <p:txBody>
+            <a:bodyPr wrap="square" lIns="67500" tIns="67500" rIns="67500" bIns="35100" rtlCol="0">
+              <a:spAutoFit/>
+            </a:bodyPr>
+            <a:lstStyle/>
+            <a:p>
+              <a:r>
+                <a:rPr lang="en-US" sz="825" b="1" dirty="0" err="1">
+                  <a:solidFill>
+                    <a:schemeClr val="bg1">
+                      <a:lumMod val="65000"/>
+                    </a:schemeClr>
+                  </a:solidFill>
+                  <a:latin typeface="Cascadia Code" panose="020B0609020000020004" pitchFamily="34" charset="0"/>
+                  <a:ea typeface="Cascadia Code" panose="020B0609020000020004" pitchFamily="34" charset="0"/>
+                  <a:cs typeface="Cascadia Code" panose="020B0609020000020004" pitchFamily="34" charset="0"/>
+                </a:rPr>
+                <a:t>passengers_off</a:t>
+              </a:r>
+              <a:endParaRPr lang="en-US" sz="825" b="1" dirty="0">
+                <a:solidFill>
+                  <a:schemeClr val="bg1">
+                    <a:lumMod val="65000"/>
+                  </a:schemeClr>
+                </a:solidFill>
+                <a:latin typeface="Cascadia Code" panose="020B0609020000020004" pitchFamily="34" charset="0"/>
+                <a:ea typeface="Cascadia Code" panose="020B0609020000020004" pitchFamily="34" charset="0"/>
+                <a:cs typeface="Cascadia Code" panose="020B0609020000020004" pitchFamily="34" charset="0"/>
+              </a:endParaRPr>
+            </a:p>
+          </p:txBody>
+        </p:sp>
+      </p:grpSp>
+      <p:grpSp>
+        <p:nvGrpSpPr>
+          <p:cNvPr id="10" name="Group 9">
+            <a:extLst>
+              <a:ext uri="{FF2B5EF4-FFF2-40B4-BE49-F238E27FC236}">
+                <a16:creationId xmlns:a16="http://schemas.microsoft.com/office/drawing/2014/main" id="{579B1A6D-7FB3-6B92-82C3-1D778AB1AA74}"/>
+              </a:ext>
+            </a:extLst>
+          </p:cNvPr>
+          <p:cNvGrpSpPr/>
+          <p:nvPr/>
+        </p:nvGrpSpPr>
+        <p:grpSpPr>
+          <a:xfrm>
+            <a:off x="4221084" y="3889178"/>
+            <a:ext cx="1541476" cy="762003"/>
+            <a:chOff x="4221084" y="3606780"/>
+            <a:chExt cx="1541476" cy="762003"/>
+          </a:xfrm>
+        </p:grpSpPr>
         <p:sp>
           <p:nvSpPr>
             <p:cNvPr id="144" name="Rectangle 143">
@@ -21469,7 +22471,7 @@
           </p:nvSpPr>
           <p:spPr>
             <a:xfrm flipH="1">
-              <a:off x="4223560" y="2637430"/>
+              <a:off x="4223560" y="3607383"/>
               <a:ext cx="1539000" cy="761400"/>
             </a:xfrm>
             <a:prstGeom prst="rect">
@@ -21525,7 +22527,7 @@
           </p:nvSpPr>
           <p:spPr>
             <a:xfrm>
-              <a:off x="4221084" y="2639538"/>
+              <a:off x="4221084" y="3609491"/>
               <a:ext cx="988796" cy="357518"/>
             </a:xfrm>
             <a:prstGeom prst="rect">
@@ -21594,7 +22596,7 @@
           </p:nvSpPr>
           <p:spPr>
             <a:xfrm>
-              <a:off x="4223559" y="3020139"/>
+              <a:off x="4223559" y="3990092"/>
               <a:ext cx="1539000" cy="368241"/>
             </a:xfrm>
             <a:prstGeom prst="rect">
@@ -21752,7 +22754,7 @@
           </p:nvSpPr>
           <p:spPr>
             <a:xfrm>
-              <a:off x="4773765" y="2636827"/>
+              <a:off x="4773765" y="3606780"/>
               <a:ext cx="988795" cy="357518"/>
             </a:xfrm>
             <a:prstGeom prst="rect">
@@ -21809,7 +22811,7 @@
         <p:spPr>
           <a:xfrm>
             <a:off x="203075" y="815251"/>
-            <a:ext cx="4497051" cy="554447"/>
+            <a:ext cx="6451850" cy="395749"/>
           </a:xfrm>
           <a:prstGeom prst="rect">
             <a:avLst/>
@@ -22164,6 +23166,387 @@
           </a:p>
         </p:txBody>
       </p:sp>
+      <p:grpSp>
+        <p:nvGrpSpPr>
+          <p:cNvPr id="11" name="Group 10">
+            <a:extLst>
+              <a:ext uri="{FF2B5EF4-FFF2-40B4-BE49-F238E27FC236}">
+                <a16:creationId xmlns:a16="http://schemas.microsoft.com/office/drawing/2014/main" id="{3CB5A03B-724B-439E-2263-F4E7E187C2CB}"/>
+              </a:ext>
+            </a:extLst>
+          </p:cNvPr>
+          <p:cNvGrpSpPr/>
+          <p:nvPr/>
+        </p:nvGrpSpPr>
+        <p:grpSpPr>
+          <a:xfrm>
+            <a:off x="303649" y="2923811"/>
+            <a:ext cx="1539676" cy="270000"/>
+            <a:chOff x="408168" y="1846751"/>
+            <a:chExt cx="2052901" cy="360000"/>
+          </a:xfrm>
+        </p:grpSpPr>
+        <p:sp>
+          <p:nvSpPr>
+            <p:cNvPr id="12" name="Rectangle 11">
+              <a:extLst>
+                <a:ext uri="{FF2B5EF4-FFF2-40B4-BE49-F238E27FC236}">
+                  <a16:creationId xmlns:a16="http://schemas.microsoft.com/office/drawing/2014/main" id="{299539E1-E63D-B46E-61DB-3D97E499A529}"/>
+                </a:ext>
+              </a:extLst>
+            </p:cNvPr>
+            <p:cNvSpPr/>
+            <p:nvPr/>
+          </p:nvSpPr>
+          <p:spPr>
+            <a:xfrm flipH="1">
+              <a:off x="411469" y="1846751"/>
+              <a:ext cx="2049600" cy="360000"/>
+            </a:xfrm>
+            <a:prstGeom prst="rect">
+              <a:avLst/>
+            </a:prstGeom>
+            <a:solidFill>
+              <a:schemeClr val="bg2"/>
+            </a:solidFill>
+            <a:ln w="12700">
+              <a:solidFill>
+                <a:schemeClr val="bg2">
+                  <a:lumMod val="90000"/>
+                </a:schemeClr>
+              </a:solidFill>
+            </a:ln>
+          </p:spPr>
+          <p:style>
+            <a:lnRef idx="2">
+              <a:schemeClr val="accent1">
+                <a:shade val="15000"/>
+              </a:schemeClr>
+            </a:lnRef>
+            <a:fillRef idx="1">
+              <a:schemeClr val="accent1"/>
+            </a:fillRef>
+            <a:effectRef idx="0">
+              <a:schemeClr val="accent1"/>
+            </a:effectRef>
+            <a:fontRef idx="minor">
+              <a:schemeClr val="lt1"/>
+            </a:fontRef>
+          </p:style>
+          <p:txBody>
+            <a:bodyPr rtlCol="0" anchor="ctr"/>
+            <a:lstStyle/>
+            <a:p>
+              <a:pPr algn="ctr"/>
+              <a:endParaRPr lang="en-KR" sz="1350" dirty="0">
+                <a:solidFill>
+                  <a:schemeClr val="bg1">
+                    <a:lumMod val="65000"/>
+                  </a:schemeClr>
+                </a:solidFill>
+              </a:endParaRPr>
+            </a:p>
+          </p:txBody>
+        </p:sp>
+        <p:sp>
+          <p:nvSpPr>
+            <p:cNvPr id="16" name="TextBox 15">
+              <a:extLst>
+                <a:ext uri="{FF2B5EF4-FFF2-40B4-BE49-F238E27FC236}">
+                  <a16:creationId xmlns:a16="http://schemas.microsoft.com/office/drawing/2014/main" id="{737555A6-6166-9DCC-C95E-9AE5626AF433}"/>
+                </a:ext>
+              </a:extLst>
+            </p:cNvPr>
+            <p:cNvSpPr txBox="1"/>
+            <p:nvPr/>
+          </p:nvSpPr>
+          <p:spPr>
+            <a:xfrm>
+              <a:off x="408168" y="1849564"/>
+              <a:ext cx="1186486" cy="307413"/>
+            </a:xfrm>
+            <a:prstGeom prst="rect">
+              <a:avLst/>
+            </a:prstGeom>
+            <a:noFill/>
+          </p:spPr>
+          <p:txBody>
+            <a:bodyPr wrap="square" lIns="67500" tIns="67500" rIns="67500" bIns="35100" rtlCol="0">
+              <a:spAutoFit/>
+            </a:bodyPr>
+            <a:lstStyle/>
+            <a:p>
+              <a:r>
+                <a:rPr lang="en-US" sz="825" b="1" dirty="0">
+                  <a:solidFill>
+                    <a:schemeClr val="bg1">
+                      <a:lumMod val="65000"/>
+                    </a:schemeClr>
+                  </a:solidFill>
+                  <a:latin typeface="Cascadia Code" panose="020B0609020000020004" pitchFamily="34" charset="0"/>
+                  <a:ea typeface="Cascadia Code" panose="020B0609020000020004" pitchFamily="34" charset="0"/>
+                  <a:cs typeface="Cascadia Code" panose="020B0609020000020004" pitchFamily="34" charset="0"/>
+                </a:rPr>
+                <a:t>timestamp</a:t>
+              </a:r>
+            </a:p>
+          </p:txBody>
+        </p:sp>
+      </p:grpSp>
+      <p:grpSp>
+        <p:nvGrpSpPr>
+          <p:cNvPr id="17" name="Group 16">
+            <a:extLst>
+              <a:ext uri="{FF2B5EF4-FFF2-40B4-BE49-F238E27FC236}">
+                <a16:creationId xmlns:a16="http://schemas.microsoft.com/office/drawing/2014/main" id="{B5AA7AEC-B00A-A601-B360-7F58A6A32A22}"/>
+              </a:ext>
+            </a:extLst>
+          </p:cNvPr>
+          <p:cNvGrpSpPr/>
+          <p:nvPr/>
+        </p:nvGrpSpPr>
+        <p:grpSpPr>
+          <a:xfrm>
+            <a:off x="2257994" y="3886008"/>
+            <a:ext cx="1539676" cy="270000"/>
+            <a:chOff x="408168" y="1846751"/>
+            <a:chExt cx="2052901" cy="360000"/>
+          </a:xfrm>
+        </p:grpSpPr>
+        <p:sp>
+          <p:nvSpPr>
+            <p:cNvPr id="19" name="Rectangle 18">
+              <a:extLst>
+                <a:ext uri="{FF2B5EF4-FFF2-40B4-BE49-F238E27FC236}">
+                  <a16:creationId xmlns:a16="http://schemas.microsoft.com/office/drawing/2014/main" id="{67BFCC86-2469-6688-E10A-5F04B1F39470}"/>
+                </a:ext>
+              </a:extLst>
+            </p:cNvPr>
+            <p:cNvSpPr/>
+            <p:nvPr/>
+          </p:nvSpPr>
+          <p:spPr>
+            <a:xfrm flipH="1">
+              <a:off x="411469" y="1846751"/>
+              <a:ext cx="2049600" cy="360000"/>
+            </a:xfrm>
+            <a:prstGeom prst="rect">
+              <a:avLst/>
+            </a:prstGeom>
+            <a:solidFill>
+              <a:schemeClr val="bg2"/>
+            </a:solidFill>
+            <a:ln w="12700">
+              <a:solidFill>
+                <a:schemeClr val="bg2">
+                  <a:lumMod val="90000"/>
+                </a:schemeClr>
+              </a:solidFill>
+            </a:ln>
+          </p:spPr>
+          <p:style>
+            <a:lnRef idx="2">
+              <a:schemeClr val="accent1">
+                <a:shade val="15000"/>
+              </a:schemeClr>
+            </a:lnRef>
+            <a:fillRef idx="1">
+              <a:schemeClr val="accent1"/>
+            </a:fillRef>
+            <a:effectRef idx="0">
+              <a:schemeClr val="accent1"/>
+            </a:effectRef>
+            <a:fontRef idx="minor">
+              <a:schemeClr val="lt1"/>
+            </a:fontRef>
+          </p:style>
+          <p:txBody>
+            <a:bodyPr rtlCol="0" anchor="ctr"/>
+            <a:lstStyle/>
+            <a:p>
+              <a:pPr algn="ctr"/>
+              <a:endParaRPr lang="en-KR" sz="1350" dirty="0">
+                <a:solidFill>
+                  <a:schemeClr val="bg1">
+                    <a:lumMod val="65000"/>
+                  </a:schemeClr>
+                </a:solidFill>
+              </a:endParaRPr>
+            </a:p>
+          </p:txBody>
+        </p:sp>
+        <p:sp>
+          <p:nvSpPr>
+            <p:cNvPr id="20" name="TextBox 19">
+              <a:extLst>
+                <a:ext uri="{FF2B5EF4-FFF2-40B4-BE49-F238E27FC236}">
+                  <a16:creationId xmlns:a16="http://schemas.microsoft.com/office/drawing/2014/main" id="{6628DB4D-9B3E-25D3-8840-DD5708BED008}"/>
+                </a:ext>
+              </a:extLst>
+            </p:cNvPr>
+            <p:cNvSpPr txBox="1"/>
+            <p:nvPr/>
+          </p:nvSpPr>
+          <p:spPr>
+            <a:xfrm>
+              <a:off x="408168" y="1849564"/>
+              <a:ext cx="1186486" cy="307413"/>
+            </a:xfrm>
+            <a:prstGeom prst="rect">
+              <a:avLst/>
+            </a:prstGeom>
+            <a:noFill/>
+          </p:spPr>
+          <p:txBody>
+            <a:bodyPr wrap="square" lIns="67500" tIns="67500" rIns="67500" bIns="35100" rtlCol="0">
+              <a:spAutoFit/>
+            </a:bodyPr>
+            <a:lstStyle/>
+            <a:p>
+              <a:r>
+                <a:rPr lang="en-US" sz="825" b="1" dirty="0">
+                  <a:solidFill>
+                    <a:schemeClr val="bg1">
+                      <a:lumMod val="65000"/>
+                    </a:schemeClr>
+                  </a:solidFill>
+                  <a:latin typeface="Cascadia Code" panose="020B0609020000020004" pitchFamily="34" charset="0"/>
+                  <a:ea typeface="Cascadia Code" panose="020B0609020000020004" pitchFamily="34" charset="0"/>
+                  <a:cs typeface="Cascadia Code" panose="020B0609020000020004" pitchFamily="34" charset="0"/>
+                </a:rPr>
+                <a:t>timestamp</a:t>
+              </a:r>
+            </a:p>
+          </p:txBody>
+        </p:sp>
+      </p:grpSp>
+      <p:grpSp>
+        <p:nvGrpSpPr>
+          <p:cNvPr id="21" name="Group 20">
+            <a:extLst>
+              <a:ext uri="{FF2B5EF4-FFF2-40B4-BE49-F238E27FC236}">
+                <a16:creationId xmlns:a16="http://schemas.microsoft.com/office/drawing/2014/main" id="{9A8C1517-126F-BF74-1B56-A0C09F84DBCD}"/>
+              </a:ext>
+            </a:extLst>
+          </p:cNvPr>
+          <p:cNvGrpSpPr/>
+          <p:nvPr/>
+        </p:nvGrpSpPr>
+        <p:grpSpPr>
+          <a:xfrm>
+            <a:off x="4218607" y="3566041"/>
+            <a:ext cx="1539676" cy="270000"/>
+            <a:chOff x="408168" y="1846751"/>
+            <a:chExt cx="2052901" cy="360000"/>
+          </a:xfrm>
+        </p:grpSpPr>
+        <p:sp>
+          <p:nvSpPr>
+            <p:cNvPr id="22" name="Rectangle 21">
+              <a:extLst>
+                <a:ext uri="{FF2B5EF4-FFF2-40B4-BE49-F238E27FC236}">
+                  <a16:creationId xmlns:a16="http://schemas.microsoft.com/office/drawing/2014/main" id="{17833FC9-98F8-E8F8-02E2-15BDA3FA5AAE}"/>
+                </a:ext>
+              </a:extLst>
+            </p:cNvPr>
+            <p:cNvSpPr/>
+            <p:nvPr/>
+          </p:nvSpPr>
+          <p:spPr>
+            <a:xfrm flipH="1">
+              <a:off x="411469" y="1846751"/>
+              <a:ext cx="2049600" cy="360000"/>
+            </a:xfrm>
+            <a:prstGeom prst="rect">
+              <a:avLst/>
+            </a:prstGeom>
+            <a:solidFill>
+              <a:schemeClr val="bg2"/>
+            </a:solidFill>
+            <a:ln w="12700">
+              <a:solidFill>
+                <a:schemeClr val="bg2">
+                  <a:lumMod val="90000"/>
+                </a:schemeClr>
+              </a:solidFill>
+            </a:ln>
+          </p:spPr>
+          <p:style>
+            <a:lnRef idx="2">
+              <a:schemeClr val="accent1">
+                <a:shade val="15000"/>
+              </a:schemeClr>
+            </a:lnRef>
+            <a:fillRef idx="1">
+              <a:schemeClr val="accent1"/>
+            </a:fillRef>
+            <a:effectRef idx="0">
+              <a:schemeClr val="accent1"/>
+            </a:effectRef>
+            <a:fontRef idx="minor">
+              <a:schemeClr val="lt1"/>
+            </a:fontRef>
+          </p:style>
+          <p:txBody>
+            <a:bodyPr rtlCol="0" anchor="ctr"/>
+            <a:lstStyle/>
+            <a:p>
+              <a:pPr algn="ctr"/>
+              <a:endParaRPr lang="en-KR" sz="1350" dirty="0">
+                <a:solidFill>
+                  <a:schemeClr val="bg1">
+                    <a:lumMod val="65000"/>
+                  </a:schemeClr>
+                </a:solidFill>
+              </a:endParaRPr>
+            </a:p>
+          </p:txBody>
+        </p:sp>
+        <p:sp>
+          <p:nvSpPr>
+            <p:cNvPr id="23" name="TextBox 22">
+              <a:extLst>
+                <a:ext uri="{FF2B5EF4-FFF2-40B4-BE49-F238E27FC236}">
+                  <a16:creationId xmlns:a16="http://schemas.microsoft.com/office/drawing/2014/main" id="{2349B135-A5FF-4EB2-16B2-00BD982B1700}"/>
+                </a:ext>
+              </a:extLst>
+            </p:cNvPr>
+            <p:cNvSpPr txBox="1"/>
+            <p:nvPr/>
+          </p:nvSpPr>
+          <p:spPr>
+            <a:xfrm>
+              <a:off x="408168" y="1849564"/>
+              <a:ext cx="1739446" cy="307413"/>
+            </a:xfrm>
+            <a:prstGeom prst="rect">
+              <a:avLst/>
+            </a:prstGeom>
+            <a:noFill/>
+          </p:spPr>
+          <p:txBody>
+            <a:bodyPr wrap="square" lIns="67500" tIns="67500" rIns="67500" bIns="35100" rtlCol="0">
+              <a:spAutoFit/>
+            </a:bodyPr>
+            <a:lstStyle/>
+            <a:p>
+              <a:r>
+                <a:rPr lang="en-US" sz="825" b="1" dirty="0">
+                  <a:solidFill>
+                    <a:schemeClr val="bg1">
+                      <a:lumMod val="65000"/>
+                    </a:schemeClr>
+                  </a:solidFill>
+                  <a:latin typeface="Cascadia Code" panose="020B0609020000020004" pitchFamily="34" charset="0"/>
+                  <a:ea typeface="Cascadia Code" panose="020B0609020000020004" pitchFamily="34" charset="0"/>
+                  <a:cs typeface="Cascadia Code" panose="020B0609020000020004" pitchFamily="34" charset="0"/>
+                </a:rPr>
+                <a:t>timestamp</a:t>
+              </a:r>
+            </a:p>
+          </p:txBody>
+        </p:sp>
+      </p:grpSp>
     </p:spTree>
     <p:extLst>
       <p:ext uri="{BB962C8B-B14F-4D97-AF65-F5344CB8AC3E}">
